--- a/GITA/Pre-Acceleration/2026-5h-AI-for-Startups/day2-slides.pptx
+++ b/GITA/Pre-Acceleration/2026-5h-AI-for-Startups/day2-slides.pptx
@@ -3188,7 +3188,7 @@
             <a:avLst/>
           </a:prstGeom>
           <a:solidFill>
-            <a:srgbClr val="F59E0B"/>
+            <a:srgbClr val="4F46E5"/>
           </a:solidFill>
           <a:ln>
             <a:noFill/>
@@ -3232,7 +3232,7 @@
             <a:avLst/>
           </a:prstGeom>
           <a:solidFill>
-            <a:srgbClr val="D97706"/>
+            <a:srgbClr val="3730A3"/>
           </a:solidFill>
           <a:ln>
             <a:noFill/>
@@ -3291,7 +3291,7 @@
             <a:r>
               <a:rPr sz="3600" b="1" i="0">
                 <a:solidFill>
-                  <a:srgbClr val="D97706"/>
+                  <a:srgbClr val="3730A3"/>
                 </a:solidFill>
                 <a:ea typeface="Sylfaen"/>
                 <a:cs typeface="Sylfaen"/>
@@ -3373,7 +3373,7 @@
             <a:r>
               <a:rPr sz="1300" b="1" i="0">
                 <a:solidFill>
-                  <a:srgbClr val="D97706"/>
+                  <a:srgbClr val="3730A3"/>
                 </a:solidFill>
                 <a:ea typeface="Sylfaen"/>
                 <a:cs typeface="Sylfaen"/>
@@ -3414,7 +3414,7 @@
             <a:r>
               <a:rPr sz="1200" b="0" i="0">
                 <a:solidFill>
-                  <a:srgbClr val="1E293B"/>
+                  <a:srgbClr val="0F172A"/>
                 </a:solidFill>
                 <a:ea typeface="Sylfaen"/>
                 <a:cs typeface="Sylfaen"/>
@@ -3543,7 +3543,7 @@
             <a:avLst/>
           </a:prstGeom>
           <a:solidFill>
-            <a:srgbClr val="F59E0B"/>
+            <a:srgbClr val="4F46E5"/>
           </a:solidFill>
           <a:ln>
             <a:noFill/>
@@ -3587,7 +3587,7 @@
             <a:avLst/>
           </a:prstGeom>
           <a:solidFill>
-            <a:srgbClr val="F59E0B"/>
+            <a:srgbClr val="4F46E5"/>
           </a:solidFill>
           <a:ln>
             <a:noFill/>
@@ -3641,7 +3641,7 @@
             <a:r>
               <a:rPr sz="2600" b="1">
                 <a:solidFill>
-                  <a:srgbClr val="D97706"/>
+                  <a:srgbClr val="3730A3"/>
                 </a:solidFill>
                 <a:ea typeface="Sylfaen"/>
                 <a:cs typeface="Sylfaen"/>
@@ -3713,7 +3713,7 @@
             </a:avLst>
           </a:prstGeom>
           <a:solidFill>
-            <a:srgbClr val="F59E0B"/>
+            <a:srgbClr val="4F46E5"/>
           </a:solidFill>
           <a:ln>
             <a:noFill/>
@@ -3783,7 +3783,7 @@
             <a:r>
               <a:rPr sz="1300" b="0" i="0">
                 <a:solidFill>
-                  <a:srgbClr val="1E293B"/>
+                  <a:srgbClr val="0F172A"/>
                 </a:solidFill>
                 <a:ea typeface="Sylfaen"/>
                 <a:cs typeface="Sylfaen"/>
@@ -3809,7 +3809,7 @@
             <a:avLst/>
           </a:prstGeom>
           <a:solidFill>
-            <a:srgbClr val="D97706"/>
+            <a:srgbClr val="3730A3"/>
           </a:solidFill>
           <a:ln>
             <a:noFill/>
@@ -3916,7 +3916,7 @@
             <a:r>
               <a:rPr sz="1400" b="1" i="0">
                 <a:solidFill>
-                  <a:srgbClr val="1E293B"/>
+                  <a:srgbClr val="0F172A"/>
                 </a:solidFill>
                 <a:ea typeface="Sylfaen"/>
                 <a:cs typeface="Sylfaen"/>
@@ -3957,7 +3957,7 @@
             <a:r>
               <a:rPr sz="1300" b="1">
                 <a:solidFill>
-                  <a:srgbClr val="D97706"/>
+                  <a:srgbClr val="3730A3"/>
                 </a:solidFill>
                 <a:ea typeface="Sylfaen"/>
                 <a:cs typeface="Sylfaen"/>
@@ -3968,7 +3968,7 @@
             <a:r>
               <a:rPr sz="1300">
                 <a:solidFill>
-                  <a:srgbClr val="1E293B"/>
+                  <a:srgbClr val="0F172A"/>
                 </a:solidFill>
                 <a:ea typeface="Sylfaen"/>
                 <a:cs typeface="Sylfaen"/>
@@ -3986,7 +3986,7 @@
             <a:r>
               <a:rPr sz="1300" b="1">
                 <a:solidFill>
-                  <a:srgbClr val="D97706"/>
+                  <a:srgbClr val="3730A3"/>
                 </a:solidFill>
                 <a:ea typeface="Sylfaen"/>
                 <a:cs typeface="Sylfaen"/>
@@ -3997,7 +3997,7 @@
             <a:r>
               <a:rPr sz="1300">
                 <a:solidFill>
-                  <a:srgbClr val="1E293B"/>
+                  <a:srgbClr val="0F172A"/>
                 </a:solidFill>
                 <a:ea typeface="Sylfaen"/>
                 <a:cs typeface="Sylfaen"/>
@@ -4015,7 +4015,7 @@
             <a:r>
               <a:rPr sz="1300" b="1">
                 <a:solidFill>
-                  <a:srgbClr val="D97706"/>
+                  <a:srgbClr val="3730A3"/>
                 </a:solidFill>
                 <a:ea typeface="Sylfaen"/>
                 <a:cs typeface="Sylfaen"/>
@@ -4026,7 +4026,7 @@
             <a:r>
               <a:rPr sz="1300">
                 <a:solidFill>
-                  <a:srgbClr val="1E293B"/>
+                  <a:srgbClr val="0F172A"/>
                 </a:solidFill>
                 <a:ea typeface="Sylfaen"/>
                 <a:cs typeface="Sylfaen"/>
@@ -4052,7 +4052,7 @@
             <a:avLst/>
           </a:prstGeom>
           <a:solidFill>
-            <a:srgbClr val="D97706"/>
+            <a:srgbClr val="3730A3"/>
           </a:solidFill>
           <a:ln>
             <a:noFill/>
@@ -4102,7 +4102,7 @@
           </a:solidFill>
           <a:ln w="6350">
             <a:solidFill>
-              <a:srgbClr val="D97706"/>
+              <a:srgbClr val="3730A3"/>
             </a:solidFill>
           </a:ln>
           <a:effectLst/>
@@ -4144,7 +4144,7 @@
             <a:avLst/>
           </a:prstGeom>
           <a:solidFill>
-            <a:srgbClr val="D97706"/>
+            <a:srgbClr val="3730A3"/>
           </a:solidFill>
           <a:ln>
             <a:noFill/>
@@ -4297,7 +4297,7 @@
             <a:r>
               <a:rPr sz="1200">
                 <a:solidFill>
-                  <a:srgbClr val="1E293B"/>
+                  <a:srgbClr val="0F172A"/>
                 </a:solidFill>
                 <a:ea typeface="Consolas"/>
                 <a:cs typeface="Consolas"/>
@@ -4432,7 +4432,7 @@
             <a:r>
               <a:rPr sz="1000">
                 <a:solidFill>
-                  <a:srgbClr val="1E293B"/>
+                  <a:srgbClr val="0F172A"/>
                 </a:solidFill>
                 <a:ea typeface="Consolas"/>
                 <a:cs typeface="Consolas"/>
@@ -4450,7 +4450,7 @@
             <a:r>
               <a:rPr sz="1000">
                 <a:solidFill>
-                  <a:srgbClr val="1E293B"/>
+                  <a:srgbClr val="0F172A"/>
                 </a:solidFill>
                 <a:ea typeface="Consolas"/>
                 <a:cs typeface="Consolas"/>
@@ -4468,7 +4468,7 @@
             <a:r>
               <a:rPr sz="1000">
                 <a:solidFill>
-                  <a:srgbClr val="1E293B"/>
+                  <a:srgbClr val="0F172A"/>
                 </a:solidFill>
                 <a:ea typeface="Consolas"/>
                 <a:cs typeface="Consolas"/>
@@ -4486,7 +4486,7 @@
             <a:r>
               <a:rPr sz="1000">
                 <a:solidFill>
-                  <a:srgbClr val="1E293B"/>
+                  <a:srgbClr val="0F172A"/>
                 </a:solidFill>
                 <a:ea typeface="Consolas"/>
                 <a:cs typeface="Consolas"/>
@@ -4504,7 +4504,7 @@
             <a:r>
               <a:rPr sz="1000">
                 <a:solidFill>
-                  <a:srgbClr val="1E293B"/>
+                  <a:srgbClr val="0F172A"/>
                 </a:solidFill>
                 <a:ea typeface="Consolas"/>
                 <a:cs typeface="Consolas"/>
@@ -4522,7 +4522,7 @@
             <a:r>
               <a:rPr sz="1000">
                 <a:solidFill>
-                  <a:srgbClr val="1E293B"/>
+                  <a:srgbClr val="0F172A"/>
                 </a:solidFill>
                 <a:ea typeface="Consolas"/>
                 <a:cs typeface="Consolas"/>
@@ -4540,7 +4540,7 @@
             <a:r>
               <a:rPr sz="1000">
                 <a:solidFill>
-                  <a:srgbClr val="1E293B"/>
+                  <a:srgbClr val="0F172A"/>
                 </a:solidFill>
                 <a:ea typeface="Consolas"/>
                 <a:cs typeface="Consolas"/>
@@ -4558,7 +4558,7 @@
             <a:r>
               <a:rPr sz="1000">
                 <a:solidFill>
-                  <a:srgbClr val="1E293B"/>
+                  <a:srgbClr val="0F172A"/>
                 </a:solidFill>
                 <a:ea typeface="Consolas"/>
                 <a:cs typeface="Consolas"/>
@@ -4576,7 +4576,7 @@
             <a:r>
               <a:rPr sz="1000">
                 <a:solidFill>
-                  <a:srgbClr val="1E293B"/>
+                  <a:srgbClr val="0F172A"/>
                 </a:solidFill>
                 <a:ea typeface="Consolas"/>
                 <a:cs typeface="Consolas"/>
@@ -4749,7 +4749,7 @@
             <a:avLst/>
           </a:prstGeom>
           <a:solidFill>
-            <a:srgbClr val="F59E0B"/>
+            <a:srgbClr val="4F46E5"/>
           </a:solidFill>
           <a:ln>
             <a:noFill/>
@@ -4793,7 +4793,7 @@
             <a:avLst/>
           </a:prstGeom>
           <a:solidFill>
-            <a:srgbClr val="F59E0B"/>
+            <a:srgbClr val="4F46E5"/>
           </a:solidFill>
           <a:ln>
             <a:noFill/>
@@ -4847,7 +4847,7 @@
             <a:r>
               <a:rPr sz="2600" b="1">
                 <a:solidFill>
-                  <a:srgbClr val="D97706"/>
+                  <a:srgbClr val="3730A3"/>
                 </a:solidFill>
                 <a:ea typeface="Sylfaen"/>
                 <a:cs typeface="Sylfaen"/>
@@ -4919,7 +4919,7 @@
             </a:avLst>
           </a:prstGeom>
           <a:solidFill>
-            <a:srgbClr val="F59E0B"/>
+            <a:srgbClr val="4F46E5"/>
           </a:solidFill>
           <a:ln>
             <a:noFill/>
@@ -4989,7 +4989,7 @@
             <a:r>
               <a:rPr sz="1300" b="0" i="0">
                 <a:solidFill>
-                  <a:srgbClr val="1E293B"/>
+                  <a:srgbClr val="0F172A"/>
                 </a:solidFill>
                 <a:ea typeface="Sylfaen"/>
                 <a:cs typeface="Sylfaen"/>
@@ -5015,7 +5015,7 @@
             <a:avLst/>
           </a:prstGeom>
           <a:solidFill>
-            <a:srgbClr val="D97706"/>
+            <a:srgbClr val="3730A3"/>
           </a:solidFill>
           <a:ln>
             <a:noFill/>
@@ -5061,11 +5061,11 @@
             </a:avLst>
           </a:prstGeom>
           <a:solidFill>
-            <a:srgbClr val="FDF3D8"/>
+            <a:srgbClr val="EEF2FF"/>
           </a:solidFill>
           <a:ln w="6350">
             <a:solidFill>
-              <a:srgbClr val="D97706"/>
+              <a:srgbClr val="3730A3"/>
             </a:solidFill>
           </a:ln>
           <a:effectLst/>
@@ -5122,7 +5122,7 @@
             <a:r>
               <a:rPr sz="1400" b="1" i="0">
                 <a:solidFill>
-                  <a:srgbClr val="1E293B"/>
+                  <a:srgbClr val="0F172A"/>
                 </a:solidFill>
                 <a:ea typeface="Sylfaen"/>
                 <a:cs typeface="Sylfaen"/>
@@ -5163,7 +5163,7 @@
             <a:r>
               <a:rPr sz="1300" b="0" i="0">
                 <a:solidFill>
-                  <a:srgbClr val="1E293B"/>
+                  <a:srgbClr val="0F172A"/>
                 </a:solidFill>
                 <a:ea typeface="Sylfaen"/>
                 <a:cs typeface="Sylfaen"/>
@@ -5189,7 +5189,7 @@
             <a:avLst/>
           </a:prstGeom>
           <a:solidFill>
-            <a:srgbClr val="D97706"/>
+            <a:srgbClr val="3730A3"/>
           </a:solidFill>
           <a:ln>
             <a:noFill/>
@@ -5296,7 +5296,7 @@
             <a:r>
               <a:rPr sz="1400" b="1" i="0">
                 <a:solidFill>
-                  <a:srgbClr val="1E293B"/>
+                  <a:srgbClr val="0F172A"/>
                 </a:solidFill>
                 <a:ea typeface="Sylfaen"/>
                 <a:cs typeface="Sylfaen"/>
@@ -5337,7 +5337,7 @@
             <a:r>
               <a:rPr sz="1300" b="1">
                 <a:solidFill>
-                  <a:srgbClr val="D97706"/>
+                  <a:srgbClr val="3730A3"/>
                 </a:solidFill>
                 <a:ea typeface="Sylfaen"/>
                 <a:cs typeface="Sylfaen"/>
@@ -5348,7 +5348,7 @@
             <a:r>
               <a:rPr sz="1300">
                 <a:solidFill>
-                  <a:srgbClr val="1E293B"/>
+                  <a:srgbClr val="0F172A"/>
                 </a:solidFill>
                 <a:ea typeface="Sylfaen"/>
                 <a:cs typeface="Sylfaen"/>
@@ -5366,7 +5366,7 @@
             <a:r>
               <a:rPr sz="1300" b="1">
                 <a:solidFill>
-                  <a:srgbClr val="D97706"/>
+                  <a:srgbClr val="3730A3"/>
                 </a:solidFill>
                 <a:ea typeface="Sylfaen"/>
                 <a:cs typeface="Sylfaen"/>
@@ -5377,7 +5377,7 @@
             <a:r>
               <a:rPr sz="1300">
                 <a:solidFill>
-                  <a:srgbClr val="1E293B"/>
+                  <a:srgbClr val="0F172A"/>
                 </a:solidFill>
                 <a:ea typeface="Sylfaen"/>
                 <a:cs typeface="Sylfaen"/>
@@ -5395,7 +5395,7 @@
             <a:r>
               <a:rPr sz="1300" b="1">
                 <a:solidFill>
-                  <a:srgbClr val="D97706"/>
+                  <a:srgbClr val="3730A3"/>
                 </a:solidFill>
                 <a:ea typeface="Sylfaen"/>
                 <a:cs typeface="Sylfaen"/>
@@ -5406,7 +5406,7 @@
             <a:r>
               <a:rPr sz="1300">
                 <a:solidFill>
-                  <a:srgbClr val="1E293B"/>
+                  <a:srgbClr val="0F172A"/>
                 </a:solidFill>
                 <a:ea typeface="Sylfaen"/>
                 <a:cs typeface="Sylfaen"/>
@@ -5579,7 +5579,7 @@
             <a:avLst/>
           </a:prstGeom>
           <a:solidFill>
-            <a:srgbClr val="F59E0B"/>
+            <a:srgbClr val="4F46E5"/>
           </a:solidFill>
           <a:ln>
             <a:noFill/>
@@ -5623,7 +5623,7 @@
             <a:avLst/>
           </a:prstGeom>
           <a:solidFill>
-            <a:srgbClr val="F59E0B"/>
+            <a:srgbClr val="4F46E5"/>
           </a:solidFill>
           <a:ln>
             <a:noFill/>
@@ -5677,7 +5677,7 @@
             <a:r>
               <a:rPr sz="2600" b="1">
                 <a:solidFill>
-                  <a:srgbClr val="D97706"/>
+                  <a:srgbClr val="3730A3"/>
                 </a:solidFill>
                 <a:ea typeface="Sylfaen"/>
                 <a:cs typeface="Sylfaen"/>
@@ -5749,7 +5749,7 @@
             </a:avLst>
           </a:prstGeom>
           <a:solidFill>
-            <a:srgbClr val="F59E0B"/>
+            <a:srgbClr val="4F46E5"/>
           </a:solidFill>
           <a:ln>
             <a:noFill/>
@@ -5819,7 +5819,7 @@
             <a:r>
               <a:rPr sz="1300" b="0" i="0">
                 <a:solidFill>
-                  <a:srgbClr val="1E293B"/>
+                  <a:srgbClr val="0F172A"/>
                 </a:solidFill>
                 <a:ea typeface="Sylfaen"/>
                 <a:cs typeface="Sylfaen"/>
@@ -5845,7 +5845,7 @@
             <a:avLst/>
           </a:prstGeom>
           <a:solidFill>
-            <a:srgbClr val="F59E0B"/>
+            <a:srgbClr val="4F46E5"/>
           </a:solidFill>
           <a:ln>
             <a:noFill/>
@@ -5891,11 +5891,11 @@
             </a:avLst>
           </a:prstGeom>
           <a:solidFill>
-            <a:srgbClr val="FFF3E0"/>
+            <a:srgbClr val="FFF7ED"/>
           </a:solidFill>
           <a:ln w="9525">
             <a:solidFill>
-              <a:srgbClr val="F59E0B"/>
+              <a:srgbClr val="4F46E5"/>
             </a:solidFill>
           </a:ln>
           <a:effectLst/>
@@ -5952,7 +5952,7 @@
             <a:r>
               <a:rPr sz="1400" b="1" i="0">
                 <a:solidFill>
-                  <a:srgbClr val="1E293B"/>
+                  <a:srgbClr val="0F172A"/>
                 </a:solidFill>
                 <a:ea typeface="Sylfaen"/>
                 <a:cs typeface="Sylfaen"/>
@@ -5993,7 +5993,7 @@
             <a:r>
               <a:rPr sz="1300" b="0" i="0">
                 <a:solidFill>
-                  <a:srgbClr val="1E293B"/>
+                  <a:srgbClr val="0F172A"/>
                 </a:solidFill>
                 <a:ea typeface="Sylfaen"/>
                 <a:cs typeface="Sylfaen"/>
@@ -6019,7 +6019,7 @@
             <a:avLst/>
           </a:prstGeom>
           <a:solidFill>
-            <a:srgbClr val="D97706"/>
+            <a:srgbClr val="3730A3"/>
           </a:solidFill>
           <a:ln>
             <a:noFill/>
@@ -6126,7 +6126,7 @@
             <a:r>
               <a:rPr sz="1400" b="1" i="0">
                 <a:solidFill>
-                  <a:srgbClr val="1E293B"/>
+                  <a:srgbClr val="0F172A"/>
                 </a:solidFill>
                 <a:ea typeface="Sylfaen"/>
                 <a:cs typeface="Sylfaen"/>
@@ -6167,7 +6167,7 @@
             <a:r>
               <a:rPr sz="1300" b="0" i="0">
                 <a:solidFill>
-                  <a:srgbClr val="1E293B"/>
+                  <a:srgbClr val="0F172A"/>
                 </a:solidFill>
                 <a:ea typeface="Sylfaen"/>
                 <a:cs typeface="Sylfaen"/>
@@ -6193,7 +6193,7 @@
             <a:avLst/>
           </a:prstGeom>
           <a:solidFill>
-            <a:srgbClr val="D97706"/>
+            <a:srgbClr val="3730A3"/>
           </a:solidFill>
           <a:ln>
             <a:noFill/>
@@ -6300,7 +6300,7 @@
             <a:r>
               <a:rPr sz="1400" b="1" i="0">
                 <a:solidFill>
-                  <a:srgbClr val="1E293B"/>
+                  <a:srgbClr val="0F172A"/>
                 </a:solidFill>
                 <a:ea typeface="Sylfaen"/>
                 <a:cs typeface="Sylfaen"/>
@@ -6341,7 +6341,7 @@
             <a:r>
               <a:rPr sz="1300" b="0" i="0">
                 <a:solidFill>
-                  <a:srgbClr val="1E293B"/>
+                  <a:srgbClr val="0F172A"/>
                 </a:solidFill>
                 <a:ea typeface="Sylfaen"/>
                 <a:cs typeface="Sylfaen"/>
@@ -6367,7 +6367,7 @@
             <a:avLst/>
           </a:prstGeom>
           <a:solidFill>
-            <a:srgbClr val="D97706"/>
+            <a:srgbClr val="3730A3"/>
           </a:solidFill>
           <a:ln>
             <a:noFill/>
@@ -6474,7 +6474,7 @@
             <a:r>
               <a:rPr sz="1400" b="1" i="0">
                 <a:solidFill>
-                  <a:srgbClr val="1E293B"/>
+                  <a:srgbClr val="0F172A"/>
                 </a:solidFill>
                 <a:ea typeface="Sylfaen"/>
                 <a:cs typeface="Sylfaen"/>
@@ -6515,7 +6515,7 @@
             <a:r>
               <a:rPr sz="1300" b="0" i="0">
                 <a:solidFill>
-                  <a:srgbClr val="1E293B"/>
+                  <a:srgbClr val="0F172A"/>
                 </a:solidFill>
                 <a:ea typeface="Sylfaen"/>
                 <a:cs typeface="Sylfaen"/>
@@ -6688,7 +6688,7 @@
             <a:avLst/>
           </a:prstGeom>
           <a:solidFill>
-            <a:srgbClr val="F59E0B"/>
+            <a:srgbClr val="4F46E5"/>
           </a:solidFill>
           <a:ln>
             <a:noFill/>
@@ -6732,7 +6732,7 @@
             <a:avLst/>
           </a:prstGeom>
           <a:solidFill>
-            <a:srgbClr val="F59E0B"/>
+            <a:srgbClr val="4F46E5"/>
           </a:solidFill>
           <a:ln>
             <a:noFill/>
@@ -6786,7 +6786,7 @@
             <a:r>
               <a:rPr sz="2600" b="1">
                 <a:solidFill>
-                  <a:srgbClr val="D97706"/>
+                  <a:srgbClr val="3730A3"/>
                 </a:solidFill>
                 <a:ea typeface="Sylfaen"/>
                 <a:cs typeface="Sylfaen"/>
@@ -6858,7 +6858,7 @@
             </a:avLst>
           </a:prstGeom>
           <a:solidFill>
-            <a:srgbClr val="F59E0B"/>
+            <a:srgbClr val="4F46E5"/>
           </a:solidFill>
           <a:ln>
             <a:noFill/>
@@ -6928,7 +6928,7 @@
             <a:r>
               <a:rPr sz="1300" b="0" i="0">
                 <a:solidFill>
-                  <a:srgbClr val="1E293B"/>
+                  <a:srgbClr val="0F172A"/>
                 </a:solidFill>
                 <a:ea typeface="Sylfaen"/>
                 <a:cs typeface="Sylfaen"/>
@@ -6954,7 +6954,7 @@
             <a:avLst/>
           </a:prstGeom>
           <a:solidFill>
-            <a:srgbClr val="D97706"/>
+            <a:srgbClr val="3730A3"/>
           </a:solidFill>
           <a:ln>
             <a:noFill/>
@@ -7000,11 +7000,11 @@
             </a:avLst>
           </a:prstGeom>
           <a:solidFill>
-            <a:srgbClr val="FDF3D8"/>
+            <a:srgbClr val="EEF2FF"/>
           </a:solidFill>
           <a:ln w="9525">
             <a:solidFill>
-              <a:srgbClr val="D97706"/>
+              <a:srgbClr val="3730A3"/>
             </a:solidFill>
           </a:ln>
           <a:effectLst/>
@@ -7061,7 +7061,7 @@
             <a:r>
               <a:rPr sz="1400" b="1" i="0">
                 <a:solidFill>
-                  <a:srgbClr val="1E293B"/>
+                  <a:srgbClr val="0F172A"/>
                 </a:solidFill>
                 <a:ea typeface="Sylfaen"/>
                 <a:cs typeface="Sylfaen"/>
@@ -7102,7 +7102,7 @@
             <a:r>
               <a:rPr sz="1300" b="0" i="0">
                 <a:solidFill>
-                  <a:srgbClr val="1E293B"/>
+                  <a:srgbClr val="0F172A"/>
                 </a:solidFill>
                 <a:ea typeface="Sylfaen"/>
                 <a:cs typeface="Sylfaen"/>
@@ -7128,7 +7128,7 @@
             <a:avLst/>
           </a:prstGeom>
           <a:solidFill>
-            <a:srgbClr val="D97706"/>
+            <a:srgbClr val="3730A3"/>
           </a:solidFill>
           <a:ln>
             <a:noFill/>
@@ -7235,7 +7235,7 @@
             <a:r>
               <a:rPr sz="900" b="1" i="0">
                 <a:solidFill>
-                  <a:srgbClr val="D97706"/>
+                  <a:srgbClr val="3730A3"/>
                 </a:solidFill>
                 <a:ea typeface="Consolas"/>
                 <a:cs typeface="Consolas"/>
@@ -7322,7 +7322,7 @@
             <a:r>
               <a:rPr sz="800">
                 <a:solidFill>
-                  <a:srgbClr val="1E293B"/>
+                  <a:srgbClr val="0F172A"/>
                 </a:solidFill>
                 <a:ea typeface="Consolas"/>
                 <a:cs typeface="Consolas"/>
@@ -7340,7 +7340,7 @@
             <a:r>
               <a:rPr sz="800">
                 <a:solidFill>
-                  <a:srgbClr val="1E293B"/>
+                  <a:srgbClr val="0F172A"/>
                 </a:solidFill>
                 <a:ea typeface="Consolas"/>
                 <a:cs typeface="Consolas"/>
@@ -7358,7 +7358,7 @@
             <a:r>
               <a:rPr sz="800">
                 <a:solidFill>
-                  <a:srgbClr val="1E293B"/>
+                  <a:srgbClr val="0F172A"/>
                 </a:solidFill>
                 <a:ea typeface="Consolas"/>
                 <a:cs typeface="Consolas"/>
@@ -7376,7 +7376,7 @@
             <a:r>
               <a:rPr sz="800">
                 <a:solidFill>
-                  <a:srgbClr val="1E293B"/>
+                  <a:srgbClr val="0F172A"/>
                 </a:solidFill>
                 <a:ea typeface="Consolas"/>
                 <a:cs typeface="Consolas"/>
@@ -7394,7 +7394,7 @@
             <a:r>
               <a:rPr sz="800">
                 <a:solidFill>
-                  <a:srgbClr val="1E293B"/>
+                  <a:srgbClr val="0F172A"/>
                 </a:solidFill>
                 <a:ea typeface="Consolas"/>
                 <a:cs typeface="Consolas"/>
@@ -7567,7 +7567,7 @@
             <a:avLst/>
           </a:prstGeom>
           <a:solidFill>
-            <a:srgbClr val="F59E0B"/>
+            <a:srgbClr val="4F46E5"/>
           </a:solidFill>
           <a:ln>
             <a:noFill/>
@@ -7611,7 +7611,7 @@
             <a:avLst/>
           </a:prstGeom>
           <a:solidFill>
-            <a:srgbClr val="F59E0B"/>
+            <a:srgbClr val="4F46E5"/>
           </a:solidFill>
           <a:ln>
             <a:noFill/>
@@ -7665,7 +7665,7 @@
             <a:r>
               <a:rPr sz="2600" b="1">
                 <a:solidFill>
-                  <a:srgbClr val="D97706"/>
+                  <a:srgbClr val="3730A3"/>
                 </a:solidFill>
                 <a:ea typeface="Sylfaen"/>
                 <a:cs typeface="Sylfaen"/>
@@ -7737,7 +7737,7 @@
             </a:avLst>
           </a:prstGeom>
           <a:solidFill>
-            <a:srgbClr val="F59E0B"/>
+            <a:srgbClr val="4F46E5"/>
           </a:solidFill>
           <a:ln>
             <a:noFill/>
@@ -7807,7 +7807,7 @@
             <a:r>
               <a:rPr sz="1300" b="0" i="0">
                 <a:solidFill>
-                  <a:srgbClr val="1E293B"/>
+                  <a:srgbClr val="0F172A"/>
                 </a:solidFill>
                 <a:ea typeface="Sylfaen"/>
                 <a:cs typeface="Sylfaen"/>
@@ -7833,7 +7833,7 @@
             <a:avLst/>
           </a:prstGeom>
           <a:solidFill>
-            <a:srgbClr val="D97706"/>
+            <a:srgbClr val="3730A3"/>
           </a:solidFill>
           <a:ln>
             <a:noFill/>
@@ -7940,7 +7940,7 @@
             <a:r>
               <a:rPr sz="1400" b="1" i="0">
                 <a:solidFill>
-                  <a:srgbClr val="1E293B"/>
+                  <a:srgbClr val="0F172A"/>
                 </a:solidFill>
                 <a:ea typeface="Sylfaen"/>
                 <a:cs typeface="Sylfaen"/>
@@ -7981,7 +7981,7 @@
             <a:r>
               <a:rPr sz="1300" b="1">
                 <a:solidFill>
-                  <a:srgbClr val="D97706"/>
+                  <a:srgbClr val="3730A3"/>
                 </a:solidFill>
                 <a:ea typeface="Sylfaen"/>
                 <a:cs typeface="Sylfaen"/>
@@ -7992,7 +7992,7 @@
             <a:r>
               <a:rPr sz="1300">
                 <a:solidFill>
-                  <a:srgbClr val="1E293B"/>
+                  <a:srgbClr val="0F172A"/>
                 </a:solidFill>
                 <a:ea typeface="Sylfaen"/>
                 <a:cs typeface="Sylfaen"/>
@@ -8010,7 +8010,7 @@
             <a:r>
               <a:rPr sz="1300" b="1">
                 <a:solidFill>
-                  <a:srgbClr val="D97706"/>
+                  <a:srgbClr val="3730A3"/>
                 </a:solidFill>
                 <a:ea typeface="Sylfaen"/>
                 <a:cs typeface="Sylfaen"/>
@@ -8021,7 +8021,7 @@
             <a:r>
               <a:rPr sz="1300">
                 <a:solidFill>
-                  <a:srgbClr val="1E293B"/>
+                  <a:srgbClr val="0F172A"/>
                 </a:solidFill>
                 <a:ea typeface="Sylfaen"/>
                 <a:cs typeface="Sylfaen"/>
@@ -8039,7 +8039,7 @@
             <a:r>
               <a:rPr sz="1300" b="1">
                 <a:solidFill>
-                  <a:srgbClr val="D97706"/>
+                  <a:srgbClr val="3730A3"/>
                 </a:solidFill>
                 <a:ea typeface="Sylfaen"/>
                 <a:cs typeface="Sylfaen"/>
@@ -8050,7 +8050,7 @@
             <a:r>
               <a:rPr sz="1300">
                 <a:solidFill>
-                  <a:srgbClr val="1E293B"/>
+                  <a:srgbClr val="0F172A"/>
                 </a:solidFill>
                 <a:ea typeface="Sylfaen"/>
                 <a:cs typeface="Sylfaen"/>
@@ -8076,7 +8076,7 @@
             <a:avLst/>
           </a:prstGeom>
           <a:solidFill>
-            <a:srgbClr val="D97706"/>
+            <a:srgbClr val="3730A3"/>
           </a:solidFill>
           <a:ln>
             <a:noFill/>
@@ -8122,11 +8122,11 @@
             </a:avLst>
           </a:prstGeom>
           <a:solidFill>
-            <a:srgbClr val="FDF3D8"/>
+            <a:srgbClr val="EEF2FF"/>
           </a:solidFill>
           <a:ln w="6350">
             <a:solidFill>
-              <a:srgbClr val="D97706"/>
+              <a:srgbClr val="3730A3"/>
             </a:solidFill>
           </a:ln>
           <a:effectLst/>
@@ -8183,7 +8183,7 @@
             <a:r>
               <a:rPr sz="1400" b="1" i="0">
                 <a:solidFill>
-                  <a:srgbClr val="1E293B"/>
+                  <a:srgbClr val="0F172A"/>
                 </a:solidFill>
                 <a:ea typeface="Sylfaen"/>
                 <a:cs typeface="Sylfaen"/>
@@ -8224,7 +8224,7 @@
             <a:r>
               <a:rPr sz="1300" b="1">
                 <a:solidFill>
-                  <a:srgbClr val="D97706"/>
+                  <a:srgbClr val="3730A3"/>
                 </a:solidFill>
                 <a:ea typeface="Sylfaen"/>
                 <a:cs typeface="Sylfaen"/>
@@ -8235,7 +8235,7 @@
             <a:r>
               <a:rPr sz="1300">
                 <a:solidFill>
-                  <a:srgbClr val="1E293B"/>
+                  <a:srgbClr val="0F172A"/>
                 </a:solidFill>
                 <a:ea typeface="Sylfaen"/>
                 <a:cs typeface="Sylfaen"/>
@@ -8253,7 +8253,7 @@
             <a:r>
               <a:rPr sz="1300" b="1">
                 <a:solidFill>
-                  <a:srgbClr val="D97706"/>
+                  <a:srgbClr val="3730A3"/>
                 </a:solidFill>
                 <a:ea typeface="Sylfaen"/>
                 <a:cs typeface="Sylfaen"/>
@@ -8264,7 +8264,7 @@
             <a:r>
               <a:rPr sz="1300">
                 <a:solidFill>
-                  <a:srgbClr val="1E293B"/>
+                  <a:srgbClr val="0F172A"/>
                 </a:solidFill>
                 <a:ea typeface="Sylfaen"/>
                 <a:cs typeface="Sylfaen"/>
@@ -8282,7 +8282,7 @@
             <a:r>
               <a:rPr sz="1300" b="1">
                 <a:solidFill>
-                  <a:srgbClr val="D97706"/>
+                  <a:srgbClr val="3730A3"/>
                 </a:solidFill>
                 <a:ea typeface="Sylfaen"/>
                 <a:cs typeface="Sylfaen"/>
@@ -8293,7 +8293,7 @@
             <a:r>
               <a:rPr sz="1300">
                 <a:solidFill>
-                  <a:srgbClr val="1E293B"/>
+                  <a:srgbClr val="0F172A"/>
                 </a:solidFill>
                 <a:ea typeface="Sylfaen"/>
                 <a:cs typeface="Sylfaen"/>
@@ -8466,7 +8466,7 @@
             <a:avLst/>
           </a:prstGeom>
           <a:solidFill>
-            <a:srgbClr val="F59E0B"/>
+            <a:srgbClr val="4F46E5"/>
           </a:solidFill>
           <a:ln>
             <a:noFill/>
@@ -8510,7 +8510,7 @@
             <a:avLst/>
           </a:prstGeom>
           <a:solidFill>
-            <a:srgbClr val="F59E0B"/>
+            <a:srgbClr val="4F46E5"/>
           </a:solidFill>
           <a:ln>
             <a:noFill/>
@@ -8564,7 +8564,7 @@
             <a:r>
               <a:rPr sz="2600" b="1">
                 <a:solidFill>
-                  <a:srgbClr val="D97706"/>
+                  <a:srgbClr val="3730A3"/>
                 </a:solidFill>
                 <a:ea typeface="Sylfaen"/>
                 <a:cs typeface="Sylfaen"/>
@@ -8636,7 +8636,7 @@
             </a:avLst>
           </a:prstGeom>
           <a:solidFill>
-            <a:srgbClr val="F59E0B"/>
+            <a:srgbClr val="4F46E5"/>
           </a:solidFill>
           <a:ln>
             <a:noFill/>
@@ -8706,7 +8706,7 @@
             <a:r>
               <a:rPr sz="1300" b="0" i="0">
                 <a:solidFill>
-                  <a:srgbClr val="1E293B"/>
+                  <a:srgbClr val="0F172A"/>
                 </a:solidFill>
                 <a:ea typeface="Sylfaen"/>
                 <a:cs typeface="Sylfaen"/>
@@ -8762,7 +8762,7 @@
                   </a:txBody>
                   <a:tcPr>
                     <a:solidFill>
-                      <a:srgbClr val="D97706"/>
+                      <a:srgbClr val="3730A3"/>
                     </a:solidFill>
                   </a:tcPr>
                 </a:tc>
@@ -8787,7 +8787,7 @@
                   </a:txBody>
                   <a:tcPr>
                     <a:solidFill>
-                      <a:srgbClr val="D97706"/>
+                      <a:srgbClr val="3730A3"/>
                     </a:solidFill>
                   </a:tcPr>
                 </a:tc>
@@ -8812,7 +8812,7 @@
                   </a:txBody>
                   <a:tcPr>
                     <a:solidFill>
-                      <a:srgbClr val="D97706"/>
+                      <a:srgbClr val="3730A3"/>
                     </a:solidFill>
                   </a:tcPr>
                 </a:tc>
@@ -8827,7 +8827,7 @@
                       <a:r>
                         <a:rPr sz="1000">
                           <a:solidFill>
-                            <a:srgbClr val="1E293B"/>
+                            <a:srgbClr val="0F172A"/>
                           </a:solidFill>
                           <a:ea typeface="Sylfaen"/>
                           <a:cs typeface="Sylfaen"/>
@@ -8852,7 +8852,7 @@
                       <a:r>
                         <a:rPr sz="1000">
                           <a:solidFill>
-                            <a:srgbClr val="1E293B"/>
+                            <a:srgbClr val="0F172A"/>
                           </a:solidFill>
                           <a:ea typeface="Sylfaen"/>
                           <a:cs typeface="Sylfaen"/>
@@ -8877,7 +8877,7 @@
                       <a:r>
                         <a:rPr sz="1000">
                           <a:solidFill>
-                            <a:srgbClr val="1E293B"/>
+                            <a:srgbClr val="0F172A"/>
                           </a:solidFill>
                           <a:ea typeface="Sylfaen"/>
                           <a:cs typeface="Sylfaen"/>
@@ -8904,7 +8904,7 @@
                       <a:r>
                         <a:rPr sz="1000">
                           <a:solidFill>
-                            <a:srgbClr val="1E293B"/>
+                            <a:srgbClr val="0F172A"/>
                           </a:solidFill>
                           <a:ea typeface="Sylfaen"/>
                           <a:cs typeface="Sylfaen"/>
@@ -8929,7 +8929,7 @@
                       <a:r>
                         <a:rPr sz="1000">
                           <a:solidFill>
-                            <a:srgbClr val="1E293B"/>
+                            <a:srgbClr val="0F172A"/>
                           </a:solidFill>
                           <a:ea typeface="Sylfaen"/>
                           <a:cs typeface="Sylfaen"/>
@@ -8954,7 +8954,7 @@
                       <a:r>
                         <a:rPr sz="1000">
                           <a:solidFill>
-                            <a:srgbClr val="1E293B"/>
+                            <a:srgbClr val="0F172A"/>
                           </a:solidFill>
                           <a:ea typeface="Sylfaen"/>
                           <a:cs typeface="Sylfaen"/>
@@ -8981,7 +8981,7 @@
                       <a:r>
                         <a:rPr sz="1000">
                           <a:solidFill>
-                            <a:srgbClr val="1E293B"/>
+                            <a:srgbClr val="0F172A"/>
                           </a:solidFill>
                           <a:ea typeface="Sylfaen"/>
                           <a:cs typeface="Sylfaen"/>
@@ -9006,7 +9006,7 @@
                       <a:r>
                         <a:rPr sz="1000">
                           <a:solidFill>
-                            <a:srgbClr val="1E293B"/>
+                            <a:srgbClr val="0F172A"/>
                           </a:solidFill>
                           <a:ea typeface="Sylfaen"/>
                           <a:cs typeface="Sylfaen"/>
@@ -9031,7 +9031,7 @@
                       <a:r>
                         <a:rPr sz="1000">
                           <a:solidFill>
-                            <a:srgbClr val="1E293B"/>
+                            <a:srgbClr val="0F172A"/>
                           </a:solidFill>
                           <a:ea typeface="Sylfaen"/>
                           <a:cs typeface="Sylfaen"/>
@@ -9058,7 +9058,7 @@
                       <a:r>
                         <a:rPr sz="1000">
                           <a:solidFill>
-                            <a:srgbClr val="1E293B"/>
+                            <a:srgbClr val="0F172A"/>
                           </a:solidFill>
                           <a:ea typeface="Sylfaen"/>
                           <a:cs typeface="Sylfaen"/>
@@ -9083,7 +9083,7 @@
                       <a:r>
                         <a:rPr sz="1000">
                           <a:solidFill>
-                            <a:srgbClr val="1E293B"/>
+                            <a:srgbClr val="0F172A"/>
                           </a:solidFill>
                           <a:ea typeface="Sylfaen"/>
                           <a:cs typeface="Sylfaen"/>
@@ -9108,7 +9108,7 @@
                       <a:r>
                         <a:rPr sz="1000">
                           <a:solidFill>
-                            <a:srgbClr val="1E293B"/>
+                            <a:srgbClr val="0F172A"/>
                           </a:solidFill>
                           <a:ea typeface="Sylfaen"/>
                           <a:cs typeface="Sylfaen"/>
@@ -9135,7 +9135,7 @@
                       <a:r>
                         <a:rPr sz="1000">
                           <a:solidFill>
-                            <a:srgbClr val="1E293B"/>
+                            <a:srgbClr val="0F172A"/>
                           </a:solidFill>
                           <a:ea typeface="Sylfaen"/>
                           <a:cs typeface="Sylfaen"/>
@@ -9160,7 +9160,7 @@
                       <a:r>
                         <a:rPr sz="1000">
                           <a:solidFill>
-                            <a:srgbClr val="1E293B"/>
+                            <a:srgbClr val="0F172A"/>
                           </a:solidFill>
                           <a:ea typeface="Sylfaen"/>
                           <a:cs typeface="Sylfaen"/>
@@ -9185,7 +9185,7 @@
                       <a:r>
                         <a:rPr sz="1000">
                           <a:solidFill>
-                            <a:srgbClr val="1E293B"/>
+                            <a:srgbClr val="0F172A"/>
                           </a:solidFill>
                           <a:ea typeface="Sylfaen"/>
                           <a:cs typeface="Sylfaen"/>
@@ -9368,7 +9368,7 @@
             <a:avLst/>
           </a:prstGeom>
           <a:solidFill>
-            <a:srgbClr val="F59E0B"/>
+            <a:srgbClr val="4F46E5"/>
           </a:solidFill>
           <a:ln>
             <a:noFill/>
@@ -9412,7 +9412,7 @@
             <a:avLst/>
           </a:prstGeom>
           <a:solidFill>
-            <a:srgbClr val="F59E0B"/>
+            <a:srgbClr val="4F46E5"/>
           </a:solidFill>
           <a:ln>
             <a:noFill/>
@@ -9466,7 +9466,7 @@
             <a:r>
               <a:rPr sz="2600" b="1">
                 <a:solidFill>
-                  <a:srgbClr val="D97706"/>
+                  <a:srgbClr val="3730A3"/>
                 </a:solidFill>
                 <a:ea typeface="Sylfaen"/>
                 <a:cs typeface="Sylfaen"/>
@@ -9538,7 +9538,7 @@
             </a:avLst>
           </a:prstGeom>
           <a:solidFill>
-            <a:srgbClr val="F59E0B"/>
+            <a:srgbClr val="4F46E5"/>
           </a:solidFill>
           <a:ln>
             <a:noFill/>
@@ -9608,7 +9608,7 @@
             <a:r>
               <a:rPr sz="1300" b="0" i="0">
                 <a:solidFill>
-                  <a:srgbClr val="1E293B"/>
+                  <a:srgbClr val="0F172A"/>
                 </a:solidFill>
                 <a:ea typeface="Sylfaen"/>
                 <a:cs typeface="Sylfaen"/>
@@ -9664,7 +9664,7 @@
                   </a:txBody>
                   <a:tcPr>
                     <a:solidFill>
-                      <a:srgbClr val="D97706"/>
+                      <a:srgbClr val="3730A3"/>
                     </a:solidFill>
                   </a:tcPr>
                 </a:tc>
@@ -9689,7 +9689,7 @@
                   </a:txBody>
                   <a:tcPr>
                     <a:solidFill>
-                      <a:srgbClr val="D97706"/>
+                      <a:srgbClr val="3730A3"/>
                     </a:solidFill>
                   </a:tcPr>
                 </a:tc>
@@ -9714,7 +9714,7 @@
                   </a:txBody>
                   <a:tcPr>
                     <a:solidFill>
-                      <a:srgbClr val="D97706"/>
+                      <a:srgbClr val="3730A3"/>
                     </a:solidFill>
                   </a:tcPr>
                 </a:tc>
@@ -9729,7 +9729,7 @@
                       <a:r>
                         <a:rPr sz="1000">
                           <a:solidFill>
-                            <a:srgbClr val="1E293B"/>
+                            <a:srgbClr val="0F172A"/>
                           </a:solidFill>
                           <a:ea typeface="Sylfaen"/>
                           <a:cs typeface="Sylfaen"/>
@@ -9754,7 +9754,7 @@
                       <a:r>
                         <a:rPr sz="1000">
                           <a:solidFill>
-                            <a:srgbClr val="1E293B"/>
+                            <a:srgbClr val="0F172A"/>
                           </a:solidFill>
                           <a:ea typeface="Sylfaen"/>
                           <a:cs typeface="Sylfaen"/>
@@ -9779,7 +9779,7 @@
                       <a:r>
                         <a:rPr sz="1000">
                           <a:solidFill>
-                            <a:srgbClr val="1E293B"/>
+                            <a:srgbClr val="0F172A"/>
                           </a:solidFill>
                           <a:ea typeface="Sylfaen"/>
                           <a:cs typeface="Sylfaen"/>
@@ -9806,7 +9806,7 @@
                       <a:r>
                         <a:rPr sz="1000">
                           <a:solidFill>
-                            <a:srgbClr val="1E293B"/>
+                            <a:srgbClr val="0F172A"/>
                           </a:solidFill>
                           <a:ea typeface="Sylfaen"/>
                           <a:cs typeface="Sylfaen"/>
@@ -9831,7 +9831,7 @@
                       <a:r>
                         <a:rPr sz="1000">
                           <a:solidFill>
-                            <a:srgbClr val="1E293B"/>
+                            <a:srgbClr val="0F172A"/>
                           </a:solidFill>
                           <a:ea typeface="Sylfaen"/>
                           <a:cs typeface="Sylfaen"/>
@@ -9856,7 +9856,7 @@
                       <a:r>
                         <a:rPr sz="1000">
                           <a:solidFill>
-                            <a:srgbClr val="1E293B"/>
+                            <a:srgbClr val="0F172A"/>
                           </a:solidFill>
                           <a:ea typeface="Sylfaen"/>
                           <a:cs typeface="Sylfaen"/>
@@ -9883,7 +9883,7 @@
                       <a:r>
                         <a:rPr sz="1000">
                           <a:solidFill>
-                            <a:srgbClr val="1E293B"/>
+                            <a:srgbClr val="0F172A"/>
                           </a:solidFill>
                           <a:ea typeface="Sylfaen"/>
                           <a:cs typeface="Sylfaen"/>
@@ -9908,7 +9908,7 @@
                       <a:r>
                         <a:rPr sz="1000">
                           <a:solidFill>
-                            <a:srgbClr val="1E293B"/>
+                            <a:srgbClr val="0F172A"/>
                           </a:solidFill>
                           <a:ea typeface="Sylfaen"/>
                           <a:cs typeface="Sylfaen"/>
@@ -9933,7 +9933,7 @@
                       <a:r>
                         <a:rPr sz="1000">
                           <a:solidFill>
-                            <a:srgbClr val="1E293B"/>
+                            <a:srgbClr val="0F172A"/>
                           </a:solidFill>
                           <a:ea typeface="Sylfaen"/>
                           <a:cs typeface="Sylfaen"/>
@@ -9960,7 +9960,7 @@
                       <a:r>
                         <a:rPr sz="1000">
                           <a:solidFill>
-                            <a:srgbClr val="1E293B"/>
+                            <a:srgbClr val="0F172A"/>
                           </a:solidFill>
                           <a:ea typeface="Sylfaen"/>
                           <a:cs typeface="Sylfaen"/>
@@ -9985,7 +9985,7 @@
                       <a:r>
                         <a:rPr sz="1000">
                           <a:solidFill>
-                            <a:srgbClr val="1E293B"/>
+                            <a:srgbClr val="0F172A"/>
                           </a:solidFill>
                           <a:ea typeface="Sylfaen"/>
                           <a:cs typeface="Sylfaen"/>
@@ -10010,7 +10010,7 @@
                       <a:r>
                         <a:rPr sz="1000">
                           <a:solidFill>
-                            <a:srgbClr val="1E293B"/>
+                            <a:srgbClr val="0F172A"/>
                           </a:solidFill>
                           <a:ea typeface="Sylfaen"/>
                           <a:cs typeface="Sylfaen"/>
@@ -10037,7 +10037,7 @@
                       <a:r>
                         <a:rPr sz="1000">
                           <a:solidFill>
-                            <a:srgbClr val="1E293B"/>
+                            <a:srgbClr val="0F172A"/>
                           </a:solidFill>
                           <a:ea typeface="Sylfaen"/>
                           <a:cs typeface="Sylfaen"/>
@@ -10062,7 +10062,7 @@
                       <a:r>
                         <a:rPr sz="1000">
                           <a:solidFill>
-                            <a:srgbClr val="1E293B"/>
+                            <a:srgbClr val="0F172A"/>
                           </a:solidFill>
                           <a:ea typeface="Sylfaen"/>
                           <a:cs typeface="Sylfaen"/>
@@ -10087,7 +10087,7 @@
                       <a:r>
                         <a:rPr sz="1000">
                           <a:solidFill>
-                            <a:srgbClr val="1E293B"/>
+                            <a:srgbClr val="0F172A"/>
                           </a:solidFill>
                           <a:ea typeface="Sylfaen"/>
                           <a:cs typeface="Sylfaen"/>
@@ -10114,7 +10114,7 @@
                       <a:r>
                         <a:rPr sz="1000">
                           <a:solidFill>
-                            <a:srgbClr val="1E293B"/>
+                            <a:srgbClr val="0F172A"/>
                           </a:solidFill>
                           <a:ea typeface="Sylfaen"/>
                           <a:cs typeface="Sylfaen"/>
@@ -10139,7 +10139,7 @@
                       <a:r>
                         <a:rPr sz="1000">
                           <a:solidFill>
-                            <a:srgbClr val="1E293B"/>
+                            <a:srgbClr val="0F172A"/>
                           </a:solidFill>
                           <a:ea typeface="Sylfaen"/>
                           <a:cs typeface="Sylfaen"/>
@@ -10164,7 +10164,7 @@
                       <a:r>
                         <a:rPr sz="1000">
                           <a:solidFill>
-                            <a:srgbClr val="1E293B"/>
+                            <a:srgbClr val="0F172A"/>
                           </a:solidFill>
                           <a:ea typeface="Sylfaen"/>
                           <a:cs typeface="Sylfaen"/>
@@ -10347,7 +10347,7 @@
             <a:avLst/>
           </a:prstGeom>
           <a:solidFill>
-            <a:srgbClr val="F59E0B"/>
+            <a:srgbClr val="4F46E5"/>
           </a:solidFill>
           <a:ln>
             <a:noFill/>
@@ -10391,7 +10391,7 @@
             <a:avLst/>
           </a:prstGeom>
           <a:solidFill>
-            <a:srgbClr val="F59E0B"/>
+            <a:srgbClr val="4F46E5"/>
           </a:solidFill>
           <a:ln>
             <a:noFill/>
@@ -10445,7 +10445,7 @@
             <a:r>
               <a:rPr sz="2600" b="1">
                 <a:solidFill>
-                  <a:srgbClr val="D97706"/>
+                  <a:srgbClr val="3730A3"/>
                 </a:solidFill>
                 <a:ea typeface="Sylfaen"/>
                 <a:cs typeface="Sylfaen"/>
@@ -10517,7 +10517,7 @@
             </a:avLst>
           </a:prstGeom>
           <a:solidFill>
-            <a:srgbClr val="F59E0B"/>
+            <a:srgbClr val="4F46E5"/>
           </a:solidFill>
           <a:ln>
             <a:noFill/>
@@ -10587,7 +10587,7 @@
             <a:r>
               <a:rPr sz="1300" b="0" i="0">
                 <a:solidFill>
-                  <a:srgbClr val="1E293B"/>
+                  <a:srgbClr val="0F172A"/>
                 </a:solidFill>
                 <a:ea typeface="Sylfaen"/>
                 <a:cs typeface="Sylfaen"/>
@@ -10613,7 +10613,7 @@
             <a:avLst/>
           </a:prstGeom>
           <a:solidFill>
-            <a:srgbClr val="D97706"/>
+            <a:srgbClr val="3730A3"/>
           </a:solidFill>
           <a:ln>
             <a:noFill/>
@@ -10659,11 +10659,11 @@
             </a:avLst>
           </a:prstGeom>
           <a:solidFill>
-            <a:srgbClr val="FDF3D8"/>
+            <a:srgbClr val="EEF2FF"/>
           </a:solidFill>
           <a:ln w="6350">
             <a:solidFill>
-              <a:srgbClr val="D97706"/>
+              <a:srgbClr val="3730A3"/>
             </a:solidFill>
           </a:ln>
           <a:effectLst/>
@@ -10720,7 +10720,7 @@
             <a:r>
               <a:rPr sz="1400" b="1" i="0">
                 <a:solidFill>
-                  <a:srgbClr val="1E293B"/>
+                  <a:srgbClr val="0F172A"/>
                 </a:solidFill>
                 <a:ea typeface="Sylfaen"/>
                 <a:cs typeface="Sylfaen"/>
@@ -10761,7 +10761,7 @@
             <a:r>
               <a:rPr sz="1300" b="0" i="0">
                 <a:solidFill>
-                  <a:srgbClr val="1E293B"/>
+                  <a:srgbClr val="0F172A"/>
                 </a:solidFill>
                 <a:ea typeface="Sylfaen"/>
                 <a:cs typeface="Sylfaen"/>
@@ -10787,7 +10787,7 @@
             <a:avLst/>
           </a:prstGeom>
           <a:solidFill>
-            <a:srgbClr val="D97706"/>
+            <a:srgbClr val="3730A3"/>
           </a:solidFill>
           <a:ln>
             <a:noFill/>
@@ -10894,7 +10894,7 @@
             <a:r>
               <a:rPr sz="1400" b="1" i="0">
                 <a:solidFill>
-                  <a:srgbClr val="1E293B"/>
+                  <a:srgbClr val="0F172A"/>
                 </a:solidFill>
                 <a:ea typeface="Sylfaen"/>
                 <a:cs typeface="Sylfaen"/>
@@ -10935,7 +10935,7 @@
             <a:r>
               <a:rPr sz="1300" b="1">
                 <a:solidFill>
-                  <a:srgbClr val="D97706"/>
+                  <a:srgbClr val="3730A3"/>
                 </a:solidFill>
                 <a:ea typeface="Sylfaen"/>
                 <a:cs typeface="Sylfaen"/>
@@ -10946,7 +10946,7 @@
             <a:r>
               <a:rPr sz="1300">
                 <a:solidFill>
-                  <a:srgbClr val="1E293B"/>
+                  <a:srgbClr val="0F172A"/>
                 </a:solidFill>
                 <a:ea typeface="Sylfaen"/>
                 <a:cs typeface="Sylfaen"/>
@@ -10964,7 +10964,7 @@
             <a:r>
               <a:rPr sz="1300" b="1">
                 <a:solidFill>
-                  <a:srgbClr val="D97706"/>
+                  <a:srgbClr val="3730A3"/>
                 </a:solidFill>
                 <a:ea typeface="Sylfaen"/>
                 <a:cs typeface="Sylfaen"/>
@@ -10975,7 +10975,7 @@
             <a:r>
               <a:rPr sz="1300">
                 <a:solidFill>
-                  <a:srgbClr val="1E293B"/>
+                  <a:srgbClr val="0F172A"/>
                 </a:solidFill>
                 <a:ea typeface="Sylfaen"/>
                 <a:cs typeface="Sylfaen"/>
@@ -10993,7 +10993,7 @@
             <a:r>
               <a:rPr sz="1300" b="1">
                 <a:solidFill>
-                  <a:srgbClr val="D97706"/>
+                  <a:srgbClr val="3730A3"/>
                 </a:solidFill>
                 <a:ea typeface="Sylfaen"/>
                 <a:cs typeface="Sylfaen"/>
@@ -11004,7 +11004,7 @@
             <a:r>
               <a:rPr sz="1300">
                 <a:solidFill>
-                  <a:srgbClr val="1E293B"/>
+                  <a:srgbClr val="0F172A"/>
                 </a:solidFill>
                 <a:ea typeface="Sylfaen"/>
                 <a:cs typeface="Sylfaen"/>
@@ -11177,7 +11177,7 @@
             <a:avLst/>
           </a:prstGeom>
           <a:solidFill>
-            <a:srgbClr val="F59E0B"/>
+            <a:srgbClr val="4F46E5"/>
           </a:solidFill>
           <a:ln>
             <a:noFill/>
@@ -11221,7 +11221,7 @@
             <a:avLst/>
           </a:prstGeom>
           <a:solidFill>
-            <a:srgbClr val="F59E0B"/>
+            <a:srgbClr val="4F46E5"/>
           </a:solidFill>
           <a:ln>
             <a:noFill/>
@@ -11275,7 +11275,7 @@
             <a:r>
               <a:rPr sz="2600" b="1">
                 <a:solidFill>
-                  <a:srgbClr val="D97706"/>
+                  <a:srgbClr val="3730A3"/>
                 </a:solidFill>
                 <a:ea typeface="Sylfaen"/>
                 <a:cs typeface="Sylfaen"/>
@@ -11347,7 +11347,7 @@
             </a:avLst>
           </a:prstGeom>
           <a:solidFill>
-            <a:srgbClr val="F59E0B"/>
+            <a:srgbClr val="4F46E5"/>
           </a:solidFill>
           <a:ln>
             <a:noFill/>
@@ -11417,7 +11417,7 @@
             <a:r>
               <a:rPr sz="1300" b="0" i="0">
                 <a:solidFill>
-                  <a:srgbClr val="1E293B"/>
+                  <a:srgbClr val="0F172A"/>
                 </a:solidFill>
                 <a:ea typeface="Sylfaen"/>
                 <a:cs typeface="Sylfaen"/>
@@ -11443,7 +11443,7 @@
             <a:avLst/>
           </a:prstGeom>
           <a:solidFill>
-            <a:srgbClr val="D97706"/>
+            <a:srgbClr val="3730A3"/>
           </a:solidFill>
           <a:ln>
             <a:noFill/>
@@ -11489,11 +11489,11 @@
             </a:avLst>
           </a:prstGeom>
           <a:solidFill>
-            <a:srgbClr val="FDF3D8"/>
+            <a:srgbClr val="EEF2FF"/>
           </a:solidFill>
           <a:ln w="6350">
             <a:solidFill>
-              <a:srgbClr val="D97706"/>
+              <a:srgbClr val="3730A3"/>
             </a:solidFill>
           </a:ln>
           <a:effectLst/>
@@ -11550,7 +11550,7 @@
             <a:r>
               <a:rPr sz="1400" b="1" i="0">
                 <a:solidFill>
-                  <a:srgbClr val="1E293B"/>
+                  <a:srgbClr val="0F172A"/>
                 </a:solidFill>
                 <a:ea typeface="Sylfaen"/>
                 <a:cs typeface="Sylfaen"/>
@@ -11591,7 +11591,7 @@
             <a:r>
               <a:rPr sz="1300" b="1">
                 <a:solidFill>
-                  <a:srgbClr val="D97706"/>
+                  <a:srgbClr val="3730A3"/>
                 </a:solidFill>
                 <a:ea typeface="Sylfaen"/>
                 <a:cs typeface="Sylfaen"/>
@@ -11602,7 +11602,7 @@
             <a:r>
               <a:rPr sz="1300">
                 <a:solidFill>
-                  <a:srgbClr val="1E293B"/>
+                  <a:srgbClr val="0F172A"/>
                 </a:solidFill>
                 <a:ea typeface="Sylfaen"/>
                 <a:cs typeface="Sylfaen"/>
@@ -11620,7 +11620,7 @@
             <a:r>
               <a:rPr sz="1300" b="1">
                 <a:solidFill>
-                  <a:srgbClr val="D97706"/>
+                  <a:srgbClr val="3730A3"/>
                 </a:solidFill>
                 <a:ea typeface="Sylfaen"/>
                 <a:cs typeface="Sylfaen"/>
@@ -11631,7 +11631,7 @@
             <a:r>
               <a:rPr sz="1300">
                 <a:solidFill>
-                  <a:srgbClr val="1E293B"/>
+                  <a:srgbClr val="0F172A"/>
                 </a:solidFill>
                 <a:ea typeface="Sylfaen"/>
                 <a:cs typeface="Sylfaen"/>
@@ -11649,7 +11649,7 @@
             <a:r>
               <a:rPr sz="1300" b="1">
                 <a:solidFill>
-                  <a:srgbClr val="D97706"/>
+                  <a:srgbClr val="3730A3"/>
                 </a:solidFill>
                 <a:ea typeface="Sylfaen"/>
                 <a:cs typeface="Sylfaen"/>
@@ -11660,7 +11660,7 @@
             <a:r>
               <a:rPr sz="1300">
                 <a:solidFill>
-                  <a:srgbClr val="1E293B"/>
+                  <a:srgbClr val="0F172A"/>
                 </a:solidFill>
                 <a:ea typeface="Sylfaen"/>
                 <a:cs typeface="Sylfaen"/>
@@ -11686,7 +11686,7 @@
             <a:avLst/>
           </a:prstGeom>
           <a:solidFill>
-            <a:srgbClr val="D97706"/>
+            <a:srgbClr val="3730A3"/>
           </a:solidFill>
           <a:ln>
             <a:noFill/>
@@ -11793,7 +11793,7 @@
             <a:r>
               <a:rPr sz="1400" b="1" i="0">
                 <a:solidFill>
-                  <a:srgbClr val="1E293B"/>
+                  <a:srgbClr val="0F172A"/>
                 </a:solidFill>
                 <a:ea typeface="Sylfaen"/>
                 <a:cs typeface="Sylfaen"/>
@@ -11834,7 +11834,7 @@
             <a:r>
               <a:rPr sz="1300" b="1">
                 <a:solidFill>
-                  <a:srgbClr val="D97706"/>
+                  <a:srgbClr val="3730A3"/>
                 </a:solidFill>
                 <a:ea typeface="Sylfaen"/>
                 <a:cs typeface="Sylfaen"/>
@@ -11845,7 +11845,7 @@
             <a:r>
               <a:rPr sz="1300">
                 <a:solidFill>
-                  <a:srgbClr val="1E293B"/>
+                  <a:srgbClr val="0F172A"/>
                 </a:solidFill>
                 <a:ea typeface="Sylfaen"/>
                 <a:cs typeface="Sylfaen"/>
@@ -11863,7 +11863,7 @@
             <a:r>
               <a:rPr sz="1300" b="1">
                 <a:solidFill>
-                  <a:srgbClr val="D97706"/>
+                  <a:srgbClr val="3730A3"/>
                 </a:solidFill>
                 <a:ea typeface="Sylfaen"/>
                 <a:cs typeface="Sylfaen"/>
@@ -11874,7 +11874,7 @@
             <a:r>
               <a:rPr sz="1300">
                 <a:solidFill>
-                  <a:srgbClr val="1E293B"/>
+                  <a:srgbClr val="0F172A"/>
                 </a:solidFill>
                 <a:ea typeface="Sylfaen"/>
                 <a:cs typeface="Sylfaen"/>
@@ -11892,7 +11892,7 @@
             <a:r>
               <a:rPr sz="1300" b="1">
                 <a:solidFill>
-                  <a:srgbClr val="D97706"/>
+                  <a:srgbClr val="3730A3"/>
                 </a:solidFill>
                 <a:ea typeface="Sylfaen"/>
                 <a:cs typeface="Sylfaen"/>
@@ -11903,7 +11903,7 @@
             <a:r>
               <a:rPr sz="1300">
                 <a:solidFill>
-                  <a:srgbClr val="1E293B"/>
+                  <a:srgbClr val="0F172A"/>
                 </a:solidFill>
                 <a:ea typeface="Sylfaen"/>
                 <a:cs typeface="Sylfaen"/>
@@ -12076,7 +12076,7 @@
             <a:avLst/>
           </a:prstGeom>
           <a:solidFill>
-            <a:srgbClr val="F59E0B"/>
+            <a:srgbClr val="4F46E5"/>
           </a:solidFill>
           <a:ln>
             <a:noFill/>
@@ -12120,7 +12120,7 @@
             <a:avLst/>
           </a:prstGeom>
           <a:solidFill>
-            <a:srgbClr val="F59E0B"/>
+            <a:srgbClr val="4F46E5"/>
           </a:solidFill>
           <a:ln>
             <a:noFill/>
@@ -12174,7 +12174,7 @@
             <a:r>
               <a:rPr sz="2600" b="1">
                 <a:solidFill>
-                  <a:srgbClr val="D97706"/>
+                  <a:srgbClr val="3730A3"/>
                 </a:solidFill>
                 <a:ea typeface="Sylfaen"/>
                 <a:cs typeface="Sylfaen"/>
@@ -12246,7 +12246,7 @@
             </a:avLst>
           </a:prstGeom>
           <a:solidFill>
-            <a:srgbClr val="F59E0B"/>
+            <a:srgbClr val="4F46E5"/>
           </a:solidFill>
           <a:ln>
             <a:noFill/>
@@ -12316,7 +12316,7 @@
             <a:r>
               <a:rPr sz="1300" b="0" i="0">
                 <a:solidFill>
-                  <a:srgbClr val="1E293B"/>
+                  <a:srgbClr val="0F172A"/>
                 </a:solidFill>
                 <a:ea typeface="Sylfaen"/>
                 <a:cs typeface="Sylfaen"/>
@@ -12342,7 +12342,7 @@
             <a:avLst/>
           </a:prstGeom>
           <a:solidFill>
-            <a:srgbClr val="F59E0B"/>
+            <a:srgbClr val="4F46E5"/>
           </a:solidFill>
           <a:ln>
             <a:noFill/>
@@ -12388,11 +12388,11 @@
             </a:avLst>
           </a:prstGeom>
           <a:solidFill>
-            <a:srgbClr val="FFF3E0"/>
+            <a:srgbClr val="FFF7ED"/>
           </a:solidFill>
           <a:ln w="9525">
             <a:solidFill>
-              <a:srgbClr val="F59E0B"/>
+              <a:srgbClr val="4F46E5"/>
             </a:solidFill>
           </a:ln>
           <a:effectLst/>
@@ -12449,7 +12449,7 @@
             <a:r>
               <a:rPr sz="1400" b="1" i="0">
                 <a:solidFill>
-                  <a:srgbClr val="1E293B"/>
+                  <a:srgbClr val="0F172A"/>
                 </a:solidFill>
                 <a:ea typeface="Sylfaen"/>
                 <a:cs typeface="Sylfaen"/>
@@ -12490,7 +12490,7 @@
             <a:r>
               <a:rPr sz="1300" b="0" i="0">
                 <a:solidFill>
-                  <a:srgbClr val="1E293B"/>
+                  <a:srgbClr val="0F172A"/>
                 </a:solidFill>
                 <a:ea typeface="Sylfaen"/>
                 <a:cs typeface="Sylfaen"/>
@@ -12516,7 +12516,7 @@
             <a:avLst/>
           </a:prstGeom>
           <a:solidFill>
-            <a:srgbClr val="D97706"/>
+            <a:srgbClr val="3730A3"/>
           </a:solidFill>
           <a:ln>
             <a:noFill/>
@@ -12623,7 +12623,7 @@
             <a:r>
               <a:rPr sz="900" b="1" i="0">
                 <a:solidFill>
-                  <a:srgbClr val="D97706"/>
+                  <a:srgbClr val="3730A3"/>
                 </a:solidFill>
                 <a:ea typeface="Consolas"/>
                 <a:cs typeface="Consolas"/>
@@ -12710,7 +12710,7 @@
             <a:r>
               <a:rPr sz="800">
                 <a:solidFill>
-                  <a:srgbClr val="1E293B"/>
+                  <a:srgbClr val="0F172A"/>
                 </a:solidFill>
                 <a:ea typeface="Consolas"/>
                 <a:cs typeface="Consolas"/>
@@ -12728,7 +12728,7 @@
             <a:r>
               <a:rPr sz="800">
                 <a:solidFill>
-                  <a:srgbClr val="1E293B"/>
+                  <a:srgbClr val="0F172A"/>
                 </a:solidFill>
                 <a:ea typeface="Consolas"/>
                 <a:cs typeface="Consolas"/>
@@ -12746,7 +12746,7 @@
             <a:r>
               <a:rPr sz="800">
                 <a:solidFill>
-                  <a:srgbClr val="1E293B"/>
+                  <a:srgbClr val="0F172A"/>
                 </a:solidFill>
                 <a:ea typeface="Consolas"/>
                 <a:cs typeface="Consolas"/>
@@ -12764,7 +12764,7 @@
             <a:r>
               <a:rPr sz="800">
                 <a:solidFill>
-                  <a:srgbClr val="1E293B"/>
+                  <a:srgbClr val="0F172A"/>
                 </a:solidFill>
                 <a:ea typeface="Consolas"/>
                 <a:cs typeface="Consolas"/>
@@ -12937,7 +12937,7 @@
             <a:avLst/>
           </a:prstGeom>
           <a:solidFill>
-            <a:srgbClr val="F59E0B"/>
+            <a:srgbClr val="4F46E5"/>
           </a:solidFill>
           <a:ln>
             <a:noFill/>
@@ -12981,7 +12981,7 @@
             <a:avLst/>
           </a:prstGeom>
           <a:solidFill>
-            <a:srgbClr val="F59E0B"/>
+            <a:srgbClr val="4F46E5"/>
           </a:solidFill>
           <a:ln>
             <a:noFill/>
@@ -13035,7 +13035,7 @@
             <a:r>
               <a:rPr sz="2600" b="1">
                 <a:solidFill>
-                  <a:srgbClr val="D97706"/>
+                  <a:srgbClr val="3730A3"/>
                 </a:solidFill>
                 <a:ea typeface="Sylfaen"/>
                 <a:cs typeface="Sylfaen"/>
@@ -13107,7 +13107,7 @@
             </a:avLst>
           </a:prstGeom>
           <a:solidFill>
-            <a:srgbClr val="F59E0B"/>
+            <a:srgbClr val="4F46E5"/>
           </a:solidFill>
           <a:ln>
             <a:noFill/>
@@ -13177,7 +13177,7 @@
             <a:r>
               <a:rPr sz="1300" b="0" i="0">
                 <a:solidFill>
-                  <a:srgbClr val="1E293B"/>
+                  <a:srgbClr val="0F172A"/>
                 </a:solidFill>
                 <a:ea typeface="Sylfaen"/>
                 <a:cs typeface="Sylfaen"/>
@@ -13203,7 +13203,7 @@
             <a:avLst/>
           </a:prstGeom>
           <a:solidFill>
-            <a:srgbClr val="D97706"/>
+            <a:srgbClr val="3730A3"/>
           </a:solidFill>
           <a:ln>
             <a:noFill/>
@@ -13310,7 +13310,7 @@
             <a:r>
               <a:rPr sz="1400" b="1" i="0">
                 <a:solidFill>
-                  <a:srgbClr val="1E293B"/>
+                  <a:srgbClr val="0F172A"/>
                 </a:solidFill>
                 <a:ea typeface="Sylfaen"/>
                 <a:cs typeface="Sylfaen"/>
@@ -13351,7 +13351,7 @@
             <a:r>
               <a:rPr sz="1300" b="1">
                 <a:solidFill>
-                  <a:srgbClr val="D97706"/>
+                  <a:srgbClr val="3730A3"/>
                 </a:solidFill>
                 <a:ea typeface="Sylfaen"/>
                 <a:cs typeface="Sylfaen"/>
@@ -13362,7 +13362,7 @@
             <a:r>
               <a:rPr sz="1300">
                 <a:solidFill>
-                  <a:srgbClr val="1E293B"/>
+                  <a:srgbClr val="0F172A"/>
                 </a:solidFill>
                 <a:ea typeface="Sylfaen"/>
                 <a:cs typeface="Sylfaen"/>
@@ -13380,7 +13380,7 @@
             <a:r>
               <a:rPr sz="1300" b="1">
                 <a:solidFill>
-                  <a:srgbClr val="D97706"/>
+                  <a:srgbClr val="3730A3"/>
                 </a:solidFill>
                 <a:ea typeface="Sylfaen"/>
                 <a:cs typeface="Sylfaen"/>
@@ -13391,7 +13391,7 @@
             <a:r>
               <a:rPr sz="1300">
                 <a:solidFill>
-                  <a:srgbClr val="1E293B"/>
+                  <a:srgbClr val="0F172A"/>
                 </a:solidFill>
                 <a:ea typeface="Sylfaen"/>
                 <a:cs typeface="Sylfaen"/>
@@ -13409,7 +13409,7 @@
             <a:r>
               <a:rPr sz="1300" b="1">
                 <a:solidFill>
-                  <a:srgbClr val="D97706"/>
+                  <a:srgbClr val="3730A3"/>
                 </a:solidFill>
                 <a:ea typeface="Sylfaen"/>
                 <a:cs typeface="Sylfaen"/>
@@ -13420,7 +13420,7 @@
             <a:r>
               <a:rPr sz="1300">
                 <a:solidFill>
-                  <a:srgbClr val="1E293B"/>
+                  <a:srgbClr val="0F172A"/>
                 </a:solidFill>
                 <a:ea typeface="Sylfaen"/>
                 <a:cs typeface="Sylfaen"/>
@@ -13438,7 +13438,7 @@
             <a:r>
               <a:rPr sz="1300" b="1">
                 <a:solidFill>
-                  <a:srgbClr val="D97706"/>
+                  <a:srgbClr val="3730A3"/>
                 </a:solidFill>
                 <a:ea typeface="Sylfaen"/>
                 <a:cs typeface="Sylfaen"/>
@@ -13449,7 +13449,7 @@
             <a:r>
               <a:rPr sz="1300">
                 <a:solidFill>
-                  <a:srgbClr val="1E293B"/>
+                  <a:srgbClr val="0F172A"/>
                 </a:solidFill>
                 <a:ea typeface="Sylfaen"/>
                 <a:cs typeface="Sylfaen"/>
@@ -13467,7 +13467,7 @@
             <a:r>
               <a:rPr sz="1300" b="1">
                 <a:solidFill>
-                  <a:srgbClr val="D97706"/>
+                  <a:srgbClr val="3730A3"/>
                 </a:solidFill>
                 <a:ea typeface="Sylfaen"/>
                 <a:cs typeface="Sylfaen"/>
@@ -13478,7 +13478,7 @@
             <a:r>
               <a:rPr sz="1300">
                 <a:solidFill>
-                  <a:srgbClr val="1E293B"/>
+                  <a:srgbClr val="0F172A"/>
                 </a:solidFill>
                 <a:ea typeface="Sylfaen"/>
                 <a:cs typeface="Sylfaen"/>
@@ -13496,7 +13496,7 @@
             <a:r>
               <a:rPr sz="1300" b="1">
                 <a:solidFill>
-                  <a:srgbClr val="D97706"/>
+                  <a:srgbClr val="3730A3"/>
                 </a:solidFill>
                 <a:ea typeface="Sylfaen"/>
                 <a:cs typeface="Sylfaen"/>
@@ -13507,7 +13507,7 @@
             <a:r>
               <a:rPr sz="1300">
                 <a:solidFill>
-                  <a:srgbClr val="1E293B"/>
+                  <a:srgbClr val="0F172A"/>
                 </a:solidFill>
                 <a:ea typeface="Sylfaen"/>
                 <a:cs typeface="Sylfaen"/>
@@ -13533,7 +13533,7 @@
             <a:avLst/>
           </a:prstGeom>
           <a:solidFill>
-            <a:srgbClr val="D97706"/>
+            <a:srgbClr val="3730A3"/>
           </a:solidFill>
           <a:ln>
             <a:noFill/>
@@ -13579,11 +13579,11 @@
             </a:avLst>
           </a:prstGeom>
           <a:solidFill>
-            <a:srgbClr val="FDF3D8"/>
+            <a:srgbClr val="EEF2FF"/>
           </a:solidFill>
           <a:ln w="6350">
             <a:solidFill>
-              <a:srgbClr val="D97706"/>
+              <a:srgbClr val="3730A3"/>
             </a:solidFill>
           </a:ln>
           <a:effectLst/>
@@ -13640,7 +13640,7 @@
             <a:r>
               <a:rPr sz="1400" b="1" i="0">
                 <a:solidFill>
-                  <a:srgbClr val="1E293B"/>
+                  <a:srgbClr val="0F172A"/>
                 </a:solidFill>
                 <a:ea typeface="Sylfaen"/>
                 <a:cs typeface="Sylfaen"/>
@@ -13681,7 +13681,7 @@
             <a:r>
               <a:rPr sz="1300" b="0" i="0">
                 <a:solidFill>
-                  <a:srgbClr val="1E293B"/>
+                  <a:srgbClr val="0F172A"/>
                 </a:solidFill>
                 <a:ea typeface="Sylfaen"/>
                 <a:cs typeface="Sylfaen"/>
@@ -13854,7 +13854,7 @@
             <a:avLst/>
           </a:prstGeom>
           <a:solidFill>
-            <a:srgbClr val="F59E0B"/>
+            <a:srgbClr val="4F46E5"/>
           </a:solidFill>
           <a:ln>
             <a:noFill/>
@@ -13898,7 +13898,7 @@
             <a:avLst/>
           </a:prstGeom>
           <a:solidFill>
-            <a:srgbClr val="F59E0B"/>
+            <a:srgbClr val="4F46E5"/>
           </a:solidFill>
           <a:ln>
             <a:noFill/>
@@ -13952,7 +13952,7 @@
             <a:r>
               <a:rPr sz="2600" b="1">
                 <a:solidFill>
-                  <a:srgbClr val="D97706"/>
+                  <a:srgbClr val="3730A3"/>
                 </a:solidFill>
                 <a:ea typeface="Sylfaen"/>
                 <a:cs typeface="Sylfaen"/>
@@ -14024,7 +14024,7 @@
             </a:avLst>
           </a:prstGeom>
           <a:solidFill>
-            <a:srgbClr val="F59E0B"/>
+            <a:srgbClr val="4F46E5"/>
           </a:solidFill>
           <a:ln>
             <a:noFill/>
@@ -14094,7 +14094,7 @@
             <a:r>
               <a:rPr sz="1300" b="0" i="0">
                 <a:solidFill>
-                  <a:srgbClr val="1E293B"/>
+                  <a:srgbClr val="0F172A"/>
                 </a:solidFill>
                 <a:ea typeface="Sylfaen"/>
                 <a:cs typeface="Sylfaen"/>
@@ -14120,7 +14120,7 @@
             <a:avLst/>
           </a:prstGeom>
           <a:solidFill>
-            <a:srgbClr val="D97706"/>
+            <a:srgbClr val="3730A3"/>
           </a:solidFill>
           <a:ln>
             <a:noFill/>
@@ -14227,7 +14227,7 @@
             <a:r>
               <a:rPr sz="1400" b="1" i="0">
                 <a:solidFill>
-                  <a:srgbClr val="1E293B"/>
+                  <a:srgbClr val="0F172A"/>
                 </a:solidFill>
                 <a:ea typeface="Sylfaen"/>
                 <a:cs typeface="Sylfaen"/>
@@ -14268,7 +14268,7 @@
             <a:r>
               <a:rPr sz="1300" b="1">
                 <a:solidFill>
-                  <a:srgbClr val="D97706"/>
+                  <a:srgbClr val="3730A3"/>
                 </a:solidFill>
                 <a:ea typeface="Sylfaen"/>
                 <a:cs typeface="Sylfaen"/>
@@ -14279,7 +14279,7 @@
             <a:r>
               <a:rPr sz="1300">
                 <a:solidFill>
-                  <a:srgbClr val="1E293B"/>
+                  <a:srgbClr val="0F172A"/>
                 </a:solidFill>
                 <a:ea typeface="Sylfaen"/>
                 <a:cs typeface="Sylfaen"/>
@@ -14297,7 +14297,7 @@
             <a:r>
               <a:rPr sz="1300" b="1">
                 <a:solidFill>
-                  <a:srgbClr val="D97706"/>
+                  <a:srgbClr val="3730A3"/>
                 </a:solidFill>
                 <a:ea typeface="Sylfaen"/>
                 <a:cs typeface="Sylfaen"/>
@@ -14308,7 +14308,7 @@
             <a:r>
               <a:rPr sz="1300">
                 <a:solidFill>
-                  <a:srgbClr val="1E293B"/>
+                  <a:srgbClr val="0F172A"/>
                 </a:solidFill>
                 <a:ea typeface="Sylfaen"/>
                 <a:cs typeface="Sylfaen"/>
@@ -14326,7 +14326,7 @@
             <a:r>
               <a:rPr sz="1300" b="1">
                 <a:solidFill>
-                  <a:srgbClr val="D97706"/>
+                  <a:srgbClr val="3730A3"/>
                 </a:solidFill>
                 <a:ea typeface="Sylfaen"/>
                 <a:cs typeface="Sylfaen"/>
@@ -14337,7 +14337,7 @@
             <a:r>
               <a:rPr sz="1300">
                 <a:solidFill>
-                  <a:srgbClr val="1E293B"/>
+                  <a:srgbClr val="0F172A"/>
                 </a:solidFill>
                 <a:ea typeface="Sylfaen"/>
                 <a:cs typeface="Sylfaen"/>
@@ -14363,7 +14363,7 @@
             <a:avLst/>
           </a:prstGeom>
           <a:solidFill>
-            <a:srgbClr val="D97706"/>
+            <a:srgbClr val="3730A3"/>
           </a:solidFill>
           <a:ln>
             <a:noFill/>
@@ -14409,11 +14409,11 @@
             </a:avLst>
           </a:prstGeom>
           <a:solidFill>
-            <a:srgbClr val="FDF3D8"/>
+            <a:srgbClr val="EEF2FF"/>
           </a:solidFill>
           <a:ln w="6350">
             <a:solidFill>
-              <a:srgbClr val="D97706"/>
+              <a:srgbClr val="3730A3"/>
             </a:solidFill>
           </a:ln>
           <a:effectLst/>
@@ -14470,7 +14470,7 @@
             <a:r>
               <a:rPr sz="1400" b="1" i="0">
                 <a:solidFill>
-                  <a:srgbClr val="1E293B"/>
+                  <a:srgbClr val="0F172A"/>
                 </a:solidFill>
                 <a:ea typeface="Sylfaen"/>
                 <a:cs typeface="Sylfaen"/>
@@ -14511,7 +14511,7 @@
             <a:r>
               <a:rPr sz="1300" b="0" i="0">
                 <a:solidFill>
-                  <a:srgbClr val="1E293B"/>
+                  <a:srgbClr val="0F172A"/>
                 </a:solidFill>
                 <a:ea typeface="Sylfaen"/>
                 <a:cs typeface="Sylfaen"/>
@@ -14684,7 +14684,7 @@
             <a:avLst/>
           </a:prstGeom>
           <a:solidFill>
-            <a:srgbClr val="F59E0B"/>
+            <a:srgbClr val="4F46E5"/>
           </a:solidFill>
           <a:ln>
             <a:noFill/>
@@ -14728,7 +14728,7 @@
             <a:avLst/>
           </a:prstGeom>
           <a:solidFill>
-            <a:srgbClr val="F59E0B"/>
+            <a:srgbClr val="4F46E5"/>
           </a:solidFill>
           <a:ln>
             <a:noFill/>
@@ -14782,7 +14782,7 @@
             <a:r>
               <a:rPr sz="2600" b="1">
                 <a:solidFill>
-                  <a:srgbClr val="D97706"/>
+                  <a:srgbClr val="3730A3"/>
                 </a:solidFill>
                 <a:ea typeface="Sylfaen"/>
                 <a:cs typeface="Sylfaen"/>
@@ -14854,7 +14854,7 @@
             </a:avLst>
           </a:prstGeom>
           <a:solidFill>
-            <a:srgbClr val="F59E0B"/>
+            <a:srgbClr val="4F46E5"/>
           </a:solidFill>
           <a:ln>
             <a:noFill/>
@@ -14924,7 +14924,7 @@
             <a:r>
               <a:rPr sz="1300" b="0" i="0">
                 <a:solidFill>
-                  <a:srgbClr val="1E293B"/>
+                  <a:srgbClr val="0F172A"/>
                 </a:solidFill>
                 <a:ea typeface="Sylfaen"/>
                 <a:cs typeface="Sylfaen"/>
@@ -14950,7 +14950,7 @@
             <a:avLst/>
           </a:prstGeom>
           <a:solidFill>
-            <a:srgbClr val="D97706"/>
+            <a:srgbClr val="3730A3"/>
           </a:solidFill>
           <a:ln>
             <a:noFill/>
@@ -14996,11 +14996,11 @@
             </a:avLst>
           </a:prstGeom>
           <a:solidFill>
-            <a:srgbClr val="FDF3D8"/>
+            <a:srgbClr val="EEF2FF"/>
           </a:solidFill>
           <a:ln w="9525">
             <a:solidFill>
-              <a:srgbClr val="D97706"/>
+              <a:srgbClr val="3730A3"/>
             </a:solidFill>
           </a:ln>
           <a:effectLst/>
@@ -15057,7 +15057,7 @@
             <a:r>
               <a:rPr sz="1400" b="1" i="0">
                 <a:solidFill>
-                  <a:srgbClr val="1E293B"/>
+                  <a:srgbClr val="0F172A"/>
                 </a:solidFill>
                 <a:ea typeface="Sylfaen"/>
                 <a:cs typeface="Sylfaen"/>
@@ -15113,7 +15113,7 @@
                   </a:txBody>
                   <a:tcPr>
                     <a:solidFill>
-                      <a:srgbClr val="D97706"/>
+                      <a:srgbClr val="3730A3"/>
                     </a:solidFill>
                   </a:tcPr>
                 </a:tc>
@@ -15138,7 +15138,7 @@
                   </a:txBody>
                   <a:tcPr>
                     <a:solidFill>
-                      <a:srgbClr val="D97706"/>
+                      <a:srgbClr val="3730A3"/>
                     </a:solidFill>
                   </a:tcPr>
                 </a:tc>
@@ -15163,7 +15163,7 @@
                   </a:txBody>
                   <a:tcPr>
                     <a:solidFill>
-                      <a:srgbClr val="D97706"/>
+                      <a:srgbClr val="3730A3"/>
                     </a:solidFill>
                   </a:tcPr>
                 </a:tc>
@@ -15178,7 +15178,7 @@
                       <a:r>
                         <a:rPr sz="1000">
                           <a:solidFill>
-                            <a:srgbClr val="1E293B"/>
+                            <a:srgbClr val="0F172A"/>
                           </a:solidFill>
                           <a:ea typeface="Sylfaen"/>
                           <a:cs typeface="Sylfaen"/>
@@ -15203,7 +15203,7 @@
                       <a:r>
                         <a:rPr sz="1000">
                           <a:solidFill>
-                            <a:srgbClr val="1E293B"/>
+                            <a:srgbClr val="0F172A"/>
                           </a:solidFill>
                           <a:ea typeface="Sylfaen"/>
                           <a:cs typeface="Sylfaen"/>
@@ -15228,7 +15228,7 @@
                       <a:r>
                         <a:rPr sz="1000">
                           <a:solidFill>
-                            <a:srgbClr val="1E293B"/>
+                            <a:srgbClr val="0F172A"/>
                           </a:solidFill>
                           <a:ea typeface="Sylfaen"/>
                           <a:cs typeface="Sylfaen"/>
@@ -15255,7 +15255,7 @@
                       <a:r>
                         <a:rPr sz="1000">
                           <a:solidFill>
-                            <a:srgbClr val="1E293B"/>
+                            <a:srgbClr val="0F172A"/>
                           </a:solidFill>
                           <a:ea typeface="Sylfaen"/>
                           <a:cs typeface="Sylfaen"/>
@@ -15280,7 +15280,7 @@
                       <a:r>
                         <a:rPr sz="1000">
                           <a:solidFill>
-                            <a:srgbClr val="1E293B"/>
+                            <a:srgbClr val="0F172A"/>
                           </a:solidFill>
                           <a:ea typeface="Sylfaen"/>
                           <a:cs typeface="Sylfaen"/>
@@ -15305,7 +15305,7 @@
                       <a:r>
                         <a:rPr sz="1000">
                           <a:solidFill>
-                            <a:srgbClr val="1E293B"/>
+                            <a:srgbClr val="0F172A"/>
                           </a:solidFill>
                           <a:ea typeface="Sylfaen"/>
                           <a:cs typeface="Sylfaen"/>
@@ -15332,7 +15332,7 @@
                       <a:r>
                         <a:rPr sz="1000">
                           <a:solidFill>
-                            <a:srgbClr val="1E293B"/>
+                            <a:srgbClr val="0F172A"/>
                           </a:solidFill>
                           <a:ea typeface="Sylfaen"/>
                           <a:cs typeface="Sylfaen"/>
@@ -15357,7 +15357,7 @@
                       <a:r>
                         <a:rPr sz="1000">
                           <a:solidFill>
-                            <a:srgbClr val="1E293B"/>
+                            <a:srgbClr val="0F172A"/>
                           </a:solidFill>
                           <a:ea typeface="Sylfaen"/>
                           <a:cs typeface="Sylfaen"/>
@@ -15382,7 +15382,7 @@
                       <a:r>
                         <a:rPr sz="1000">
                           <a:solidFill>
-                            <a:srgbClr val="1E293B"/>
+                            <a:srgbClr val="0F172A"/>
                           </a:solidFill>
                           <a:ea typeface="Sylfaen"/>
                           <a:cs typeface="Sylfaen"/>
@@ -15409,7 +15409,7 @@
                       <a:r>
                         <a:rPr sz="1000">
                           <a:solidFill>
-                            <a:srgbClr val="1E293B"/>
+                            <a:srgbClr val="0F172A"/>
                           </a:solidFill>
                           <a:ea typeface="Sylfaen"/>
                           <a:cs typeface="Sylfaen"/>
@@ -15434,7 +15434,7 @@
                       <a:r>
                         <a:rPr sz="1000">
                           <a:solidFill>
-                            <a:srgbClr val="1E293B"/>
+                            <a:srgbClr val="0F172A"/>
                           </a:solidFill>
                           <a:ea typeface="Sylfaen"/>
                           <a:cs typeface="Sylfaen"/>
@@ -15459,7 +15459,7 @@
                       <a:r>
                         <a:rPr sz="1000">
                           <a:solidFill>
-                            <a:srgbClr val="1E293B"/>
+                            <a:srgbClr val="0F172A"/>
                           </a:solidFill>
                           <a:ea typeface="Sylfaen"/>
                           <a:cs typeface="Sylfaen"/>
@@ -15495,7 +15495,7 @@
             <a:avLst/>
           </a:prstGeom>
           <a:solidFill>
-            <a:srgbClr val="D97706"/>
+            <a:srgbClr val="3730A3"/>
           </a:solidFill>
           <a:ln>
             <a:noFill/>
@@ -15602,7 +15602,7 @@
             <a:r>
               <a:rPr sz="900" b="1" i="0">
                 <a:solidFill>
-                  <a:srgbClr val="D97706"/>
+                  <a:srgbClr val="3730A3"/>
                 </a:solidFill>
                 <a:ea typeface="Consolas"/>
                 <a:cs typeface="Consolas"/>
@@ -15689,7 +15689,7 @@
             <a:r>
               <a:rPr sz="800">
                 <a:solidFill>
-                  <a:srgbClr val="1E293B"/>
+                  <a:srgbClr val="0F172A"/>
                 </a:solidFill>
                 <a:ea typeface="Consolas"/>
                 <a:cs typeface="Consolas"/>
@@ -15707,7 +15707,7 @@
             <a:r>
               <a:rPr sz="800">
                 <a:solidFill>
-                  <a:srgbClr val="1E293B"/>
+                  <a:srgbClr val="0F172A"/>
                 </a:solidFill>
                 <a:ea typeface="Consolas"/>
                 <a:cs typeface="Consolas"/>
@@ -15725,7 +15725,7 @@
             <a:r>
               <a:rPr sz="800">
                 <a:solidFill>
-                  <a:srgbClr val="1E293B"/>
+                  <a:srgbClr val="0F172A"/>
                 </a:solidFill>
                 <a:ea typeface="Consolas"/>
                 <a:cs typeface="Consolas"/>
@@ -15743,7 +15743,7 @@
             <a:r>
               <a:rPr sz="800">
                 <a:solidFill>
-                  <a:srgbClr val="1E293B"/>
+                  <a:srgbClr val="0F172A"/>
                 </a:solidFill>
                 <a:ea typeface="Consolas"/>
                 <a:cs typeface="Consolas"/>
@@ -15916,7 +15916,7 @@
             <a:avLst/>
           </a:prstGeom>
           <a:solidFill>
-            <a:srgbClr val="F59E0B"/>
+            <a:srgbClr val="4F46E5"/>
           </a:solidFill>
           <a:ln>
             <a:noFill/>
@@ -15960,7 +15960,7 @@
             <a:avLst/>
           </a:prstGeom>
           <a:solidFill>
-            <a:srgbClr val="F59E0B"/>
+            <a:srgbClr val="4F46E5"/>
           </a:solidFill>
           <a:ln>
             <a:noFill/>
@@ -16014,7 +16014,7 @@
             <a:r>
               <a:rPr sz="2600" b="1">
                 <a:solidFill>
-                  <a:srgbClr val="D97706"/>
+                  <a:srgbClr val="3730A3"/>
                 </a:solidFill>
                 <a:ea typeface="Sylfaen"/>
                 <a:cs typeface="Sylfaen"/>
@@ -16086,7 +16086,7 @@
             </a:avLst>
           </a:prstGeom>
           <a:solidFill>
-            <a:srgbClr val="F59E0B"/>
+            <a:srgbClr val="4F46E5"/>
           </a:solidFill>
           <a:ln>
             <a:noFill/>
@@ -16156,7 +16156,7 @@
             <a:r>
               <a:rPr sz="1300" b="0" i="0">
                 <a:solidFill>
-                  <a:srgbClr val="1E293B"/>
+                  <a:srgbClr val="0F172A"/>
                 </a:solidFill>
                 <a:ea typeface="Sylfaen"/>
                 <a:cs typeface="Sylfaen"/>
@@ -16182,7 +16182,7 @@
             <a:avLst/>
           </a:prstGeom>
           <a:solidFill>
-            <a:srgbClr val="D97706"/>
+            <a:srgbClr val="3730A3"/>
           </a:solidFill>
           <a:ln>
             <a:noFill/>
@@ -16228,11 +16228,11 @@
             </a:avLst>
           </a:prstGeom>
           <a:solidFill>
-            <a:srgbClr val="FDF3D8"/>
+            <a:srgbClr val="EEF2FF"/>
           </a:solidFill>
           <a:ln w="6350">
             <a:solidFill>
-              <a:srgbClr val="D97706"/>
+              <a:srgbClr val="3730A3"/>
             </a:solidFill>
           </a:ln>
           <a:effectLst/>
@@ -16289,7 +16289,7 @@
             <a:r>
               <a:rPr sz="1400" b="1" i="0">
                 <a:solidFill>
-                  <a:srgbClr val="1E293B"/>
+                  <a:srgbClr val="0F172A"/>
                 </a:solidFill>
                 <a:ea typeface="Sylfaen"/>
                 <a:cs typeface="Sylfaen"/>
@@ -16330,7 +16330,7 @@
             <a:r>
               <a:rPr sz="1300" b="0" i="0">
                 <a:solidFill>
-                  <a:srgbClr val="1E293B"/>
+                  <a:srgbClr val="0F172A"/>
                 </a:solidFill>
                 <a:ea typeface="Sylfaen"/>
                 <a:cs typeface="Sylfaen"/>
@@ -16356,7 +16356,7 @@
             <a:avLst/>
           </a:prstGeom>
           <a:solidFill>
-            <a:srgbClr val="D97706"/>
+            <a:srgbClr val="3730A3"/>
           </a:solidFill>
           <a:ln>
             <a:noFill/>
@@ -16463,7 +16463,7 @@
             <a:r>
               <a:rPr sz="1400" b="1" i="0">
                 <a:solidFill>
-                  <a:srgbClr val="1E293B"/>
+                  <a:srgbClr val="0F172A"/>
                 </a:solidFill>
                 <a:ea typeface="Sylfaen"/>
                 <a:cs typeface="Sylfaen"/>
@@ -16504,7 +16504,7 @@
             <a:r>
               <a:rPr sz="1300" b="0" i="0">
                 <a:solidFill>
-                  <a:srgbClr val="1E293B"/>
+                  <a:srgbClr val="0F172A"/>
                 </a:solidFill>
                 <a:ea typeface="Sylfaen"/>
                 <a:cs typeface="Sylfaen"/>
@@ -16677,7 +16677,7 @@
             <a:avLst/>
           </a:prstGeom>
           <a:solidFill>
-            <a:srgbClr val="F59E0B"/>
+            <a:srgbClr val="4F46E5"/>
           </a:solidFill>
           <a:ln>
             <a:noFill/>
@@ -16721,7 +16721,7 @@
             <a:avLst/>
           </a:prstGeom>
           <a:solidFill>
-            <a:srgbClr val="F59E0B"/>
+            <a:srgbClr val="4F46E5"/>
           </a:solidFill>
           <a:ln>
             <a:noFill/>
@@ -16775,7 +16775,7 @@
             <a:r>
               <a:rPr sz="2600" b="1">
                 <a:solidFill>
-                  <a:srgbClr val="D97706"/>
+                  <a:srgbClr val="3730A3"/>
                 </a:solidFill>
                 <a:ea typeface="Sylfaen"/>
                 <a:cs typeface="Sylfaen"/>
@@ -16847,7 +16847,7 @@
             </a:avLst>
           </a:prstGeom>
           <a:solidFill>
-            <a:srgbClr val="F59E0B"/>
+            <a:srgbClr val="4F46E5"/>
           </a:solidFill>
           <a:ln>
             <a:noFill/>
@@ -16917,7 +16917,7 @@
             <a:r>
               <a:rPr sz="1300" b="0" i="0">
                 <a:solidFill>
-                  <a:srgbClr val="1E293B"/>
+                  <a:srgbClr val="0F172A"/>
                 </a:solidFill>
                 <a:ea typeface="Sylfaen"/>
                 <a:cs typeface="Sylfaen"/>
@@ -16943,7 +16943,7 @@
             <a:avLst/>
           </a:prstGeom>
           <a:solidFill>
-            <a:srgbClr val="F59E0B"/>
+            <a:srgbClr val="4F46E5"/>
           </a:solidFill>
           <a:ln>
             <a:noFill/>
@@ -16989,11 +16989,11 @@
             </a:avLst>
           </a:prstGeom>
           <a:solidFill>
-            <a:srgbClr val="FFF3E0"/>
+            <a:srgbClr val="FFF7ED"/>
           </a:solidFill>
           <a:ln w="9525">
             <a:solidFill>
-              <a:srgbClr val="F59E0B"/>
+              <a:srgbClr val="4F46E5"/>
             </a:solidFill>
           </a:ln>
           <a:effectLst/>
@@ -17050,7 +17050,7 @@
             <a:r>
               <a:rPr sz="1400" b="1" i="0">
                 <a:solidFill>
-                  <a:srgbClr val="1E293B"/>
+                  <a:srgbClr val="0F172A"/>
                 </a:solidFill>
                 <a:ea typeface="Sylfaen"/>
                 <a:cs typeface="Sylfaen"/>
@@ -17091,7 +17091,7 @@
             <a:r>
               <a:rPr sz="1300" b="1">
                 <a:solidFill>
-                  <a:srgbClr val="D97706"/>
+                  <a:srgbClr val="3730A3"/>
                 </a:solidFill>
                 <a:ea typeface="Sylfaen"/>
                 <a:cs typeface="Sylfaen"/>
@@ -17102,7 +17102,7 @@
             <a:r>
               <a:rPr sz="1300">
                 <a:solidFill>
-                  <a:srgbClr val="1E293B"/>
+                  <a:srgbClr val="0F172A"/>
                 </a:solidFill>
                 <a:ea typeface="Sylfaen"/>
                 <a:cs typeface="Sylfaen"/>
@@ -17120,7 +17120,7 @@
             <a:r>
               <a:rPr sz="1300" b="1">
                 <a:solidFill>
-                  <a:srgbClr val="D97706"/>
+                  <a:srgbClr val="3730A3"/>
                 </a:solidFill>
                 <a:ea typeface="Sylfaen"/>
                 <a:cs typeface="Sylfaen"/>
@@ -17131,7 +17131,7 @@
             <a:r>
               <a:rPr sz="1300">
                 <a:solidFill>
-                  <a:srgbClr val="1E293B"/>
+                  <a:srgbClr val="0F172A"/>
                 </a:solidFill>
                 <a:ea typeface="Sylfaen"/>
                 <a:cs typeface="Sylfaen"/>
@@ -17149,7 +17149,7 @@
             <a:r>
               <a:rPr sz="1300" b="1">
                 <a:solidFill>
-                  <a:srgbClr val="D97706"/>
+                  <a:srgbClr val="3730A3"/>
                 </a:solidFill>
                 <a:ea typeface="Sylfaen"/>
                 <a:cs typeface="Sylfaen"/>
@@ -17160,7 +17160,7 @@
             <a:r>
               <a:rPr sz="1300">
                 <a:solidFill>
-                  <a:srgbClr val="1E293B"/>
+                  <a:srgbClr val="0F172A"/>
                 </a:solidFill>
                 <a:ea typeface="Sylfaen"/>
                 <a:cs typeface="Sylfaen"/>
@@ -17178,7 +17178,7 @@
             <a:r>
               <a:rPr sz="1300" b="1">
                 <a:solidFill>
-                  <a:srgbClr val="D97706"/>
+                  <a:srgbClr val="3730A3"/>
                 </a:solidFill>
                 <a:ea typeface="Sylfaen"/>
                 <a:cs typeface="Sylfaen"/>
@@ -17189,7 +17189,7 @@
             <a:r>
               <a:rPr sz="1300">
                 <a:solidFill>
-                  <a:srgbClr val="1E293B"/>
+                  <a:srgbClr val="0F172A"/>
                 </a:solidFill>
                 <a:ea typeface="Sylfaen"/>
                 <a:cs typeface="Sylfaen"/>
@@ -17362,7 +17362,7 @@
             <a:avLst/>
           </a:prstGeom>
           <a:solidFill>
-            <a:srgbClr val="F59E0B"/>
+            <a:srgbClr val="4F46E5"/>
           </a:solidFill>
           <a:ln>
             <a:noFill/>
@@ -17406,7 +17406,7 @@
             <a:avLst/>
           </a:prstGeom>
           <a:solidFill>
-            <a:srgbClr val="F59E0B"/>
+            <a:srgbClr val="4F46E5"/>
           </a:solidFill>
           <a:ln>
             <a:noFill/>
@@ -17460,7 +17460,7 @@
             <a:r>
               <a:rPr sz="2600" b="1">
                 <a:solidFill>
-                  <a:srgbClr val="D97706"/>
+                  <a:srgbClr val="3730A3"/>
                 </a:solidFill>
                 <a:ea typeface="Sylfaen"/>
                 <a:cs typeface="Sylfaen"/>
@@ -17532,7 +17532,7 @@
             </a:avLst>
           </a:prstGeom>
           <a:solidFill>
-            <a:srgbClr val="F59E0B"/>
+            <a:srgbClr val="4F46E5"/>
           </a:solidFill>
           <a:ln>
             <a:noFill/>
@@ -17602,7 +17602,7 @@
             <a:r>
               <a:rPr sz="1300" b="0" i="0">
                 <a:solidFill>
-                  <a:srgbClr val="1E293B"/>
+                  <a:srgbClr val="0F172A"/>
                 </a:solidFill>
                 <a:ea typeface="Sylfaen"/>
                 <a:cs typeface="Sylfaen"/>
@@ -17628,7 +17628,7 @@
             <a:avLst/>
           </a:prstGeom>
           <a:solidFill>
-            <a:srgbClr val="D97706"/>
+            <a:srgbClr val="3730A3"/>
           </a:solidFill>
           <a:ln>
             <a:noFill/>
@@ -17735,7 +17735,7 @@
             <a:r>
               <a:rPr sz="900" b="1" i="0">
                 <a:solidFill>
-                  <a:srgbClr val="D97706"/>
+                  <a:srgbClr val="3730A3"/>
                 </a:solidFill>
                 <a:ea typeface="Consolas"/>
                 <a:cs typeface="Consolas"/>
@@ -17822,7 +17822,7 @@
             <a:r>
               <a:rPr sz="800">
                 <a:solidFill>
-                  <a:srgbClr val="1E293B"/>
+                  <a:srgbClr val="0F172A"/>
                 </a:solidFill>
                 <a:ea typeface="Consolas"/>
                 <a:cs typeface="Consolas"/>
@@ -17840,7 +17840,7 @@
             <a:r>
               <a:rPr sz="800">
                 <a:solidFill>
-                  <a:srgbClr val="1E293B"/>
+                  <a:srgbClr val="0F172A"/>
                 </a:solidFill>
                 <a:ea typeface="Consolas"/>
                 <a:cs typeface="Consolas"/>
@@ -17858,7 +17858,7 @@
             <a:r>
               <a:rPr sz="800">
                 <a:solidFill>
-                  <a:srgbClr val="1E293B"/>
+                  <a:srgbClr val="0F172A"/>
                 </a:solidFill>
                 <a:ea typeface="Consolas"/>
                 <a:cs typeface="Consolas"/>
@@ -17876,7 +17876,7 @@
             <a:r>
               <a:rPr sz="800">
                 <a:solidFill>
-                  <a:srgbClr val="1E293B"/>
+                  <a:srgbClr val="0F172A"/>
                 </a:solidFill>
                 <a:ea typeface="Consolas"/>
                 <a:cs typeface="Consolas"/>
@@ -17894,7 +17894,7 @@
             <a:r>
               <a:rPr sz="800">
                 <a:solidFill>
-                  <a:srgbClr val="1E293B"/>
+                  <a:srgbClr val="0F172A"/>
                 </a:solidFill>
                 <a:ea typeface="Consolas"/>
                 <a:cs typeface="Consolas"/>
@@ -17935,7 +17935,7 @@
             <a:r>
               <a:rPr sz="1300" b="0" i="0">
                 <a:solidFill>
-                  <a:srgbClr val="1E293B"/>
+                  <a:srgbClr val="0F172A"/>
                 </a:solidFill>
                 <a:ea typeface="Sylfaen"/>
                 <a:cs typeface="Sylfaen"/>
@@ -18108,7 +18108,7 @@
             <a:avLst/>
           </a:prstGeom>
           <a:solidFill>
-            <a:srgbClr val="F59E0B"/>
+            <a:srgbClr val="4F46E5"/>
           </a:solidFill>
           <a:ln>
             <a:noFill/>
@@ -18152,7 +18152,7 @@
             <a:avLst/>
           </a:prstGeom>
           <a:solidFill>
-            <a:srgbClr val="F59E0B"/>
+            <a:srgbClr val="4F46E5"/>
           </a:solidFill>
           <a:ln>
             <a:noFill/>
@@ -18206,7 +18206,7 @@
             <a:r>
               <a:rPr sz="2600" b="1">
                 <a:solidFill>
-                  <a:srgbClr val="D97706"/>
+                  <a:srgbClr val="3730A3"/>
                 </a:solidFill>
                 <a:ea typeface="Sylfaen"/>
                 <a:cs typeface="Sylfaen"/>
@@ -18278,7 +18278,7 @@
             </a:avLst>
           </a:prstGeom>
           <a:solidFill>
-            <a:srgbClr val="F59E0B"/>
+            <a:srgbClr val="4F46E5"/>
           </a:solidFill>
           <a:ln>
             <a:noFill/>
@@ -18348,7 +18348,7 @@
             <a:r>
               <a:rPr sz="1300" b="0" i="0">
                 <a:solidFill>
-                  <a:srgbClr val="1E293B"/>
+                  <a:srgbClr val="0F172A"/>
                 </a:solidFill>
                 <a:ea typeface="Sylfaen"/>
                 <a:cs typeface="Sylfaen"/>
@@ -18374,7 +18374,7 @@
             <a:avLst/>
           </a:prstGeom>
           <a:solidFill>
-            <a:srgbClr val="D97706"/>
+            <a:srgbClr val="3730A3"/>
           </a:solidFill>
           <a:ln>
             <a:noFill/>
@@ -18420,11 +18420,11 @@
             </a:avLst>
           </a:prstGeom>
           <a:solidFill>
-            <a:srgbClr val="FDF3D8"/>
+            <a:srgbClr val="EEF2FF"/>
           </a:solidFill>
           <a:ln w="6350">
             <a:solidFill>
-              <a:srgbClr val="D97706"/>
+              <a:srgbClr val="3730A3"/>
             </a:solidFill>
           </a:ln>
           <a:effectLst/>
@@ -18481,7 +18481,7 @@
             <a:r>
               <a:rPr sz="1400" b="1" i="0">
                 <a:solidFill>
-                  <a:srgbClr val="1E293B"/>
+                  <a:srgbClr val="0F172A"/>
                 </a:solidFill>
                 <a:ea typeface="Sylfaen"/>
                 <a:cs typeface="Sylfaen"/>
@@ -18522,7 +18522,7 @@
             <a:r>
               <a:rPr sz="1300" b="0" i="0">
                 <a:solidFill>
-                  <a:srgbClr val="1E293B"/>
+                  <a:srgbClr val="0F172A"/>
                 </a:solidFill>
                 <a:ea typeface="Sylfaen"/>
                 <a:cs typeface="Sylfaen"/>
@@ -18563,7 +18563,7 @@
             <a:r>
               <a:rPr sz="1300" b="1">
                 <a:solidFill>
-                  <a:srgbClr val="D97706"/>
+                  <a:srgbClr val="3730A3"/>
                 </a:solidFill>
                 <a:ea typeface="Sylfaen"/>
                 <a:cs typeface="Sylfaen"/>
@@ -18574,7 +18574,7 @@
             <a:r>
               <a:rPr sz="1300">
                 <a:solidFill>
-                  <a:srgbClr val="1E293B"/>
+                  <a:srgbClr val="0F172A"/>
                 </a:solidFill>
                 <a:ea typeface="Sylfaen"/>
                 <a:cs typeface="Sylfaen"/>
@@ -18592,7 +18592,7 @@
             <a:r>
               <a:rPr sz="1300" b="1">
                 <a:solidFill>
-                  <a:srgbClr val="D97706"/>
+                  <a:srgbClr val="3730A3"/>
                 </a:solidFill>
                 <a:ea typeface="Sylfaen"/>
                 <a:cs typeface="Sylfaen"/>
@@ -18603,7 +18603,7 @@
             <a:r>
               <a:rPr sz="1300">
                 <a:solidFill>
-                  <a:srgbClr val="1E293B"/>
+                  <a:srgbClr val="0F172A"/>
                 </a:solidFill>
                 <a:ea typeface="Sylfaen"/>
                 <a:cs typeface="Sylfaen"/>
@@ -18621,7 +18621,7 @@
             <a:r>
               <a:rPr sz="1300" b="1">
                 <a:solidFill>
-                  <a:srgbClr val="D97706"/>
+                  <a:srgbClr val="3730A3"/>
                 </a:solidFill>
                 <a:ea typeface="Sylfaen"/>
                 <a:cs typeface="Sylfaen"/>
@@ -18632,7 +18632,7 @@
             <a:r>
               <a:rPr sz="1300">
                 <a:solidFill>
-                  <a:srgbClr val="1E293B"/>
+                  <a:srgbClr val="0F172A"/>
                 </a:solidFill>
                 <a:ea typeface="Sylfaen"/>
                 <a:cs typeface="Sylfaen"/>
@@ -18658,7 +18658,7 @@
             <a:avLst/>
           </a:prstGeom>
           <a:solidFill>
-            <a:srgbClr val="D97706"/>
+            <a:srgbClr val="3730A3"/>
           </a:solidFill>
           <a:ln>
             <a:noFill/>
@@ -18765,7 +18765,7 @@
             <a:r>
               <a:rPr sz="1400" b="1" i="0">
                 <a:solidFill>
-                  <a:srgbClr val="1E293B"/>
+                  <a:srgbClr val="0F172A"/>
                 </a:solidFill>
                 <a:ea typeface="Sylfaen"/>
                 <a:cs typeface="Sylfaen"/>
@@ -18806,7 +18806,7 @@
             <a:r>
               <a:rPr sz="1300" b="0" i="0">
                 <a:solidFill>
-                  <a:srgbClr val="1E293B"/>
+                  <a:srgbClr val="0F172A"/>
                 </a:solidFill>
                 <a:ea typeface="Sylfaen"/>
                 <a:cs typeface="Sylfaen"/>
@@ -18979,7 +18979,7 @@
             <a:avLst/>
           </a:prstGeom>
           <a:solidFill>
-            <a:srgbClr val="F59E0B"/>
+            <a:srgbClr val="4F46E5"/>
           </a:solidFill>
           <a:ln>
             <a:noFill/>
@@ -19023,7 +19023,7 @@
             <a:avLst/>
           </a:prstGeom>
           <a:solidFill>
-            <a:srgbClr val="F59E0B"/>
+            <a:srgbClr val="4F46E5"/>
           </a:solidFill>
           <a:ln>
             <a:noFill/>
@@ -19077,7 +19077,7 @@
             <a:r>
               <a:rPr sz="2600" b="1">
                 <a:solidFill>
-                  <a:srgbClr val="D97706"/>
+                  <a:srgbClr val="3730A3"/>
                 </a:solidFill>
                 <a:ea typeface="Sylfaen"/>
                 <a:cs typeface="Sylfaen"/>
@@ -19149,7 +19149,7 @@
             </a:avLst>
           </a:prstGeom>
           <a:solidFill>
-            <a:srgbClr val="F59E0B"/>
+            <a:srgbClr val="4F46E5"/>
           </a:solidFill>
           <a:ln>
             <a:noFill/>
@@ -19219,7 +19219,7 @@
             <a:r>
               <a:rPr sz="1300" b="0" i="0">
                 <a:solidFill>
-                  <a:srgbClr val="1E293B"/>
+                  <a:srgbClr val="0F172A"/>
                 </a:solidFill>
                 <a:ea typeface="Sylfaen"/>
                 <a:cs typeface="Sylfaen"/>
@@ -19245,7 +19245,7 @@
             <a:avLst/>
           </a:prstGeom>
           <a:solidFill>
-            <a:srgbClr val="D97706"/>
+            <a:srgbClr val="3730A3"/>
           </a:solidFill>
           <a:ln>
             <a:noFill/>
@@ -19291,11 +19291,11 @@
             </a:avLst>
           </a:prstGeom>
           <a:solidFill>
-            <a:srgbClr val="FDF3D8"/>
+            <a:srgbClr val="EEF2FF"/>
           </a:solidFill>
           <a:ln w="6350">
             <a:solidFill>
-              <a:srgbClr val="D97706"/>
+              <a:srgbClr val="3730A3"/>
             </a:solidFill>
           </a:ln>
           <a:effectLst/>
@@ -19352,7 +19352,7 @@
             <a:r>
               <a:rPr sz="1400" b="1" i="0">
                 <a:solidFill>
-                  <a:srgbClr val="1E293B"/>
+                  <a:srgbClr val="0F172A"/>
                 </a:solidFill>
                 <a:ea typeface="Sylfaen"/>
                 <a:cs typeface="Sylfaen"/>
@@ -19393,7 +19393,7 @@
             <a:r>
               <a:rPr sz="1300" b="1">
                 <a:solidFill>
-                  <a:srgbClr val="D97706"/>
+                  <a:srgbClr val="3730A3"/>
                 </a:solidFill>
                 <a:ea typeface="Sylfaen"/>
                 <a:cs typeface="Sylfaen"/>
@@ -19404,7 +19404,7 @@
             <a:r>
               <a:rPr sz="1300">
                 <a:solidFill>
-                  <a:srgbClr val="1E293B"/>
+                  <a:srgbClr val="0F172A"/>
                 </a:solidFill>
                 <a:ea typeface="Sylfaen"/>
                 <a:cs typeface="Sylfaen"/>
@@ -19422,7 +19422,7 @@
             <a:r>
               <a:rPr sz="1300" b="1">
                 <a:solidFill>
-                  <a:srgbClr val="D97706"/>
+                  <a:srgbClr val="3730A3"/>
                 </a:solidFill>
                 <a:ea typeface="Sylfaen"/>
                 <a:cs typeface="Sylfaen"/>
@@ -19433,7 +19433,7 @@
             <a:r>
               <a:rPr sz="1300">
                 <a:solidFill>
-                  <a:srgbClr val="1E293B"/>
+                  <a:srgbClr val="0F172A"/>
                 </a:solidFill>
                 <a:ea typeface="Sylfaen"/>
                 <a:cs typeface="Sylfaen"/>
@@ -19451,7 +19451,7 @@
             <a:r>
               <a:rPr sz="1300" b="1">
                 <a:solidFill>
-                  <a:srgbClr val="D97706"/>
+                  <a:srgbClr val="3730A3"/>
                 </a:solidFill>
                 <a:ea typeface="Sylfaen"/>
                 <a:cs typeface="Sylfaen"/>
@@ -19462,7 +19462,7 @@
             <a:r>
               <a:rPr sz="1300">
                 <a:solidFill>
-                  <a:srgbClr val="1E293B"/>
+                  <a:srgbClr val="0F172A"/>
                 </a:solidFill>
                 <a:ea typeface="Sylfaen"/>
                 <a:cs typeface="Sylfaen"/>
@@ -19488,7 +19488,7 @@
             <a:avLst/>
           </a:prstGeom>
           <a:solidFill>
-            <a:srgbClr val="D97706"/>
+            <a:srgbClr val="3730A3"/>
           </a:solidFill>
           <a:ln>
             <a:noFill/>
@@ -19595,7 +19595,7 @@
             <a:r>
               <a:rPr sz="1400" b="1" i="0">
                 <a:solidFill>
-                  <a:srgbClr val="1E293B"/>
+                  <a:srgbClr val="0F172A"/>
                 </a:solidFill>
                 <a:ea typeface="Sylfaen"/>
                 <a:cs typeface="Sylfaen"/>
@@ -19636,7 +19636,7 @@
             <a:r>
               <a:rPr sz="1300" b="0" i="0">
                 <a:solidFill>
-                  <a:srgbClr val="1E293B"/>
+                  <a:srgbClr val="0F172A"/>
                 </a:solidFill>
                 <a:ea typeface="Sylfaen"/>
                 <a:cs typeface="Sylfaen"/>
@@ -19809,7 +19809,7 @@
             <a:avLst/>
           </a:prstGeom>
           <a:solidFill>
-            <a:srgbClr val="F59E0B"/>
+            <a:srgbClr val="4F46E5"/>
           </a:solidFill>
           <a:ln>
             <a:noFill/>
@@ -19853,7 +19853,7 @@
             <a:avLst/>
           </a:prstGeom>
           <a:solidFill>
-            <a:srgbClr val="F59E0B"/>
+            <a:srgbClr val="4F46E5"/>
           </a:solidFill>
           <a:ln>
             <a:noFill/>
@@ -19907,7 +19907,7 @@
             <a:r>
               <a:rPr sz="2600" b="1">
                 <a:solidFill>
-                  <a:srgbClr val="D97706"/>
+                  <a:srgbClr val="3730A3"/>
                 </a:solidFill>
                 <a:ea typeface="Sylfaen"/>
                 <a:cs typeface="Sylfaen"/>
@@ -19979,7 +19979,7 @@
             </a:avLst>
           </a:prstGeom>
           <a:solidFill>
-            <a:srgbClr val="F59E0B"/>
+            <a:srgbClr val="4F46E5"/>
           </a:solidFill>
           <a:ln>
             <a:noFill/>
@@ -20049,7 +20049,7 @@
             <a:r>
               <a:rPr sz="1300" b="0" i="0">
                 <a:solidFill>
-                  <a:srgbClr val="1E293B"/>
+                  <a:srgbClr val="0F172A"/>
                 </a:solidFill>
                 <a:ea typeface="Sylfaen"/>
                 <a:cs typeface="Sylfaen"/>
@@ -20075,7 +20075,7 @@
             <a:avLst/>
           </a:prstGeom>
           <a:solidFill>
-            <a:srgbClr val="D97706"/>
+            <a:srgbClr val="3730A3"/>
           </a:solidFill>
           <a:ln>
             <a:noFill/>
@@ -20121,11 +20121,11 @@
             </a:avLst>
           </a:prstGeom>
           <a:solidFill>
-            <a:srgbClr val="FDF3D8"/>
+            <a:srgbClr val="EEF2FF"/>
           </a:solidFill>
           <a:ln w="6350">
             <a:solidFill>
-              <a:srgbClr val="D97706"/>
+              <a:srgbClr val="3730A3"/>
             </a:solidFill>
           </a:ln>
           <a:effectLst/>
@@ -20182,7 +20182,7 @@
             <a:r>
               <a:rPr sz="1400" b="1" i="0">
                 <a:solidFill>
-                  <a:srgbClr val="1E293B"/>
+                  <a:srgbClr val="0F172A"/>
                 </a:solidFill>
                 <a:ea typeface="Sylfaen"/>
                 <a:cs typeface="Sylfaen"/>
@@ -20223,7 +20223,7 @@
             <a:r>
               <a:rPr sz="1300" b="1">
                 <a:solidFill>
-                  <a:srgbClr val="D97706"/>
+                  <a:srgbClr val="3730A3"/>
                 </a:solidFill>
                 <a:ea typeface="Sylfaen"/>
                 <a:cs typeface="Sylfaen"/>
@@ -20234,7 +20234,7 @@
             <a:r>
               <a:rPr sz="1300">
                 <a:solidFill>
-                  <a:srgbClr val="1E293B"/>
+                  <a:srgbClr val="0F172A"/>
                 </a:solidFill>
                 <a:ea typeface="Sylfaen"/>
                 <a:cs typeface="Sylfaen"/>
@@ -20252,7 +20252,7 @@
             <a:r>
               <a:rPr sz="1300" b="1">
                 <a:solidFill>
-                  <a:srgbClr val="D97706"/>
+                  <a:srgbClr val="3730A3"/>
                 </a:solidFill>
                 <a:ea typeface="Sylfaen"/>
                 <a:cs typeface="Sylfaen"/>
@@ -20263,7 +20263,7 @@
             <a:r>
               <a:rPr sz="1300">
                 <a:solidFill>
-                  <a:srgbClr val="1E293B"/>
+                  <a:srgbClr val="0F172A"/>
                 </a:solidFill>
                 <a:ea typeface="Sylfaen"/>
                 <a:cs typeface="Sylfaen"/>
@@ -20281,7 +20281,7 @@
             <a:r>
               <a:rPr sz="1300" b="1">
                 <a:solidFill>
-                  <a:srgbClr val="D97706"/>
+                  <a:srgbClr val="3730A3"/>
                 </a:solidFill>
                 <a:ea typeface="Sylfaen"/>
                 <a:cs typeface="Sylfaen"/>
@@ -20292,7 +20292,7 @@
             <a:r>
               <a:rPr sz="1300">
                 <a:solidFill>
-                  <a:srgbClr val="1E293B"/>
+                  <a:srgbClr val="0F172A"/>
                 </a:solidFill>
                 <a:ea typeface="Sylfaen"/>
                 <a:cs typeface="Sylfaen"/>
@@ -20318,7 +20318,7 @@
             <a:avLst/>
           </a:prstGeom>
           <a:solidFill>
-            <a:srgbClr val="D97706"/>
+            <a:srgbClr val="3730A3"/>
           </a:solidFill>
           <a:ln>
             <a:noFill/>
@@ -20425,7 +20425,7 @@
             <a:r>
               <a:rPr sz="1400" b="1" i="0">
                 <a:solidFill>
-                  <a:srgbClr val="1E293B"/>
+                  <a:srgbClr val="0F172A"/>
                 </a:solidFill>
                 <a:ea typeface="Sylfaen"/>
                 <a:cs typeface="Sylfaen"/>
@@ -20466,7 +20466,7 @@
             <a:r>
               <a:rPr sz="1300" b="0" i="0">
                 <a:solidFill>
-                  <a:srgbClr val="1E293B"/>
+                  <a:srgbClr val="0F172A"/>
                 </a:solidFill>
                 <a:ea typeface="Sylfaen"/>
                 <a:cs typeface="Sylfaen"/>
@@ -20639,7 +20639,7 @@
             <a:avLst/>
           </a:prstGeom>
           <a:solidFill>
-            <a:srgbClr val="F59E0B"/>
+            <a:srgbClr val="4F46E5"/>
           </a:solidFill>
           <a:ln>
             <a:noFill/>
@@ -20683,7 +20683,7 @@
             <a:avLst/>
           </a:prstGeom>
           <a:solidFill>
-            <a:srgbClr val="F59E0B"/>
+            <a:srgbClr val="4F46E5"/>
           </a:solidFill>
           <a:ln>
             <a:noFill/>
@@ -20737,7 +20737,7 @@
             <a:r>
               <a:rPr sz="2600" b="1">
                 <a:solidFill>
-                  <a:srgbClr val="D97706"/>
+                  <a:srgbClr val="3730A3"/>
                 </a:solidFill>
                 <a:ea typeface="Sylfaen"/>
                 <a:cs typeface="Sylfaen"/>
@@ -20809,7 +20809,7 @@
             </a:avLst>
           </a:prstGeom>
           <a:solidFill>
-            <a:srgbClr val="F59E0B"/>
+            <a:srgbClr val="4F46E5"/>
           </a:solidFill>
           <a:ln>
             <a:noFill/>
@@ -20879,7 +20879,7 @@
             <a:r>
               <a:rPr sz="1300" b="0" i="0">
                 <a:solidFill>
-                  <a:srgbClr val="1E293B"/>
+                  <a:srgbClr val="0F172A"/>
                 </a:solidFill>
                 <a:ea typeface="Sylfaen"/>
                 <a:cs typeface="Sylfaen"/>
@@ -20905,7 +20905,7 @@
             <a:avLst/>
           </a:prstGeom>
           <a:solidFill>
-            <a:srgbClr val="F59E0B"/>
+            <a:srgbClr val="4F46E5"/>
           </a:solidFill>
           <a:ln>
             <a:noFill/>
@@ -20951,11 +20951,11 @@
             </a:avLst>
           </a:prstGeom>
           <a:solidFill>
-            <a:srgbClr val="FFF3E0"/>
+            <a:srgbClr val="FFF7ED"/>
           </a:solidFill>
           <a:ln w="9525">
             <a:solidFill>
-              <a:srgbClr val="F59E0B"/>
+              <a:srgbClr val="4F46E5"/>
             </a:solidFill>
           </a:ln>
           <a:effectLst/>
@@ -21012,7 +21012,7 @@
             <a:r>
               <a:rPr sz="1400" b="1" i="0">
                 <a:solidFill>
-                  <a:srgbClr val="1E293B"/>
+                  <a:srgbClr val="0F172A"/>
                 </a:solidFill>
                 <a:ea typeface="Sylfaen"/>
                 <a:cs typeface="Sylfaen"/>
@@ -21053,7 +21053,7 @@
             <a:r>
               <a:rPr sz="1300" b="1">
                 <a:solidFill>
-                  <a:srgbClr val="D97706"/>
+                  <a:srgbClr val="3730A3"/>
                 </a:solidFill>
                 <a:ea typeface="Sylfaen"/>
                 <a:cs typeface="Sylfaen"/>
@@ -21064,7 +21064,7 @@
             <a:r>
               <a:rPr sz="1300">
                 <a:solidFill>
-                  <a:srgbClr val="1E293B"/>
+                  <a:srgbClr val="0F172A"/>
                 </a:solidFill>
                 <a:ea typeface="Sylfaen"/>
                 <a:cs typeface="Sylfaen"/>
@@ -21082,7 +21082,7 @@
             <a:r>
               <a:rPr sz="1300" b="1">
                 <a:solidFill>
-                  <a:srgbClr val="D97706"/>
+                  <a:srgbClr val="3730A3"/>
                 </a:solidFill>
                 <a:ea typeface="Sylfaen"/>
                 <a:cs typeface="Sylfaen"/>
@@ -21093,7 +21093,7 @@
             <a:r>
               <a:rPr sz="1300">
                 <a:solidFill>
-                  <a:srgbClr val="1E293B"/>
+                  <a:srgbClr val="0F172A"/>
                 </a:solidFill>
                 <a:ea typeface="Sylfaen"/>
                 <a:cs typeface="Sylfaen"/>
@@ -21111,7 +21111,7 @@
             <a:r>
               <a:rPr sz="1300" b="1">
                 <a:solidFill>
-                  <a:srgbClr val="D97706"/>
+                  <a:srgbClr val="3730A3"/>
                 </a:solidFill>
                 <a:ea typeface="Sylfaen"/>
                 <a:cs typeface="Sylfaen"/>
@@ -21122,7 +21122,7 @@
             <a:r>
               <a:rPr sz="1300">
                 <a:solidFill>
-                  <a:srgbClr val="1E293B"/>
+                  <a:srgbClr val="0F172A"/>
                 </a:solidFill>
                 <a:ea typeface="Sylfaen"/>
                 <a:cs typeface="Sylfaen"/>
@@ -21295,7 +21295,7 @@
             <a:avLst/>
           </a:prstGeom>
           <a:solidFill>
-            <a:srgbClr val="F59E0B"/>
+            <a:srgbClr val="4F46E5"/>
           </a:solidFill>
           <a:ln>
             <a:noFill/>
@@ -21339,7 +21339,7 @@
             <a:avLst/>
           </a:prstGeom>
           <a:solidFill>
-            <a:srgbClr val="F59E0B"/>
+            <a:srgbClr val="4F46E5"/>
           </a:solidFill>
           <a:ln>
             <a:noFill/>
@@ -21393,7 +21393,7 @@
             <a:r>
               <a:rPr sz="2600" b="1">
                 <a:solidFill>
-                  <a:srgbClr val="D97706"/>
+                  <a:srgbClr val="3730A3"/>
                 </a:solidFill>
                 <a:ea typeface="Sylfaen"/>
                 <a:cs typeface="Sylfaen"/>
@@ -21465,7 +21465,7 @@
             </a:avLst>
           </a:prstGeom>
           <a:solidFill>
-            <a:srgbClr val="F59E0B"/>
+            <a:srgbClr val="4F46E5"/>
           </a:solidFill>
           <a:ln>
             <a:noFill/>
@@ -21535,7 +21535,7 @@
             <a:r>
               <a:rPr sz="1300" b="0" i="0">
                 <a:solidFill>
-                  <a:srgbClr val="1E293B"/>
+                  <a:srgbClr val="0F172A"/>
                 </a:solidFill>
                 <a:ea typeface="Sylfaen"/>
                 <a:cs typeface="Sylfaen"/>
@@ -21561,7 +21561,7 @@
             <a:avLst/>
           </a:prstGeom>
           <a:solidFill>
-            <a:srgbClr val="D97706"/>
+            <a:srgbClr val="3730A3"/>
           </a:solidFill>
           <a:ln>
             <a:noFill/>
@@ -21607,11 +21607,11 @@
             </a:avLst>
           </a:prstGeom>
           <a:solidFill>
-            <a:srgbClr val="FDF3D8"/>
+            <a:srgbClr val="EEF2FF"/>
           </a:solidFill>
           <a:ln w="6350">
             <a:solidFill>
-              <a:srgbClr val="D97706"/>
+              <a:srgbClr val="3730A3"/>
             </a:solidFill>
           </a:ln>
           <a:effectLst/>
@@ -21668,7 +21668,7 @@
             <a:r>
               <a:rPr sz="1400" b="1" i="0">
                 <a:solidFill>
-                  <a:srgbClr val="1E293B"/>
+                  <a:srgbClr val="0F172A"/>
                 </a:solidFill>
                 <a:ea typeface="Sylfaen"/>
                 <a:cs typeface="Sylfaen"/>
@@ -21709,7 +21709,7 @@
             <a:r>
               <a:rPr sz="1300" b="1">
                 <a:solidFill>
-                  <a:srgbClr val="D97706"/>
+                  <a:srgbClr val="3730A3"/>
                 </a:solidFill>
                 <a:ea typeface="Sylfaen"/>
                 <a:cs typeface="Sylfaen"/>
@@ -21720,7 +21720,7 @@
             <a:r>
               <a:rPr sz="1300">
                 <a:solidFill>
-                  <a:srgbClr val="1E293B"/>
+                  <a:srgbClr val="0F172A"/>
                 </a:solidFill>
                 <a:ea typeface="Sylfaen"/>
                 <a:cs typeface="Sylfaen"/>
@@ -21738,7 +21738,7 @@
             <a:r>
               <a:rPr sz="1300" b="1">
                 <a:solidFill>
-                  <a:srgbClr val="D97706"/>
+                  <a:srgbClr val="3730A3"/>
                 </a:solidFill>
                 <a:ea typeface="Sylfaen"/>
                 <a:cs typeface="Sylfaen"/>
@@ -21749,7 +21749,7 @@
             <a:r>
               <a:rPr sz="1300">
                 <a:solidFill>
-                  <a:srgbClr val="1E293B"/>
+                  <a:srgbClr val="0F172A"/>
                 </a:solidFill>
                 <a:ea typeface="Sylfaen"/>
                 <a:cs typeface="Sylfaen"/>
@@ -21767,7 +21767,7 @@
             <a:r>
               <a:rPr sz="1300" b="1">
                 <a:solidFill>
-                  <a:srgbClr val="D97706"/>
+                  <a:srgbClr val="3730A3"/>
                 </a:solidFill>
                 <a:ea typeface="Sylfaen"/>
                 <a:cs typeface="Sylfaen"/>
@@ -21778,7 +21778,7 @@
             <a:r>
               <a:rPr sz="1300">
                 <a:solidFill>
-                  <a:srgbClr val="1E293B"/>
+                  <a:srgbClr val="0F172A"/>
                 </a:solidFill>
                 <a:ea typeface="Sylfaen"/>
                 <a:cs typeface="Sylfaen"/>
@@ -21804,7 +21804,7 @@
             <a:avLst/>
           </a:prstGeom>
           <a:solidFill>
-            <a:srgbClr val="D97706"/>
+            <a:srgbClr val="3730A3"/>
           </a:solidFill>
           <a:ln>
             <a:noFill/>
@@ -21911,7 +21911,7 @@
             <a:r>
               <a:rPr sz="1400" b="1" i="0">
                 <a:solidFill>
-                  <a:srgbClr val="1E293B"/>
+                  <a:srgbClr val="0F172A"/>
                 </a:solidFill>
                 <a:ea typeface="Sylfaen"/>
                 <a:cs typeface="Sylfaen"/>
@@ -21952,7 +21952,7 @@
             <a:r>
               <a:rPr sz="1300" b="0" i="0">
                 <a:solidFill>
-                  <a:srgbClr val="1E293B"/>
+                  <a:srgbClr val="0F172A"/>
                 </a:solidFill>
                 <a:ea typeface="Sylfaen"/>
                 <a:cs typeface="Sylfaen"/>
@@ -22125,7 +22125,7 @@
             <a:avLst/>
           </a:prstGeom>
           <a:solidFill>
-            <a:srgbClr val="F59E0B"/>
+            <a:srgbClr val="4F46E5"/>
           </a:solidFill>
           <a:ln>
             <a:noFill/>
@@ -22169,7 +22169,7 @@
             <a:avLst/>
           </a:prstGeom>
           <a:solidFill>
-            <a:srgbClr val="F59E0B"/>
+            <a:srgbClr val="4F46E5"/>
           </a:solidFill>
           <a:ln>
             <a:noFill/>
@@ -22223,7 +22223,7 @@
             <a:r>
               <a:rPr sz="2600" b="1">
                 <a:solidFill>
-                  <a:srgbClr val="D97706"/>
+                  <a:srgbClr val="3730A3"/>
                 </a:solidFill>
                 <a:ea typeface="Sylfaen"/>
                 <a:cs typeface="Sylfaen"/>
@@ -22295,7 +22295,7 @@
             </a:avLst>
           </a:prstGeom>
           <a:solidFill>
-            <a:srgbClr val="F59E0B"/>
+            <a:srgbClr val="4F46E5"/>
           </a:solidFill>
           <a:ln>
             <a:noFill/>
@@ -22365,7 +22365,7 @@
             <a:r>
               <a:rPr sz="1300" b="0" i="0">
                 <a:solidFill>
-                  <a:srgbClr val="1E293B"/>
+                  <a:srgbClr val="0F172A"/>
                 </a:solidFill>
                 <a:ea typeface="Sylfaen"/>
                 <a:cs typeface="Sylfaen"/>
@@ -22391,7 +22391,7 @@
             <a:avLst/>
           </a:prstGeom>
           <a:solidFill>
-            <a:srgbClr val="D97706"/>
+            <a:srgbClr val="3730A3"/>
           </a:solidFill>
           <a:ln>
             <a:noFill/>
@@ -22437,11 +22437,11 @@
             </a:avLst>
           </a:prstGeom>
           <a:solidFill>
-            <a:srgbClr val="FDF3D8"/>
+            <a:srgbClr val="EEF2FF"/>
           </a:solidFill>
           <a:ln w="6350">
             <a:solidFill>
-              <a:srgbClr val="D97706"/>
+              <a:srgbClr val="3730A3"/>
             </a:solidFill>
           </a:ln>
           <a:effectLst/>
@@ -22498,7 +22498,7 @@
             <a:r>
               <a:rPr sz="1400" b="1" i="0">
                 <a:solidFill>
-                  <a:srgbClr val="1E293B"/>
+                  <a:srgbClr val="0F172A"/>
                 </a:solidFill>
                 <a:ea typeface="Sylfaen"/>
                 <a:cs typeface="Sylfaen"/>
@@ -22539,7 +22539,7 @@
             <a:r>
               <a:rPr sz="1300" b="0" i="0">
                 <a:solidFill>
-                  <a:srgbClr val="1E293B"/>
+                  <a:srgbClr val="0F172A"/>
                 </a:solidFill>
                 <a:ea typeface="Sylfaen"/>
                 <a:cs typeface="Sylfaen"/>
@@ -22565,7 +22565,7 @@
             <a:avLst/>
           </a:prstGeom>
           <a:solidFill>
-            <a:srgbClr val="D97706"/>
+            <a:srgbClr val="3730A3"/>
           </a:solidFill>
           <a:ln>
             <a:noFill/>
@@ -22672,7 +22672,7 @@
             <a:r>
               <a:rPr sz="1400" b="1" i="0">
                 <a:solidFill>
-                  <a:srgbClr val="1E293B"/>
+                  <a:srgbClr val="0F172A"/>
                 </a:solidFill>
                 <a:ea typeface="Sylfaen"/>
                 <a:cs typeface="Sylfaen"/>
@@ -22713,7 +22713,7 @@
             <a:r>
               <a:rPr sz="1300" b="1">
                 <a:solidFill>
-                  <a:srgbClr val="D97706"/>
+                  <a:srgbClr val="3730A3"/>
                 </a:solidFill>
                 <a:ea typeface="Sylfaen"/>
                 <a:cs typeface="Sylfaen"/>
@@ -22724,7 +22724,7 @@
             <a:r>
               <a:rPr sz="1300">
                 <a:solidFill>
-                  <a:srgbClr val="1E293B"/>
+                  <a:srgbClr val="0F172A"/>
                 </a:solidFill>
                 <a:ea typeface="Sylfaen"/>
                 <a:cs typeface="Sylfaen"/>
@@ -22742,7 +22742,7 @@
             <a:r>
               <a:rPr sz="1300" b="1">
                 <a:solidFill>
-                  <a:srgbClr val="D97706"/>
+                  <a:srgbClr val="3730A3"/>
                 </a:solidFill>
                 <a:ea typeface="Sylfaen"/>
                 <a:cs typeface="Sylfaen"/>
@@ -22753,7 +22753,7 @@
             <a:r>
               <a:rPr sz="1300">
                 <a:solidFill>
-                  <a:srgbClr val="1E293B"/>
+                  <a:srgbClr val="0F172A"/>
                 </a:solidFill>
                 <a:ea typeface="Sylfaen"/>
                 <a:cs typeface="Sylfaen"/>
@@ -22771,7 +22771,7 @@
             <a:r>
               <a:rPr sz="1300" b="1">
                 <a:solidFill>
-                  <a:srgbClr val="D97706"/>
+                  <a:srgbClr val="3730A3"/>
                 </a:solidFill>
                 <a:ea typeface="Sylfaen"/>
                 <a:cs typeface="Sylfaen"/>
@@ -22782,7 +22782,7 @@
             <a:r>
               <a:rPr sz="1300">
                 <a:solidFill>
-                  <a:srgbClr val="1E293B"/>
+                  <a:srgbClr val="0F172A"/>
                 </a:solidFill>
                 <a:ea typeface="Sylfaen"/>
                 <a:cs typeface="Sylfaen"/>
@@ -22955,7 +22955,7 @@
             <a:avLst/>
           </a:prstGeom>
           <a:solidFill>
-            <a:srgbClr val="F59E0B"/>
+            <a:srgbClr val="4F46E5"/>
           </a:solidFill>
           <a:ln>
             <a:noFill/>
@@ -22999,7 +22999,7 @@
             <a:avLst/>
           </a:prstGeom>
           <a:solidFill>
-            <a:srgbClr val="F59E0B"/>
+            <a:srgbClr val="4F46E5"/>
           </a:solidFill>
           <a:ln>
             <a:noFill/>
@@ -23053,7 +23053,7 @@
             <a:r>
               <a:rPr sz="2600" b="1">
                 <a:solidFill>
-                  <a:srgbClr val="D97706"/>
+                  <a:srgbClr val="3730A3"/>
                 </a:solidFill>
                 <a:ea typeface="Sylfaen"/>
                 <a:cs typeface="Sylfaen"/>
@@ -23125,7 +23125,7 @@
             </a:avLst>
           </a:prstGeom>
           <a:solidFill>
-            <a:srgbClr val="F59E0B"/>
+            <a:srgbClr val="4F46E5"/>
           </a:solidFill>
           <a:ln>
             <a:noFill/>
@@ -23195,7 +23195,7 @@
             <a:r>
               <a:rPr sz="1300" b="0" i="0">
                 <a:solidFill>
-                  <a:srgbClr val="1E293B"/>
+                  <a:srgbClr val="0F172A"/>
                 </a:solidFill>
                 <a:ea typeface="Sylfaen"/>
                 <a:cs typeface="Sylfaen"/>
@@ -23221,7 +23221,7 @@
             <a:avLst/>
           </a:prstGeom>
           <a:solidFill>
-            <a:srgbClr val="F59E0B"/>
+            <a:srgbClr val="4F46E5"/>
           </a:solidFill>
           <a:ln>
             <a:noFill/>
@@ -23267,11 +23267,11 @@
             </a:avLst>
           </a:prstGeom>
           <a:solidFill>
-            <a:srgbClr val="FFF3E0"/>
+            <a:srgbClr val="FFF7ED"/>
           </a:solidFill>
           <a:ln w="6350">
             <a:solidFill>
-              <a:srgbClr val="F59E0B"/>
+              <a:srgbClr val="4F46E5"/>
             </a:solidFill>
           </a:ln>
           <a:effectLst/>
@@ -23328,7 +23328,7 @@
             <a:r>
               <a:rPr sz="1400" b="1" i="0">
                 <a:solidFill>
-                  <a:srgbClr val="1E293B"/>
+                  <a:srgbClr val="0F172A"/>
                 </a:solidFill>
                 <a:ea typeface="Sylfaen"/>
                 <a:cs typeface="Sylfaen"/>
@@ -23369,7 +23369,7 @@
             <a:r>
               <a:rPr sz="1300" b="0" i="0">
                 <a:solidFill>
-                  <a:srgbClr val="1E293B"/>
+                  <a:srgbClr val="0F172A"/>
                 </a:solidFill>
                 <a:ea typeface="Sylfaen"/>
                 <a:cs typeface="Sylfaen"/>
@@ -23395,7 +23395,7 @@
             <a:avLst/>
           </a:prstGeom>
           <a:solidFill>
-            <a:srgbClr val="D97706"/>
+            <a:srgbClr val="3730A3"/>
           </a:solidFill>
           <a:ln>
             <a:noFill/>
@@ -23502,7 +23502,7 @@
             <a:r>
               <a:rPr sz="1400" b="1" i="0">
                 <a:solidFill>
-                  <a:srgbClr val="1E293B"/>
+                  <a:srgbClr val="0F172A"/>
                 </a:solidFill>
                 <a:ea typeface="Sylfaen"/>
                 <a:cs typeface="Sylfaen"/>
@@ -23543,7 +23543,7 @@
             <a:r>
               <a:rPr sz="1300" b="0" i="0">
                 <a:solidFill>
-                  <a:srgbClr val="1E293B"/>
+                  <a:srgbClr val="0F172A"/>
                 </a:solidFill>
                 <a:ea typeface="Sylfaen"/>
                 <a:cs typeface="Sylfaen"/>
@@ -23716,7 +23716,7 @@
             <a:avLst/>
           </a:prstGeom>
           <a:solidFill>
-            <a:srgbClr val="F59E0B"/>
+            <a:srgbClr val="4F46E5"/>
           </a:solidFill>
           <a:ln>
             <a:noFill/>
@@ -23760,7 +23760,7 @@
             <a:avLst/>
           </a:prstGeom>
           <a:solidFill>
-            <a:srgbClr val="F59E0B"/>
+            <a:srgbClr val="4F46E5"/>
           </a:solidFill>
           <a:ln>
             <a:noFill/>
@@ -23814,7 +23814,7 @@
             <a:r>
               <a:rPr sz="2600" b="1">
                 <a:solidFill>
-                  <a:srgbClr val="D97706"/>
+                  <a:srgbClr val="3730A3"/>
                 </a:solidFill>
                 <a:ea typeface="Sylfaen"/>
                 <a:cs typeface="Sylfaen"/>
@@ -23886,7 +23886,7 @@
             </a:avLst>
           </a:prstGeom>
           <a:solidFill>
-            <a:srgbClr val="F59E0B"/>
+            <a:srgbClr val="4F46E5"/>
           </a:solidFill>
           <a:ln>
             <a:noFill/>
@@ -23956,7 +23956,7 @@
             <a:r>
               <a:rPr sz="1300" b="0" i="0">
                 <a:solidFill>
-                  <a:srgbClr val="1E293B"/>
+                  <a:srgbClr val="0F172A"/>
                 </a:solidFill>
                 <a:ea typeface="Sylfaen"/>
                 <a:cs typeface="Sylfaen"/>
@@ -23982,7 +23982,7 @@
             <a:avLst/>
           </a:prstGeom>
           <a:solidFill>
-            <a:srgbClr val="D97706"/>
+            <a:srgbClr val="3730A3"/>
           </a:solidFill>
           <a:ln>
             <a:noFill/>
@@ -24028,11 +24028,11 @@
             </a:avLst>
           </a:prstGeom>
           <a:solidFill>
-            <a:srgbClr val="FDF3D8"/>
+            <a:srgbClr val="EEF2FF"/>
           </a:solidFill>
           <a:ln w="9525">
             <a:solidFill>
-              <a:srgbClr val="D97706"/>
+              <a:srgbClr val="3730A3"/>
             </a:solidFill>
           </a:ln>
           <a:effectLst/>
@@ -24089,7 +24089,7 @@
             <a:r>
               <a:rPr sz="1400" b="1" i="0">
                 <a:solidFill>
-                  <a:srgbClr val="1E293B"/>
+                  <a:srgbClr val="0F172A"/>
                 </a:solidFill>
                 <a:ea typeface="Sylfaen"/>
                 <a:cs typeface="Sylfaen"/>
@@ -24130,7 +24130,7 @@
             <a:r>
               <a:rPr sz="1300" b="1">
                 <a:solidFill>
-                  <a:srgbClr val="D97706"/>
+                  <a:srgbClr val="3730A3"/>
                 </a:solidFill>
                 <a:ea typeface="Sylfaen"/>
                 <a:cs typeface="Sylfaen"/>
@@ -24141,7 +24141,7 @@
             <a:r>
               <a:rPr sz="1300">
                 <a:solidFill>
-                  <a:srgbClr val="1E293B"/>
+                  <a:srgbClr val="0F172A"/>
                 </a:solidFill>
                 <a:ea typeface="Sylfaen"/>
                 <a:cs typeface="Sylfaen"/>
@@ -24159,7 +24159,7 @@
             <a:r>
               <a:rPr sz="1300" b="1">
                 <a:solidFill>
-                  <a:srgbClr val="D97706"/>
+                  <a:srgbClr val="3730A3"/>
                 </a:solidFill>
                 <a:ea typeface="Sylfaen"/>
                 <a:cs typeface="Sylfaen"/>
@@ -24170,7 +24170,7 @@
             <a:r>
               <a:rPr sz="1300">
                 <a:solidFill>
-                  <a:srgbClr val="1E293B"/>
+                  <a:srgbClr val="0F172A"/>
                 </a:solidFill>
                 <a:ea typeface="Sylfaen"/>
                 <a:cs typeface="Sylfaen"/>
@@ -24188,7 +24188,7 @@
             <a:r>
               <a:rPr sz="1300" b="1">
                 <a:solidFill>
-                  <a:srgbClr val="D97706"/>
+                  <a:srgbClr val="3730A3"/>
                 </a:solidFill>
                 <a:ea typeface="Sylfaen"/>
                 <a:cs typeface="Sylfaen"/>
@@ -24199,7 +24199,7 @@
             <a:r>
               <a:rPr sz="1300">
                 <a:solidFill>
-                  <a:srgbClr val="1E293B"/>
+                  <a:srgbClr val="0F172A"/>
                 </a:solidFill>
                 <a:ea typeface="Sylfaen"/>
                 <a:cs typeface="Sylfaen"/>
@@ -24372,7 +24372,7 @@
             <a:avLst/>
           </a:prstGeom>
           <a:solidFill>
-            <a:srgbClr val="F59E0B"/>
+            <a:srgbClr val="4F46E5"/>
           </a:solidFill>
           <a:ln>
             <a:noFill/>
@@ -24416,7 +24416,7 @@
             <a:avLst/>
           </a:prstGeom>
           <a:solidFill>
-            <a:srgbClr val="F59E0B"/>
+            <a:srgbClr val="4F46E5"/>
           </a:solidFill>
           <a:ln>
             <a:noFill/>
@@ -24470,7 +24470,7 @@
             <a:r>
               <a:rPr sz="2600" b="1">
                 <a:solidFill>
-                  <a:srgbClr val="D97706"/>
+                  <a:srgbClr val="3730A3"/>
                 </a:solidFill>
                 <a:ea typeface="Sylfaen"/>
                 <a:cs typeface="Sylfaen"/>
@@ -24542,7 +24542,7 @@
             </a:avLst>
           </a:prstGeom>
           <a:solidFill>
-            <a:srgbClr val="F59E0B"/>
+            <a:srgbClr val="4F46E5"/>
           </a:solidFill>
           <a:ln>
             <a:noFill/>
@@ -24612,7 +24612,7 @@
             <a:r>
               <a:rPr sz="1300" b="0" i="0">
                 <a:solidFill>
-                  <a:srgbClr val="1E293B"/>
+                  <a:srgbClr val="0F172A"/>
                 </a:solidFill>
                 <a:ea typeface="Sylfaen"/>
                 <a:cs typeface="Sylfaen"/>
@@ -24638,7 +24638,7 @@
             <a:avLst/>
           </a:prstGeom>
           <a:solidFill>
-            <a:srgbClr val="D97706"/>
+            <a:srgbClr val="3730A3"/>
           </a:solidFill>
           <a:ln>
             <a:noFill/>
@@ -24745,7 +24745,7 @@
             <a:r>
               <a:rPr sz="1400" b="1" i="0">
                 <a:solidFill>
-                  <a:srgbClr val="1E293B"/>
+                  <a:srgbClr val="0F172A"/>
                 </a:solidFill>
                 <a:ea typeface="Sylfaen"/>
                 <a:cs typeface="Sylfaen"/>
@@ -24786,7 +24786,7 @@
             <a:r>
               <a:rPr sz="1300" b="1">
                 <a:solidFill>
-                  <a:srgbClr val="D97706"/>
+                  <a:srgbClr val="3730A3"/>
                 </a:solidFill>
                 <a:ea typeface="Sylfaen"/>
                 <a:cs typeface="Sylfaen"/>
@@ -24797,7 +24797,7 @@
             <a:r>
               <a:rPr sz="1300">
                 <a:solidFill>
-                  <a:srgbClr val="1E293B"/>
+                  <a:srgbClr val="0F172A"/>
                 </a:solidFill>
                 <a:ea typeface="Sylfaen"/>
                 <a:cs typeface="Sylfaen"/>
@@ -24815,7 +24815,7 @@
             <a:r>
               <a:rPr sz="1300" b="1">
                 <a:solidFill>
-                  <a:srgbClr val="D97706"/>
+                  <a:srgbClr val="3730A3"/>
                 </a:solidFill>
                 <a:ea typeface="Sylfaen"/>
                 <a:cs typeface="Sylfaen"/>
@@ -24826,7 +24826,7 @@
             <a:r>
               <a:rPr sz="1300">
                 <a:solidFill>
-                  <a:srgbClr val="1E293B"/>
+                  <a:srgbClr val="0F172A"/>
                 </a:solidFill>
                 <a:ea typeface="Sylfaen"/>
                 <a:cs typeface="Sylfaen"/>
@@ -24844,7 +24844,7 @@
             <a:r>
               <a:rPr sz="1300" b="1">
                 <a:solidFill>
-                  <a:srgbClr val="D97706"/>
+                  <a:srgbClr val="3730A3"/>
                 </a:solidFill>
                 <a:ea typeface="Sylfaen"/>
                 <a:cs typeface="Sylfaen"/>
@@ -24855,7 +24855,7 @@
             <a:r>
               <a:rPr sz="1300">
                 <a:solidFill>
-                  <a:srgbClr val="1E293B"/>
+                  <a:srgbClr val="0F172A"/>
                 </a:solidFill>
                 <a:ea typeface="Sylfaen"/>
                 <a:cs typeface="Sylfaen"/>
@@ -24881,7 +24881,7 @@
             <a:avLst/>
           </a:prstGeom>
           <a:solidFill>
-            <a:srgbClr val="D97706"/>
+            <a:srgbClr val="3730A3"/>
           </a:solidFill>
           <a:ln>
             <a:noFill/>
@@ -24927,11 +24927,11 @@
             </a:avLst>
           </a:prstGeom>
           <a:solidFill>
-            <a:srgbClr val="FDF3D8"/>
+            <a:srgbClr val="EEF2FF"/>
           </a:solidFill>
           <a:ln w="6350">
             <a:solidFill>
-              <a:srgbClr val="D97706"/>
+              <a:srgbClr val="3730A3"/>
             </a:solidFill>
           </a:ln>
           <a:effectLst/>
@@ -24988,7 +24988,7 @@
             <a:r>
               <a:rPr sz="1400" b="1" i="0">
                 <a:solidFill>
-                  <a:srgbClr val="1E293B"/>
+                  <a:srgbClr val="0F172A"/>
                 </a:solidFill>
                 <a:ea typeface="Sylfaen"/>
                 <a:cs typeface="Sylfaen"/>
@@ -25029,7 +25029,7 @@
             <a:r>
               <a:rPr sz="1300" b="0" i="0">
                 <a:solidFill>
-                  <a:srgbClr val="1E293B"/>
+                  <a:srgbClr val="0F172A"/>
                 </a:solidFill>
                 <a:ea typeface="Sylfaen"/>
                 <a:cs typeface="Sylfaen"/>
@@ -25202,7 +25202,7 @@
             <a:avLst/>
           </a:prstGeom>
           <a:solidFill>
-            <a:srgbClr val="F59E0B"/>
+            <a:srgbClr val="4F46E5"/>
           </a:solidFill>
           <a:ln>
             <a:noFill/>
@@ -25246,7 +25246,7 @@
             <a:avLst/>
           </a:prstGeom>
           <a:solidFill>
-            <a:srgbClr val="F59E0B"/>
+            <a:srgbClr val="4F46E5"/>
           </a:solidFill>
           <a:ln>
             <a:noFill/>
@@ -25300,7 +25300,7 @@
             <a:r>
               <a:rPr sz="2600" b="1">
                 <a:solidFill>
-                  <a:srgbClr val="D97706"/>
+                  <a:srgbClr val="3730A3"/>
                 </a:solidFill>
                 <a:ea typeface="Sylfaen"/>
                 <a:cs typeface="Sylfaen"/>
@@ -25372,7 +25372,7 @@
             </a:avLst>
           </a:prstGeom>
           <a:solidFill>
-            <a:srgbClr val="F59E0B"/>
+            <a:srgbClr val="4F46E5"/>
           </a:solidFill>
           <a:ln>
             <a:noFill/>
@@ -25442,7 +25442,7 @@
             <a:r>
               <a:rPr sz="1300" b="0" i="0">
                 <a:solidFill>
-                  <a:srgbClr val="1E293B"/>
+                  <a:srgbClr val="0F172A"/>
                 </a:solidFill>
                 <a:ea typeface="Sylfaen"/>
                 <a:cs typeface="Sylfaen"/>
@@ -25468,7 +25468,7 @@
             <a:avLst/>
           </a:prstGeom>
           <a:solidFill>
-            <a:srgbClr val="F59E0B"/>
+            <a:srgbClr val="4F46E5"/>
           </a:solidFill>
           <a:ln>
             <a:noFill/>
@@ -25514,11 +25514,11 @@
             </a:avLst>
           </a:prstGeom>
           <a:solidFill>
-            <a:srgbClr val="FFF3E0"/>
+            <a:srgbClr val="FFF7ED"/>
           </a:solidFill>
           <a:ln w="6350">
             <a:solidFill>
-              <a:srgbClr val="F59E0B"/>
+              <a:srgbClr val="4F46E5"/>
             </a:solidFill>
           </a:ln>
           <a:effectLst/>
@@ -25575,7 +25575,7 @@
             <a:r>
               <a:rPr sz="1400" b="1" i="0">
                 <a:solidFill>
-                  <a:srgbClr val="1E293B"/>
+                  <a:srgbClr val="0F172A"/>
                 </a:solidFill>
                 <a:ea typeface="Sylfaen"/>
                 <a:cs typeface="Sylfaen"/>
@@ -25616,7 +25616,7 @@
             <a:r>
               <a:rPr sz="1300" b="1">
                 <a:solidFill>
-                  <a:srgbClr val="D97706"/>
+                  <a:srgbClr val="3730A3"/>
                 </a:solidFill>
                 <a:ea typeface="Sylfaen"/>
                 <a:cs typeface="Sylfaen"/>
@@ -25627,7 +25627,7 @@
             <a:r>
               <a:rPr sz="1300">
                 <a:solidFill>
-                  <a:srgbClr val="1E293B"/>
+                  <a:srgbClr val="0F172A"/>
                 </a:solidFill>
                 <a:ea typeface="Sylfaen"/>
                 <a:cs typeface="Sylfaen"/>
@@ -25645,7 +25645,7 @@
             <a:r>
               <a:rPr sz="1300" b="1">
                 <a:solidFill>
-                  <a:srgbClr val="D97706"/>
+                  <a:srgbClr val="3730A3"/>
                 </a:solidFill>
                 <a:ea typeface="Sylfaen"/>
                 <a:cs typeface="Sylfaen"/>
@@ -25656,7 +25656,7 @@
             <a:r>
               <a:rPr sz="1300">
                 <a:solidFill>
-                  <a:srgbClr val="1E293B"/>
+                  <a:srgbClr val="0F172A"/>
                 </a:solidFill>
                 <a:ea typeface="Sylfaen"/>
                 <a:cs typeface="Sylfaen"/>
@@ -25674,7 +25674,7 @@
             <a:r>
               <a:rPr sz="1300" b="1">
                 <a:solidFill>
-                  <a:srgbClr val="D97706"/>
+                  <a:srgbClr val="3730A3"/>
                 </a:solidFill>
                 <a:ea typeface="Sylfaen"/>
                 <a:cs typeface="Sylfaen"/>
@@ -25685,7 +25685,7 @@
             <a:r>
               <a:rPr sz="1300">
                 <a:solidFill>
-                  <a:srgbClr val="1E293B"/>
+                  <a:srgbClr val="0F172A"/>
                 </a:solidFill>
                 <a:ea typeface="Sylfaen"/>
                 <a:cs typeface="Sylfaen"/>
@@ -25711,7 +25711,7 @@
             <a:avLst/>
           </a:prstGeom>
           <a:solidFill>
-            <a:srgbClr val="D97706"/>
+            <a:srgbClr val="3730A3"/>
           </a:solidFill>
           <a:ln>
             <a:noFill/>
@@ -25818,7 +25818,7 @@
             <a:r>
               <a:rPr sz="1400" b="1" i="0">
                 <a:solidFill>
-                  <a:srgbClr val="1E293B"/>
+                  <a:srgbClr val="0F172A"/>
                 </a:solidFill>
                 <a:ea typeface="Sylfaen"/>
                 <a:cs typeface="Sylfaen"/>
@@ -25859,7 +25859,7 @@
             <a:r>
               <a:rPr sz="1300" b="1">
                 <a:solidFill>
-                  <a:srgbClr val="D97706"/>
+                  <a:srgbClr val="3730A3"/>
                 </a:solidFill>
                 <a:ea typeface="Sylfaen"/>
                 <a:cs typeface="Sylfaen"/>
@@ -25870,7 +25870,7 @@
             <a:r>
               <a:rPr sz="1300">
                 <a:solidFill>
-                  <a:srgbClr val="1E293B"/>
+                  <a:srgbClr val="0F172A"/>
                 </a:solidFill>
                 <a:ea typeface="Sylfaen"/>
                 <a:cs typeface="Sylfaen"/>
@@ -25888,7 +25888,7 @@
             <a:r>
               <a:rPr sz="1300" b="1">
                 <a:solidFill>
-                  <a:srgbClr val="D97706"/>
+                  <a:srgbClr val="3730A3"/>
                 </a:solidFill>
                 <a:ea typeface="Sylfaen"/>
                 <a:cs typeface="Sylfaen"/>
@@ -25899,7 +25899,7 @@
             <a:r>
               <a:rPr sz="1300">
                 <a:solidFill>
-                  <a:srgbClr val="1E293B"/>
+                  <a:srgbClr val="0F172A"/>
                 </a:solidFill>
                 <a:ea typeface="Sylfaen"/>
                 <a:cs typeface="Sylfaen"/>
@@ -26072,7 +26072,7 @@
             <a:avLst/>
           </a:prstGeom>
           <a:solidFill>
-            <a:srgbClr val="F59E0B"/>
+            <a:srgbClr val="4F46E5"/>
           </a:solidFill>
           <a:ln>
             <a:noFill/>
@@ -26116,7 +26116,7 @@
             <a:avLst/>
           </a:prstGeom>
           <a:solidFill>
-            <a:srgbClr val="F59E0B"/>
+            <a:srgbClr val="4F46E5"/>
           </a:solidFill>
           <a:ln>
             <a:noFill/>
@@ -26170,7 +26170,7 @@
             <a:r>
               <a:rPr sz="2600" b="1">
                 <a:solidFill>
-                  <a:srgbClr val="D97706"/>
+                  <a:srgbClr val="3730A3"/>
                 </a:solidFill>
                 <a:ea typeface="Sylfaen"/>
                 <a:cs typeface="Sylfaen"/>
@@ -26242,7 +26242,7 @@
             </a:avLst>
           </a:prstGeom>
           <a:solidFill>
-            <a:srgbClr val="F59E0B"/>
+            <a:srgbClr val="4F46E5"/>
           </a:solidFill>
           <a:ln>
             <a:noFill/>
@@ -26312,7 +26312,7 @@
             <a:r>
               <a:rPr sz="1300" b="0" i="0">
                 <a:solidFill>
-                  <a:srgbClr val="1E293B"/>
+                  <a:srgbClr val="0F172A"/>
                 </a:solidFill>
                 <a:ea typeface="Sylfaen"/>
                 <a:cs typeface="Sylfaen"/>
@@ -26338,7 +26338,7 @@
             <a:avLst/>
           </a:prstGeom>
           <a:solidFill>
-            <a:srgbClr val="F59E0B"/>
+            <a:srgbClr val="4F46E5"/>
           </a:solidFill>
           <a:ln>
             <a:noFill/>
@@ -26384,11 +26384,11 @@
             </a:avLst>
           </a:prstGeom>
           <a:solidFill>
-            <a:srgbClr val="FFF3E0"/>
+            <a:srgbClr val="FFF7ED"/>
           </a:solidFill>
           <a:ln w="6350">
             <a:solidFill>
-              <a:srgbClr val="F59E0B"/>
+              <a:srgbClr val="4F46E5"/>
             </a:solidFill>
           </a:ln>
           <a:effectLst/>
@@ -26445,7 +26445,7 @@
             <a:r>
               <a:rPr sz="1400" b="1" i="0">
                 <a:solidFill>
-                  <a:srgbClr val="1E293B"/>
+                  <a:srgbClr val="0F172A"/>
                 </a:solidFill>
                 <a:ea typeface="Sylfaen"/>
                 <a:cs typeface="Sylfaen"/>
@@ -26486,7 +26486,7 @@
             <a:r>
               <a:rPr sz="1300" b="0" i="0">
                 <a:solidFill>
-                  <a:srgbClr val="1E293B"/>
+                  <a:srgbClr val="0F172A"/>
                 </a:solidFill>
                 <a:ea typeface="Sylfaen"/>
                 <a:cs typeface="Sylfaen"/>
@@ -26512,7 +26512,7 @@
             <a:avLst/>
           </a:prstGeom>
           <a:solidFill>
-            <a:srgbClr val="D97706"/>
+            <a:srgbClr val="3730A3"/>
           </a:solidFill>
           <a:ln>
             <a:noFill/>
@@ -26619,7 +26619,7 @@
             <a:r>
               <a:rPr sz="1400" b="1" i="0">
                 <a:solidFill>
-                  <a:srgbClr val="1E293B"/>
+                  <a:srgbClr val="0F172A"/>
                 </a:solidFill>
                 <a:ea typeface="Sylfaen"/>
                 <a:cs typeface="Sylfaen"/>
@@ -26660,7 +26660,7 @@
             <a:r>
               <a:rPr sz="1300" b="0" i="0">
                 <a:solidFill>
-                  <a:srgbClr val="1E293B"/>
+                  <a:srgbClr val="0F172A"/>
                 </a:solidFill>
                 <a:ea typeface="Sylfaen"/>
                 <a:cs typeface="Sylfaen"/>
@@ -26833,7 +26833,7 @@
             <a:avLst/>
           </a:prstGeom>
           <a:solidFill>
-            <a:srgbClr val="F59E0B"/>
+            <a:srgbClr val="4F46E5"/>
           </a:solidFill>
           <a:ln>
             <a:noFill/>
@@ -26877,7 +26877,7 @@
             <a:avLst/>
           </a:prstGeom>
           <a:solidFill>
-            <a:srgbClr val="F59E0B"/>
+            <a:srgbClr val="4F46E5"/>
           </a:solidFill>
           <a:ln>
             <a:noFill/>
@@ -26931,7 +26931,7 @@
             <a:r>
               <a:rPr sz="2600" b="1">
                 <a:solidFill>
-                  <a:srgbClr val="D97706"/>
+                  <a:srgbClr val="3730A3"/>
                 </a:solidFill>
                 <a:ea typeface="Sylfaen"/>
                 <a:cs typeface="Sylfaen"/>
@@ -27003,7 +27003,7 @@
             </a:avLst>
           </a:prstGeom>
           <a:solidFill>
-            <a:srgbClr val="F59E0B"/>
+            <a:srgbClr val="4F46E5"/>
           </a:solidFill>
           <a:ln>
             <a:noFill/>
@@ -27073,7 +27073,7 @@
             <a:r>
               <a:rPr sz="1300" b="0" i="0">
                 <a:solidFill>
-                  <a:srgbClr val="1E293B"/>
+                  <a:srgbClr val="0F172A"/>
                 </a:solidFill>
                 <a:ea typeface="Sylfaen"/>
                 <a:cs typeface="Sylfaen"/>
@@ -27099,7 +27099,7 @@
             <a:avLst/>
           </a:prstGeom>
           <a:solidFill>
-            <a:srgbClr val="D97706"/>
+            <a:srgbClr val="3730A3"/>
           </a:solidFill>
           <a:ln>
             <a:noFill/>
@@ -27206,7 +27206,7 @@
             <a:r>
               <a:rPr sz="1400" b="1" i="0">
                 <a:solidFill>
-                  <a:srgbClr val="1E293B"/>
+                  <a:srgbClr val="0F172A"/>
                 </a:solidFill>
                 <a:ea typeface="Sylfaen"/>
                 <a:cs typeface="Sylfaen"/>
@@ -27247,7 +27247,7 @@
             <a:r>
               <a:rPr sz="1300" b="0" i="0">
                 <a:solidFill>
-                  <a:srgbClr val="1E293B"/>
+                  <a:srgbClr val="0F172A"/>
                 </a:solidFill>
                 <a:ea typeface="Sylfaen"/>
                 <a:cs typeface="Sylfaen"/>
@@ -27273,7 +27273,7 @@
             <a:avLst/>
           </a:prstGeom>
           <a:solidFill>
-            <a:srgbClr val="D97706"/>
+            <a:srgbClr val="3730A3"/>
           </a:solidFill>
           <a:ln>
             <a:noFill/>
@@ -27380,7 +27380,7 @@
             <a:r>
               <a:rPr sz="1400" b="1" i="0">
                 <a:solidFill>
-                  <a:srgbClr val="1E293B"/>
+                  <a:srgbClr val="0F172A"/>
                 </a:solidFill>
                 <a:ea typeface="Sylfaen"/>
                 <a:cs typeface="Sylfaen"/>
@@ -27421,7 +27421,7 @@
             <a:r>
               <a:rPr sz="1300" b="0" i="0">
                 <a:solidFill>
-                  <a:srgbClr val="1E293B"/>
+                  <a:srgbClr val="0F172A"/>
                 </a:solidFill>
                 <a:ea typeface="Sylfaen"/>
                 <a:cs typeface="Sylfaen"/>
@@ -27447,7 +27447,7 @@
             <a:avLst/>
           </a:prstGeom>
           <a:solidFill>
-            <a:srgbClr val="D97706"/>
+            <a:srgbClr val="3730A3"/>
           </a:solidFill>
           <a:ln>
             <a:noFill/>
@@ -27554,7 +27554,7 @@
             <a:r>
               <a:rPr sz="1400" b="1" i="0">
                 <a:solidFill>
-                  <a:srgbClr val="1E293B"/>
+                  <a:srgbClr val="0F172A"/>
                 </a:solidFill>
                 <a:ea typeface="Sylfaen"/>
                 <a:cs typeface="Sylfaen"/>
@@ -27595,7 +27595,7 @@
             <a:r>
               <a:rPr sz="1300" b="0" i="0">
                 <a:solidFill>
-                  <a:srgbClr val="1E293B"/>
+                  <a:srgbClr val="0F172A"/>
                 </a:solidFill>
                 <a:ea typeface="Sylfaen"/>
                 <a:cs typeface="Sylfaen"/>
@@ -27768,7 +27768,7 @@
             <a:avLst/>
           </a:prstGeom>
           <a:solidFill>
-            <a:srgbClr val="F59E0B"/>
+            <a:srgbClr val="4F46E5"/>
           </a:solidFill>
           <a:ln>
             <a:noFill/>
@@ -27812,7 +27812,7 @@
             <a:avLst/>
           </a:prstGeom>
           <a:solidFill>
-            <a:srgbClr val="F59E0B"/>
+            <a:srgbClr val="4F46E5"/>
           </a:solidFill>
           <a:ln>
             <a:noFill/>
@@ -27866,7 +27866,7 @@
             <a:r>
               <a:rPr sz="2600" b="1">
                 <a:solidFill>
-                  <a:srgbClr val="D97706"/>
+                  <a:srgbClr val="3730A3"/>
                 </a:solidFill>
                 <a:ea typeface="Sylfaen"/>
                 <a:cs typeface="Sylfaen"/>
@@ -27938,7 +27938,7 @@
             </a:avLst>
           </a:prstGeom>
           <a:solidFill>
-            <a:srgbClr val="F59E0B"/>
+            <a:srgbClr val="4F46E5"/>
           </a:solidFill>
           <a:ln>
             <a:noFill/>
@@ -28008,7 +28008,7 @@
             <a:r>
               <a:rPr sz="1300" b="0" i="0">
                 <a:solidFill>
-                  <a:srgbClr val="1E293B"/>
+                  <a:srgbClr val="0F172A"/>
                 </a:solidFill>
                 <a:ea typeface="Sylfaen"/>
                 <a:cs typeface="Sylfaen"/>
@@ -28034,7 +28034,7 @@
             <a:avLst/>
           </a:prstGeom>
           <a:solidFill>
-            <a:srgbClr val="F59E0B"/>
+            <a:srgbClr val="4F46E5"/>
           </a:solidFill>
           <a:ln>
             <a:noFill/>
@@ -28080,11 +28080,11 @@
             </a:avLst>
           </a:prstGeom>
           <a:solidFill>
-            <a:srgbClr val="FFF3E0"/>
+            <a:srgbClr val="FFF7ED"/>
           </a:solidFill>
           <a:ln w="6350">
             <a:solidFill>
-              <a:srgbClr val="F59E0B"/>
+              <a:srgbClr val="4F46E5"/>
             </a:solidFill>
           </a:ln>
           <a:effectLst/>
@@ -28141,7 +28141,7 @@
             <a:r>
               <a:rPr sz="1400" b="1" i="0">
                 <a:solidFill>
-                  <a:srgbClr val="1E293B"/>
+                  <a:srgbClr val="0F172A"/>
                 </a:solidFill>
                 <a:ea typeface="Sylfaen"/>
                 <a:cs typeface="Sylfaen"/>
@@ -28182,7 +28182,7 @@
             <a:r>
               <a:rPr sz="1300" b="0" i="0">
                 <a:solidFill>
-                  <a:srgbClr val="1E293B"/>
+                  <a:srgbClr val="0F172A"/>
                 </a:solidFill>
                 <a:ea typeface="Sylfaen"/>
                 <a:cs typeface="Sylfaen"/>
@@ -28208,7 +28208,7 @@
             <a:avLst/>
           </a:prstGeom>
           <a:solidFill>
-            <a:srgbClr val="D97706"/>
+            <a:srgbClr val="3730A3"/>
           </a:solidFill>
           <a:ln>
             <a:noFill/>
@@ -28315,7 +28315,7 @@
             <a:r>
               <a:rPr sz="1400" b="1" i="0">
                 <a:solidFill>
-                  <a:srgbClr val="1E293B"/>
+                  <a:srgbClr val="0F172A"/>
                 </a:solidFill>
                 <a:ea typeface="Sylfaen"/>
                 <a:cs typeface="Sylfaen"/>
@@ -28356,7 +28356,7 @@
             <a:r>
               <a:rPr sz="1300" b="0" i="0">
                 <a:solidFill>
-                  <a:srgbClr val="1E293B"/>
+                  <a:srgbClr val="0F172A"/>
                 </a:solidFill>
                 <a:ea typeface="Sylfaen"/>
                 <a:cs typeface="Sylfaen"/>
@@ -28529,7 +28529,7 @@
             <a:avLst/>
           </a:prstGeom>
           <a:solidFill>
-            <a:srgbClr val="F59E0B"/>
+            <a:srgbClr val="4F46E5"/>
           </a:solidFill>
           <a:ln>
             <a:noFill/>
@@ -28573,7 +28573,7 @@
             <a:avLst/>
           </a:prstGeom>
           <a:solidFill>
-            <a:srgbClr val="F59E0B"/>
+            <a:srgbClr val="4F46E5"/>
           </a:solidFill>
           <a:ln>
             <a:noFill/>
@@ -28627,7 +28627,7 @@
             <a:r>
               <a:rPr sz="2600" b="1">
                 <a:solidFill>
-                  <a:srgbClr val="D97706"/>
+                  <a:srgbClr val="3730A3"/>
                 </a:solidFill>
                 <a:ea typeface="Sylfaen"/>
                 <a:cs typeface="Sylfaen"/>
@@ -28699,7 +28699,7 @@
             </a:avLst>
           </a:prstGeom>
           <a:solidFill>
-            <a:srgbClr val="F59E0B"/>
+            <a:srgbClr val="4F46E5"/>
           </a:solidFill>
           <a:ln>
             <a:noFill/>
@@ -28769,7 +28769,7 @@
             <a:r>
               <a:rPr sz="1300" b="0" i="0">
                 <a:solidFill>
-                  <a:srgbClr val="1E293B"/>
+                  <a:srgbClr val="0F172A"/>
                 </a:solidFill>
                 <a:ea typeface="Sylfaen"/>
                 <a:cs typeface="Sylfaen"/>
@@ -28795,7 +28795,7 @@
             <a:avLst/>
           </a:prstGeom>
           <a:solidFill>
-            <a:srgbClr val="F59E0B"/>
+            <a:srgbClr val="4F46E5"/>
           </a:solidFill>
           <a:ln>
             <a:noFill/>
@@ -28841,11 +28841,11 @@
             </a:avLst>
           </a:prstGeom>
           <a:solidFill>
-            <a:srgbClr val="FFF3E0"/>
+            <a:srgbClr val="FFF7ED"/>
           </a:solidFill>
           <a:ln w="6350">
             <a:solidFill>
-              <a:srgbClr val="F59E0B"/>
+              <a:srgbClr val="4F46E5"/>
             </a:solidFill>
           </a:ln>
           <a:effectLst/>
@@ -28902,7 +28902,7 @@
             <a:r>
               <a:rPr sz="1400" b="1" i="0">
                 <a:solidFill>
-                  <a:srgbClr val="1E293B"/>
+                  <a:srgbClr val="0F172A"/>
                 </a:solidFill>
                 <a:ea typeface="Sylfaen"/>
                 <a:cs typeface="Sylfaen"/>
@@ -28943,7 +28943,7 @@
             <a:r>
               <a:rPr sz="1300" b="1">
                 <a:solidFill>
-                  <a:srgbClr val="D97706"/>
+                  <a:srgbClr val="3730A3"/>
                 </a:solidFill>
                 <a:ea typeface="Sylfaen"/>
                 <a:cs typeface="Sylfaen"/>
@@ -28954,7 +28954,7 @@
             <a:r>
               <a:rPr sz="1300">
                 <a:solidFill>
-                  <a:srgbClr val="1E293B"/>
+                  <a:srgbClr val="0F172A"/>
                 </a:solidFill>
                 <a:ea typeface="Sylfaen"/>
                 <a:cs typeface="Sylfaen"/>
@@ -28972,7 +28972,7 @@
             <a:r>
               <a:rPr sz="1300" b="1">
                 <a:solidFill>
-                  <a:srgbClr val="D97706"/>
+                  <a:srgbClr val="3730A3"/>
                 </a:solidFill>
                 <a:ea typeface="Sylfaen"/>
                 <a:cs typeface="Sylfaen"/>
@@ -28983,7 +28983,7 @@
             <a:r>
               <a:rPr sz="1300">
                 <a:solidFill>
-                  <a:srgbClr val="1E293B"/>
+                  <a:srgbClr val="0F172A"/>
                 </a:solidFill>
                 <a:ea typeface="Sylfaen"/>
                 <a:cs typeface="Sylfaen"/>
@@ -29001,7 +29001,7 @@
             <a:r>
               <a:rPr sz="1300" b="1">
                 <a:solidFill>
-                  <a:srgbClr val="D97706"/>
+                  <a:srgbClr val="3730A3"/>
                 </a:solidFill>
                 <a:ea typeface="Sylfaen"/>
                 <a:cs typeface="Sylfaen"/>
@@ -29012,7 +29012,7 @@
             <a:r>
               <a:rPr sz="1300">
                 <a:solidFill>
-                  <a:srgbClr val="1E293B"/>
+                  <a:srgbClr val="0F172A"/>
                 </a:solidFill>
                 <a:ea typeface="Sylfaen"/>
                 <a:cs typeface="Sylfaen"/>
@@ -29038,7 +29038,7 @@
             <a:avLst/>
           </a:prstGeom>
           <a:solidFill>
-            <a:srgbClr val="D97706"/>
+            <a:srgbClr val="3730A3"/>
           </a:solidFill>
           <a:ln>
             <a:noFill/>
@@ -29145,7 +29145,7 @@
             <a:r>
               <a:rPr sz="1400" b="1" i="0">
                 <a:solidFill>
-                  <a:srgbClr val="1E293B"/>
+                  <a:srgbClr val="0F172A"/>
                 </a:solidFill>
                 <a:ea typeface="Sylfaen"/>
                 <a:cs typeface="Sylfaen"/>
@@ -29186,7 +29186,7 @@
             <a:r>
               <a:rPr sz="1300" b="1">
                 <a:solidFill>
-                  <a:srgbClr val="D97706"/>
+                  <a:srgbClr val="3730A3"/>
                 </a:solidFill>
                 <a:ea typeface="Sylfaen"/>
                 <a:cs typeface="Sylfaen"/>
@@ -29197,7 +29197,7 @@
             <a:r>
               <a:rPr sz="1300">
                 <a:solidFill>
-                  <a:srgbClr val="1E293B"/>
+                  <a:srgbClr val="0F172A"/>
                 </a:solidFill>
                 <a:ea typeface="Sylfaen"/>
                 <a:cs typeface="Sylfaen"/>
@@ -29215,7 +29215,7 @@
             <a:r>
               <a:rPr sz="1300" b="1">
                 <a:solidFill>
-                  <a:srgbClr val="D97706"/>
+                  <a:srgbClr val="3730A3"/>
                 </a:solidFill>
                 <a:ea typeface="Sylfaen"/>
                 <a:cs typeface="Sylfaen"/>
@@ -29226,7 +29226,7 @@
             <a:r>
               <a:rPr sz="1300">
                 <a:solidFill>
-                  <a:srgbClr val="1E293B"/>
+                  <a:srgbClr val="0F172A"/>
                 </a:solidFill>
                 <a:ea typeface="Sylfaen"/>
                 <a:cs typeface="Sylfaen"/>
@@ -29244,7 +29244,7 @@
             <a:r>
               <a:rPr sz="1300" b="1">
                 <a:solidFill>
-                  <a:srgbClr val="D97706"/>
+                  <a:srgbClr val="3730A3"/>
                 </a:solidFill>
                 <a:ea typeface="Sylfaen"/>
                 <a:cs typeface="Sylfaen"/>
@@ -29255,7 +29255,7 @@
             <a:r>
               <a:rPr sz="1300">
                 <a:solidFill>
-                  <a:srgbClr val="1E293B"/>
+                  <a:srgbClr val="0F172A"/>
                 </a:solidFill>
                 <a:ea typeface="Sylfaen"/>
                 <a:cs typeface="Sylfaen"/>
@@ -29428,7 +29428,7 @@
             <a:avLst/>
           </a:prstGeom>
           <a:solidFill>
-            <a:srgbClr val="F59E0B"/>
+            <a:srgbClr val="4F46E5"/>
           </a:solidFill>
           <a:ln>
             <a:noFill/>
@@ -29472,7 +29472,7 @@
             <a:avLst/>
           </a:prstGeom>
           <a:solidFill>
-            <a:srgbClr val="F59E0B"/>
+            <a:srgbClr val="4F46E5"/>
           </a:solidFill>
           <a:ln>
             <a:noFill/>
@@ -29526,7 +29526,7 @@
             <a:r>
               <a:rPr sz="2600" b="1">
                 <a:solidFill>
-                  <a:srgbClr val="D97706"/>
+                  <a:srgbClr val="3730A3"/>
                 </a:solidFill>
                 <a:ea typeface="Sylfaen"/>
                 <a:cs typeface="Sylfaen"/>
@@ -29598,7 +29598,7 @@
             </a:avLst>
           </a:prstGeom>
           <a:solidFill>
-            <a:srgbClr val="F59E0B"/>
+            <a:srgbClr val="4F46E5"/>
           </a:solidFill>
           <a:ln>
             <a:noFill/>
@@ -29668,7 +29668,7 @@
             <a:r>
               <a:rPr sz="1300" b="0" i="0">
                 <a:solidFill>
-                  <a:srgbClr val="1E293B"/>
+                  <a:srgbClr val="0F172A"/>
                 </a:solidFill>
                 <a:ea typeface="Sylfaen"/>
                 <a:cs typeface="Sylfaen"/>
@@ -29694,7 +29694,7 @@
             <a:avLst/>
           </a:prstGeom>
           <a:solidFill>
-            <a:srgbClr val="F59E0B"/>
+            <a:srgbClr val="4F46E5"/>
           </a:solidFill>
           <a:ln>
             <a:noFill/>
@@ -29740,11 +29740,11 @@
             </a:avLst>
           </a:prstGeom>
           <a:solidFill>
-            <a:srgbClr val="FFF3E0"/>
+            <a:srgbClr val="FFF7ED"/>
           </a:solidFill>
           <a:ln w="6350">
             <a:solidFill>
-              <a:srgbClr val="F59E0B"/>
+              <a:srgbClr val="4F46E5"/>
             </a:solidFill>
           </a:ln>
           <a:effectLst/>
@@ -29801,7 +29801,7 @@
             <a:r>
               <a:rPr sz="1400" b="1" i="0">
                 <a:solidFill>
-                  <a:srgbClr val="1E293B"/>
+                  <a:srgbClr val="0F172A"/>
                 </a:solidFill>
                 <a:ea typeface="Sylfaen"/>
                 <a:cs typeface="Sylfaen"/>
@@ -29842,7 +29842,7 @@
             <a:r>
               <a:rPr sz="1300" b="0" i="0">
                 <a:solidFill>
-                  <a:srgbClr val="1E293B"/>
+                  <a:srgbClr val="0F172A"/>
                 </a:solidFill>
                 <a:ea typeface="Sylfaen"/>
                 <a:cs typeface="Sylfaen"/>
@@ -29868,7 +29868,7 @@
             <a:avLst/>
           </a:prstGeom>
           <a:solidFill>
-            <a:srgbClr val="D97706"/>
+            <a:srgbClr val="3730A3"/>
           </a:solidFill>
           <a:ln>
             <a:noFill/>
@@ -29975,7 +29975,7 @@
             <a:r>
               <a:rPr sz="1400" b="1" i="0">
                 <a:solidFill>
-                  <a:srgbClr val="1E293B"/>
+                  <a:srgbClr val="0F172A"/>
                 </a:solidFill>
                 <a:ea typeface="Sylfaen"/>
                 <a:cs typeface="Sylfaen"/>
@@ -30016,7 +30016,7 @@
             <a:r>
               <a:rPr sz="1300" b="0" i="0">
                 <a:solidFill>
-                  <a:srgbClr val="1E293B"/>
+                  <a:srgbClr val="0F172A"/>
                 </a:solidFill>
                 <a:ea typeface="Sylfaen"/>
                 <a:cs typeface="Sylfaen"/>
@@ -30189,7 +30189,7 @@
             <a:avLst/>
           </a:prstGeom>
           <a:solidFill>
-            <a:srgbClr val="F59E0B"/>
+            <a:srgbClr val="4F46E5"/>
           </a:solidFill>
           <a:ln>
             <a:noFill/>
@@ -30233,7 +30233,7 @@
             <a:avLst/>
           </a:prstGeom>
           <a:solidFill>
-            <a:srgbClr val="F59E0B"/>
+            <a:srgbClr val="4F46E5"/>
           </a:solidFill>
           <a:ln>
             <a:noFill/>
@@ -30287,7 +30287,7 @@
             <a:r>
               <a:rPr sz="2600" b="1">
                 <a:solidFill>
-                  <a:srgbClr val="D97706"/>
+                  <a:srgbClr val="3730A3"/>
                 </a:solidFill>
                 <a:ea typeface="Sylfaen"/>
                 <a:cs typeface="Sylfaen"/>
@@ -30359,7 +30359,7 @@
             </a:avLst>
           </a:prstGeom>
           <a:solidFill>
-            <a:srgbClr val="F59E0B"/>
+            <a:srgbClr val="4F46E5"/>
           </a:solidFill>
           <a:ln>
             <a:noFill/>
@@ -30429,7 +30429,7 @@
             <a:r>
               <a:rPr sz="1300" b="0" i="0">
                 <a:solidFill>
-                  <a:srgbClr val="1E293B"/>
+                  <a:srgbClr val="0F172A"/>
                 </a:solidFill>
                 <a:ea typeface="Sylfaen"/>
                 <a:cs typeface="Sylfaen"/>
@@ -30455,7 +30455,7 @@
             <a:avLst/>
           </a:prstGeom>
           <a:solidFill>
-            <a:srgbClr val="D97706"/>
+            <a:srgbClr val="3730A3"/>
           </a:solidFill>
           <a:ln>
             <a:noFill/>
@@ -30562,7 +30562,7 @@
             <a:r>
               <a:rPr sz="1400" b="1" i="0">
                 <a:solidFill>
-                  <a:srgbClr val="1E293B"/>
+                  <a:srgbClr val="0F172A"/>
                 </a:solidFill>
                 <a:ea typeface="Sylfaen"/>
                 <a:cs typeface="Sylfaen"/>
@@ -30603,7 +30603,7 @@
             <a:r>
               <a:rPr sz="1300" b="0" i="0">
                 <a:solidFill>
-                  <a:srgbClr val="1E293B"/>
+                  <a:srgbClr val="0F172A"/>
                 </a:solidFill>
                 <a:ea typeface="Sylfaen"/>
                 <a:cs typeface="Sylfaen"/>
@@ -30629,7 +30629,7 @@
             <a:avLst/>
           </a:prstGeom>
           <a:solidFill>
-            <a:srgbClr val="D97706"/>
+            <a:srgbClr val="3730A3"/>
           </a:solidFill>
           <a:ln>
             <a:noFill/>
@@ -30736,7 +30736,7 @@
             <a:r>
               <a:rPr sz="1400" b="1" i="0">
                 <a:solidFill>
-                  <a:srgbClr val="1E293B"/>
+                  <a:srgbClr val="0F172A"/>
                 </a:solidFill>
                 <a:ea typeface="Sylfaen"/>
                 <a:cs typeface="Sylfaen"/>
@@ -30777,7 +30777,7 @@
             <a:r>
               <a:rPr sz="1300" b="0" i="0">
                 <a:solidFill>
-                  <a:srgbClr val="1E293B"/>
+                  <a:srgbClr val="0F172A"/>
                 </a:solidFill>
                 <a:ea typeface="Sylfaen"/>
                 <a:cs typeface="Sylfaen"/>
@@ -30803,7 +30803,7 @@
             <a:avLst/>
           </a:prstGeom>
           <a:solidFill>
-            <a:srgbClr val="D97706"/>
+            <a:srgbClr val="3730A3"/>
           </a:solidFill>
           <a:ln>
             <a:noFill/>
@@ -30910,7 +30910,7 @@
             <a:r>
               <a:rPr sz="1400" b="1" i="0">
                 <a:solidFill>
-                  <a:srgbClr val="1E293B"/>
+                  <a:srgbClr val="0F172A"/>
                 </a:solidFill>
                 <a:ea typeface="Sylfaen"/>
                 <a:cs typeface="Sylfaen"/>
@@ -30951,7 +30951,7 @@
             <a:r>
               <a:rPr sz="1300" b="0" i="0">
                 <a:solidFill>
-                  <a:srgbClr val="1E293B"/>
+                  <a:srgbClr val="0F172A"/>
                 </a:solidFill>
                 <a:ea typeface="Sylfaen"/>
                 <a:cs typeface="Sylfaen"/>
@@ -31124,7 +31124,7 @@
             <a:avLst/>
           </a:prstGeom>
           <a:solidFill>
-            <a:srgbClr val="F59E0B"/>
+            <a:srgbClr val="4F46E5"/>
           </a:solidFill>
           <a:ln>
             <a:noFill/>
@@ -31168,7 +31168,7 @@
             <a:avLst/>
           </a:prstGeom>
           <a:solidFill>
-            <a:srgbClr val="F59E0B"/>
+            <a:srgbClr val="4F46E5"/>
           </a:solidFill>
           <a:ln>
             <a:noFill/>
@@ -31222,7 +31222,7 @@
             <a:r>
               <a:rPr sz="2600" b="1">
                 <a:solidFill>
-                  <a:srgbClr val="D97706"/>
+                  <a:srgbClr val="3730A3"/>
                 </a:solidFill>
                 <a:ea typeface="Sylfaen"/>
                 <a:cs typeface="Sylfaen"/>
@@ -31294,7 +31294,7 @@
             </a:avLst>
           </a:prstGeom>
           <a:solidFill>
-            <a:srgbClr val="F59E0B"/>
+            <a:srgbClr val="4F46E5"/>
           </a:solidFill>
           <a:ln>
             <a:noFill/>
@@ -31364,7 +31364,7 @@
             <a:r>
               <a:rPr sz="1300" b="0" i="0">
                 <a:solidFill>
-                  <a:srgbClr val="1E293B"/>
+                  <a:srgbClr val="0F172A"/>
                 </a:solidFill>
                 <a:ea typeface="Sylfaen"/>
                 <a:cs typeface="Sylfaen"/>
@@ -31390,7 +31390,7 @@
             <a:avLst/>
           </a:prstGeom>
           <a:solidFill>
-            <a:srgbClr val="D97706"/>
+            <a:srgbClr val="3730A3"/>
           </a:solidFill>
           <a:ln>
             <a:noFill/>
@@ -31436,11 +31436,11 @@
             </a:avLst>
           </a:prstGeom>
           <a:solidFill>
-            <a:srgbClr val="FDF3D8"/>
+            <a:srgbClr val="EEF2FF"/>
           </a:solidFill>
           <a:ln w="6350">
             <a:solidFill>
-              <a:srgbClr val="D97706"/>
+              <a:srgbClr val="3730A3"/>
             </a:solidFill>
           </a:ln>
           <a:effectLst/>
@@ -31497,7 +31497,7 @@
             <a:r>
               <a:rPr sz="1400" b="1" i="0">
                 <a:solidFill>
-                  <a:srgbClr val="1E293B"/>
+                  <a:srgbClr val="0F172A"/>
                 </a:solidFill>
                 <a:ea typeface="Sylfaen"/>
                 <a:cs typeface="Sylfaen"/>
@@ -31538,7 +31538,7 @@
             <a:r>
               <a:rPr sz="1300" b="1">
                 <a:solidFill>
-                  <a:srgbClr val="D97706"/>
+                  <a:srgbClr val="3730A3"/>
                 </a:solidFill>
                 <a:ea typeface="Sylfaen"/>
                 <a:cs typeface="Sylfaen"/>
@@ -31549,7 +31549,7 @@
             <a:r>
               <a:rPr sz="1300">
                 <a:solidFill>
-                  <a:srgbClr val="1E293B"/>
+                  <a:srgbClr val="0F172A"/>
                 </a:solidFill>
                 <a:ea typeface="Sylfaen"/>
                 <a:cs typeface="Sylfaen"/>
@@ -31567,7 +31567,7 @@
             <a:r>
               <a:rPr sz="1300" b="1">
                 <a:solidFill>
-                  <a:srgbClr val="D97706"/>
+                  <a:srgbClr val="3730A3"/>
                 </a:solidFill>
                 <a:ea typeface="Sylfaen"/>
                 <a:cs typeface="Sylfaen"/>
@@ -31578,7 +31578,7 @@
             <a:r>
               <a:rPr sz="1300">
                 <a:solidFill>
-                  <a:srgbClr val="1E293B"/>
+                  <a:srgbClr val="0F172A"/>
                 </a:solidFill>
                 <a:ea typeface="Sylfaen"/>
                 <a:cs typeface="Sylfaen"/>
@@ -31596,7 +31596,7 @@
             <a:r>
               <a:rPr sz="1300" b="1">
                 <a:solidFill>
-                  <a:srgbClr val="D97706"/>
+                  <a:srgbClr val="3730A3"/>
                 </a:solidFill>
                 <a:ea typeface="Sylfaen"/>
                 <a:cs typeface="Sylfaen"/>
@@ -31607,7 +31607,7 @@
             <a:r>
               <a:rPr sz="1300">
                 <a:solidFill>
-                  <a:srgbClr val="1E293B"/>
+                  <a:srgbClr val="0F172A"/>
                 </a:solidFill>
                 <a:ea typeface="Sylfaen"/>
                 <a:cs typeface="Sylfaen"/>
@@ -31625,7 +31625,7 @@
             <a:r>
               <a:rPr sz="1300" b="1">
                 <a:solidFill>
-                  <a:srgbClr val="D97706"/>
+                  <a:srgbClr val="3730A3"/>
                 </a:solidFill>
                 <a:ea typeface="Sylfaen"/>
                 <a:cs typeface="Sylfaen"/>
@@ -31636,7 +31636,7 @@
             <a:r>
               <a:rPr sz="1300">
                 <a:solidFill>
-                  <a:srgbClr val="1E293B"/>
+                  <a:srgbClr val="0F172A"/>
                 </a:solidFill>
                 <a:ea typeface="Sylfaen"/>
                 <a:cs typeface="Sylfaen"/>
@@ -31662,7 +31662,7 @@
             <a:avLst/>
           </a:prstGeom>
           <a:solidFill>
-            <a:srgbClr val="D97706"/>
+            <a:srgbClr val="3730A3"/>
           </a:solidFill>
           <a:ln>
             <a:noFill/>
@@ -31712,7 +31712,7 @@
           </a:solidFill>
           <a:ln w="6350">
             <a:solidFill>
-              <a:srgbClr val="D97706"/>
+              <a:srgbClr val="3730A3"/>
             </a:solidFill>
           </a:ln>
           <a:effectLst/>
@@ -31754,7 +31754,7 @@
             <a:avLst/>
           </a:prstGeom>
           <a:solidFill>
-            <a:srgbClr val="D97706"/>
+            <a:srgbClr val="3730A3"/>
           </a:solidFill>
           <a:ln>
             <a:noFill/>
@@ -31907,7 +31907,7 @@
             <a:r>
               <a:rPr sz="1200">
                 <a:solidFill>
-                  <a:srgbClr val="1E293B"/>
+                  <a:srgbClr val="0F172A"/>
                 </a:solidFill>
                 <a:ea typeface="Consolas"/>
                 <a:cs typeface="Consolas"/>
@@ -32042,7 +32042,7 @@
             <a:r>
               <a:rPr sz="1000">
                 <a:solidFill>
-                  <a:srgbClr val="1E293B"/>
+                  <a:srgbClr val="0F172A"/>
                 </a:solidFill>
                 <a:ea typeface="Consolas"/>
                 <a:cs typeface="Consolas"/>
@@ -32060,7 +32060,7 @@
             <a:r>
               <a:rPr sz="1000">
                 <a:solidFill>
-                  <a:srgbClr val="1E293B"/>
+                  <a:srgbClr val="0F172A"/>
                 </a:solidFill>
                 <a:ea typeface="Consolas"/>
                 <a:cs typeface="Consolas"/>
@@ -32078,7 +32078,7 @@
             <a:r>
               <a:rPr sz="1000">
                 <a:solidFill>
-                  <a:srgbClr val="1E293B"/>
+                  <a:srgbClr val="0F172A"/>
                 </a:solidFill>
                 <a:ea typeface="Consolas"/>
                 <a:cs typeface="Consolas"/>
@@ -32096,7 +32096,7 @@
             <a:r>
               <a:rPr sz="1000">
                 <a:solidFill>
-                  <a:srgbClr val="1E293B"/>
+                  <a:srgbClr val="0F172A"/>
                 </a:solidFill>
                 <a:ea typeface="Consolas"/>
                 <a:cs typeface="Consolas"/>
@@ -32114,7 +32114,7 @@
             <a:r>
               <a:rPr sz="1000">
                 <a:solidFill>
-                  <a:srgbClr val="1E293B"/>
+                  <a:srgbClr val="0F172A"/>
                 </a:solidFill>
                 <a:ea typeface="Consolas"/>
                 <a:cs typeface="Consolas"/>
@@ -32132,7 +32132,7 @@
             <a:r>
               <a:rPr sz="1000">
                 <a:solidFill>
-                  <a:srgbClr val="1E293B"/>
+                  <a:srgbClr val="0F172A"/>
                 </a:solidFill>
                 <a:ea typeface="Consolas"/>
                 <a:cs typeface="Consolas"/>
@@ -32305,7 +32305,7 @@
             <a:avLst/>
           </a:prstGeom>
           <a:solidFill>
-            <a:srgbClr val="F59E0B"/>
+            <a:srgbClr val="4F46E5"/>
           </a:solidFill>
           <a:ln>
             <a:noFill/>
@@ -32349,7 +32349,7 @@
             <a:avLst/>
           </a:prstGeom>
           <a:solidFill>
-            <a:srgbClr val="F59E0B"/>
+            <a:srgbClr val="4F46E5"/>
           </a:solidFill>
           <a:ln>
             <a:noFill/>
@@ -32403,7 +32403,7 @@
             <a:r>
               <a:rPr sz="2600" b="1">
                 <a:solidFill>
-                  <a:srgbClr val="D97706"/>
+                  <a:srgbClr val="3730A3"/>
                 </a:solidFill>
                 <a:ea typeface="Sylfaen"/>
                 <a:cs typeface="Sylfaen"/>
@@ -32475,7 +32475,7 @@
             </a:avLst>
           </a:prstGeom>
           <a:solidFill>
-            <a:srgbClr val="F59E0B"/>
+            <a:srgbClr val="4F46E5"/>
           </a:solidFill>
           <a:ln>
             <a:noFill/>
@@ -32545,7 +32545,7 @@
             <a:r>
               <a:rPr sz="1300" b="0" i="0">
                 <a:solidFill>
-                  <a:srgbClr val="1E293B"/>
+                  <a:srgbClr val="0F172A"/>
                 </a:solidFill>
                 <a:ea typeface="Sylfaen"/>
                 <a:cs typeface="Sylfaen"/>
@@ -32571,7 +32571,7 @@
             <a:avLst/>
           </a:prstGeom>
           <a:solidFill>
-            <a:srgbClr val="F59E0B"/>
+            <a:srgbClr val="4F46E5"/>
           </a:solidFill>
           <a:ln>
             <a:noFill/>
@@ -32617,11 +32617,11 @@
             </a:avLst>
           </a:prstGeom>
           <a:solidFill>
-            <a:srgbClr val="FFF3E0"/>
+            <a:srgbClr val="FFF7ED"/>
           </a:solidFill>
           <a:ln w="6350">
             <a:solidFill>
-              <a:srgbClr val="F59E0B"/>
+              <a:srgbClr val="4F46E5"/>
             </a:solidFill>
           </a:ln>
           <a:effectLst/>
@@ -32678,7 +32678,7 @@
             <a:r>
               <a:rPr sz="1400" b="1" i="0">
                 <a:solidFill>
-                  <a:srgbClr val="1E293B"/>
+                  <a:srgbClr val="0F172A"/>
                 </a:solidFill>
                 <a:ea typeface="Sylfaen"/>
                 <a:cs typeface="Sylfaen"/>
@@ -32719,7 +32719,7 @@
             <a:r>
               <a:rPr sz="1300" b="1">
                 <a:solidFill>
-                  <a:srgbClr val="D97706"/>
+                  <a:srgbClr val="3730A3"/>
                 </a:solidFill>
                 <a:ea typeface="Sylfaen"/>
                 <a:cs typeface="Sylfaen"/>
@@ -32730,7 +32730,7 @@
             <a:r>
               <a:rPr sz="1300">
                 <a:solidFill>
-                  <a:srgbClr val="1E293B"/>
+                  <a:srgbClr val="0F172A"/>
                 </a:solidFill>
                 <a:ea typeface="Sylfaen"/>
                 <a:cs typeface="Sylfaen"/>
@@ -32748,7 +32748,7 @@
             <a:r>
               <a:rPr sz="1300" b="1">
                 <a:solidFill>
-                  <a:srgbClr val="D97706"/>
+                  <a:srgbClr val="3730A3"/>
                 </a:solidFill>
                 <a:ea typeface="Sylfaen"/>
                 <a:cs typeface="Sylfaen"/>
@@ -32759,7 +32759,7 @@
             <a:r>
               <a:rPr sz="1300">
                 <a:solidFill>
-                  <a:srgbClr val="1E293B"/>
+                  <a:srgbClr val="0F172A"/>
                 </a:solidFill>
                 <a:ea typeface="Sylfaen"/>
                 <a:cs typeface="Sylfaen"/>
@@ -32777,7 +32777,7 @@
             <a:r>
               <a:rPr sz="1300" b="1">
                 <a:solidFill>
-                  <a:srgbClr val="D97706"/>
+                  <a:srgbClr val="3730A3"/>
                 </a:solidFill>
                 <a:ea typeface="Sylfaen"/>
                 <a:cs typeface="Sylfaen"/>
@@ -32788,7 +32788,7 @@
             <a:r>
               <a:rPr sz="1300">
                 <a:solidFill>
-                  <a:srgbClr val="1E293B"/>
+                  <a:srgbClr val="0F172A"/>
                 </a:solidFill>
                 <a:ea typeface="Sylfaen"/>
                 <a:cs typeface="Sylfaen"/>
@@ -32814,7 +32814,7 @@
             <a:avLst/>
           </a:prstGeom>
           <a:solidFill>
-            <a:srgbClr val="D97706"/>
+            <a:srgbClr val="3730A3"/>
           </a:solidFill>
           <a:ln>
             <a:noFill/>
@@ -32921,7 +32921,7 @@
             <a:r>
               <a:rPr sz="1400" b="1" i="0">
                 <a:solidFill>
-                  <a:srgbClr val="1E293B"/>
+                  <a:srgbClr val="0F172A"/>
                 </a:solidFill>
                 <a:ea typeface="Sylfaen"/>
                 <a:cs typeface="Sylfaen"/>
@@ -32962,7 +32962,7 @@
             <a:r>
               <a:rPr sz="1300" b="1">
                 <a:solidFill>
-                  <a:srgbClr val="D97706"/>
+                  <a:srgbClr val="3730A3"/>
                 </a:solidFill>
                 <a:ea typeface="Sylfaen"/>
                 <a:cs typeface="Sylfaen"/>
@@ -32973,7 +32973,7 @@
             <a:r>
               <a:rPr sz="1300">
                 <a:solidFill>
-                  <a:srgbClr val="1E293B"/>
+                  <a:srgbClr val="0F172A"/>
                 </a:solidFill>
                 <a:ea typeface="Sylfaen"/>
                 <a:cs typeface="Sylfaen"/>
@@ -32991,7 +32991,7 @@
             <a:r>
               <a:rPr sz="1300" b="1">
                 <a:solidFill>
-                  <a:srgbClr val="D97706"/>
+                  <a:srgbClr val="3730A3"/>
                 </a:solidFill>
                 <a:ea typeface="Sylfaen"/>
                 <a:cs typeface="Sylfaen"/>
@@ -33002,7 +33002,7 @@
             <a:r>
               <a:rPr sz="1300">
                 <a:solidFill>
-                  <a:srgbClr val="1E293B"/>
+                  <a:srgbClr val="0F172A"/>
                 </a:solidFill>
                 <a:ea typeface="Sylfaen"/>
                 <a:cs typeface="Sylfaen"/>
@@ -33020,7 +33020,7 @@
             <a:r>
               <a:rPr sz="1300" b="1">
                 <a:solidFill>
-                  <a:srgbClr val="D97706"/>
+                  <a:srgbClr val="3730A3"/>
                 </a:solidFill>
                 <a:ea typeface="Sylfaen"/>
                 <a:cs typeface="Sylfaen"/>
@@ -33031,7 +33031,7 @@
             <a:r>
               <a:rPr sz="1300">
                 <a:solidFill>
-                  <a:srgbClr val="1E293B"/>
+                  <a:srgbClr val="0F172A"/>
                 </a:solidFill>
                 <a:ea typeface="Sylfaen"/>
                 <a:cs typeface="Sylfaen"/>
@@ -33204,7 +33204,7 @@
             <a:avLst/>
           </a:prstGeom>
           <a:solidFill>
-            <a:srgbClr val="F59E0B"/>
+            <a:srgbClr val="4F46E5"/>
           </a:solidFill>
           <a:ln>
             <a:noFill/>
@@ -33248,7 +33248,7 @@
             <a:avLst/>
           </a:prstGeom>
           <a:solidFill>
-            <a:srgbClr val="F59E0B"/>
+            <a:srgbClr val="4F46E5"/>
           </a:solidFill>
           <a:ln>
             <a:noFill/>
@@ -33302,7 +33302,7 @@
             <a:r>
               <a:rPr sz="2600" b="1">
                 <a:solidFill>
-                  <a:srgbClr val="D97706"/>
+                  <a:srgbClr val="3730A3"/>
                 </a:solidFill>
                 <a:ea typeface="Sylfaen"/>
                 <a:cs typeface="Sylfaen"/>
@@ -33374,7 +33374,7 @@
             </a:avLst>
           </a:prstGeom>
           <a:solidFill>
-            <a:srgbClr val="F59E0B"/>
+            <a:srgbClr val="4F46E5"/>
           </a:solidFill>
           <a:ln>
             <a:noFill/>
@@ -33444,7 +33444,7 @@
             <a:r>
               <a:rPr sz="1300" b="0" i="0">
                 <a:solidFill>
-                  <a:srgbClr val="1E293B"/>
+                  <a:srgbClr val="0F172A"/>
                 </a:solidFill>
                 <a:ea typeface="Sylfaen"/>
                 <a:cs typeface="Sylfaen"/>
@@ -33470,7 +33470,7 @@
             <a:avLst/>
           </a:prstGeom>
           <a:solidFill>
-            <a:srgbClr val="D97706"/>
+            <a:srgbClr val="3730A3"/>
           </a:solidFill>
           <a:ln>
             <a:noFill/>
@@ -33577,7 +33577,7 @@
             <a:r>
               <a:rPr sz="1400" b="1" i="0">
                 <a:solidFill>
-                  <a:srgbClr val="1E293B"/>
+                  <a:srgbClr val="0F172A"/>
                 </a:solidFill>
                 <a:ea typeface="Sylfaen"/>
                 <a:cs typeface="Sylfaen"/>
@@ -33618,7 +33618,7 @@
             <a:r>
               <a:rPr sz="1300" b="1">
                 <a:solidFill>
-                  <a:srgbClr val="D97706"/>
+                  <a:srgbClr val="3730A3"/>
                 </a:solidFill>
                 <a:ea typeface="Sylfaen"/>
                 <a:cs typeface="Sylfaen"/>
@@ -33629,7 +33629,7 @@
             <a:r>
               <a:rPr sz="1300">
                 <a:solidFill>
-                  <a:srgbClr val="1E293B"/>
+                  <a:srgbClr val="0F172A"/>
                 </a:solidFill>
                 <a:ea typeface="Sylfaen"/>
                 <a:cs typeface="Sylfaen"/>
@@ -33647,7 +33647,7 @@
             <a:r>
               <a:rPr sz="1300" b="1">
                 <a:solidFill>
-                  <a:srgbClr val="D97706"/>
+                  <a:srgbClr val="3730A3"/>
                 </a:solidFill>
                 <a:ea typeface="Sylfaen"/>
                 <a:cs typeface="Sylfaen"/>
@@ -33658,7 +33658,7 @@
             <a:r>
               <a:rPr sz="1300">
                 <a:solidFill>
-                  <a:srgbClr val="1E293B"/>
+                  <a:srgbClr val="0F172A"/>
                 </a:solidFill>
                 <a:ea typeface="Sylfaen"/>
                 <a:cs typeface="Sylfaen"/>
@@ -33676,7 +33676,7 @@
             <a:r>
               <a:rPr sz="1300" b="1">
                 <a:solidFill>
-                  <a:srgbClr val="D97706"/>
+                  <a:srgbClr val="3730A3"/>
                 </a:solidFill>
                 <a:ea typeface="Sylfaen"/>
                 <a:cs typeface="Sylfaen"/>
@@ -33687,7 +33687,7 @@
             <a:r>
               <a:rPr sz="1300">
                 <a:solidFill>
-                  <a:srgbClr val="1E293B"/>
+                  <a:srgbClr val="0F172A"/>
                 </a:solidFill>
                 <a:ea typeface="Sylfaen"/>
                 <a:cs typeface="Sylfaen"/>
@@ -33705,7 +33705,7 @@
             <a:r>
               <a:rPr sz="1300" b="1">
                 <a:solidFill>
-                  <a:srgbClr val="D97706"/>
+                  <a:srgbClr val="3730A3"/>
                 </a:solidFill>
                 <a:ea typeface="Sylfaen"/>
                 <a:cs typeface="Sylfaen"/>
@@ -33716,7 +33716,7 @@
             <a:r>
               <a:rPr sz="1300">
                 <a:solidFill>
-                  <a:srgbClr val="1E293B"/>
+                  <a:srgbClr val="0F172A"/>
                 </a:solidFill>
                 <a:ea typeface="Sylfaen"/>
                 <a:cs typeface="Sylfaen"/>
@@ -33889,7 +33889,7 @@
             <a:avLst/>
           </a:prstGeom>
           <a:solidFill>
-            <a:srgbClr val="F59E0B"/>
+            <a:srgbClr val="4F46E5"/>
           </a:solidFill>
           <a:ln>
             <a:noFill/>
@@ -33933,7 +33933,7 @@
             <a:avLst/>
           </a:prstGeom>
           <a:solidFill>
-            <a:srgbClr val="F59E0B"/>
+            <a:srgbClr val="4F46E5"/>
           </a:solidFill>
           <a:ln>
             <a:noFill/>
@@ -33987,7 +33987,7 @@
             <a:r>
               <a:rPr sz="2600" b="1">
                 <a:solidFill>
-                  <a:srgbClr val="D97706"/>
+                  <a:srgbClr val="3730A3"/>
                 </a:solidFill>
                 <a:ea typeface="Sylfaen"/>
                 <a:cs typeface="Sylfaen"/>
@@ -34059,7 +34059,7 @@
             </a:avLst>
           </a:prstGeom>
           <a:solidFill>
-            <a:srgbClr val="F59E0B"/>
+            <a:srgbClr val="4F46E5"/>
           </a:solidFill>
           <a:ln>
             <a:noFill/>
@@ -34129,7 +34129,7 @@
             <a:r>
               <a:rPr sz="1300" b="0" i="0">
                 <a:solidFill>
-                  <a:srgbClr val="1E293B"/>
+                  <a:srgbClr val="0F172A"/>
                 </a:solidFill>
                 <a:ea typeface="Sylfaen"/>
                 <a:cs typeface="Sylfaen"/>
@@ -34155,7 +34155,7 @@
             <a:avLst/>
           </a:prstGeom>
           <a:solidFill>
-            <a:srgbClr val="D97706"/>
+            <a:srgbClr val="3730A3"/>
           </a:solidFill>
           <a:ln>
             <a:noFill/>
@@ -34262,7 +34262,7 @@
             <a:r>
               <a:rPr sz="1400" b="1" i="0">
                 <a:solidFill>
-                  <a:srgbClr val="1E293B"/>
+                  <a:srgbClr val="0F172A"/>
                 </a:solidFill>
                 <a:ea typeface="Sylfaen"/>
                 <a:cs typeface="Sylfaen"/>
@@ -34303,7 +34303,7 @@
             <a:r>
               <a:rPr sz="1300" b="0" i="0">
                 <a:solidFill>
-                  <a:srgbClr val="1E293B"/>
+                  <a:srgbClr val="0F172A"/>
                 </a:solidFill>
                 <a:ea typeface="Sylfaen"/>
                 <a:cs typeface="Sylfaen"/>
@@ -34476,7 +34476,7 @@
             <a:avLst/>
           </a:prstGeom>
           <a:solidFill>
-            <a:srgbClr val="F59E0B"/>
+            <a:srgbClr val="4F46E5"/>
           </a:solidFill>
           <a:ln>
             <a:noFill/>
@@ -34520,7 +34520,7 @@
             <a:avLst/>
           </a:prstGeom>
           <a:solidFill>
-            <a:srgbClr val="F59E0B"/>
+            <a:srgbClr val="4F46E5"/>
           </a:solidFill>
           <a:ln>
             <a:noFill/>
@@ -34574,7 +34574,7 @@
             <a:r>
               <a:rPr sz="2600" b="1">
                 <a:solidFill>
-                  <a:srgbClr val="D97706"/>
+                  <a:srgbClr val="3730A3"/>
                 </a:solidFill>
                 <a:ea typeface="Sylfaen"/>
                 <a:cs typeface="Sylfaen"/>
@@ -34646,7 +34646,7 @@
             </a:avLst>
           </a:prstGeom>
           <a:solidFill>
-            <a:srgbClr val="F59E0B"/>
+            <a:srgbClr val="4F46E5"/>
           </a:solidFill>
           <a:ln>
             <a:noFill/>
@@ -34716,7 +34716,7 @@
             <a:r>
               <a:rPr sz="1300" b="0" i="0">
                 <a:solidFill>
-                  <a:srgbClr val="1E293B"/>
+                  <a:srgbClr val="0F172A"/>
                 </a:solidFill>
                 <a:ea typeface="Sylfaen"/>
                 <a:cs typeface="Sylfaen"/>
@@ -34742,7 +34742,7 @@
             <a:avLst/>
           </a:prstGeom>
           <a:solidFill>
-            <a:srgbClr val="F59E0B"/>
+            <a:srgbClr val="4F46E5"/>
           </a:solidFill>
           <a:ln>
             <a:noFill/>
@@ -34788,11 +34788,11 @@
             </a:avLst>
           </a:prstGeom>
           <a:solidFill>
-            <a:srgbClr val="FFF3E0"/>
+            <a:srgbClr val="FFF7ED"/>
           </a:solidFill>
           <a:ln w="6350">
             <a:solidFill>
-              <a:srgbClr val="F59E0B"/>
+              <a:srgbClr val="4F46E5"/>
             </a:solidFill>
           </a:ln>
           <a:effectLst/>
@@ -34849,7 +34849,7 @@
             <a:r>
               <a:rPr sz="1400" b="1" i="0">
                 <a:solidFill>
-                  <a:srgbClr val="1E293B"/>
+                  <a:srgbClr val="0F172A"/>
                 </a:solidFill>
                 <a:ea typeface="Sylfaen"/>
                 <a:cs typeface="Sylfaen"/>
@@ -34890,7 +34890,7 @@
             <a:r>
               <a:rPr sz="1300" b="1">
                 <a:solidFill>
-                  <a:srgbClr val="D97706"/>
+                  <a:srgbClr val="3730A3"/>
                 </a:solidFill>
                 <a:ea typeface="Sylfaen"/>
                 <a:cs typeface="Sylfaen"/>
@@ -34901,7 +34901,7 @@
             <a:r>
               <a:rPr sz="1300">
                 <a:solidFill>
-                  <a:srgbClr val="1E293B"/>
+                  <a:srgbClr val="0F172A"/>
                 </a:solidFill>
                 <a:ea typeface="Sylfaen"/>
                 <a:cs typeface="Sylfaen"/>
@@ -34919,7 +34919,7 @@
             <a:r>
               <a:rPr sz="1300" b="1">
                 <a:solidFill>
-                  <a:srgbClr val="D97706"/>
+                  <a:srgbClr val="3730A3"/>
                 </a:solidFill>
                 <a:ea typeface="Sylfaen"/>
                 <a:cs typeface="Sylfaen"/>
@@ -34930,7 +34930,7 @@
             <a:r>
               <a:rPr sz="1300">
                 <a:solidFill>
-                  <a:srgbClr val="1E293B"/>
+                  <a:srgbClr val="0F172A"/>
                 </a:solidFill>
                 <a:ea typeface="Sylfaen"/>
                 <a:cs typeface="Sylfaen"/>
@@ -34948,7 +34948,7 @@
             <a:r>
               <a:rPr sz="1300" b="1">
                 <a:solidFill>
-                  <a:srgbClr val="D97706"/>
+                  <a:srgbClr val="3730A3"/>
                 </a:solidFill>
                 <a:ea typeface="Sylfaen"/>
                 <a:cs typeface="Sylfaen"/>
@@ -34959,7 +34959,7 @@
             <a:r>
               <a:rPr sz="1300">
                 <a:solidFill>
-                  <a:srgbClr val="1E293B"/>
+                  <a:srgbClr val="0F172A"/>
                 </a:solidFill>
                 <a:ea typeface="Sylfaen"/>
                 <a:cs typeface="Sylfaen"/>
@@ -34985,7 +34985,7 @@
             <a:avLst/>
           </a:prstGeom>
           <a:solidFill>
-            <a:srgbClr val="D97706"/>
+            <a:srgbClr val="3730A3"/>
           </a:solidFill>
           <a:ln>
             <a:noFill/>
@@ -35035,7 +35035,7 @@
           </a:solidFill>
           <a:ln w="6350">
             <a:solidFill>
-              <a:srgbClr val="D97706"/>
+              <a:srgbClr val="3730A3"/>
             </a:solidFill>
           </a:ln>
           <a:effectLst/>
@@ -35077,7 +35077,7 @@
             <a:avLst/>
           </a:prstGeom>
           <a:solidFill>
-            <a:srgbClr val="D97706"/>
+            <a:srgbClr val="3730A3"/>
           </a:solidFill>
           <a:ln>
             <a:noFill/>
@@ -35230,7 +35230,7 @@
             <a:r>
               <a:rPr sz="1200">
                 <a:solidFill>
-                  <a:srgbClr val="1E293B"/>
+                  <a:srgbClr val="0F172A"/>
                 </a:solidFill>
                 <a:ea typeface="Consolas"/>
                 <a:cs typeface="Consolas"/>
@@ -35365,7 +35365,7 @@
             <a:r>
               <a:rPr sz="1000">
                 <a:solidFill>
-                  <a:srgbClr val="1E293B"/>
+                  <a:srgbClr val="0F172A"/>
                 </a:solidFill>
                 <a:ea typeface="Consolas"/>
                 <a:cs typeface="Consolas"/>
@@ -35383,7 +35383,7 @@
             <a:r>
               <a:rPr sz="1000">
                 <a:solidFill>
-                  <a:srgbClr val="1E293B"/>
+                  <a:srgbClr val="0F172A"/>
                 </a:solidFill>
                 <a:ea typeface="Consolas"/>
                 <a:cs typeface="Consolas"/>
@@ -35401,7 +35401,7 @@
             <a:r>
               <a:rPr sz="1000">
                 <a:solidFill>
-                  <a:srgbClr val="1E293B"/>
+                  <a:srgbClr val="0F172A"/>
                 </a:solidFill>
                 <a:ea typeface="Consolas"/>
                 <a:cs typeface="Consolas"/>
@@ -35419,7 +35419,7 @@
             <a:r>
               <a:rPr sz="1000">
                 <a:solidFill>
-                  <a:srgbClr val="1E293B"/>
+                  <a:srgbClr val="0F172A"/>
                 </a:solidFill>
                 <a:ea typeface="Consolas"/>
                 <a:cs typeface="Consolas"/>
@@ -35437,7 +35437,7 @@
             <a:r>
               <a:rPr sz="1000">
                 <a:solidFill>
-                  <a:srgbClr val="1E293B"/>
+                  <a:srgbClr val="0F172A"/>
                 </a:solidFill>
                 <a:ea typeface="Consolas"/>
                 <a:cs typeface="Consolas"/>
@@ -35455,7 +35455,7 @@
             <a:r>
               <a:rPr sz="1000">
                 <a:solidFill>
-                  <a:srgbClr val="1E293B"/>
+                  <a:srgbClr val="0F172A"/>
                 </a:solidFill>
                 <a:ea typeface="Consolas"/>
                 <a:cs typeface="Consolas"/>
@@ -35628,7 +35628,7 @@
             <a:avLst/>
           </a:prstGeom>
           <a:solidFill>
-            <a:srgbClr val="F59E0B"/>
+            <a:srgbClr val="4F46E5"/>
           </a:solidFill>
           <a:ln>
             <a:noFill/>
@@ -35672,7 +35672,7 @@
             <a:avLst/>
           </a:prstGeom>
           <a:solidFill>
-            <a:srgbClr val="F59E0B"/>
+            <a:srgbClr val="4F46E5"/>
           </a:solidFill>
           <a:ln>
             <a:noFill/>
@@ -35726,7 +35726,7 @@
             <a:r>
               <a:rPr sz="2600" b="1">
                 <a:solidFill>
-                  <a:srgbClr val="D97706"/>
+                  <a:srgbClr val="3730A3"/>
                 </a:solidFill>
                 <a:ea typeface="Sylfaen"/>
                 <a:cs typeface="Sylfaen"/>
@@ -35798,7 +35798,7 @@
             </a:avLst>
           </a:prstGeom>
           <a:solidFill>
-            <a:srgbClr val="F59E0B"/>
+            <a:srgbClr val="4F46E5"/>
           </a:solidFill>
           <a:ln>
             <a:noFill/>
@@ -35868,7 +35868,7 @@
             <a:r>
               <a:rPr sz="1300" b="0" i="0">
                 <a:solidFill>
-                  <a:srgbClr val="1E293B"/>
+                  <a:srgbClr val="0F172A"/>
                 </a:solidFill>
                 <a:ea typeface="Sylfaen"/>
                 <a:cs typeface="Sylfaen"/>
@@ -35894,7 +35894,7 @@
             <a:avLst/>
           </a:prstGeom>
           <a:solidFill>
-            <a:srgbClr val="D97706"/>
+            <a:srgbClr val="3730A3"/>
           </a:solidFill>
           <a:ln>
             <a:noFill/>
@@ -36001,7 +36001,7 @@
             <a:r>
               <a:rPr sz="1400" b="1" i="0">
                 <a:solidFill>
-                  <a:srgbClr val="1E293B"/>
+                  <a:srgbClr val="0F172A"/>
                 </a:solidFill>
                 <a:ea typeface="Sylfaen"/>
                 <a:cs typeface="Sylfaen"/>
@@ -36042,7 +36042,7 @@
             <a:r>
               <a:rPr sz="1300" b="1">
                 <a:solidFill>
-                  <a:srgbClr val="D97706"/>
+                  <a:srgbClr val="3730A3"/>
                 </a:solidFill>
                 <a:ea typeface="Sylfaen"/>
                 <a:cs typeface="Sylfaen"/>
@@ -36053,7 +36053,7 @@
             <a:r>
               <a:rPr sz="1300">
                 <a:solidFill>
-                  <a:srgbClr val="1E293B"/>
+                  <a:srgbClr val="0F172A"/>
                 </a:solidFill>
                 <a:ea typeface="Sylfaen"/>
                 <a:cs typeface="Sylfaen"/>
@@ -36071,7 +36071,7 @@
             <a:r>
               <a:rPr sz="1300" b="1">
                 <a:solidFill>
-                  <a:srgbClr val="D97706"/>
+                  <a:srgbClr val="3730A3"/>
                 </a:solidFill>
                 <a:ea typeface="Sylfaen"/>
                 <a:cs typeface="Sylfaen"/>
@@ -36082,7 +36082,7 @@
             <a:r>
               <a:rPr sz="1300">
                 <a:solidFill>
-                  <a:srgbClr val="1E293B"/>
+                  <a:srgbClr val="0F172A"/>
                 </a:solidFill>
                 <a:ea typeface="Sylfaen"/>
                 <a:cs typeface="Sylfaen"/>
@@ -36100,7 +36100,7 @@
             <a:r>
               <a:rPr sz="1300" b="1">
                 <a:solidFill>
-                  <a:srgbClr val="D97706"/>
+                  <a:srgbClr val="3730A3"/>
                 </a:solidFill>
                 <a:ea typeface="Sylfaen"/>
                 <a:cs typeface="Sylfaen"/>
@@ -36111,7 +36111,7 @@
             <a:r>
               <a:rPr sz="1300">
                 <a:solidFill>
-                  <a:srgbClr val="1E293B"/>
+                  <a:srgbClr val="0F172A"/>
                 </a:solidFill>
                 <a:ea typeface="Sylfaen"/>
                 <a:cs typeface="Sylfaen"/>
@@ -36137,7 +36137,7 @@
             <a:avLst/>
           </a:prstGeom>
           <a:solidFill>
-            <a:srgbClr val="D97706"/>
+            <a:srgbClr val="3730A3"/>
           </a:solidFill>
           <a:ln>
             <a:noFill/>
@@ -36244,7 +36244,7 @@
             <a:r>
               <a:rPr sz="900" b="1" i="0">
                 <a:solidFill>
-                  <a:srgbClr val="D97706"/>
+                  <a:srgbClr val="3730A3"/>
                 </a:solidFill>
                 <a:ea typeface="Consolas"/>
                 <a:cs typeface="Consolas"/>
@@ -36331,7 +36331,7 @@
             <a:r>
               <a:rPr sz="800">
                 <a:solidFill>
-                  <a:srgbClr val="1E293B"/>
+                  <a:srgbClr val="0F172A"/>
                 </a:solidFill>
                 <a:ea typeface="Consolas"/>
                 <a:cs typeface="Consolas"/>
@@ -36349,7 +36349,7 @@
             <a:r>
               <a:rPr sz="800">
                 <a:solidFill>
-                  <a:srgbClr val="1E293B"/>
+                  <a:srgbClr val="0F172A"/>
                 </a:solidFill>
                 <a:ea typeface="Consolas"/>
                 <a:cs typeface="Consolas"/>
@@ -36367,7 +36367,7 @@
             <a:r>
               <a:rPr sz="800">
                 <a:solidFill>
-                  <a:srgbClr val="1E293B"/>
+                  <a:srgbClr val="0F172A"/>
                 </a:solidFill>
                 <a:ea typeface="Consolas"/>
                 <a:cs typeface="Consolas"/>
@@ -36385,7 +36385,7 @@
             <a:r>
               <a:rPr sz="800">
                 <a:solidFill>
-                  <a:srgbClr val="1E293B"/>
+                  <a:srgbClr val="0F172A"/>
                 </a:solidFill>
                 <a:ea typeface="Consolas"/>
                 <a:cs typeface="Consolas"/>
@@ -36558,7 +36558,7 @@
             <a:avLst/>
           </a:prstGeom>
           <a:solidFill>
-            <a:srgbClr val="F59E0B"/>
+            <a:srgbClr val="4F46E5"/>
           </a:solidFill>
           <a:ln>
             <a:noFill/>
@@ -36602,7 +36602,7 @@
             <a:avLst/>
           </a:prstGeom>
           <a:solidFill>
-            <a:srgbClr val="F59E0B"/>
+            <a:srgbClr val="4F46E5"/>
           </a:solidFill>
           <a:ln>
             <a:noFill/>
@@ -36656,7 +36656,7 @@
             <a:r>
               <a:rPr sz="2600" b="1">
                 <a:solidFill>
-                  <a:srgbClr val="D97706"/>
+                  <a:srgbClr val="3730A3"/>
                 </a:solidFill>
                 <a:ea typeface="Sylfaen"/>
                 <a:cs typeface="Sylfaen"/>
@@ -36728,7 +36728,7 @@
             </a:avLst>
           </a:prstGeom>
           <a:solidFill>
-            <a:srgbClr val="F59E0B"/>
+            <a:srgbClr val="4F46E5"/>
           </a:solidFill>
           <a:ln>
             <a:noFill/>
@@ -36798,7 +36798,7 @@
             <a:r>
               <a:rPr sz="1300" b="0" i="0">
                 <a:solidFill>
-                  <a:srgbClr val="1E293B"/>
+                  <a:srgbClr val="0F172A"/>
                 </a:solidFill>
                 <a:ea typeface="Sylfaen"/>
                 <a:cs typeface="Sylfaen"/>
@@ -36824,7 +36824,7 @@
             <a:avLst/>
           </a:prstGeom>
           <a:solidFill>
-            <a:srgbClr val="D97706"/>
+            <a:srgbClr val="3730A3"/>
           </a:solidFill>
           <a:ln>
             <a:noFill/>
@@ -36931,7 +36931,7 @@
             <a:r>
               <a:rPr sz="1400" b="1" i="0">
                 <a:solidFill>
-                  <a:srgbClr val="1E293B"/>
+                  <a:srgbClr val="0F172A"/>
                 </a:solidFill>
                 <a:ea typeface="Sylfaen"/>
                 <a:cs typeface="Sylfaen"/>
@@ -36972,7 +36972,7 @@
             <a:r>
               <a:rPr sz="1300" b="0" i="0">
                 <a:solidFill>
-                  <a:srgbClr val="1E293B"/>
+                  <a:srgbClr val="0F172A"/>
                 </a:solidFill>
                 <a:ea typeface="Sylfaen"/>
                 <a:cs typeface="Sylfaen"/>
@@ -36998,7 +36998,7 @@
             <a:avLst/>
           </a:prstGeom>
           <a:solidFill>
-            <a:srgbClr val="D97706"/>
+            <a:srgbClr val="3730A3"/>
           </a:solidFill>
           <a:ln>
             <a:noFill/>
@@ -37105,7 +37105,7 @@
             <a:r>
               <a:rPr sz="1400" b="1" i="0">
                 <a:solidFill>
-                  <a:srgbClr val="1E293B"/>
+                  <a:srgbClr val="0F172A"/>
                 </a:solidFill>
                 <a:ea typeface="Sylfaen"/>
                 <a:cs typeface="Sylfaen"/>
@@ -37146,7 +37146,7 @@
             <a:r>
               <a:rPr sz="1300" b="0" i="0">
                 <a:solidFill>
-                  <a:srgbClr val="1E293B"/>
+                  <a:srgbClr val="0F172A"/>
                 </a:solidFill>
                 <a:ea typeface="Sylfaen"/>
                 <a:cs typeface="Sylfaen"/>
@@ -37172,7 +37172,7 @@
             <a:avLst/>
           </a:prstGeom>
           <a:solidFill>
-            <a:srgbClr val="D97706"/>
+            <a:srgbClr val="3730A3"/>
           </a:solidFill>
           <a:ln>
             <a:noFill/>
@@ -37279,7 +37279,7 @@
             <a:r>
               <a:rPr sz="1400" b="1" i="0">
                 <a:solidFill>
-                  <a:srgbClr val="1E293B"/>
+                  <a:srgbClr val="0F172A"/>
                 </a:solidFill>
                 <a:ea typeface="Sylfaen"/>
                 <a:cs typeface="Sylfaen"/>
@@ -37320,7 +37320,7 @@
             <a:r>
               <a:rPr sz="1300" b="0" i="0">
                 <a:solidFill>
-                  <a:srgbClr val="1E293B"/>
+                  <a:srgbClr val="0F172A"/>
                 </a:solidFill>
                 <a:ea typeface="Sylfaen"/>
                 <a:cs typeface="Sylfaen"/>
@@ -37346,7 +37346,7 @@
             <a:avLst/>
           </a:prstGeom>
           <a:solidFill>
-            <a:srgbClr val="D97706"/>
+            <a:srgbClr val="3730A3"/>
           </a:solidFill>
           <a:ln>
             <a:noFill/>
@@ -37453,7 +37453,7 @@
             <a:r>
               <a:rPr sz="1400" b="1" i="0">
                 <a:solidFill>
-                  <a:srgbClr val="1E293B"/>
+                  <a:srgbClr val="0F172A"/>
                 </a:solidFill>
                 <a:ea typeface="Sylfaen"/>
                 <a:cs typeface="Sylfaen"/>
@@ -37494,7 +37494,7 @@
             <a:r>
               <a:rPr sz="1300" b="0" i="0">
                 <a:solidFill>
-                  <a:srgbClr val="1E293B"/>
+                  <a:srgbClr val="0F172A"/>
                 </a:solidFill>
                 <a:ea typeface="Sylfaen"/>
                 <a:cs typeface="Sylfaen"/>
@@ -37667,7 +37667,7 @@
             <a:avLst/>
           </a:prstGeom>
           <a:solidFill>
-            <a:srgbClr val="F59E0B"/>
+            <a:srgbClr val="4F46E5"/>
           </a:solidFill>
           <a:ln>
             <a:noFill/>
@@ -37711,7 +37711,7 @@
             <a:avLst/>
           </a:prstGeom>
           <a:solidFill>
-            <a:srgbClr val="F59E0B"/>
+            <a:srgbClr val="4F46E5"/>
           </a:solidFill>
           <a:ln>
             <a:noFill/>
@@ -37765,7 +37765,7 @@
             <a:r>
               <a:rPr sz="2600" b="1">
                 <a:solidFill>
-                  <a:srgbClr val="D97706"/>
+                  <a:srgbClr val="3730A3"/>
                 </a:solidFill>
                 <a:ea typeface="Sylfaen"/>
                 <a:cs typeface="Sylfaen"/>
@@ -37837,7 +37837,7 @@
             </a:avLst>
           </a:prstGeom>
           <a:solidFill>
-            <a:srgbClr val="F59E0B"/>
+            <a:srgbClr val="4F46E5"/>
           </a:solidFill>
           <a:ln>
             <a:noFill/>
@@ -37907,7 +37907,7 @@
             <a:r>
               <a:rPr sz="1300" b="0" i="0">
                 <a:solidFill>
-                  <a:srgbClr val="1E293B"/>
+                  <a:srgbClr val="0F172A"/>
                 </a:solidFill>
                 <a:ea typeface="Sylfaen"/>
                 <a:cs typeface="Sylfaen"/>
@@ -37933,7 +37933,7 @@
             <a:avLst/>
           </a:prstGeom>
           <a:solidFill>
-            <a:srgbClr val="D97706"/>
+            <a:srgbClr val="3730A3"/>
           </a:solidFill>
           <a:ln>
             <a:noFill/>
@@ -37979,11 +37979,11 @@
             </a:avLst>
           </a:prstGeom>
           <a:solidFill>
-            <a:srgbClr val="FDF3D8"/>
+            <a:srgbClr val="EEF2FF"/>
           </a:solidFill>
           <a:ln w="6350">
             <a:solidFill>
-              <a:srgbClr val="D97706"/>
+              <a:srgbClr val="3730A3"/>
             </a:solidFill>
           </a:ln>
           <a:effectLst/>
@@ -38040,7 +38040,7 @@
             <a:r>
               <a:rPr sz="1400" b="1" i="0">
                 <a:solidFill>
-                  <a:srgbClr val="1E293B"/>
+                  <a:srgbClr val="0F172A"/>
                 </a:solidFill>
                 <a:ea typeface="Sylfaen"/>
                 <a:cs typeface="Sylfaen"/>
@@ -38081,7 +38081,7 @@
             <a:r>
               <a:rPr sz="1300" b="1">
                 <a:solidFill>
-                  <a:srgbClr val="D97706"/>
+                  <a:srgbClr val="3730A3"/>
                 </a:solidFill>
                 <a:ea typeface="Sylfaen"/>
                 <a:cs typeface="Sylfaen"/>
@@ -38092,7 +38092,7 @@
             <a:r>
               <a:rPr sz="1300">
                 <a:solidFill>
-                  <a:srgbClr val="1E293B"/>
+                  <a:srgbClr val="0F172A"/>
                 </a:solidFill>
                 <a:ea typeface="Sylfaen"/>
                 <a:cs typeface="Sylfaen"/>
@@ -38110,7 +38110,7 @@
             <a:r>
               <a:rPr sz="1300" b="1">
                 <a:solidFill>
-                  <a:srgbClr val="D97706"/>
+                  <a:srgbClr val="3730A3"/>
                 </a:solidFill>
                 <a:ea typeface="Sylfaen"/>
                 <a:cs typeface="Sylfaen"/>
@@ -38121,7 +38121,7 @@
             <a:r>
               <a:rPr sz="1300">
                 <a:solidFill>
-                  <a:srgbClr val="1E293B"/>
+                  <a:srgbClr val="0F172A"/>
                 </a:solidFill>
                 <a:ea typeface="Sylfaen"/>
                 <a:cs typeface="Sylfaen"/>
@@ -38139,7 +38139,7 @@
             <a:r>
               <a:rPr sz="1300" b="1">
                 <a:solidFill>
-                  <a:srgbClr val="D97706"/>
+                  <a:srgbClr val="3730A3"/>
                 </a:solidFill>
                 <a:ea typeface="Sylfaen"/>
                 <a:cs typeface="Sylfaen"/>
@@ -38150,7 +38150,7 @@
             <a:r>
               <a:rPr sz="1300">
                 <a:solidFill>
-                  <a:srgbClr val="1E293B"/>
+                  <a:srgbClr val="0F172A"/>
                 </a:solidFill>
                 <a:ea typeface="Sylfaen"/>
                 <a:cs typeface="Sylfaen"/>
@@ -38176,7 +38176,7 @@
             <a:avLst/>
           </a:prstGeom>
           <a:solidFill>
-            <a:srgbClr val="D97706"/>
+            <a:srgbClr val="3730A3"/>
           </a:solidFill>
           <a:ln>
             <a:noFill/>
@@ -38283,7 +38283,7 @@
             <a:r>
               <a:rPr sz="1400" b="1" i="0">
                 <a:solidFill>
-                  <a:srgbClr val="1E293B"/>
+                  <a:srgbClr val="0F172A"/>
                 </a:solidFill>
                 <a:ea typeface="Sylfaen"/>
                 <a:cs typeface="Sylfaen"/>
@@ -38324,7 +38324,7 @@
             <a:r>
               <a:rPr sz="1300" b="1">
                 <a:solidFill>
-                  <a:srgbClr val="D97706"/>
+                  <a:srgbClr val="3730A3"/>
                 </a:solidFill>
                 <a:ea typeface="Sylfaen"/>
                 <a:cs typeface="Sylfaen"/>
@@ -38335,7 +38335,7 @@
             <a:r>
               <a:rPr sz="1300">
                 <a:solidFill>
-                  <a:srgbClr val="1E293B"/>
+                  <a:srgbClr val="0F172A"/>
                 </a:solidFill>
                 <a:ea typeface="Sylfaen"/>
                 <a:cs typeface="Sylfaen"/>
@@ -38353,7 +38353,7 @@
             <a:r>
               <a:rPr sz="1300" b="1">
                 <a:solidFill>
-                  <a:srgbClr val="D97706"/>
+                  <a:srgbClr val="3730A3"/>
                 </a:solidFill>
                 <a:ea typeface="Sylfaen"/>
                 <a:cs typeface="Sylfaen"/>
@@ -38364,7 +38364,7 @@
             <a:r>
               <a:rPr sz="1300">
                 <a:solidFill>
-                  <a:srgbClr val="1E293B"/>
+                  <a:srgbClr val="0F172A"/>
                 </a:solidFill>
                 <a:ea typeface="Sylfaen"/>
                 <a:cs typeface="Sylfaen"/>
@@ -38537,7 +38537,7 @@
             <a:avLst/>
           </a:prstGeom>
           <a:solidFill>
-            <a:srgbClr val="F59E0B"/>
+            <a:srgbClr val="4F46E5"/>
           </a:solidFill>
           <a:ln>
             <a:noFill/>
@@ -38581,7 +38581,7 @@
             <a:avLst/>
           </a:prstGeom>
           <a:solidFill>
-            <a:srgbClr val="F59E0B"/>
+            <a:srgbClr val="4F46E5"/>
           </a:solidFill>
           <a:ln>
             <a:noFill/>
@@ -38635,7 +38635,7 @@
             <a:r>
               <a:rPr sz="2600" b="1">
                 <a:solidFill>
-                  <a:srgbClr val="D97706"/>
+                  <a:srgbClr val="3730A3"/>
                 </a:solidFill>
                 <a:ea typeface="Sylfaen"/>
                 <a:cs typeface="Sylfaen"/>
@@ -38707,7 +38707,7 @@
             </a:avLst>
           </a:prstGeom>
           <a:solidFill>
-            <a:srgbClr val="F59E0B"/>
+            <a:srgbClr val="4F46E5"/>
           </a:solidFill>
           <a:ln>
             <a:noFill/>
@@ -38777,7 +38777,7 @@
             <a:r>
               <a:rPr sz="1300" b="0" i="0">
                 <a:solidFill>
-                  <a:srgbClr val="1E293B"/>
+                  <a:srgbClr val="0F172A"/>
                 </a:solidFill>
                 <a:ea typeface="Sylfaen"/>
                 <a:cs typeface="Sylfaen"/>
@@ -38803,7 +38803,7 @@
             <a:avLst/>
           </a:prstGeom>
           <a:solidFill>
-            <a:srgbClr val="D97706"/>
+            <a:srgbClr val="3730A3"/>
           </a:solidFill>
           <a:ln>
             <a:noFill/>
@@ -38849,11 +38849,11 @@
             </a:avLst>
           </a:prstGeom>
           <a:solidFill>
-            <a:srgbClr val="FDF3D8"/>
+            <a:srgbClr val="EEF2FF"/>
           </a:solidFill>
           <a:ln w="9525">
             <a:solidFill>
-              <a:srgbClr val="D97706"/>
+              <a:srgbClr val="3730A3"/>
             </a:solidFill>
           </a:ln>
           <a:effectLst/>
@@ -38910,7 +38910,7 @@
             <a:r>
               <a:rPr sz="1400" b="1" i="0">
                 <a:solidFill>
-                  <a:srgbClr val="1E293B"/>
+                  <a:srgbClr val="0F172A"/>
                 </a:solidFill>
                 <a:ea typeface="Sylfaen"/>
                 <a:cs typeface="Sylfaen"/>
@@ -38951,7 +38951,7 @@
             <a:r>
               <a:rPr sz="1300" b="0" i="0">
                 <a:solidFill>
-                  <a:srgbClr val="1E293B"/>
+                  <a:srgbClr val="0F172A"/>
                 </a:solidFill>
                 <a:ea typeface="Sylfaen"/>
                 <a:cs typeface="Sylfaen"/>
@@ -38977,7 +38977,7 @@
             <a:avLst/>
           </a:prstGeom>
           <a:solidFill>
-            <a:srgbClr val="D97706"/>
+            <a:srgbClr val="3730A3"/>
           </a:solidFill>
           <a:ln>
             <a:noFill/>
@@ -39084,7 +39084,7 @@
             <a:r>
               <a:rPr sz="900" b="1" i="0">
                 <a:solidFill>
-                  <a:srgbClr val="D97706"/>
+                  <a:srgbClr val="3730A3"/>
                 </a:solidFill>
                 <a:ea typeface="Consolas"/>
                 <a:cs typeface="Consolas"/>
@@ -39171,7 +39171,7 @@
             <a:r>
               <a:rPr sz="800">
                 <a:solidFill>
-                  <a:srgbClr val="1E293B"/>
+                  <a:srgbClr val="0F172A"/>
                 </a:solidFill>
                 <a:ea typeface="Consolas"/>
                 <a:cs typeface="Consolas"/>
@@ -39189,7 +39189,7 @@
             <a:r>
               <a:rPr sz="800">
                 <a:solidFill>
-                  <a:srgbClr val="1E293B"/>
+                  <a:srgbClr val="0F172A"/>
                 </a:solidFill>
                 <a:ea typeface="Consolas"/>
                 <a:cs typeface="Consolas"/>
@@ -39207,7 +39207,7 @@
             <a:r>
               <a:rPr sz="800">
                 <a:solidFill>
-                  <a:srgbClr val="1E293B"/>
+                  <a:srgbClr val="0F172A"/>
                 </a:solidFill>
                 <a:ea typeface="Consolas"/>
                 <a:cs typeface="Consolas"/>
@@ -39225,7 +39225,7 @@
             <a:r>
               <a:rPr sz="800">
                 <a:solidFill>
-                  <a:srgbClr val="1E293B"/>
+                  <a:srgbClr val="0F172A"/>
                 </a:solidFill>
                 <a:ea typeface="Consolas"/>
                 <a:cs typeface="Consolas"/>

--- a/GITA/Pre-Acceleration/2026-5h-AI-for-Startups/day2-slides.pptx
+++ b/GITA/Pre-Acceleration/2026-5h-AI-for-Startups/day2-slides.pptx
@@ -14399,7 +14399,7 @@
                 <a:cs typeface="Sylfaen"/>
                 <a:latin typeface="Sylfaen"/>
               </a:rPr>
-              <a:t>0:00 - 1:05: Brand + Photo + Copy + Gamma</a:t>
+              <a:t>0:00 - 0:10: Day 2 Intro &amp; Objectives (10 წთ)</a:t>
             </a:r>
           </a:p>
           <a:p>
@@ -14428,7 +14428,7 @@
                 <a:cs typeface="Sylfaen"/>
                 <a:latin typeface="Sylfaen"/>
               </a:rPr>
-              <a:t>1:05 - 1:35: შესვენება (☕ 30 წთ)</a:t>
+              <a:t>0:10 - 1:00: Block VI: Copywriting &amp; Tone (50 წთ)</a:t>
             </a:r>
           </a:p>
           <a:p>
@@ -14457,7 +14457,7 @@
                 <a:cs typeface="Sylfaen"/>
                 <a:latin typeface="Sylfaen"/>
               </a:rPr>
-              <a:t>1:35 - 1:55: Technical Specification</a:t>
+              <a:t>1:00 - 1:05: ☕ შესვენება (5 წთ)</a:t>
             </a:r>
           </a:p>
           <a:p>
@@ -14486,7 +14486,7 @@
                 <a:cs typeface="Sylfaen"/>
                 <a:latin typeface="Sylfaen"/>
               </a:rPr>
-              <a:t>1:55 - 3:15: Lovable MVP + Supabase + GDPR</a:t>
+              <a:t>1:05 - 1:45: Block VII: Visual Identity &amp; Launch (40 წთ)</a:t>
             </a:r>
           </a:p>
           <a:p>
@@ -14515,7 +14515,7 @@
                 <a:cs typeface="Sylfaen"/>
                 <a:latin typeface="Sylfaen"/>
               </a:rPr>
-              <a:t>3:15 - 4:00: ავტომატიზაცია (Make.com)</a:t>
+              <a:t>1:45 - 2:15: 🥪 მთავარი შესვენება (30 წთ)</a:t>
             </a:r>
           </a:p>
           <a:p>
@@ -14544,7 +14544,123 @@
                 <a:cs typeface="Sylfaen"/>
                 <a:latin typeface="Sylfaen"/>
               </a:rPr>
-              <a:t>4:00 - 5:00: Pitch Deck + VC Mock Grill</a:t>
+              <a:t>2:15 - 3:15: Block VIII: Lovable MVP &amp; Tech Spec (60 წთ)</a:t>
+            </a:r>
+          </a:p>
+          <a:p>
+            <a:pPr algn="l">
+              <a:spcAft>
+                <a:spcPts val="300"/>
+              </a:spcAft>
+            </a:pPr>
+            <a:r>
+              <a:rPr sz="1300" b="1">
+                <a:solidFill>
+                  <a:srgbClr val="3730A3"/>
+                </a:solidFill>
+                <a:ea typeface="Sylfaen"/>
+                <a:cs typeface="Sylfaen"/>
+                <a:latin typeface="Sylfaen"/>
+              </a:rPr>
+              <a:t>▸  </a:t>
+            </a:r>
+            <a:r>
+              <a:rPr sz="1300">
+                <a:solidFill>
+                  <a:srgbClr val="0F172A"/>
+                </a:solidFill>
+                <a:ea typeface="Sylfaen"/>
+                <a:cs typeface="Sylfaen"/>
+                <a:latin typeface="Sylfaen"/>
+              </a:rPr>
+              <a:t>3:15 - 3:20: ☕ შესვენება (5 წთ)</a:t>
+            </a:r>
+          </a:p>
+          <a:p>
+            <a:pPr algn="l">
+              <a:spcAft>
+                <a:spcPts val="300"/>
+              </a:spcAft>
+            </a:pPr>
+            <a:r>
+              <a:rPr sz="1300" b="1">
+                <a:solidFill>
+                  <a:srgbClr val="3730A3"/>
+                </a:solidFill>
+                <a:ea typeface="Sylfaen"/>
+                <a:cs typeface="Sylfaen"/>
+                <a:latin typeface="Sylfaen"/>
+              </a:rPr>
+              <a:t>▸  </a:t>
+            </a:r>
+            <a:r>
+              <a:rPr sz="1300">
+                <a:solidFill>
+                  <a:srgbClr val="0F172A"/>
+                </a:solidFill>
+                <a:ea typeface="Sylfaen"/>
+                <a:cs typeface="Sylfaen"/>
+                <a:latin typeface="Sylfaen"/>
+              </a:rPr>
+              <a:t>3:20 - 4:25: Block IX: Database &amp; Make Automation (65 წთ)</a:t>
+            </a:r>
+          </a:p>
+          <a:p>
+            <a:pPr algn="l">
+              <a:spcAft>
+                <a:spcPts val="300"/>
+              </a:spcAft>
+            </a:pPr>
+            <a:r>
+              <a:rPr sz="1300" b="1">
+                <a:solidFill>
+                  <a:srgbClr val="3730A3"/>
+                </a:solidFill>
+                <a:ea typeface="Sylfaen"/>
+                <a:cs typeface="Sylfaen"/>
+                <a:latin typeface="Sylfaen"/>
+              </a:rPr>
+              <a:t>▸  </a:t>
+            </a:r>
+            <a:r>
+              <a:rPr sz="1300">
+                <a:solidFill>
+                  <a:srgbClr val="0F172A"/>
+                </a:solidFill>
+                <a:ea typeface="Sylfaen"/>
+                <a:cs typeface="Sylfaen"/>
+                <a:latin typeface="Sylfaen"/>
+              </a:rPr>
+              <a:t>4:25 - 4:30: ☕ შესვენება (5 წთ)</a:t>
+            </a:r>
+          </a:p>
+          <a:p>
+            <a:pPr algn="l">
+              <a:spcAft>
+                <a:spcPts val="300"/>
+              </a:spcAft>
+            </a:pPr>
+            <a:r>
+              <a:rPr sz="1300" b="1">
+                <a:solidFill>
+                  <a:srgbClr val="3730A3"/>
+                </a:solidFill>
+                <a:ea typeface="Sylfaen"/>
+                <a:cs typeface="Sylfaen"/>
+                <a:latin typeface="Sylfaen"/>
+              </a:rPr>
+              <a:t>▸  </a:t>
+            </a:r>
+            <a:r>
+              <a:rPr sz="1300">
+                <a:solidFill>
+                  <a:srgbClr val="0F172A"/>
+                </a:solidFill>
+                <a:ea typeface="Sylfaen"/>
+                <a:cs typeface="Sylfaen"/>
+                <a:latin typeface="Sylfaen"/>
+              </a:rPr>
+              <a:t>4:30 - 5:00: Block X: Demo Day &amp; VC Mock Grill (30 წთ)</a:t>
             </a:r>
           </a:p>
         </p:txBody>

--- a/GITA/Pre-Acceleration/2026-5h-AI-for-Startups/day2-slides.pptx
+++ b/GITA/Pre-Acceleration/2026-5h-AI-for-Startups/day2-slides.pptx
@@ -53,6 +53,7 @@
     <p:sldId id="301" r:id="rId52"/>
     <p:sldId id="302" r:id="rId53"/>
     <p:sldId id="303" r:id="rId54"/>
+    <p:sldId id="304" r:id="rId55"/>
   </p:sldIdLst>
   <p:sldSz cx="9144000" cy="5143500" type="screen4x3"/>
   <p:notesSz cx="6858000" cy="9144000"/>
@@ -3754,7 +3755,7 @@
                 <a:cs typeface="Sylfaen"/>
                 <a:latin typeface="Sylfaen"/>
               </a:rPr>
-              <a:t>10 / 48</a:t>
+              <a:t>10 / 49</a:t>
             </a:r>
           </a:p>
         </p:txBody>
@@ -4615,7 +4616,7 @@
                 <a:cs typeface="Sylfaen"/>
                 <a:latin typeface="Sylfaen"/>
               </a:rPr>
-              <a:t>11 / 48</a:t>
+              <a:t>11 / 49</a:t>
             </a:r>
           </a:p>
         </p:txBody>
@@ -6019,7 +6020,7 @@
                 <a:cs typeface="Sylfaen"/>
                 <a:latin typeface="Sylfaen"/>
               </a:rPr>
-              <a:t>12 / 48</a:t>
+              <a:t>12 / 49</a:t>
             </a:r>
           </a:p>
         </p:txBody>
@@ -7225,7 +7226,7 @@
                 <a:cs typeface="Sylfaen"/>
                 <a:latin typeface="Sylfaen"/>
               </a:rPr>
-              <a:t>13 / 48</a:t>
+              <a:t>13 / 49</a:t>
             </a:r>
           </a:p>
         </p:txBody>
@@ -8055,7 +8056,7 @@
                 <a:cs typeface="Sylfaen"/>
                 <a:latin typeface="Sylfaen"/>
               </a:rPr>
-              <a:t>14 / 48</a:t>
+              <a:t>14 / 49</a:t>
             </a:r>
           </a:p>
         </p:txBody>
@@ -9164,7 +9165,7 @@
                 <a:cs typeface="Sylfaen"/>
                 <a:latin typeface="Sylfaen"/>
               </a:rPr>
-              <a:t>15 / 48</a:t>
+              <a:t>15 / 49</a:t>
             </a:r>
           </a:p>
         </p:txBody>
@@ -10043,7 +10044,7 @@
                 <a:cs typeface="Sylfaen"/>
                 <a:latin typeface="Sylfaen"/>
               </a:rPr>
-              <a:t>16 / 48</a:t>
+              <a:t>16 / 49</a:t>
             </a:r>
           </a:p>
         </p:txBody>
@@ -10942,7 +10943,7 @@
                 <a:cs typeface="Sylfaen"/>
                 <a:latin typeface="Sylfaen"/>
               </a:rPr>
-              <a:t>17 / 48</a:t>
+              <a:t>17 / 49</a:t>
             </a:r>
           </a:p>
         </p:txBody>
@@ -12292,7 +12293,7 @@
                 <a:cs typeface="Sylfaen"/>
                 <a:latin typeface="Sylfaen"/>
               </a:rPr>
-              <a:t>18 / 48</a:t>
+              <a:t>18 / 49</a:t>
             </a:r>
           </a:p>
         </p:txBody>
@@ -13194,7 +13195,7 @@
                 <a:cs typeface="Sylfaen"/>
                 <a:latin typeface="Sylfaen"/>
               </a:rPr>
-              <a:t>19 / 48</a:t>
+              <a:t>19 / 49</a:t>
             </a:r>
           </a:p>
         </p:txBody>
@@ -14173,7 +14174,7 @@
                 <a:cs typeface="Sylfaen"/>
                 <a:latin typeface="Sylfaen"/>
               </a:rPr>
-              <a:t>2 / 48</a:t>
+              <a:t>2 / 49</a:t>
             </a:r>
           </a:p>
         </p:txBody>
@@ -15206,7 +15207,7 @@
                 <a:cs typeface="Sylfaen"/>
                 <a:latin typeface="Sylfaen"/>
               </a:rPr>
-              <a:t>20 / 48</a:t>
+              <a:t>20 / 49</a:t>
             </a:r>
           </a:p>
         </p:txBody>
@@ -16610,7 +16611,7 @@
                 <a:cs typeface="Sylfaen"/>
                 <a:latin typeface="Sylfaen"/>
               </a:rPr>
-              <a:t>21 / 48</a:t>
+              <a:t>21 / 49</a:t>
             </a:r>
           </a:p>
         </p:txBody>
@@ -17440,7 +17441,7 @@
                 <a:cs typeface="Sylfaen"/>
                 <a:latin typeface="Sylfaen"/>
               </a:rPr>
-              <a:t>22 / 48</a:t>
+              <a:t>22 / 49</a:t>
             </a:r>
           </a:p>
         </p:txBody>
@@ -18339,7 +18340,7 @@
                 <a:cs typeface="Sylfaen"/>
                 <a:latin typeface="Sylfaen"/>
               </a:rPr>
-              <a:t>23 / 48</a:t>
+              <a:t>23 / 49</a:t>
             </a:r>
           </a:p>
         </p:txBody>
@@ -19200,7 +19201,7 @@
                 <a:cs typeface="Sylfaen"/>
                 <a:latin typeface="Sylfaen"/>
               </a:rPr>
-              <a:t>24 / 48</a:t>
+              <a:t>24 / 49</a:t>
             </a:r>
           </a:p>
         </p:txBody>
@@ -20750,7 +20751,7 @@
                 <a:cs typeface="Sylfaen"/>
                 <a:latin typeface="Sylfaen"/>
               </a:rPr>
-              <a:t>25 / 48</a:t>
+              <a:t>25 / 49</a:t>
             </a:r>
           </a:p>
         </p:txBody>
@@ -21580,7 +21581,7 @@
                 <a:cs typeface="Sylfaen"/>
                 <a:latin typeface="Sylfaen"/>
               </a:rPr>
-              <a:t>26 / 48</a:t>
+              <a:t>26 / 49</a:t>
             </a:r>
           </a:p>
         </p:txBody>
@@ -22812,7 +22813,7 @@
                 <a:cs typeface="Sylfaen"/>
                 <a:latin typeface="Sylfaen"/>
               </a:rPr>
-              <a:t>27 / 48</a:t>
+              <a:t>27 / 49</a:t>
             </a:r>
           </a:p>
         </p:txBody>
@@ -23573,7 +23574,7 @@
                 <a:cs typeface="Sylfaen"/>
                 <a:latin typeface="Sylfaen"/>
               </a:rPr>
-              <a:t>28 / 48</a:t>
+              <a:t>28 / 49</a:t>
             </a:r>
           </a:p>
         </p:txBody>
@@ -24258,7 +24259,7 @@
                 <a:cs typeface="Sylfaen"/>
                 <a:latin typeface="Sylfaen"/>
               </a:rPr>
-              <a:t>29 / 48</a:t>
+              <a:t>29 / 49</a:t>
             </a:r>
           </a:p>
         </p:txBody>
@@ -25004,7 +25005,7 @@
                 <a:cs typeface="Sylfaen"/>
                 <a:latin typeface="Sylfaen"/>
               </a:rPr>
-              <a:t>3 / 48</a:t>
+              <a:t>3 / 49</a:t>
             </a:r>
           </a:p>
         </p:txBody>
@@ -25834,7 +25835,7 @@
                 <a:cs typeface="Sylfaen"/>
                 <a:latin typeface="Sylfaen"/>
               </a:rPr>
-              <a:t>30 / 48</a:t>
+              <a:t>30 / 49</a:t>
             </a:r>
           </a:p>
         </p:txBody>
@@ -26705,7 +26706,7 @@
                 <a:cs typeface="Sylfaen"/>
                 <a:latin typeface="Sylfaen"/>
               </a:rPr>
-              <a:t>31 / 48</a:t>
+              <a:t>31 / 49</a:t>
             </a:r>
           </a:p>
         </p:txBody>
@@ -27535,7 +27536,7 @@
                 <a:cs typeface="Sylfaen"/>
                 <a:latin typeface="Sylfaen"/>
               </a:rPr>
-              <a:t>32 / 48</a:t>
+              <a:t>32 / 49</a:t>
             </a:r>
           </a:p>
         </p:txBody>
@@ -28365,7 +28366,7 @@
                 <a:cs typeface="Sylfaen"/>
                 <a:latin typeface="Sylfaen"/>
               </a:rPr>
-              <a:t>33 / 48</a:t>
+              <a:t>33 / 49</a:t>
             </a:r>
           </a:p>
         </p:txBody>
@@ -28920,7 +28921,7 @@
                 <a:cs typeface="Sylfaen"/>
                 <a:latin typeface="Sylfaen"/>
               </a:rPr>
-              <a:t>Make.com: Interface &amp; Workflow Scenarios</a:t>
+              <a:t>Google AI Studio: Android აპლიკაციის შექმნა &amp; Gemini SDK</a:t>
             </a:r>
           </a:p>
         </p:txBody>
@@ -29021,62 +29022,21 @@
                 <a:cs typeface="Sylfaen"/>
                 <a:latin typeface="Sylfaen"/>
               </a:rPr>
-              <a:t>34 / 48</a:t>
-            </a:r>
-          </a:p>
-        </p:txBody>
-      </p:sp>
-      <p:sp>
-        <p:nvSpPr>
-          <p:cNvPr id="8" name="TextBox 7"/>
-          <p:cNvSpPr txBox="1"/>
+              <a:t>34 / 49</a:t>
+            </a:r>
+          </a:p>
+        </p:txBody>
+      </p:sp>
+      <p:sp>
+        <p:nvSpPr>
+          <p:cNvPr id="8" name="Rectangle 7"/>
+          <p:cNvSpPr/>
           <p:nvPr/>
         </p:nvSpPr>
         <p:spPr>
           <a:xfrm>
             <a:off x="457200" y="1188720"/>
-            <a:ext cx="8229600" cy="475488"/>
-          </a:xfrm>
-          <a:prstGeom prst="rect">
-            <a:avLst/>
-          </a:prstGeom>
-          <a:noFill/>
-        </p:spPr>
-        <p:txBody>
-          <a:bodyPr wrap="square" anchor="t" lIns="54864" rIns="54864" tIns="54864" bIns="54864">
-            <a:spAutoFit/>
-          </a:bodyPr>
-          <a:lstStyle/>
-          <a:p>
-            <a:pPr>
-              <a:spcAft>
-                <a:spcPts val="400"/>
-              </a:spcAft>
-            </a:pPr>
-            <a:r>
-              <a:rPr sz="1300" b="0" i="0">
-                <a:solidFill>
-                  <a:srgbClr val="0F172A"/>
-                </a:solidFill>
-                <a:ea typeface="Sylfaen"/>
-                <a:cs typeface="Sylfaen"/>
-                <a:latin typeface="Sylfaen"/>
-              </a:rPr>
-              <a:t>ავტომატიზაციის ვიზუალური პლატფორმა Make.com:</a:t>
-            </a:r>
-          </a:p>
-        </p:txBody>
-      </p:sp>
-      <p:sp>
-        <p:nvSpPr>
-          <p:cNvPr id="9" name="Rectangle 8"/>
-          <p:cNvSpPr/>
-          <p:nvPr/>
-        </p:nvSpPr>
-        <p:spPr>
-          <a:xfrm>
-            <a:off x="457200" y="1737360"/>
-            <a:ext cx="54864" cy="3113532"/>
+            <a:ext cx="54864" cy="3662172"/>
           </a:xfrm>
           <a:prstGeom prst="rect">
             <a:avLst/>
@@ -29113,14 +29073,14 @@
       </p:sp>
       <p:sp>
         <p:nvSpPr>
-          <p:cNvPr id="10" name="Rounded Rectangle 9"/>
-          <p:cNvSpPr/>
-          <p:nvPr/>
-        </p:nvSpPr>
-        <p:spPr>
-          <a:xfrm>
-            <a:off x="512064" y="1737360"/>
-            <a:ext cx="3991356" cy="3113532"/>
+          <p:cNvPr id="9" name="Rounded Rectangle 8"/>
+          <p:cNvSpPr/>
+          <p:nvPr/>
+        </p:nvSpPr>
+        <p:spPr>
+          <a:xfrm>
+            <a:off x="512064" y="1188720"/>
+            <a:ext cx="3991356" cy="3662172"/>
           </a:xfrm>
           <a:prstGeom prst="roundRect">
             <a:avLst>
@@ -29128,6 +29088,278 @@
             </a:avLst>
           </a:prstGeom>
           <a:solidFill>
+            <a:srgbClr val="F8FAFC"/>
+          </a:solidFill>
+          <a:ln w="6350">
+            <a:solidFill>
+              <a:srgbClr val="E2E8F0"/>
+            </a:solidFill>
+          </a:ln>
+          <a:effectLst/>
+        </p:spPr>
+        <p:style>
+          <a:lnRef idx="1">
+            <a:schemeClr val="accent1"/>
+          </a:lnRef>
+          <a:fillRef idx="3">
+            <a:schemeClr val="accent1"/>
+          </a:fillRef>
+          <a:effectRef idx="2">
+            <a:schemeClr val="accent1"/>
+          </a:effectRef>
+          <a:fontRef idx="minor">
+            <a:schemeClr val="lt1"/>
+          </a:fontRef>
+        </p:style>
+        <p:txBody>
+          <a:bodyPr rtlCol="0" anchor="ctr"/>
+          <a:lstStyle/>
+          <a:p>
+            <a:pPr algn="ctr"/>
+          </a:p>
+        </p:txBody>
+      </p:sp>
+      <p:sp>
+        <p:nvSpPr>
+          <p:cNvPr id="10" name="TextBox 9"/>
+          <p:cNvSpPr txBox="1"/>
+          <p:nvPr/>
+        </p:nvSpPr>
+        <p:spPr>
+          <a:xfrm>
+            <a:off x="621792" y="1261872"/>
+            <a:ext cx="3771900" cy="320040"/>
+          </a:xfrm>
+          <a:prstGeom prst="rect">
+            <a:avLst/>
+          </a:prstGeom>
+          <a:noFill/>
+        </p:spPr>
+        <p:txBody>
+          <a:bodyPr wrap="square" anchor="t" lIns="54864" rIns="54864" tIns="54864" bIns="54864">
+            <a:spAutoFit/>
+          </a:bodyPr>
+          <a:lstStyle/>
+          <a:p>
+            <a:pPr>
+              <a:spcAft>
+                <a:spcPts val="400"/>
+              </a:spcAft>
+            </a:pPr>
+            <a:r>
+              <a:rPr sz="1400" b="1" i="0">
+                <a:solidFill>
+                  <a:srgbClr val="0F172A"/>
+                </a:solidFill>
+                <a:ea typeface="Sylfaen"/>
+                <a:cs typeface="Sylfaen"/>
+                <a:latin typeface="Sylfaen"/>
+              </a:rPr>
+              <a:t>🛠️ 1. Google AI Studio &amp; API გასაღები:</a:t>
+            </a:r>
+          </a:p>
+        </p:txBody>
+      </p:sp>
+      <p:sp>
+        <p:nvSpPr>
+          <p:cNvPr id="11" name="TextBox 10"/>
+          <p:cNvSpPr txBox="1"/>
+          <p:nvPr/>
+        </p:nvSpPr>
+        <p:spPr>
+          <a:xfrm>
+            <a:off x="621792" y="1655064"/>
+            <a:ext cx="3771900" cy="3122675"/>
+          </a:xfrm>
+          <a:prstGeom prst="rect">
+            <a:avLst/>
+          </a:prstGeom>
+          <a:noFill/>
+        </p:spPr>
+        <p:txBody>
+          <a:bodyPr wrap="square" anchor="t" lIns="54864" rIns="54864" tIns="54864" bIns="54864">
+            <a:spAutoFit/>
+          </a:bodyPr>
+          <a:lstStyle/>
+          <a:p>
+            <a:pPr algn="l">
+              <a:spcAft>
+                <a:spcPts val="300"/>
+              </a:spcAft>
+            </a:pPr>
+            <a:r>
+              <a:rPr sz="1300" b="1">
+                <a:solidFill>
+                  <a:srgbClr val="3730A3"/>
+                </a:solidFill>
+                <a:ea typeface="Sylfaen"/>
+                <a:cs typeface="Sylfaen"/>
+                <a:latin typeface="Sylfaen"/>
+              </a:rPr>
+              <a:t>▸  </a:t>
+            </a:r>
+            <a:r>
+              <a:rPr sz="1300">
+                <a:solidFill>
+                  <a:srgbClr val="0F172A"/>
+                </a:solidFill>
+                <a:ea typeface="Sylfaen"/>
+                <a:cs typeface="Sylfaen"/>
+                <a:latin typeface="Sylfaen"/>
+              </a:rPr>
+              <a:t>პროტოტიპირება: გამოსცადეთ Prompt-ები, System Instructions და JSON რეჟიმი უშუალოდ ბრაუზერში;</a:t>
+            </a:r>
+          </a:p>
+          <a:p>
+            <a:pPr algn="l">
+              <a:spcAft>
+                <a:spcPts val="300"/>
+              </a:spcAft>
+            </a:pPr>
+            <a:r>
+              <a:rPr sz="1300" b="1">
+                <a:solidFill>
+                  <a:srgbClr val="3730A3"/>
+                </a:solidFill>
+                <a:ea typeface="Sylfaen"/>
+                <a:cs typeface="Sylfaen"/>
+                <a:latin typeface="Sylfaen"/>
+              </a:rPr>
+              <a:t>▸  </a:t>
+            </a:r>
+            <a:r>
+              <a:rPr sz="1300">
+                <a:solidFill>
+                  <a:srgbClr val="0F172A"/>
+                </a:solidFill>
+                <a:ea typeface="Sylfaen"/>
+                <a:cs typeface="Sylfaen"/>
+                <a:latin typeface="Sylfaen"/>
+              </a:rPr>
+              <a:t>API Key გენერაცია: შექმენით უსაფრთხო გასაღები თქვენი პროექტისთვის;</a:t>
+            </a:r>
+          </a:p>
+          <a:p>
+            <a:pPr algn="l">
+              <a:spcAft>
+                <a:spcPts val="300"/>
+              </a:spcAft>
+            </a:pPr>
+            <a:r>
+              <a:rPr sz="1300" b="1">
+                <a:solidFill>
+                  <a:srgbClr val="3730A3"/>
+                </a:solidFill>
+                <a:ea typeface="Sylfaen"/>
+                <a:cs typeface="Sylfaen"/>
+                <a:latin typeface="Sylfaen"/>
+              </a:rPr>
+              <a:t>▸  </a:t>
+            </a:r>
+            <a:r>
+              <a:rPr sz="1300">
+                <a:solidFill>
+                  <a:srgbClr val="0F172A"/>
+                </a:solidFill>
+                <a:ea typeface="Sylfaen"/>
+                <a:cs typeface="Sylfaen"/>
+                <a:latin typeface="Sylfaen"/>
+              </a:rPr>
+              <a:t>Build რეჟიმი: დაწერეთ პრომპტი ბუნებრივ ენაზე, AI Studio თავად ააწყობს native Kotlin/Jetpack Compose Android პროექტს;</a:t>
+            </a:r>
+          </a:p>
+          <a:p>
+            <a:pPr algn="l">
+              <a:spcAft>
+                <a:spcPts val="300"/>
+              </a:spcAft>
+            </a:pPr>
+            <a:r>
+              <a:rPr sz="1300" b="1">
+                <a:solidFill>
+                  <a:srgbClr val="3730A3"/>
+                </a:solidFill>
+                <a:ea typeface="Sylfaen"/>
+                <a:cs typeface="Sylfaen"/>
+                <a:latin typeface="Sylfaen"/>
+              </a:rPr>
+              <a:t>▸  </a:t>
+            </a:r>
+            <a:r>
+              <a:rPr sz="1300">
+                <a:solidFill>
+                  <a:srgbClr val="0F172A"/>
+                </a:solidFill>
+                <a:ea typeface="Sylfaen"/>
+                <a:cs typeface="Sylfaen"/>
+                <a:latin typeface="Sylfaen"/>
+              </a:rPr>
+              <a:t>ბრაუზერული ემულატორი: დატესტეთ აპლიკაცია ინსტალაციის გარეშე და გააკეთეთ ექსპორტი Android Studio-ში.</a:t>
+            </a:r>
+          </a:p>
+        </p:txBody>
+      </p:sp>
+      <p:sp>
+        <p:nvSpPr>
+          <p:cNvPr id="12" name="Rectangle 11"/>
+          <p:cNvSpPr/>
+          <p:nvPr/>
+        </p:nvSpPr>
+        <p:spPr>
+          <a:xfrm>
+            <a:off x="4640580" y="1188720"/>
+            <a:ext cx="54864" cy="3662172"/>
+          </a:xfrm>
+          <a:prstGeom prst="rect">
+            <a:avLst/>
+          </a:prstGeom>
+          <a:solidFill>
+            <a:srgbClr val="3730A3"/>
+          </a:solidFill>
+          <a:ln>
+            <a:noFill/>
+          </a:ln>
+          <a:effectLst/>
+        </p:spPr>
+        <p:style>
+          <a:lnRef idx="1">
+            <a:schemeClr val="accent1"/>
+          </a:lnRef>
+          <a:fillRef idx="3">
+            <a:schemeClr val="accent1"/>
+          </a:fillRef>
+          <a:effectRef idx="2">
+            <a:schemeClr val="accent1"/>
+          </a:effectRef>
+          <a:fontRef idx="minor">
+            <a:schemeClr val="lt1"/>
+          </a:fontRef>
+        </p:style>
+        <p:txBody>
+          <a:bodyPr rtlCol="0" anchor="ctr"/>
+          <a:lstStyle/>
+          <a:p>
+            <a:pPr algn="ctr"/>
+          </a:p>
+        </p:txBody>
+      </p:sp>
+      <p:sp>
+        <p:nvSpPr>
+          <p:cNvPr id="13" name="Rounded Rectangle 12"/>
+          <p:cNvSpPr/>
+          <p:nvPr/>
+        </p:nvSpPr>
+        <p:spPr>
+          <a:xfrm>
+            <a:off x="4695444" y="1188720"/>
+            <a:ext cx="3991356" cy="3662172"/>
+          </a:xfrm>
+          <a:prstGeom prst="roundRect">
+            <a:avLst>
+              <a:gd name="adj" fmla="val 4000"/>
+            </a:avLst>
+          </a:prstGeom>
+          <a:solidFill>
             <a:srgbClr val="EEF2FF"/>
           </a:solidFill>
           <a:ln w="6350">
@@ -29161,13 +29393,13 @@
       </p:sp>
       <p:sp>
         <p:nvSpPr>
-          <p:cNvPr id="11" name="TextBox 10"/>
+          <p:cNvPr id="14" name="TextBox 13"/>
           <p:cNvSpPr txBox="1"/>
           <p:nvPr/>
         </p:nvSpPr>
         <p:spPr>
           <a:xfrm>
-            <a:off x="621792" y="1810512"/>
+            <a:off x="4805172" y="1261872"/>
             <a:ext cx="3771900" cy="320040"/>
           </a:xfrm>
           <a:prstGeom prst="rect">
@@ -29195,21 +29427,21 @@
                 <a:cs typeface="Sylfaen"/>
                 <a:latin typeface="Sylfaen"/>
               </a:rPr>
-              <a:t>Make.com ძირითადი ელემენტები:</a:t>
-            </a:r>
-          </a:p>
-        </p:txBody>
-      </p:sp>
-      <p:sp>
-        <p:nvSpPr>
-          <p:cNvPr id="12" name="TextBox 11"/>
+              <a:t>📲 2. Android Studio &amp; SDK ინტეგრაცია:</a:t>
+            </a:r>
+          </a:p>
+        </p:txBody>
+      </p:sp>
+      <p:sp>
+        <p:nvSpPr>
+          <p:cNvPr id="15" name="TextBox 14"/>
           <p:cNvSpPr txBox="1"/>
           <p:nvPr/>
         </p:nvSpPr>
         <p:spPr>
           <a:xfrm>
-            <a:off x="621792" y="2203704"/>
-            <a:ext cx="3771900" cy="2267712"/>
+            <a:off x="4805172" y="1655064"/>
+            <a:ext cx="3771900" cy="713232"/>
           </a:xfrm>
           <a:prstGeom prst="rect">
             <a:avLst/>
@@ -29222,24 +29454,13 @@
           </a:bodyPr>
           <a:lstStyle/>
           <a:p>
-            <a:pPr algn="l">
-              <a:spcAft>
-                <a:spcPts val="300"/>
-              </a:spcAft>
-            </a:pPr>
-            <a:r>
-              <a:rPr sz="1300" b="1">
-                <a:solidFill>
-                  <a:srgbClr val="3730A3"/>
-                </a:solidFill>
-                <a:ea typeface="Sylfaen"/>
-                <a:cs typeface="Sylfaen"/>
-                <a:latin typeface="Sylfaen"/>
-              </a:rPr>
-              <a:t>▸  </a:t>
-            </a:r>
-            <a:r>
-              <a:rPr sz="1300">
+            <a:pPr>
+              <a:spcAft>
+                <a:spcPts val="400"/>
+              </a:spcAft>
+            </a:pPr>
+            <a:r>
+              <a:rPr sz="1300" b="0" i="0">
                 <a:solidFill>
                   <a:srgbClr val="0F172A"/>
                 </a:solidFill>
@@ -29247,28 +29468,40 @@
                 <a:cs typeface="Sylfaen"/>
                 <a:latin typeface="Sylfaen"/>
               </a:rPr>
-              <a:t>Scenarios: სრული ავტომატიზაციის სქემები;</a:t>
-            </a:r>
-          </a:p>
-          <a:p>
-            <a:pPr algn="l">
-              <a:spcAft>
-                <a:spcPts val="300"/>
-              </a:spcAft>
-            </a:pPr>
-            <a:r>
-              <a:rPr sz="1300" b="1">
-                <a:solidFill>
-                  <a:srgbClr val="3730A3"/>
-                </a:solidFill>
-                <a:ea typeface="Sylfaen"/>
-                <a:cs typeface="Sylfaen"/>
-                <a:latin typeface="Sylfaen"/>
-              </a:rPr>
-              <a:t>▸  </a:t>
-            </a:r>
-            <a:r>
-              <a:rPr sz="1300">
+              <a:t>A. Firebase AI Logic SDK (რეკომენდებული): მართავს უსაფრთხოებას და გასაღებებს Cloud-ში, იცავს API Key-ს გაჟონვისგან.</a:t>
+            </a:r>
+          </a:p>
+        </p:txBody>
+      </p:sp>
+      <p:sp>
+        <p:nvSpPr>
+          <p:cNvPr id="16" name="TextBox 15"/>
+          <p:cNvSpPr txBox="1"/>
+          <p:nvPr/>
+        </p:nvSpPr>
+        <p:spPr>
+          <a:xfrm>
+            <a:off x="4805172" y="2441448"/>
+            <a:ext cx="3771900" cy="475488"/>
+          </a:xfrm>
+          <a:prstGeom prst="rect">
+            <a:avLst/>
+          </a:prstGeom>
+          <a:noFill/>
+        </p:spPr>
+        <p:txBody>
+          <a:bodyPr wrap="square" anchor="t" lIns="54864" rIns="54864" tIns="54864" bIns="54864">
+            <a:spAutoFit/>
+          </a:bodyPr>
+          <a:lstStyle/>
+          <a:p>
+            <a:pPr>
+              <a:spcAft>
+                <a:spcPts val="400"/>
+              </a:spcAft>
+            </a:pPr>
+            <a:r>
+              <a:rPr sz="1300" b="0" i="0">
                 <a:solidFill>
                   <a:srgbClr val="0F172A"/>
                 </a:solidFill>
@@ -29276,94 +29509,21 @@
                 <a:cs typeface="Sylfaen"/>
                 <a:latin typeface="Sylfaen"/>
               </a:rPr>
-              <a:t>Modules: აპლიკაციების ბლოკები (მაგ. Gmail, Google Sheets);</a:t>
-            </a:r>
-          </a:p>
-          <a:p>
-            <a:pPr algn="l">
-              <a:spcAft>
-                <a:spcPts val="300"/>
-              </a:spcAft>
-            </a:pPr>
-            <a:r>
-              <a:rPr sz="1300" b="1">
-                <a:solidFill>
-                  <a:srgbClr val="3730A3"/>
-                </a:solidFill>
-                <a:ea typeface="Sylfaen"/>
-                <a:cs typeface="Sylfaen"/>
-                <a:latin typeface="Sylfaen"/>
-              </a:rPr>
-              <a:t>▸  </a:t>
-            </a:r>
-            <a:r>
-              <a:rPr sz="1300">
-                <a:solidFill>
-                  <a:srgbClr val="0F172A"/>
-                </a:solidFill>
-                <a:ea typeface="Sylfaen"/>
-                <a:cs typeface="Sylfaen"/>
-                <a:latin typeface="Sylfaen"/>
-              </a:rPr>
-              <a:t>Filters: პირობები მონაცემთა გასაფილტრად.</a:t>
-            </a:r>
-          </a:p>
-        </p:txBody>
-      </p:sp>
-      <p:sp>
-        <p:nvSpPr>
-          <p:cNvPr id="13" name="Rectangle 12"/>
-          <p:cNvSpPr/>
-          <p:nvPr/>
-        </p:nvSpPr>
-        <p:spPr>
-          <a:xfrm>
-            <a:off x="4640580" y="1737360"/>
-            <a:ext cx="54864" cy="3113532"/>
-          </a:xfrm>
-          <a:prstGeom prst="rect">
-            <a:avLst/>
-          </a:prstGeom>
-          <a:solidFill>
-            <a:srgbClr val="3730A3"/>
-          </a:solidFill>
-          <a:ln>
-            <a:noFill/>
-          </a:ln>
-          <a:effectLst/>
-        </p:spPr>
-        <p:style>
-          <a:lnRef idx="1">
-            <a:schemeClr val="accent1"/>
-          </a:lnRef>
-          <a:fillRef idx="3">
-            <a:schemeClr val="accent1"/>
-          </a:fillRef>
-          <a:effectRef idx="2">
-            <a:schemeClr val="accent1"/>
-          </a:effectRef>
-          <a:fontRef idx="minor">
-            <a:schemeClr val="lt1"/>
-          </a:fontRef>
-        </p:style>
-        <p:txBody>
-          <a:bodyPr rtlCol="0" anchor="ctr"/>
-          <a:lstStyle/>
-          <a:p>
-            <a:pPr algn="ctr"/>
-          </a:p>
-        </p:txBody>
-      </p:sp>
-      <p:sp>
-        <p:nvSpPr>
-          <p:cNvPr id="14" name="Rounded Rectangle 13"/>
-          <p:cNvSpPr/>
-          <p:nvPr/>
-        </p:nvSpPr>
-        <p:spPr>
-          <a:xfrm>
-            <a:off x="4695444" y="1737360"/>
-            <a:ext cx="3991356" cy="3113532"/>
+              <a:t>B. Google AI Client SDK (პირდაპირი კავშირი):</a:t>
+            </a:r>
+          </a:p>
+        </p:txBody>
+      </p:sp>
+      <p:sp>
+        <p:nvSpPr>
+          <p:cNvPr id="17" name="Rounded Rectangle 16"/>
+          <p:cNvSpPr/>
+          <p:nvPr/>
+        </p:nvSpPr>
+        <p:spPr>
+          <a:xfrm>
+            <a:off x="4805172" y="2990088"/>
+            <a:ext cx="3771900" cy="1787651"/>
           </a:xfrm>
           <a:prstGeom prst="roundRect">
             <a:avLst>
@@ -29373,6 +29533,52 @@
           <a:solidFill>
             <a:srgbClr val="F8FAFC"/>
           </a:solidFill>
+          <a:ln w="9525">
+            <a:solidFill>
+              <a:srgbClr val="E2E8F0"/>
+            </a:solidFill>
+          </a:ln>
+          <a:effectLst/>
+        </p:spPr>
+        <p:style>
+          <a:lnRef idx="1">
+            <a:schemeClr val="accent1"/>
+          </a:lnRef>
+          <a:fillRef idx="3">
+            <a:schemeClr val="accent1"/>
+          </a:fillRef>
+          <a:effectRef idx="2">
+            <a:schemeClr val="accent1"/>
+          </a:effectRef>
+          <a:fontRef idx="minor">
+            <a:schemeClr val="lt1"/>
+          </a:fontRef>
+        </p:style>
+        <p:txBody>
+          <a:bodyPr rtlCol="0" anchor="ctr"/>
+          <a:lstStyle/>
+          <a:p>
+            <a:pPr algn="ctr"/>
+          </a:p>
+        </p:txBody>
+      </p:sp>
+      <p:sp>
+        <p:nvSpPr>
+          <p:cNvPr id="18" name="Rectangle 17"/>
+          <p:cNvSpPr/>
+          <p:nvPr/>
+        </p:nvSpPr>
+        <p:spPr>
+          <a:xfrm>
+            <a:off x="4860036" y="3035808"/>
+            <a:ext cx="3662172" cy="1696211"/>
+          </a:xfrm>
+          <a:prstGeom prst="rect">
+            <a:avLst/>
+          </a:prstGeom>
+          <a:solidFill>
+            <a:srgbClr val="FFFFFF"/>
+          </a:solidFill>
           <a:ln w="6350">
             <a:solidFill>
               <a:srgbClr val="E2E8F0"/>
@@ -29404,14 +29610,14 @@
       </p:sp>
       <p:sp>
         <p:nvSpPr>
-          <p:cNvPr id="15" name="TextBox 14"/>
+          <p:cNvPr id="19" name="TextBox 18"/>
           <p:cNvSpPr txBox="1"/>
           <p:nvPr/>
         </p:nvSpPr>
         <p:spPr>
           <a:xfrm>
-            <a:off x="4805172" y="1810512"/>
-            <a:ext cx="3771900" cy="320040"/>
+            <a:off x="4914900" y="3054096"/>
+            <a:ext cx="3552444" cy="1659635"/>
           </a:xfrm>
           <a:prstGeom prst="rect">
             <a:avLst/>
@@ -29426,67 +29632,224 @@
           <a:p>
             <a:pPr>
               <a:spcAft>
-                <a:spcPts val="400"/>
-              </a:spcAft>
-            </a:pPr>
-            <a:r>
-              <a:rPr sz="1400" b="1" i="0">
+                <a:spcPts val="0"/>
+              </a:spcAft>
+            </a:pPr>
+            <a:r>
+              <a:rPr sz="1000">
                 <a:solidFill>
                   <a:srgbClr val="0F172A"/>
                 </a:solidFill>
-                <a:ea typeface="Sylfaen"/>
-                <a:cs typeface="Sylfaen"/>
-                <a:latin typeface="Sylfaen"/>
-              </a:rPr>
-              <a:t>🚀 რატომ Make?</a:t>
-            </a:r>
-          </a:p>
-        </p:txBody>
-      </p:sp>
-      <p:sp>
-        <p:nvSpPr>
-          <p:cNvPr id="16" name="TextBox 15"/>
-          <p:cNvSpPr txBox="1"/>
-          <p:nvPr/>
-        </p:nvSpPr>
-        <p:spPr>
-          <a:xfrm>
-            <a:off x="4805172" y="2203704"/>
-            <a:ext cx="3771900" cy="713232"/>
-          </a:xfrm>
-          <a:prstGeom prst="rect">
-            <a:avLst/>
-          </a:prstGeom>
-          <a:noFill/>
-        </p:spPr>
-        <p:txBody>
-          <a:bodyPr wrap="square" anchor="t" lIns="54864" rIns="54864" tIns="54864" bIns="54864">
-            <a:spAutoFit/>
-          </a:bodyPr>
-          <a:lstStyle/>
+                <a:ea typeface="Consolas"/>
+                <a:cs typeface="Consolas"/>
+                <a:latin typeface="Consolas"/>
+              </a:rPr>
+              <a:t> </a:t>
+            </a:r>
+          </a:p>
           <a:p>
             <a:pPr>
               <a:spcAft>
-                <a:spcPts val="400"/>
-              </a:spcAft>
-            </a:pPr>
-            <a:r>
-              <a:rPr sz="1300" b="0" i="0">
+                <a:spcPts val="0"/>
+              </a:spcAft>
+            </a:pPr>
+            <a:r>
+              <a:rPr sz="1000">
                 <a:solidFill>
                   <a:srgbClr val="0F172A"/>
                 </a:solidFill>
-                <a:ea typeface="Sylfaen"/>
-                <a:cs typeface="Sylfaen"/>
-                <a:latin typeface="Sylfaen"/>
-              </a:rPr>
-              <a:t>იგი არის ვიზუალური, მარტივი გამოსაყენებელი და უფასო ვერსიაში გაძლევთ 1000 ოპერაციას თვეში.</a:t>
-            </a:r>
-          </a:p>
-        </p:txBody>
-      </p:sp>
-      <p:sp>
-        <p:nvSpPr>
-          <p:cNvPr id="17" name="Rectangle 16"/>
+                <a:ea typeface="Consolas"/>
+                <a:cs typeface="Consolas"/>
+                <a:latin typeface="Consolas"/>
+              </a:rPr>
+              <a:t>// build.gradle.kts:</a:t>
+            </a:r>
+          </a:p>
+          <a:p>
+            <a:pPr>
+              <a:spcAft>
+                <a:spcPts val="0"/>
+              </a:spcAft>
+            </a:pPr>
+            <a:r>
+              <a:rPr sz="1000">
+                <a:solidFill>
+                  <a:srgbClr val="0F172A"/>
+                </a:solidFill>
+                <a:ea typeface="Consolas"/>
+                <a:cs typeface="Consolas"/>
+                <a:latin typeface="Consolas"/>
+              </a:rPr>
+              <a:t>implementation("google.ai.client.generativeai:generativeai:0.7.0")</a:t>
+            </a:r>
+          </a:p>
+          <a:p>
+            <a:pPr>
+              <a:spcAft>
+                <a:spcPts val="0"/>
+              </a:spcAft>
+            </a:pPr>
+            <a:r>
+              <a:rPr sz="1000">
+                <a:solidFill>
+                  <a:srgbClr val="0F172A"/>
+                </a:solidFill>
+                <a:ea typeface="Consolas"/>
+                <a:cs typeface="Consolas"/>
+                <a:latin typeface="Consolas"/>
+              </a:rPr>
+              <a:t> </a:t>
+            </a:r>
+          </a:p>
+          <a:p>
+            <a:pPr>
+              <a:spcAft>
+                <a:spcPts val="0"/>
+              </a:spcAft>
+            </a:pPr>
+            <a:r>
+              <a:rPr sz="1000">
+                <a:solidFill>
+                  <a:srgbClr val="0F172A"/>
+                </a:solidFill>
+                <a:ea typeface="Consolas"/>
+                <a:cs typeface="Consolas"/>
+                <a:latin typeface="Consolas"/>
+              </a:rPr>
+              <a:t>// Kotlin ინიციალიზაცია:</a:t>
+            </a:r>
+          </a:p>
+          <a:p>
+            <a:pPr>
+              <a:spcAft>
+                <a:spcPts val="0"/>
+              </a:spcAft>
+            </a:pPr>
+            <a:r>
+              <a:rPr sz="1000">
+                <a:solidFill>
+                  <a:srgbClr val="0F172A"/>
+                </a:solidFill>
+                <a:ea typeface="Consolas"/>
+                <a:cs typeface="Consolas"/>
+                <a:latin typeface="Consolas"/>
+              </a:rPr>
+              <a:t>val generativeModel =</a:t>
+            </a:r>
+          </a:p>
+          <a:p>
+            <a:pPr>
+              <a:spcAft>
+                <a:spcPts val="0"/>
+              </a:spcAft>
+            </a:pPr>
+            <a:r>
+              <a:rPr sz="1000">
+                <a:solidFill>
+                  <a:srgbClr val="0F172A"/>
+                </a:solidFill>
+                <a:ea typeface="Consolas"/>
+                <a:cs typeface="Consolas"/>
+                <a:latin typeface="Consolas"/>
+              </a:rPr>
+              <a:t>GenerativeModel(</a:t>
+            </a:r>
+          </a:p>
+          <a:p>
+            <a:pPr>
+              <a:spcAft>
+                <a:spcPts val="0"/>
+              </a:spcAft>
+            </a:pPr>
+            <a:r>
+              <a:rPr sz="1000">
+                <a:solidFill>
+                  <a:srgbClr val="0F172A"/>
+                </a:solidFill>
+                <a:ea typeface="Consolas"/>
+                <a:cs typeface="Consolas"/>
+                <a:latin typeface="Consolas"/>
+              </a:rPr>
+              <a:t>modelName =</a:t>
+            </a:r>
+          </a:p>
+          <a:p>
+            <a:pPr>
+              <a:spcAft>
+                <a:spcPts val="0"/>
+              </a:spcAft>
+            </a:pPr>
+            <a:r>
+              <a:rPr sz="1000">
+                <a:solidFill>
+                  <a:srgbClr val="0F172A"/>
+                </a:solidFill>
+                <a:ea typeface="Consolas"/>
+                <a:cs typeface="Consolas"/>
+                <a:latin typeface="Consolas"/>
+              </a:rPr>
+              <a:t>"gemini-1.5-flash",</a:t>
+            </a:r>
+          </a:p>
+          <a:p>
+            <a:pPr>
+              <a:spcAft>
+                <a:spcPts val="0"/>
+              </a:spcAft>
+            </a:pPr>
+            <a:r>
+              <a:rPr sz="1000">
+                <a:solidFill>
+                  <a:srgbClr val="0F172A"/>
+                </a:solidFill>
+                <a:ea typeface="Consolas"/>
+                <a:cs typeface="Consolas"/>
+                <a:latin typeface="Consolas"/>
+              </a:rPr>
+              <a:t>apiKey =</a:t>
+            </a:r>
+          </a:p>
+          <a:p>
+            <a:pPr>
+              <a:spcAft>
+                <a:spcPts val="0"/>
+              </a:spcAft>
+            </a:pPr>
+            <a:r>
+              <a:rPr sz="1000">
+                <a:solidFill>
+                  <a:srgbClr val="0F172A"/>
+                </a:solidFill>
+                <a:ea typeface="Consolas"/>
+                <a:cs typeface="Consolas"/>
+                <a:latin typeface="Consolas"/>
+              </a:rPr>
+              <a:t>BuildConfig.apiKey</a:t>
+            </a:r>
+          </a:p>
+          <a:p>
+            <a:pPr>
+              <a:spcAft>
+                <a:spcPts val="0"/>
+              </a:spcAft>
+            </a:pPr>
+            <a:r>
+              <a:rPr sz="1000">
+                <a:solidFill>
+                  <a:srgbClr val="0F172A"/>
+                </a:solidFill>
+                <a:ea typeface="Consolas"/>
+                <a:cs typeface="Consolas"/>
+                <a:latin typeface="Consolas"/>
+              </a:rPr>
+              <a:t>)</a:t>
+            </a:r>
+          </a:p>
+        </p:txBody>
+      </p:sp>
+      <p:sp>
+        <p:nvSpPr>
+          <p:cNvPr id="20" name="Rectangle 19"/>
           <p:cNvSpPr/>
           <p:nvPr/>
         </p:nvSpPr>
@@ -29530,7 +29893,7 @@
       </p:sp>
       <p:sp>
         <p:nvSpPr>
-          <p:cNvPr id="18" name="TextBox 17"/>
+          <p:cNvPr id="21" name="TextBox 20"/>
           <p:cNvSpPr txBox="1"/>
           <p:nvPr/>
         </p:nvSpPr>
@@ -29750,7 +30113,7 @@
                 <a:cs typeface="Sylfaen"/>
                 <a:latin typeface="Sylfaen"/>
               </a:rPr>
-              <a:t>Make.com: Webhooks setup &amp; JSON mapping</a:t>
+              <a:t>Make.com: Interface &amp; Workflow Scenarios</a:t>
             </a:r>
           </a:p>
         </p:txBody>
@@ -29851,7 +30214,7 @@
                 <a:cs typeface="Sylfaen"/>
                 <a:latin typeface="Sylfaen"/>
               </a:rPr>
-              <a:t>35 / 48</a:t>
+              <a:t>35 / 49</a:t>
             </a:r>
           </a:p>
         </p:txBody>
@@ -29892,7 +30255,7 @@
                 <a:cs typeface="Sylfaen"/>
                 <a:latin typeface="Sylfaen"/>
               </a:rPr>
-              <a:t>მონაცემთა მყისიერი მიღება საიტიდან (Webhook):</a:t>
+              <a:t>ავტომატიზაციის ვიზუალური პლატფორმა Make.com:</a:t>
             </a:r>
           </a:p>
         </p:txBody>
@@ -29906,13 +30269,13 @@
         <p:spPr>
           <a:xfrm>
             <a:off x="457200" y="1737360"/>
-            <a:ext cx="54864" cy="1581912"/>
-          </a:xfrm>
-          <a:prstGeom prst="rect">
-            <a:avLst/>
-          </a:prstGeom>
-          <a:solidFill>
-            <a:srgbClr val="4F46E5"/>
+            <a:ext cx="54864" cy="3113532"/>
+          </a:xfrm>
+          <a:prstGeom prst="rect">
+            <a:avLst/>
+          </a:prstGeom>
+          <a:solidFill>
+            <a:srgbClr val="3730A3"/>
           </a:solidFill>
           <a:ln>
             <a:noFill/>
@@ -29950,7 +30313,7 @@
         <p:spPr>
           <a:xfrm>
             <a:off x="512064" y="1737360"/>
-            <a:ext cx="3991356" cy="1581912"/>
+            <a:ext cx="3991356" cy="3113532"/>
           </a:xfrm>
           <a:prstGeom prst="roundRect">
             <a:avLst>
@@ -29958,11 +30321,11 @@
             </a:avLst>
           </a:prstGeom>
           <a:solidFill>
-            <a:srgbClr val="FFF7ED"/>
+            <a:srgbClr val="EEF2FF"/>
           </a:solidFill>
           <a:ln w="6350">
             <a:solidFill>
-              <a:srgbClr val="4F46E5"/>
+              <a:srgbClr val="3730A3"/>
             </a:solidFill>
           </a:ln>
           <a:effectLst/>
@@ -30025,7 +30388,7 @@
                 <a:cs typeface="Sylfaen"/>
                 <a:latin typeface="Sylfaen"/>
               </a:rPr>
-              <a:t>🌐 რა არის Webhook?</a:t>
+              <a:t>Make.com ძირითადი ელემენტები:</a:t>
             </a:r>
           </a:p>
         </p:txBody>
@@ -30039,7 +30402,7 @@
         <p:spPr>
           <a:xfrm>
             <a:off x="621792" y="2203704"/>
-            <a:ext cx="3771900" cy="713232"/>
+            <a:ext cx="3771900" cy="2267712"/>
           </a:xfrm>
           <a:prstGeom prst="rect">
             <a:avLst/>
@@ -30052,13 +30415,24 @@
           </a:bodyPr>
           <a:lstStyle/>
           <a:p>
-            <a:pPr>
-              <a:spcAft>
-                <a:spcPts val="400"/>
-              </a:spcAft>
-            </a:pPr>
-            <a:r>
-              <a:rPr sz="1300" b="0" i="0">
+            <a:pPr algn="l">
+              <a:spcAft>
+                <a:spcPts val="300"/>
+              </a:spcAft>
+            </a:pPr>
+            <a:r>
+              <a:rPr sz="1300" b="1">
+                <a:solidFill>
+                  <a:srgbClr val="3730A3"/>
+                </a:solidFill>
+                <a:ea typeface="Sylfaen"/>
+                <a:cs typeface="Sylfaen"/>
+                <a:latin typeface="Sylfaen"/>
+              </a:rPr>
+              <a:t>▸  </a:t>
+            </a:r>
+            <a:r>
+              <a:rPr sz="1300">
                 <a:solidFill>
                   <a:srgbClr val="0F172A"/>
                 </a:solidFill>
@@ -30066,7 +30440,65 @@
                 <a:cs typeface="Sylfaen"/>
                 <a:latin typeface="Sylfaen"/>
               </a:rPr>
-              <a:t>ეს არის URL მისამართი Make.com-ში, რომელიც ელოდება მონაცემების გამოგზავნას საიტიდან. ყოველი ფორმის შევსებისას Lovable აგზავნის მონაცემებს ამ მისამართზე.</a:t>
+              <a:t>Scenarios: სრული ავტომატიზაციის სქემები;</a:t>
+            </a:r>
+          </a:p>
+          <a:p>
+            <a:pPr algn="l">
+              <a:spcAft>
+                <a:spcPts val="300"/>
+              </a:spcAft>
+            </a:pPr>
+            <a:r>
+              <a:rPr sz="1300" b="1">
+                <a:solidFill>
+                  <a:srgbClr val="3730A3"/>
+                </a:solidFill>
+                <a:ea typeface="Sylfaen"/>
+                <a:cs typeface="Sylfaen"/>
+                <a:latin typeface="Sylfaen"/>
+              </a:rPr>
+              <a:t>▸  </a:t>
+            </a:r>
+            <a:r>
+              <a:rPr sz="1300">
+                <a:solidFill>
+                  <a:srgbClr val="0F172A"/>
+                </a:solidFill>
+                <a:ea typeface="Sylfaen"/>
+                <a:cs typeface="Sylfaen"/>
+                <a:latin typeface="Sylfaen"/>
+              </a:rPr>
+              <a:t>Modules: აპლიკაციების ბლოკები (მაგ. Gmail, Google Sheets);</a:t>
+            </a:r>
+          </a:p>
+          <a:p>
+            <a:pPr algn="l">
+              <a:spcAft>
+                <a:spcPts val="300"/>
+              </a:spcAft>
+            </a:pPr>
+            <a:r>
+              <a:rPr sz="1300" b="1">
+                <a:solidFill>
+                  <a:srgbClr val="3730A3"/>
+                </a:solidFill>
+                <a:ea typeface="Sylfaen"/>
+                <a:cs typeface="Sylfaen"/>
+                <a:latin typeface="Sylfaen"/>
+              </a:rPr>
+              <a:t>▸  </a:t>
+            </a:r>
+            <a:r>
+              <a:rPr sz="1300">
+                <a:solidFill>
+                  <a:srgbClr val="0F172A"/>
+                </a:solidFill>
+                <a:ea typeface="Sylfaen"/>
+                <a:cs typeface="Sylfaen"/>
+                <a:latin typeface="Sylfaen"/>
+              </a:rPr>
+              <a:t>Filters: პირობები მონაცემთა გასაფილტრად.</a:t>
             </a:r>
           </a:p>
         </p:txBody>
@@ -30080,7 +30512,7 @@
         <p:spPr>
           <a:xfrm>
             <a:off x="4640580" y="1737360"/>
-            <a:ext cx="54864" cy="1581912"/>
+            <a:ext cx="54864" cy="3113532"/>
           </a:xfrm>
           <a:prstGeom prst="rect">
             <a:avLst/>
@@ -30124,7 +30556,7 @@
         <p:spPr>
           <a:xfrm>
             <a:off x="4695444" y="1737360"/>
-            <a:ext cx="3991356" cy="1581912"/>
+            <a:ext cx="3991356" cy="3113532"/>
           </a:xfrm>
           <a:prstGeom prst="roundRect">
             <a:avLst>
@@ -30199,7 +30631,7 @@
                 <a:cs typeface="Sylfaen"/>
                 <a:latin typeface="Sylfaen"/>
               </a:rPr>
-              <a:t>⚙️ JSON Mapping:</a:t>
+              <a:t>🚀 რატომ Make?</a:t>
             </a:r>
           </a:p>
         </p:txBody>
@@ -30240,7 +30672,7 @@
                 <a:cs typeface="Sylfaen"/>
                 <a:latin typeface="Sylfaen"/>
               </a:rPr>
-              <a:t>Webhook-ის გააქტიურების შემდეგ გაუშვით ტესტური რეგისტრაცია საიტზე, რათა Make-მა ავტომატურად ამოიცნოს ცვლადები (Email, Name).</a:t>
+              <a:t>იგი არის ვიზუალური, მარტივი გამოსაყენებელი და უფასო ვერსიაში გაძლევთ 1000 ოპერაციას თვეში.</a:t>
             </a:r>
           </a:p>
         </p:txBody>
@@ -30511,7 +30943,7 @@
                 <a:cs typeface="Sylfaen"/>
                 <a:latin typeface="Sylfaen"/>
               </a:rPr>
-              <a:t>🛠️ პრაქტიკული დავალება #4: Automation Workflow Make.com-ში (30 წუთი)</a:t>
+              <a:t>Make.com: Webhooks setup &amp; JSON mapping</a:t>
             </a:r>
           </a:p>
         </p:txBody>
@@ -30612,7 +31044,7 @@
                 <a:cs typeface="Sylfaen"/>
                 <a:latin typeface="Sylfaen"/>
               </a:rPr>
-              <a:t>36 / 48</a:t>
+              <a:t>36 / 49</a:t>
             </a:r>
           </a:p>
         </p:txBody>
@@ -30653,7 +31085,7 @@
                 <a:cs typeface="Sylfaen"/>
                 <a:latin typeface="Sylfaen"/>
               </a:rPr>
-              <a:t>ააწყვეთ ავტომატიზაციის სქემა Make.com-ზე:</a:t>
+              <a:t>მონაცემთა მყისიერი მიღება საიტიდან (Webhook):</a:t>
             </a:r>
           </a:p>
         </p:txBody>
@@ -30667,13 +31099,13 @@
         <p:spPr>
           <a:xfrm>
             <a:off x="457200" y="1737360"/>
-            <a:ext cx="54864" cy="3113532"/>
-          </a:xfrm>
-          <a:prstGeom prst="rect">
-            <a:avLst/>
-          </a:prstGeom>
-          <a:solidFill>
-            <a:srgbClr val="3730A3"/>
+            <a:ext cx="54864" cy="1581912"/>
+          </a:xfrm>
+          <a:prstGeom prst="rect">
+            <a:avLst/>
+          </a:prstGeom>
+          <a:solidFill>
+            <a:srgbClr val="4F46E5"/>
           </a:solidFill>
           <a:ln>
             <a:noFill/>
@@ -30711,7 +31143,7 @@
         <p:spPr>
           <a:xfrm>
             <a:off x="512064" y="1737360"/>
-            <a:ext cx="3991356" cy="3113532"/>
+            <a:ext cx="3991356" cy="1581912"/>
           </a:xfrm>
           <a:prstGeom prst="roundRect">
             <a:avLst>
@@ -30719,6 +31151,180 @@
             </a:avLst>
           </a:prstGeom>
           <a:solidFill>
+            <a:srgbClr val="FFF7ED"/>
+          </a:solidFill>
+          <a:ln w="6350">
+            <a:solidFill>
+              <a:srgbClr val="4F46E5"/>
+            </a:solidFill>
+          </a:ln>
+          <a:effectLst/>
+        </p:spPr>
+        <p:style>
+          <a:lnRef idx="1">
+            <a:schemeClr val="accent1"/>
+          </a:lnRef>
+          <a:fillRef idx="3">
+            <a:schemeClr val="accent1"/>
+          </a:fillRef>
+          <a:effectRef idx="2">
+            <a:schemeClr val="accent1"/>
+          </a:effectRef>
+          <a:fontRef idx="minor">
+            <a:schemeClr val="lt1"/>
+          </a:fontRef>
+        </p:style>
+        <p:txBody>
+          <a:bodyPr rtlCol="0" anchor="ctr"/>
+          <a:lstStyle/>
+          <a:p>
+            <a:pPr algn="ctr"/>
+          </a:p>
+        </p:txBody>
+      </p:sp>
+      <p:sp>
+        <p:nvSpPr>
+          <p:cNvPr id="11" name="TextBox 10"/>
+          <p:cNvSpPr txBox="1"/>
+          <p:nvPr/>
+        </p:nvSpPr>
+        <p:spPr>
+          <a:xfrm>
+            <a:off x="621792" y="1810512"/>
+            <a:ext cx="3771900" cy="320040"/>
+          </a:xfrm>
+          <a:prstGeom prst="rect">
+            <a:avLst/>
+          </a:prstGeom>
+          <a:noFill/>
+        </p:spPr>
+        <p:txBody>
+          <a:bodyPr wrap="square" anchor="t" lIns="54864" rIns="54864" tIns="54864" bIns="54864">
+            <a:spAutoFit/>
+          </a:bodyPr>
+          <a:lstStyle/>
+          <a:p>
+            <a:pPr>
+              <a:spcAft>
+                <a:spcPts val="400"/>
+              </a:spcAft>
+            </a:pPr>
+            <a:r>
+              <a:rPr sz="1400" b="1" i="0">
+                <a:solidFill>
+                  <a:srgbClr val="0F172A"/>
+                </a:solidFill>
+                <a:ea typeface="Sylfaen"/>
+                <a:cs typeface="Sylfaen"/>
+                <a:latin typeface="Sylfaen"/>
+              </a:rPr>
+              <a:t>🌐 რა არის Webhook?</a:t>
+            </a:r>
+          </a:p>
+        </p:txBody>
+      </p:sp>
+      <p:sp>
+        <p:nvSpPr>
+          <p:cNvPr id="12" name="TextBox 11"/>
+          <p:cNvSpPr txBox="1"/>
+          <p:nvPr/>
+        </p:nvSpPr>
+        <p:spPr>
+          <a:xfrm>
+            <a:off x="621792" y="2203704"/>
+            <a:ext cx="3771900" cy="713232"/>
+          </a:xfrm>
+          <a:prstGeom prst="rect">
+            <a:avLst/>
+          </a:prstGeom>
+          <a:noFill/>
+        </p:spPr>
+        <p:txBody>
+          <a:bodyPr wrap="square" anchor="t" lIns="54864" rIns="54864" tIns="54864" bIns="54864">
+            <a:spAutoFit/>
+          </a:bodyPr>
+          <a:lstStyle/>
+          <a:p>
+            <a:pPr>
+              <a:spcAft>
+                <a:spcPts val="400"/>
+              </a:spcAft>
+            </a:pPr>
+            <a:r>
+              <a:rPr sz="1300" b="0" i="0">
+                <a:solidFill>
+                  <a:srgbClr val="0F172A"/>
+                </a:solidFill>
+                <a:ea typeface="Sylfaen"/>
+                <a:cs typeface="Sylfaen"/>
+                <a:latin typeface="Sylfaen"/>
+              </a:rPr>
+              <a:t>ეს არის URL მისამართი Make.com-ში, რომელიც ელოდება მონაცემების გამოგზავნას საიტიდან. ყოველი ფორმის შევსებისას Lovable აგზავნის მონაცემებს ამ მისამართზე.</a:t>
+            </a:r>
+          </a:p>
+        </p:txBody>
+      </p:sp>
+      <p:sp>
+        <p:nvSpPr>
+          <p:cNvPr id="13" name="Rectangle 12"/>
+          <p:cNvSpPr/>
+          <p:nvPr/>
+        </p:nvSpPr>
+        <p:spPr>
+          <a:xfrm>
+            <a:off x="4640580" y="1737360"/>
+            <a:ext cx="54864" cy="1581912"/>
+          </a:xfrm>
+          <a:prstGeom prst="rect">
+            <a:avLst/>
+          </a:prstGeom>
+          <a:solidFill>
+            <a:srgbClr val="3730A3"/>
+          </a:solidFill>
+          <a:ln>
+            <a:noFill/>
+          </a:ln>
+          <a:effectLst/>
+        </p:spPr>
+        <p:style>
+          <a:lnRef idx="1">
+            <a:schemeClr val="accent1"/>
+          </a:lnRef>
+          <a:fillRef idx="3">
+            <a:schemeClr val="accent1"/>
+          </a:fillRef>
+          <a:effectRef idx="2">
+            <a:schemeClr val="accent1"/>
+          </a:effectRef>
+          <a:fontRef idx="minor">
+            <a:schemeClr val="lt1"/>
+          </a:fontRef>
+        </p:style>
+        <p:txBody>
+          <a:bodyPr rtlCol="0" anchor="ctr"/>
+          <a:lstStyle/>
+          <a:p>
+            <a:pPr algn="ctr"/>
+          </a:p>
+        </p:txBody>
+      </p:sp>
+      <p:sp>
+        <p:nvSpPr>
+          <p:cNvPr id="14" name="Rounded Rectangle 13"/>
+          <p:cNvSpPr/>
+          <p:nvPr/>
+        </p:nvSpPr>
+        <p:spPr>
+          <a:xfrm>
+            <a:off x="4695444" y="1737360"/>
+            <a:ext cx="3991356" cy="1581912"/>
+          </a:xfrm>
+          <a:prstGeom prst="roundRect">
+            <a:avLst>
+              <a:gd name="adj" fmla="val 4000"/>
+            </a:avLst>
+          </a:prstGeom>
+          <a:solidFill>
             <a:srgbClr val="F8FAFC"/>
           </a:solidFill>
           <a:ln w="6350">
@@ -30752,13 +31358,13 @@
       </p:sp>
       <p:sp>
         <p:nvSpPr>
-          <p:cNvPr id="11" name="TextBox 10"/>
+          <p:cNvPr id="15" name="TextBox 14"/>
           <p:cNvSpPr txBox="1"/>
           <p:nvPr/>
         </p:nvSpPr>
         <p:spPr>
           <a:xfrm>
-            <a:off x="621792" y="1810512"/>
+            <a:off x="4805172" y="1810512"/>
             <a:ext cx="3771900" cy="320040"/>
           </a:xfrm>
           <a:prstGeom prst="rect">
@@ -30786,21 +31392,21 @@
                 <a:cs typeface="Sylfaen"/>
                 <a:latin typeface="Sylfaen"/>
               </a:rPr>
-              <a:t>📋 ინსტრუქცია:</a:t>
-            </a:r>
-          </a:p>
-        </p:txBody>
-      </p:sp>
-      <p:sp>
-        <p:nvSpPr>
-          <p:cNvPr id="12" name="TextBox 11"/>
+              <a:t>⚙️ JSON Mapping:</a:t>
+            </a:r>
+          </a:p>
+        </p:txBody>
+      </p:sp>
+      <p:sp>
+        <p:nvSpPr>
+          <p:cNvPr id="16" name="TextBox 15"/>
           <p:cNvSpPr txBox="1"/>
           <p:nvPr/>
         </p:nvSpPr>
         <p:spPr>
           <a:xfrm>
-            <a:off x="621792" y="2203704"/>
-            <a:ext cx="3771900" cy="2267712"/>
+            <a:off x="4805172" y="2203704"/>
+            <a:ext cx="3771900" cy="713232"/>
           </a:xfrm>
           <a:prstGeom prst="rect">
             <a:avLst/>
@@ -30813,24 +31419,13 @@
           </a:bodyPr>
           <a:lstStyle/>
           <a:p>
-            <a:pPr algn="l">
-              <a:spcAft>
-                <a:spcPts val="300"/>
-              </a:spcAft>
-            </a:pPr>
-            <a:r>
-              <a:rPr sz="1300" b="1">
-                <a:solidFill>
-                  <a:srgbClr val="3730A3"/>
-                </a:solidFill>
-                <a:ea typeface="Sylfaen"/>
-                <a:cs typeface="Sylfaen"/>
-                <a:latin typeface="Sylfaen"/>
-              </a:rPr>
-              <a:t>▸  </a:t>
-            </a:r>
-            <a:r>
-              <a:rPr sz="1300">
+            <a:pPr>
+              <a:spcAft>
+                <a:spcPts val="400"/>
+              </a:spcAft>
+            </a:pPr>
+            <a:r>
+              <a:rPr sz="1300" b="0" i="0">
                 <a:solidFill>
                   <a:srgbClr val="0F172A"/>
                 </a:solidFill>
@@ -30838,85 +31433,27 @@
                 <a:cs typeface="Sylfaen"/>
                 <a:latin typeface="Sylfaen"/>
               </a:rPr>
-              <a:t>შექმენით ანგარიში Make.com -ზე და დაიწყეთ Scenario;</a:t>
-            </a:r>
-          </a:p>
-          <a:p>
-            <a:pPr algn="l">
-              <a:spcAft>
-                <a:spcPts val="300"/>
-              </a:spcAft>
-            </a:pPr>
-            <a:r>
-              <a:rPr sz="1300" b="1">
-                <a:solidFill>
-                  <a:srgbClr val="3730A3"/>
-                </a:solidFill>
-                <a:ea typeface="Sylfaen"/>
-                <a:cs typeface="Sylfaen"/>
-                <a:latin typeface="Sylfaen"/>
-              </a:rPr>
-              <a:t>▸  </a:t>
-            </a:r>
-            <a:r>
-              <a:rPr sz="1300">
-                <a:solidFill>
-                  <a:srgbClr val="0F172A"/>
-                </a:solidFill>
-                <a:ea typeface="Sylfaen"/>
-                <a:cs typeface="Sylfaen"/>
-                <a:latin typeface="Sylfaen"/>
-              </a:rPr>
-              <a:t>დაამატეთ Webhook trigger და დაუკავშირეთ თქვენს Landing Page-ს;</a:t>
-            </a:r>
-          </a:p>
-          <a:p>
-            <a:pPr algn="l">
-              <a:spcAft>
-                <a:spcPts val="300"/>
-              </a:spcAft>
-            </a:pPr>
-            <a:r>
-              <a:rPr sz="1300" b="1">
-                <a:solidFill>
-                  <a:srgbClr val="3730A3"/>
-                </a:solidFill>
-                <a:ea typeface="Sylfaen"/>
-                <a:cs typeface="Sylfaen"/>
-                <a:latin typeface="Sylfaen"/>
-              </a:rPr>
-              <a:t>▸  </a:t>
-            </a:r>
-            <a:r>
-              <a:rPr sz="1300">
-                <a:solidFill>
-                  <a:srgbClr val="0F172A"/>
-                </a:solidFill>
-                <a:ea typeface="Sylfaen"/>
-                <a:cs typeface="Sylfaen"/>
-                <a:latin typeface="Sylfaen"/>
-              </a:rPr>
-              <a:t>დაამატეთ Gmail/SMTP და Google Sheets მოდულები და გააკეთეთ mapping.</a:t>
-            </a:r>
-          </a:p>
-        </p:txBody>
-      </p:sp>
-      <p:sp>
-        <p:nvSpPr>
-          <p:cNvPr id="13" name="Rectangle 12"/>
-          <p:cNvSpPr/>
-          <p:nvPr/>
-        </p:nvSpPr>
-        <p:spPr>
-          <a:xfrm>
-            <a:off x="621792" y="4544568"/>
-            <a:ext cx="54864" cy="233171"/>
-          </a:xfrm>
-          <a:prstGeom prst="rect">
-            <a:avLst/>
-          </a:prstGeom>
-          <a:solidFill>
-            <a:srgbClr val="3730A3"/>
+              <a:t>Webhook-ის გააქტიურების შემდეგ გაუშვით ტესტური რეგისტრაცია საიტზე, რათა Make-მა ავტომატურად ამოიცნოს ცვლადები (Email, Name).</a:t>
+            </a:r>
+          </a:p>
+        </p:txBody>
+      </p:sp>
+      <p:sp>
+        <p:nvSpPr>
+          <p:cNvPr id="17" name="Rectangle 16"/>
+          <p:cNvSpPr/>
+          <p:nvPr/>
+        </p:nvSpPr>
+        <p:spPr>
+          <a:xfrm>
+            <a:off x="457200" y="4850892"/>
+            <a:ext cx="8229600" cy="13716"/>
+          </a:xfrm>
+          <a:prstGeom prst="rect">
+            <a:avLst/>
+          </a:prstGeom>
+          <a:solidFill>
+            <a:srgbClr val="E2E8F0"/>
           </a:solidFill>
           <a:ln>
             <a:noFill/>
@@ -30947,865 +31484,7 @@
       </p:sp>
       <p:sp>
         <p:nvSpPr>
-          <p:cNvPr id="14" name="Rounded Rectangle 13"/>
-          <p:cNvSpPr/>
-          <p:nvPr/>
-        </p:nvSpPr>
-        <p:spPr>
-          <a:xfrm>
-            <a:off x="676656" y="4544568"/>
-            <a:ext cx="3717036" cy="233171"/>
-          </a:xfrm>
-          <a:prstGeom prst="roundRect">
-            <a:avLst>
-              <a:gd name="adj" fmla="val 4000"/>
-            </a:avLst>
-          </a:prstGeom>
-          <a:solidFill>
-            <a:srgbClr val="F8FAFC"/>
-          </a:solidFill>
-          <a:ln w="9525">
-            <a:solidFill>
-              <a:srgbClr val="E2E8F0"/>
-            </a:solidFill>
-          </a:ln>
-          <a:effectLst/>
-        </p:spPr>
-        <p:style>
-          <a:lnRef idx="1">
-            <a:schemeClr val="accent1"/>
-          </a:lnRef>
-          <a:fillRef idx="3">
-            <a:schemeClr val="accent1"/>
-          </a:fillRef>
-          <a:effectRef idx="2">
-            <a:schemeClr val="accent1"/>
-          </a:effectRef>
-          <a:fontRef idx="minor">
-            <a:schemeClr val="lt1"/>
-          </a:fontRef>
-        </p:style>
-        <p:txBody>
-          <a:bodyPr rtlCol="0" anchor="ctr"/>
-          <a:lstStyle/>
-          <a:p>
-            <a:pPr algn="ctr"/>
-          </a:p>
-        </p:txBody>
-      </p:sp>
-      <p:sp>
-        <p:nvSpPr>
-          <p:cNvPr id="15" name="Rectangle 14"/>
-          <p:cNvSpPr/>
-          <p:nvPr/>
-        </p:nvSpPr>
-        <p:spPr>
-          <a:xfrm>
-            <a:off x="4640580" y="1737360"/>
-            <a:ext cx="54864" cy="3113532"/>
-          </a:xfrm>
-          <a:prstGeom prst="rect">
-            <a:avLst/>
-          </a:prstGeom>
-          <a:solidFill>
-            <a:srgbClr val="3730A3"/>
-          </a:solidFill>
-          <a:ln>
-            <a:noFill/>
-          </a:ln>
-          <a:effectLst/>
-        </p:spPr>
-        <p:style>
-          <a:lnRef idx="1">
-            <a:schemeClr val="accent1"/>
-          </a:lnRef>
-          <a:fillRef idx="3">
-            <a:schemeClr val="accent1"/>
-          </a:fillRef>
-          <a:effectRef idx="2">
-            <a:schemeClr val="accent1"/>
-          </a:effectRef>
-          <a:fontRef idx="minor">
-            <a:schemeClr val="lt1"/>
-          </a:fontRef>
-        </p:style>
-        <p:txBody>
-          <a:bodyPr rtlCol="0" anchor="ctr"/>
-          <a:lstStyle/>
-          <a:p>
-            <a:pPr algn="ctr"/>
-          </a:p>
-        </p:txBody>
-      </p:sp>
-      <p:sp>
-        <p:nvSpPr>
-          <p:cNvPr id="16" name="Rounded Rectangle 15"/>
-          <p:cNvSpPr/>
-          <p:nvPr/>
-        </p:nvSpPr>
-        <p:spPr>
-          <a:xfrm>
-            <a:off x="4695444" y="1737360"/>
-            <a:ext cx="3991356" cy="3113532"/>
-          </a:xfrm>
-          <a:prstGeom prst="roundRect">
-            <a:avLst>
-              <a:gd name="adj" fmla="val 4000"/>
-            </a:avLst>
-          </a:prstGeom>
-          <a:solidFill>
-            <a:srgbClr val="F8FAFC"/>
-          </a:solidFill>
-          <a:ln w="6350">
-            <a:solidFill>
-              <a:srgbClr val="3730A3"/>
-            </a:solidFill>
-          </a:ln>
-          <a:effectLst/>
-        </p:spPr>
-        <p:style>
-          <a:lnRef idx="1">
-            <a:schemeClr val="accent1"/>
-          </a:lnRef>
-          <a:fillRef idx="3">
-            <a:schemeClr val="accent1"/>
-          </a:fillRef>
-          <a:effectRef idx="2">
-            <a:schemeClr val="accent1"/>
-          </a:effectRef>
-          <a:fontRef idx="minor">
-            <a:schemeClr val="lt1"/>
-          </a:fontRef>
-        </p:style>
-        <p:txBody>
-          <a:bodyPr rtlCol="0" anchor="ctr"/>
-          <a:lstStyle/>
-          <a:p>
-            <a:pPr algn="ctr"/>
-          </a:p>
-        </p:txBody>
-      </p:sp>
-      <p:sp>
-        <p:nvSpPr>
-          <p:cNvPr id="17" name="Rectangle 16"/>
-          <p:cNvSpPr/>
-          <p:nvPr/>
-        </p:nvSpPr>
-        <p:spPr>
-          <a:xfrm>
-            <a:off x="4805172" y="1810512"/>
-            <a:ext cx="54864" cy="292608"/>
-          </a:xfrm>
-          <a:prstGeom prst="rect">
-            <a:avLst/>
-          </a:prstGeom>
-          <a:solidFill>
-            <a:srgbClr val="3730A3"/>
-          </a:solidFill>
-          <a:ln>
-            <a:noFill/>
-          </a:ln>
-          <a:effectLst/>
-        </p:spPr>
-        <p:style>
-          <a:lnRef idx="1">
-            <a:schemeClr val="accent1"/>
-          </a:lnRef>
-          <a:fillRef idx="3">
-            <a:schemeClr val="accent1"/>
-          </a:fillRef>
-          <a:effectRef idx="2">
-            <a:schemeClr val="accent1"/>
-          </a:effectRef>
-          <a:fontRef idx="minor">
-            <a:schemeClr val="lt1"/>
-          </a:fontRef>
-        </p:style>
-        <p:txBody>
-          <a:bodyPr rtlCol="0" anchor="ctr"/>
-          <a:lstStyle/>
-          <a:p>
-            <a:pPr algn="ctr"/>
-          </a:p>
-        </p:txBody>
-      </p:sp>
-      <p:sp>
-        <p:nvSpPr>
-          <p:cNvPr id="18" name="Rounded Rectangle 17"/>
-          <p:cNvSpPr/>
-          <p:nvPr/>
-        </p:nvSpPr>
-        <p:spPr>
-          <a:xfrm>
-            <a:off x="4860036" y="1810512"/>
-            <a:ext cx="3717036" cy="292608"/>
-          </a:xfrm>
-          <a:prstGeom prst="roundRect">
-            <a:avLst>
-              <a:gd name="adj" fmla="val 4000"/>
-            </a:avLst>
-          </a:prstGeom>
-          <a:solidFill>
-            <a:srgbClr val="F8FAFC"/>
-          </a:solidFill>
-          <a:ln w="9525">
-            <a:solidFill>
-              <a:srgbClr val="E2E8F0"/>
-            </a:solidFill>
-          </a:ln>
-          <a:effectLst/>
-        </p:spPr>
-        <p:style>
-          <a:lnRef idx="1">
-            <a:schemeClr val="accent1"/>
-          </a:lnRef>
-          <a:fillRef idx="3">
-            <a:schemeClr val="accent1"/>
-          </a:fillRef>
-          <a:effectRef idx="2">
-            <a:schemeClr val="accent1"/>
-          </a:effectRef>
-          <a:fontRef idx="minor">
-            <a:schemeClr val="lt1"/>
-          </a:fontRef>
-        </p:style>
-        <p:txBody>
-          <a:bodyPr rtlCol="0" anchor="ctr"/>
-          <a:lstStyle/>
-          <a:p>
-            <a:pPr algn="ctr"/>
-          </a:p>
-        </p:txBody>
-      </p:sp>
-      <p:sp>
-        <p:nvSpPr>
-          <p:cNvPr id="19" name="Rectangle 18"/>
-          <p:cNvSpPr/>
-          <p:nvPr/>
-        </p:nvSpPr>
-        <p:spPr>
-          <a:xfrm>
-            <a:off x="4914900" y="1865376"/>
-            <a:ext cx="3552444" cy="201168"/>
-          </a:xfrm>
-          <a:prstGeom prst="rect">
-            <a:avLst/>
-          </a:prstGeom>
-          <a:solidFill>
-            <a:srgbClr val="FFFFFF"/>
-          </a:solidFill>
-          <a:ln w="6350">
-            <a:solidFill>
-              <a:srgbClr val="E2E8F0"/>
-            </a:solidFill>
-          </a:ln>
-          <a:effectLst/>
-        </p:spPr>
-        <p:style>
-          <a:lnRef idx="1">
-            <a:schemeClr val="accent1"/>
-          </a:lnRef>
-          <a:fillRef idx="3">
-            <a:schemeClr val="accent1"/>
-          </a:fillRef>
-          <a:effectRef idx="2">
-            <a:schemeClr val="accent1"/>
-          </a:effectRef>
-          <a:fontRef idx="minor">
-            <a:schemeClr val="lt1"/>
-          </a:fontRef>
-        </p:style>
-        <p:txBody>
-          <a:bodyPr rtlCol="0" anchor="ctr"/>
-          <a:lstStyle/>
-          <a:p>
-            <a:pPr algn="ctr"/>
-          </a:p>
-        </p:txBody>
-      </p:sp>
-      <p:sp>
-        <p:nvSpPr>
-          <p:cNvPr id="20" name="TextBox 19"/>
-          <p:cNvSpPr txBox="1"/>
-          <p:nvPr/>
-        </p:nvSpPr>
-        <p:spPr>
-          <a:xfrm>
-            <a:off x="4969764" y="1892807"/>
-            <a:ext cx="3442716" cy="146304"/>
-          </a:xfrm>
-          <a:prstGeom prst="rect">
-            <a:avLst/>
-          </a:prstGeom>
-          <a:noFill/>
-        </p:spPr>
-        <p:txBody>
-          <a:bodyPr wrap="square" anchor="t" lIns="54864" rIns="54864" tIns="54864" bIns="54864">
-            <a:spAutoFit/>
-          </a:bodyPr>
-          <a:lstStyle/>
-          <a:p>
-            <a:pPr>
-              <a:spcAft>
-                <a:spcPts val="0"/>
-              </a:spcAft>
-            </a:pPr>
-            <a:r>
-              <a:rPr sz="800">
-                <a:solidFill>
-                  <a:srgbClr val="0F172A"/>
-                </a:solidFill>
-                <a:ea typeface="Consolas"/>
-                <a:cs typeface="Consolas"/>
-                <a:latin typeface="Consolas"/>
-              </a:rPr>
-              <a:t>Make.com სცენარის</a:t>
-            </a:r>
-          </a:p>
-          <a:p>
-            <a:pPr>
-              <a:spcAft>
-                <a:spcPts val="0"/>
-              </a:spcAft>
-            </a:pPr>
-            <a:r>
-              <a:rPr sz="800">
-                <a:solidFill>
-                  <a:srgbClr val="0F172A"/>
-                </a:solidFill>
-                <a:ea typeface="Consolas"/>
-                <a:cs typeface="Consolas"/>
-                <a:latin typeface="Consolas"/>
-              </a:rPr>
-              <a:t>კონფიგურაცია:</a:t>
-            </a:r>
-          </a:p>
-        </p:txBody>
-      </p:sp>
-      <p:sp>
-        <p:nvSpPr>
-          <p:cNvPr id="21" name="Rounded Rectangle 20"/>
-          <p:cNvSpPr/>
-          <p:nvPr/>
-        </p:nvSpPr>
-        <p:spPr>
-          <a:xfrm>
-            <a:off x="4805172" y="2176272"/>
-            <a:ext cx="3771900" cy="2601468"/>
-          </a:xfrm>
-          <a:prstGeom prst="roundRect">
-            <a:avLst>
-              <a:gd name="adj" fmla="val 4000"/>
-            </a:avLst>
-          </a:prstGeom>
-          <a:solidFill>
-            <a:srgbClr val="F8FAFC"/>
-          </a:solidFill>
-          <a:ln w="9525">
-            <a:solidFill>
-              <a:srgbClr val="E2E8F0"/>
-            </a:solidFill>
-          </a:ln>
-          <a:effectLst/>
-        </p:spPr>
-        <p:style>
-          <a:lnRef idx="1">
-            <a:schemeClr val="accent1"/>
-          </a:lnRef>
-          <a:fillRef idx="3">
-            <a:schemeClr val="accent1"/>
-          </a:fillRef>
-          <a:effectRef idx="2">
-            <a:schemeClr val="accent1"/>
-          </a:effectRef>
-          <a:fontRef idx="minor">
-            <a:schemeClr val="lt1"/>
-          </a:fontRef>
-        </p:style>
-        <p:txBody>
-          <a:bodyPr rtlCol="0" anchor="ctr"/>
-          <a:lstStyle/>
-          <a:p>
-            <a:pPr algn="ctr"/>
-          </a:p>
-        </p:txBody>
-      </p:sp>
-      <p:sp>
-        <p:nvSpPr>
-          <p:cNvPr id="22" name="Rectangle 21"/>
-          <p:cNvSpPr/>
-          <p:nvPr/>
-        </p:nvSpPr>
-        <p:spPr>
-          <a:xfrm>
-            <a:off x="4860036" y="2221991"/>
-            <a:ext cx="3662172" cy="2510027"/>
-          </a:xfrm>
-          <a:prstGeom prst="rect">
-            <a:avLst/>
-          </a:prstGeom>
-          <a:solidFill>
-            <a:srgbClr val="FFFFFF"/>
-          </a:solidFill>
-          <a:ln w="6350">
-            <a:solidFill>
-              <a:srgbClr val="E2E8F0"/>
-            </a:solidFill>
-          </a:ln>
-          <a:effectLst/>
-        </p:spPr>
-        <p:style>
-          <a:lnRef idx="1">
-            <a:schemeClr val="accent1"/>
-          </a:lnRef>
-          <a:fillRef idx="3">
-            <a:schemeClr val="accent1"/>
-          </a:fillRef>
-          <a:effectRef idx="2">
-            <a:schemeClr val="accent1"/>
-          </a:effectRef>
-          <a:fontRef idx="minor">
-            <a:schemeClr val="lt1"/>
-          </a:fontRef>
-        </p:style>
-        <p:txBody>
-          <a:bodyPr rtlCol="0" anchor="ctr"/>
-          <a:lstStyle/>
-          <a:p>
-            <a:pPr algn="ctr"/>
-          </a:p>
-        </p:txBody>
-      </p:sp>
-      <p:sp>
-        <p:nvSpPr>
-          <p:cNvPr id="23" name="TextBox 22"/>
-          <p:cNvSpPr txBox="1"/>
-          <p:nvPr/>
-        </p:nvSpPr>
-        <p:spPr>
-          <a:xfrm>
-            <a:off x="4914900" y="2240279"/>
-            <a:ext cx="3552444" cy="2473451"/>
-          </a:xfrm>
-          <a:prstGeom prst="rect">
-            <a:avLst/>
-          </a:prstGeom>
-          <a:noFill/>
-        </p:spPr>
-        <p:txBody>
-          <a:bodyPr wrap="square" anchor="t" lIns="54864" rIns="54864" tIns="54864" bIns="54864">
-            <a:spAutoFit/>
-          </a:bodyPr>
-          <a:lstStyle/>
-          <a:p>
-            <a:pPr>
-              <a:spcAft>
-                <a:spcPts val="0"/>
-              </a:spcAft>
-            </a:pPr>
-            <a:r>
-              <a:rPr sz="1000">
-                <a:solidFill>
-                  <a:srgbClr val="0F172A"/>
-                </a:solidFill>
-                <a:ea typeface="Consolas"/>
-                <a:cs typeface="Consolas"/>
-                <a:latin typeface="Consolas"/>
-              </a:rPr>
-              <a:t>Scenario: Landing Page</a:t>
-            </a:r>
-          </a:p>
-          <a:p>
-            <a:pPr>
-              <a:spcAft>
-                <a:spcPts val="0"/>
-              </a:spcAft>
-            </a:pPr>
-            <a:r>
-              <a:rPr sz="1000">
-                <a:solidFill>
-                  <a:srgbClr val="0F172A"/>
-                </a:solidFill>
-                <a:ea typeface="Consolas"/>
-                <a:cs typeface="Consolas"/>
-                <a:latin typeface="Consolas"/>
-              </a:rPr>
-              <a:t>Form → Email + CRM Sheets</a:t>
-            </a:r>
-          </a:p>
-          <a:p>
-            <a:pPr>
-              <a:spcAft>
-                <a:spcPts val="0"/>
-              </a:spcAft>
-            </a:pPr>
-            <a:r>
-              <a:rPr sz="1000">
-                <a:solidFill>
-                  <a:srgbClr val="0F172A"/>
-                </a:solidFill>
-                <a:ea typeface="Consolas"/>
-                <a:cs typeface="Consolas"/>
-                <a:latin typeface="Consolas"/>
-              </a:rPr>
-              <a:t>1. TRIGGER: Webhook (POST</a:t>
-            </a:r>
-          </a:p>
-          <a:p>
-            <a:pPr>
-              <a:spcAft>
-                <a:spcPts val="0"/>
-              </a:spcAft>
-            </a:pPr>
-            <a:r>
-              <a:rPr sz="1000">
-                <a:solidFill>
-                  <a:srgbClr val="0F172A"/>
-                </a:solidFill>
-                <a:ea typeface="Consolas"/>
-                <a:cs typeface="Consolas"/>
-                <a:latin typeface="Consolas"/>
-              </a:rPr>
-              <a:t>request)</a:t>
-            </a:r>
-          </a:p>
-          <a:p>
-            <a:pPr>
-              <a:spcAft>
-                <a:spcPts val="0"/>
-              </a:spcAft>
-            </a:pPr>
-            <a:r>
-              <a:rPr sz="1000">
-                <a:solidFill>
-                  <a:srgbClr val="0F172A"/>
-                </a:solidFill>
-                <a:ea typeface="Consolas"/>
-                <a:cs typeface="Consolas"/>
-                <a:latin typeface="Consolas"/>
-              </a:rPr>
-              <a:t>URL: [Lovable-იდან</a:t>
-            </a:r>
-          </a:p>
-          <a:p>
-            <a:pPr>
-              <a:spcAft>
-                <a:spcPts val="0"/>
-              </a:spcAft>
-            </a:pPr>
-            <a:r>
-              <a:rPr sz="1000">
-                <a:solidFill>
-                  <a:srgbClr val="0F172A"/>
-                </a:solidFill>
-                <a:ea typeface="Consolas"/>
-                <a:cs typeface="Consolas"/>
-                <a:latin typeface="Consolas"/>
-              </a:rPr>
-              <a:t>მიღებული Webhook URL]</a:t>
-            </a:r>
-          </a:p>
-          <a:p>
-            <a:pPr>
-              <a:spcAft>
-                <a:spcPts val="0"/>
-              </a:spcAft>
-            </a:pPr>
-            <a:r>
-              <a:rPr sz="1000">
-                <a:solidFill>
-                  <a:srgbClr val="0F172A"/>
-                </a:solidFill>
-                <a:ea typeface="Consolas"/>
-                <a:cs typeface="Consolas"/>
-                <a:latin typeface="Consolas"/>
-              </a:rPr>
-              <a:t>2. MODULE 1: Send Email</a:t>
-            </a:r>
-          </a:p>
-          <a:p>
-            <a:pPr>
-              <a:spcAft>
-                <a:spcPts val="0"/>
-              </a:spcAft>
-            </a:pPr>
-            <a:r>
-              <a:rPr sz="1000">
-                <a:solidFill>
-                  <a:srgbClr val="0F172A"/>
-                </a:solidFill>
-                <a:ea typeface="Consolas"/>
-                <a:cs typeface="Consolas"/>
-                <a:latin typeface="Consolas"/>
-              </a:rPr>
-              <a:t>via Gmail</a:t>
-            </a:r>
-          </a:p>
-          <a:p>
-            <a:pPr>
-              <a:spcAft>
-                <a:spcPts val="0"/>
-              </a:spcAft>
-            </a:pPr>
-            <a:r>
-              <a:rPr sz="1000">
-                <a:solidFill>
-                  <a:srgbClr val="0F172A"/>
-                </a:solidFill>
-                <a:ea typeface="Consolas"/>
-                <a:cs typeface="Consolas"/>
-                <a:latin typeface="Consolas"/>
-              </a:rPr>
-              <a:t>To: {{trigger.email}}</a:t>
-            </a:r>
-          </a:p>
-          <a:p>
-            <a:pPr>
-              <a:spcAft>
-                <a:spcPts val="0"/>
-              </a:spcAft>
-            </a:pPr>
-            <a:r>
-              <a:rPr sz="1000">
-                <a:solidFill>
-                  <a:srgbClr val="0F172A"/>
-                </a:solidFill>
-                <a:ea typeface="Consolas"/>
-                <a:cs typeface="Consolas"/>
-                <a:latin typeface="Consolas"/>
-              </a:rPr>
-              <a:t>Subject: "გმადლობთ</a:t>
-            </a:r>
-          </a:p>
-          <a:p>
-            <a:pPr>
-              <a:spcAft>
-                <a:spcPts val="0"/>
-              </a:spcAft>
-            </a:pPr>
-            <a:r>
-              <a:rPr sz="1000">
-                <a:solidFill>
-                  <a:srgbClr val="0F172A"/>
-                </a:solidFill>
-                <a:ea typeface="Consolas"/>
-                <a:cs typeface="Consolas"/>
-                <a:latin typeface="Consolas"/>
-              </a:rPr>
-              <a:t>რეგისტრაციისთვის!"</a:t>
-            </a:r>
-          </a:p>
-          <a:p>
-            <a:pPr>
-              <a:spcAft>
-                <a:spcPts val="0"/>
-              </a:spcAft>
-            </a:pPr>
-            <a:r>
-              <a:rPr sz="1000">
-                <a:solidFill>
-                  <a:srgbClr val="0F172A"/>
-                </a:solidFill>
-                <a:ea typeface="Consolas"/>
-                <a:cs typeface="Consolas"/>
-                <a:latin typeface="Consolas"/>
-              </a:rPr>
-              <a:t>Body: "ჩვენი გუნდი მალე</a:t>
-            </a:r>
-          </a:p>
-          <a:p>
-            <a:pPr>
-              <a:spcAft>
-                <a:spcPts val="0"/>
-              </a:spcAft>
-            </a:pPr>
-            <a:r>
-              <a:rPr sz="1000">
-                <a:solidFill>
-                  <a:srgbClr val="0F172A"/>
-                </a:solidFill>
-                <a:ea typeface="Consolas"/>
-                <a:cs typeface="Consolas"/>
-                <a:latin typeface="Consolas"/>
-              </a:rPr>
-              <a:t>დაგიკავშირდებათ."</a:t>
-            </a:r>
-          </a:p>
-          <a:p>
-            <a:pPr>
-              <a:spcAft>
-                <a:spcPts val="0"/>
-              </a:spcAft>
-            </a:pPr>
-            <a:r>
-              <a:rPr sz="1000">
-                <a:solidFill>
-                  <a:srgbClr val="0F172A"/>
-                </a:solidFill>
-                <a:ea typeface="Consolas"/>
-                <a:cs typeface="Consolas"/>
-                <a:latin typeface="Consolas"/>
-              </a:rPr>
-              <a:t>3. MODULE 2: Add Row to</a:t>
-            </a:r>
-          </a:p>
-          <a:p>
-            <a:pPr>
-              <a:spcAft>
-                <a:spcPts val="0"/>
-              </a:spcAft>
-            </a:pPr>
-            <a:r>
-              <a:rPr sz="1000">
-                <a:solidFill>
-                  <a:srgbClr val="0F172A"/>
-                </a:solidFill>
-                <a:ea typeface="Consolas"/>
-                <a:cs typeface="Consolas"/>
-                <a:latin typeface="Consolas"/>
-              </a:rPr>
-              <a:t>Google Sheets (leads</a:t>
-            </a:r>
-          </a:p>
-          <a:p>
-            <a:pPr>
-              <a:spcAft>
-                <a:spcPts val="0"/>
-              </a:spcAft>
-            </a:pPr>
-            <a:r>
-              <a:rPr sz="1000">
-                <a:solidFill>
-                  <a:srgbClr val="0F172A"/>
-                </a:solidFill>
-                <a:ea typeface="Consolas"/>
-                <a:cs typeface="Consolas"/>
-                <a:latin typeface="Consolas"/>
-              </a:rPr>
-              <a:t>ცხრილში)</a:t>
-            </a:r>
-          </a:p>
-          <a:p>
-            <a:pPr>
-              <a:spcAft>
-                <a:spcPts val="0"/>
-              </a:spcAft>
-            </a:pPr>
-            <a:r>
-              <a:rPr sz="1000">
-                <a:solidFill>
-                  <a:srgbClr val="0F172A"/>
-                </a:solidFill>
-                <a:ea typeface="Consolas"/>
-                <a:cs typeface="Consolas"/>
-                <a:latin typeface="Consolas"/>
-              </a:rPr>
-              <a:t>Columns: Email, Name, Date</a:t>
-            </a:r>
-          </a:p>
-          <a:p>
-            <a:pPr>
-              <a:spcAft>
-                <a:spcPts val="0"/>
-              </a:spcAft>
-            </a:pPr>
-            <a:r>
-              <a:rPr sz="1000">
-                <a:solidFill>
-                  <a:srgbClr val="0F172A"/>
-                </a:solidFill>
-                <a:ea typeface="Consolas"/>
-                <a:cs typeface="Consolas"/>
-                <a:latin typeface="Consolas"/>
-              </a:rPr>
-              <a:t>4. FILTER: Email is not</a:t>
-            </a:r>
-          </a:p>
-          <a:p>
-            <a:pPr>
-              <a:spcAft>
-                <a:spcPts val="0"/>
-              </a:spcAft>
-            </a:pPr>
-            <a:r>
-              <a:rPr sz="1000">
-                <a:solidFill>
-                  <a:srgbClr val="0F172A"/>
-                </a:solidFill>
-                <a:ea typeface="Consolas"/>
-                <a:cs typeface="Consolas"/>
-                <a:latin typeface="Consolas"/>
-              </a:rPr>
-              <a:t>empty (ცარიელი მეილები</a:t>
-            </a:r>
-          </a:p>
-          <a:p>
-            <a:pPr>
-              <a:spcAft>
-                <a:spcPts val="0"/>
-              </a:spcAft>
-            </a:pPr>
-            <a:r>
-              <a:rPr sz="1000">
-                <a:solidFill>
-                  <a:srgbClr val="0F172A"/>
-                </a:solidFill>
-                <a:ea typeface="Consolas"/>
-                <a:cs typeface="Consolas"/>
-                <a:latin typeface="Consolas"/>
-              </a:rPr>
-              <a:t>იფილტრება)</a:t>
-            </a:r>
-          </a:p>
-        </p:txBody>
-      </p:sp>
-      <p:sp>
-        <p:nvSpPr>
-          <p:cNvPr id="24" name="Rectangle 23"/>
-          <p:cNvSpPr/>
-          <p:nvPr/>
-        </p:nvSpPr>
-        <p:spPr>
-          <a:xfrm>
-            <a:off x="457200" y="4850892"/>
-            <a:ext cx="8229600" cy="13716"/>
-          </a:xfrm>
-          <a:prstGeom prst="rect">
-            <a:avLst/>
-          </a:prstGeom>
-          <a:solidFill>
-            <a:srgbClr val="E2E8F0"/>
-          </a:solidFill>
-          <a:ln>
-            <a:noFill/>
-          </a:ln>
-          <a:effectLst/>
-        </p:spPr>
-        <p:style>
-          <a:lnRef idx="1">
-            <a:schemeClr val="accent1"/>
-          </a:lnRef>
-          <a:fillRef idx="3">
-            <a:schemeClr val="accent1"/>
-          </a:fillRef>
-          <a:effectRef idx="2">
-            <a:schemeClr val="accent1"/>
-          </a:effectRef>
-          <a:fontRef idx="minor">
-            <a:schemeClr val="lt1"/>
-          </a:fontRef>
-        </p:style>
-        <p:txBody>
-          <a:bodyPr rtlCol="0" anchor="ctr"/>
-          <a:lstStyle/>
-          <a:p>
-            <a:pPr algn="ctr"/>
-          </a:p>
-        </p:txBody>
-      </p:sp>
-      <p:sp>
-        <p:nvSpPr>
-          <p:cNvPr id="25" name="TextBox 24"/>
+          <p:cNvPr id="18" name="TextBox 17"/>
           <p:cNvSpPr txBox="1"/>
           <p:nvPr/>
         </p:nvSpPr>
@@ -32025,7 +31704,7 @@
                 <a:cs typeface="Sylfaen"/>
                 <a:latin typeface="Sylfaen"/>
               </a:rPr>
-              <a:t>CRM Scenario: Appending Lead Row in Sheets</a:t>
+              <a:t>🛠️ პრაქტიკული დავალება #4: Automation Workflow Make.com-ში (30 წუთი)</a:t>
             </a:r>
           </a:p>
         </p:txBody>
@@ -32126,7 +31805,7 @@
                 <a:cs typeface="Sylfaen"/>
                 <a:latin typeface="Sylfaen"/>
               </a:rPr>
-              <a:t>37 / 48</a:t>
+              <a:t>37 / 49</a:t>
             </a:r>
           </a:p>
         </p:txBody>
@@ -32167,7 +31846,7 @@
                 <a:cs typeface="Sylfaen"/>
                 <a:latin typeface="Sylfaen"/>
               </a:rPr>
-              <a:t>მონაცემთა ბაზიდან Leads-ის გადატანა Google Sheets CRM-ში:</a:t>
+              <a:t>ააწყვეთ ავტომატიზაციის სქემა Make.com-ზე:</a:t>
             </a:r>
           </a:p>
         </p:txBody>
@@ -32181,7 +31860,7 @@
         <p:spPr>
           <a:xfrm>
             <a:off x="457200" y="1737360"/>
-            <a:ext cx="54864" cy="2313432"/>
+            <a:ext cx="54864" cy="3113532"/>
           </a:xfrm>
           <a:prstGeom prst="rect">
             <a:avLst/>
@@ -32225,7 +31904,7 @@
         <p:spPr>
           <a:xfrm>
             <a:off x="512064" y="1737360"/>
-            <a:ext cx="8174736" cy="2313432"/>
+            <a:ext cx="3991356" cy="3113532"/>
           </a:xfrm>
           <a:prstGeom prst="roundRect">
             <a:avLst>
@@ -32233,9 +31912,344 @@
             </a:avLst>
           </a:prstGeom>
           <a:solidFill>
-            <a:srgbClr val="EEF2FF"/>
+            <a:srgbClr val="F8FAFC"/>
+          </a:solidFill>
+          <a:ln w="6350">
+            <a:solidFill>
+              <a:srgbClr val="E2E8F0"/>
+            </a:solidFill>
+          </a:ln>
+          <a:effectLst/>
+        </p:spPr>
+        <p:style>
+          <a:lnRef idx="1">
+            <a:schemeClr val="accent1"/>
+          </a:lnRef>
+          <a:fillRef idx="3">
+            <a:schemeClr val="accent1"/>
+          </a:fillRef>
+          <a:effectRef idx="2">
+            <a:schemeClr val="accent1"/>
+          </a:effectRef>
+          <a:fontRef idx="minor">
+            <a:schemeClr val="lt1"/>
+          </a:fontRef>
+        </p:style>
+        <p:txBody>
+          <a:bodyPr rtlCol="0" anchor="ctr"/>
+          <a:lstStyle/>
+          <a:p>
+            <a:pPr algn="ctr"/>
+          </a:p>
+        </p:txBody>
+      </p:sp>
+      <p:sp>
+        <p:nvSpPr>
+          <p:cNvPr id="11" name="TextBox 10"/>
+          <p:cNvSpPr txBox="1"/>
+          <p:nvPr/>
+        </p:nvSpPr>
+        <p:spPr>
+          <a:xfrm>
+            <a:off x="621792" y="1810512"/>
+            <a:ext cx="3771900" cy="320040"/>
+          </a:xfrm>
+          <a:prstGeom prst="rect">
+            <a:avLst/>
+          </a:prstGeom>
+          <a:noFill/>
+        </p:spPr>
+        <p:txBody>
+          <a:bodyPr wrap="square" anchor="t" lIns="54864" rIns="54864" tIns="54864" bIns="54864">
+            <a:spAutoFit/>
+          </a:bodyPr>
+          <a:lstStyle/>
+          <a:p>
+            <a:pPr>
+              <a:spcAft>
+                <a:spcPts val="400"/>
+              </a:spcAft>
+            </a:pPr>
+            <a:r>
+              <a:rPr sz="1400" b="1" i="0">
+                <a:solidFill>
+                  <a:srgbClr val="0F172A"/>
+                </a:solidFill>
+                <a:ea typeface="Sylfaen"/>
+                <a:cs typeface="Sylfaen"/>
+                <a:latin typeface="Sylfaen"/>
+              </a:rPr>
+              <a:t>📋 ინსტრუქცია:</a:t>
+            </a:r>
+          </a:p>
+        </p:txBody>
+      </p:sp>
+      <p:sp>
+        <p:nvSpPr>
+          <p:cNvPr id="12" name="TextBox 11"/>
+          <p:cNvSpPr txBox="1"/>
+          <p:nvPr/>
+        </p:nvSpPr>
+        <p:spPr>
+          <a:xfrm>
+            <a:off x="621792" y="2203704"/>
+            <a:ext cx="3771900" cy="2267712"/>
+          </a:xfrm>
+          <a:prstGeom prst="rect">
+            <a:avLst/>
+          </a:prstGeom>
+          <a:noFill/>
+        </p:spPr>
+        <p:txBody>
+          <a:bodyPr wrap="square" anchor="t" lIns="54864" rIns="54864" tIns="54864" bIns="54864">
+            <a:spAutoFit/>
+          </a:bodyPr>
+          <a:lstStyle/>
+          <a:p>
+            <a:pPr algn="l">
+              <a:spcAft>
+                <a:spcPts val="300"/>
+              </a:spcAft>
+            </a:pPr>
+            <a:r>
+              <a:rPr sz="1300" b="1">
+                <a:solidFill>
+                  <a:srgbClr val="3730A3"/>
+                </a:solidFill>
+                <a:ea typeface="Sylfaen"/>
+                <a:cs typeface="Sylfaen"/>
+                <a:latin typeface="Sylfaen"/>
+              </a:rPr>
+              <a:t>▸  </a:t>
+            </a:r>
+            <a:r>
+              <a:rPr sz="1300">
+                <a:solidFill>
+                  <a:srgbClr val="0F172A"/>
+                </a:solidFill>
+                <a:ea typeface="Sylfaen"/>
+                <a:cs typeface="Sylfaen"/>
+                <a:latin typeface="Sylfaen"/>
+              </a:rPr>
+              <a:t>შექმენით ანგარიში Make.com -ზე და დაიწყეთ Scenario;</a:t>
+            </a:r>
+          </a:p>
+          <a:p>
+            <a:pPr algn="l">
+              <a:spcAft>
+                <a:spcPts val="300"/>
+              </a:spcAft>
+            </a:pPr>
+            <a:r>
+              <a:rPr sz="1300" b="1">
+                <a:solidFill>
+                  <a:srgbClr val="3730A3"/>
+                </a:solidFill>
+                <a:ea typeface="Sylfaen"/>
+                <a:cs typeface="Sylfaen"/>
+                <a:latin typeface="Sylfaen"/>
+              </a:rPr>
+              <a:t>▸  </a:t>
+            </a:r>
+            <a:r>
+              <a:rPr sz="1300">
+                <a:solidFill>
+                  <a:srgbClr val="0F172A"/>
+                </a:solidFill>
+                <a:ea typeface="Sylfaen"/>
+                <a:cs typeface="Sylfaen"/>
+                <a:latin typeface="Sylfaen"/>
+              </a:rPr>
+              <a:t>დაამატეთ Webhook trigger და დაუკავშირეთ თქვენს Landing Page-ს;</a:t>
+            </a:r>
+          </a:p>
+          <a:p>
+            <a:pPr algn="l">
+              <a:spcAft>
+                <a:spcPts val="300"/>
+              </a:spcAft>
+            </a:pPr>
+            <a:r>
+              <a:rPr sz="1300" b="1">
+                <a:solidFill>
+                  <a:srgbClr val="3730A3"/>
+                </a:solidFill>
+                <a:ea typeface="Sylfaen"/>
+                <a:cs typeface="Sylfaen"/>
+                <a:latin typeface="Sylfaen"/>
+              </a:rPr>
+              <a:t>▸  </a:t>
+            </a:r>
+            <a:r>
+              <a:rPr sz="1300">
+                <a:solidFill>
+                  <a:srgbClr val="0F172A"/>
+                </a:solidFill>
+                <a:ea typeface="Sylfaen"/>
+                <a:cs typeface="Sylfaen"/>
+                <a:latin typeface="Sylfaen"/>
+              </a:rPr>
+              <a:t>დაამატეთ Gmail/SMTP და Google Sheets მოდულები და გააკეთეთ mapping.</a:t>
+            </a:r>
+          </a:p>
+        </p:txBody>
+      </p:sp>
+      <p:sp>
+        <p:nvSpPr>
+          <p:cNvPr id="13" name="Rectangle 12"/>
+          <p:cNvSpPr/>
+          <p:nvPr/>
+        </p:nvSpPr>
+        <p:spPr>
+          <a:xfrm>
+            <a:off x="621792" y="4544568"/>
+            <a:ext cx="54864" cy="233171"/>
+          </a:xfrm>
+          <a:prstGeom prst="rect">
+            <a:avLst/>
+          </a:prstGeom>
+          <a:solidFill>
+            <a:srgbClr val="3730A3"/>
+          </a:solidFill>
+          <a:ln>
+            <a:noFill/>
+          </a:ln>
+          <a:effectLst/>
+        </p:spPr>
+        <p:style>
+          <a:lnRef idx="1">
+            <a:schemeClr val="accent1"/>
+          </a:lnRef>
+          <a:fillRef idx="3">
+            <a:schemeClr val="accent1"/>
+          </a:fillRef>
+          <a:effectRef idx="2">
+            <a:schemeClr val="accent1"/>
+          </a:effectRef>
+          <a:fontRef idx="minor">
+            <a:schemeClr val="lt1"/>
+          </a:fontRef>
+        </p:style>
+        <p:txBody>
+          <a:bodyPr rtlCol="0" anchor="ctr"/>
+          <a:lstStyle/>
+          <a:p>
+            <a:pPr algn="ctr"/>
+          </a:p>
+        </p:txBody>
+      </p:sp>
+      <p:sp>
+        <p:nvSpPr>
+          <p:cNvPr id="14" name="Rounded Rectangle 13"/>
+          <p:cNvSpPr/>
+          <p:nvPr/>
+        </p:nvSpPr>
+        <p:spPr>
+          <a:xfrm>
+            <a:off x="676656" y="4544568"/>
+            <a:ext cx="3717036" cy="233171"/>
+          </a:xfrm>
+          <a:prstGeom prst="roundRect">
+            <a:avLst>
+              <a:gd name="adj" fmla="val 4000"/>
+            </a:avLst>
+          </a:prstGeom>
+          <a:solidFill>
+            <a:srgbClr val="F8FAFC"/>
           </a:solidFill>
           <a:ln w="9525">
+            <a:solidFill>
+              <a:srgbClr val="E2E8F0"/>
+            </a:solidFill>
+          </a:ln>
+          <a:effectLst/>
+        </p:spPr>
+        <p:style>
+          <a:lnRef idx="1">
+            <a:schemeClr val="accent1"/>
+          </a:lnRef>
+          <a:fillRef idx="3">
+            <a:schemeClr val="accent1"/>
+          </a:fillRef>
+          <a:effectRef idx="2">
+            <a:schemeClr val="accent1"/>
+          </a:effectRef>
+          <a:fontRef idx="minor">
+            <a:schemeClr val="lt1"/>
+          </a:fontRef>
+        </p:style>
+        <p:txBody>
+          <a:bodyPr rtlCol="0" anchor="ctr"/>
+          <a:lstStyle/>
+          <a:p>
+            <a:pPr algn="ctr"/>
+          </a:p>
+        </p:txBody>
+      </p:sp>
+      <p:sp>
+        <p:nvSpPr>
+          <p:cNvPr id="15" name="Rectangle 14"/>
+          <p:cNvSpPr/>
+          <p:nvPr/>
+        </p:nvSpPr>
+        <p:spPr>
+          <a:xfrm>
+            <a:off x="4640580" y="1737360"/>
+            <a:ext cx="54864" cy="3113532"/>
+          </a:xfrm>
+          <a:prstGeom prst="rect">
+            <a:avLst/>
+          </a:prstGeom>
+          <a:solidFill>
+            <a:srgbClr val="3730A3"/>
+          </a:solidFill>
+          <a:ln>
+            <a:noFill/>
+          </a:ln>
+          <a:effectLst/>
+        </p:spPr>
+        <p:style>
+          <a:lnRef idx="1">
+            <a:schemeClr val="accent1"/>
+          </a:lnRef>
+          <a:fillRef idx="3">
+            <a:schemeClr val="accent1"/>
+          </a:fillRef>
+          <a:effectRef idx="2">
+            <a:schemeClr val="accent1"/>
+          </a:effectRef>
+          <a:fontRef idx="minor">
+            <a:schemeClr val="lt1"/>
+          </a:fontRef>
+        </p:style>
+        <p:txBody>
+          <a:bodyPr rtlCol="0" anchor="ctr"/>
+          <a:lstStyle/>
+          <a:p>
+            <a:pPr algn="ctr"/>
+          </a:p>
+        </p:txBody>
+      </p:sp>
+      <p:sp>
+        <p:nvSpPr>
+          <p:cNvPr id="16" name="Rounded Rectangle 15"/>
+          <p:cNvSpPr/>
+          <p:nvPr/>
+        </p:nvSpPr>
+        <p:spPr>
+          <a:xfrm>
+            <a:off x="4695444" y="1737360"/>
+            <a:ext cx="3991356" cy="3113532"/>
+          </a:xfrm>
+          <a:prstGeom prst="roundRect">
+            <a:avLst>
+              <a:gd name="adj" fmla="val 4000"/>
+            </a:avLst>
+          </a:prstGeom>
+          <a:solidFill>
+            <a:srgbClr val="F8FAFC"/>
+          </a:solidFill>
+          <a:ln w="6350">
             <a:solidFill>
               <a:srgbClr val="3730A3"/>
             </a:solidFill>
@@ -32266,14 +32280,152 @@
       </p:sp>
       <p:sp>
         <p:nvSpPr>
-          <p:cNvPr id="11" name="TextBox 10"/>
+          <p:cNvPr id="17" name="Rectangle 16"/>
+          <p:cNvSpPr/>
+          <p:nvPr/>
+        </p:nvSpPr>
+        <p:spPr>
+          <a:xfrm>
+            <a:off x="4805172" y="1810512"/>
+            <a:ext cx="54864" cy="292608"/>
+          </a:xfrm>
+          <a:prstGeom prst="rect">
+            <a:avLst/>
+          </a:prstGeom>
+          <a:solidFill>
+            <a:srgbClr val="3730A3"/>
+          </a:solidFill>
+          <a:ln>
+            <a:noFill/>
+          </a:ln>
+          <a:effectLst/>
+        </p:spPr>
+        <p:style>
+          <a:lnRef idx="1">
+            <a:schemeClr val="accent1"/>
+          </a:lnRef>
+          <a:fillRef idx="3">
+            <a:schemeClr val="accent1"/>
+          </a:fillRef>
+          <a:effectRef idx="2">
+            <a:schemeClr val="accent1"/>
+          </a:effectRef>
+          <a:fontRef idx="minor">
+            <a:schemeClr val="lt1"/>
+          </a:fontRef>
+        </p:style>
+        <p:txBody>
+          <a:bodyPr rtlCol="0" anchor="ctr"/>
+          <a:lstStyle/>
+          <a:p>
+            <a:pPr algn="ctr"/>
+          </a:p>
+        </p:txBody>
+      </p:sp>
+      <p:sp>
+        <p:nvSpPr>
+          <p:cNvPr id="18" name="Rounded Rectangle 17"/>
+          <p:cNvSpPr/>
+          <p:nvPr/>
+        </p:nvSpPr>
+        <p:spPr>
+          <a:xfrm>
+            <a:off x="4860036" y="1810512"/>
+            <a:ext cx="3717036" cy="292608"/>
+          </a:xfrm>
+          <a:prstGeom prst="roundRect">
+            <a:avLst>
+              <a:gd name="adj" fmla="val 4000"/>
+            </a:avLst>
+          </a:prstGeom>
+          <a:solidFill>
+            <a:srgbClr val="F8FAFC"/>
+          </a:solidFill>
+          <a:ln w="9525">
+            <a:solidFill>
+              <a:srgbClr val="E2E8F0"/>
+            </a:solidFill>
+          </a:ln>
+          <a:effectLst/>
+        </p:spPr>
+        <p:style>
+          <a:lnRef idx="1">
+            <a:schemeClr val="accent1"/>
+          </a:lnRef>
+          <a:fillRef idx="3">
+            <a:schemeClr val="accent1"/>
+          </a:fillRef>
+          <a:effectRef idx="2">
+            <a:schemeClr val="accent1"/>
+          </a:effectRef>
+          <a:fontRef idx="minor">
+            <a:schemeClr val="lt1"/>
+          </a:fontRef>
+        </p:style>
+        <p:txBody>
+          <a:bodyPr rtlCol="0" anchor="ctr"/>
+          <a:lstStyle/>
+          <a:p>
+            <a:pPr algn="ctr"/>
+          </a:p>
+        </p:txBody>
+      </p:sp>
+      <p:sp>
+        <p:nvSpPr>
+          <p:cNvPr id="19" name="Rectangle 18"/>
+          <p:cNvSpPr/>
+          <p:nvPr/>
+        </p:nvSpPr>
+        <p:spPr>
+          <a:xfrm>
+            <a:off x="4914900" y="1865376"/>
+            <a:ext cx="3552444" cy="201168"/>
+          </a:xfrm>
+          <a:prstGeom prst="rect">
+            <a:avLst/>
+          </a:prstGeom>
+          <a:solidFill>
+            <a:srgbClr val="FFFFFF"/>
+          </a:solidFill>
+          <a:ln w="6350">
+            <a:solidFill>
+              <a:srgbClr val="E2E8F0"/>
+            </a:solidFill>
+          </a:ln>
+          <a:effectLst/>
+        </p:spPr>
+        <p:style>
+          <a:lnRef idx="1">
+            <a:schemeClr val="accent1"/>
+          </a:lnRef>
+          <a:fillRef idx="3">
+            <a:schemeClr val="accent1"/>
+          </a:fillRef>
+          <a:effectRef idx="2">
+            <a:schemeClr val="accent1"/>
+          </a:effectRef>
+          <a:fontRef idx="minor">
+            <a:schemeClr val="lt1"/>
+          </a:fontRef>
+        </p:style>
+        <p:txBody>
+          <a:bodyPr rtlCol="0" anchor="ctr"/>
+          <a:lstStyle/>
+          <a:p>
+            <a:pPr algn="ctr"/>
+          </a:p>
+        </p:txBody>
+      </p:sp>
+      <p:sp>
+        <p:nvSpPr>
+          <p:cNvPr id="20" name="TextBox 19"/>
           <p:cNvSpPr txBox="1"/>
           <p:nvPr/>
         </p:nvSpPr>
         <p:spPr>
           <a:xfrm>
-            <a:off x="621792" y="1810512"/>
-            <a:ext cx="7955279" cy="320040"/>
+            <a:off x="4969764" y="1892807"/>
+            <a:ext cx="3442716" cy="146304"/>
           </a:xfrm>
           <a:prstGeom prst="rect">
             <a:avLst/>
@@ -32288,33 +32440,145 @@
           <a:p>
             <a:pPr>
               <a:spcAft>
-                <a:spcPts val="400"/>
-              </a:spcAft>
-            </a:pPr>
-            <a:r>
-              <a:rPr sz="1400" b="1" i="0">
+                <a:spcPts val="0"/>
+              </a:spcAft>
+            </a:pPr>
+            <a:r>
+              <a:rPr sz="800">
                 <a:solidFill>
                   <a:srgbClr val="0F172A"/>
                 </a:solidFill>
-                <a:ea typeface="Sylfaen"/>
-                <a:cs typeface="Sylfaen"/>
-                <a:latin typeface="Sylfaen"/>
-              </a:rPr>
-              <a:t>Google Sheets მოდულის კონფიგურაცია:</a:t>
-            </a:r>
-          </a:p>
-        </p:txBody>
-      </p:sp>
-      <p:sp>
-        <p:nvSpPr>
-          <p:cNvPr id="12" name="TextBox 11"/>
+                <a:ea typeface="Consolas"/>
+                <a:cs typeface="Consolas"/>
+                <a:latin typeface="Consolas"/>
+              </a:rPr>
+              <a:t>Make.com სცენარის</a:t>
+            </a:r>
+          </a:p>
+          <a:p>
+            <a:pPr>
+              <a:spcAft>
+                <a:spcPts val="0"/>
+              </a:spcAft>
+            </a:pPr>
+            <a:r>
+              <a:rPr sz="800">
+                <a:solidFill>
+                  <a:srgbClr val="0F172A"/>
+                </a:solidFill>
+                <a:ea typeface="Consolas"/>
+                <a:cs typeface="Consolas"/>
+                <a:latin typeface="Consolas"/>
+              </a:rPr>
+              <a:t>კონფიგურაცია:</a:t>
+            </a:r>
+          </a:p>
+        </p:txBody>
+      </p:sp>
+      <p:sp>
+        <p:nvSpPr>
+          <p:cNvPr id="21" name="Rounded Rectangle 20"/>
+          <p:cNvSpPr/>
+          <p:nvPr/>
+        </p:nvSpPr>
+        <p:spPr>
+          <a:xfrm>
+            <a:off x="4805172" y="2176272"/>
+            <a:ext cx="3771900" cy="2601468"/>
+          </a:xfrm>
+          <a:prstGeom prst="roundRect">
+            <a:avLst>
+              <a:gd name="adj" fmla="val 4000"/>
+            </a:avLst>
+          </a:prstGeom>
+          <a:solidFill>
+            <a:srgbClr val="F8FAFC"/>
+          </a:solidFill>
+          <a:ln w="9525">
+            <a:solidFill>
+              <a:srgbClr val="E2E8F0"/>
+            </a:solidFill>
+          </a:ln>
+          <a:effectLst/>
+        </p:spPr>
+        <p:style>
+          <a:lnRef idx="1">
+            <a:schemeClr val="accent1"/>
+          </a:lnRef>
+          <a:fillRef idx="3">
+            <a:schemeClr val="accent1"/>
+          </a:fillRef>
+          <a:effectRef idx="2">
+            <a:schemeClr val="accent1"/>
+          </a:effectRef>
+          <a:fontRef idx="minor">
+            <a:schemeClr val="lt1"/>
+          </a:fontRef>
+        </p:style>
+        <p:txBody>
+          <a:bodyPr rtlCol="0" anchor="ctr"/>
+          <a:lstStyle/>
+          <a:p>
+            <a:pPr algn="ctr"/>
+          </a:p>
+        </p:txBody>
+      </p:sp>
+      <p:sp>
+        <p:nvSpPr>
+          <p:cNvPr id="22" name="Rectangle 21"/>
+          <p:cNvSpPr/>
+          <p:nvPr/>
+        </p:nvSpPr>
+        <p:spPr>
+          <a:xfrm>
+            <a:off x="4860036" y="2221991"/>
+            <a:ext cx="3662172" cy="2510027"/>
+          </a:xfrm>
+          <a:prstGeom prst="rect">
+            <a:avLst/>
+          </a:prstGeom>
+          <a:solidFill>
+            <a:srgbClr val="FFFFFF"/>
+          </a:solidFill>
+          <a:ln w="6350">
+            <a:solidFill>
+              <a:srgbClr val="E2E8F0"/>
+            </a:solidFill>
+          </a:ln>
+          <a:effectLst/>
+        </p:spPr>
+        <p:style>
+          <a:lnRef idx="1">
+            <a:schemeClr val="accent1"/>
+          </a:lnRef>
+          <a:fillRef idx="3">
+            <a:schemeClr val="accent1"/>
+          </a:fillRef>
+          <a:effectRef idx="2">
+            <a:schemeClr val="accent1"/>
+          </a:effectRef>
+          <a:fontRef idx="minor">
+            <a:schemeClr val="lt1"/>
+          </a:fontRef>
+        </p:style>
+        <p:txBody>
+          <a:bodyPr rtlCol="0" anchor="ctr"/>
+          <a:lstStyle/>
+          <a:p>
+            <a:pPr algn="ctr"/>
+          </a:p>
+        </p:txBody>
+      </p:sp>
+      <p:sp>
+        <p:nvSpPr>
+          <p:cNvPr id="23" name="TextBox 22"/>
           <p:cNvSpPr txBox="1"/>
           <p:nvPr/>
         </p:nvSpPr>
         <p:spPr>
           <a:xfrm>
-            <a:off x="621792" y="2203704"/>
-            <a:ext cx="7955279" cy="1719072"/>
+            <a:off x="4914900" y="2240279"/>
+            <a:ext cx="3552444" cy="2473451"/>
           </a:xfrm>
           <a:prstGeom prst="rect">
             <a:avLst/>
@@ -32327,97 +32591,370 @@
           </a:bodyPr>
           <a:lstStyle/>
           <a:p>
-            <a:pPr algn="l">
-              <a:spcAft>
-                <a:spcPts val="300"/>
-              </a:spcAft>
-            </a:pPr>
-            <a:r>
-              <a:rPr sz="1300" b="1">
-                <a:solidFill>
-                  <a:srgbClr val="3730A3"/>
-                </a:solidFill>
-                <a:ea typeface="Sylfaen"/>
-                <a:cs typeface="Sylfaen"/>
-                <a:latin typeface="Sylfaen"/>
-              </a:rPr>
-              <a:t>▸  </a:t>
-            </a:r>
-            <a:r>
-              <a:rPr sz="1300">
+            <a:pPr>
+              <a:spcAft>
+                <a:spcPts val="0"/>
+              </a:spcAft>
+            </a:pPr>
+            <a:r>
+              <a:rPr sz="1000">
                 <a:solidFill>
                   <a:srgbClr val="0F172A"/>
                 </a:solidFill>
-                <a:ea typeface="Sylfaen"/>
-                <a:cs typeface="Sylfaen"/>
-                <a:latin typeface="Sylfaen"/>
-              </a:rPr>
-              <a:t>დააკავშირეთ თქვენი Google Drive ანგარიში Make-თან;</a:t>
-            </a:r>
-          </a:p>
-          <a:p>
-            <a:pPr algn="l">
-              <a:spcAft>
-                <a:spcPts val="300"/>
-              </a:spcAft>
-            </a:pPr>
-            <a:r>
-              <a:rPr sz="1300" b="1">
-                <a:solidFill>
-                  <a:srgbClr val="3730A3"/>
-                </a:solidFill>
-                <a:ea typeface="Sylfaen"/>
-                <a:cs typeface="Sylfaen"/>
-                <a:latin typeface="Sylfaen"/>
-              </a:rPr>
-              <a:t>▸  </a:t>
-            </a:r>
-            <a:r>
-              <a:rPr sz="1300">
+                <a:ea typeface="Consolas"/>
+                <a:cs typeface="Consolas"/>
+                <a:latin typeface="Consolas"/>
+              </a:rPr>
+              <a:t>Scenario: Landing Page</a:t>
+            </a:r>
+          </a:p>
+          <a:p>
+            <a:pPr>
+              <a:spcAft>
+                <a:spcPts val="0"/>
+              </a:spcAft>
+            </a:pPr>
+            <a:r>
+              <a:rPr sz="1000">
                 <a:solidFill>
                   <a:srgbClr val="0F172A"/>
                 </a:solidFill>
-                <a:ea typeface="Sylfaen"/>
-                <a:cs typeface="Sylfaen"/>
-                <a:latin typeface="Sylfaen"/>
-              </a:rPr>
-              <a:t>აირჩიეთ ფაილი „Leads CRM“;</a:t>
-            </a:r>
-          </a:p>
-          <a:p>
-            <a:pPr algn="l">
-              <a:spcAft>
-                <a:spcPts val="300"/>
-              </a:spcAft>
-            </a:pPr>
-            <a:r>
-              <a:rPr sz="1300" b="1">
-                <a:solidFill>
-                  <a:srgbClr val="3730A3"/>
-                </a:solidFill>
-                <a:ea typeface="Sylfaen"/>
-                <a:cs typeface="Sylfaen"/>
-                <a:latin typeface="Sylfaen"/>
-              </a:rPr>
-              <a:t>▸  </a:t>
-            </a:r>
-            <a:r>
-              <a:rPr sz="1300">
+                <a:ea typeface="Consolas"/>
+                <a:cs typeface="Consolas"/>
+                <a:latin typeface="Consolas"/>
+              </a:rPr>
+              <a:t>Form → Email + CRM Sheets</a:t>
+            </a:r>
+          </a:p>
+          <a:p>
+            <a:pPr>
+              <a:spcAft>
+                <a:spcPts val="0"/>
+              </a:spcAft>
+            </a:pPr>
+            <a:r>
+              <a:rPr sz="1000">
                 <a:solidFill>
                   <a:srgbClr val="0F172A"/>
                 </a:solidFill>
-                <a:ea typeface="Sylfaen"/>
-                <a:cs typeface="Sylfaen"/>
-                <a:latin typeface="Sylfaen"/>
-              </a:rPr>
-              <a:t>სვეტებში (A, B, C) მიაბით Webhook-იდან მიღებული ცვლადები: A = Name , B = Email , C = Created_at .</a:t>
-            </a:r>
-          </a:p>
-        </p:txBody>
-      </p:sp>
-      <p:sp>
-        <p:nvSpPr>
-          <p:cNvPr id="13" name="Rectangle 12"/>
+                <a:ea typeface="Consolas"/>
+                <a:cs typeface="Consolas"/>
+                <a:latin typeface="Consolas"/>
+              </a:rPr>
+              <a:t>1. TRIGGER: Webhook (POST</a:t>
+            </a:r>
+          </a:p>
+          <a:p>
+            <a:pPr>
+              <a:spcAft>
+                <a:spcPts val="0"/>
+              </a:spcAft>
+            </a:pPr>
+            <a:r>
+              <a:rPr sz="1000">
+                <a:solidFill>
+                  <a:srgbClr val="0F172A"/>
+                </a:solidFill>
+                <a:ea typeface="Consolas"/>
+                <a:cs typeface="Consolas"/>
+                <a:latin typeface="Consolas"/>
+              </a:rPr>
+              <a:t>request)</a:t>
+            </a:r>
+          </a:p>
+          <a:p>
+            <a:pPr>
+              <a:spcAft>
+                <a:spcPts val="0"/>
+              </a:spcAft>
+            </a:pPr>
+            <a:r>
+              <a:rPr sz="1000">
+                <a:solidFill>
+                  <a:srgbClr val="0F172A"/>
+                </a:solidFill>
+                <a:ea typeface="Consolas"/>
+                <a:cs typeface="Consolas"/>
+                <a:latin typeface="Consolas"/>
+              </a:rPr>
+              <a:t>URL: [Lovable-იდან</a:t>
+            </a:r>
+          </a:p>
+          <a:p>
+            <a:pPr>
+              <a:spcAft>
+                <a:spcPts val="0"/>
+              </a:spcAft>
+            </a:pPr>
+            <a:r>
+              <a:rPr sz="1000">
+                <a:solidFill>
+                  <a:srgbClr val="0F172A"/>
+                </a:solidFill>
+                <a:ea typeface="Consolas"/>
+                <a:cs typeface="Consolas"/>
+                <a:latin typeface="Consolas"/>
+              </a:rPr>
+              <a:t>მიღებული Webhook URL]</a:t>
+            </a:r>
+          </a:p>
+          <a:p>
+            <a:pPr>
+              <a:spcAft>
+                <a:spcPts val="0"/>
+              </a:spcAft>
+            </a:pPr>
+            <a:r>
+              <a:rPr sz="1000">
+                <a:solidFill>
+                  <a:srgbClr val="0F172A"/>
+                </a:solidFill>
+                <a:ea typeface="Consolas"/>
+                <a:cs typeface="Consolas"/>
+                <a:latin typeface="Consolas"/>
+              </a:rPr>
+              <a:t>2. MODULE 1: Send Email</a:t>
+            </a:r>
+          </a:p>
+          <a:p>
+            <a:pPr>
+              <a:spcAft>
+                <a:spcPts val="0"/>
+              </a:spcAft>
+            </a:pPr>
+            <a:r>
+              <a:rPr sz="1000">
+                <a:solidFill>
+                  <a:srgbClr val="0F172A"/>
+                </a:solidFill>
+                <a:ea typeface="Consolas"/>
+                <a:cs typeface="Consolas"/>
+                <a:latin typeface="Consolas"/>
+              </a:rPr>
+              <a:t>via Gmail</a:t>
+            </a:r>
+          </a:p>
+          <a:p>
+            <a:pPr>
+              <a:spcAft>
+                <a:spcPts val="0"/>
+              </a:spcAft>
+            </a:pPr>
+            <a:r>
+              <a:rPr sz="1000">
+                <a:solidFill>
+                  <a:srgbClr val="0F172A"/>
+                </a:solidFill>
+                <a:ea typeface="Consolas"/>
+                <a:cs typeface="Consolas"/>
+                <a:latin typeface="Consolas"/>
+              </a:rPr>
+              <a:t>To: {{trigger.email}}</a:t>
+            </a:r>
+          </a:p>
+          <a:p>
+            <a:pPr>
+              <a:spcAft>
+                <a:spcPts val="0"/>
+              </a:spcAft>
+            </a:pPr>
+            <a:r>
+              <a:rPr sz="1000">
+                <a:solidFill>
+                  <a:srgbClr val="0F172A"/>
+                </a:solidFill>
+                <a:ea typeface="Consolas"/>
+                <a:cs typeface="Consolas"/>
+                <a:latin typeface="Consolas"/>
+              </a:rPr>
+              <a:t>Subject: "გმადლობთ</a:t>
+            </a:r>
+          </a:p>
+          <a:p>
+            <a:pPr>
+              <a:spcAft>
+                <a:spcPts val="0"/>
+              </a:spcAft>
+            </a:pPr>
+            <a:r>
+              <a:rPr sz="1000">
+                <a:solidFill>
+                  <a:srgbClr val="0F172A"/>
+                </a:solidFill>
+                <a:ea typeface="Consolas"/>
+                <a:cs typeface="Consolas"/>
+                <a:latin typeface="Consolas"/>
+              </a:rPr>
+              <a:t>რეგისტრაციისთვის!"</a:t>
+            </a:r>
+          </a:p>
+          <a:p>
+            <a:pPr>
+              <a:spcAft>
+                <a:spcPts val="0"/>
+              </a:spcAft>
+            </a:pPr>
+            <a:r>
+              <a:rPr sz="1000">
+                <a:solidFill>
+                  <a:srgbClr val="0F172A"/>
+                </a:solidFill>
+                <a:ea typeface="Consolas"/>
+                <a:cs typeface="Consolas"/>
+                <a:latin typeface="Consolas"/>
+              </a:rPr>
+              <a:t>Body: "ჩვენი გუნდი მალე</a:t>
+            </a:r>
+          </a:p>
+          <a:p>
+            <a:pPr>
+              <a:spcAft>
+                <a:spcPts val="0"/>
+              </a:spcAft>
+            </a:pPr>
+            <a:r>
+              <a:rPr sz="1000">
+                <a:solidFill>
+                  <a:srgbClr val="0F172A"/>
+                </a:solidFill>
+                <a:ea typeface="Consolas"/>
+                <a:cs typeface="Consolas"/>
+                <a:latin typeface="Consolas"/>
+              </a:rPr>
+              <a:t>დაგიკავშირდებათ."</a:t>
+            </a:r>
+          </a:p>
+          <a:p>
+            <a:pPr>
+              <a:spcAft>
+                <a:spcPts val="0"/>
+              </a:spcAft>
+            </a:pPr>
+            <a:r>
+              <a:rPr sz="1000">
+                <a:solidFill>
+                  <a:srgbClr val="0F172A"/>
+                </a:solidFill>
+                <a:ea typeface="Consolas"/>
+                <a:cs typeface="Consolas"/>
+                <a:latin typeface="Consolas"/>
+              </a:rPr>
+              <a:t>3. MODULE 2: Add Row to</a:t>
+            </a:r>
+          </a:p>
+          <a:p>
+            <a:pPr>
+              <a:spcAft>
+                <a:spcPts val="0"/>
+              </a:spcAft>
+            </a:pPr>
+            <a:r>
+              <a:rPr sz="1000">
+                <a:solidFill>
+                  <a:srgbClr val="0F172A"/>
+                </a:solidFill>
+                <a:ea typeface="Consolas"/>
+                <a:cs typeface="Consolas"/>
+                <a:latin typeface="Consolas"/>
+              </a:rPr>
+              <a:t>Google Sheets (leads</a:t>
+            </a:r>
+          </a:p>
+          <a:p>
+            <a:pPr>
+              <a:spcAft>
+                <a:spcPts val="0"/>
+              </a:spcAft>
+            </a:pPr>
+            <a:r>
+              <a:rPr sz="1000">
+                <a:solidFill>
+                  <a:srgbClr val="0F172A"/>
+                </a:solidFill>
+                <a:ea typeface="Consolas"/>
+                <a:cs typeface="Consolas"/>
+                <a:latin typeface="Consolas"/>
+              </a:rPr>
+              <a:t>ცხრილში)</a:t>
+            </a:r>
+          </a:p>
+          <a:p>
+            <a:pPr>
+              <a:spcAft>
+                <a:spcPts val="0"/>
+              </a:spcAft>
+            </a:pPr>
+            <a:r>
+              <a:rPr sz="1000">
+                <a:solidFill>
+                  <a:srgbClr val="0F172A"/>
+                </a:solidFill>
+                <a:ea typeface="Consolas"/>
+                <a:cs typeface="Consolas"/>
+                <a:latin typeface="Consolas"/>
+              </a:rPr>
+              <a:t>Columns: Email, Name, Date</a:t>
+            </a:r>
+          </a:p>
+          <a:p>
+            <a:pPr>
+              <a:spcAft>
+                <a:spcPts val="0"/>
+              </a:spcAft>
+            </a:pPr>
+            <a:r>
+              <a:rPr sz="1000">
+                <a:solidFill>
+                  <a:srgbClr val="0F172A"/>
+                </a:solidFill>
+                <a:ea typeface="Consolas"/>
+                <a:cs typeface="Consolas"/>
+                <a:latin typeface="Consolas"/>
+              </a:rPr>
+              <a:t>4. FILTER: Email is not</a:t>
+            </a:r>
+          </a:p>
+          <a:p>
+            <a:pPr>
+              <a:spcAft>
+                <a:spcPts val="0"/>
+              </a:spcAft>
+            </a:pPr>
+            <a:r>
+              <a:rPr sz="1000">
+                <a:solidFill>
+                  <a:srgbClr val="0F172A"/>
+                </a:solidFill>
+                <a:ea typeface="Consolas"/>
+                <a:cs typeface="Consolas"/>
+                <a:latin typeface="Consolas"/>
+              </a:rPr>
+              <a:t>empty (ცარიელი მეილები</a:t>
+            </a:r>
+          </a:p>
+          <a:p>
+            <a:pPr>
+              <a:spcAft>
+                <a:spcPts val="0"/>
+              </a:spcAft>
+            </a:pPr>
+            <a:r>
+              <a:rPr sz="1000">
+                <a:solidFill>
+                  <a:srgbClr val="0F172A"/>
+                </a:solidFill>
+                <a:ea typeface="Consolas"/>
+                <a:cs typeface="Consolas"/>
+                <a:latin typeface="Consolas"/>
+              </a:rPr>
+              <a:t>იფილტრება)</a:t>
+            </a:r>
+          </a:p>
+        </p:txBody>
+      </p:sp>
+      <p:sp>
+        <p:nvSpPr>
+          <p:cNvPr id="24" name="Rectangle 23"/>
           <p:cNvSpPr/>
           <p:nvPr/>
         </p:nvSpPr>
@@ -32461,7 +32998,7 @@
       </p:sp>
       <p:sp>
         <p:nvSpPr>
-          <p:cNvPr id="14" name="TextBox 13"/>
+          <p:cNvPr id="25" name="TextBox 24"/>
           <p:cNvSpPr txBox="1"/>
           <p:nvPr/>
         </p:nvSpPr>
@@ -32681,7 +33218,7 @@
                 <a:cs typeface="Sylfaen"/>
                 <a:latin typeface="Sylfaen"/>
               </a:rPr>
-              <a:t>CRM Scenario: Gmail SMTP Connection</a:t>
+              <a:t>CRM Scenario: Appending Lead Row in Sheets</a:t>
             </a:r>
           </a:p>
         </p:txBody>
@@ -32782,7 +33319,7 @@
                 <a:cs typeface="Sylfaen"/>
                 <a:latin typeface="Sylfaen"/>
               </a:rPr>
-              <a:t>38 / 48</a:t>
+              <a:t>38 / 49</a:t>
             </a:r>
           </a:p>
         </p:txBody>
@@ -32823,7 +33360,7 @@
                 <a:cs typeface="Sylfaen"/>
                 <a:latin typeface="Sylfaen"/>
               </a:rPr>
-              <a:t>ავტომატური იმეილის გაგზავნა დარეგისტრირებულ მომხმარებელთან:</a:t>
+              <a:t>მონაცემთა ბაზიდან Leads-ის გადატანა Google Sheets CRM-ში:</a:t>
             </a:r>
           </a:p>
         </p:txBody>
@@ -32837,7 +33374,7 @@
         <p:spPr>
           <a:xfrm>
             <a:off x="457200" y="1737360"/>
-            <a:ext cx="54864" cy="3113532"/>
+            <a:ext cx="54864" cy="2313432"/>
           </a:xfrm>
           <a:prstGeom prst="rect">
             <a:avLst/>
@@ -32881,7 +33418,7 @@
         <p:spPr>
           <a:xfrm>
             <a:off x="512064" y="1737360"/>
-            <a:ext cx="3991356" cy="3113532"/>
+            <a:ext cx="8174736" cy="2313432"/>
           </a:xfrm>
           <a:prstGeom prst="roundRect">
             <a:avLst>
@@ -32889,11 +33426,11 @@
             </a:avLst>
           </a:prstGeom>
           <a:solidFill>
-            <a:srgbClr val="F8FAFC"/>
-          </a:solidFill>
-          <a:ln w="6350">
+            <a:srgbClr val="EEF2FF"/>
+          </a:solidFill>
+          <a:ln w="9525">
             <a:solidFill>
-              <a:srgbClr val="E2E8F0"/>
+              <a:srgbClr val="3730A3"/>
             </a:solidFill>
           </a:ln>
           <a:effectLst/>
@@ -32929,7 +33466,7 @@
         <p:spPr>
           <a:xfrm>
             <a:off x="621792" y="1810512"/>
-            <a:ext cx="3771900" cy="320040"/>
+            <a:ext cx="7955279" cy="320040"/>
           </a:xfrm>
           <a:prstGeom prst="rect">
             <a:avLst/>
@@ -32956,7 +33493,7 @@
                 <a:cs typeface="Sylfaen"/>
                 <a:latin typeface="Sylfaen"/>
               </a:rPr>
-              <a:t>Gmail მოდულის პარამეტრები:</a:t>
+              <a:t>Google Sheets მოდულის კონფიგურაცია:</a:t>
             </a:r>
           </a:p>
         </p:txBody>
@@ -32970,7 +33507,7 @@
         <p:spPr>
           <a:xfrm>
             <a:off x="621792" y="2203704"/>
-            <a:ext cx="3771900" cy="2267712"/>
+            <a:ext cx="7955279" cy="1719072"/>
           </a:xfrm>
           <a:prstGeom prst="rect">
             <a:avLst/>
@@ -33008,7 +33545,7 @@
                 <a:cs typeface="Sylfaen"/>
                 <a:latin typeface="Sylfaen"/>
               </a:rPr>
-              <a:t>To: Webhook-იდან მიღებული Email ცვლადი;</a:t>
+              <a:t>დააკავშირეთ თქვენი Google Drive ანგარიში Make-თან;</a:t>
             </a:r>
           </a:p>
           <a:p>
@@ -33037,7 +33574,7 @@
                 <a:cs typeface="Sylfaen"/>
                 <a:latin typeface="Sylfaen"/>
               </a:rPr>
-              <a:t>Subject: „გმადლობთ რეგისტრაციისთვის [სტარტაპის სახელი]-ზე!“;</a:t>
+              <a:t>აირჩიეთ ფაილი „Leads CRM“;</a:t>
             </a:r>
           </a:p>
           <a:p>
@@ -33066,7 +33603,7 @@
                 <a:cs typeface="Sylfaen"/>
                 <a:latin typeface="Sylfaen"/>
               </a:rPr>
-              <a:t>Body: პერსონალიზებული ტექსტი, სადაც გამოიყენებთ Name ცვლადს.</a:t>
+              <a:t>სვეტებში (A, B, C) მიაბით Webhook-იდან მიღებული ცვლადები: A = Name , B = Email , C = Created_at .</a:t>
             </a:r>
           </a:p>
         </p:txBody>
@@ -33079,14 +33616,14 @@
         </p:nvSpPr>
         <p:spPr>
           <a:xfrm>
-            <a:off x="4640580" y="1737360"/>
-            <a:ext cx="54864" cy="3113532"/>
-          </a:xfrm>
-          <a:prstGeom prst="rect">
-            <a:avLst/>
-          </a:prstGeom>
-          <a:solidFill>
-            <a:srgbClr val="3730A3"/>
+            <a:off x="457200" y="4850892"/>
+            <a:ext cx="8229600" cy="13716"/>
+          </a:xfrm>
+          <a:prstGeom prst="rect">
+            <a:avLst/>
+          </a:prstGeom>
+          <a:solidFill>
+            <a:srgbClr val="E2E8F0"/>
           </a:solidFill>
           <a:ln>
             <a:noFill/>
@@ -33117,181 +33654,7 @@
       </p:sp>
       <p:sp>
         <p:nvSpPr>
-          <p:cNvPr id="14" name="Rounded Rectangle 13"/>
-          <p:cNvSpPr/>
-          <p:nvPr/>
-        </p:nvSpPr>
-        <p:spPr>
-          <a:xfrm>
-            <a:off x="4695444" y="1737360"/>
-            <a:ext cx="3991356" cy="3113532"/>
-          </a:xfrm>
-          <a:prstGeom prst="roundRect">
-            <a:avLst>
-              <a:gd name="adj" fmla="val 4000"/>
-            </a:avLst>
-          </a:prstGeom>
-          <a:solidFill>
-            <a:srgbClr val="EEF2FF"/>
-          </a:solidFill>
-          <a:ln w="6350">
-            <a:solidFill>
-              <a:srgbClr val="3730A3"/>
-            </a:solidFill>
-          </a:ln>
-          <a:effectLst/>
-        </p:spPr>
-        <p:style>
-          <a:lnRef idx="1">
-            <a:schemeClr val="accent1"/>
-          </a:lnRef>
-          <a:fillRef idx="3">
-            <a:schemeClr val="accent1"/>
-          </a:fillRef>
-          <a:effectRef idx="2">
-            <a:schemeClr val="accent1"/>
-          </a:effectRef>
-          <a:fontRef idx="minor">
-            <a:schemeClr val="lt1"/>
-          </a:fontRef>
-        </p:style>
-        <p:txBody>
-          <a:bodyPr rtlCol="0" anchor="ctr"/>
-          <a:lstStyle/>
-          <a:p>
-            <a:pPr algn="ctr"/>
-          </a:p>
-        </p:txBody>
-      </p:sp>
-      <p:sp>
-        <p:nvSpPr>
-          <p:cNvPr id="15" name="TextBox 14"/>
-          <p:cNvSpPr txBox="1"/>
-          <p:nvPr/>
-        </p:nvSpPr>
-        <p:spPr>
-          <a:xfrm>
-            <a:off x="4805172" y="1810512"/>
-            <a:ext cx="3771900" cy="320040"/>
-          </a:xfrm>
-          <a:prstGeom prst="rect">
-            <a:avLst/>
-          </a:prstGeom>
-          <a:noFill/>
-        </p:spPr>
-        <p:txBody>
-          <a:bodyPr wrap="square" anchor="t" lIns="54864" rIns="54864" tIns="54864" bIns="54864">
-            <a:spAutoFit/>
-          </a:bodyPr>
-          <a:lstStyle/>
-          <a:p>
-            <a:pPr>
-              <a:spcAft>
-                <a:spcPts val="400"/>
-              </a:spcAft>
-            </a:pPr>
-            <a:r>
-              <a:rPr sz="1400" b="1" i="0">
-                <a:solidFill>
-                  <a:srgbClr val="0F172A"/>
-                </a:solidFill>
-                <a:ea typeface="Sylfaen"/>
-                <a:cs typeface="Sylfaen"/>
-                <a:latin typeface="Sylfaen"/>
-              </a:rPr>
-              <a:t>🔒 SMTP უსაფრთხოება:</a:t>
-            </a:r>
-          </a:p>
-        </p:txBody>
-      </p:sp>
-      <p:sp>
-        <p:nvSpPr>
-          <p:cNvPr id="16" name="TextBox 15"/>
-          <p:cNvSpPr txBox="1"/>
-          <p:nvPr/>
-        </p:nvSpPr>
-        <p:spPr>
-          <a:xfrm>
-            <a:off x="4805172" y="2203704"/>
-            <a:ext cx="3771900" cy="713232"/>
-          </a:xfrm>
-          <a:prstGeom prst="rect">
-            <a:avLst/>
-          </a:prstGeom>
-          <a:noFill/>
-        </p:spPr>
-        <p:txBody>
-          <a:bodyPr wrap="square" anchor="t" lIns="54864" rIns="54864" tIns="54864" bIns="54864">
-            <a:spAutoFit/>
-          </a:bodyPr>
-          <a:lstStyle/>
-          <a:p>
-            <a:pPr>
-              <a:spcAft>
-                <a:spcPts val="400"/>
-              </a:spcAft>
-            </a:pPr>
-            <a:r>
-              <a:rPr sz="1300" b="0" i="0">
-                <a:solidFill>
-                  <a:srgbClr val="0F172A"/>
-                </a:solidFill>
-                <a:ea typeface="Sylfaen"/>
-                <a:cs typeface="Sylfaen"/>
-                <a:latin typeface="Sylfaen"/>
-              </a:rPr>
-              <a:t>Gmail-თან დასაკავშირებლად დაგჭირდებათ Google-ის უსაფრთხოების მენიუდან "App Password"-ის გენერირება.</a:t>
-            </a:r>
-          </a:p>
-        </p:txBody>
-      </p:sp>
-      <p:sp>
-        <p:nvSpPr>
-          <p:cNvPr id="17" name="Rectangle 16"/>
-          <p:cNvSpPr/>
-          <p:nvPr/>
-        </p:nvSpPr>
-        <p:spPr>
-          <a:xfrm>
-            <a:off x="457200" y="4850892"/>
-            <a:ext cx="8229600" cy="13716"/>
-          </a:xfrm>
-          <a:prstGeom prst="rect">
-            <a:avLst/>
-          </a:prstGeom>
-          <a:solidFill>
-            <a:srgbClr val="E2E8F0"/>
-          </a:solidFill>
-          <a:ln>
-            <a:noFill/>
-          </a:ln>
-          <a:effectLst/>
-        </p:spPr>
-        <p:style>
-          <a:lnRef idx="1">
-            <a:schemeClr val="accent1"/>
-          </a:lnRef>
-          <a:fillRef idx="3">
-            <a:schemeClr val="accent1"/>
-          </a:fillRef>
-          <a:effectRef idx="2">
-            <a:schemeClr val="accent1"/>
-          </a:effectRef>
-          <a:fontRef idx="minor">
-            <a:schemeClr val="lt1"/>
-          </a:fontRef>
-        </p:style>
-        <p:txBody>
-          <a:bodyPr rtlCol="0" anchor="ctr"/>
-          <a:lstStyle/>
-          <a:p>
-            <a:pPr algn="ctr"/>
-          </a:p>
-        </p:txBody>
-      </p:sp>
-      <p:sp>
-        <p:nvSpPr>
-          <p:cNvPr id="18" name="TextBox 17"/>
+          <p:cNvPr id="14" name="TextBox 13"/>
           <p:cNvSpPr txBox="1"/>
           <p:nvPr/>
         </p:nvSpPr>
@@ -33511,7 +33874,7 @@
                 <a:cs typeface="Sylfaen"/>
                 <a:latin typeface="Sylfaen"/>
               </a:rPr>
-              <a:t>Make.com: შეცდომების მართვა და Edge Cases</a:t>
+              <a:t>CRM Scenario: Gmail SMTP Connection</a:t>
             </a:r>
           </a:p>
         </p:txBody>
@@ -33612,7 +33975,7 @@
                 <a:cs typeface="Sylfaen"/>
                 <a:latin typeface="Sylfaen"/>
               </a:rPr>
-              <a:t>39 / 48</a:t>
+              <a:t>39 / 49</a:t>
             </a:r>
           </a:p>
         </p:txBody>
@@ -33626,7 +33989,7 @@
         <p:spPr>
           <a:xfrm>
             <a:off x="457200" y="1188720"/>
-            <a:ext cx="8229600" cy="713232"/>
+            <a:ext cx="8229600" cy="475488"/>
           </a:xfrm>
           <a:prstGeom prst="rect">
             <a:avLst/>
@@ -33653,7 +34016,7 @@
                 <a:cs typeface="Sylfaen"/>
                 <a:latin typeface="Sylfaen"/>
               </a:rPr>
-              <a:t>როგორ უზრუნველვყოთ ჩვენი ავტომატიზაციების სტაბილური მუშაობა შეცდომების შემთხვევაში?</a:t>
+              <a:t>ავტომატური იმეილის გაგზავნა დარეგისტრირებულ მომხმარებელთან:</a:t>
             </a:r>
           </a:p>
         </p:txBody>
@@ -33666,14 +34029,14 @@
         </p:nvSpPr>
         <p:spPr>
           <a:xfrm>
-            <a:off x="457200" y="1975104"/>
-            <a:ext cx="54864" cy="2875788"/>
-          </a:xfrm>
-          <a:prstGeom prst="rect">
-            <a:avLst/>
-          </a:prstGeom>
-          <a:solidFill>
-            <a:srgbClr val="4F46E5"/>
+            <a:off x="457200" y="1737360"/>
+            <a:ext cx="54864" cy="3113532"/>
+          </a:xfrm>
+          <a:prstGeom prst="rect">
+            <a:avLst/>
+          </a:prstGeom>
+          <a:solidFill>
+            <a:srgbClr val="3730A3"/>
           </a:solidFill>
           <a:ln>
             <a:noFill/>
@@ -33710,8 +34073,8 @@
         </p:nvSpPr>
         <p:spPr>
           <a:xfrm>
-            <a:off x="512064" y="1975104"/>
-            <a:ext cx="3991356" cy="2875788"/>
+            <a:off x="512064" y="1737360"/>
+            <a:ext cx="3991356" cy="3113532"/>
           </a:xfrm>
           <a:prstGeom prst="roundRect">
             <a:avLst>
@@ -33719,11 +34082,11 @@
             </a:avLst>
           </a:prstGeom>
           <a:solidFill>
-            <a:srgbClr val="FFF7ED"/>
+            <a:srgbClr val="F8FAFC"/>
           </a:solidFill>
           <a:ln w="6350">
             <a:solidFill>
-              <a:srgbClr val="4F46E5"/>
+              <a:srgbClr val="E2E8F0"/>
             </a:solidFill>
           </a:ln>
           <a:effectLst/>
@@ -33758,7 +34121,7 @@
         </p:nvSpPr>
         <p:spPr>
           <a:xfrm>
-            <a:off x="621792" y="2048256"/>
+            <a:off x="621792" y="1810512"/>
             <a:ext cx="3771900" cy="320040"/>
           </a:xfrm>
           <a:prstGeom prst="rect">
@@ -33786,7 +34149,7 @@
                 <a:cs typeface="Sylfaen"/>
                 <a:latin typeface="Sylfaen"/>
               </a:rPr>
-              <a:t>⚠️ პოტენციური შეცდომები:</a:t>
+              <a:t>Gmail მოდულის პარამეტრები:</a:t>
             </a:r>
           </a:p>
         </p:txBody>
@@ -33799,8 +34162,8 @@
         </p:nvSpPr>
         <p:spPr>
           <a:xfrm>
-            <a:off x="621792" y="2441448"/>
-            <a:ext cx="3771900" cy="1719072"/>
+            <a:off x="621792" y="2203704"/>
+            <a:ext cx="3771900" cy="2267712"/>
           </a:xfrm>
           <a:prstGeom prst="rect">
             <a:avLst/>
@@ -33838,7 +34201,7 @@
                 <a:cs typeface="Sylfaen"/>
                 <a:latin typeface="Sylfaen"/>
               </a:rPr>
-              <a:t>მომხმარებელმა ფორმაში არ შეიყვანა სახელი (ცარიელი ველი);</a:t>
+              <a:t>To: Webhook-იდან მიღებული Email ცვლადი;</a:t>
             </a:r>
           </a:p>
           <a:p>
@@ -33867,7 +34230,7 @@
                 <a:cs typeface="Sylfaen"/>
                 <a:latin typeface="Sylfaen"/>
               </a:rPr>
-              <a:t>ელფოსტის ფორმატი არასწორია;</a:t>
+              <a:t>Subject: „გმადლობთ რეგისტრაციისთვის [სტარტაპის სახელი]-ზე!“;</a:t>
             </a:r>
           </a:p>
           <a:p>
@@ -33896,7 +34259,7 @@
                 <a:cs typeface="Sylfaen"/>
                 <a:latin typeface="Sylfaen"/>
               </a:rPr>
-              <a:t>სერვერი დროებით გაითიშა.</a:t>
+              <a:t>Body: პერსონალიზებული ტექსტი, სადაც გამოიყენებთ Name ცვლადს.</a:t>
             </a:r>
           </a:p>
         </p:txBody>
@@ -33909,8 +34272,8 @@
         </p:nvSpPr>
         <p:spPr>
           <a:xfrm>
-            <a:off x="4640580" y="1975104"/>
-            <a:ext cx="54864" cy="2875788"/>
+            <a:off x="4640580" y="1737360"/>
+            <a:ext cx="54864" cy="3113532"/>
           </a:xfrm>
           <a:prstGeom prst="rect">
             <a:avLst/>
@@ -33953,8 +34316,8 @@
         </p:nvSpPr>
         <p:spPr>
           <a:xfrm>
-            <a:off x="4695444" y="1975104"/>
-            <a:ext cx="3991356" cy="2875788"/>
+            <a:off x="4695444" y="1737360"/>
+            <a:ext cx="3991356" cy="3113532"/>
           </a:xfrm>
           <a:prstGeom prst="roundRect">
             <a:avLst>
@@ -33962,11 +34325,11 @@
             </a:avLst>
           </a:prstGeom>
           <a:solidFill>
-            <a:srgbClr val="F8FAFC"/>
+            <a:srgbClr val="EEF2FF"/>
           </a:solidFill>
           <a:ln w="6350">
             <a:solidFill>
-              <a:srgbClr val="E2E8F0"/>
+              <a:srgbClr val="3730A3"/>
             </a:solidFill>
           </a:ln>
           <a:effectLst/>
@@ -34001,7 +34364,7 @@
         </p:nvSpPr>
         <p:spPr>
           <a:xfrm>
-            <a:off x="4805172" y="2048256"/>
+            <a:off x="4805172" y="1810512"/>
             <a:ext cx="3771900" cy="320040"/>
           </a:xfrm>
           <a:prstGeom prst="rect">
@@ -34029,7 +34392,7 @@
                 <a:cs typeface="Sylfaen"/>
                 <a:latin typeface="Sylfaen"/>
               </a:rPr>
-              <a:t>⚙️ გადაჭრის გზები:</a:t>
+              <a:t>🔒 SMTP უსაფრთხოება:</a:t>
             </a:r>
           </a:p>
         </p:txBody>
@@ -34042,8 +34405,8 @@
         </p:nvSpPr>
         <p:spPr>
           <a:xfrm>
-            <a:off x="4805172" y="2441448"/>
-            <a:ext cx="3771900" cy="2121408"/>
+            <a:off x="4805172" y="2203704"/>
+            <a:ext cx="3771900" cy="713232"/>
           </a:xfrm>
           <a:prstGeom prst="rect">
             <a:avLst/>
@@ -34056,24 +34419,13 @@
           </a:bodyPr>
           <a:lstStyle/>
           <a:p>
-            <a:pPr algn="l">
-              <a:spcAft>
-                <a:spcPts val="300"/>
-              </a:spcAft>
-            </a:pPr>
-            <a:r>
-              <a:rPr sz="1300" b="1">
-                <a:solidFill>
-                  <a:srgbClr val="3730A3"/>
-                </a:solidFill>
-                <a:ea typeface="Sylfaen"/>
-                <a:cs typeface="Sylfaen"/>
-                <a:latin typeface="Sylfaen"/>
-              </a:rPr>
-              <a:t>▸  </a:t>
-            </a:r>
-            <a:r>
-              <a:rPr sz="1300">
+            <a:pPr>
+              <a:spcAft>
+                <a:spcPts val="400"/>
+              </a:spcAft>
+            </a:pPr>
+            <a:r>
+              <a:rPr sz="1300" b="0" i="0">
                 <a:solidFill>
                   <a:srgbClr val="0F172A"/>
                 </a:solidFill>
@@ -34081,36 +34433,7 @@
                 <a:cs typeface="Sylfaen"/>
                 <a:latin typeface="Sylfaen"/>
               </a:rPr>
-              <a:t>Validation Rules: საიტის ფორმაში ელფოსტის ველის სავალდებულოობა (Required field);</a:t>
-            </a:r>
-          </a:p>
-          <a:p>
-            <a:pPr algn="l">
-              <a:spcAft>
-                <a:spcPts val="300"/>
-              </a:spcAft>
-            </a:pPr>
-            <a:r>
-              <a:rPr sz="1300" b="1">
-                <a:solidFill>
-                  <a:srgbClr val="3730A3"/>
-                </a:solidFill>
-                <a:ea typeface="Sylfaen"/>
-                <a:cs typeface="Sylfaen"/>
-                <a:latin typeface="Sylfaen"/>
-              </a:rPr>
-              <a:t>▸  </a:t>
-            </a:r>
-            <a:r>
-              <a:rPr sz="1300">
-                <a:solidFill>
-                  <a:srgbClr val="0F172A"/>
-                </a:solidFill>
-                <a:ea typeface="Sylfaen"/>
-                <a:cs typeface="Sylfaen"/>
-                <a:latin typeface="Sylfaen"/>
-              </a:rPr>
-              <a:t>Error Handling Modules: Make.com-ში შეცდომის მართვის ბლოკების (Ignore, Resume, Break) გამოყენება.</a:t>
+              <a:t>Gmail-თან დასაკავშირებლად დაგჭირდებათ Google-ის უსაფრთხოების მენიუდან "App Password"-ის გენერირება.</a:t>
             </a:r>
           </a:p>
         </p:txBody>
@@ -34482,7 +34805,7 @@
                 <a:cs typeface="Sylfaen"/>
                 <a:latin typeface="Sylfaen"/>
               </a:rPr>
-              <a:t>4 / 48</a:t>
+              <a:t>4 / 49</a:t>
             </a:r>
           </a:p>
         </p:txBody>
@@ -35562,7 +35885,7 @@
                 <a:cs typeface="Sylfaen"/>
                 <a:latin typeface="Sylfaen"/>
               </a:rPr>
-              <a:t>Demo Day Pitch: First 2 Minutes</a:t>
+              <a:t>Make.com: შეცდომების მართვა და Edge Cases</a:t>
             </a:r>
           </a:p>
         </p:txBody>
@@ -35663,7 +35986,7 @@
                 <a:cs typeface="Sylfaen"/>
                 <a:latin typeface="Sylfaen"/>
               </a:rPr>
-              <a:t>40 / 48</a:t>
+              <a:t>40 / 49</a:t>
             </a:r>
           </a:p>
         </p:txBody>
@@ -35677,7 +36000,7 @@
         <p:spPr>
           <a:xfrm>
             <a:off x="457200" y="1188720"/>
-            <a:ext cx="8229600" cy="475488"/>
+            <a:ext cx="8229600" cy="713232"/>
           </a:xfrm>
           <a:prstGeom prst="rect">
             <a:avLst/>
@@ -35704,7 +36027,7 @@
                 <a:cs typeface="Sylfaen"/>
                 <a:latin typeface="Sylfaen"/>
               </a:rPr>
-              <a:t>პრეზენტაციის დასაწყისი — ჟიურის ყურადღების მიპყრობა:</a:t>
+              <a:t>როგორ უზრუნველვყოთ ჩვენი ავტომატიზაციების სტაბილური მუშაობა შეცდომების შემთხვევაში?</a:t>
             </a:r>
           </a:p>
         </p:txBody>
@@ -35717,8 +36040,8 @@
         </p:nvSpPr>
         <p:spPr>
           <a:xfrm>
-            <a:off x="457200" y="1737360"/>
-            <a:ext cx="54864" cy="1581912"/>
+            <a:off x="457200" y="1975104"/>
+            <a:ext cx="54864" cy="2875788"/>
           </a:xfrm>
           <a:prstGeom prst="rect">
             <a:avLst/>
@@ -35761,8 +36084,8 @@
         </p:nvSpPr>
         <p:spPr>
           <a:xfrm>
-            <a:off x="512064" y="1737360"/>
-            <a:ext cx="3991356" cy="1581912"/>
+            <a:off x="512064" y="1975104"/>
+            <a:ext cx="3991356" cy="2875788"/>
           </a:xfrm>
           <a:prstGeom prst="roundRect">
             <a:avLst>
@@ -35809,7 +36132,7 @@
         </p:nvSpPr>
         <p:spPr>
           <a:xfrm>
-            <a:off x="621792" y="1810512"/>
+            <a:off x="621792" y="2048256"/>
             <a:ext cx="3771900" cy="320040"/>
           </a:xfrm>
           <a:prstGeom prst="rect">
@@ -35837,7 +36160,7 @@
                 <a:cs typeface="Sylfaen"/>
                 <a:latin typeface="Sylfaen"/>
               </a:rPr>
-              <a:t>0:00 - 1:00 (პრობლემა):</a:t>
+              <a:t>⚠️ პოტენციური შეცდომები:</a:t>
             </a:r>
           </a:p>
         </p:txBody>
@@ -35850,8 +36173,8 @@
         </p:nvSpPr>
         <p:spPr>
           <a:xfrm>
-            <a:off x="621792" y="2203704"/>
-            <a:ext cx="3771900" cy="713232"/>
+            <a:off x="621792" y="2441448"/>
+            <a:ext cx="3771900" cy="1719072"/>
           </a:xfrm>
           <a:prstGeom prst="rect">
             <a:avLst/>
@@ -35864,13 +36187,24 @@
           </a:bodyPr>
           <a:lstStyle/>
           <a:p>
-            <a:pPr>
-              <a:spcAft>
-                <a:spcPts val="400"/>
-              </a:spcAft>
-            </a:pPr>
-            <a:r>
-              <a:rPr sz="1300" b="0" i="0">
+            <a:pPr algn="l">
+              <a:spcAft>
+                <a:spcPts val="300"/>
+              </a:spcAft>
+            </a:pPr>
+            <a:r>
+              <a:rPr sz="1300" b="1">
+                <a:solidFill>
+                  <a:srgbClr val="3730A3"/>
+                </a:solidFill>
+                <a:ea typeface="Sylfaen"/>
+                <a:cs typeface="Sylfaen"/>
+                <a:latin typeface="Sylfaen"/>
+              </a:rPr>
+              <a:t>▸  </a:t>
+            </a:r>
+            <a:r>
+              <a:rPr sz="1300">
                 <a:solidFill>
                   <a:srgbClr val="0F172A"/>
                 </a:solidFill>
@@ -35878,7 +36212,65 @@
                 <a:cs typeface="Sylfaen"/>
                 <a:latin typeface="Sylfaen"/>
               </a:rPr>
-              <a:t>დაიწყეთ რეალური ისტორიით ან შოკისმომგვრელი სტატისტიკით. აჩვენეთ, რომ პრობლემა მტკივნეულია და ბაზარი დიდია.</a:t>
+              <a:t>მომხმარებელმა ფორმაში არ შეიყვანა სახელი (ცარიელი ველი);</a:t>
+            </a:r>
+          </a:p>
+          <a:p>
+            <a:pPr algn="l">
+              <a:spcAft>
+                <a:spcPts val="300"/>
+              </a:spcAft>
+            </a:pPr>
+            <a:r>
+              <a:rPr sz="1300" b="1">
+                <a:solidFill>
+                  <a:srgbClr val="3730A3"/>
+                </a:solidFill>
+                <a:ea typeface="Sylfaen"/>
+                <a:cs typeface="Sylfaen"/>
+                <a:latin typeface="Sylfaen"/>
+              </a:rPr>
+              <a:t>▸  </a:t>
+            </a:r>
+            <a:r>
+              <a:rPr sz="1300">
+                <a:solidFill>
+                  <a:srgbClr val="0F172A"/>
+                </a:solidFill>
+                <a:ea typeface="Sylfaen"/>
+                <a:cs typeface="Sylfaen"/>
+                <a:latin typeface="Sylfaen"/>
+              </a:rPr>
+              <a:t>ელფოსტის ფორმატი არასწორია;</a:t>
+            </a:r>
+          </a:p>
+          <a:p>
+            <a:pPr algn="l">
+              <a:spcAft>
+                <a:spcPts val="300"/>
+              </a:spcAft>
+            </a:pPr>
+            <a:r>
+              <a:rPr sz="1300" b="1">
+                <a:solidFill>
+                  <a:srgbClr val="3730A3"/>
+                </a:solidFill>
+                <a:ea typeface="Sylfaen"/>
+                <a:cs typeface="Sylfaen"/>
+                <a:latin typeface="Sylfaen"/>
+              </a:rPr>
+              <a:t>▸  </a:t>
+            </a:r>
+            <a:r>
+              <a:rPr sz="1300">
+                <a:solidFill>
+                  <a:srgbClr val="0F172A"/>
+                </a:solidFill>
+                <a:ea typeface="Sylfaen"/>
+                <a:cs typeface="Sylfaen"/>
+                <a:latin typeface="Sylfaen"/>
+              </a:rPr>
+              <a:t>სერვერი დროებით გაითიშა.</a:t>
             </a:r>
           </a:p>
         </p:txBody>
@@ -35891,8 +36283,8 @@
         </p:nvSpPr>
         <p:spPr>
           <a:xfrm>
-            <a:off x="4640580" y="1737360"/>
-            <a:ext cx="54864" cy="1581912"/>
+            <a:off x="4640580" y="1975104"/>
+            <a:ext cx="54864" cy="2875788"/>
           </a:xfrm>
           <a:prstGeom prst="rect">
             <a:avLst/>
@@ -35935,8 +36327,8 @@
         </p:nvSpPr>
         <p:spPr>
           <a:xfrm>
-            <a:off x="4695444" y="1737360"/>
-            <a:ext cx="3991356" cy="1581912"/>
+            <a:off x="4695444" y="1975104"/>
+            <a:ext cx="3991356" cy="2875788"/>
           </a:xfrm>
           <a:prstGeom prst="roundRect">
             <a:avLst>
@@ -35983,7 +36375,7 @@
         </p:nvSpPr>
         <p:spPr>
           <a:xfrm>
-            <a:off x="4805172" y="1810512"/>
+            <a:off x="4805172" y="2048256"/>
             <a:ext cx="3771900" cy="320040"/>
           </a:xfrm>
           <a:prstGeom prst="rect">
@@ -36011,7 +36403,7 @@
                 <a:cs typeface="Sylfaen"/>
                 <a:latin typeface="Sylfaen"/>
               </a:rPr>
-              <a:t>1:00 - 2:00 (გადაწყვეტა/MVP):</a:t>
+              <a:t>⚙️ გადაჭრის გზები:</a:t>
             </a:r>
           </a:p>
         </p:txBody>
@@ -36024,8 +36416,8 @@
         </p:nvSpPr>
         <p:spPr>
           <a:xfrm>
-            <a:off x="4805172" y="2203704"/>
-            <a:ext cx="3771900" cy="713232"/>
+            <a:off x="4805172" y="2441448"/>
+            <a:ext cx="3771900" cy="2121408"/>
           </a:xfrm>
           <a:prstGeom prst="rect">
             <a:avLst/>
@@ -36038,13 +36430,24 @@
           </a:bodyPr>
           <a:lstStyle/>
           <a:p>
-            <a:pPr>
-              <a:spcAft>
-                <a:spcPts val="400"/>
-              </a:spcAft>
-            </a:pPr>
-            <a:r>
-              <a:rPr sz="1300" b="0" i="0">
+            <a:pPr algn="l">
+              <a:spcAft>
+                <a:spcPts val="300"/>
+              </a:spcAft>
+            </a:pPr>
+            <a:r>
+              <a:rPr sz="1300" b="1">
+                <a:solidFill>
+                  <a:srgbClr val="3730A3"/>
+                </a:solidFill>
+                <a:ea typeface="Sylfaen"/>
+                <a:cs typeface="Sylfaen"/>
+                <a:latin typeface="Sylfaen"/>
+              </a:rPr>
+              <a:t>▸  </a:t>
+            </a:r>
+            <a:r>
+              <a:rPr sz="1300">
                 <a:solidFill>
                   <a:srgbClr val="0F172A"/>
                 </a:solidFill>
@@ -36052,7 +36455,36 @@
                 <a:cs typeface="Sylfaen"/>
                 <a:latin typeface="Sylfaen"/>
               </a:rPr>
-              <a:t>აჩვენეთ მუშა საიტი. არ აჩვენოთ სქრინშოთები - აჩვენეთ რეალური Lovable URL და მომხმარებლის რეგისტრაციის პროცესი.</a:t>
+              <a:t>Validation Rules: საიტის ფორმაში ელფოსტის ველის სავალდებულოობა (Required field);</a:t>
+            </a:r>
+          </a:p>
+          <a:p>
+            <a:pPr algn="l">
+              <a:spcAft>
+                <a:spcPts val="300"/>
+              </a:spcAft>
+            </a:pPr>
+            <a:r>
+              <a:rPr sz="1300" b="1">
+                <a:solidFill>
+                  <a:srgbClr val="3730A3"/>
+                </a:solidFill>
+                <a:ea typeface="Sylfaen"/>
+                <a:cs typeface="Sylfaen"/>
+                <a:latin typeface="Sylfaen"/>
+              </a:rPr>
+              <a:t>▸  </a:t>
+            </a:r>
+            <a:r>
+              <a:rPr sz="1300">
+                <a:solidFill>
+                  <a:srgbClr val="0F172A"/>
+                </a:solidFill>
+                <a:ea typeface="Sylfaen"/>
+                <a:cs typeface="Sylfaen"/>
+                <a:latin typeface="Sylfaen"/>
+              </a:rPr>
+              <a:t>Error Handling Modules: Make.com-ში შეცდომის მართვის ბლოკების (Ignore, Resume, Break) გამოყენება.</a:t>
             </a:r>
           </a:p>
         </p:txBody>
@@ -36323,7 +36755,7 @@
                 <a:cs typeface="Sylfaen"/>
                 <a:latin typeface="Sylfaen"/>
               </a:rPr>
-              <a:t>Demo Day Pitch: Last 3 Minutes</a:t>
+              <a:t>Demo Day Pitch: First 2 Minutes</a:t>
             </a:r>
           </a:p>
         </p:txBody>
@@ -36424,7 +36856,7 @@
                 <a:cs typeface="Sylfaen"/>
                 <a:latin typeface="Sylfaen"/>
               </a:rPr>
-              <a:t>41 / 48</a:t>
+              <a:t>41 / 49</a:t>
             </a:r>
           </a:p>
         </p:txBody>
@@ -36465,7 +36897,7 @@
                 <a:cs typeface="Sylfaen"/>
                 <a:latin typeface="Sylfaen"/>
               </a:rPr>
-              <a:t>პრეზენტაციის დასასრული — ბიზნეს მოდელი და Ask:</a:t>
+              <a:t>პრეზენტაციის დასაწყისი — ჟიურის ყურადღების მიპყრობა:</a:t>
             </a:r>
           </a:p>
         </p:txBody>
@@ -36479,13 +36911,13 @@
         <p:spPr>
           <a:xfrm>
             <a:off x="457200" y="1737360"/>
-            <a:ext cx="45720" cy="1325879"/>
-          </a:xfrm>
-          <a:prstGeom prst="rect">
-            <a:avLst/>
-          </a:prstGeom>
-          <a:solidFill>
-            <a:srgbClr val="3730A3"/>
+            <a:ext cx="54864" cy="1581912"/>
+          </a:xfrm>
+          <a:prstGeom prst="rect">
+            <a:avLst/>
+          </a:prstGeom>
+          <a:solidFill>
+            <a:srgbClr val="4F46E5"/>
           </a:solidFill>
           <a:ln>
             <a:noFill/>
@@ -36522,8 +36954,8 @@
         </p:nvSpPr>
         <p:spPr>
           <a:xfrm>
-            <a:off x="502920" y="1737360"/>
-            <a:ext cx="4000500" cy="1325879"/>
+            <a:off x="512064" y="1737360"/>
+            <a:ext cx="3991356" cy="1581912"/>
           </a:xfrm>
           <a:prstGeom prst="roundRect">
             <a:avLst>
@@ -36531,6 +36963,180 @@
             </a:avLst>
           </a:prstGeom>
           <a:solidFill>
+            <a:srgbClr val="FFF7ED"/>
+          </a:solidFill>
+          <a:ln w="6350">
+            <a:solidFill>
+              <a:srgbClr val="4F46E5"/>
+            </a:solidFill>
+          </a:ln>
+          <a:effectLst/>
+        </p:spPr>
+        <p:style>
+          <a:lnRef idx="1">
+            <a:schemeClr val="accent1"/>
+          </a:lnRef>
+          <a:fillRef idx="3">
+            <a:schemeClr val="accent1"/>
+          </a:fillRef>
+          <a:effectRef idx="2">
+            <a:schemeClr val="accent1"/>
+          </a:effectRef>
+          <a:fontRef idx="minor">
+            <a:schemeClr val="lt1"/>
+          </a:fontRef>
+        </p:style>
+        <p:txBody>
+          <a:bodyPr rtlCol="0" anchor="ctr"/>
+          <a:lstStyle/>
+          <a:p>
+            <a:pPr algn="ctr"/>
+          </a:p>
+        </p:txBody>
+      </p:sp>
+      <p:sp>
+        <p:nvSpPr>
+          <p:cNvPr id="11" name="TextBox 10"/>
+          <p:cNvSpPr txBox="1"/>
+          <p:nvPr/>
+        </p:nvSpPr>
+        <p:spPr>
+          <a:xfrm>
+            <a:off x="621792" y="1810512"/>
+            <a:ext cx="3771900" cy="320040"/>
+          </a:xfrm>
+          <a:prstGeom prst="rect">
+            <a:avLst/>
+          </a:prstGeom>
+          <a:noFill/>
+        </p:spPr>
+        <p:txBody>
+          <a:bodyPr wrap="square" anchor="t" lIns="54864" rIns="54864" tIns="54864" bIns="54864">
+            <a:spAutoFit/>
+          </a:bodyPr>
+          <a:lstStyle/>
+          <a:p>
+            <a:pPr>
+              <a:spcAft>
+                <a:spcPts val="400"/>
+              </a:spcAft>
+            </a:pPr>
+            <a:r>
+              <a:rPr sz="1400" b="1" i="0">
+                <a:solidFill>
+                  <a:srgbClr val="0F172A"/>
+                </a:solidFill>
+                <a:ea typeface="Sylfaen"/>
+                <a:cs typeface="Sylfaen"/>
+                <a:latin typeface="Sylfaen"/>
+              </a:rPr>
+              <a:t>0:00 - 1:00 (პრობლემა):</a:t>
+            </a:r>
+          </a:p>
+        </p:txBody>
+      </p:sp>
+      <p:sp>
+        <p:nvSpPr>
+          <p:cNvPr id="12" name="TextBox 11"/>
+          <p:cNvSpPr txBox="1"/>
+          <p:nvPr/>
+        </p:nvSpPr>
+        <p:spPr>
+          <a:xfrm>
+            <a:off x="621792" y="2203704"/>
+            <a:ext cx="3771900" cy="713232"/>
+          </a:xfrm>
+          <a:prstGeom prst="rect">
+            <a:avLst/>
+          </a:prstGeom>
+          <a:noFill/>
+        </p:spPr>
+        <p:txBody>
+          <a:bodyPr wrap="square" anchor="t" lIns="54864" rIns="54864" tIns="54864" bIns="54864">
+            <a:spAutoFit/>
+          </a:bodyPr>
+          <a:lstStyle/>
+          <a:p>
+            <a:pPr>
+              <a:spcAft>
+                <a:spcPts val="400"/>
+              </a:spcAft>
+            </a:pPr>
+            <a:r>
+              <a:rPr sz="1300" b="0" i="0">
+                <a:solidFill>
+                  <a:srgbClr val="0F172A"/>
+                </a:solidFill>
+                <a:ea typeface="Sylfaen"/>
+                <a:cs typeface="Sylfaen"/>
+                <a:latin typeface="Sylfaen"/>
+              </a:rPr>
+              <a:t>დაიწყეთ რეალური ისტორიით ან შოკისმომგვრელი სტატისტიკით. აჩვენეთ, რომ პრობლემა მტკივნეულია და ბაზარი დიდია.</a:t>
+            </a:r>
+          </a:p>
+        </p:txBody>
+      </p:sp>
+      <p:sp>
+        <p:nvSpPr>
+          <p:cNvPr id="13" name="Rectangle 12"/>
+          <p:cNvSpPr/>
+          <p:nvPr/>
+        </p:nvSpPr>
+        <p:spPr>
+          <a:xfrm>
+            <a:off x="4640580" y="1737360"/>
+            <a:ext cx="54864" cy="1581912"/>
+          </a:xfrm>
+          <a:prstGeom prst="rect">
+            <a:avLst/>
+          </a:prstGeom>
+          <a:solidFill>
+            <a:srgbClr val="3730A3"/>
+          </a:solidFill>
+          <a:ln>
+            <a:noFill/>
+          </a:ln>
+          <a:effectLst/>
+        </p:spPr>
+        <p:style>
+          <a:lnRef idx="1">
+            <a:schemeClr val="accent1"/>
+          </a:lnRef>
+          <a:fillRef idx="3">
+            <a:schemeClr val="accent1"/>
+          </a:fillRef>
+          <a:effectRef idx="2">
+            <a:schemeClr val="accent1"/>
+          </a:effectRef>
+          <a:fontRef idx="minor">
+            <a:schemeClr val="lt1"/>
+          </a:fontRef>
+        </p:style>
+        <p:txBody>
+          <a:bodyPr rtlCol="0" anchor="ctr"/>
+          <a:lstStyle/>
+          <a:p>
+            <a:pPr algn="ctr"/>
+          </a:p>
+        </p:txBody>
+      </p:sp>
+      <p:sp>
+        <p:nvSpPr>
+          <p:cNvPr id="14" name="Rounded Rectangle 13"/>
+          <p:cNvSpPr/>
+          <p:nvPr/>
+        </p:nvSpPr>
+        <p:spPr>
+          <a:xfrm>
+            <a:off x="4695444" y="1737360"/>
+            <a:ext cx="3991356" cy="1581912"/>
+          </a:xfrm>
+          <a:prstGeom prst="roundRect">
+            <a:avLst>
+              <a:gd name="adj" fmla="val 4000"/>
+            </a:avLst>
+          </a:prstGeom>
+          <a:solidFill>
             <a:srgbClr val="F8FAFC"/>
           </a:solidFill>
           <a:ln w="6350">
@@ -36564,14 +37170,14 @@
       </p:sp>
       <p:sp>
         <p:nvSpPr>
-          <p:cNvPr id="11" name="TextBox 10"/>
+          <p:cNvPr id="15" name="TextBox 14"/>
           <p:cNvSpPr txBox="1"/>
           <p:nvPr/>
         </p:nvSpPr>
         <p:spPr>
           <a:xfrm>
-            <a:off x="585216" y="1792224"/>
-            <a:ext cx="3845052" cy="320040"/>
+            <a:off x="4805172" y="1810512"/>
+            <a:ext cx="3771900" cy="320040"/>
           </a:xfrm>
           <a:prstGeom prst="rect">
             <a:avLst/>
@@ -36598,21 +37204,21 @@
                 <a:cs typeface="Sylfaen"/>
                 <a:latin typeface="Sylfaen"/>
               </a:rPr>
-              <a:t>2:00 - 3:00 (ბიზნეს მოდელი):</a:t>
-            </a:r>
-          </a:p>
-        </p:txBody>
-      </p:sp>
-      <p:sp>
-        <p:nvSpPr>
-          <p:cNvPr id="12" name="TextBox 11"/>
+              <a:t>1:00 - 2:00 (გადაწყვეტა/MVP):</a:t>
+            </a:r>
+          </a:p>
+        </p:txBody>
+      </p:sp>
+      <p:sp>
+        <p:nvSpPr>
+          <p:cNvPr id="16" name="TextBox 15"/>
           <p:cNvSpPr txBox="1"/>
           <p:nvPr/>
         </p:nvSpPr>
         <p:spPr>
           <a:xfrm>
-            <a:off x="585216" y="2185416"/>
-            <a:ext cx="3845052" cy="475488"/>
+            <a:off x="4805172" y="2203704"/>
+            <a:ext cx="3771900" cy="713232"/>
           </a:xfrm>
           <a:prstGeom prst="rect">
             <a:avLst/>
@@ -36639,27 +37245,27 @@
                 <a:cs typeface="Sylfaen"/>
                 <a:latin typeface="Sylfaen"/>
               </a:rPr>
-              <a:t>როგორ გამოიმუშავებთ ფულს? აჩვენეთ 3-საფეხურიანი Pricing.</a:t>
-            </a:r>
-          </a:p>
-        </p:txBody>
-      </p:sp>
-      <p:sp>
-        <p:nvSpPr>
-          <p:cNvPr id="13" name="Rectangle 12"/>
-          <p:cNvSpPr/>
-          <p:nvPr/>
-        </p:nvSpPr>
-        <p:spPr>
-          <a:xfrm>
-            <a:off x="4640580" y="1737360"/>
-            <a:ext cx="45720" cy="1325879"/>
-          </a:xfrm>
-          <a:prstGeom prst="rect">
-            <a:avLst/>
-          </a:prstGeom>
-          <a:solidFill>
-            <a:srgbClr val="3730A3"/>
+              <a:t>აჩვენეთ მუშა საიტი. არ აჩვენოთ სქრინშოთები - აჩვენეთ რეალური Lovable URL და მომხმარებლის რეგისტრაციის პროცესი.</a:t>
+            </a:r>
+          </a:p>
+        </p:txBody>
+      </p:sp>
+      <p:sp>
+        <p:nvSpPr>
+          <p:cNvPr id="17" name="Rectangle 16"/>
+          <p:cNvSpPr/>
+          <p:nvPr/>
+        </p:nvSpPr>
+        <p:spPr>
+          <a:xfrm>
+            <a:off x="457200" y="4850892"/>
+            <a:ext cx="8229600" cy="13716"/>
+          </a:xfrm>
+          <a:prstGeom prst="rect">
+            <a:avLst/>
+          </a:prstGeom>
+          <a:solidFill>
+            <a:srgbClr val="E2E8F0"/>
           </a:solidFill>
           <a:ln>
             <a:noFill/>
@@ -36690,355 +37296,7 @@
       </p:sp>
       <p:sp>
         <p:nvSpPr>
-          <p:cNvPr id="14" name="Rounded Rectangle 13"/>
-          <p:cNvSpPr/>
-          <p:nvPr/>
-        </p:nvSpPr>
-        <p:spPr>
-          <a:xfrm>
-            <a:off x="4686300" y="1737360"/>
-            <a:ext cx="4000500" cy="1325879"/>
-          </a:xfrm>
-          <a:prstGeom prst="roundRect">
-            <a:avLst>
-              <a:gd name="adj" fmla="val 4000"/>
-            </a:avLst>
-          </a:prstGeom>
-          <a:solidFill>
-            <a:srgbClr val="F8FAFC"/>
-          </a:solidFill>
-          <a:ln w="6350">
-            <a:solidFill>
-              <a:srgbClr val="E2E8F0"/>
-            </a:solidFill>
-          </a:ln>
-          <a:effectLst/>
-        </p:spPr>
-        <p:style>
-          <a:lnRef idx="1">
-            <a:schemeClr val="accent1"/>
-          </a:lnRef>
-          <a:fillRef idx="3">
-            <a:schemeClr val="accent1"/>
-          </a:fillRef>
-          <a:effectRef idx="2">
-            <a:schemeClr val="accent1"/>
-          </a:effectRef>
-          <a:fontRef idx="minor">
-            <a:schemeClr val="lt1"/>
-          </a:fontRef>
-        </p:style>
-        <p:txBody>
-          <a:bodyPr rtlCol="0" anchor="ctr"/>
-          <a:lstStyle/>
-          <a:p>
-            <a:pPr algn="ctr"/>
-          </a:p>
-        </p:txBody>
-      </p:sp>
-      <p:sp>
-        <p:nvSpPr>
-          <p:cNvPr id="15" name="TextBox 14"/>
-          <p:cNvSpPr txBox="1"/>
-          <p:nvPr/>
-        </p:nvSpPr>
-        <p:spPr>
-          <a:xfrm>
-            <a:off x="4768596" y="1792224"/>
-            <a:ext cx="3845052" cy="320040"/>
-          </a:xfrm>
-          <a:prstGeom prst="rect">
-            <a:avLst/>
-          </a:prstGeom>
-          <a:noFill/>
-        </p:spPr>
-        <p:txBody>
-          <a:bodyPr wrap="square" anchor="t" lIns="54864" rIns="54864" tIns="54864" bIns="54864">
-            <a:spAutoFit/>
-          </a:bodyPr>
-          <a:lstStyle/>
-          <a:p>
-            <a:pPr>
-              <a:spcAft>
-                <a:spcPts val="400"/>
-              </a:spcAft>
-            </a:pPr>
-            <a:r>
-              <a:rPr sz="1400" b="1" i="0">
-                <a:solidFill>
-                  <a:srgbClr val="0F172A"/>
-                </a:solidFill>
-                <a:ea typeface="Sylfaen"/>
-                <a:cs typeface="Sylfaen"/>
-                <a:latin typeface="Sylfaen"/>
-              </a:rPr>
-              <a:t>3:00 - 4:00 (კონკურენცია &amp; Traction):</a:t>
-            </a:r>
-          </a:p>
-        </p:txBody>
-      </p:sp>
-      <p:sp>
-        <p:nvSpPr>
-          <p:cNvPr id="16" name="TextBox 15"/>
-          <p:cNvSpPr txBox="1"/>
-          <p:nvPr/>
-        </p:nvSpPr>
-        <p:spPr>
-          <a:xfrm>
-            <a:off x="4768596" y="2185416"/>
-            <a:ext cx="3845052" cy="713232"/>
-          </a:xfrm>
-          <a:prstGeom prst="rect">
-            <a:avLst/>
-          </a:prstGeom>
-          <a:noFill/>
-        </p:spPr>
-        <p:txBody>
-          <a:bodyPr wrap="square" anchor="t" lIns="54864" rIns="54864" tIns="54864" bIns="54864">
-            <a:spAutoFit/>
-          </a:bodyPr>
-          <a:lstStyle/>
-          <a:p>
-            <a:pPr>
-              <a:spcAft>
-                <a:spcPts val="400"/>
-              </a:spcAft>
-            </a:pPr>
-            <a:r>
-              <a:rPr sz="1300" b="0" i="0">
-                <a:solidFill>
-                  <a:srgbClr val="0F172A"/>
-                </a:solidFill>
-                <a:ea typeface="Sylfaen"/>
-                <a:cs typeface="Sylfaen"/>
-                <a:latin typeface="Sylfaen"/>
-              </a:rPr>
-              <a:t>აჩვენეთ, რით ხართ უკეთესი Perplexity Matrix-ის მიხედვით. აჩვენეთ პირველი ლიდები Google Sheets-დან.</a:t>
-            </a:r>
-          </a:p>
-        </p:txBody>
-      </p:sp>
-      <p:sp>
-        <p:nvSpPr>
-          <p:cNvPr id="17" name="Rectangle 16"/>
-          <p:cNvSpPr/>
-          <p:nvPr/>
-        </p:nvSpPr>
-        <p:spPr>
-          <a:xfrm>
-            <a:off x="457200" y="3200399"/>
-            <a:ext cx="45720" cy="1325879"/>
-          </a:xfrm>
-          <a:prstGeom prst="rect">
-            <a:avLst/>
-          </a:prstGeom>
-          <a:solidFill>
-            <a:srgbClr val="3730A3"/>
-          </a:solidFill>
-          <a:ln>
-            <a:noFill/>
-          </a:ln>
-          <a:effectLst/>
-        </p:spPr>
-        <p:style>
-          <a:lnRef idx="1">
-            <a:schemeClr val="accent1"/>
-          </a:lnRef>
-          <a:fillRef idx="3">
-            <a:schemeClr val="accent1"/>
-          </a:fillRef>
-          <a:effectRef idx="2">
-            <a:schemeClr val="accent1"/>
-          </a:effectRef>
-          <a:fontRef idx="minor">
-            <a:schemeClr val="lt1"/>
-          </a:fontRef>
-        </p:style>
-        <p:txBody>
-          <a:bodyPr rtlCol="0" anchor="ctr"/>
-          <a:lstStyle/>
-          <a:p>
-            <a:pPr algn="ctr"/>
-          </a:p>
-        </p:txBody>
-      </p:sp>
-      <p:sp>
-        <p:nvSpPr>
-          <p:cNvPr id="18" name="Rounded Rectangle 17"/>
-          <p:cNvSpPr/>
-          <p:nvPr/>
-        </p:nvSpPr>
-        <p:spPr>
-          <a:xfrm>
-            <a:off x="502920" y="3200399"/>
-            <a:ext cx="4000500" cy="1325879"/>
-          </a:xfrm>
-          <a:prstGeom prst="roundRect">
-            <a:avLst>
-              <a:gd name="adj" fmla="val 4000"/>
-            </a:avLst>
-          </a:prstGeom>
-          <a:solidFill>
-            <a:srgbClr val="F8FAFC"/>
-          </a:solidFill>
-          <a:ln w="6350">
-            <a:solidFill>
-              <a:srgbClr val="E2E8F0"/>
-            </a:solidFill>
-          </a:ln>
-          <a:effectLst/>
-        </p:spPr>
-        <p:style>
-          <a:lnRef idx="1">
-            <a:schemeClr val="accent1"/>
-          </a:lnRef>
-          <a:fillRef idx="3">
-            <a:schemeClr val="accent1"/>
-          </a:fillRef>
-          <a:effectRef idx="2">
-            <a:schemeClr val="accent1"/>
-          </a:effectRef>
-          <a:fontRef idx="minor">
-            <a:schemeClr val="lt1"/>
-          </a:fontRef>
-        </p:style>
-        <p:txBody>
-          <a:bodyPr rtlCol="0" anchor="ctr"/>
-          <a:lstStyle/>
-          <a:p>
-            <a:pPr algn="ctr"/>
-          </a:p>
-        </p:txBody>
-      </p:sp>
-      <p:sp>
-        <p:nvSpPr>
-          <p:cNvPr id="19" name="TextBox 18"/>
-          <p:cNvSpPr txBox="1"/>
-          <p:nvPr/>
-        </p:nvSpPr>
-        <p:spPr>
-          <a:xfrm>
-            <a:off x="585216" y="3255263"/>
-            <a:ext cx="3845052" cy="320040"/>
-          </a:xfrm>
-          <a:prstGeom prst="rect">
-            <a:avLst/>
-          </a:prstGeom>
-          <a:noFill/>
-        </p:spPr>
-        <p:txBody>
-          <a:bodyPr wrap="square" anchor="t" lIns="54864" rIns="54864" tIns="54864" bIns="54864">
-            <a:spAutoFit/>
-          </a:bodyPr>
-          <a:lstStyle/>
-          <a:p>
-            <a:pPr>
-              <a:spcAft>
-                <a:spcPts val="400"/>
-              </a:spcAft>
-            </a:pPr>
-            <a:r>
-              <a:rPr sz="1400" b="1" i="0">
-                <a:solidFill>
-                  <a:srgbClr val="0F172A"/>
-                </a:solidFill>
-                <a:ea typeface="Sylfaen"/>
-                <a:cs typeface="Sylfaen"/>
-                <a:latin typeface="Sylfaen"/>
-              </a:rPr>
-              <a:t>4:00 - 5:00 (გუნდი &amp; Ask):</a:t>
-            </a:r>
-          </a:p>
-        </p:txBody>
-      </p:sp>
-      <p:sp>
-        <p:nvSpPr>
-          <p:cNvPr id="20" name="TextBox 19"/>
-          <p:cNvSpPr txBox="1"/>
-          <p:nvPr/>
-        </p:nvSpPr>
-        <p:spPr>
-          <a:xfrm>
-            <a:off x="585216" y="3648456"/>
-            <a:ext cx="3845052" cy="475488"/>
-          </a:xfrm>
-          <a:prstGeom prst="rect">
-            <a:avLst/>
-          </a:prstGeom>
-          <a:noFill/>
-        </p:spPr>
-        <p:txBody>
-          <a:bodyPr wrap="square" anchor="t" lIns="54864" rIns="54864" tIns="54864" bIns="54864">
-            <a:spAutoFit/>
-          </a:bodyPr>
-          <a:lstStyle/>
-          <a:p>
-            <a:pPr>
-              <a:spcAft>
-                <a:spcPts val="400"/>
-              </a:spcAft>
-            </a:pPr>
-            <a:r>
-              <a:rPr sz="1300" b="0" i="0">
-                <a:solidFill>
-                  <a:srgbClr val="0F172A"/>
-                </a:solidFill>
-                <a:ea typeface="Sylfaen"/>
-                <a:cs typeface="Sylfaen"/>
-                <a:latin typeface="Sylfaen"/>
-              </a:rPr>
-              <a:t>რატომ ხართ თქვენ საუკეთესო გუნდი და რისთვის გჭირდებათ 25,000-ლარიანი გრანტი.</a:t>
-            </a:r>
-          </a:p>
-        </p:txBody>
-      </p:sp>
-      <p:sp>
-        <p:nvSpPr>
-          <p:cNvPr id="21" name="Rectangle 20"/>
-          <p:cNvSpPr/>
-          <p:nvPr/>
-        </p:nvSpPr>
-        <p:spPr>
-          <a:xfrm>
-            <a:off x="457200" y="4850892"/>
-            <a:ext cx="8229600" cy="13716"/>
-          </a:xfrm>
-          <a:prstGeom prst="rect">
-            <a:avLst/>
-          </a:prstGeom>
-          <a:solidFill>
-            <a:srgbClr val="E2E8F0"/>
-          </a:solidFill>
-          <a:ln>
-            <a:noFill/>
-          </a:ln>
-          <a:effectLst/>
-        </p:spPr>
-        <p:style>
-          <a:lnRef idx="1">
-            <a:schemeClr val="accent1"/>
-          </a:lnRef>
-          <a:fillRef idx="3">
-            <a:schemeClr val="accent1"/>
-          </a:fillRef>
-          <a:effectRef idx="2">
-            <a:schemeClr val="accent1"/>
-          </a:effectRef>
-          <a:fontRef idx="minor">
-            <a:schemeClr val="lt1"/>
-          </a:fontRef>
-        </p:style>
-        <p:txBody>
-          <a:bodyPr rtlCol="0" anchor="ctr"/>
-          <a:lstStyle/>
-          <a:p>
-            <a:pPr algn="ctr"/>
-          </a:p>
-        </p:txBody>
-      </p:sp>
-      <p:sp>
-        <p:nvSpPr>
-          <p:cNvPr id="22" name="TextBox 21"/>
+          <p:cNvPr id="18" name="TextBox 17"/>
           <p:cNvSpPr txBox="1"/>
           <p:nvPr/>
         </p:nvSpPr>
@@ -37258,7 +37516,7 @@
                 <a:cs typeface="Sylfaen"/>
                 <a:latin typeface="Sylfaen"/>
               </a:rPr>
-              <a:t>VC Mock Grill: Financial Q&amp;A (CAC:LTV)</a:t>
+              <a:t>Demo Day Pitch: Last 3 Minutes</a:t>
             </a:r>
           </a:p>
         </p:txBody>
@@ -37359,7 +37617,7 @@
                 <a:cs typeface="Sylfaen"/>
                 <a:latin typeface="Sylfaen"/>
               </a:rPr>
-              <a:t>42 / 48</a:t>
+              <a:t>42 / 49</a:t>
             </a:r>
           </a:p>
         </p:txBody>
@@ -37400,7 +37658,7 @@
                 <a:cs typeface="Sylfaen"/>
                 <a:latin typeface="Sylfaen"/>
               </a:rPr>
-              <a:t>ჟიურის ფინანსური კითხვები და სწორი პასუხები:</a:t>
+              <a:t>პრეზენტაციის დასასრული — ბიზნეს მოდელი და Ask:</a:t>
             </a:r>
           </a:p>
         </p:txBody>
@@ -37414,13 +37672,13 @@
         <p:spPr>
           <a:xfrm>
             <a:off x="457200" y="1737360"/>
-            <a:ext cx="54864" cy="1819656"/>
-          </a:xfrm>
-          <a:prstGeom prst="rect">
-            <a:avLst/>
-          </a:prstGeom>
-          <a:solidFill>
-            <a:srgbClr val="4F46E5"/>
+            <a:ext cx="45720" cy="1325879"/>
+          </a:xfrm>
+          <a:prstGeom prst="rect">
+            <a:avLst/>
+          </a:prstGeom>
+          <a:solidFill>
+            <a:srgbClr val="3730A3"/>
           </a:solidFill>
           <a:ln>
             <a:noFill/>
@@ -37457,8 +37715,8 @@
         </p:nvSpPr>
         <p:spPr>
           <a:xfrm>
-            <a:off x="512064" y="1737360"/>
-            <a:ext cx="3991356" cy="1819656"/>
+            <a:off x="502920" y="1737360"/>
+            <a:ext cx="4000500" cy="1325879"/>
           </a:xfrm>
           <a:prstGeom prst="roundRect">
             <a:avLst>
@@ -37466,11 +37724,11 @@
             </a:avLst>
           </a:prstGeom>
           <a:solidFill>
-            <a:srgbClr val="FFF7ED"/>
+            <a:srgbClr val="F8FAFC"/>
           </a:solidFill>
           <a:ln w="6350">
             <a:solidFill>
-              <a:srgbClr val="4F46E5"/>
+              <a:srgbClr val="E2E8F0"/>
             </a:solidFill>
           </a:ln>
           <a:effectLst/>
@@ -37505,8 +37763,8 @@
         </p:nvSpPr>
         <p:spPr>
           <a:xfrm>
-            <a:off x="621792" y="1810512"/>
-            <a:ext cx="3771900" cy="320040"/>
+            <a:off x="585216" y="1792224"/>
+            <a:ext cx="3845052" cy="320040"/>
           </a:xfrm>
           <a:prstGeom prst="rect">
             <a:avLst/>
@@ -37533,7 +37791,7 @@
                 <a:cs typeface="Sylfaen"/>
                 <a:latin typeface="Sylfaen"/>
               </a:rPr>
-              <a:t>❓ კითხვა: „როგორ აპირებთ მომხმარებლის მოზიდვას და რა იქნება თქვენი CAC?“</a:t>
+              <a:t>2:00 - 3:00 (ბიზნეს მოდელი):</a:t>
             </a:r>
           </a:p>
         </p:txBody>
@@ -37546,8 +37804,8 @@
         </p:nvSpPr>
         <p:spPr>
           <a:xfrm>
-            <a:off x="621792" y="2203704"/>
-            <a:ext cx="3771900" cy="713232"/>
+            <a:off x="585216" y="2185416"/>
+            <a:ext cx="3845052" cy="475488"/>
           </a:xfrm>
           <a:prstGeom prst="rect">
             <a:avLst/>
@@ -37574,7 +37832,7 @@
                 <a:cs typeface="Sylfaen"/>
                 <a:latin typeface="Sylfaen"/>
               </a:rPr>
-              <a:t>არასწორი პასუხი: „ჩვენ მარკეტინგზე ფულს არ დავხარჯავთ, მომხმარებლები თავად მოვლენ.“</a:t>
+              <a:t>როგორ გამოიმუშავებთ ფულს? აჩვენეთ 3-საფეხურიანი Pricing.</a:t>
             </a:r>
           </a:p>
         </p:txBody>
@@ -37588,7 +37846,7 @@
         <p:spPr>
           <a:xfrm>
             <a:off x="4640580" y="1737360"/>
-            <a:ext cx="54864" cy="1819656"/>
+            <a:ext cx="45720" cy="1325879"/>
           </a:xfrm>
           <a:prstGeom prst="rect">
             <a:avLst/>
@@ -37631,8 +37889,8 @@
         </p:nvSpPr>
         <p:spPr>
           <a:xfrm>
-            <a:off x="4695444" y="1737360"/>
-            <a:ext cx="3991356" cy="1819656"/>
+            <a:off x="4686300" y="1737360"/>
+            <a:ext cx="4000500" cy="1325879"/>
           </a:xfrm>
           <a:prstGeom prst="roundRect">
             <a:avLst>
@@ -37679,8 +37937,8 @@
         </p:nvSpPr>
         <p:spPr>
           <a:xfrm>
-            <a:off x="4805172" y="1810512"/>
-            <a:ext cx="3771900" cy="320040"/>
+            <a:off x="4768596" y="1792224"/>
+            <a:ext cx="3845052" cy="320040"/>
           </a:xfrm>
           <a:prstGeom prst="rect">
             <a:avLst/>
@@ -37707,7 +37965,7 @@
                 <a:cs typeface="Sylfaen"/>
                 <a:latin typeface="Sylfaen"/>
               </a:rPr>
-              <a:t>🟢 სწორი პასუხი (CAC:LTV):</a:t>
+              <a:t>3:00 - 4:00 (კონკურენცია &amp; Traction):</a:t>
             </a:r>
           </a:p>
         </p:txBody>
@@ -37720,8 +37978,8 @@
         </p:nvSpPr>
         <p:spPr>
           <a:xfrm>
-            <a:off x="4805172" y="2203704"/>
-            <a:ext cx="3771900" cy="950976"/>
+            <a:off x="4768596" y="2185416"/>
+            <a:ext cx="3845052" cy="713232"/>
           </a:xfrm>
           <a:prstGeom prst="rect">
             <a:avLst/>
@@ -37748,7 +38006,7 @@
                 <a:cs typeface="Sylfaen"/>
                 <a:latin typeface="Sylfaen"/>
               </a:rPr>
-              <a:t>„ჩვენი საწყისი CAC იქნება $5 Facebook Ads-ით, მომხმარებლის LTV კი - $30 (საშუალოდ 6 თვიანი ხელმოწერა $5-ად). ჩვენი LTV:CAC პროპორცია იქნება 6:1, რაც ბიზნესს მომგებიანს ხდის.“</a:t>
+              <a:t>აჩვენეთ, რით ხართ უკეთესი Perplexity Matrix-ის მიხედვით. აჩვენეთ პირველი ლიდები Google Sheets-დან.</a:t>
             </a:r>
           </a:p>
         </p:txBody>
@@ -37756,6 +38014,180 @@
       <p:sp>
         <p:nvSpPr>
           <p:cNvPr id="17" name="Rectangle 16"/>
+          <p:cNvSpPr/>
+          <p:nvPr/>
+        </p:nvSpPr>
+        <p:spPr>
+          <a:xfrm>
+            <a:off x="457200" y="3200399"/>
+            <a:ext cx="45720" cy="1325879"/>
+          </a:xfrm>
+          <a:prstGeom prst="rect">
+            <a:avLst/>
+          </a:prstGeom>
+          <a:solidFill>
+            <a:srgbClr val="3730A3"/>
+          </a:solidFill>
+          <a:ln>
+            <a:noFill/>
+          </a:ln>
+          <a:effectLst/>
+        </p:spPr>
+        <p:style>
+          <a:lnRef idx="1">
+            <a:schemeClr val="accent1"/>
+          </a:lnRef>
+          <a:fillRef idx="3">
+            <a:schemeClr val="accent1"/>
+          </a:fillRef>
+          <a:effectRef idx="2">
+            <a:schemeClr val="accent1"/>
+          </a:effectRef>
+          <a:fontRef idx="minor">
+            <a:schemeClr val="lt1"/>
+          </a:fontRef>
+        </p:style>
+        <p:txBody>
+          <a:bodyPr rtlCol="0" anchor="ctr"/>
+          <a:lstStyle/>
+          <a:p>
+            <a:pPr algn="ctr"/>
+          </a:p>
+        </p:txBody>
+      </p:sp>
+      <p:sp>
+        <p:nvSpPr>
+          <p:cNvPr id="18" name="Rounded Rectangle 17"/>
+          <p:cNvSpPr/>
+          <p:nvPr/>
+        </p:nvSpPr>
+        <p:spPr>
+          <a:xfrm>
+            <a:off x="502920" y="3200399"/>
+            <a:ext cx="4000500" cy="1325879"/>
+          </a:xfrm>
+          <a:prstGeom prst="roundRect">
+            <a:avLst>
+              <a:gd name="adj" fmla="val 4000"/>
+            </a:avLst>
+          </a:prstGeom>
+          <a:solidFill>
+            <a:srgbClr val="F8FAFC"/>
+          </a:solidFill>
+          <a:ln w="6350">
+            <a:solidFill>
+              <a:srgbClr val="E2E8F0"/>
+            </a:solidFill>
+          </a:ln>
+          <a:effectLst/>
+        </p:spPr>
+        <p:style>
+          <a:lnRef idx="1">
+            <a:schemeClr val="accent1"/>
+          </a:lnRef>
+          <a:fillRef idx="3">
+            <a:schemeClr val="accent1"/>
+          </a:fillRef>
+          <a:effectRef idx="2">
+            <a:schemeClr val="accent1"/>
+          </a:effectRef>
+          <a:fontRef idx="minor">
+            <a:schemeClr val="lt1"/>
+          </a:fontRef>
+        </p:style>
+        <p:txBody>
+          <a:bodyPr rtlCol="0" anchor="ctr"/>
+          <a:lstStyle/>
+          <a:p>
+            <a:pPr algn="ctr"/>
+          </a:p>
+        </p:txBody>
+      </p:sp>
+      <p:sp>
+        <p:nvSpPr>
+          <p:cNvPr id="19" name="TextBox 18"/>
+          <p:cNvSpPr txBox="1"/>
+          <p:nvPr/>
+        </p:nvSpPr>
+        <p:spPr>
+          <a:xfrm>
+            <a:off x="585216" y="3255263"/>
+            <a:ext cx="3845052" cy="320040"/>
+          </a:xfrm>
+          <a:prstGeom prst="rect">
+            <a:avLst/>
+          </a:prstGeom>
+          <a:noFill/>
+        </p:spPr>
+        <p:txBody>
+          <a:bodyPr wrap="square" anchor="t" lIns="54864" rIns="54864" tIns="54864" bIns="54864">
+            <a:spAutoFit/>
+          </a:bodyPr>
+          <a:lstStyle/>
+          <a:p>
+            <a:pPr>
+              <a:spcAft>
+                <a:spcPts val="400"/>
+              </a:spcAft>
+            </a:pPr>
+            <a:r>
+              <a:rPr sz="1400" b="1" i="0">
+                <a:solidFill>
+                  <a:srgbClr val="0F172A"/>
+                </a:solidFill>
+                <a:ea typeface="Sylfaen"/>
+                <a:cs typeface="Sylfaen"/>
+                <a:latin typeface="Sylfaen"/>
+              </a:rPr>
+              <a:t>4:00 - 5:00 (გუნდი &amp; Ask):</a:t>
+            </a:r>
+          </a:p>
+        </p:txBody>
+      </p:sp>
+      <p:sp>
+        <p:nvSpPr>
+          <p:cNvPr id="20" name="TextBox 19"/>
+          <p:cNvSpPr txBox="1"/>
+          <p:nvPr/>
+        </p:nvSpPr>
+        <p:spPr>
+          <a:xfrm>
+            <a:off x="585216" y="3648456"/>
+            <a:ext cx="3845052" cy="475488"/>
+          </a:xfrm>
+          <a:prstGeom prst="rect">
+            <a:avLst/>
+          </a:prstGeom>
+          <a:noFill/>
+        </p:spPr>
+        <p:txBody>
+          <a:bodyPr wrap="square" anchor="t" lIns="54864" rIns="54864" tIns="54864" bIns="54864">
+            <a:spAutoFit/>
+          </a:bodyPr>
+          <a:lstStyle/>
+          <a:p>
+            <a:pPr>
+              <a:spcAft>
+                <a:spcPts val="400"/>
+              </a:spcAft>
+            </a:pPr>
+            <a:r>
+              <a:rPr sz="1300" b="0" i="0">
+                <a:solidFill>
+                  <a:srgbClr val="0F172A"/>
+                </a:solidFill>
+                <a:ea typeface="Sylfaen"/>
+                <a:cs typeface="Sylfaen"/>
+                <a:latin typeface="Sylfaen"/>
+              </a:rPr>
+              <a:t>რატომ ხართ თქვენ საუკეთესო გუნდი და რისთვის გჭირდებათ 25,000-ლარიანი გრანტი.</a:t>
+            </a:r>
+          </a:p>
+        </p:txBody>
+      </p:sp>
+      <p:sp>
+        <p:nvSpPr>
+          <p:cNvPr id="21" name="Rectangle 20"/>
           <p:cNvSpPr/>
           <p:nvPr/>
         </p:nvSpPr>
@@ -37799,7 +38231,7 @@
       </p:sp>
       <p:sp>
         <p:nvSpPr>
-          <p:cNvPr id="18" name="TextBox 17"/>
+          <p:cNvPr id="22" name="TextBox 21"/>
           <p:cNvSpPr txBox="1"/>
           <p:nvPr/>
         </p:nvSpPr>
@@ -38019,7 +38451,7 @@
                 <a:cs typeface="Sylfaen"/>
                 <a:latin typeface="Sylfaen"/>
               </a:rPr>
-              <a:t>No-Code ლიმიტები და დეველოპერის აყვანის დრო</a:t>
+              <a:t>VC Mock Grill: Financial Q&amp;A (CAC:LTV)</a:t>
             </a:r>
           </a:p>
         </p:txBody>
@@ -38120,7 +38552,7 @@
                 <a:cs typeface="Sylfaen"/>
                 <a:latin typeface="Sylfaen"/>
               </a:rPr>
-              <a:t>43 / 48</a:t>
+              <a:t>43 / 49</a:t>
             </a:r>
           </a:p>
         </p:txBody>
@@ -38134,7 +38566,7 @@
         <p:spPr>
           <a:xfrm>
             <a:off x="457200" y="1188720"/>
-            <a:ext cx="8229600" cy="713232"/>
+            <a:ext cx="8229600" cy="475488"/>
           </a:xfrm>
           <a:prstGeom prst="rect">
             <a:avLst/>
@@ -38161,7 +38593,7 @@
                 <a:cs typeface="Sylfaen"/>
                 <a:latin typeface="Sylfaen"/>
               </a:rPr>
-              <a:t>როგორია No-Code პლატფორმების შეზღუდვები და როდის უნდა გადავიდეთ ტრადიციულ დეველოპმენტზე?</a:t>
+              <a:t>ჟიურის ფინანსური კითხვები და სწორი პასუხები:</a:t>
             </a:r>
           </a:p>
         </p:txBody>
@@ -38174,8 +38606,8 @@
         </p:nvSpPr>
         <p:spPr>
           <a:xfrm>
-            <a:off x="457200" y="1975104"/>
-            <a:ext cx="54864" cy="2875788"/>
+            <a:off x="457200" y="1737360"/>
+            <a:ext cx="54864" cy="1819656"/>
           </a:xfrm>
           <a:prstGeom prst="rect">
             <a:avLst/>
@@ -38218,8 +38650,8 @@
         </p:nvSpPr>
         <p:spPr>
           <a:xfrm>
-            <a:off x="512064" y="1975104"/>
-            <a:ext cx="3991356" cy="2875788"/>
+            <a:off x="512064" y="1737360"/>
+            <a:ext cx="3991356" cy="1819656"/>
           </a:xfrm>
           <a:prstGeom prst="roundRect">
             <a:avLst>
@@ -38266,7 +38698,7 @@
         </p:nvSpPr>
         <p:spPr>
           <a:xfrm>
-            <a:off x="621792" y="2048256"/>
+            <a:off x="621792" y="1810512"/>
             <a:ext cx="3771900" cy="320040"/>
           </a:xfrm>
           <a:prstGeom prst="rect">
@@ -38294,7 +38726,7 @@
                 <a:cs typeface="Sylfaen"/>
                 <a:latin typeface="Sylfaen"/>
               </a:rPr>
-              <a:t>⚠️ No-Code პლატფორმების ლიმიტები:</a:t>
+              <a:t>❓ კითხვა: „როგორ აპირებთ მომხმარებლის მოზიდვას და რა იქნება თქვენი CAC?“</a:t>
             </a:r>
           </a:p>
         </p:txBody>
@@ -38307,8 +38739,8 @@
         </p:nvSpPr>
         <p:spPr>
           <a:xfrm>
-            <a:off x="621792" y="2441448"/>
-            <a:ext cx="3771900" cy="2336291"/>
+            <a:off x="621792" y="2203704"/>
+            <a:ext cx="3771900" cy="713232"/>
           </a:xfrm>
           <a:prstGeom prst="rect">
             <a:avLst/>
@@ -38321,24 +38753,13 @@
           </a:bodyPr>
           <a:lstStyle/>
           <a:p>
-            <a:pPr algn="l">
-              <a:spcAft>
-                <a:spcPts val="300"/>
-              </a:spcAft>
-            </a:pPr>
-            <a:r>
-              <a:rPr sz="1300" b="1">
-                <a:solidFill>
-                  <a:srgbClr val="3730A3"/>
-                </a:solidFill>
-                <a:ea typeface="Sylfaen"/>
-                <a:cs typeface="Sylfaen"/>
-                <a:latin typeface="Sylfaen"/>
-              </a:rPr>
-              <a:t>▸  </a:t>
-            </a:r>
-            <a:r>
-              <a:rPr sz="1300">
+            <a:pPr>
+              <a:spcAft>
+                <a:spcPts val="400"/>
+              </a:spcAft>
+            </a:pPr>
+            <a:r>
+              <a:rPr sz="1300" b="0" i="0">
                 <a:solidFill>
                   <a:srgbClr val="0F172A"/>
                 </a:solidFill>
@@ -38346,65 +38767,7 @@
                 <a:cs typeface="Sylfaen"/>
                 <a:latin typeface="Sylfaen"/>
               </a:rPr>
-              <a:t>რთული ლოგიკა: მრავალდონიანი ფინანსური ტრანზაქციები ან მორგებული დაშიფვრა;</a:t>
-            </a:r>
-          </a:p>
-          <a:p>
-            <a:pPr algn="l">
-              <a:spcAft>
-                <a:spcPts val="300"/>
-              </a:spcAft>
-            </a:pPr>
-            <a:r>
-              <a:rPr sz="1300" b="1">
-                <a:solidFill>
-                  <a:srgbClr val="3730A3"/>
-                </a:solidFill>
-                <a:ea typeface="Sylfaen"/>
-                <a:cs typeface="Sylfaen"/>
-                <a:latin typeface="Sylfaen"/>
-              </a:rPr>
-              <a:t>▸  </a:t>
-            </a:r>
-            <a:r>
-              <a:rPr sz="1300">
-                <a:solidFill>
-                  <a:srgbClr val="0F172A"/>
-                </a:solidFill>
-                <a:ea typeface="Sylfaen"/>
-                <a:cs typeface="Sylfaen"/>
-                <a:latin typeface="Sylfaen"/>
-              </a:rPr>
-              <a:t>მძიმე AI/ML მოდელები: ვიდეო/აუდიო დამუშავება რეალურ დროში;</a:t>
-            </a:r>
-          </a:p>
-          <a:p>
-            <a:pPr algn="l">
-              <a:spcAft>
-                <a:spcPts val="300"/>
-              </a:spcAft>
-            </a:pPr>
-            <a:r>
-              <a:rPr sz="1300" b="1">
-                <a:solidFill>
-                  <a:srgbClr val="3730A3"/>
-                </a:solidFill>
-                <a:ea typeface="Sylfaen"/>
-                <a:cs typeface="Sylfaen"/>
-                <a:latin typeface="Sylfaen"/>
-              </a:rPr>
-              <a:t>▸  </a:t>
-            </a:r>
-            <a:r>
-              <a:rPr sz="1300">
-                <a:solidFill>
-                  <a:srgbClr val="0F172A"/>
-                </a:solidFill>
-                <a:ea typeface="Sylfaen"/>
-                <a:cs typeface="Sylfaen"/>
-                <a:latin typeface="Sylfaen"/>
-              </a:rPr>
-              <a:t>საკუთარი მობილური აპლიკაციები: App Store / Google Play-ზე მორგებული Native ფუნქციები (Bluetooth, NFC).</a:t>
+              <a:t>არასწორი პასუხი: „ჩვენ მარკეტინგზე ფულს არ დავხარჯავთ, მომხმარებლები თავად მოვლენ.“</a:t>
             </a:r>
           </a:p>
         </p:txBody>
@@ -38417,8 +38780,8 @@
         </p:nvSpPr>
         <p:spPr>
           <a:xfrm>
-            <a:off x="4640580" y="1975104"/>
-            <a:ext cx="54864" cy="2875788"/>
+            <a:off x="4640580" y="1737360"/>
+            <a:ext cx="54864" cy="1819656"/>
           </a:xfrm>
           <a:prstGeom prst="rect">
             <a:avLst/>
@@ -38461,8 +38824,8 @@
         </p:nvSpPr>
         <p:spPr>
           <a:xfrm>
-            <a:off x="4695444" y="1975104"/>
-            <a:ext cx="3991356" cy="2875788"/>
+            <a:off x="4695444" y="1737360"/>
+            <a:ext cx="3991356" cy="1819656"/>
           </a:xfrm>
           <a:prstGeom prst="roundRect">
             <a:avLst>
@@ -38509,7 +38872,7 @@
         </p:nvSpPr>
         <p:spPr>
           <a:xfrm>
-            <a:off x="4805172" y="2048256"/>
+            <a:off x="4805172" y="1810512"/>
             <a:ext cx="3771900" cy="320040"/>
           </a:xfrm>
           <a:prstGeom prst="rect">
@@ -38537,7 +38900,7 @@
                 <a:cs typeface="Sylfaen"/>
                 <a:latin typeface="Sylfaen"/>
               </a:rPr>
-              <a:t>🚀 როდის ავიყვანოთ დეველოპერი?</a:t>
+              <a:t>🟢 სწორი პასუხი (CAC:LTV):</a:t>
             </a:r>
           </a:p>
         </p:txBody>
@@ -38550,8 +38913,8 @@
         </p:nvSpPr>
         <p:spPr>
           <a:xfrm>
-            <a:off x="4805172" y="2441448"/>
-            <a:ext cx="3771900" cy="2336291"/>
+            <a:off x="4805172" y="2203704"/>
+            <a:ext cx="3771900" cy="950976"/>
           </a:xfrm>
           <a:prstGeom prst="rect">
             <a:avLst/>
@@ -38564,24 +38927,13 @@
           </a:bodyPr>
           <a:lstStyle/>
           <a:p>
-            <a:pPr algn="l">
-              <a:spcAft>
-                <a:spcPts val="300"/>
-              </a:spcAft>
-            </a:pPr>
-            <a:r>
-              <a:rPr sz="1300" b="1">
-                <a:solidFill>
-                  <a:srgbClr val="3730A3"/>
-                </a:solidFill>
-                <a:ea typeface="Sylfaen"/>
-                <a:cs typeface="Sylfaen"/>
-                <a:latin typeface="Sylfaen"/>
-              </a:rPr>
-              <a:t>▸  </a:t>
-            </a:r>
-            <a:r>
-              <a:rPr sz="1300">
+            <a:pPr>
+              <a:spcAft>
+                <a:spcPts val="400"/>
+              </a:spcAft>
+            </a:pPr>
+            <a:r>
+              <a:rPr sz="1300" b="0" i="0">
                 <a:solidFill>
                   <a:srgbClr val="0F172A"/>
                 </a:solidFill>
@@ -38589,65 +38941,7 @@
                 <a:cs typeface="Sylfaen"/>
                 <a:latin typeface="Sylfaen"/>
               </a:rPr>
-              <a:t>როდესაც MVP-მ მიაღწია Product-Market Fit-ს და გყავთ პირველი ასობით აქტიური მომხმარებელი;</a:t>
-            </a:r>
-          </a:p>
-          <a:p>
-            <a:pPr algn="l">
-              <a:spcAft>
-                <a:spcPts val="300"/>
-              </a:spcAft>
-            </a:pPr>
-            <a:r>
-              <a:rPr sz="1300" b="1">
-                <a:solidFill>
-                  <a:srgbClr val="3730A3"/>
-                </a:solidFill>
-                <a:ea typeface="Sylfaen"/>
-                <a:cs typeface="Sylfaen"/>
-                <a:latin typeface="Sylfaen"/>
-              </a:rPr>
-              <a:t>▸  </a:t>
-            </a:r>
-            <a:r>
-              <a:rPr sz="1300">
-                <a:solidFill>
-                  <a:srgbClr val="0F172A"/>
-                </a:solidFill>
-                <a:ea typeface="Sylfaen"/>
-                <a:cs typeface="Sylfaen"/>
-                <a:latin typeface="Sylfaen"/>
-              </a:rPr>
-              <a:t>როდესაც გჭირდებათ უნიკალური უსაფრთხოების/ლოკალიზაციის პარამეტრები;</a:t>
-            </a:r>
-          </a:p>
-          <a:p>
-            <a:pPr algn="l">
-              <a:spcAft>
-                <a:spcPts val="300"/>
-              </a:spcAft>
-            </a:pPr>
-            <a:r>
-              <a:rPr sz="1300" b="1">
-                <a:solidFill>
-                  <a:srgbClr val="3730A3"/>
-                </a:solidFill>
-                <a:ea typeface="Sylfaen"/>
-                <a:cs typeface="Sylfaen"/>
-                <a:latin typeface="Sylfaen"/>
-              </a:rPr>
-              <a:t>▸  </a:t>
-            </a:r>
-            <a:r>
-              <a:rPr sz="1300">
-                <a:solidFill>
-                  <a:srgbClr val="0F172A"/>
-                </a:solidFill>
-                <a:ea typeface="Sylfaen"/>
-                <a:cs typeface="Sylfaen"/>
-                <a:latin typeface="Sylfaen"/>
-              </a:rPr>
-              <a:t>როდესაც მიიღეთ GITA გრანტი და გაქვთ ბიუჯეტი პროფესიონალური გუნდის დასაქირავებლად (Handover to React Devs GitHub-ით).</a:t>
+              <a:t>„ჩვენი საწყისი CAC იქნება $5 Facebook Ads-ით, მომხმარებლის LTV კი - $30 (საშუალოდ 6 თვიანი ხელმოწერა $5-ად). ჩვენი LTV:CAC პროპორცია იქნება 6:1, რაც ბიზნესს მომგებიანს ხდის.“</a:t>
             </a:r>
           </a:p>
         </p:txBody>
@@ -38918,7 +39212,7 @@
                 <a:cs typeface="Sylfaen"/>
                 <a:latin typeface="Sylfaen"/>
               </a:rPr>
-              <a:t>VC Mock Grill: Competitors Q&amp;A (Unfair Advantage)</a:t>
+              <a:t>No-Code ლიმიტები და დეველოპერის აყვანის დრო</a:t>
             </a:r>
           </a:p>
         </p:txBody>
@@ -39019,7 +39313,7 @@
                 <a:cs typeface="Sylfaen"/>
                 <a:latin typeface="Sylfaen"/>
               </a:rPr>
-              <a:t>44 / 48</a:t>
+              <a:t>44 / 49</a:t>
             </a:r>
           </a:p>
         </p:txBody>
@@ -39033,7 +39327,7 @@
         <p:spPr>
           <a:xfrm>
             <a:off x="457200" y="1188720"/>
-            <a:ext cx="8229600" cy="475488"/>
+            <a:ext cx="8229600" cy="713232"/>
           </a:xfrm>
           <a:prstGeom prst="rect">
             <a:avLst/>
@@ -39060,7 +39354,7 @@
                 <a:cs typeface="Sylfaen"/>
                 <a:latin typeface="Sylfaen"/>
               </a:rPr>
-              <a:t>კონკურენციის საკითხები და გრანტის მიზნობრიობა:</a:t>
+              <a:t>როგორია No-Code პლატფორმების შეზღუდვები და როდის უნდა გადავიდეთ ტრადიციულ დეველოპმენტზე?</a:t>
             </a:r>
           </a:p>
         </p:txBody>
@@ -39073,8 +39367,8 @@
         </p:nvSpPr>
         <p:spPr>
           <a:xfrm>
-            <a:off x="457200" y="1737360"/>
-            <a:ext cx="54864" cy="1819656"/>
+            <a:off x="457200" y="1975104"/>
+            <a:ext cx="54864" cy="2875788"/>
           </a:xfrm>
           <a:prstGeom prst="rect">
             <a:avLst/>
@@ -39117,8 +39411,8 @@
         </p:nvSpPr>
         <p:spPr>
           <a:xfrm>
-            <a:off x="512064" y="1737360"/>
-            <a:ext cx="3991356" cy="1819656"/>
+            <a:off x="512064" y="1975104"/>
+            <a:ext cx="3991356" cy="2875788"/>
           </a:xfrm>
           <a:prstGeom prst="roundRect">
             <a:avLst>
@@ -39165,7 +39459,7 @@
         </p:nvSpPr>
         <p:spPr>
           <a:xfrm>
-            <a:off x="621792" y="1810512"/>
+            <a:off x="621792" y="2048256"/>
             <a:ext cx="3771900" cy="320040"/>
           </a:xfrm>
           <a:prstGeom prst="rect">
@@ -39193,7 +39487,7 @@
                 <a:cs typeface="Sylfaen"/>
                 <a:latin typeface="Sylfaen"/>
               </a:rPr>
-              <a:t>❓ კითხვა: „რა არის თქვენი კონკურენტული უპირატესობა და რაში დახარჯავთ გრანტს?“</a:t>
+              <a:t>⚠️ No-Code პლატფორმების ლიმიტები:</a:t>
             </a:r>
           </a:p>
         </p:txBody>
@@ -39206,8 +39500,8 @@
         </p:nvSpPr>
         <p:spPr>
           <a:xfrm>
-            <a:off x="621792" y="2203704"/>
-            <a:ext cx="3771900" cy="713232"/>
+            <a:off x="621792" y="2441448"/>
+            <a:ext cx="3771900" cy="2336291"/>
           </a:xfrm>
           <a:prstGeom prst="rect">
             <a:avLst/>
@@ -39220,13 +39514,24 @@
           </a:bodyPr>
           <a:lstStyle/>
           <a:p>
-            <a:pPr>
-              <a:spcAft>
-                <a:spcPts val="400"/>
-              </a:spcAft>
-            </a:pPr>
-            <a:r>
-              <a:rPr sz="1300" b="0" i="0">
+            <a:pPr algn="l">
+              <a:spcAft>
+                <a:spcPts val="300"/>
+              </a:spcAft>
+            </a:pPr>
+            <a:r>
+              <a:rPr sz="1300" b="1">
+                <a:solidFill>
+                  <a:srgbClr val="3730A3"/>
+                </a:solidFill>
+                <a:ea typeface="Sylfaen"/>
+                <a:cs typeface="Sylfaen"/>
+                <a:latin typeface="Sylfaen"/>
+              </a:rPr>
+              <a:t>▸  </a:t>
+            </a:r>
+            <a:r>
+              <a:rPr sz="1300">
                 <a:solidFill>
                   <a:srgbClr val="0F172A"/>
                 </a:solidFill>
@@ -39234,7 +39539,65 @@
                 <a:cs typeface="Sylfaen"/>
                 <a:latin typeface="Sylfaen"/>
               </a:rPr>
-              <a:t>არასწორი პასუხი: „გრანტით გადავუხდით ხელფასს დეველოპერებს, რომ საიტი დაგვიწერონ.“</a:t>
+              <a:t>რთული ლოგიკა: მრავალდონიანი ფინანსური ტრანზაქციები ან მორგებული დაშიფვრა;</a:t>
+            </a:r>
+          </a:p>
+          <a:p>
+            <a:pPr algn="l">
+              <a:spcAft>
+                <a:spcPts val="300"/>
+              </a:spcAft>
+            </a:pPr>
+            <a:r>
+              <a:rPr sz="1300" b="1">
+                <a:solidFill>
+                  <a:srgbClr val="3730A3"/>
+                </a:solidFill>
+                <a:ea typeface="Sylfaen"/>
+                <a:cs typeface="Sylfaen"/>
+                <a:latin typeface="Sylfaen"/>
+              </a:rPr>
+              <a:t>▸  </a:t>
+            </a:r>
+            <a:r>
+              <a:rPr sz="1300">
+                <a:solidFill>
+                  <a:srgbClr val="0F172A"/>
+                </a:solidFill>
+                <a:ea typeface="Sylfaen"/>
+                <a:cs typeface="Sylfaen"/>
+                <a:latin typeface="Sylfaen"/>
+              </a:rPr>
+              <a:t>მძიმე AI/ML მოდელები: ვიდეო/აუდიო დამუშავება რეალურ დროში;</a:t>
+            </a:r>
+          </a:p>
+          <a:p>
+            <a:pPr algn="l">
+              <a:spcAft>
+                <a:spcPts val="300"/>
+              </a:spcAft>
+            </a:pPr>
+            <a:r>
+              <a:rPr sz="1300" b="1">
+                <a:solidFill>
+                  <a:srgbClr val="3730A3"/>
+                </a:solidFill>
+                <a:ea typeface="Sylfaen"/>
+                <a:cs typeface="Sylfaen"/>
+                <a:latin typeface="Sylfaen"/>
+              </a:rPr>
+              <a:t>▸  </a:t>
+            </a:r>
+            <a:r>
+              <a:rPr sz="1300">
+                <a:solidFill>
+                  <a:srgbClr val="0F172A"/>
+                </a:solidFill>
+                <a:ea typeface="Sylfaen"/>
+                <a:cs typeface="Sylfaen"/>
+                <a:latin typeface="Sylfaen"/>
+              </a:rPr>
+              <a:t>საკუთარი მობილური აპლიკაციები: App Store / Google Play-ზე მორგებული Native ფუნქციები (Bluetooth, NFC).</a:t>
             </a:r>
           </a:p>
         </p:txBody>
@@ -39247,8 +39610,8 @@
         </p:nvSpPr>
         <p:spPr>
           <a:xfrm>
-            <a:off x="4640580" y="1737360"/>
-            <a:ext cx="54864" cy="1819656"/>
+            <a:off x="4640580" y="1975104"/>
+            <a:ext cx="54864" cy="2875788"/>
           </a:xfrm>
           <a:prstGeom prst="rect">
             <a:avLst/>
@@ -39291,8 +39654,8 @@
         </p:nvSpPr>
         <p:spPr>
           <a:xfrm>
-            <a:off x="4695444" y="1737360"/>
-            <a:ext cx="3991356" cy="1819656"/>
+            <a:off x="4695444" y="1975104"/>
+            <a:ext cx="3991356" cy="2875788"/>
           </a:xfrm>
           <a:prstGeom prst="roundRect">
             <a:avLst>
@@ -39339,7 +39702,7 @@
         </p:nvSpPr>
         <p:spPr>
           <a:xfrm>
-            <a:off x="4805172" y="1810512"/>
+            <a:off x="4805172" y="2048256"/>
             <a:ext cx="3771900" cy="320040"/>
           </a:xfrm>
           <a:prstGeom prst="rect">
@@ -39367,7 +39730,7 @@
                 <a:cs typeface="Sylfaen"/>
                 <a:latin typeface="Sylfaen"/>
               </a:rPr>
-              <a:t>🟢 სწორი პასუხი:</a:t>
+              <a:t>🚀 როდის ავიყვანოთ დეველოპერი?</a:t>
             </a:r>
           </a:p>
         </p:txBody>
@@ -39380,8 +39743,8 @@
         </p:nvSpPr>
         <p:spPr>
           <a:xfrm>
-            <a:off x="4805172" y="2203704"/>
-            <a:ext cx="3771900" cy="950976"/>
+            <a:off x="4805172" y="2441448"/>
+            <a:ext cx="3771900" cy="2336291"/>
           </a:xfrm>
           <a:prstGeom prst="rect">
             <a:avLst/>
@@ -39394,13 +39757,24 @@
           </a:bodyPr>
           <a:lstStyle/>
           <a:p>
-            <a:pPr>
-              <a:spcAft>
-                <a:spcPts val="400"/>
-              </a:spcAft>
-            </a:pPr>
-            <a:r>
-              <a:rPr sz="1300" b="0" i="0">
+            <a:pPr algn="l">
+              <a:spcAft>
+                <a:spcPts val="300"/>
+              </a:spcAft>
+            </a:pPr>
+            <a:r>
+              <a:rPr sz="1300" b="1">
+                <a:solidFill>
+                  <a:srgbClr val="3730A3"/>
+                </a:solidFill>
+                <a:ea typeface="Sylfaen"/>
+                <a:cs typeface="Sylfaen"/>
+                <a:latin typeface="Sylfaen"/>
+              </a:rPr>
+              <a:t>▸  </a:t>
+            </a:r>
+            <a:r>
+              <a:rPr sz="1300">
                 <a:solidFill>
                   <a:srgbClr val="0F172A"/>
                 </a:solidFill>
@@ -39408,7 +39782,65 @@
                 <a:cs typeface="Sylfaen"/>
                 <a:latin typeface="Sylfaen"/>
               </a:rPr>
-              <a:t>„ჩვენ უკვე გვაქვს მუშა MVP და პირველი 20 დარეგისტრირებული მომხმარებელი. გრანტის 80%-ს დავხარჯავთ მარკეტინგსა და მომხმარებლის მოზიდვაზე, ხოლო 20%-ს - API სერვერების ლიცენზიებზე.“</a:t>
+              <a:t>როდესაც MVP-მ მიაღწია Product-Market Fit-ს და გყავთ პირველი ასობით აქტიური მომხმარებელი;</a:t>
+            </a:r>
+          </a:p>
+          <a:p>
+            <a:pPr algn="l">
+              <a:spcAft>
+                <a:spcPts val="300"/>
+              </a:spcAft>
+            </a:pPr>
+            <a:r>
+              <a:rPr sz="1300" b="1">
+                <a:solidFill>
+                  <a:srgbClr val="3730A3"/>
+                </a:solidFill>
+                <a:ea typeface="Sylfaen"/>
+                <a:cs typeface="Sylfaen"/>
+                <a:latin typeface="Sylfaen"/>
+              </a:rPr>
+              <a:t>▸  </a:t>
+            </a:r>
+            <a:r>
+              <a:rPr sz="1300">
+                <a:solidFill>
+                  <a:srgbClr val="0F172A"/>
+                </a:solidFill>
+                <a:ea typeface="Sylfaen"/>
+                <a:cs typeface="Sylfaen"/>
+                <a:latin typeface="Sylfaen"/>
+              </a:rPr>
+              <a:t>როდესაც გჭირდებათ უნიკალური უსაფრთხოების/ლოკალიზაციის პარამეტრები;</a:t>
+            </a:r>
+          </a:p>
+          <a:p>
+            <a:pPr algn="l">
+              <a:spcAft>
+                <a:spcPts val="300"/>
+              </a:spcAft>
+            </a:pPr>
+            <a:r>
+              <a:rPr sz="1300" b="1">
+                <a:solidFill>
+                  <a:srgbClr val="3730A3"/>
+                </a:solidFill>
+                <a:ea typeface="Sylfaen"/>
+                <a:cs typeface="Sylfaen"/>
+                <a:latin typeface="Sylfaen"/>
+              </a:rPr>
+              <a:t>▸  </a:t>
+            </a:r>
+            <a:r>
+              <a:rPr sz="1300">
+                <a:solidFill>
+                  <a:srgbClr val="0F172A"/>
+                </a:solidFill>
+                <a:ea typeface="Sylfaen"/>
+                <a:cs typeface="Sylfaen"/>
+                <a:latin typeface="Sylfaen"/>
+              </a:rPr>
+              <a:t>როდესაც მიიღეთ GITA გრანტი და გაქვთ ბიუჯეტი პროფესიონალური გუნდის დასაქირავებლად (Handover to React Devs GitHub-ით).</a:t>
             </a:r>
           </a:p>
         </p:txBody>
@@ -39679,7 +40111,7 @@
                 <a:cs typeface="Sylfaen"/>
                 <a:latin typeface="Sylfaen"/>
               </a:rPr>
-              <a:t>ფინანსური მოდელირება: P&amp;L და CAC:LTV მატრიცა</a:t>
+              <a:t>VC Mock Grill: Competitors Q&amp;A (Unfair Advantage)</a:t>
             </a:r>
           </a:p>
         </p:txBody>
@@ -39780,7 +40212,7 @@
                 <a:cs typeface="Sylfaen"/>
                 <a:latin typeface="Sylfaen"/>
               </a:rPr>
-              <a:t>45 / 48</a:t>
+              <a:t>45 / 49</a:t>
             </a:r>
           </a:p>
         </p:txBody>
@@ -39821,7 +40253,7 @@
                 <a:cs typeface="Sylfaen"/>
                 <a:latin typeface="Sylfaen"/>
               </a:rPr>
-              <a:t>როგორ დავასაბუთოთ Pitch Deck-ის ფინანსური სლაიდი (Slide 8) ციფრებით?</a:t>
+              <a:t>კონკურენციის საკითხები და გრანტის მიზნობრიობა:</a:t>
             </a:r>
           </a:p>
         </p:txBody>
@@ -39835,13 +40267,13 @@
         <p:spPr>
           <a:xfrm>
             <a:off x="457200" y="1737360"/>
-            <a:ext cx="45720" cy="1444751"/>
-          </a:xfrm>
-          <a:prstGeom prst="rect">
-            <a:avLst/>
-          </a:prstGeom>
-          <a:solidFill>
-            <a:srgbClr val="3730A3"/>
+            <a:ext cx="54864" cy="1819656"/>
+          </a:xfrm>
+          <a:prstGeom prst="rect">
+            <a:avLst/>
+          </a:prstGeom>
+          <a:solidFill>
+            <a:srgbClr val="4F46E5"/>
           </a:solidFill>
           <a:ln>
             <a:noFill/>
@@ -39878,8 +40310,8 @@
         </p:nvSpPr>
         <p:spPr>
           <a:xfrm>
-            <a:off x="502920" y="1737360"/>
-            <a:ext cx="4000500" cy="1444751"/>
+            <a:off x="512064" y="1737360"/>
+            <a:ext cx="3991356" cy="1819656"/>
           </a:xfrm>
           <a:prstGeom prst="roundRect">
             <a:avLst>
@@ -39887,6 +40319,180 @@
             </a:avLst>
           </a:prstGeom>
           <a:solidFill>
+            <a:srgbClr val="FFF7ED"/>
+          </a:solidFill>
+          <a:ln w="6350">
+            <a:solidFill>
+              <a:srgbClr val="4F46E5"/>
+            </a:solidFill>
+          </a:ln>
+          <a:effectLst/>
+        </p:spPr>
+        <p:style>
+          <a:lnRef idx="1">
+            <a:schemeClr val="accent1"/>
+          </a:lnRef>
+          <a:fillRef idx="3">
+            <a:schemeClr val="accent1"/>
+          </a:fillRef>
+          <a:effectRef idx="2">
+            <a:schemeClr val="accent1"/>
+          </a:effectRef>
+          <a:fontRef idx="minor">
+            <a:schemeClr val="lt1"/>
+          </a:fontRef>
+        </p:style>
+        <p:txBody>
+          <a:bodyPr rtlCol="0" anchor="ctr"/>
+          <a:lstStyle/>
+          <a:p>
+            <a:pPr algn="ctr"/>
+          </a:p>
+        </p:txBody>
+      </p:sp>
+      <p:sp>
+        <p:nvSpPr>
+          <p:cNvPr id="11" name="TextBox 10"/>
+          <p:cNvSpPr txBox="1"/>
+          <p:nvPr/>
+        </p:nvSpPr>
+        <p:spPr>
+          <a:xfrm>
+            <a:off x="621792" y="1810512"/>
+            <a:ext cx="3771900" cy="320040"/>
+          </a:xfrm>
+          <a:prstGeom prst="rect">
+            <a:avLst/>
+          </a:prstGeom>
+          <a:noFill/>
+        </p:spPr>
+        <p:txBody>
+          <a:bodyPr wrap="square" anchor="t" lIns="54864" rIns="54864" tIns="54864" bIns="54864">
+            <a:spAutoFit/>
+          </a:bodyPr>
+          <a:lstStyle/>
+          <a:p>
+            <a:pPr>
+              <a:spcAft>
+                <a:spcPts val="400"/>
+              </a:spcAft>
+            </a:pPr>
+            <a:r>
+              <a:rPr sz="1400" b="1" i="0">
+                <a:solidFill>
+                  <a:srgbClr val="0F172A"/>
+                </a:solidFill>
+                <a:ea typeface="Sylfaen"/>
+                <a:cs typeface="Sylfaen"/>
+                <a:latin typeface="Sylfaen"/>
+              </a:rPr>
+              <a:t>❓ კითხვა: „რა არის თქვენი კონკურენტული უპირატესობა და რაში დახარჯავთ გრანტს?“</a:t>
+            </a:r>
+          </a:p>
+        </p:txBody>
+      </p:sp>
+      <p:sp>
+        <p:nvSpPr>
+          <p:cNvPr id="12" name="TextBox 11"/>
+          <p:cNvSpPr txBox="1"/>
+          <p:nvPr/>
+        </p:nvSpPr>
+        <p:spPr>
+          <a:xfrm>
+            <a:off x="621792" y="2203704"/>
+            <a:ext cx="3771900" cy="713232"/>
+          </a:xfrm>
+          <a:prstGeom prst="rect">
+            <a:avLst/>
+          </a:prstGeom>
+          <a:noFill/>
+        </p:spPr>
+        <p:txBody>
+          <a:bodyPr wrap="square" anchor="t" lIns="54864" rIns="54864" tIns="54864" bIns="54864">
+            <a:spAutoFit/>
+          </a:bodyPr>
+          <a:lstStyle/>
+          <a:p>
+            <a:pPr>
+              <a:spcAft>
+                <a:spcPts val="400"/>
+              </a:spcAft>
+            </a:pPr>
+            <a:r>
+              <a:rPr sz="1300" b="0" i="0">
+                <a:solidFill>
+                  <a:srgbClr val="0F172A"/>
+                </a:solidFill>
+                <a:ea typeface="Sylfaen"/>
+                <a:cs typeface="Sylfaen"/>
+                <a:latin typeface="Sylfaen"/>
+              </a:rPr>
+              <a:t>არასწორი პასუხი: „გრანტით გადავუხდით ხელფასს დეველოპერებს, რომ საიტი დაგვიწერონ.“</a:t>
+            </a:r>
+          </a:p>
+        </p:txBody>
+      </p:sp>
+      <p:sp>
+        <p:nvSpPr>
+          <p:cNvPr id="13" name="Rectangle 12"/>
+          <p:cNvSpPr/>
+          <p:nvPr/>
+        </p:nvSpPr>
+        <p:spPr>
+          <a:xfrm>
+            <a:off x="4640580" y="1737360"/>
+            <a:ext cx="54864" cy="1819656"/>
+          </a:xfrm>
+          <a:prstGeom prst="rect">
+            <a:avLst/>
+          </a:prstGeom>
+          <a:solidFill>
+            <a:srgbClr val="3730A3"/>
+          </a:solidFill>
+          <a:ln>
+            <a:noFill/>
+          </a:ln>
+          <a:effectLst/>
+        </p:spPr>
+        <p:style>
+          <a:lnRef idx="1">
+            <a:schemeClr val="accent1"/>
+          </a:lnRef>
+          <a:fillRef idx="3">
+            <a:schemeClr val="accent1"/>
+          </a:fillRef>
+          <a:effectRef idx="2">
+            <a:schemeClr val="accent1"/>
+          </a:effectRef>
+          <a:fontRef idx="minor">
+            <a:schemeClr val="lt1"/>
+          </a:fontRef>
+        </p:style>
+        <p:txBody>
+          <a:bodyPr rtlCol="0" anchor="ctr"/>
+          <a:lstStyle/>
+          <a:p>
+            <a:pPr algn="ctr"/>
+          </a:p>
+        </p:txBody>
+      </p:sp>
+      <p:sp>
+        <p:nvSpPr>
+          <p:cNvPr id="14" name="Rounded Rectangle 13"/>
+          <p:cNvSpPr/>
+          <p:nvPr/>
+        </p:nvSpPr>
+        <p:spPr>
+          <a:xfrm>
+            <a:off x="4695444" y="1737360"/>
+            <a:ext cx="3991356" cy="1819656"/>
+          </a:xfrm>
+          <a:prstGeom prst="roundRect">
+            <a:avLst>
+              <a:gd name="adj" fmla="val 4000"/>
+            </a:avLst>
+          </a:prstGeom>
+          <a:solidFill>
             <a:srgbClr val="F8FAFC"/>
           </a:solidFill>
           <a:ln w="6350">
@@ -39920,14 +40526,14 @@
       </p:sp>
       <p:sp>
         <p:nvSpPr>
-          <p:cNvPr id="11" name="TextBox 10"/>
+          <p:cNvPr id="15" name="TextBox 14"/>
           <p:cNvSpPr txBox="1"/>
           <p:nvPr/>
         </p:nvSpPr>
         <p:spPr>
           <a:xfrm>
-            <a:off x="585216" y="1792224"/>
-            <a:ext cx="3845052" cy="320040"/>
+            <a:off x="4805172" y="1810512"/>
+            <a:ext cx="3771900" cy="320040"/>
           </a:xfrm>
           <a:prstGeom prst="rect">
             <a:avLst/>
@@ -39954,21 +40560,21 @@
                 <a:cs typeface="Sylfaen"/>
                 <a:latin typeface="Sylfaen"/>
               </a:rPr>
-              <a:t>📈 P&amp;L (მოგება-ზარალი)</a:t>
-            </a:r>
-          </a:p>
-        </p:txBody>
-      </p:sp>
-      <p:sp>
-        <p:nvSpPr>
-          <p:cNvPr id="12" name="TextBox 11"/>
+              <a:t>🟢 სწორი პასუხი:</a:t>
+            </a:r>
+          </a:p>
+        </p:txBody>
+      </p:sp>
+      <p:sp>
+        <p:nvSpPr>
+          <p:cNvPr id="16" name="TextBox 15"/>
           <p:cNvSpPr txBox="1"/>
           <p:nvPr/>
         </p:nvSpPr>
         <p:spPr>
           <a:xfrm>
-            <a:off x="585216" y="2185416"/>
-            <a:ext cx="3845052" cy="713232"/>
+            <a:off x="4805172" y="2203704"/>
+            <a:ext cx="3771900" cy="950976"/>
           </a:xfrm>
           <a:prstGeom prst="rect">
             <a:avLst/>
@@ -39995,27 +40601,27 @@
                 <a:cs typeface="Sylfaen"/>
                 <a:latin typeface="Sylfaen"/>
               </a:rPr>
-              <a:t>პროგნოზი 3 წელზე: შემოსავლები, საოპერაციო ხარჯები (OPEX), სერვერები, მარკეტინგი და წმინდა მოგება.</a:t>
-            </a:r>
-          </a:p>
-        </p:txBody>
-      </p:sp>
-      <p:sp>
-        <p:nvSpPr>
-          <p:cNvPr id="13" name="Rectangle 12"/>
-          <p:cNvSpPr/>
-          <p:nvPr/>
-        </p:nvSpPr>
-        <p:spPr>
-          <a:xfrm>
-            <a:off x="4640580" y="1737360"/>
-            <a:ext cx="45720" cy="1444751"/>
-          </a:xfrm>
-          <a:prstGeom prst="rect">
-            <a:avLst/>
-          </a:prstGeom>
-          <a:solidFill>
-            <a:srgbClr val="3730A3"/>
+              <a:t>„ჩვენ უკვე გვაქვს მუშა MVP და პირველი 20 დარეგისტრირებული მომხმარებელი. გრანტის 80%-ს დავხარჯავთ მარკეტინგსა და მომხმარებლის მოზიდვაზე, ხოლო 20%-ს - API სერვერების ლიცენზიებზე.“</a:t>
+            </a:r>
+          </a:p>
+        </p:txBody>
+      </p:sp>
+      <p:sp>
+        <p:nvSpPr>
+          <p:cNvPr id="17" name="Rectangle 16"/>
+          <p:cNvSpPr/>
+          <p:nvPr/>
+        </p:nvSpPr>
+        <p:spPr>
+          <a:xfrm>
+            <a:off x="457200" y="4850892"/>
+            <a:ext cx="8229600" cy="13716"/>
+          </a:xfrm>
+          <a:prstGeom prst="rect">
+            <a:avLst/>
+          </a:prstGeom>
+          <a:solidFill>
+            <a:srgbClr val="E2E8F0"/>
           </a:solidFill>
           <a:ln>
             <a:noFill/>
@@ -40046,355 +40652,7 @@
       </p:sp>
       <p:sp>
         <p:nvSpPr>
-          <p:cNvPr id="14" name="Rounded Rectangle 13"/>
-          <p:cNvSpPr/>
-          <p:nvPr/>
-        </p:nvSpPr>
-        <p:spPr>
-          <a:xfrm>
-            <a:off x="4686300" y="1737360"/>
-            <a:ext cx="4000500" cy="1444751"/>
-          </a:xfrm>
-          <a:prstGeom prst="roundRect">
-            <a:avLst>
-              <a:gd name="adj" fmla="val 4000"/>
-            </a:avLst>
-          </a:prstGeom>
-          <a:solidFill>
-            <a:srgbClr val="F8FAFC"/>
-          </a:solidFill>
-          <a:ln w="6350">
-            <a:solidFill>
-              <a:srgbClr val="E2E8F0"/>
-            </a:solidFill>
-          </a:ln>
-          <a:effectLst/>
-        </p:spPr>
-        <p:style>
-          <a:lnRef idx="1">
-            <a:schemeClr val="accent1"/>
-          </a:lnRef>
-          <a:fillRef idx="3">
-            <a:schemeClr val="accent1"/>
-          </a:fillRef>
-          <a:effectRef idx="2">
-            <a:schemeClr val="accent1"/>
-          </a:effectRef>
-          <a:fontRef idx="minor">
-            <a:schemeClr val="lt1"/>
-          </a:fontRef>
-        </p:style>
-        <p:txBody>
-          <a:bodyPr rtlCol="0" anchor="ctr"/>
-          <a:lstStyle/>
-          <a:p>
-            <a:pPr algn="ctr"/>
-          </a:p>
-        </p:txBody>
-      </p:sp>
-      <p:sp>
-        <p:nvSpPr>
-          <p:cNvPr id="15" name="TextBox 14"/>
-          <p:cNvSpPr txBox="1"/>
-          <p:nvPr/>
-        </p:nvSpPr>
-        <p:spPr>
-          <a:xfrm>
-            <a:off x="4768596" y="1792224"/>
-            <a:ext cx="3845052" cy="320040"/>
-          </a:xfrm>
-          <a:prstGeom prst="rect">
-            <a:avLst/>
-          </a:prstGeom>
-          <a:noFill/>
-        </p:spPr>
-        <p:txBody>
-          <a:bodyPr wrap="square" anchor="t" lIns="54864" rIns="54864" tIns="54864" bIns="54864">
-            <a:spAutoFit/>
-          </a:bodyPr>
-          <a:lstStyle/>
-          <a:p>
-            <a:pPr>
-              <a:spcAft>
-                <a:spcPts val="400"/>
-              </a:spcAft>
-            </a:pPr>
-            <a:r>
-              <a:rPr sz="1400" b="1" i="0">
-                <a:solidFill>
-                  <a:srgbClr val="0F172A"/>
-                </a:solidFill>
-                <a:ea typeface="Sylfaen"/>
-                <a:cs typeface="Sylfaen"/>
-                <a:latin typeface="Sylfaen"/>
-              </a:rPr>
-              <a:t>💰 CAC (მოზიდვის ხარჯი)</a:t>
-            </a:r>
-          </a:p>
-        </p:txBody>
-      </p:sp>
-      <p:sp>
-        <p:nvSpPr>
-          <p:cNvPr id="16" name="TextBox 15"/>
-          <p:cNvSpPr txBox="1"/>
-          <p:nvPr/>
-        </p:nvSpPr>
-        <p:spPr>
-          <a:xfrm>
-            <a:off x="4768596" y="2185416"/>
-            <a:ext cx="3845052" cy="475488"/>
-          </a:xfrm>
-          <a:prstGeom prst="rect">
-            <a:avLst/>
-          </a:prstGeom>
-          <a:noFill/>
-        </p:spPr>
-        <p:txBody>
-          <a:bodyPr wrap="square" anchor="t" lIns="54864" rIns="54864" tIns="54864" bIns="54864">
-            <a:spAutoFit/>
-          </a:bodyPr>
-          <a:lstStyle/>
-          <a:p>
-            <a:pPr>
-              <a:spcAft>
-                <a:spcPts val="400"/>
-              </a:spcAft>
-            </a:pPr>
-            <a:r>
-              <a:rPr sz="1300" b="0" i="0">
-                <a:solidFill>
-                  <a:srgbClr val="0F172A"/>
-                </a:solidFill>
-                <a:ea typeface="Sylfaen"/>
-                <a:cs typeface="Sylfaen"/>
-                <a:latin typeface="Sylfaen"/>
-              </a:rPr>
-              <a:t>რამდენი ლარი იხარჯება 1 ახალი კლიენტის მოსაზიდად (მაგ. რეკლამა, გაყიდვები).</a:t>
-            </a:r>
-          </a:p>
-        </p:txBody>
-      </p:sp>
-      <p:sp>
-        <p:nvSpPr>
-          <p:cNvPr id="17" name="Rectangle 16"/>
-          <p:cNvSpPr/>
-          <p:nvPr/>
-        </p:nvSpPr>
-        <p:spPr>
-          <a:xfrm>
-            <a:off x="457200" y="3319272"/>
-            <a:ext cx="45720" cy="1444751"/>
-          </a:xfrm>
-          <a:prstGeom prst="rect">
-            <a:avLst/>
-          </a:prstGeom>
-          <a:solidFill>
-            <a:srgbClr val="3730A3"/>
-          </a:solidFill>
-          <a:ln>
-            <a:noFill/>
-          </a:ln>
-          <a:effectLst/>
-        </p:spPr>
-        <p:style>
-          <a:lnRef idx="1">
-            <a:schemeClr val="accent1"/>
-          </a:lnRef>
-          <a:fillRef idx="3">
-            <a:schemeClr val="accent1"/>
-          </a:fillRef>
-          <a:effectRef idx="2">
-            <a:schemeClr val="accent1"/>
-          </a:effectRef>
-          <a:fontRef idx="minor">
-            <a:schemeClr val="lt1"/>
-          </a:fontRef>
-        </p:style>
-        <p:txBody>
-          <a:bodyPr rtlCol="0" anchor="ctr"/>
-          <a:lstStyle/>
-          <a:p>
-            <a:pPr algn="ctr"/>
-          </a:p>
-        </p:txBody>
-      </p:sp>
-      <p:sp>
-        <p:nvSpPr>
-          <p:cNvPr id="18" name="Rounded Rectangle 17"/>
-          <p:cNvSpPr/>
-          <p:nvPr/>
-        </p:nvSpPr>
-        <p:spPr>
-          <a:xfrm>
-            <a:off x="502920" y="3319272"/>
-            <a:ext cx="4000500" cy="1444751"/>
-          </a:xfrm>
-          <a:prstGeom prst="roundRect">
-            <a:avLst>
-              <a:gd name="adj" fmla="val 4000"/>
-            </a:avLst>
-          </a:prstGeom>
-          <a:solidFill>
-            <a:srgbClr val="F8FAFC"/>
-          </a:solidFill>
-          <a:ln w="6350">
-            <a:solidFill>
-              <a:srgbClr val="E2E8F0"/>
-            </a:solidFill>
-          </a:ln>
-          <a:effectLst/>
-        </p:spPr>
-        <p:style>
-          <a:lnRef idx="1">
-            <a:schemeClr val="accent1"/>
-          </a:lnRef>
-          <a:fillRef idx="3">
-            <a:schemeClr val="accent1"/>
-          </a:fillRef>
-          <a:effectRef idx="2">
-            <a:schemeClr val="accent1"/>
-          </a:effectRef>
-          <a:fontRef idx="minor">
-            <a:schemeClr val="lt1"/>
-          </a:fontRef>
-        </p:style>
-        <p:txBody>
-          <a:bodyPr rtlCol="0" anchor="ctr"/>
-          <a:lstStyle/>
-          <a:p>
-            <a:pPr algn="ctr"/>
-          </a:p>
-        </p:txBody>
-      </p:sp>
-      <p:sp>
-        <p:nvSpPr>
-          <p:cNvPr id="19" name="TextBox 18"/>
-          <p:cNvSpPr txBox="1"/>
-          <p:nvPr/>
-        </p:nvSpPr>
-        <p:spPr>
-          <a:xfrm>
-            <a:off x="585216" y="3374136"/>
-            <a:ext cx="3845052" cy="320040"/>
-          </a:xfrm>
-          <a:prstGeom prst="rect">
-            <a:avLst/>
-          </a:prstGeom>
-          <a:noFill/>
-        </p:spPr>
-        <p:txBody>
-          <a:bodyPr wrap="square" anchor="t" lIns="54864" rIns="54864" tIns="54864" bIns="54864">
-            <a:spAutoFit/>
-          </a:bodyPr>
-          <a:lstStyle/>
-          <a:p>
-            <a:pPr>
-              <a:spcAft>
-                <a:spcPts val="400"/>
-              </a:spcAft>
-            </a:pPr>
-            <a:r>
-              <a:rPr sz="1400" b="1" i="0">
-                <a:solidFill>
-                  <a:srgbClr val="0F172A"/>
-                </a:solidFill>
-                <a:ea typeface="Sylfaen"/>
-                <a:cs typeface="Sylfaen"/>
-                <a:latin typeface="Sylfaen"/>
-              </a:rPr>
-              <a:t>💎 LTV (მომხმარებლის ღირებულება)</a:t>
-            </a:r>
-          </a:p>
-        </p:txBody>
-      </p:sp>
-      <p:sp>
-        <p:nvSpPr>
-          <p:cNvPr id="20" name="TextBox 19"/>
-          <p:cNvSpPr txBox="1"/>
-          <p:nvPr/>
-        </p:nvSpPr>
-        <p:spPr>
-          <a:xfrm>
-            <a:off x="585216" y="3767328"/>
-            <a:ext cx="3845052" cy="713232"/>
-          </a:xfrm>
-          <a:prstGeom prst="rect">
-            <a:avLst/>
-          </a:prstGeom>
-          <a:noFill/>
-        </p:spPr>
-        <p:txBody>
-          <a:bodyPr wrap="square" anchor="t" lIns="54864" rIns="54864" tIns="54864" bIns="54864">
-            <a:spAutoFit/>
-          </a:bodyPr>
-          <a:lstStyle/>
-          <a:p>
-            <a:pPr>
-              <a:spcAft>
-                <a:spcPts val="400"/>
-              </a:spcAft>
-            </a:pPr>
-            <a:r>
-              <a:rPr sz="1300" b="0" i="0">
-                <a:solidFill>
-                  <a:srgbClr val="0F172A"/>
-                </a:solidFill>
-                <a:ea typeface="Sylfaen"/>
-                <a:cs typeface="Sylfaen"/>
-                <a:latin typeface="Sylfaen"/>
-              </a:rPr>
-              <a:t>რა ჯამურ შემოსავალს მოიტანს მომხმარებელი ბრენდთან ურთიერთობისას (ხელმოწერის საშუალო დრო × თვიური საფასური).</a:t>
-            </a:r>
-          </a:p>
-        </p:txBody>
-      </p:sp>
-      <p:sp>
-        <p:nvSpPr>
-          <p:cNvPr id="21" name="Rectangle 20"/>
-          <p:cNvSpPr/>
-          <p:nvPr/>
-        </p:nvSpPr>
-        <p:spPr>
-          <a:xfrm>
-            <a:off x="457200" y="4850892"/>
-            <a:ext cx="8229600" cy="13716"/>
-          </a:xfrm>
-          <a:prstGeom prst="rect">
-            <a:avLst/>
-          </a:prstGeom>
-          <a:solidFill>
-            <a:srgbClr val="E2E8F0"/>
-          </a:solidFill>
-          <a:ln>
-            <a:noFill/>
-          </a:ln>
-          <a:effectLst/>
-        </p:spPr>
-        <p:style>
-          <a:lnRef idx="1">
-            <a:schemeClr val="accent1"/>
-          </a:lnRef>
-          <a:fillRef idx="3">
-            <a:schemeClr val="accent1"/>
-          </a:fillRef>
-          <a:effectRef idx="2">
-            <a:schemeClr val="accent1"/>
-          </a:effectRef>
-          <a:fontRef idx="minor">
-            <a:schemeClr val="lt1"/>
-          </a:fontRef>
-        </p:style>
-        <p:txBody>
-          <a:bodyPr rtlCol="0" anchor="ctr"/>
-          <a:lstStyle/>
-          <a:p>
-            <a:pPr algn="ctr"/>
-          </a:p>
-        </p:txBody>
-      </p:sp>
-      <p:sp>
-        <p:nvSpPr>
-          <p:cNvPr id="22" name="TextBox 21"/>
+          <p:cNvPr id="18" name="TextBox 17"/>
           <p:cNvSpPr txBox="1"/>
           <p:nvPr/>
         </p:nvSpPr>
@@ -40614,7 +40872,7 @@
                 <a:cs typeface="Sylfaen"/>
                 <a:latin typeface="Sylfaen"/>
               </a:rPr>
-              <a:t>GITA ჟიურისთან Q&amp;A სესიის ტაქტიკა</a:t>
+              <a:t>ფინანსური მოდელირება: P&amp;L და CAC:LTV მატრიცა</a:t>
             </a:r>
           </a:p>
         </p:txBody>
@@ -40715,7 +40973,7 @@
                 <a:cs typeface="Sylfaen"/>
                 <a:latin typeface="Sylfaen"/>
               </a:rPr>
-              <a:t>46 / 48</a:t>
+              <a:t>46 / 49</a:t>
             </a:r>
           </a:p>
         </p:txBody>
@@ -40756,7 +41014,7 @@
                 <a:cs typeface="Sylfaen"/>
                 <a:latin typeface="Sylfaen"/>
               </a:rPr>
-              <a:t>როგორ ვუპასუხოთ ჟიურის რთულ კითხვებს 5-წუთიანი პრეზენტაციის შემდეგ?</a:t>
+              <a:t>როგორ დავასაბუთოთ Pitch Deck-ის ფინანსური სლაიდი (Slide 8) ციფრებით?</a:t>
             </a:r>
           </a:p>
         </p:txBody>
@@ -40770,13 +41028,13 @@
         <p:spPr>
           <a:xfrm>
             <a:off x="457200" y="1737360"/>
-            <a:ext cx="54864" cy="3113532"/>
-          </a:xfrm>
-          <a:prstGeom prst="rect">
-            <a:avLst/>
-          </a:prstGeom>
-          <a:solidFill>
-            <a:srgbClr val="4F46E5"/>
+            <a:ext cx="45720" cy="1444751"/>
+          </a:xfrm>
+          <a:prstGeom prst="rect">
+            <a:avLst/>
+          </a:prstGeom>
+          <a:solidFill>
+            <a:srgbClr val="3730A3"/>
           </a:solidFill>
           <a:ln>
             <a:noFill/>
@@ -40813,8 +41071,8 @@
         </p:nvSpPr>
         <p:spPr>
           <a:xfrm>
-            <a:off x="512064" y="1737360"/>
-            <a:ext cx="3991356" cy="3113532"/>
+            <a:off x="502920" y="1737360"/>
+            <a:ext cx="4000500" cy="1444751"/>
           </a:xfrm>
           <a:prstGeom prst="roundRect">
             <a:avLst>
@@ -40822,11 +41080,11 @@
             </a:avLst>
           </a:prstGeom>
           <a:solidFill>
-            <a:srgbClr val="FFF7ED"/>
+            <a:srgbClr val="F8FAFC"/>
           </a:solidFill>
           <a:ln w="6350">
             <a:solidFill>
-              <a:srgbClr val="4F46E5"/>
+              <a:srgbClr val="E2E8F0"/>
             </a:solidFill>
           </a:ln>
           <a:effectLst/>
@@ -40861,8 +41119,8 @@
         </p:nvSpPr>
         <p:spPr>
           <a:xfrm>
-            <a:off x="621792" y="1810512"/>
-            <a:ext cx="3771900" cy="320040"/>
+            <a:off x="585216" y="1792224"/>
+            <a:ext cx="3845052" cy="320040"/>
           </a:xfrm>
           <a:prstGeom prst="rect">
             <a:avLst/>
@@ -40889,7 +41147,7 @@
                 <a:cs typeface="Sylfaen"/>
                 <a:latin typeface="Sylfaen"/>
               </a:rPr>
-              <a:t>⚠️ 3 ძირითადი წესი:</a:t>
+              <a:t>📈 P&amp;L (მოგება-ზარალი)</a:t>
             </a:r>
           </a:p>
         </p:txBody>
@@ -40902,8 +41160,8 @@
         </p:nvSpPr>
         <p:spPr>
           <a:xfrm>
-            <a:off x="621792" y="2203704"/>
-            <a:ext cx="3771900" cy="2542032"/>
+            <a:off x="585216" y="2185416"/>
+            <a:ext cx="3845052" cy="713232"/>
           </a:xfrm>
           <a:prstGeom prst="rect">
             <a:avLst/>
@@ -40916,24 +41174,13 @@
           </a:bodyPr>
           <a:lstStyle/>
           <a:p>
-            <a:pPr algn="l">
-              <a:spcAft>
-                <a:spcPts val="300"/>
-              </a:spcAft>
-            </a:pPr>
-            <a:r>
-              <a:rPr sz="1300" b="1">
-                <a:solidFill>
-                  <a:srgbClr val="3730A3"/>
-                </a:solidFill>
-                <a:ea typeface="Sylfaen"/>
-                <a:cs typeface="Sylfaen"/>
-                <a:latin typeface="Sylfaen"/>
-              </a:rPr>
-              <a:t>▸  </a:t>
-            </a:r>
-            <a:r>
-              <a:rPr sz="1300">
+            <a:pPr>
+              <a:spcAft>
+                <a:spcPts val="400"/>
+              </a:spcAft>
+            </a:pPr>
+            <a:r>
+              <a:rPr sz="1300" b="0" i="0">
                 <a:solidFill>
                   <a:srgbClr val="0F172A"/>
                 </a:solidFill>
@@ -40941,65 +41188,7 @@
                 <a:cs typeface="Sylfaen"/>
                 <a:latin typeface="Sylfaen"/>
               </a:rPr>
-              <a:t>იყავით კონკრეტული: უპასუხეთ პირდაპირ ციფრებით, მოერიდეთ ზოგად ფილოსოფიას;</a:t>
-            </a:r>
-          </a:p>
-          <a:p>
-            <a:pPr algn="l">
-              <a:spcAft>
-                <a:spcPts val="300"/>
-              </a:spcAft>
-            </a:pPr>
-            <a:r>
-              <a:rPr sz="1300" b="1">
-                <a:solidFill>
-                  <a:srgbClr val="3730A3"/>
-                </a:solidFill>
-                <a:ea typeface="Sylfaen"/>
-                <a:cs typeface="Sylfaen"/>
-                <a:latin typeface="Sylfaen"/>
-              </a:rPr>
-              <a:t>▸  </a:t>
-            </a:r>
-            <a:r>
-              <a:rPr sz="1300">
-                <a:solidFill>
-                  <a:srgbClr val="0F172A"/>
-                </a:solidFill>
-                <a:ea typeface="Sylfaen"/>
-                <a:cs typeface="Sylfaen"/>
-                <a:latin typeface="Sylfaen"/>
-              </a:rPr>
-              <a:t>არ იკამათოთ: მიიღეთ ჟიურის შენიშვნა, როგორც კონსტრუქციული რჩევა;</a:t>
-            </a:r>
-          </a:p>
-          <a:p>
-            <a:pPr algn="l">
-              <a:spcAft>
-                <a:spcPts val="300"/>
-              </a:spcAft>
-            </a:pPr>
-            <a:r>
-              <a:rPr sz="1300" b="1">
-                <a:solidFill>
-                  <a:srgbClr val="3730A3"/>
-                </a:solidFill>
-                <a:ea typeface="Sylfaen"/>
-                <a:cs typeface="Sylfaen"/>
-                <a:latin typeface="Sylfaen"/>
-              </a:rPr>
-              <a:t>▸  </a:t>
-            </a:r>
-            <a:r>
-              <a:rPr sz="1300">
-                <a:solidFill>
-                  <a:srgbClr val="0F172A"/>
-                </a:solidFill>
-                <a:ea typeface="Sylfaen"/>
-                <a:cs typeface="Sylfaen"/>
-                <a:latin typeface="Sylfaen"/>
-              </a:rPr>
-              <a:t>აღიარეთ თუ არ იცით: „ამ ეტაპზე ზუსტი პასუხი არ გვაქვს, მაგრამ შევამოწმებთ ექსპერიმენტით.“</a:t>
+              <a:t>პროგნოზი 3 წელზე: შემოსავლები, საოპერაციო ხარჯები (OPEX), სერვერები, მარკეტინგი და წმინდა მოგება.</a:t>
             </a:r>
           </a:p>
         </p:txBody>
@@ -41013,7 +41202,7 @@
         <p:spPr>
           <a:xfrm>
             <a:off x="4640580" y="1737360"/>
-            <a:ext cx="54864" cy="3113532"/>
+            <a:ext cx="45720" cy="1444751"/>
           </a:xfrm>
           <a:prstGeom prst="rect">
             <a:avLst/>
@@ -41056,8 +41245,8 @@
         </p:nvSpPr>
         <p:spPr>
           <a:xfrm>
-            <a:off x="4695444" y="1737360"/>
-            <a:ext cx="3991356" cy="3113532"/>
+            <a:off x="4686300" y="1737360"/>
+            <a:ext cx="4000500" cy="1444751"/>
           </a:xfrm>
           <a:prstGeom prst="roundRect">
             <a:avLst>
@@ -41104,8 +41293,8 @@
         </p:nvSpPr>
         <p:spPr>
           <a:xfrm>
-            <a:off x="4805172" y="1810512"/>
-            <a:ext cx="3771900" cy="320040"/>
+            <a:off x="4768596" y="1792224"/>
+            <a:ext cx="3845052" cy="320040"/>
           </a:xfrm>
           <a:prstGeom prst="rect">
             <a:avLst/>
@@ -41132,7 +41321,7 @@
                 <a:cs typeface="Sylfaen"/>
                 <a:latin typeface="Sylfaen"/>
               </a:rPr>
-              <a:t>კითხვების ტიპები:</a:t>
+              <a:t>💰 CAC (მოზიდვის ხარჯი)</a:t>
             </a:r>
           </a:p>
         </p:txBody>
@@ -41145,8 +41334,8 @@
         </p:nvSpPr>
         <p:spPr>
           <a:xfrm>
-            <a:off x="4805172" y="2203704"/>
-            <a:ext cx="3771900" cy="2267712"/>
+            <a:off x="4768596" y="2185416"/>
+            <a:ext cx="3845052" cy="475488"/>
           </a:xfrm>
           <a:prstGeom prst="rect">
             <a:avLst/>
@@ -41159,24 +41348,13 @@
           </a:bodyPr>
           <a:lstStyle/>
           <a:p>
-            <a:pPr algn="l">
-              <a:spcAft>
-                <a:spcPts val="300"/>
-              </a:spcAft>
-            </a:pPr>
-            <a:r>
-              <a:rPr sz="1300" b="1">
-                <a:solidFill>
-                  <a:srgbClr val="3730A3"/>
-                </a:solidFill>
-                <a:ea typeface="Sylfaen"/>
-                <a:cs typeface="Sylfaen"/>
-                <a:latin typeface="Sylfaen"/>
-              </a:rPr>
-              <a:t>▸  </a:t>
-            </a:r>
-            <a:r>
-              <a:rPr sz="1300">
+            <a:pPr>
+              <a:spcAft>
+                <a:spcPts val="400"/>
+              </a:spcAft>
+            </a:pPr>
+            <a:r>
+              <a:rPr sz="1300" b="0" i="0">
                 <a:solidFill>
                   <a:srgbClr val="0F172A"/>
                 </a:solidFill>
@@ -41184,28 +41362,132 @@
                 <a:cs typeface="Sylfaen"/>
                 <a:latin typeface="Sylfaen"/>
               </a:rPr>
-              <a:t>„რით განსხვავდებით კონკურენტებისგან?“ (აჩვენეთ Feature Matrix);</a:t>
-            </a:r>
-          </a:p>
-          <a:p>
-            <a:pPr algn="l">
-              <a:spcAft>
-                <a:spcPts val="300"/>
-              </a:spcAft>
-            </a:pPr>
-            <a:r>
-              <a:rPr sz="1300" b="1">
-                <a:solidFill>
-                  <a:srgbClr val="3730A3"/>
-                </a:solidFill>
-                <a:ea typeface="Sylfaen"/>
-                <a:cs typeface="Sylfaen"/>
-                <a:latin typeface="Sylfaen"/>
-              </a:rPr>
-              <a:t>▸  </a:t>
-            </a:r>
-            <a:r>
-              <a:rPr sz="1300">
+              <a:t>რამდენი ლარი იხარჯება 1 ახალი კლიენტის მოსაზიდად (მაგ. რეკლამა, გაყიდვები).</a:t>
+            </a:r>
+          </a:p>
+        </p:txBody>
+      </p:sp>
+      <p:sp>
+        <p:nvSpPr>
+          <p:cNvPr id="17" name="Rectangle 16"/>
+          <p:cNvSpPr/>
+          <p:nvPr/>
+        </p:nvSpPr>
+        <p:spPr>
+          <a:xfrm>
+            <a:off x="457200" y="3319272"/>
+            <a:ext cx="45720" cy="1444751"/>
+          </a:xfrm>
+          <a:prstGeom prst="rect">
+            <a:avLst/>
+          </a:prstGeom>
+          <a:solidFill>
+            <a:srgbClr val="3730A3"/>
+          </a:solidFill>
+          <a:ln>
+            <a:noFill/>
+          </a:ln>
+          <a:effectLst/>
+        </p:spPr>
+        <p:style>
+          <a:lnRef idx="1">
+            <a:schemeClr val="accent1"/>
+          </a:lnRef>
+          <a:fillRef idx="3">
+            <a:schemeClr val="accent1"/>
+          </a:fillRef>
+          <a:effectRef idx="2">
+            <a:schemeClr val="accent1"/>
+          </a:effectRef>
+          <a:fontRef idx="minor">
+            <a:schemeClr val="lt1"/>
+          </a:fontRef>
+        </p:style>
+        <p:txBody>
+          <a:bodyPr rtlCol="0" anchor="ctr"/>
+          <a:lstStyle/>
+          <a:p>
+            <a:pPr algn="ctr"/>
+          </a:p>
+        </p:txBody>
+      </p:sp>
+      <p:sp>
+        <p:nvSpPr>
+          <p:cNvPr id="18" name="Rounded Rectangle 17"/>
+          <p:cNvSpPr/>
+          <p:nvPr/>
+        </p:nvSpPr>
+        <p:spPr>
+          <a:xfrm>
+            <a:off x="502920" y="3319272"/>
+            <a:ext cx="4000500" cy="1444751"/>
+          </a:xfrm>
+          <a:prstGeom prst="roundRect">
+            <a:avLst>
+              <a:gd name="adj" fmla="val 4000"/>
+            </a:avLst>
+          </a:prstGeom>
+          <a:solidFill>
+            <a:srgbClr val="F8FAFC"/>
+          </a:solidFill>
+          <a:ln w="6350">
+            <a:solidFill>
+              <a:srgbClr val="E2E8F0"/>
+            </a:solidFill>
+          </a:ln>
+          <a:effectLst/>
+        </p:spPr>
+        <p:style>
+          <a:lnRef idx="1">
+            <a:schemeClr val="accent1"/>
+          </a:lnRef>
+          <a:fillRef idx="3">
+            <a:schemeClr val="accent1"/>
+          </a:fillRef>
+          <a:effectRef idx="2">
+            <a:schemeClr val="accent1"/>
+          </a:effectRef>
+          <a:fontRef idx="minor">
+            <a:schemeClr val="lt1"/>
+          </a:fontRef>
+        </p:style>
+        <p:txBody>
+          <a:bodyPr rtlCol="0" anchor="ctr"/>
+          <a:lstStyle/>
+          <a:p>
+            <a:pPr algn="ctr"/>
+          </a:p>
+        </p:txBody>
+      </p:sp>
+      <p:sp>
+        <p:nvSpPr>
+          <p:cNvPr id="19" name="TextBox 18"/>
+          <p:cNvSpPr txBox="1"/>
+          <p:nvPr/>
+        </p:nvSpPr>
+        <p:spPr>
+          <a:xfrm>
+            <a:off x="585216" y="3374136"/>
+            <a:ext cx="3845052" cy="320040"/>
+          </a:xfrm>
+          <a:prstGeom prst="rect">
+            <a:avLst/>
+          </a:prstGeom>
+          <a:noFill/>
+        </p:spPr>
+        <p:txBody>
+          <a:bodyPr wrap="square" anchor="t" lIns="54864" rIns="54864" tIns="54864" bIns="54864">
+            <a:spAutoFit/>
+          </a:bodyPr>
+          <a:lstStyle/>
+          <a:p>
+            <a:pPr>
+              <a:spcAft>
+                <a:spcPts val="400"/>
+              </a:spcAft>
+            </a:pPr>
+            <a:r>
+              <a:rPr sz="1400" b="1" i="0">
                 <a:solidFill>
                   <a:srgbClr val="0F172A"/>
                 </a:solidFill>
@@ -41213,28 +41495,40 @@
                 <a:cs typeface="Sylfaen"/>
                 <a:latin typeface="Sylfaen"/>
               </a:rPr>
-              <a:t>„რაში დახარჯავთ 25,000 ლარს?“ (აჩვენეთ გაწერილი ხარჯები);</a:t>
-            </a:r>
-          </a:p>
-          <a:p>
-            <a:pPr algn="l">
-              <a:spcAft>
-                <a:spcPts val="300"/>
-              </a:spcAft>
-            </a:pPr>
-            <a:r>
-              <a:rPr sz="1300" b="1">
-                <a:solidFill>
-                  <a:srgbClr val="3730A3"/>
-                </a:solidFill>
-                <a:ea typeface="Sylfaen"/>
-                <a:cs typeface="Sylfaen"/>
-                <a:latin typeface="Sylfaen"/>
-              </a:rPr>
-              <a:t>▸  </a:t>
-            </a:r>
-            <a:r>
-              <a:rPr sz="1300">
+              <a:t>💎 LTV (მომხმარებლის ღირებულება)</a:t>
+            </a:r>
+          </a:p>
+        </p:txBody>
+      </p:sp>
+      <p:sp>
+        <p:nvSpPr>
+          <p:cNvPr id="20" name="TextBox 19"/>
+          <p:cNvSpPr txBox="1"/>
+          <p:nvPr/>
+        </p:nvSpPr>
+        <p:spPr>
+          <a:xfrm>
+            <a:off x="585216" y="3767328"/>
+            <a:ext cx="3845052" cy="713232"/>
+          </a:xfrm>
+          <a:prstGeom prst="rect">
+            <a:avLst/>
+          </a:prstGeom>
+          <a:noFill/>
+        </p:spPr>
+        <p:txBody>
+          <a:bodyPr wrap="square" anchor="t" lIns="54864" rIns="54864" tIns="54864" bIns="54864">
+            <a:spAutoFit/>
+          </a:bodyPr>
+          <a:lstStyle/>
+          <a:p>
+            <a:pPr>
+              <a:spcAft>
+                <a:spcPts val="400"/>
+              </a:spcAft>
+            </a:pPr>
+            <a:r>
+              <a:rPr sz="1300" b="0" i="0">
                 <a:solidFill>
                   <a:srgbClr val="0F172A"/>
                 </a:solidFill>
@@ -41242,14 +41536,14 @@
                 <a:cs typeface="Sylfaen"/>
                 <a:latin typeface="Sylfaen"/>
               </a:rPr>
-              <a:t>„როგორ მოიზიდავთ მომხმარებლებს?“ (აჩვენეთ Channels &amp; CAC).</a:t>
-            </a:r>
-          </a:p>
-        </p:txBody>
-      </p:sp>
-      <p:sp>
-        <p:nvSpPr>
-          <p:cNvPr id="17" name="Rectangle 16"/>
+              <a:t>რა ჯამურ შემოსავალს მოიტანს მომხმარებელი ბრენდთან ურთიერთობისას (ხელმოწერის საშუალო დრო × თვიური საფასური).</a:t>
+            </a:r>
+          </a:p>
+        </p:txBody>
+      </p:sp>
+      <p:sp>
+        <p:nvSpPr>
+          <p:cNvPr id="21" name="Rectangle 20"/>
           <p:cNvSpPr/>
           <p:nvPr/>
         </p:nvSpPr>
@@ -41293,7 +41587,7 @@
       </p:sp>
       <p:sp>
         <p:nvSpPr>
-          <p:cNvPr id="18" name="TextBox 17"/>
+          <p:cNvPr id="22" name="TextBox 21"/>
           <p:cNvSpPr txBox="1"/>
           <p:nvPr/>
         </p:nvSpPr>
@@ -41513,7 +41807,7 @@
                 <a:cs typeface="Sylfaen"/>
                 <a:latin typeface="Sylfaen"/>
               </a:rPr>
-              <a:t>Homework Part B &amp; Launch Sprint</a:t>
+              <a:t>GITA ჟიურისთან Q&amp;A სესიის ტაქტიკა</a:t>
             </a:r>
           </a:p>
         </p:txBody>
@@ -41614,7 +41908,7 @@
                 <a:cs typeface="Sylfaen"/>
                 <a:latin typeface="Sylfaen"/>
               </a:rPr>
-              <a:t>47 / 48</a:t>
+              <a:t>47 / 49</a:t>
             </a:r>
           </a:p>
         </p:txBody>
@@ -41655,7 +41949,7 @@
                 <a:cs typeface="Sylfaen"/>
                 <a:latin typeface="Sylfaen"/>
               </a:rPr>
-              <a:t>დავალება Demo Day-სთვის (1 კვირიანი Sprint):</a:t>
+              <a:t>როგორ ვუპასუხოთ ჟიურის რთულ კითხვებს 5-წუთიანი პრეზენტაციის შემდეგ?</a:t>
             </a:r>
           </a:p>
         </p:txBody>
@@ -41669,13 +41963,13 @@
         <p:spPr>
           <a:xfrm>
             <a:off x="457200" y="1737360"/>
-            <a:ext cx="54864" cy="2459736"/>
-          </a:xfrm>
-          <a:prstGeom prst="rect">
-            <a:avLst/>
-          </a:prstGeom>
-          <a:solidFill>
-            <a:srgbClr val="3730A3"/>
+            <a:ext cx="54864" cy="3113532"/>
+          </a:xfrm>
+          <a:prstGeom prst="rect">
+            <a:avLst/>
+          </a:prstGeom>
+          <a:solidFill>
+            <a:srgbClr val="4F46E5"/>
           </a:solidFill>
           <a:ln>
             <a:noFill/>
@@ -41713,7 +42007,7 @@
         <p:spPr>
           <a:xfrm>
             <a:off x="512064" y="1737360"/>
-            <a:ext cx="8174736" cy="2459736"/>
+            <a:ext cx="3991356" cy="3113532"/>
           </a:xfrm>
           <a:prstGeom prst="roundRect">
             <a:avLst>
@@ -41721,9 +42015,252 @@
             </a:avLst>
           </a:prstGeom>
           <a:solidFill>
+            <a:srgbClr val="FFF7ED"/>
+          </a:solidFill>
+          <a:ln w="6350">
+            <a:solidFill>
+              <a:srgbClr val="4F46E5"/>
+            </a:solidFill>
+          </a:ln>
+          <a:effectLst/>
+        </p:spPr>
+        <p:style>
+          <a:lnRef idx="1">
+            <a:schemeClr val="accent1"/>
+          </a:lnRef>
+          <a:fillRef idx="3">
+            <a:schemeClr val="accent1"/>
+          </a:fillRef>
+          <a:effectRef idx="2">
+            <a:schemeClr val="accent1"/>
+          </a:effectRef>
+          <a:fontRef idx="minor">
+            <a:schemeClr val="lt1"/>
+          </a:fontRef>
+        </p:style>
+        <p:txBody>
+          <a:bodyPr rtlCol="0" anchor="ctr"/>
+          <a:lstStyle/>
+          <a:p>
+            <a:pPr algn="ctr"/>
+          </a:p>
+        </p:txBody>
+      </p:sp>
+      <p:sp>
+        <p:nvSpPr>
+          <p:cNvPr id="11" name="TextBox 10"/>
+          <p:cNvSpPr txBox="1"/>
+          <p:nvPr/>
+        </p:nvSpPr>
+        <p:spPr>
+          <a:xfrm>
+            <a:off x="621792" y="1810512"/>
+            <a:ext cx="3771900" cy="320040"/>
+          </a:xfrm>
+          <a:prstGeom prst="rect">
+            <a:avLst/>
+          </a:prstGeom>
+          <a:noFill/>
+        </p:spPr>
+        <p:txBody>
+          <a:bodyPr wrap="square" anchor="t" lIns="54864" rIns="54864" tIns="54864" bIns="54864">
+            <a:spAutoFit/>
+          </a:bodyPr>
+          <a:lstStyle/>
+          <a:p>
+            <a:pPr>
+              <a:spcAft>
+                <a:spcPts val="400"/>
+              </a:spcAft>
+            </a:pPr>
+            <a:r>
+              <a:rPr sz="1400" b="1" i="0">
+                <a:solidFill>
+                  <a:srgbClr val="0F172A"/>
+                </a:solidFill>
+                <a:ea typeface="Sylfaen"/>
+                <a:cs typeface="Sylfaen"/>
+                <a:latin typeface="Sylfaen"/>
+              </a:rPr>
+              <a:t>⚠️ 3 ძირითადი წესი:</a:t>
+            </a:r>
+          </a:p>
+        </p:txBody>
+      </p:sp>
+      <p:sp>
+        <p:nvSpPr>
+          <p:cNvPr id="12" name="TextBox 11"/>
+          <p:cNvSpPr txBox="1"/>
+          <p:nvPr/>
+        </p:nvSpPr>
+        <p:spPr>
+          <a:xfrm>
+            <a:off x="621792" y="2203704"/>
+            <a:ext cx="3771900" cy="2542032"/>
+          </a:xfrm>
+          <a:prstGeom prst="rect">
+            <a:avLst/>
+          </a:prstGeom>
+          <a:noFill/>
+        </p:spPr>
+        <p:txBody>
+          <a:bodyPr wrap="square" anchor="t" lIns="54864" rIns="54864" tIns="54864" bIns="54864">
+            <a:spAutoFit/>
+          </a:bodyPr>
+          <a:lstStyle/>
+          <a:p>
+            <a:pPr algn="l">
+              <a:spcAft>
+                <a:spcPts val="300"/>
+              </a:spcAft>
+            </a:pPr>
+            <a:r>
+              <a:rPr sz="1300" b="1">
+                <a:solidFill>
+                  <a:srgbClr val="3730A3"/>
+                </a:solidFill>
+                <a:ea typeface="Sylfaen"/>
+                <a:cs typeface="Sylfaen"/>
+                <a:latin typeface="Sylfaen"/>
+              </a:rPr>
+              <a:t>▸  </a:t>
+            </a:r>
+            <a:r>
+              <a:rPr sz="1300">
+                <a:solidFill>
+                  <a:srgbClr val="0F172A"/>
+                </a:solidFill>
+                <a:ea typeface="Sylfaen"/>
+                <a:cs typeface="Sylfaen"/>
+                <a:latin typeface="Sylfaen"/>
+              </a:rPr>
+              <a:t>იყავით კონკრეტული: უპასუხეთ პირდაპირ ციფრებით, მოერიდეთ ზოგად ფილოსოფიას;</a:t>
+            </a:r>
+          </a:p>
+          <a:p>
+            <a:pPr algn="l">
+              <a:spcAft>
+                <a:spcPts val="300"/>
+              </a:spcAft>
+            </a:pPr>
+            <a:r>
+              <a:rPr sz="1300" b="1">
+                <a:solidFill>
+                  <a:srgbClr val="3730A3"/>
+                </a:solidFill>
+                <a:ea typeface="Sylfaen"/>
+                <a:cs typeface="Sylfaen"/>
+                <a:latin typeface="Sylfaen"/>
+              </a:rPr>
+              <a:t>▸  </a:t>
+            </a:r>
+            <a:r>
+              <a:rPr sz="1300">
+                <a:solidFill>
+                  <a:srgbClr val="0F172A"/>
+                </a:solidFill>
+                <a:ea typeface="Sylfaen"/>
+                <a:cs typeface="Sylfaen"/>
+                <a:latin typeface="Sylfaen"/>
+              </a:rPr>
+              <a:t>არ იკამათოთ: მიიღეთ ჟიურის შენიშვნა, როგორც კონსტრუქციული რჩევა;</a:t>
+            </a:r>
+          </a:p>
+          <a:p>
+            <a:pPr algn="l">
+              <a:spcAft>
+                <a:spcPts val="300"/>
+              </a:spcAft>
+            </a:pPr>
+            <a:r>
+              <a:rPr sz="1300" b="1">
+                <a:solidFill>
+                  <a:srgbClr val="3730A3"/>
+                </a:solidFill>
+                <a:ea typeface="Sylfaen"/>
+                <a:cs typeface="Sylfaen"/>
+                <a:latin typeface="Sylfaen"/>
+              </a:rPr>
+              <a:t>▸  </a:t>
+            </a:r>
+            <a:r>
+              <a:rPr sz="1300">
+                <a:solidFill>
+                  <a:srgbClr val="0F172A"/>
+                </a:solidFill>
+                <a:ea typeface="Sylfaen"/>
+                <a:cs typeface="Sylfaen"/>
+                <a:latin typeface="Sylfaen"/>
+              </a:rPr>
+              <a:t>აღიარეთ თუ არ იცით: „ამ ეტაპზე ზუსტი პასუხი არ გვაქვს, მაგრამ შევამოწმებთ ექსპერიმენტით.“</a:t>
+            </a:r>
+          </a:p>
+        </p:txBody>
+      </p:sp>
+      <p:sp>
+        <p:nvSpPr>
+          <p:cNvPr id="13" name="Rectangle 12"/>
+          <p:cNvSpPr/>
+          <p:nvPr/>
+        </p:nvSpPr>
+        <p:spPr>
+          <a:xfrm>
+            <a:off x="4640580" y="1737360"/>
+            <a:ext cx="54864" cy="3113532"/>
+          </a:xfrm>
+          <a:prstGeom prst="rect">
+            <a:avLst/>
+          </a:prstGeom>
+          <a:solidFill>
+            <a:srgbClr val="3730A3"/>
+          </a:solidFill>
+          <a:ln>
+            <a:noFill/>
+          </a:ln>
+          <a:effectLst/>
+        </p:spPr>
+        <p:style>
+          <a:lnRef idx="1">
+            <a:schemeClr val="accent1"/>
+          </a:lnRef>
+          <a:fillRef idx="3">
+            <a:schemeClr val="accent1"/>
+          </a:fillRef>
+          <a:effectRef idx="2">
+            <a:schemeClr val="accent1"/>
+          </a:effectRef>
+          <a:fontRef idx="minor">
+            <a:schemeClr val="lt1"/>
+          </a:fontRef>
+        </p:style>
+        <p:txBody>
+          <a:bodyPr rtlCol="0" anchor="ctr"/>
+          <a:lstStyle/>
+          <a:p>
+            <a:pPr algn="ctr"/>
+          </a:p>
+        </p:txBody>
+      </p:sp>
+      <p:sp>
+        <p:nvSpPr>
+          <p:cNvPr id="14" name="Rounded Rectangle 13"/>
+          <p:cNvSpPr/>
+          <p:nvPr/>
+        </p:nvSpPr>
+        <p:spPr>
+          <a:xfrm>
+            <a:off x="4695444" y="1737360"/>
+            <a:ext cx="3991356" cy="3113532"/>
+          </a:xfrm>
+          <a:prstGeom prst="roundRect">
+            <a:avLst>
+              <a:gd name="adj" fmla="val 4000"/>
+            </a:avLst>
+          </a:prstGeom>
+          <a:solidFill>
             <a:srgbClr val="F8FAFC"/>
           </a:solidFill>
-          <a:ln w="9525">
+          <a:ln w="6350">
             <a:solidFill>
               <a:srgbClr val="E2E8F0"/>
             </a:solidFill>
@@ -41754,14 +42291,14 @@
       </p:sp>
       <p:sp>
         <p:nvSpPr>
-          <p:cNvPr id="11" name="TextBox 10"/>
+          <p:cNvPr id="15" name="TextBox 14"/>
           <p:cNvSpPr txBox="1"/>
           <p:nvPr/>
         </p:nvSpPr>
         <p:spPr>
           <a:xfrm>
-            <a:off x="621792" y="1810512"/>
-            <a:ext cx="7955279" cy="320040"/>
+            <a:off x="4805172" y="1810512"/>
+            <a:ext cx="3771900" cy="320040"/>
           </a:xfrm>
           <a:prstGeom prst="rect">
             <a:avLst/>
@@ -41788,21 +42325,21 @@
                 <a:cs typeface="Sylfaen"/>
                 <a:latin typeface="Sylfaen"/>
               </a:rPr>
-              <a:t>📋 Launch Checklist:</a:t>
-            </a:r>
-          </a:p>
-        </p:txBody>
-      </p:sp>
-      <p:sp>
-        <p:nvSpPr>
-          <p:cNvPr id="12" name="TextBox 11"/>
+              <a:t>კითხვების ტიპები:</a:t>
+            </a:r>
+          </a:p>
+        </p:txBody>
+      </p:sp>
+      <p:sp>
+        <p:nvSpPr>
+          <p:cNvPr id="16" name="TextBox 15"/>
           <p:cNvSpPr txBox="1"/>
           <p:nvPr/>
         </p:nvSpPr>
         <p:spPr>
           <a:xfrm>
-            <a:off x="621792" y="2203704"/>
-            <a:ext cx="7955279" cy="1865376"/>
+            <a:off x="4805172" y="2203704"/>
+            <a:ext cx="3771900" cy="2267712"/>
           </a:xfrm>
           <a:prstGeom prst="rect">
             <a:avLst/>
@@ -41840,7 +42377,7 @@
                 <a:cs typeface="Sylfaen"/>
                 <a:latin typeface="Sylfaen"/>
               </a:rPr>
-              <a:t>[ ] Lovable საიტი გაშვებულია საკუთარ დომენზე;</a:t>
+              <a:t>„რით განსხვავდებით კონკურენტებისგან?“ (აჩვენეთ Feature Matrix);</a:t>
             </a:r>
           </a:p>
           <a:p>
@@ -41869,7 +42406,7 @@
                 <a:cs typeface="Sylfaen"/>
                 <a:latin typeface="Sylfaen"/>
               </a:rPr>
-              <a:t>[ ] Make.com სცენარი აქტიურია;</a:t>
+              <a:t>„რაში დახარჯავთ 25,000 ლარს?“ (აჩვენეთ გაწერილი ხარჯები);</a:t>
             </a:r>
           </a:p>
           <a:p>
@@ -41898,43 +42435,14 @@
                 <a:cs typeface="Sylfaen"/>
                 <a:latin typeface="Sylfaen"/>
               </a:rPr>
-              <a:t>[ ] მოზიდულია მინიმუმ 15 რეალური Leads/Email Google Sheets-ში;</a:t>
-            </a:r>
-          </a:p>
-          <a:p>
-            <a:pPr algn="l">
-              <a:spcAft>
-                <a:spcPts val="300"/>
-              </a:spcAft>
-            </a:pPr>
-            <a:r>
-              <a:rPr sz="1300" b="1">
-                <a:solidFill>
-                  <a:srgbClr val="3730A3"/>
-                </a:solidFill>
-                <a:ea typeface="Sylfaen"/>
-                <a:cs typeface="Sylfaen"/>
-                <a:latin typeface="Sylfaen"/>
-              </a:rPr>
-              <a:t>▸  </a:t>
-            </a:r>
-            <a:r>
-              <a:rPr sz="1300">
-                <a:solidFill>
-                  <a:srgbClr val="0F172A"/>
-                </a:solidFill>
-                <a:ea typeface="Sylfaen"/>
-                <a:cs typeface="Sylfaen"/>
-                <a:latin typeface="Sylfaen"/>
-              </a:rPr>
-              <a:t>[ ] პრეზენტაცია (Gamma Pitch Deck) დასრულებულია.</a:t>
-            </a:r>
-          </a:p>
-        </p:txBody>
-      </p:sp>
-      <p:sp>
-        <p:nvSpPr>
-          <p:cNvPr id="13" name="Rectangle 12"/>
+              <a:t>„როგორ მოიზიდავთ მომხმარებლებს?“ (აჩვენეთ Channels &amp; CAC).</a:t>
+            </a:r>
+          </a:p>
+        </p:txBody>
+      </p:sp>
+      <p:sp>
+        <p:nvSpPr>
+          <p:cNvPr id="17" name="Rectangle 16"/>
           <p:cNvSpPr/>
           <p:nvPr/>
         </p:nvSpPr>
@@ -41978,7 +42486,7 @@
       </p:sp>
       <p:sp>
         <p:nvSpPr>
-          <p:cNvPr id="14" name="TextBox 13"/>
+          <p:cNvPr id="18" name="TextBox 17"/>
           <p:cNvSpPr txBox="1"/>
           <p:nvPr/>
         </p:nvSpPr>
@@ -42198,7 +42706,7 @@
                 <a:cs typeface="Sylfaen"/>
                 <a:latin typeface="Sylfaen"/>
               </a:rPr>
-              <a:t>Course Wrap-up &amp; Certification</a:t>
+              <a:t>Homework Part B &amp; Launch Sprint</a:t>
             </a:r>
           </a:p>
         </p:txBody>
@@ -42299,7 +42807,692 @@
                 <a:cs typeface="Sylfaen"/>
                 <a:latin typeface="Sylfaen"/>
               </a:rPr>
-              <a:t>48 / 48</a:t>
+              <a:t>48 / 49</a:t>
+            </a:r>
+          </a:p>
+        </p:txBody>
+      </p:sp>
+      <p:sp>
+        <p:nvSpPr>
+          <p:cNvPr id="8" name="TextBox 7"/>
+          <p:cNvSpPr txBox="1"/>
+          <p:nvPr/>
+        </p:nvSpPr>
+        <p:spPr>
+          <a:xfrm>
+            <a:off x="457200" y="1188720"/>
+            <a:ext cx="8229600" cy="475488"/>
+          </a:xfrm>
+          <a:prstGeom prst="rect">
+            <a:avLst/>
+          </a:prstGeom>
+          <a:noFill/>
+        </p:spPr>
+        <p:txBody>
+          <a:bodyPr wrap="square" anchor="t" lIns="54864" rIns="54864" tIns="54864" bIns="54864">
+            <a:spAutoFit/>
+          </a:bodyPr>
+          <a:lstStyle/>
+          <a:p>
+            <a:pPr>
+              <a:spcAft>
+                <a:spcPts val="400"/>
+              </a:spcAft>
+            </a:pPr>
+            <a:r>
+              <a:rPr sz="1300" b="0" i="0">
+                <a:solidFill>
+                  <a:srgbClr val="0F172A"/>
+                </a:solidFill>
+                <a:ea typeface="Sylfaen"/>
+                <a:cs typeface="Sylfaen"/>
+                <a:latin typeface="Sylfaen"/>
+              </a:rPr>
+              <a:t>დავალება Demo Day-სთვის (1 კვირიანი Sprint):</a:t>
+            </a:r>
+          </a:p>
+        </p:txBody>
+      </p:sp>
+      <p:sp>
+        <p:nvSpPr>
+          <p:cNvPr id="9" name="Rectangle 8"/>
+          <p:cNvSpPr/>
+          <p:nvPr/>
+        </p:nvSpPr>
+        <p:spPr>
+          <a:xfrm>
+            <a:off x="457200" y="1737360"/>
+            <a:ext cx="54864" cy="2459736"/>
+          </a:xfrm>
+          <a:prstGeom prst="rect">
+            <a:avLst/>
+          </a:prstGeom>
+          <a:solidFill>
+            <a:srgbClr val="3730A3"/>
+          </a:solidFill>
+          <a:ln>
+            <a:noFill/>
+          </a:ln>
+          <a:effectLst/>
+        </p:spPr>
+        <p:style>
+          <a:lnRef idx="1">
+            <a:schemeClr val="accent1"/>
+          </a:lnRef>
+          <a:fillRef idx="3">
+            <a:schemeClr val="accent1"/>
+          </a:fillRef>
+          <a:effectRef idx="2">
+            <a:schemeClr val="accent1"/>
+          </a:effectRef>
+          <a:fontRef idx="minor">
+            <a:schemeClr val="lt1"/>
+          </a:fontRef>
+        </p:style>
+        <p:txBody>
+          <a:bodyPr rtlCol="0" anchor="ctr"/>
+          <a:lstStyle/>
+          <a:p>
+            <a:pPr algn="ctr"/>
+          </a:p>
+        </p:txBody>
+      </p:sp>
+      <p:sp>
+        <p:nvSpPr>
+          <p:cNvPr id="10" name="Rounded Rectangle 9"/>
+          <p:cNvSpPr/>
+          <p:nvPr/>
+        </p:nvSpPr>
+        <p:spPr>
+          <a:xfrm>
+            <a:off x="512064" y="1737360"/>
+            <a:ext cx="8174736" cy="2459736"/>
+          </a:xfrm>
+          <a:prstGeom prst="roundRect">
+            <a:avLst>
+              <a:gd name="adj" fmla="val 4000"/>
+            </a:avLst>
+          </a:prstGeom>
+          <a:solidFill>
+            <a:srgbClr val="F8FAFC"/>
+          </a:solidFill>
+          <a:ln w="9525">
+            <a:solidFill>
+              <a:srgbClr val="E2E8F0"/>
+            </a:solidFill>
+          </a:ln>
+          <a:effectLst/>
+        </p:spPr>
+        <p:style>
+          <a:lnRef idx="1">
+            <a:schemeClr val="accent1"/>
+          </a:lnRef>
+          <a:fillRef idx="3">
+            <a:schemeClr val="accent1"/>
+          </a:fillRef>
+          <a:effectRef idx="2">
+            <a:schemeClr val="accent1"/>
+          </a:effectRef>
+          <a:fontRef idx="minor">
+            <a:schemeClr val="lt1"/>
+          </a:fontRef>
+        </p:style>
+        <p:txBody>
+          <a:bodyPr rtlCol="0" anchor="ctr"/>
+          <a:lstStyle/>
+          <a:p>
+            <a:pPr algn="ctr"/>
+          </a:p>
+        </p:txBody>
+      </p:sp>
+      <p:sp>
+        <p:nvSpPr>
+          <p:cNvPr id="11" name="TextBox 10"/>
+          <p:cNvSpPr txBox="1"/>
+          <p:nvPr/>
+        </p:nvSpPr>
+        <p:spPr>
+          <a:xfrm>
+            <a:off x="621792" y="1810512"/>
+            <a:ext cx="7955279" cy="320040"/>
+          </a:xfrm>
+          <a:prstGeom prst="rect">
+            <a:avLst/>
+          </a:prstGeom>
+          <a:noFill/>
+        </p:spPr>
+        <p:txBody>
+          <a:bodyPr wrap="square" anchor="t" lIns="54864" rIns="54864" tIns="54864" bIns="54864">
+            <a:spAutoFit/>
+          </a:bodyPr>
+          <a:lstStyle/>
+          <a:p>
+            <a:pPr>
+              <a:spcAft>
+                <a:spcPts val="400"/>
+              </a:spcAft>
+            </a:pPr>
+            <a:r>
+              <a:rPr sz="1400" b="1" i="0">
+                <a:solidFill>
+                  <a:srgbClr val="0F172A"/>
+                </a:solidFill>
+                <a:ea typeface="Sylfaen"/>
+                <a:cs typeface="Sylfaen"/>
+                <a:latin typeface="Sylfaen"/>
+              </a:rPr>
+              <a:t>📋 Launch Checklist:</a:t>
+            </a:r>
+          </a:p>
+        </p:txBody>
+      </p:sp>
+      <p:sp>
+        <p:nvSpPr>
+          <p:cNvPr id="12" name="TextBox 11"/>
+          <p:cNvSpPr txBox="1"/>
+          <p:nvPr/>
+        </p:nvSpPr>
+        <p:spPr>
+          <a:xfrm>
+            <a:off x="621792" y="2203704"/>
+            <a:ext cx="7955279" cy="1865376"/>
+          </a:xfrm>
+          <a:prstGeom prst="rect">
+            <a:avLst/>
+          </a:prstGeom>
+          <a:noFill/>
+        </p:spPr>
+        <p:txBody>
+          <a:bodyPr wrap="square" anchor="t" lIns="54864" rIns="54864" tIns="54864" bIns="54864">
+            <a:spAutoFit/>
+          </a:bodyPr>
+          <a:lstStyle/>
+          <a:p>
+            <a:pPr algn="l">
+              <a:spcAft>
+                <a:spcPts val="300"/>
+              </a:spcAft>
+            </a:pPr>
+            <a:r>
+              <a:rPr sz="1300" b="1">
+                <a:solidFill>
+                  <a:srgbClr val="3730A3"/>
+                </a:solidFill>
+                <a:ea typeface="Sylfaen"/>
+                <a:cs typeface="Sylfaen"/>
+                <a:latin typeface="Sylfaen"/>
+              </a:rPr>
+              <a:t>▸  </a:t>
+            </a:r>
+            <a:r>
+              <a:rPr sz="1300">
+                <a:solidFill>
+                  <a:srgbClr val="0F172A"/>
+                </a:solidFill>
+                <a:ea typeface="Sylfaen"/>
+                <a:cs typeface="Sylfaen"/>
+                <a:latin typeface="Sylfaen"/>
+              </a:rPr>
+              <a:t>[ ] Lovable საიტი გაშვებულია საკუთარ დომენზე;</a:t>
+            </a:r>
+          </a:p>
+          <a:p>
+            <a:pPr algn="l">
+              <a:spcAft>
+                <a:spcPts val="300"/>
+              </a:spcAft>
+            </a:pPr>
+            <a:r>
+              <a:rPr sz="1300" b="1">
+                <a:solidFill>
+                  <a:srgbClr val="3730A3"/>
+                </a:solidFill>
+                <a:ea typeface="Sylfaen"/>
+                <a:cs typeface="Sylfaen"/>
+                <a:latin typeface="Sylfaen"/>
+              </a:rPr>
+              <a:t>▸  </a:t>
+            </a:r>
+            <a:r>
+              <a:rPr sz="1300">
+                <a:solidFill>
+                  <a:srgbClr val="0F172A"/>
+                </a:solidFill>
+                <a:ea typeface="Sylfaen"/>
+                <a:cs typeface="Sylfaen"/>
+                <a:latin typeface="Sylfaen"/>
+              </a:rPr>
+              <a:t>[ ] Make.com სცენარი აქტიურია;</a:t>
+            </a:r>
+          </a:p>
+          <a:p>
+            <a:pPr algn="l">
+              <a:spcAft>
+                <a:spcPts val="300"/>
+              </a:spcAft>
+            </a:pPr>
+            <a:r>
+              <a:rPr sz="1300" b="1">
+                <a:solidFill>
+                  <a:srgbClr val="3730A3"/>
+                </a:solidFill>
+                <a:ea typeface="Sylfaen"/>
+                <a:cs typeface="Sylfaen"/>
+                <a:latin typeface="Sylfaen"/>
+              </a:rPr>
+              <a:t>▸  </a:t>
+            </a:r>
+            <a:r>
+              <a:rPr sz="1300">
+                <a:solidFill>
+                  <a:srgbClr val="0F172A"/>
+                </a:solidFill>
+                <a:ea typeface="Sylfaen"/>
+                <a:cs typeface="Sylfaen"/>
+                <a:latin typeface="Sylfaen"/>
+              </a:rPr>
+              <a:t>[ ] მოზიდულია მინიმუმ 15 რეალური Leads/Email Google Sheets-ში;</a:t>
+            </a:r>
+          </a:p>
+          <a:p>
+            <a:pPr algn="l">
+              <a:spcAft>
+                <a:spcPts val="300"/>
+              </a:spcAft>
+            </a:pPr>
+            <a:r>
+              <a:rPr sz="1300" b="1">
+                <a:solidFill>
+                  <a:srgbClr val="3730A3"/>
+                </a:solidFill>
+                <a:ea typeface="Sylfaen"/>
+                <a:cs typeface="Sylfaen"/>
+                <a:latin typeface="Sylfaen"/>
+              </a:rPr>
+              <a:t>▸  </a:t>
+            </a:r>
+            <a:r>
+              <a:rPr sz="1300">
+                <a:solidFill>
+                  <a:srgbClr val="0F172A"/>
+                </a:solidFill>
+                <a:ea typeface="Sylfaen"/>
+                <a:cs typeface="Sylfaen"/>
+                <a:latin typeface="Sylfaen"/>
+              </a:rPr>
+              <a:t>[ ] პრეზენტაცია (Gamma Pitch Deck) დასრულებულია.</a:t>
+            </a:r>
+          </a:p>
+        </p:txBody>
+      </p:sp>
+      <p:sp>
+        <p:nvSpPr>
+          <p:cNvPr id="13" name="Rectangle 12"/>
+          <p:cNvSpPr/>
+          <p:nvPr/>
+        </p:nvSpPr>
+        <p:spPr>
+          <a:xfrm>
+            <a:off x="457200" y="4850892"/>
+            <a:ext cx="8229600" cy="13716"/>
+          </a:xfrm>
+          <a:prstGeom prst="rect">
+            <a:avLst/>
+          </a:prstGeom>
+          <a:solidFill>
+            <a:srgbClr val="E2E8F0"/>
+          </a:solidFill>
+          <a:ln>
+            <a:noFill/>
+          </a:ln>
+          <a:effectLst/>
+        </p:spPr>
+        <p:style>
+          <a:lnRef idx="1">
+            <a:schemeClr val="accent1"/>
+          </a:lnRef>
+          <a:fillRef idx="3">
+            <a:schemeClr val="accent1"/>
+          </a:fillRef>
+          <a:effectRef idx="2">
+            <a:schemeClr val="accent1"/>
+          </a:effectRef>
+          <a:fontRef idx="minor">
+            <a:schemeClr val="lt1"/>
+          </a:fontRef>
+        </p:style>
+        <p:txBody>
+          <a:bodyPr rtlCol="0" anchor="ctr"/>
+          <a:lstStyle/>
+          <a:p>
+            <a:pPr algn="ctr"/>
+          </a:p>
+        </p:txBody>
+      </p:sp>
+      <p:sp>
+        <p:nvSpPr>
+          <p:cNvPr id="14" name="TextBox 13"/>
+          <p:cNvSpPr txBox="1"/>
+          <p:nvPr/>
+        </p:nvSpPr>
+        <p:spPr>
+          <a:xfrm>
+            <a:off x="457200" y="4887468"/>
+            <a:ext cx="8229600" cy="201168"/>
+          </a:xfrm>
+          <a:prstGeom prst="rect">
+            <a:avLst/>
+          </a:prstGeom>
+          <a:noFill/>
+        </p:spPr>
+        <p:txBody>
+          <a:bodyPr wrap="square" anchor="ctr" lIns="54864" rIns="54864" tIns="54864" bIns="54864">
+            <a:spAutoFit/>
+          </a:bodyPr>
+          <a:lstStyle/>
+          <a:p>
+            <a:pPr>
+              <a:spcAft>
+                <a:spcPts val="400"/>
+              </a:spcAft>
+            </a:pPr>
+            <a:r>
+              <a:rPr sz="800" b="0" i="0">
+                <a:solidFill>
+                  <a:srgbClr val="94A3B8"/>
+                </a:solidFill>
+                <a:ea typeface="Sylfaen"/>
+                <a:cs typeface="Sylfaen"/>
+                <a:latin typeface="Sylfaen"/>
+              </a:rPr>
+              <a:t>GITA Pre-Acceleration 2026 · AI for Startups</a:t>
+            </a:r>
+          </a:p>
+        </p:txBody>
+      </p:sp>
+    </p:spTree>
+  </p:cSld>
+  <p:clrMapOvr>
+    <a:masterClrMapping/>
+  </p:clrMapOvr>
+</p:sld>
+</file>
+
+<file path=ppt/slides/slide49.xml><?xml version="1.0" encoding="utf-8"?>
+<p:sld xmlns:a="http://schemas.openxmlformats.org/drawingml/2006/main" xmlns:p="http://schemas.openxmlformats.org/presentationml/2006/main" xmlns:r="http://schemas.openxmlformats.org/officeDocument/2006/relationships">
+  <p:cSld>
+    <p:spTree>
+      <p:nvGrpSpPr>
+        <p:cNvPr id="1" name=""/>
+        <p:cNvGrpSpPr/>
+        <p:nvPr/>
+      </p:nvGrpSpPr>
+      <p:grpSpPr/>
+      <p:sp>
+        <p:nvSpPr>
+          <p:cNvPr id="2" name="Rectangle 1"/>
+          <p:cNvSpPr/>
+          <p:nvPr/>
+        </p:nvSpPr>
+        <p:spPr>
+          <a:xfrm>
+            <a:off x="0" y="0"/>
+            <a:ext cx="9144000" cy="5143500"/>
+          </a:xfrm>
+          <a:prstGeom prst="rect">
+            <a:avLst/>
+          </a:prstGeom>
+          <a:solidFill>
+            <a:srgbClr val="FFFFFF"/>
+          </a:solidFill>
+          <a:ln>
+            <a:noFill/>
+          </a:ln>
+          <a:effectLst/>
+        </p:spPr>
+        <p:style>
+          <a:lnRef idx="1">
+            <a:schemeClr val="accent1"/>
+          </a:lnRef>
+          <a:fillRef idx="3">
+            <a:schemeClr val="accent1"/>
+          </a:fillRef>
+          <a:effectRef idx="2">
+            <a:schemeClr val="accent1"/>
+          </a:effectRef>
+          <a:fontRef idx="minor">
+            <a:schemeClr val="lt1"/>
+          </a:fontRef>
+        </p:style>
+        <p:txBody>
+          <a:bodyPr rtlCol="0" anchor="ctr"/>
+          <a:lstStyle/>
+          <a:p>
+            <a:pPr algn="ctr"/>
+          </a:p>
+        </p:txBody>
+      </p:sp>
+      <p:sp>
+        <p:nvSpPr>
+          <p:cNvPr id="3" name="Rectangle 2"/>
+          <p:cNvSpPr/>
+          <p:nvPr/>
+        </p:nvSpPr>
+        <p:spPr>
+          <a:xfrm>
+            <a:off x="0" y="0"/>
+            <a:ext cx="109728" cy="5143500"/>
+          </a:xfrm>
+          <a:prstGeom prst="rect">
+            <a:avLst/>
+          </a:prstGeom>
+          <a:solidFill>
+            <a:srgbClr val="4F46E5"/>
+          </a:solidFill>
+          <a:ln>
+            <a:noFill/>
+          </a:ln>
+          <a:effectLst/>
+        </p:spPr>
+        <p:style>
+          <a:lnRef idx="1">
+            <a:schemeClr val="accent1"/>
+          </a:lnRef>
+          <a:fillRef idx="3">
+            <a:schemeClr val="accent1"/>
+          </a:fillRef>
+          <a:effectRef idx="2">
+            <a:schemeClr val="accent1"/>
+          </a:effectRef>
+          <a:fontRef idx="minor">
+            <a:schemeClr val="lt1"/>
+          </a:fontRef>
+        </p:style>
+        <p:txBody>
+          <a:bodyPr rtlCol="0" anchor="ctr"/>
+          <a:lstStyle/>
+          <a:p>
+            <a:pPr algn="ctr"/>
+          </a:p>
+        </p:txBody>
+      </p:sp>
+      <p:sp>
+        <p:nvSpPr>
+          <p:cNvPr id="4" name="Rectangle 3"/>
+          <p:cNvSpPr/>
+          <p:nvPr/>
+        </p:nvSpPr>
+        <p:spPr>
+          <a:xfrm>
+            <a:off x="0" y="0"/>
+            <a:ext cx="9144000" cy="109728"/>
+          </a:xfrm>
+          <a:prstGeom prst="rect">
+            <a:avLst/>
+          </a:prstGeom>
+          <a:solidFill>
+            <a:srgbClr val="4F46E5"/>
+          </a:solidFill>
+          <a:ln>
+            <a:noFill/>
+          </a:ln>
+          <a:effectLst/>
+        </p:spPr>
+        <p:style>
+          <a:lnRef idx="1">
+            <a:schemeClr val="accent1"/>
+          </a:lnRef>
+          <a:fillRef idx="3">
+            <a:schemeClr val="accent1"/>
+          </a:fillRef>
+          <a:effectRef idx="2">
+            <a:schemeClr val="accent1"/>
+          </a:effectRef>
+          <a:fontRef idx="minor">
+            <a:schemeClr val="lt1"/>
+          </a:fontRef>
+        </p:style>
+        <p:txBody>
+          <a:bodyPr rtlCol="0" anchor="ctr"/>
+          <a:lstStyle/>
+          <a:p>
+            <a:pPr algn="ctr"/>
+          </a:p>
+        </p:txBody>
+      </p:sp>
+      <p:sp>
+        <p:nvSpPr>
+          <p:cNvPr id="5" name="TextBox 4"/>
+          <p:cNvSpPr txBox="1"/>
+          <p:nvPr/>
+        </p:nvSpPr>
+        <p:spPr>
+          <a:xfrm>
+            <a:off x="457200" y="256032"/>
+            <a:ext cx="7772400" cy="777240"/>
+          </a:xfrm>
+          <a:prstGeom prst="rect">
+            <a:avLst/>
+          </a:prstGeom>
+          <a:noFill/>
+        </p:spPr>
+        <p:txBody>
+          <a:bodyPr wrap="square" anchor="t" lIns="54864" rIns="54864" tIns="54864" bIns="54864">
+            <a:spAutoFit/>
+          </a:bodyPr>
+          <a:lstStyle/>
+          <a:p>
+            <a:r>
+              <a:rPr sz="2600" b="1">
+                <a:solidFill>
+                  <a:srgbClr val="3730A3"/>
+                </a:solidFill>
+                <a:ea typeface="Sylfaen"/>
+                <a:cs typeface="Sylfaen"/>
+                <a:latin typeface="Sylfaen"/>
+              </a:rPr>
+              <a:t>Course Wrap-up &amp; Certification</a:t>
+            </a:r>
+          </a:p>
+        </p:txBody>
+      </p:sp>
+      <p:sp>
+        <p:nvSpPr>
+          <p:cNvPr id="6" name="Rectangle 5"/>
+          <p:cNvSpPr/>
+          <p:nvPr/>
+        </p:nvSpPr>
+        <p:spPr>
+          <a:xfrm>
+            <a:off x="457200" y="1051560"/>
+            <a:ext cx="8229600" cy="22860"/>
+          </a:xfrm>
+          <a:prstGeom prst="rect">
+            <a:avLst/>
+          </a:prstGeom>
+          <a:solidFill>
+            <a:srgbClr val="E2E8F0"/>
+          </a:solidFill>
+          <a:ln>
+            <a:noFill/>
+          </a:ln>
+          <a:effectLst/>
+        </p:spPr>
+        <p:style>
+          <a:lnRef idx="1">
+            <a:schemeClr val="accent1"/>
+          </a:lnRef>
+          <a:fillRef idx="3">
+            <a:schemeClr val="accent1"/>
+          </a:fillRef>
+          <a:effectRef idx="2">
+            <a:schemeClr val="accent1"/>
+          </a:effectRef>
+          <a:fontRef idx="minor">
+            <a:schemeClr val="lt1"/>
+          </a:fontRef>
+        </p:style>
+        <p:txBody>
+          <a:bodyPr rtlCol="0" anchor="ctr"/>
+          <a:lstStyle/>
+          <a:p>
+            <a:pPr algn="ctr"/>
+          </a:p>
+        </p:txBody>
+      </p:sp>
+      <p:sp>
+        <p:nvSpPr>
+          <p:cNvPr id="7" name="Rounded Rectangle 6"/>
+          <p:cNvSpPr/>
+          <p:nvPr/>
+        </p:nvSpPr>
+        <p:spPr>
+          <a:xfrm>
+            <a:off x="8138160" y="201168"/>
+            <a:ext cx="777240" cy="320040"/>
+          </a:xfrm>
+          <a:prstGeom prst="roundRect">
+            <a:avLst>
+              <a:gd name="adj" fmla="val 50000"/>
+            </a:avLst>
+          </a:prstGeom>
+          <a:solidFill>
+            <a:srgbClr val="4F46E5"/>
+          </a:solidFill>
+          <a:ln>
+            <a:noFill/>
+          </a:ln>
+          <a:effectLst/>
+        </p:spPr>
+        <p:style>
+          <a:lnRef idx="1">
+            <a:schemeClr val="accent1"/>
+          </a:lnRef>
+          <a:fillRef idx="3">
+            <a:schemeClr val="accent1"/>
+          </a:fillRef>
+          <a:effectRef idx="2">
+            <a:schemeClr val="accent1"/>
+          </a:effectRef>
+          <a:fontRef idx="minor">
+            <a:schemeClr val="lt1"/>
+          </a:fontRef>
+        </p:style>
+        <p:txBody>
+          <a:bodyPr rtlCol="0" anchor="ctr" lIns="36576" rIns="36576" tIns="18288" bIns="18288"/>
+          <a:lstStyle/>
+          <a:p>
+            <a:pPr algn="ctr"/>
+            <a:r>
+              <a:rPr sz="1000" b="1">
+                <a:solidFill>
+                  <a:srgbClr val="FFFFFF"/>
+                </a:solidFill>
+                <a:ea typeface="Sylfaen"/>
+                <a:cs typeface="Sylfaen"/>
+                <a:latin typeface="Sylfaen"/>
+              </a:rPr>
+              <a:t>49 / 49</a:t>
             </a:r>
           </a:p>
         </p:txBody>
@@ -42886,7 +44079,7 @@
                 <a:cs typeface="Sylfaen"/>
                 <a:latin typeface="Sylfaen"/>
               </a:rPr>
-              <a:t>5 / 48</a:t>
+              <a:t>5 / 49</a:t>
             </a:r>
           </a:p>
         </p:txBody>
@@ -44038,7 +45231,7 @@
                 <a:cs typeface="Sylfaen"/>
                 <a:latin typeface="Sylfaen"/>
               </a:rPr>
-              <a:t>6 / 48</a:t>
+              <a:t>6 / 49</a:t>
             </a:r>
           </a:p>
         </p:txBody>
@@ -45442,7 +46635,7 @@
                 <a:cs typeface="Sylfaen"/>
                 <a:latin typeface="Sylfaen"/>
               </a:rPr>
-              <a:t>7 / 48</a:t>
+              <a:t>7 / 49</a:t>
             </a:r>
           </a:p>
         </p:txBody>
@@ -46372,7 +47565,7 @@
                 <a:cs typeface="Sylfaen"/>
                 <a:latin typeface="Sylfaen"/>
               </a:rPr>
-              <a:t>8 / 48</a:t>
+              <a:t>8 / 49</a:t>
             </a:r>
           </a:p>
         </p:txBody>
@@ -47481,7 +48674,7 @@
                 <a:cs typeface="Sylfaen"/>
                 <a:latin typeface="Sylfaen"/>
               </a:rPr>
-              <a:t>9 / 48</a:t>
+              <a:t>9 / 49</a:t>
             </a:r>
           </a:p>
         </p:txBody>

--- a/GITA/Pre-Acceleration/2026-5h-AI-for-Startups/day2-slides.pptx
+++ b/GITA/Pre-Acceleration/2026-5h-AI-for-Startups/day2-slides.pptx
@@ -54,6 +54,7 @@
     <p:sldId id="302" r:id="rId53"/>
     <p:sldId id="303" r:id="rId54"/>
     <p:sldId id="304" r:id="rId55"/>
+    <p:sldId id="305" r:id="rId56"/>
   </p:sldIdLst>
   <p:sldSz cx="9144000" cy="5143500" type="screen4x3"/>
   <p:notesSz cx="6858000" cy="9144000"/>
@@ -3755,7 +3756,7 @@
                 <a:cs typeface="Sylfaen"/>
                 <a:latin typeface="Sylfaen"/>
               </a:rPr>
-              <a:t>10 / 49</a:t>
+              <a:t>10 / 50</a:t>
             </a:r>
           </a:p>
         </p:txBody>
@@ -4616,7 +4617,7 @@
                 <a:cs typeface="Sylfaen"/>
                 <a:latin typeface="Sylfaen"/>
               </a:rPr>
-              <a:t>11 / 49</a:t>
+              <a:t>11 / 50</a:t>
             </a:r>
           </a:p>
         </p:txBody>
@@ -6020,7 +6021,7 @@
                 <a:cs typeface="Sylfaen"/>
                 <a:latin typeface="Sylfaen"/>
               </a:rPr>
-              <a:t>12 / 49</a:t>
+              <a:t>12 / 50</a:t>
             </a:r>
           </a:p>
         </p:txBody>
@@ -7226,7 +7227,7 @@
                 <a:cs typeface="Sylfaen"/>
                 <a:latin typeface="Sylfaen"/>
               </a:rPr>
-              <a:t>13 / 49</a:t>
+              <a:t>13 / 50</a:t>
             </a:r>
           </a:p>
         </p:txBody>
@@ -8056,7 +8057,7 @@
                 <a:cs typeface="Sylfaen"/>
                 <a:latin typeface="Sylfaen"/>
               </a:rPr>
-              <a:t>14 / 49</a:t>
+              <a:t>14 / 50</a:t>
             </a:r>
           </a:p>
         </p:txBody>
@@ -9165,7 +9166,7 @@
                 <a:cs typeface="Sylfaen"/>
                 <a:latin typeface="Sylfaen"/>
               </a:rPr>
-              <a:t>15 / 49</a:t>
+              <a:t>15 / 50</a:t>
             </a:r>
           </a:p>
         </p:txBody>
@@ -10044,7 +10045,7 @@
                 <a:cs typeface="Sylfaen"/>
                 <a:latin typeface="Sylfaen"/>
               </a:rPr>
-              <a:t>16 / 49</a:t>
+              <a:t>16 / 50</a:t>
             </a:r>
           </a:p>
         </p:txBody>
@@ -10943,7 +10944,7 @@
                 <a:cs typeface="Sylfaen"/>
                 <a:latin typeface="Sylfaen"/>
               </a:rPr>
-              <a:t>17 / 49</a:t>
+              <a:t>17 / 50</a:t>
             </a:r>
           </a:p>
         </p:txBody>
@@ -12293,7 +12294,7 @@
                 <a:cs typeface="Sylfaen"/>
                 <a:latin typeface="Sylfaen"/>
               </a:rPr>
-              <a:t>18 / 49</a:t>
+              <a:t>18 / 50</a:t>
             </a:r>
           </a:p>
         </p:txBody>
@@ -13195,7 +13196,7 @@
                 <a:cs typeface="Sylfaen"/>
                 <a:latin typeface="Sylfaen"/>
               </a:rPr>
-              <a:t>19 / 49</a:t>
+              <a:t>19 / 50</a:t>
             </a:r>
           </a:p>
         </p:txBody>
@@ -14174,7 +14175,7 @@
                 <a:cs typeface="Sylfaen"/>
                 <a:latin typeface="Sylfaen"/>
               </a:rPr>
-              <a:t>2 / 49</a:t>
+              <a:t>2 / 50</a:t>
             </a:r>
           </a:p>
         </p:txBody>
@@ -15207,7 +15208,7 @@
                 <a:cs typeface="Sylfaen"/>
                 <a:latin typeface="Sylfaen"/>
               </a:rPr>
-              <a:t>20 / 49</a:t>
+              <a:t>20 / 50</a:t>
             </a:r>
           </a:p>
         </p:txBody>
@@ -16611,7 +16612,7 @@
                 <a:cs typeface="Sylfaen"/>
                 <a:latin typeface="Sylfaen"/>
               </a:rPr>
-              <a:t>21 / 49</a:t>
+              <a:t>21 / 50</a:t>
             </a:r>
           </a:p>
         </p:txBody>
@@ -17441,7 +17442,7 @@
                 <a:cs typeface="Sylfaen"/>
                 <a:latin typeface="Sylfaen"/>
               </a:rPr>
-              <a:t>22 / 49</a:t>
+              <a:t>22 / 50</a:t>
             </a:r>
           </a:p>
         </p:txBody>
@@ -18340,7 +18341,7 @@
                 <a:cs typeface="Sylfaen"/>
                 <a:latin typeface="Sylfaen"/>
               </a:rPr>
-              <a:t>23 / 49</a:t>
+              <a:t>23 / 50</a:t>
             </a:r>
           </a:p>
         </p:txBody>
@@ -19201,7 +19202,7 @@
                 <a:cs typeface="Sylfaen"/>
                 <a:latin typeface="Sylfaen"/>
               </a:rPr>
-              <a:t>24 / 49</a:t>
+              <a:t>24 / 50</a:t>
             </a:r>
           </a:p>
         </p:txBody>
@@ -20751,7 +20752,7 @@
                 <a:cs typeface="Sylfaen"/>
                 <a:latin typeface="Sylfaen"/>
               </a:rPr>
-              <a:t>25 / 49</a:t>
+              <a:t>25 / 50</a:t>
             </a:r>
           </a:p>
         </p:txBody>
@@ -21581,7 +21582,7 @@
                 <a:cs typeface="Sylfaen"/>
                 <a:latin typeface="Sylfaen"/>
               </a:rPr>
-              <a:t>26 / 49</a:t>
+              <a:t>26 / 50</a:t>
             </a:r>
           </a:p>
         </p:txBody>
@@ -22813,7 +22814,7 @@
                 <a:cs typeface="Sylfaen"/>
                 <a:latin typeface="Sylfaen"/>
               </a:rPr>
-              <a:t>27 / 49</a:t>
+              <a:t>27 / 50</a:t>
             </a:r>
           </a:p>
         </p:txBody>
@@ -23574,7 +23575,7 @@
                 <a:cs typeface="Sylfaen"/>
                 <a:latin typeface="Sylfaen"/>
               </a:rPr>
-              <a:t>28 / 49</a:t>
+              <a:t>28 / 50</a:t>
             </a:r>
           </a:p>
         </p:txBody>
@@ -24259,7 +24260,7 @@
                 <a:cs typeface="Sylfaen"/>
                 <a:latin typeface="Sylfaen"/>
               </a:rPr>
-              <a:t>29 / 49</a:t>
+              <a:t>29 / 50</a:t>
             </a:r>
           </a:p>
         </p:txBody>
@@ -25005,7 +25006,7 @@
                 <a:cs typeface="Sylfaen"/>
                 <a:latin typeface="Sylfaen"/>
               </a:rPr>
-              <a:t>3 / 49</a:t>
+              <a:t>3 / 50</a:t>
             </a:r>
           </a:p>
         </p:txBody>
@@ -25835,7 +25836,7 @@
                 <a:cs typeface="Sylfaen"/>
                 <a:latin typeface="Sylfaen"/>
               </a:rPr>
-              <a:t>30 / 49</a:t>
+              <a:t>30 / 50</a:t>
             </a:r>
           </a:p>
         </p:txBody>
@@ -26706,7 +26707,7 @@
                 <a:cs typeface="Sylfaen"/>
                 <a:latin typeface="Sylfaen"/>
               </a:rPr>
-              <a:t>31 / 49</a:t>
+              <a:t>31 / 50</a:t>
             </a:r>
           </a:p>
         </p:txBody>
@@ -27536,7 +27537,7 @@
                 <a:cs typeface="Sylfaen"/>
                 <a:latin typeface="Sylfaen"/>
               </a:rPr>
-              <a:t>32 / 49</a:t>
+              <a:t>32 / 50</a:t>
             </a:r>
           </a:p>
         </p:txBody>
@@ -28366,7 +28367,7 @@
                 <a:cs typeface="Sylfaen"/>
                 <a:latin typeface="Sylfaen"/>
               </a:rPr>
-              <a:t>33 / 49</a:t>
+              <a:t>33 / 50</a:t>
             </a:r>
           </a:p>
         </p:txBody>
@@ -28921,7 +28922,7 @@
                 <a:cs typeface="Sylfaen"/>
                 <a:latin typeface="Sylfaen"/>
               </a:rPr>
-              <a:t>Google AI Studio: Android აპლიკაციის შექმნა &amp; Gemini SDK</a:t>
+              <a:t>პრომპტის მომზადება AI Studio-სთვის: მოდელების Pipeline</a:t>
             </a:r>
           </a:p>
         </p:txBody>
@@ -29022,7 +29023,7 @@
                 <a:cs typeface="Sylfaen"/>
                 <a:latin typeface="Sylfaen"/>
               </a:rPr>
-              <a:t>34 / 49</a:t>
+              <a:t>34 / 50</a:t>
             </a:r>
           </a:p>
         </p:txBody>
@@ -29036,7 +29037,7 @@
         <p:spPr>
           <a:xfrm>
             <a:off x="457200" y="1188720"/>
-            <a:ext cx="54864" cy="3662172"/>
+            <a:ext cx="45720" cy="1444751"/>
           </a:xfrm>
           <a:prstGeom prst="rect">
             <a:avLst/>
@@ -29079,8 +29080,8 @@
         </p:nvSpPr>
         <p:spPr>
           <a:xfrm>
-            <a:off x="512064" y="1188720"/>
-            <a:ext cx="3991356" cy="3662172"/>
+            <a:off x="502920" y="1188720"/>
+            <a:ext cx="4000500" cy="1444751"/>
           </a:xfrm>
           <a:prstGeom prst="roundRect">
             <a:avLst>
@@ -29127,8 +29128,8 @@
         </p:nvSpPr>
         <p:spPr>
           <a:xfrm>
-            <a:off x="621792" y="1261872"/>
-            <a:ext cx="3771900" cy="320040"/>
+            <a:off x="585216" y="1243584"/>
+            <a:ext cx="3845052" cy="320040"/>
           </a:xfrm>
           <a:prstGeom prst="rect">
             <a:avLst/>
@@ -29155,7 +29156,7 @@
                 <a:cs typeface="Sylfaen"/>
                 <a:latin typeface="Sylfaen"/>
               </a:rPr>
-              <a:t>🛠️ 1. Google AI Studio &amp; API გასაღები:</a:t>
+              <a:t>🔍 ნაბიჯი 1: Perplexity (კვლევა)</a:t>
             </a:r>
           </a:p>
         </p:txBody>
@@ -29168,8 +29169,8 @@
         </p:nvSpPr>
         <p:spPr>
           <a:xfrm>
-            <a:off x="621792" y="1655064"/>
-            <a:ext cx="3771900" cy="3122675"/>
+            <a:off x="585216" y="1636776"/>
+            <a:ext cx="3845052" cy="713232"/>
           </a:xfrm>
           <a:prstGeom prst="rect">
             <a:avLst/>
@@ -29182,24 +29183,13 @@
           </a:bodyPr>
           <a:lstStyle/>
           <a:p>
-            <a:pPr algn="l">
-              <a:spcAft>
-                <a:spcPts val="300"/>
-              </a:spcAft>
-            </a:pPr>
-            <a:r>
-              <a:rPr sz="1300" b="1">
-                <a:solidFill>
-                  <a:srgbClr val="3730A3"/>
-                </a:solidFill>
-                <a:ea typeface="Sylfaen"/>
-                <a:cs typeface="Sylfaen"/>
-                <a:latin typeface="Sylfaen"/>
-              </a:rPr>
-              <a:t>▸  </a:t>
-            </a:r>
-            <a:r>
-              <a:rPr sz="1300">
+            <a:pPr>
+              <a:spcAft>
+                <a:spcPts val="400"/>
+              </a:spcAft>
+            </a:pPr>
+            <a:r>
+              <a:rPr sz="1300" b="0" i="0">
                 <a:solidFill>
                   <a:srgbClr val="0F172A"/>
                 </a:solidFill>
@@ -29207,94 +29197,7 @@
                 <a:cs typeface="Sylfaen"/>
                 <a:latin typeface="Sylfaen"/>
               </a:rPr>
-              <a:t>პროტოტიპირება: გამოსცადეთ Prompt-ები, System Instructions და JSON რეჟიმი უშუალოდ ბრაუზერში;</a:t>
-            </a:r>
-          </a:p>
-          <a:p>
-            <a:pPr algn="l">
-              <a:spcAft>
-                <a:spcPts val="300"/>
-              </a:spcAft>
-            </a:pPr>
-            <a:r>
-              <a:rPr sz="1300" b="1">
-                <a:solidFill>
-                  <a:srgbClr val="3730A3"/>
-                </a:solidFill>
-                <a:ea typeface="Sylfaen"/>
-                <a:cs typeface="Sylfaen"/>
-                <a:latin typeface="Sylfaen"/>
-              </a:rPr>
-              <a:t>▸  </a:t>
-            </a:r>
-            <a:r>
-              <a:rPr sz="1300">
-                <a:solidFill>
-                  <a:srgbClr val="0F172A"/>
-                </a:solidFill>
-                <a:ea typeface="Sylfaen"/>
-                <a:cs typeface="Sylfaen"/>
-                <a:latin typeface="Sylfaen"/>
-              </a:rPr>
-              <a:t>API Key გენერაცია: შექმენით უსაფრთხო გასაღები თქვენი პროექტისთვის;</a:t>
-            </a:r>
-          </a:p>
-          <a:p>
-            <a:pPr algn="l">
-              <a:spcAft>
-                <a:spcPts val="300"/>
-              </a:spcAft>
-            </a:pPr>
-            <a:r>
-              <a:rPr sz="1300" b="1">
-                <a:solidFill>
-                  <a:srgbClr val="3730A3"/>
-                </a:solidFill>
-                <a:ea typeface="Sylfaen"/>
-                <a:cs typeface="Sylfaen"/>
-                <a:latin typeface="Sylfaen"/>
-              </a:rPr>
-              <a:t>▸  </a:t>
-            </a:r>
-            <a:r>
-              <a:rPr sz="1300">
-                <a:solidFill>
-                  <a:srgbClr val="0F172A"/>
-                </a:solidFill>
-                <a:ea typeface="Sylfaen"/>
-                <a:cs typeface="Sylfaen"/>
-                <a:latin typeface="Sylfaen"/>
-              </a:rPr>
-              <a:t>Build რეჟიმი: დაწერეთ პრომპტი ბუნებრივ ენაზე, AI Studio თავად ააწყობს native Kotlin/Jetpack Compose Android პროექტს;</a:t>
-            </a:r>
-          </a:p>
-          <a:p>
-            <a:pPr algn="l">
-              <a:spcAft>
-                <a:spcPts val="300"/>
-              </a:spcAft>
-            </a:pPr>
-            <a:r>
-              <a:rPr sz="1300" b="1">
-                <a:solidFill>
-                  <a:srgbClr val="3730A3"/>
-                </a:solidFill>
-                <a:ea typeface="Sylfaen"/>
-                <a:cs typeface="Sylfaen"/>
-                <a:latin typeface="Sylfaen"/>
-              </a:rPr>
-              <a:t>▸  </a:t>
-            </a:r>
-            <a:r>
-              <a:rPr sz="1300">
-                <a:solidFill>
-                  <a:srgbClr val="0F172A"/>
-                </a:solidFill>
-                <a:ea typeface="Sylfaen"/>
-                <a:cs typeface="Sylfaen"/>
-                <a:latin typeface="Sylfaen"/>
-              </a:rPr>
-              <a:t>ბრაუზერული ემულატორი: დატესტეთ აპლიკაცია ინსტალაციის გარეშე და გააკეთეთ ექსპორტი Android Studio-ში.</a:t>
+              <a:t>როლი: მოიძიეთ უახლესი ფაქტები, API დოკუმენტაციები, ან ტექნიკური სტანდარტები. მიზანი: პრომპტში ჩასაწერი კონტექსტის სიზუსტის უზრუნველყოფა.</a:t>
             </a:r>
           </a:p>
         </p:txBody>
@@ -29308,7 +29211,7 @@
         <p:spPr>
           <a:xfrm>
             <a:off x="4640580" y="1188720"/>
-            <a:ext cx="54864" cy="3662172"/>
+            <a:ext cx="45720" cy="1444751"/>
           </a:xfrm>
           <a:prstGeom prst="rect">
             <a:avLst/>
@@ -29351,8 +29254,8 @@
         </p:nvSpPr>
         <p:spPr>
           <a:xfrm>
-            <a:off x="4695444" y="1188720"/>
-            <a:ext cx="3991356" cy="3662172"/>
+            <a:off x="4686300" y="1188720"/>
+            <a:ext cx="4000500" cy="1444751"/>
           </a:xfrm>
           <a:prstGeom prst="roundRect">
             <a:avLst>
@@ -29360,11 +29263,11 @@
             </a:avLst>
           </a:prstGeom>
           <a:solidFill>
-            <a:srgbClr val="EEF2FF"/>
+            <a:srgbClr val="F8FAFC"/>
           </a:solidFill>
           <a:ln w="6350">
             <a:solidFill>
-              <a:srgbClr val="3730A3"/>
+              <a:srgbClr val="E2E8F0"/>
             </a:solidFill>
           </a:ln>
           <a:effectLst/>
@@ -29399,8 +29302,8 @@
         </p:nvSpPr>
         <p:spPr>
           <a:xfrm>
-            <a:off x="4805172" y="1261872"/>
-            <a:ext cx="3771900" cy="320040"/>
+            <a:off x="4768596" y="1243584"/>
+            <a:ext cx="3845052" cy="320040"/>
           </a:xfrm>
           <a:prstGeom prst="rect">
             <a:avLst/>
@@ -29427,7 +29330,7 @@
                 <a:cs typeface="Sylfaen"/>
                 <a:latin typeface="Sylfaen"/>
               </a:rPr>
-              <a:t>📲 2. Android Studio &amp; SDK ინტეგრაცია:</a:t>
+              <a:t>🧱 ნაბიჯი 2: Claude (სტრუქტურირება)</a:t>
             </a:r>
           </a:p>
         </p:txBody>
@@ -29440,8 +29343,8 @@
         </p:nvSpPr>
         <p:spPr>
           <a:xfrm>
-            <a:off x="4805172" y="1655064"/>
-            <a:ext cx="3771900" cy="713232"/>
+            <a:off x="4768596" y="1636776"/>
+            <a:ext cx="3845052" cy="713232"/>
           </a:xfrm>
           <a:prstGeom prst="rect">
             <a:avLst/>
@@ -29468,49 +29371,52 @@
                 <a:cs typeface="Sylfaen"/>
                 <a:latin typeface="Sylfaen"/>
               </a:rPr>
-              <a:t>A. Firebase AI Logic SDK (რეკომენდებული): მართავს უსაფრთხოებას და გასაღებებს Cloud-ში, იცავს API Key-ს გაჟონვისგან.</a:t>
-            </a:r>
-          </a:p>
-        </p:txBody>
-      </p:sp>
-      <p:sp>
-        <p:nvSpPr>
-          <p:cNvPr id="16" name="TextBox 15"/>
-          <p:cNvSpPr txBox="1"/>
-          <p:nvPr/>
-        </p:nvSpPr>
-        <p:spPr>
-          <a:xfrm>
-            <a:off x="4805172" y="2441448"/>
-            <a:ext cx="3771900" cy="475488"/>
-          </a:xfrm>
-          <a:prstGeom prst="rect">
-            <a:avLst/>
-          </a:prstGeom>
-          <a:noFill/>
-        </p:spPr>
-        <p:txBody>
-          <a:bodyPr wrap="square" anchor="t" lIns="54864" rIns="54864" tIns="54864" bIns="54864">
-            <a:spAutoFit/>
-          </a:bodyPr>
-          <a:lstStyle/>
-          <a:p>
-            <a:pPr>
-              <a:spcAft>
-                <a:spcPts val="400"/>
-              </a:spcAft>
-            </a:pPr>
-            <a:r>
-              <a:rPr sz="1300" b="0" i="0">
-                <a:solidFill>
-                  <a:srgbClr val="0F172A"/>
-                </a:solidFill>
-                <a:ea typeface="Sylfaen"/>
-                <a:cs typeface="Sylfaen"/>
-                <a:latin typeface="Sylfaen"/>
-              </a:rPr>
-              <a:t>B. Google AI Client SDK (პირდაპირი კავშირი):</a:t>
-            </a:r>
+              <a:t>როლი: სთხოვეთ Claude-ს დაწეროს System Instructions, XML სქემები და JSON გამომავალი ფორმატები. მიზანი: პრომპტის მკაცრი ლოგიკური სტრუქტურის აგება.</a:t>
+            </a:r>
+          </a:p>
+        </p:txBody>
+      </p:sp>
+      <p:sp>
+        <p:nvSpPr>
+          <p:cNvPr id="16" name="Rectangle 15"/>
+          <p:cNvSpPr/>
+          <p:nvPr/>
+        </p:nvSpPr>
+        <p:spPr>
+          <a:xfrm>
+            <a:off x="457200" y="2770632"/>
+            <a:ext cx="45720" cy="1444751"/>
+          </a:xfrm>
+          <a:prstGeom prst="rect">
+            <a:avLst/>
+          </a:prstGeom>
+          <a:solidFill>
+            <a:srgbClr val="3730A3"/>
+          </a:solidFill>
+          <a:ln>
+            <a:noFill/>
+          </a:ln>
+          <a:effectLst/>
+        </p:spPr>
+        <p:style>
+          <a:lnRef idx="1">
+            <a:schemeClr val="accent1"/>
+          </a:lnRef>
+          <a:fillRef idx="3">
+            <a:schemeClr val="accent1"/>
+          </a:fillRef>
+          <a:effectRef idx="2">
+            <a:schemeClr val="accent1"/>
+          </a:effectRef>
+          <a:fontRef idx="minor">
+            <a:schemeClr val="lt1"/>
+          </a:fontRef>
+        </p:style>
+        <p:txBody>
+          <a:bodyPr rtlCol="0" anchor="ctr"/>
+          <a:lstStyle/>
+          <a:p>
+            <a:pPr algn="ctr"/>
           </a:p>
         </p:txBody>
       </p:sp>
@@ -29522,8 +29428,8 @@
         </p:nvSpPr>
         <p:spPr>
           <a:xfrm>
-            <a:off x="4805172" y="2990088"/>
-            <a:ext cx="3771900" cy="1787651"/>
+            <a:off x="502920" y="2770632"/>
+            <a:ext cx="4000500" cy="1444751"/>
           </a:xfrm>
           <a:prstGeom prst="roundRect">
             <a:avLst>
@@ -29533,52 +29439,6 @@
           <a:solidFill>
             <a:srgbClr val="F8FAFC"/>
           </a:solidFill>
-          <a:ln w="9525">
-            <a:solidFill>
-              <a:srgbClr val="E2E8F0"/>
-            </a:solidFill>
-          </a:ln>
-          <a:effectLst/>
-        </p:spPr>
-        <p:style>
-          <a:lnRef idx="1">
-            <a:schemeClr val="accent1"/>
-          </a:lnRef>
-          <a:fillRef idx="3">
-            <a:schemeClr val="accent1"/>
-          </a:fillRef>
-          <a:effectRef idx="2">
-            <a:schemeClr val="accent1"/>
-          </a:effectRef>
-          <a:fontRef idx="minor">
-            <a:schemeClr val="lt1"/>
-          </a:fontRef>
-        </p:style>
-        <p:txBody>
-          <a:bodyPr rtlCol="0" anchor="ctr"/>
-          <a:lstStyle/>
-          <a:p>
-            <a:pPr algn="ctr"/>
-          </a:p>
-        </p:txBody>
-      </p:sp>
-      <p:sp>
-        <p:nvSpPr>
-          <p:cNvPr id="18" name="Rectangle 17"/>
-          <p:cNvSpPr/>
-          <p:nvPr/>
-        </p:nvSpPr>
-        <p:spPr>
-          <a:xfrm>
-            <a:off x="4860036" y="3035808"/>
-            <a:ext cx="3662172" cy="1696211"/>
-          </a:xfrm>
-          <a:prstGeom prst="rect">
-            <a:avLst/>
-          </a:prstGeom>
-          <a:solidFill>
-            <a:srgbClr val="FFFFFF"/>
-          </a:solidFill>
           <a:ln w="6350">
             <a:solidFill>
               <a:srgbClr val="E2E8F0"/>
@@ -29610,14 +29470,14 @@
       </p:sp>
       <p:sp>
         <p:nvSpPr>
-          <p:cNvPr id="19" name="TextBox 18"/>
+          <p:cNvPr id="18" name="TextBox 17"/>
           <p:cNvSpPr txBox="1"/>
           <p:nvPr/>
         </p:nvSpPr>
         <p:spPr>
           <a:xfrm>
-            <a:off x="4914900" y="3054096"/>
-            <a:ext cx="3552444" cy="1659635"/>
+            <a:off x="585216" y="2825496"/>
+            <a:ext cx="3845052" cy="320040"/>
           </a:xfrm>
           <a:prstGeom prst="rect">
             <a:avLst/>
@@ -29632,224 +29492,241 @@
           <a:p>
             <a:pPr>
               <a:spcAft>
-                <a:spcPts val="0"/>
-              </a:spcAft>
-            </a:pPr>
-            <a:r>
-              <a:rPr sz="1000">
+                <a:spcPts val="400"/>
+              </a:spcAft>
+            </a:pPr>
+            <a:r>
+              <a:rPr sz="1400" b="1" i="0">
                 <a:solidFill>
                   <a:srgbClr val="0F172A"/>
                 </a:solidFill>
-                <a:ea typeface="Consolas"/>
-                <a:cs typeface="Consolas"/>
-                <a:latin typeface="Consolas"/>
-              </a:rPr>
-              <a:t> </a:t>
-            </a:r>
-          </a:p>
+                <a:ea typeface="Sylfaen"/>
+                <a:cs typeface="Sylfaen"/>
+                <a:latin typeface="Sylfaen"/>
+              </a:rPr>
+              <a:t>🎨 ნაბიჯი 3: ChatGPT Canvas (იტერაცია)</a:t>
+            </a:r>
+          </a:p>
+        </p:txBody>
+      </p:sp>
+      <p:sp>
+        <p:nvSpPr>
+          <p:cNvPr id="19" name="TextBox 18"/>
+          <p:cNvSpPr txBox="1"/>
+          <p:nvPr/>
+        </p:nvSpPr>
+        <p:spPr>
+          <a:xfrm>
+            <a:off x="585216" y="3218688"/>
+            <a:ext cx="3845052" cy="713232"/>
+          </a:xfrm>
+          <a:prstGeom prst="rect">
+            <a:avLst/>
+          </a:prstGeom>
+          <a:noFill/>
+        </p:spPr>
+        <p:txBody>
+          <a:bodyPr wrap="square" anchor="t" lIns="54864" rIns="54864" tIns="54864" bIns="54864">
+            <a:spAutoFit/>
+          </a:bodyPr>
+          <a:lstStyle/>
           <a:p>
             <a:pPr>
               <a:spcAft>
-                <a:spcPts val="0"/>
-              </a:spcAft>
-            </a:pPr>
-            <a:r>
-              <a:rPr sz="1000">
+                <a:spcPts val="400"/>
+              </a:spcAft>
+            </a:pPr>
+            <a:r>
+              <a:rPr sz="1300" b="0" i="0">
                 <a:solidFill>
                   <a:srgbClr val="0F172A"/>
                 </a:solidFill>
-                <a:ea typeface="Consolas"/>
-                <a:cs typeface="Consolas"/>
-                <a:latin typeface="Consolas"/>
-              </a:rPr>
-              <a:t>// build.gradle.kts:</a:t>
-            </a:r>
-          </a:p>
+                <a:ea typeface="Sylfaen"/>
+                <a:cs typeface="Sylfaen"/>
+                <a:latin typeface="Sylfaen"/>
+              </a:rPr>
+              <a:t>როლი: გამოიყენეთ Canvas რეჟიმი ტექსტის ტონის, მესიჯების და სათაურების რეალურ დროში დასახვეწად. მიზანი: პრომპტის კოპირაითინგისა და კრეატიული მხარის გაძლიერება.</a:t>
+            </a:r>
+          </a:p>
+        </p:txBody>
+      </p:sp>
+      <p:sp>
+        <p:nvSpPr>
+          <p:cNvPr id="20" name="Rectangle 19"/>
+          <p:cNvSpPr/>
+          <p:nvPr/>
+        </p:nvSpPr>
+        <p:spPr>
+          <a:xfrm>
+            <a:off x="4640580" y="2770632"/>
+            <a:ext cx="45720" cy="1444751"/>
+          </a:xfrm>
+          <a:prstGeom prst="rect">
+            <a:avLst/>
+          </a:prstGeom>
+          <a:solidFill>
+            <a:srgbClr val="3730A3"/>
+          </a:solidFill>
+          <a:ln>
+            <a:noFill/>
+          </a:ln>
+          <a:effectLst/>
+        </p:spPr>
+        <p:style>
+          <a:lnRef idx="1">
+            <a:schemeClr val="accent1"/>
+          </a:lnRef>
+          <a:fillRef idx="3">
+            <a:schemeClr val="accent1"/>
+          </a:fillRef>
+          <a:effectRef idx="2">
+            <a:schemeClr val="accent1"/>
+          </a:effectRef>
+          <a:fontRef idx="minor">
+            <a:schemeClr val="lt1"/>
+          </a:fontRef>
+        </p:style>
+        <p:txBody>
+          <a:bodyPr rtlCol="0" anchor="ctr"/>
+          <a:lstStyle/>
+          <a:p>
+            <a:pPr algn="ctr"/>
+          </a:p>
+        </p:txBody>
+      </p:sp>
+      <p:sp>
+        <p:nvSpPr>
+          <p:cNvPr id="21" name="Rounded Rectangle 20"/>
+          <p:cNvSpPr/>
+          <p:nvPr/>
+        </p:nvSpPr>
+        <p:spPr>
+          <a:xfrm>
+            <a:off x="4686300" y="2770632"/>
+            <a:ext cx="4000500" cy="1444751"/>
+          </a:xfrm>
+          <a:prstGeom prst="roundRect">
+            <a:avLst>
+              <a:gd name="adj" fmla="val 4000"/>
+            </a:avLst>
+          </a:prstGeom>
+          <a:solidFill>
+            <a:srgbClr val="F8FAFC"/>
+          </a:solidFill>
+          <a:ln w="6350">
+            <a:solidFill>
+              <a:srgbClr val="E2E8F0"/>
+            </a:solidFill>
+          </a:ln>
+          <a:effectLst/>
+        </p:spPr>
+        <p:style>
+          <a:lnRef idx="1">
+            <a:schemeClr val="accent1"/>
+          </a:lnRef>
+          <a:fillRef idx="3">
+            <a:schemeClr val="accent1"/>
+          </a:fillRef>
+          <a:effectRef idx="2">
+            <a:schemeClr val="accent1"/>
+          </a:effectRef>
+          <a:fontRef idx="minor">
+            <a:schemeClr val="lt1"/>
+          </a:fontRef>
+        </p:style>
+        <p:txBody>
+          <a:bodyPr rtlCol="0" anchor="ctr"/>
+          <a:lstStyle/>
+          <a:p>
+            <a:pPr algn="ctr"/>
+          </a:p>
+        </p:txBody>
+      </p:sp>
+      <p:sp>
+        <p:nvSpPr>
+          <p:cNvPr id="22" name="TextBox 21"/>
+          <p:cNvSpPr txBox="1"/>
+          <p:nvPr/>
+        </p:nvSpPr>
+        <p:spPr>
+          <a:xfrm>
+            <a:off x="4768596" y="2825496"/>
+            <a:ext cx="3845052" cy="320040"/>
+          </a:xfrm>
+          <a:prstGeom prst="rect">
+            <a:avLst/>
+          </a:prstGeom>
+          <a:noFill/>
+        </p:spPr>
+        <p:txBody>
+          <a:bodyPr wrap="square" anchor="t" lIns="54864" rIns="54864" tIns="54864" bIns="54864">
+            <a:spAutoFit/>
+          </a:bodyPr>
+          <a:lstStyle/>
           <a:p>
             <a:pPr>
               <a:spcAft>
-                <a:spcPts val="0"/>
-              </a:spcAft>
-            </a:pPr>
-            <a:r>
-              <a:rPr sz="1000">
+                <a:spcPts val="400"/>
+              </a:spcAft>
+            </a:pPr>
+            <a:r>
+              <a:rPr sz="1400" b="1" i="0">
                 <a:solidFill>
                   <a:srgbClr val="0F172A"/>
                 </a:solidFill>
-                <a:ea typeface="Consolas"/>
-                <a:cs typeface="Consolas"/>
-                <a:latin typeface="Consolas"/>
-              </a:rPr>
-              <a:t>implementation("google.ai.client.generativeai:generativeai:0.7.0")</a:t>
-            </a:r>
-          </a:p>
+                <a:ea typeface="Sylfaen"/>
+                <a:cs typeface="Sylfaen"/>
+                <a:latin typeface="Sylfaen"/>
+              </a:rPr>
+              <a:t>🔮 ნაბიჯი 4: Gemini / AI Studio (ტესტირება)</a:t>
+            </a:r>
+          </a:p>
+        </p:txBody>
+      </p:sp>
+      <p:sp>
+        <p:nvSpPr>
+          <p:cNvPr id="23" name="TextBox 22"/>
+          <p:cNvSpPr txBox="1"/>
+          <p:nvPr/>
+        </p:nvSpPr>
+        <p:spPr>
+          <a:xfrm>
+            <a:off x="4768596" y="3218688"/>
+            <a:ext cx="3845052" cy="713232"/>
+          </a:xfrm>
+          <a:prstGeom prst="rect">
+            <a:avLst/>
+          </a:prstGeom>
+          <a:noFill/>
+        </p:spPr>
+        <p:txBody>
+          <a:bodyPr wrap="square" anchor="t" lIns="54864" rIns="54864" tIns="54864" bIns="54864">
+            <a:spAutoFit/>
+          </a:bodyPr>
+          <a:lstStyle/>
           <a:p>
             <a:pPr>
               <a:spcAft>
-                <a:spcPts val="0"/>
-              </a:spcAft>
-            </a:pPr>
-            <a:r>
-              <a:rPr sz="1000">
+                <a:spcPts val="400"/>
+              </a:spcAft>
+            </a:pPr>
+            <a:r>
+              <a:rPr sz="1300" b="0" i="0">
                 <a:solidFill>
                   <a:srgbClr val="0F172A"/>
                 </a:solidFill>
-                <a:ea typeface="Consolas"/>
-                <a:cs typeface="Consolas"/>
-                <a:latin typeface="Consolas"/>
-              </a:rPr>
-              <a:t> </a:t>
-            </a:r>
-          </a:p>
-          <a:p>
-            <a:pPr>
-              <a:spcAft>
-                <a:spcPts val="0"/>
-              </a:spcAft>
-            </a:pPr>
-            <a:r>
-              <a:rPr sz="1000">
-                <a:solidFill>
-                  <a:srgbClr val="0F172A"/>
-                </a:solidFill>
-                <a:ea typeface="Consolas"/>
-                <a:cs typeface="Consolas"/>
-                <a:latin typeface="Consolas"/>
-              </a:rPr>
-              <a:t>// Kotlin ინიციალიზაცია:</a:t>
-            </a:r>
-          </a:p>
-          <a:p>
-            <a:pPr>
-              <a:spcAft>
-                <a:spcPts val="0"/>
-              </a:spcAft>
-            </a:pPr>
-            <a:r>
-              <a:rPr sz="1000">
-                <a:solidFill>
-                  <a:srgbClr val="0F172A"/>
-                </a:solidFill>
-                <a:ea typeface="Consolas"/>
-                <a:cs typeface="Consolas"/>
-                <a:latin typeface="Consolas"/>
-              </a:rPr>
-              <a:t>val generativeModel =</a:t>
-            </a:r>
-          </a:p>
-          <a:p>
-            <a:pPr>
-              <a:spcAft>
-                <a:spcPts val="0"/>
-              </a:spcAft>
-            </a:pPr>
-            <a:r>
-              <a:rPr sz="1000">
-                <a:solidFill>
-                  <a:srgbClr val="0F172A"/>
-                </a:solidFill>
-                <a:ea typeface="Consolas"/>
-                <a:cs typeface="Consolas"/>
-                <a:latin typeface="Consolas"/>
-              </a:rPr>
-              <a:t>GenerativeModel(</a:t>
-            </a:r>
-          </a:p>
-          <a:p>
-            <a:pPr>
-              <a:spcAft>
-                <a:spcPts val="0"/>
-              </a:spcAft>
-            </a:pPr>
-            <a:r>
-              <a:rPr sz="1000">
-                <a:solidFill>
-                  <a:srgbClr val="0F172A"/>
-                </a:solidFill>
-                <a:ea typeface="Consolas"/>
-                <a:cs typeface="Consolas"/>
-                <a:latin typeface="Consolas"/>
-              </a:rPr>
-              <a:t>modelName =</a:t>
-            </a:r>
-          </a:p>
-          <a:p>
-            <a:pPr>
-              <a:spcAft>
-                <a:spcPts val="0"/>
-              </a:spcAft>
-            </a:pPr>
-            <a:r>
-              <a:rPr sz="1000">
-                <a:solidFill>
-                  <a:srgbClr val="0F172A"/>
-                </a:solidFill>
-                <a:ea typeface="Consolas"/>
-                <a:cs typeface="Consolas"/>
-                <a:latin typeface="Consolas"/>
-              </a:rPr>
-              <a:t>"gemini-1.5-flash",</a:t>
-            </a:r>
-          </a:p>
-          <a:p>
-            <a:pPr>
-              <a:spcAft>
-                <a:spcPts val="0"/>
-              </a:spcAft>
-            </a:pPr>
-            <a:r>
-              <a:rPr sz="1000">
-                <a:solidFill>
-                  <a:srgbClr val="0F172A"/>
-                </a:solidFill>
-                <a:ea typeface="Consolas"/>
-                <a:cs typeface="Consolas"/>
-                <a:latin typeface="Consolas"/>
-              </a:rPr>
-              <a:t>apiKey =</a:t>
-            </a:r>
-          </a:p>
-          <a:p>
-            <a:pPr>
-              <a:spcAft>
-                <a:spcPts val="0"/>
-              </a:spcAft>
-            </a:pPr>
-            <a:r>
-              <a:rPr sz="1000">
-                <a:solidFill>
-                  <a:srgbClr val="0F172A"/>
-                </a:solidFill>
-                <a:ea typeface="Consolas"/>
-                <a:cs typeface="Consolas"/>
-                <a:latin typeface="Consolas"/>
-              </a:rPr>
-              <a:t>BuildConfig.apiKey</a:t>
-            </a:r>
-          </a:p>
-          <a:p>
-            <a:pPr>
-              <a:spcAft>
-                <a:spcPts val="0"/>
-              </a:spcAft>
-            </a:pPr>
-            <a:r>
-              <a:rPr sz="1000">
-                <a:solidFill>
-                  <a:srgbClr val="0F172A"/>
-                </a:solidFill>
-                <a:ea typeface="Consolas"/>
-                <a:cs typeface="Consolas"/>
-                <a:latin typeface="Consolas"/>
-              </a:rPr>
-              <a:t>)</a:t>
-            </a:r>
-          </a:p>
-        </p:txBody>
-      </p:sp>
-      <p:sp>
-        <p:nvSpPr>
-          <p:cNvPr id="20" name="Rectangle 19"/>
+                <a:ea typeface="Sylfaen"/>
+                <a:cs typeface="Sylfaen"/>
+                <a:latin typeface="Sylfaen"/>
+              </a:rPr>
+              <a:t>როლი: გაუშვით Reasoning ტესტები, შეამოწმეთ ტოკენების ხარჯვა და ოპტიმალური ტემპერატურა. მიზანი: საბოლოო პრომპტის ოპტიმიზაცია და API-სთვის მომზადება.</a:t>
+            </a:r>
+          </a:p>
+        </p:txBody>
+      </p:sp>
+      <p:sp>
+        <p:nvSpPr>
+          <p:cNvPr id="24" name="Rectangle 23"/>
           <p:cNvSpPr/>
           <p:nvPr/>
         </p:nvSpPr>
@@ -29893,7 +29770,7 @@
       </p:sp>
       <p:sp>
         <p:nvSpPr>
-          <p:cNvPr id="21" name="TextBox 20"/>
+          <p:cNvPr id="25" name="TextBox 24"/>
           <p:cNvSpPr txBox="1"/>
           <p:nvPr/>
         </p:nvSpPr>
@@ -30113,7 +29990,7 @@
                 <a:cs typeface="Sylfaen"/>
                 <a:latin typeface="Sylfaen"/>
               </a:rPr>
-              <a:t>Make.com: Interface &amp; Workflow Scenarios</a:t>
+              <a:t>Google AI Studio: Android აპლიკაციის შექმნა &amp; Gemini SDK</a:t>
             </a:r>
           </a:p>
         </p:txBody>
@@ -30214,62 +30091,21 @@
                 <a:cs typeface="Sylfaen"/>
                 <a:latin typeface="Sylfaen"/>
               </a:rPr>
-              <a:t>35 / 49</a:t>
-            </a:r>
-          </a:p>
-        </p:txBody>
-      </p:sp>
-      <p:sp>
-        <p:nvSpPr>
-          <p:cNvPr id="8" name="TextBox 7"/>
-          <p:cNvSpPr txBox="1"/>
+              <a:t>35 / 50</a:t>
+            </a:r>
+          </a:p>
+        </p:txBody>
+      </p:sp>
+      <p:sp>
+        <p:nvSpPr>
+          <p:cNvPr id="8" name="Rectangle 7"/>
+          <p:cNvSpPr/>
           <p:nvPr/>
         </p:nvSpPr>
         <p:spPr>
           <a:xfrm>
             <a:off x="457200" y="1188720"/>
-            <a:ext cx="8229600" cy="475488"/>
-          </a:xfrm>
-          <a:prstGeom prst="rect">
-            <a:avLst/>
-          </a:prstGeom>
-          <a:noFill/>
-        </p:spPr>
-        <p:txBody>
-          <a:bodyPr wrap="square" anchor="t" lIns="54864" rIns="54864" tIns="54864" bIns="54864">
-            <a:spAutoFit/>
-          </a:bodyPr>
-          <a:lstStyle/>
-          <a:p>
-            <a:pPr>
-              <a:spcAft>
-                <a:spcPts val="400"/>
-              </a:spcAft>
-            </a:pPr>
-            <a:r>
-              <a:rPr sz="1300" b="0" i="0">
-                <a:solidFill>
-                  <a:srgbClr val="0F172A"/>
-                </a:solidFill>
-                <a:ea typeface="Sylfaen"/>
-                <a:cs typeface="Sylfaen"/>
-                <a:latin typeface="Sylfaen"/>
-              </a:rPr>
-              <a:t>ავტომატიზაციის ვიზუალური პლატფორმა Make.com:</a:t>
-            </a:r>
-          </a:p>
-        </p:txBody>
-      </p:sp>
-      <p:sp>
-        <p:nvSpPr>
-          <p:cNvPr id="9" name="Rectangle 8"/>
-          <p:cNvSpPr/>
-          <p:nvPr/>
-        </p:nvSpPr>
-        <p:spPr>
-          <a:xfrm>
-            <a:off x="457200" y="1737360"/>
-            <a:ext cx="54864" cy="3113532"/>
+            <a:ext cx="54864" cy="3662172"/>
           </a:xfrm>
           <a:prstGeom prst="rect">
             <a:avLst/>
@@ -30306,14 +30142,14 @@
       </p:sp>
       <p:sp>
         <p:nvSpPr>
-          <p:cNvPr id="10" name="Rounded Rectangle 9"/>
-          <p:cNvSpPr/>
-          <p:nvPr/>
-        </p:nvSpPr>
-        <p:spPr>
-          <a:xfrm>
-            <a:off x="512064" y="1737360"/>
-            <a:ext cx="3991356" cy="3113532"/>
+          <p:cNvPr id="9" name="Rounded Rectangle 8"/>
+          <p:cNvSpPr/>
+          <p:nvPr/>
+        </p:nvSpPr>
+        <p:spPr>
+          <a:xfrm>
+            <a:off x="512064" y="1188720"/>
+            <a:ext cx="3991356" cy="3662172"/>
           </a:xfrm>
           <a:prstGeom prst="roundRect">
             <a:avLst>
@@ -30321,6 +30157,278 @@
             </a:avLst>
           </a:prstGeom>
           <a:solidFill>
+            <a:srgbClr val="F8FAFC"/>
+          </a:solidFill>
+          <a:ln w="6350">
+            <a:solidFill>
+              <a:srgbClr val="E2E8F0"/>
+            </a:solidFill>
+          </a:ln>
+          <a:effectLst/>
+        </p:spPr>
+        <p:style>
+          <a:lnRef idx="1">
+            <a:schemeClr val="accent1"/>
+          </a:lnRef>
+          <a:fillRef idx="3">
+            <a:schemeClr val="accent1"/>
+          </a:fillRef>
+          <a:effectRef idx="2">
+            <a:schemeClr val="accent1"/>
+          </a:effectRef>
+          <a:fontRef idx="minor">
+            <a:schemeClr val="lt1"/>
+          </a:fontRef>
+        </p:style>
+        <p:txBody>
+          <a:bodyPr rtlCol="0" anchor="ctr"/>
+          <a:lstStyle/>
+          <a:p>
+            <a:pPr algn="ctr"/>
+          </a:p>
+        </p:txBody>
+      </p:sp>
+      <p:sp>
+        <p:nvSpPr>
+          <p:cNvPr id="10" name="TextBox 9"/>
+          <p:cNvSpPr txBox="1"/>
+          <p:nvPr/>
+        </p:nvSpPr>
+        <p:spPr>
+          <a:xfrm>
+            <a:off x="621792" y="1261872"/>
+            <a:ext cx="3771900" cy="320040"/>
+          </a:xfrm>
+          <a:prstGeom prst="rect">
+            <a:avLst/>
+          </a:prstGeom>
+          <a:noFill/>
+        </p:spPr>
+        <p:txBody>
+          <a:bodyPr wrap="square" anchor="t" lIns="54864" rIns="54864" tIns="54864" bIns="54864">
+            <a:spAutoFit/>
+          </a:bodyPr>
+          <a:lstStyle/>
+          <a:p>
+            <a:pPr>
+              <a:spcAft>
+                <a:spcPts val="400"/>
+              </a:spcAft>
+            </a:pPr>
+            <a:r>
+              <a:rPr sz="1400" b="1" i="0">
+                <a:solidFill>
+                  <a:srgbClr val="0F172A"/>
+                </a:solidFill>
+                <a:ea typeface="Sylfaen"/>
+                <a:cs typeface="Sylfaen"/>
+                <a:latin typeface="Sylfaen"/>
+              </a:rPr>
+              <a:t>🛠️ 1. Google AI Studio &amp; API გასაღები:</a:t>
+            </a:r>
+          </a:p>
+        </p:txBody>
+      </p:sp>
+      <p:sp>
+        <p:nvSpPr>
+          <p:cNvPr id="11" name="TextBox 10"/>
+          <p:cNvSpPr txBox="1"/>
+          <p:nvPr/>
+        </p:nvSpPr>
+        <p:spPr>
+          <a:xfrm>
+            <a:off x="621792" y="1655064"/>
+            <a:ext cx="3771900" cy="3122675"/>
+          </a:xfrm>
+          <a:prstGeom prst="rect">
+            <a:avLst/>
+          </a:prstGeom>
+          <a:noFill/>
+        </p:spPr>
+        <p:txBody>
+          <a:bodyPr wrap="square" anchor="t" lIns="54864" rIns="54864" tIns="54864" bIns="54864">
+            <a:spAutoFit/>
+          </a:bodyPr>
+          <a:lstStyle/>
+          <a:p>
+            <a:pPr algn="l">
+              <a:spcAft>
+                <a:spcPts val="300"/>
+              </a:spcAft>
+            </a:pPr>
+            <a:r>
+              <a:rPr sz="1300" b="1">
+                <a:solidFill>
+                  <a:srgbClr val="3730A3"/>
+                </a:solidFill>
+                <a:ea typeface="Sylfaen"/>
+                <a:cs typeface="Sylfaen"/>
+                <a:latin typeface="Sylfaen"/>
+              </a:rPr>
+              <a:t>▸  </a:t>
+            </a:r>
+            <a:r>
+              <a:rPr sz="1300">
+                <a:solidFill>
+                  <a:srgbClr val="0F172A"/>
+                </a:solidFill>
+                <a:ea typeface="Sylfaen"/>
+                <a:cs typeface="Sylfaen"/>
+                <a:latin typeface="Sylfaen"/>
+              </a:rPr>
+              <a:t>პროტოტიპირება: გამოსცადეთ Prompt-ები, System Instructions და JSON რეჟიმი უშუალოდ ბრაუზერში;</a:t>
+            </a:r>
+          </a:p>
+          <a:p>
+            <a:pPr algn="l">
+              <a:spcAft>
+                <a:spcPts val="300"/>
+              </a:spcAft>
+            </a:pPr>
+            <a:r>
+              <a:rPr sz="1300" b="1">
+                <a:solidFill>
+                  <a:srgbClr val="3730A3"/>
+                </a:solidFill>
+                <a:ea typeface="Sylfaen"/>
+                <a:cs typeface="Sylfaen"/>
+                <a:latin typeface="Sylfaen"/>
+              </a:rPr>
+              <a:t>▸  </a:t>
+            </a:r>
+            <a:r>
+              <a:rPr sz="1300">
+                <a:solidFill>
+                  <a:srgbClr val="0F172A"/>
+                </a:solidFill>
+                <a:ea typeface="Sylfaen"/>
+                <a:cs typeface="Sylfaen"/>
+                <a:latin typeface="Sylfaen"/>
+              </a:rPr>
+              <a:t>API Key გენერაცია: შექმენით უსაფრთხო გასაღები თქვენი პროექტისთვის;</a:t>
+            </a:r>
+          </a:p>
+          <a:p>
+            <a:pPr algn="l">
+              <a:spcAft>
+                <a:spcPts val="300"/>
+              </a:spcAft>
+            </a:pPr>
+            <a:r>
+              <a:rPr sz="1300" b="1">
+                <a:solidFill>
+                  <a:srgbClr val="3730A3"/>
+                </a:solidFill>
+                <a:ea typeface="Sylfaen"/>
+                <a:cs typeface="Sylfaen"/>
+                <a:latin typeface="Sylfaen"/>
+              </a:rPr>
+              <a:t>▸  </a:t>
+            </a:r>
+            <a:r>
+              <a:rPr sz="1300">
+                <a:solidFill>
+                  <a:srgbClr val="0F172A"/>
+                </a:solidFill>
+                <a:ea typeface="Sylfaen"/>
+                <a:cs typeface="Sylfaen"/>
+                <a:latin typeface="Sylfaen"/>
+              </a:rPr>
+              <a:t>Build რეჟიმი: დაწერეთ პრომპტი ბუნებრივ ენაზე, AI Studio თავად ააწყობს native Kotlin/Jetpack Compose Android პროექტს;</a:t>
+            </a:r>
+          </a:p>
+          <a:p>
+            <a:pPr algn="l">
+              <a:spcAft>
+                <a:spcPts val="300"/>
+              </a:spcAft>
+            </a:pPr>
+            <a:r>
+              <a:rPr sz="1300" b="1">
+                <a:solidFill>
+                  <a:srgbClr val="3730A3"/>
+                </a:solidFill>
+                <a:ea typeface="Sylfaen"/>
+                <a:cs typeface="Sylfaen"/>
+                <a:latin typeface="Sylfaen"/>
+              </a:rPr>
+              <a:t>▸  </a:t>
+            </a:r>
+            <a:r>
+              <a:rPr sz="1300">
+                <a:solidFill>
+                  <a:srgbClr val="0F172A"/>
+                </a:solidFill>
+                <a:ea typeface="Sylfaen"/>
+                <a:cs typeface="Sylfaen"/>
+                <a:latin typeface="Sylfaen"/>
+              </a:rPr>
+              <a:t>ბრაუზერული ემულატორი: დატესტეთ აპლიკაცია ინსტალაციის გარეშე და გააკეთეთ ექსპორტი Android Studio-ში.</a:t>
+            </a:r>
+          </a:p>
+        </p:txBody>
+      </p:sp>
+      <p:sp>
+        <p:nvSpPr>
+          <p:cNvPr id="12" name="Rectangle 11"/>
+          <p:cNvSpPr/>
+          <p:nvPr/>
+        </p:nvSpPr>
+        <p:spPr>
+          <a:xfrm>
+            <a:off x="4640580" y="1188720"/>
+            <a:ext cx="54864" cy="3662172"/>
+          </a:xfrm>
+          <a:prstGeom prst="rect">
+            <a:avLst/>
+          </a:prstGeom>
+          <a:solidFill>
+            <a:srgbClr val="3730A3"/>
+          </a:solidFill>
+          <a:ln>
+            <a:noFill/>
+          </a:ln>
+          <a:effectLst/>
+        </p:spPr>
+        <p:style>
+          <a:lnRef idx="1">
+            <a:schemeClr val="accent1"/>
+          </a:lnRef>
+          <a:fillRef idx="3">
+            <a:schemeClr val="accent1"/>
+          </a:fillRef>
+          <a:effectRef idx="2">
+            <a:schemeClr val="accent1"/>
+          </a:effectRef>
+          <a:fontRef idx="minor">
+            <a:schemeClr val="lt1"/>
+          </a:fontRef>
+        </p:style>
+        <p:txBody>
+          <a:bodyPr rtlCol="0" anchor="ctr"/>
+          <a:lstStyle/>
+          <a:p>
+            <a:pPr algn="ctr"/>
+          </a:p>
+        </p:txBody>
+      </p:sp>
+      <p:sp>
+        <p:nvSpPr>
+          <p:cNvPr id="13" name="Rounded Rectangle 12"/>
+          <p:cNvSpPr/>
+          <p:nvPr/>
+        </p:nvSpPr>
+        <p:spPr>
+          <a:xfrm>
+            <a:off x="4695444" y="1188720"/>
+            <a:ext cx="3991356" cy="3662172"/>
+          </a:xfrm>
+          <a:prstGeom prst="roundRect">
+            <a:avLst>
+              <a:gd name="adj" fmla="val 4000"/>
+            </a:avLst>
+          </a:prstGeom>
+          <a:solidFill>
             <a:srgbClr val="EEF2FF"/>
           </a:solidFill>
           <a:ln w="6350">
@@ -30354,13 +30462,13 @@
       </p:sp>
       <p:sp>
         <p:nvSpPr>
-          <p:cNvPr id="11" name="TextBox 10"/>
+          <p:cNvPr id="14" name="TextBox 13"/>
           <p:cNvSpPr txBox="1"/>
           <p:nvPr/>
         </p:nvSpPr>
         <p:spPr>
           <a:xfrm>
-            <a:off x="621792" y="1810512"/>
+            <a:off x="4805172" y="1261872"/>
             <a:ext cx="3771900" cy="320040"/>
           </a:xfrm>
           <a:prstGeom prst="rect">
@@ -30388,21 +30496,21 @@
                 <a:cs typeface="Sylfaen"/>
                 <a:latin typeface="Sylfaen"/>
               </a:rPr>
-              <a:t>Make.com ძირითადი ელემენტები:</a:t>
-            </a:r>
-          </a:p>
-        </p:txBody>
-      </p:sp>
-      <p:sp>
-        <p:nvSpPr>
-          <p:cNvPr id="12" name="TextBox 11"/>
+              <a:t>📲 2. Android Studio &amp; SDK ინტეგრაცია:</a:t>
+            </a:r>
+          </a:p>
+        </p:txBody>
+      </p:sp>
+      <p:sp>
+        <p:nvSpPr>
+          <p:cNvPr id="15" name="TextBox 14"/>
           <p:cNvSpPr txBox="1"/>
           <p:nvPr/>
         </p:nvSpPr>
         <p:spPr>
           <a:xfrm>
-            <a:off x="621792" y="2203704"/>
-            <a:ext cx="3771900" cy="2267712"/>
+            <a:off x="4805172" y="1655064"/>
+            <a:ext cx="3771900" cy="713232"/>
           </a:xfrm>
           <a:prstGeom prst="rect">
             <a:avLst/>
@@ -30415,24 +30523,13 @@
           </a:bodyPr>
           <a:lstStyle/>
           <a:p>
-            <a:pPr algn="l">
-              <a:spcAft>
-                <a:spcPts val="300"/>
-              </a:spcAft>
-            </a:pPr>
-            <a:r>
-              <a:rPr sz="1300" b="1">
-                <a:solidFill>
-                  <a:srgbClr val="3730A3"/>
-                </a:solidFill>
-                <a:ea typeface="Sylfaen"/>
-                <a:cs typeface="Sylfaen"/>
-                <a:latin typeface="Sylfaen"/>
-              </a:rPr>
-              <a:t>▸  </a:t>
-            </a:r>
-            <a:r>
-              <a:rPr sz="1300">
+            <a:pPr>
+              <a:spcAft>
+                <a:spcPts val="400"/>
+              </a:spcAft>
+            </a:pPr>
+            <a:r>
+              <a:rPr sz="1300" b="0" i="0">
                 <a:solidFill>
                   <a:srgbClr val="0F172A"/>
                 </a:solidFill>
@@ -30440,28 +30537,40 @@
                 <a:cs typeface="Sylfaen"/>
                 <a:latin typeface="Sylfaen"/>
               </a:rPr>
-              <a:t>Scenarios: სრული ავტომატიზაციის სქემები;</a:t>
-            </a:r>
-          </a:p>
-          <a:p>
-            <a:pPr algn="l">
-              <a:spcAft>
-                <a:spcPts val="300"/>
-              </a:spcAft>
-            </a:pPr>
-            <a:r>
-              <a:rPr sz="1300" b="1">
-                <a:solidFill>
-                  <a:srgbClr val="3730A3"/>
-                </a:solidFill>
-                <a:ea typeface="Sylfaen"/>
-                <a:cs typeface="Sylfaen"/>
-                <a:latin typeface="Sylfaen"/>
-              </a:rPr>
-              <a:t>▸  </a:t>
-            </a:r>
-            <a:r>
-              <a:rPr sz="1300">
+              <a:t>A. Firebase AI Logic SDK (რეკომენდებული): მართავს უსაფრთხოებას და გასაღებებს Cloud-ში, იცავს API Key-ს გაჟონვისგან.</a:t>
+            </a:r>
+          </a:p>
+        </p:txBody>
+      </p:sp>
+      <p:sp>
+        <p:nvSpPr>
+          <p:cNvPr id="16" name="TextBox 15"/>
+          <p:cNvSpPr txBox="1"/>
+          <p:nvPr/>
+        </p:nvSpPr>
+        <p:spPr>
+          <a:xfrm>
+            <a:off x="4805172" y="2441448"/>
+            <a:ext cx="3771900" cy="475488"/>
+          </a:xfrm>
+          <a:prstGeom prst="rect">
+            <a:avLst/>
+          </a:prstGeom>
+          <a:noFill/>
+        </p:spPr>
+        <p:txBody>
+          <a:bodyPr wrap="square" anchor="t" lIns="54864" rIns="54864" tIns="54864" bIns="54864">
+            <a:spAutoFit/>
+          </a:bodyPr>
+          <a:lstStyle/>
+          <a:p>
+            <a:pPr>
+              <a:spcAft>
+                <a:spcPts val="400"/>
+              </a:spcAft>
+            </a:pPr>
+            <a:r>
+              <a:rPr sz="1300" b="0" i="0">
                 <a:solidFill>
                   <a:srgbClr val="0F172A"/>
                 </a:solidFill>
@@ -30469,94 +30578,21 @@
                 <a:cs typeface="Sylfaen"/>
                 <a:latin typeface="Sylfaen"/>
               </a:rPr>
-              <a:t>Modules: აპლიკაციების ბლოკები (მაგ. Gmail, Google Sheets);</a:t>
-            </a:r>
-          </a:p>
-          <a:p>
-            <a:pPr algn="l">
-              <a:spcAft>
-                <a:spcPts val="300"/>
-              </a:spcAft>
-            </a:pPr>
-            <a:r>
-              <a:rPr sz="1300" b="1">
-                <a:solidFill>
-                  <a:srgbClr val="3730A3"/>
-                </a:solidFill>
-                <a:ea typeface="Sylfaen"/>
-                <a:cs typeface="Sylfaen"/>
-                <a:latin typeface="Sylfaen"/>
-              </a:rPr>
-              <a:t>▸  </a:t>
-            </a:r>
-            <a:r>
-              <a:rPr sz="1300">
-                <a:solidFill>
-                  <a:srgbClr val="0F172A"/>
-                </a:solidFill>
-                <a:ea typeface="Sylfaen"/>
-                <a:cs typeface="Sylfaen"/>
-                <a:latin typeface="Sylfaen"/>
-              </a:rPr>
-              <a:t>Filters: პირობები მონაცემთა გასაფილტრად.</a:t>
-            </a:r>
-          </a:p>
-        </p:txBody>
-      </p:sp>
-      <p:sp>
-        <p:nvSpPr>
-          <p:cNvPr id="13" name="Rectangle 12"/>
-          <p:cNvSpPr/>
-          <p:nvPr/>
-        </p:nvSpPr>
-        <p:spPr>
-          <a:xfrm>
-            <a:off x="4640580" y="1737360"/>
-            <a:ext cx="54864" cy="3113532"/>
-          </a:xfrm>
-          <a:prstGeom prst="rect">
-            <a:avLst/>
-          </a:prstGeom>
-          <a:solidFill>
-            <a:srgbClr val="3730A3"/>
-          </a:solidFill>
-          <a:ln>
-            <a:noFill/>
-          </a:ln>
-          <a:effectLst/>
-        </p:spPr>
-        <p:style>
-          <a:lnRef idx="1">
-            <a:schemeClr val="accent1"/>
-          </a:lnRef>
-          <a:fillRef idx="3">
-            <a:schemeClr val="accent1"/>
-          </a:fillRef>
-          <a:effectRef idx="2">
-            <a:schemeClr val="accent1"/>
-          </a:effectRef>
-          <a:fontRef idx="minor">
-            <a:schemeClr val="lt1"/>
-          </a:fontRef>
-        </p:style>
-        <p:txBody>
-          <a:bodyPr rtlCol="0" anchor="ctr"/>
-          <a:lstStyle/>
-          <a:p>
-            <a:pPr algn="ctr"/>
-          </a:p>
-        </p:txBody>
-      </p:sp>
-      <p:sp>
-        <p:nvSpPr>
-          <p:cNvPr id="14" name="Rounded Rectangle 13"/>
-          <p:cNvSpPr/>
-          <p:nvPr/>
-        </p:nvSpPr>
-        <p:spPr>
-          <a:xfrm>
-            <a:off x="4695444" y="1737360"/>
-            <a:ext cx="3991356" cy="3113532"/>
+              <a:t>B. Google AI Client SDK (პირდაპირი კავშირი):</a:t>
+            </a:r>
+          </a:p>
+        </p:txBody>
+      </p:sp>
+      <p:sp>
+        <p:nvSpPr>
+          <p:cNvPr id="17" name="Rounded Rectangle 16"/>
+          <p:cNvSpPr/>
+          <p:nvPr/>
+        </p:nvSpPr>
+        <p:spPr>
+          <a:xfrm>
+            <a:off x="4805172" y="2990088"/>
+            <a:ext cx="3771900" cy="1787651"/>
           </a:xfrm>
           <a:prstGeom prst="roundRect">
             <a:avLst>
@@ -30566,6 +30602,52 @@
           <a:solidFill>
             <a:srgbClr val="F8FAFC"/>
           </a:solidFill>
+          <a:ln w="9525">
+            <a:solidFill>
+              <a:srgbClr val="E2E8F0"/>
+            </a:solidFill>
+          </a:ln>
+          <a:effectLst/>
+        </p:spPr>
+        <p:style>
+          <a:lnRef idx="1">
+            <a:schemeClr val="accent1"/>
+          </a:lnRef>
+          <a:fillRef idx="3">
+            <a:schemeClr val="accent1"/>
+          </a:fillRef>
+          <a:effectRef idx="2">
+            <a:schemeClr val="accent1"/>
+          </a:effectRef>
+          <a:fontRef idx="minor">
+            <a:schemeClr val="lt1"/>
+          </a:fontRef>
+        </p:style>
+        <p:txBody>
+          <a:bodyPr rtlCol="0" anchor="ctr"/>
+          <a:lstStyle/>
+          <a:p>
+            <a:pPr algn="ctr"/>
+          </a:p>
+        </p:txBody>
+      </p:sp>
+      <p:sp>
+        <p:nvSpPr>
+          <p:cNvPr id="18" name="Rectangle 17"/>
+          <p:cNvSpPr/>
+          <p:nvPr/>
+        </p:nvSpPr>
+        <p:spPr>
+          <a:xfrm>
+            <a:off x="4860036" y="3035808"/>
+            <a:ext cx="3662172" cy="1696211"/>
+          </a:xfrm>
+          <a:prstGeom prst="rect">
+            <a:avLst/>
+          </a:prstGeom>
+          <a:solidFill>
+            <a:srgbClr val="FFFFFF"/>
+          </a:solidFill>
           <a:ln w="6350">
             <a:solidFill>
               <a:srgbClr val="E2E8F0"/>
@@ -30597,14 +30679,14 @@
       </p:sp>
       <p:sp>
         <p:nvSpPr>
-          <p:cNvPr id="15" name="TextBox 14"/>
+          <p:cNvPr id="19" name="TextBox 18"/>
           <p:cNvSpPr txBox="1"/>
           <p:nvPr/>
         </p:nvSpPr>
         <p:spPr>
           <a:xfrm>
-            <a:off x="4805172" y="1810512"/>
-            <a:ext cx="3771900" cy="320040"/>
+            <a:off x="4914900" y="3054096"/>
+            <a:ext cx="3552444" cy="1659635"/>
           </a:xfrm>
           <a:prstGeom prst="rect">
             <a:avLst/>
@@ -30619,67 +30701,224 @@
           <a:p>
             <a:pPr>
               <a:spcAft>
-                <a:spcPts val="400"/>
-              </a:spcAft>
-            </a:pPr>
-            <a:r>
-              <a:rPr sz="1400" b="1" i="0">
+                <a:spcPts val="0"/>
+              </a:spcAft>
+            </a:pPr>
+            <a:r>
+              <a:rPr sz="1000">
                 <a:solidFill>
                   <a:srgbClr val="0F172A"/>
                 </a:solidFill>
-                <a:ea typeface="Sylfaen"/>
-                <a:cs typeface="Sylfaen"/>
-                <a:latin typeface="Sylfaen"/>
-              </a:rPr>
-              <a:t>🚀 რატომ Make?</a:t>
-            </a:r>
-          </a:p>
-        </p:txBody>
-      </p:sp>
-      <p:sp>
-        <p:nvSpPr>
-          <p:cNvPr id="16" name="TextBox 15"/>
-          <p:cNvSpPr txBox="1"/>
-          <p:nvPr/>
-        </p:nvSpPr>
-        <p:spPr>
-          <a:xfrm>
-            <a:off x="4805172" y="2203704"/>
-            <a:ext cx="3771900" cy="713232"/>
-          </a:xfrm>
-          <a:prstGeom prst="rect">
-            <a:avLst/>
-          </a:prstGeom>
-          <a:noFill/>
-        </p:spPr>
-        <p:txBody>
-          <a:bodyPr wrap="square" anchor="t" lIns="54864" rIns="54864" tIns="54864" bIns="54864">
-            <a:spAutoFit/>
-          </a:bodyPr>
-          <a:lstStyle/>
+                <a:ea typeface="Consolas"/>
+                <a:cs typeface="Consolas"/>
+                <a:latin typeface="Consolas"/>
+              </a:rPr>
+              <a:t> </a:t>
+            </a:r>
+          </a:p>
           <a:p>
             <a:pPr>
               <a:spcAft>
-                <a:spcPts val="400"/>
-              </a:spcAft>
-            </a:pPr>
-            <a:r>
-              <a:rPr sz="1300" b="0" i="0">
+                <a:spcPts val="0"/>
+              </a:spcAft>
+            </a:pPr>
+            <a:r>
+              <a:rPr sz="1000">
                 <a:solidFill>
                   <a:srgbClr val="0F172A"/>
                 </a:solidFill>
-                <a:ea typeface="Sylfaen"/>
-                <a:cs typeface="Sylfaen"/>
-                <a:latin typeface="Sylfaen"/>
-              </a:rPr>
-              <a:t>იგი არის ვიზუალური, მარტივი გამოსაყენებელი და უფასო ვერსიაში გაძლევთ 1000 ოპერაციას თვეში.</a:t>
-            </a:r>
-          </a:p>
-        </p:txBody>
-      </p:sp>
-      <p:sp>
-        <p:nvSpPr>
-          <p:cNvPr id="17" name="Rectangle 16"/>
+                <a:ea typeface="Consolas"/>
+                <a:cs typeface="Consolas"/>
+                <a:latin typeface="Consolas"/>
+              </a:rPr>
+              <a:t>// build.gradle.kts:</a:t>
+            </a:r>
+          </a:p>
+          <a:p>
+            <a:pPr>
+              <a:spcAft>
+                <a:spcPts val="0"/>
+              </a:spcAft>
+            </a:pPr>
+            <a:r>
+              <a:rPr sz="1000">
+                <a:solidFill>
+                  <a:srgbClr val="0F172A"/>
+                </a:solidFill>
+                <a:ea typeface="Consolas"/>
+                <a:cs typeface="Consolas"/>
+                <a:latin typeface="Consolas"/>
+              </a:rPr>
+              <a:t>implementation("google.ai.client.generativeai:generativeai:0.7.0")</a:t>
+            </a:r>
+          </a:p>
+          <a:p>
+            <a:pPr>
+              <a:spcAft>
+                <a:spcPts val="0"/>
+              </a:spcAft>
+            </a:pPr>
+            <a:r>
+              <a:rPr sz="1000">
+                <a:solidFill>
+                  <a:srgbClr val="0F172A"/>
+                </a:solidFill>
+                <a:ea typeface="Consolas"/>
+                <a:cs typeface="Consolas"/>
+                <a:latin typeface="Consolas"/>
+              </a:rPr>
+              <a:t> </a:t>
+            </a:r>
+          </a:p>
+          <a:p>
+            <a:pPr>
+              <a:spcAft>
+                <a:spcPts val="0"/>
+              </a:spcAft>
+            </a:pPr>
+            <a:r>
+              <a:rPr sz="1000">
+                <a:solidFill>
+                  <a:srgbClr val="0F172A"/>
+                </a:solidFill>
+                <a:ea typeface="Consolas"/>
+                <a:cs typeface="Consolas"/>
+                <a:latin typeface="Consolas"/>
+              </a:rPr>
+              <a:t>// Kotlin ინიციალიზაცია:</a:t>
+            </a:r>
+          </a:p>
+          <a:p>
+            <a:pPr>
+              <a:spcAft>
+                <a:spcPts val="0"/>
+              </a:spcAft>
+            </a:pPr>
+            <a:r>
+              <a:rPr sz="1000">
+                <a:solidFill>
+                  <a:srgbClr val="0F172A"/>
+                </a:solidFill>
+                <a:ea typeface="Consolas"/>
+                <a:cs typeface="Consolas"/>
+                <a:latin typeface="Consolas"/>
+              </a:rPr>
+              <a:t>val generativeModel =</a:t>
+            </a:r>
+          </a:p>
+          <a:p>
+            <a:pPr>
+              <a:spcAft>
+                <a:spcPts val="0"/>
+              </a:spcAft>
+            </a:pPr>
+            <a:r>
+              <a:rPr sz="1000">
+                <a:solidFill>
+                  <a:srgbClr val="0F172A"/>
+                </a:solidFill>
+                <a:ea typeface="Consolas"/>
+                <a:cs typeface="Consolas"/>
+                <a:latin typeface="Consolas"/>
+              </a:rPr>
+              <a:t>GenerativeModel(</a:t>
+            </a:r>
+          </a:p>
+          <a:p>
+            <a:pPr>
+              <a:spcAft>
+                <a:spcPts val="0"/>
+              </a:spcAft>
+            </a:pPr>
+            <a:r>
+              <a:rPr sz="1000">
+                <a:solidFill>
+                  <a:srgbClr val="0F172A"/>
+                </a:solidFill>
+                <a:ea typeface="Consolas"/>
+                <a:cs typeface="Consolas"/>
+                <a:latin typeface="Consolas"/>
+              </a:rPr>
+              <a:t>modelName =</a:t>
+            </a:r>
+          </a:p>
+          <a:p>
+            <a:pPr>
+              <a:spcAft>
+                <a:spcPts val="0"/>
+              </a:spcAft>
+            </a:pPr>
+            <a:r>
+              <a:rPr sz="1000">
+                <a:solidFill>
+                  <a:srgbClr val="0F172A"/>
+                </a:solidFill>
+                <a:ea typeface="Consolas"/>
+                <a:cs typeface="Consolas"/>
+                <a:latin typeface="Consolas"/>
+              </a:rPr>
+              <a:t>"gemini-1.5-flash",</a:t>
+            </a:r>
+          </a:p>
+          <a:p>
+            <a:pPr>
+              <a:spcAft>
+                <a:spcPts val="0"/>
+              </a:spcAft>
+            </a:pPr>
+            <a:r>
+              <a:rPr sz="1000">
+                <a:solidFill>
+                  <a:srgbClr val="0F172A"/>
+                </a:solidFill>
+                <a:ea typeface="Consolas"/>
+                <a:cs typeface="Consolas"/>
+                <a:latin typeface="Consolas"/>
+              </a:rPr>
+              <a:t>apiKey =</a:t>
+            </a:r>
+          </a:p>
+          <a:p>
+            <a:pPr>
+              <a:spcAft>
+                <a:spcPts val="0"/>
+              </a:spcAft>
+            </a:pPr>
+            <a:r>
+              <a:rPr sz="1000">
+                <a:solidFill>
+                  <a:srgbClr val="0F172A"/>
+                </a:solidFill>
+                <a:ea typeface="Consolas"/>
+                <a:cs typeface="Consolas"/>
+                <a:latin typeface="Consolas"/>
+              </a:rPr>
+              <a:t>BuildConfig.apiKey</a:t>
+            </a:r>
+          </a:p>
+          <a:p>
+            <a:pPr>
+              <a:spcAft>
+                <a:spcPts val="0"/>
+              </a:spcAft>
+            </a:pPr>
+            <a:r>
+              <a:rPr sz="1000">
+                <a:solidFill>
+                  <a:srgbClr val="0F172A"/>
+                </a:solidFill>
+                <a:ea typeface="Consolas"/>
+                <a:cs typeface="Consolas"/>
+                <a:latin typeface="Consolas"/>
+              </a:rPr>
+              <a:t>)</a:t>
+            </a:r>
+          </a:p>
+        </p:txBody>
+      </p:sp>
+      <p:sp>
+        <p:nvSpPr>
+          <p:cNvPr id="20" name="Rectangle 19"/>
           <p:cNvSpPr/>
           <p:nvPr/>
         </p:nvSpPr>
@@ -30723,7 +30962,7 @@
       </p:sp>
       <p:sp>
         <p:nvSpPr>
-          <p:cNvPr id="18" name="TextBox 17"/>
+          <p:cNvPr id="21" name="TextBox 20"/>
           <p:cNvSpPr txBox="1"/>
           <p:nvPr/>
         </p:nvSpPr>
@@ -30943,7 +31182,7 @@
                 <a:cs typeface="Sylfaen"/>
                 <a:latin typeface="Sylfaen"/>
               </a:rPr>
-              <a:t>Make.com: Webhooks setup &amp; JSON mapping</a:t>
+              <a:t>Make.com: Interface &amp; Workflow Scenarios</a:t>
             </a:r>
           </a:p>
         </p:txBody>
@@ -31044,7 +31283,7 @@
                 <a:cs typeface="Sylfaen"/>
                 <a:latin typeface="Sylfaen"/>
               </a:rPr>
-              <a:t>36 / 49</a:t>
+              <a:t>36 / 50</a:t>
             </a:r>
           </a:p>
         </p:txBody>
@@ -31085,7 +31324,7 @@
                 <a:cs typeface="Sylfaen"/>
                 <a:latin typeface="Sylfaen"/>
               </a:rPr>
-              <a:t>მონაცემთა მყისიერი მიღება საიტიდან (Webhook):</a:t>
+              <a:t>ავტომატიზაციის ვიზუალური პლატფორმა Make.com:</a:t>
             </a:r>
           </a:p>
         </p:txBody>
@@ -31099,13 +31338,13 @@
         <p:spPr>
           <a:xfrm>
             <a:off x="457200" y="1737360"/>
-            <a:ext cx="54864" cy="1581912"/>
-          </a:xfrm>
-          <a:prstGeom prst="rect">
-            <a:avLst/>
-          </a:prstGeom>
-          <a:solidFill>
-            <a:srgbClr val="4F46E5"/>
+            <a:ext cx="54864" cy="3113532"/>
+          </a:xfrm>
+          <a:prstGeom prst="rect">
+            <a:avLst/>
+          </a:prstGeom>
+          <a:solidFill>
+            <a:srgbClr val="3730A3"/>
           </a:solidFill>
           <a:ln>
             <a:noFill/>
@@ -31143,7 +31382,7 @@
         <p:spPr>
           <a:xfrm>
             <a:off x="512064" y="1737360"/>
-            <a:ext cx="3991356" cy="1581912"/>
+            <a:ext cx="3991356" cy="3113532"/>
           </a:xfrm>
           <a:prstGeom prst="roundRect">
             <a:avLst>
@@ -31151,11 +31390,11 @@
             </a:avLst>
           </a:prstGeom>
           <a:solidFill>
-            <a:srgbClr val="FFF7ED"/>
+            <a:srgbClr val="EEF2FF"/>
           </a:solidFill>
           <a:ln w="6350">
             <a:solidFill>
-              <a:srgbClr val="4F46E5"/>
+              <a:srgbClr val="3730A3"/>
             </a:solidFill>
           </a:ln>
           <a:effectLst/>
@@ -31218,7 +31457,7 @@
                 <a:cs typeface="Sylfaen"/>
                 <a:latin typeface="Sylfaen"/>
               </a:rPr>
-              <a:t>🌐 რა არის Webhook?</a:t>
+              <a:t>Make.com ძირითადი ელემენტები:</a:t>
             </a:r>
           </a:p>
         </p:txBody>
@@ -31232,7 +31471,7 @@
         <p:spPr>
           <a:xfrm>
             <a:off x="621792" y="2203704"/>
-            <a:ext cx="3771900" cy="713232"/>
+            <a:ext cx="3771900" cy="2267712"/>
           </a:xfrm>
           <a:prstGeom prst="rect">
             <a:avLst/>
@@ -31245,13 +31484,24 @@
           </a:bodyPr>
           <a:lstStyle/>
           <a:p>
-            <a:pPr>
-              <a:spcAft>
-                <a:spcPts val="400"/>
-              </a:spcAft>
-            </a:pPr>
-            <a:r>
-              <a:rPr sz="1300" b="0" i="0">
+            <a:pPr algn="l">
+              <a:spcAft>
+                <a:spcPts val="300"/>
+              </a:spcAft>
+            </a:pPr>
+            <a:r>
+              <a:rPr sz="1300" b="1">
+                <a:solidFill>
+                  <a:srgbClr val="3730A3"/>
+                </a:solidFill>
+                <a:ea typeface="Sylfaen"/>
+                <a:cs typeface="Sylfaen"/>
+                <a:latin typeface="Sylfaen"/>
+              </a:rPr>
+              <a:t>▸  </a:t>
+            </a:r>
+            <a:r>
+              <a:rPr sz="1300">
                 <a:solidFill>
                   <a:srgbClr val="0F172A"/>
                 </a:solidFill>
@@ -31259,7 +31509,65 @@
                 <a:cs typeface="Sylfaen"/>
                 <a:latin typeface="Sylfaen"/>
               </a:rPr>
-              <a:t>ეს არის URL მისამართი Make.com-ში, რომელიც ელოდება მონაცემების გამოგზავნას საიტიდან. ყოველი ფორმის შევსებისას Lovable აგზავნის მონაცემებს ამ მისამართზე.</a:t>
+              <a:t>Scenarios: სრული ავტომატიზაციის სქემები;</a:t>
+            </a:r>
+          </a:p>
+          <a:p>
+            <a:pPr algn="l">
+              <a:spcAft>
+                <a:spcPts val="300"/>
+              </a:spcAft>
+            </a:pPr>
+            <a:r>
+              <a:rPr sz="1300" b="1">
+                <a:solidFill>
+                  <a:srgbClr val="3730A3"/>
+                </a:solidFill>
+                <a:ea typeface="Sylfaen"/>
+                <a:cs typeface="Sylfaen"/>
+                <a:latin typeface="Sylfaen"/>
+              </a:rPr>
+              <a:t>▸  </a:t>
+            </a:r>
+            <a:r>
+              <a:rPr sz="1300">
+                <a:solidFill>
+                  <a:srgbClr val="0F172A"/>
+                </a:solidFill>
+                <a:ea typeface="Sylfaen"/>
+                <a:cs typeface="Sylfaen"/>
+                <a:latin typeface="Sylfaen"/>
+              </a:rPr>
+              <a:t>Modules: აპლიკაციების ბლოკები (მაგ. Gmail, Google Sheets);</a:t>
+            </a:r>
+          </a:p>
+          <a:p>
+            <a:pPr algn="l">
+              <a:spcAft>
+                <a:spcPts val="300"/>
+              </a:spcAft>
+            </a:pPr>
+            <a:r>
+              <a:rPr sz="1300" b="1">
+                <a:solidFill>
+                  <a:srgbClr val="3730A3"/>
+                </a:solidFill>
+                <a:ea typeface="Sylfaen"/>
+                <a:cs typeface="Sylfaen"/>
+                <a:latin typeface="Sylfaen"/>
+              </a:rPr>
+              <a:t>▸  </a:t>
+            </a:r>
+            <a:r>
+              <a:rPr sz="1300">
+                <a:solidFill>
+                  <a:srgbClr val="0F172A"/>
+                </a:solidFill>
+                <a:ea typeface="Sylfaen"/>
+                <a:cs typeface="Sylfaen"/>
+                <a:latin typeface="Sylfaen"/>
+              </a:rPr>
+              <a:t>Filters: პირობები მონაცემთა გასაფილტრად.</a:t>
             </a:r>
           </a:p>
         </p:txBody>
@@ -31273,7 +31581,7 @@
         <p:spPr>
           <a:xfrm>
             <a:off x="4640580" y="1737360"/>
-            <a:ext cx="54864" cy="1581912"/>
+            <a:ext cx="54864" cy="3113532"/>
           </a:xfrm>
           <a:prstGeom prst="rect">
             <a:avLst/>
@@ -31317,7 +31625,7 @@
         <p:spPr>
           <a:xfrm>
             <a:off x="4695444" y="1737360"/>
-            <a:ext cx="3991356" cy="1581912"/>
+            <a:ext cx="3991356" cy="3113532"/>
           </a:xfrm>
           <a:prstGeom prst="roundRect">
             <a:avLst>
@@ -31392,7 +31700,7 @@
                 <a:cs typeface="Sylfaen"/>
                 <a:latin typeface="Sylfaen"/>
               </a:rPr>
-              <a:t>⚙️ JSON Mapping:</a:t>
+              <a:t>🚀 რატომ Make?</a:t>
             </a:r>
           </a:p>
         </p:txBody>
@@ -31433,7 +31741,7 @@
                 <a:cs typeface="Sylfaen"/>
                 <a:latin typeface="Sylfaen"/>
               </a:rPr>
-              <a:t>Webhook-ის გააქტიურების შემდეგ გაუშვით ტესტური რეგისტრაცია საიტზე, რათა Make-მა ავტომატურად ამოიცნოს ცვლადები (Email, Name).</a:t>
+              <a:t>იგი არის ვიზუალური, მარტივი გამოსაყენებელი და უფასო ვერსიაში გაძლევთ 1000 ოპერაციას თვეში.</a:t>
             </a:r>
           </a:p>
         </p:txBody>
@@ -31704,7 +32012,7 @@
                 <a:cs typeface="Sylfaen"/>
                 <a:latin typeface="Sylfaen"/>
               </a:rPr>
-              <a:t>🛠️ პრაქტიკული დავალება #4: Automation Workflow Make.com-ში (30 წუთი)</a:t>
+              <a:t>Make.com: Webhooks setup &amp; JSON mapping</a:t>
             </a:r>
           </a:p>
         </p:txBody>
@@ -31805,7 +32113,7 @@
                 <a:cs typeface="Sylfaen"/>
                 <a:latin typeface="Sylfaen"/>
               </a:rPr>
-              <a:t>37 / 49</a:t>
+              <a:t>37 / 50</a:t>
             </a:r>
           </a:p>
         </p:txBody>
@@ -31846,7 +32154,7 @@
                 <a:cs typeface="Sylfaen"/>
                 <a:latin typeface="Sylfaen"/>
               </a:rPr>
-              <a:t>ააწყვეთ ავტომატიზაციის სქემა Make.com-ზე:</a:t>
+              <a:t>მონაცემთა მყისიერი მიღება საიტიდან (Webhook):</a:t>
             </a:r>
           </a:p>
         </p:txBody>
@@ -31860,13 +32168,13 @@
         <p:spPr>
           <a:xfrm>
             <a:off x="457200" y="1737360"/>
-            <a:ext cx="54864" cy="3113532"/>
-          </a:xfrm>
-          <a:prstGeom prst="rect">
-            <a:avLst/>
-          </a:prstGeom>
-          <a:solidFill>
-            <a:srgbClr val="3730A3"/>
+            <a:ext cx="54864" cy="1581912"/>
+          </a:xfrm>
+          <a:prstGeom prst="rect">
+            <a:avLst/>
+          </a:prstGeom>
+          <a:solidFill>
+            <a:srgbClr val="4F46E5"/>
           </a:solidFill>
           <a:ln>
             <a:noFill/>
@@ -31904,7 +32212,7 @@
         <p:spPr>
           <a:xfrm>
             <a:off x="512064" y="1737360"/>
-            <a:ext cx="3991356" cy="3113532"/>
+            <a:ext cx="3991356" cy="1581912"/>
           </a:xfrm>
           <a:prstGeom prst="roundRect">
             <a:avLst>
@@ -31912,6 +32220,180 @@
             </a:avLst>
           </a:prstGeom>
           <a:solidFill>
+            <a:srgbClr val="FFF7ED"/>
+          </a:solidFill>
+          <a:ln w="6350">
+            <a:solidFill>
+              <a:srgbClr val="4F46E5"/>
+            </a:solidFill>
+          </a:ln>
+          <a:effectLst/>
+        </p:spPr>
+        <p:style>
+          <a:lnRef idx="1">
+            <a:schemeClr val="accent1"/>
+          </a:lnRef>
+          <a:fillRef idx="3">
+            <a:schemeClr val="accent1"/>
+          </a:fillRef>
+          <a:effectRef idx="2">
+            <a:schemeClr val="accent1"/>
+          </a:effectRef>
+          <a:fontRef idx="minor">
+            <a:schemeClr val="lt1"/>
+          </a:fontRef>
+        </p:style>
+        <p:txBody>
+          <a:bodyPr rtlCol="0" anchor="ctr"/>
+          <a:lstStyle/>
+          <a:p>
+            <a:pPr algn="ctr"/>
+          </a:p>
+        </p:txBody>
+      </p:sp>
+      <p:sp>
+        <p:nvSpPr>
+          <p:cNvPr id="11" name="TextBox 10"/>
+          <p:cNvSpPr txBox="1"/>
+          <p:nvPr/>
+        </p:nvSpPr>
+        <p:spPr>
+          <a:xfrm>
+            <a:off x="621792" y="1810512"/>
+            <a:ext cx="3771900" cy="320040"/>
+          </a:xfrm>
+          <a:prstGeom prst="rect">
+            <a:avLst/>
+          </a:prstGeom>
+          <a:noFill/>
+        </p:spPr>
+        <p:txBody>
+          <a:bodyPr wrap="square" anchor="t" lIns="54864" rIns="54864" tIns="54864" bIns="54864">
+            <a:spAutoFit/>
+          </a:bodyPr>
+          <a:lstStyle/>
+          <a:p>
+            <a:pPr>
+              <a:spcAft>
+                <a:spcPts val="400"/>
+              </a:spcAft>
+            </a:pPr>
+            <a:r>
+              <a:rPr sz="1400" b="1" i="0">
+                <a:solidFill>
+                  <a:srgbClr val="0F172A"/>
+                </a:solidFill>
+                <a:ea typeface="Sylfaen"/>
+                <a:cs typeface="Sylfaen"/>
+                <a:latin typeface="Sylfaen"/>
+              </a:rPr>
+              <a:t>🌐 რა არის Webhook?</a:t>
+            </a:r>
+          </a:p>
+        </p:txBody>
+      </p:sp>
+      <p:sp>
+        <p:nvSpPr>
+          <p:cNvPr id="12" name="TextBox 11"/>
+          <p:cNvSpPr txBox="1"/>
+          <p:nvPr/>
+        </p:nvSpPr>
+        <p:spPr>
+          <a:xfrm>
+            <a:off x="621792" y="2203704"/>
+            <a:ext cx="3771900" cy="713232"/>
+          </a:xfrm>
+          <a:prstGeom prst="rect">
+            <a:avLst/>
+          </a:prstGeom>
+          <a:noFill/>
+        </p:spPr>
+        <p:txBody>
+          <a:bodyPr wrap="square" anchor="t" lIns="54864" rIns="54864" tIns="54864" bIns="54864">
+            <a:spAutoFit/>
+          </a:bodyPr>
+          <a:lstStyle/>
+          <a:p>
+            <a:pPr>
+              <a:spcAft>
+                <a:spcPts val="400"/>
+              </a:spcAft>
+            </a:pPr>
+            <a:r>
+              <a:rPr sz="1300" b="0" i="0">
+                <a:solidFill>
+                  <a:srgbClr val="0F172A"/>
+                </a:solidFill>
+                <a:ea typeface="Sylfaen"/>
+                <a:cs typeface="Sylfaen"/>
+                <a:latin typeface="Sylfaen"/>
+              </a:rPr>
+              <a:t>ეს არის URL მისამართი Make.com-ში, რომელიც ელოდება მონაცემების გამოგზავნას საიტიდან. ყოველი ფორმის შევსებისას Lovable აგზავნის მონაცემებს ამ მისამართზე.</a:t>
+            </a:r>
+          </a:p>
+        </p:txBody>
+      </p:sp>
+      <p:sp>
+        <p:nvSpPr>
+          <p:cNvPr id="13" name="Rectangle 12"/>
+          <p:cNvSpPr/>
+          <p:nvPr/>
+        </p:nvSpPr>
+        <p:spPr>
+          <a:xfrm>
+            <a:off x="4640580" y="1737360"/>
+            <a:ext cx="54864" cy="1581912"/>
+          </a:xfrm>
+          <a:prstGeom prst="rect">
+            <a:avLst/>
+          </a:prstGeom>
+          <a:solidFill>
+            <a:srgbClr val="3730A3"/>
+          </a:solidFill>
+          <a:ln>
+            <a:noFill/>
+          </a:ln>
+          <a:effectLst/>
+        </p:spPr>
+        <p:style>
+          <a:lnRef idx="1">
+            <a:schemeClr val="accent1"/>
+          </a:lnRef>
+          <a:fillRef idx="3">
+            <a:schemeClr val="accent1"/>
+          </a:fillRef>
+          <a:effectRef idx="2">
+            <a:schemeClr val="accent1"/>
+          </a:effectRef>
+          <a:fontRef idx="minor">
+            <a:schemeClr val="lt1"/>
+          </a:fontRef>
+        </p:style>
+        <p:txBody>
+          <a:bodyPr rtlCol="0" anchor="ctr"/>
+          <a:lstStyle/>
+          <a:p>
+            <a:pPr algn="ctr"/>
+          </a:p>
+        </p:txBody>
+      </p:sp>
+      <p:sp>
+        <p:nvSpPr>
+          <p:cNvPr id="14" name="Rounded Rectangle 13"/>
+          <p:cNvSpPr/>
+          <p:nvPr/>
+        </p:nvSpPr>
+        <p:spPr>
+          <a:xfrm>
+            <a:off x="4695444" y="1737360"/>
+            <a:ext cx="3991356" cy="1581912"/>
+          </a:xfrm>
+          <a:prstGeom prst="roundRect">
+            <a:avLst>
+              <a:gd name="adj" fmla="val 4000"/>
+            </a:avLst>
+          </a:prstGeom>
+          <a:solidFill>
             <a:srgbClr val="F8FAFC"/>
           </a:solidFill>
           <a:ln w="6350">
@@ -31945,13 +32427,13 @@
       </p:sp>
       <p:sp>
         <p:nvSpPr>
-          <p:cNvPr id="11" name="TextBox 10"/>
+          <p:cNvPr id="15" name="TextBox 14"/>
           <p:cNvSpPr txBox="1"/>
           <p:nvPr/>
         </p:nvSpPr>
         <p:spPr>
           <a:xfrm>
-            <a:off x="621792" y="1810512"/>
+            <a:off x="4805172" y="1810512"/>
             <a:ext cx="3771900" cy="320040"/>
           </a:xfrm>
           <a:prstGeom prst="rect">
@@ -31979,21 +32461,21 @@
                 <a:cs typeface="Sylfaen"/>
                 <a:latin typeface="Sylfaen"/>
               </a:rPr>
-              <a:t>📋 ინსტრუქცია:</a:t>
-            </a:r>
-          </a:p>
-        </p:txBody>
-      </p:sp>
-      <p:sp>
-        <p:nvSpPr>
-          <p:cNvPr id="12" name="TextBox 11"/>
+              <a:t>⚙️ JSON Mapping:</a:t>
+            </a:r>
+          </a:p>
+        </p:txBody>
+      </p:sp>
+      <p:sp>
+        <p:nvSpPr>
+          <p:cNvPr id="16" name="TextBox 15"/>
           <p:cNvSpPr txBox="1"/>
           <p:nvPr/>
         </p:nvSpPr>
         <p:spPr>
           <a:xfrm>
-            <a:off x="621792" y="2203704"/>
-            <a:ext cx="3771900" cy="2267712"/>
+            <a:off x="4805172" y="2203704"/>
+            <a:ext cx="3771900" cy="713232"/>
           </a:xfrm>
           <a:prstGeom prst="rect">
             <a:avLst/>
@@ -32006,24 +32488,13 @@
           </a:bodyPr>
           <a:lstStyle/>
           <a:p>
-            <a:pPr algn="l">
-              <a:spcAft>
-                <a:spcPts val="300"/>
-              </a:spcAft>
-            </a:pPr>
-            <a:r>
-              <a:rPr sz="1300" b="1">
-                <a:solidFill>
-                  <a:srgbClr val="3730A3"/>
-                </a:solidFill>
-                <a:ea typeface="Sylfaen"/>
-                <a:cs typeface="Sylfaen"/>
-                <a:latin typeface="Sylfaen"/>
-              </a:rPr>
-              <a:t>▸  </a:t>
-            </a:r>
-            <a:r>
-              <a:rPr sz="1300">
+            <a:pPr>
+              <a:spcAft>
+                <a:spcPts val="400"/>
+              </a:spcAft>
+            </a:pPr>
+            <a:r>
+              <a:rPr sz="1300" b="0" i="0">
                 <a:solidFill>
                   <a:srgbClr val="0F172A"/>
                 </a:solidFill>
@@ -32031,85 +32502,27 @@
                 <a:cs typeface="Sylfaen"/>
                 <a:latin typeface="Sylfaen"/>
               </a:rPr>
-              <a:t>შექმენით ანგარიში Make.com -ზე და დაიწყეთ Scenario;</a:t>
-            </a:r>
-          </a:p>
-          <a:p>
-            <a:pPr algn="l">
-              <a:spcAft>
-                <a:spcPts val="300"/>
-              </a:spcAft>
-            </a:pPr>
-            <a:r>
-              <a:rPr sz="1300" b="1">
-                <a:solidFill>
-                  <a:srgbClr val="3730A3"/>
-                </a:solidFill>
-                <a:ea typeface="Sylfaen"/>
-                <a:cs typeface="Sylfaen"/>
-                <a:latin typeface="Sylfaen"/>
-              </a:rPr>
-              <a:t>▸  </a:t>
-            </a:r>
-            <a:r>
-              <a:rPr sz="1300">
-                <a:solidFill>
-                  <a:srgbClr val="0F172A"/>
-                </a:solidFill>
-                <a:ea typeface="Sylfaen"/>
-                <a:cs typeface="Sylfaen"/>
-                <a:latin typeface="Sylfaen"/>
-              </a:rPr>
-              <a:t>დაამატეთ Webhook trigger და დაუკავშირეთ თქვენს Landing Page-ს;</a:t>
-            </a:r>
-          </a:p>
-          <a:p>
-            <a:pPr algn="l">
-              <a:spcAft>
-                <a:spcPts val="300"/>
-              </a:spcAft>
-            </a:pPr>
-            <a:r>
-              <a:rPr sz="1300" b="1">
-                <a:solidFill>
-                  <a:srgbClr val="3730A3"/>
-                </a:solidFill>
-                <a:ea typeface="Sylfaen"/>
-                <a:cs typeface="Sylfaen"/>
-                <a:latin typeface="Sylfaen"/>
-              </a:rPr>
-              <a:t>▸  </a:t>
-            </a:r>
-            <a:r>
-              <a:rPr sz="1300">
-                <a:solidFill>
-                  <a:srgbClr val="0F172A"/>
-                </a:solidFill>
-                <a:ea typeface="Sylfaen"/>
-                <a:cs typeface="Sylfaen"/>
-                <a:latin typeface="Sylfaen"/>
-              </a:rPr>
-              <a:t>დაამატეთ Gmail/SMTP და Google Sheets მოდულები და გააკეთეთ mapping.</a:t>
-            </a:r>
-          </a:p>
-        </p:txBody>
-      </p:sp>
-      <p:sp>
-        <p:nvSpPr>
-          <p:cNvPr id="13" name="Rectangle 12"/>
-          <p:cNvSpPr/>
-          <p:nvPr/>
-        </p:nvSpPr>
-        <p:spPr>
-          <a:xfrm>
-            <a:off x="621792" y="4544568"/>
-            <a:ext cx="54864" cy="233171"/>
-          </a:xfrm>
-          <a:prstGeom prst="rect">
-            <a:avLst/>
-          </a:prstGeom>
-          <a:solidFill>
-            <a:srgbClr val="3730A3"/>
+              <a:t>Webhook-ის გააქტიურების შემდეგ გაუშვით ტესტური რეგისტრაცია საიტზე, რათა Make-მა ავტომატურად ამოიცნოს ცვლადები (Email, Name).</a:t>
+            </a:r>
+          </a:p>
+        </p:txBody>
+      </p:sp>
+      <p:sp>
+        <p:nvSpPr>
+          <p:cNvPr id="17" name="Rectangle 16"/>
+          <p:cNvSpPr/>
+          <p:nvPr/>
+        </p:nvSpPr>
+        <p:spPr>
+          <a:xfrm>
+            <a:off x="457200" y="4850892"/>
+            <a:ext cx="8229600" cy="13716"/>
+          </a:xfrm>
+          <a:prstGeom prst="rect">
+            <a:avLst/>
+          </a:prstGeom>
+          <a:solidFill>
+            <a:srgbClr val="E2E8F0"/>
           </a:solidFill>
           <a:ln>
             <a:noFill/>
@@ -32140,865 +32553,7 @@
       </p:sp>
       <p:sp>
         <p:nvSpPr>
-          <p:cNvPr id="14" name="Rounded Rectangle 13"/>
-          <p:cNvSpPr/>
-          <p:nvPr/>
-        </p:nvSpPr>
-        <p:spPr>
-          <a:xfrm>
-            <a:off x="676656" y="4544568"/>
-            <a:ext cx="3717036" cy="233171"/>
-          </a:xfrm>
-          <a:prstGeom prst="roundRect">
-            <a:avLst>
-              <a:gd name="adj" fmla="val 4000"/>
-            </a:avLst>
-          </a:prstGeom>
-          <a:solidFill>
-            <a:srgbClr val="F8FAFC"/>
-          </a:solidFill>
-          <a:ln w="9525">
-            <a:solidFill>
-              <a:srgbClr val="E2E8F0"/>
-            </a:solidFill>
-          </a:ln>
-          <a:effectLst/>
-        </p:spPr>
-        <p:style>
-          <a:lnRef idx="1">
-            <a:schemeClr val="accent1"/>
-          </a:lnRef>
-          <a:fillRef idx="3">
-            <a:schemeClr val="accent1"/>
-          </a:fillRef>
-          <a:effectRef idx="2">
-            <a:schemeClr val="accent1"/>
-          </a:effectRef>
-          <a:fontRef idx="minor">
-            <a:schemeClr val="lt1"/>
-          </a:fontRef>
-        </p:style>
-        <p:txBody>
-          <a:bodyPr rtlCol="0" anchor="ctr"/>
-          <a:lstStyle/>
-          <a:p>
-            <a:pPr algn="ctr"/>
-          </a:p>
-        </p:txBody>
-      </p:sp>
-      <p:sp>
-        <p:nvSpPr>
-          <p:cNvPr id="15" name="Rectangle 14"/>
-          <p:cNvSpPr/>
-          <p:nvPr/>
-        </p:nvSpPr>
-        <p:spPr>
-          <a:xfrm>
-            <a:off x="4640580" y="1737360"/>
-            <a:ext cx="54864" cy="3113532"/>
-          </a:xfrm>
-          <a:prstGeom prst="rect">
-            <a:avLst/>
-          </a:prstGeom>
-          <a:solidFill>
-            <a:srgbClr val="3730A3"/>
-          </a:solidFill>
-          <a:ln>
-            <a:noFill/>
-          </a:ln>
-          <a:effectLst/>
-        </p:spPr>
-        <p:style>
-          <a:lnRef idx="1">
-            <a:schemeClr val="accent1"/>
-          </a:lnRef>
-          <a:fillRef idx="3">
-            <a:schemeClr val="accent1"/>
-          </a:fillRef>
-          <a:effectRef idx="2">
-            <a:schemeClr val="accent1"/>
-          </a:effectRef>
-          <a:fontRef idx="minor">
-            <a:schemeClr val="lt1"/>
-          </a:fontRef>
-        </p:style>
-        <p:txBody>
-          <a:bodyPr rtlCol="0" anchor="ctr"/>
-          <a:lstStyle/>
-          <a:p>
-            <a:pPr algn="ctr"/>
-          </a:p>
-        </p:txBody>
-      </p:sp>
-      <p:sp>
-        <p:nvSpPr>
-          <p:cNvPr id="16" name="Rounded Rectangle 15"/>
-          <p:cNvSpPr/>
-          <p:nvPr/>
-        </p:nvSpPr>
-        <p:spPr>
-          <a:xfrm>
-            <a:off x="4695444" y="1737360"/>
-            <a:ext cx="3991356" cy="3113532"/>
-          </a:xfrm>
-          <a:prstGeom prst="roundRect">
-            <a:avLst>
-              <a:gd name="adj" fmla="val 4000"/>
-            </a:avLst>
-          </a:prstGeom>
-          <a:solidFill>
-            <a:srgbClr val="F8FAFC"/>
-          </a:solidFill>
-          <a:ln w="6350">
-            <a:solidFill>
-              <a:srgbClr val="3730A3"/>
-            </a:solidFill>
-          </a:ln>
-          <a:effectLst/>
-        </p:spPr>
-        <p:style>
-          <a:lnRef idx="1">
-            <a:schemeClr val="accent1"/>
-          </a:lnRef>
-          <a:fillRef idx="3">
-            <a:schemeClr val="accent1"/>
-          </a:fillRef>
-          <a:effectRef idx="2">
-            <a:schemeClr val="accent1"/>
-          </a:effectRef>
-          <a:fontRef idx="minor">
-            <a:schemeClr val="lt1"/>
-          </a:fontRef>
-        </p:style>
-        <p:txBody>
-          <a:bodyPr rtlCol="0" anchor="ctr"/>
-          <a:lstStyle/>
-          <a:p>
-            <a:pPr algn="ctr"/>
-          </a:p>
-        </p:txBody>
-      </p:sp>
-      <p:sp>
-        <p:nvSpPr>
-          <p:cNvPr id="17" name="Rectangle 16"/>
-          <p:cNvSpPr/>
-          <p:nvPr/>
-        </p:nvSpPr>
-        <p:spPr>
-          <a:xfrm>
-            <a:off x="4805172" y="1810512"/>
-            <a:ext cx="54864" cy="292608"/>
-          </a:xfrm>
-          <a:prstGeom prst="rect">
-            <a:avLst/>
-          </a:prstGeom>
-          <a:solidFill>
-            <a:srgbClr val="3730A3"/>
-          </a:solidFill>
-          <a:ln>
-            <a:noFill/>
-          </a:ln>
-          <a:effectLst/>
-        </p:spPr>
-        <p:style>
-          <a:lnRef idx="1">
-            <a:schemeClr val="accent1"/>
-          </a:lnRef>
-          <a:fillRef idx="3">
-            <a:schemeClr val="accent1"/>
-          </a:fillRef>
-          <a:effectRef idx="2">
-            <a:schemeClr val="accent1"/>
-          </a:effectRef>
-          <a:fontRef idx="minor">
-            <a:schemeClr val="lt1"/>
-          </a:fontRef>
-        </p:style>
-        <p:txBody>
-          <a:bodyPr rtlCol="0" anchor="ctr"/>
-          <a:lstStyle/>
-          <a:p>
-            <a:pPr algn="ctr"/>
-          </a:p>
-        </p:txBody>
-      </p:sp>
-      <p:sp>
-        <p:nvSpPr>
-          <p:cNvPr id="18" name="Rounded Rectangle 17"/>
-          <p:cNvSpPr/>
-          <p:nvPr/>
-        </p:nvSpPr>
-        <p:spPr>
-          <a:xfrm>
-            <a:off x="4860036" y="1810512"/>
-            <a:ext cx="3717036" cy="292608"/>
-          </a:xfrm>
-          <a:prstGeom prst="roundRect">
-            <a:avLst>
-              <a:gd name="adj" fmla="val 4000"/>
-            </a:avLst>
-          </a:prstGeom>
-          <a:solidFill>
-            <a:srgbClr val="F8FAFC"/>
-          </a:solidFill>
-          <a:ln w="9525">
-            <a:solidFill>
-              <a:srgbClr val="E2E8F0"/>
-            </a:solidFill>
-          </a:ln>
-          <a:effectLst/>
-        </p:spPr>
-        <p:style>
-          <a:lnRef idx="1">
-            <a:schemeClr val="accent1"/>
-          </a:lnRef>
-          <a:fillRef idx="3">
-            <a:schemeClr val="accent1"/>
-          </a:fillRef>
-          <a:effectRef idx="2">
-            <a:schemeClr val="accent1"/>
-          </a:effectRef>
-          <a:fontRef idx="minor">
-            <a:schemeClr val="lt1"/>
-          </a:fontRef>
-        </p:style>
-        <p:txBody>
-          <a:bodyPr rtlCol="0" anchor="ctr"/>
-          <a:lstStyle/>
-          <a:p>
-            <a:pPr algn="ctr"/>
-          </a:p>
-        </p:txBody>
-      </p:sp>
-      <p:sp>
-        <p:nvSpPr>
-          <p:cNvPr id="19" name="Rectangle 18"/>
-          <p:cNvSpPr/>
-          <p:nvPr/>
-        </p:nvSpPr>
-        <p:spPr>
-          <a:xfrm>
-            <a:off x="4914900" y="1865376"/>
-            <a:ext cx="3552444" cy="201168"/>
-          </a:xfrm>
-          <a:prstGeom prst="rect">
-            <a:avLst/>
-          </a:prstGeom>
-          <a:solidFill>
-            <a:srgbClr val="FFFFFF"/>
-          </a:solidFill>
-          <a:ln w="6350">
-            <a:solidFill>
-              <a:srgbClr val="E2E8F0"/>
-            </a:solidFill>
-          </a:ln>
-          <a:effectLst/>
-        </p:spPr>
-        <p:style>
-          <a:lnRef idx="1">
-            <a:schemeClr val="accent1"/>
-          </a:lnRef>
-          <a:fillRef idx="3">
-            <a:schemeClr val="accent1"/>
-          </a:fillRef>
-          <a:effectRef idx="2">
-            <a:schemeClr val="accent1"/>
-          </a:effectRef>
-          <a:fontRef idx="minor">
-            <a:schemeClr val="lt1"/>
-          </a:fontRef>
-        </p:style>
-        <p:txBody>
-          <a:bodyPr rtlCol="0" anchor="ctr"/>
-          <a:lstStyle/>
-          <a:p>
-            <a:pPr algn="ctr"/>
-          </a:p>
-        </p:txBody>
-      </p:sp>
-      <p:sp>
-        <p:nvSpPr>
-          <p:cNvPr id="20" name="TextBox 19"/>
-          <p:cNvSpPr txBox="1"/>
-          <p:nvPr/>
-        </p:nvSpPr>
-        <p:spPr>
-          <a:xfrm>
-            <a:off x="4969764" y="1892807"/>
-            <a:ext cx="3442716" cy="146304"/>
-          </a:xfrm>
-          <a:prstGeom prst="rect">
-            <a:avLst/>
-          </a:prstGeom>
-          <a:noFill/>
-        </p:spPr>
-        <p:txBody>
-          <a:bodyPr wrap="square" anchor="t" lIns="54864" rIns="54864" tIns="54864" bIns="54864">
-            <a:spAutoFit/>
-          </a:bodyPr>
-          <a:lstStyle/>
-          <a:p>
-            <a:pPr>
-              <a:spcAft>
-                <a:spcPts val="0"/>
-              </a:spcAft>
-            </a:pPr>
-            <a:r>
-              <a:rPr sz="800">
-                <a:solidFill>
-                  <a:srgbClr val="0F172A"/>
-                </a:solidFill>
-                <a:ea typeface="Consolas"/>
-                <a:cs typeface="Consolas"/>
-                <a:latin typeface="Consolas"/>
-              </a:rPr>
-              <a:t>Make.com სცენარის</a:t>
-            </a:r>
-          </a:p>
-          <a:p>
-            <a:pPr>
-              <a:spcAft>
-                <a:spcPts val="0"/>
-              </a:spcAft>
-            </a:pPr>
-            <a:r>
-              <a:rPr sz="800">
-                <a:solidFill>
-                  <a:srgbClr val="0F172A"/>
-                </a:solidFill>
-                <a:ea typeface="Consolas"/>
-                <a:cs typeface="Consolas"/>
-                <a:latin typeface="Consolas"/>
-              </a:rPr>
-              <a:t>კონფიგურაცია:</a:t>
-            </a:r>
-          </a:p>
-        </p:txBody>
-      </p:sp>
-      <p:sp>
-        <p:nvSpPr>
-          <p:cNvPr id="21" name="Rounded Rectangle 20"/>
-          <p:cNvSpPr/>
-          <p:nvPr/>
-        </p:nvSpPr>
-        <p:spPr>
-          <a:xfrm>
-            <a:off x="4805172" y="2176272"/>
-            <a:ext cx="3771900" cy="2601468"/>
-          </a:xfrm>
-          <a:prstGeom prst="roundRect">
-            <a:avLst>
-              <a:gd name="adj" fmla="val 4000"/>
-            </a:avLst>
-          </a:prstGeom>
-          <a:solidFill>
-            <a:srgbClr val="F8FAFC"/>
-          </a:solidFill>
-          <a:ln w="9525">
-            <a:solidFill>
-              <a:srgbClr val="E2E8F0"/>
-            </a:solidFill>
-          </a:ln>
-          <a:effectLst/>
-        </p:spPr>
-        <p:style>
-          <a:lnRef idx="1">
-            <a:schemeClr val="accent1"/>
-          </a:lnRef>
-          <a:fillRef idx="3">
-            <a:schemeClr val="accent1"/>
-          </a:fillRef>
-          <a:effectRef idx="2">
-            <a:schemeClr val="accent1"/>
-          </a:effectRef>
-          <a:fontRef idx="minor">
-            <a:schemeClr val="lt1"/>
-          </a:fontRef>
-        </p:style>
-        <p:txBody>
-          <a:bodyPr rtlCol="0" anchor="ctr"/>
-          <a:lstStyle/>
-          <a:p>
-            <a:pPr algn="ctr"/>
-          </a:p>
-        </p:txBody>
-      </p:sp>
-      <p:sp>
-        <p:nvSpPr>
-          <p:cNvPr id="22" name="Rectangle 21"/>
-          <p:cNvSpPr/>
-          <p:nvPr/>
-        </p:nvSpPr>
-        <p:spPr>
-          <a:xfrm>
-            <a:off x="4860036" y="2221991"/>
-            <a:ext cx="3662172" cy="2510027"/>
-          </a:xfrm>
-          <a:prstGeom prst="rect">
-            <a:avLst/>
-          </a:prstGeom>
-          <a:solidFill>
-            <a:srgbClr val="FFFFFF"/>
-          </a:solidFill>
-          <a:ln w="6350">
-            <a:solidFill>
-              <a:srgbClr val="E2E8F0"/>
-            </a:solidFill>
-          </a:ln>
-          <a:effectLst/>
-        </p:spPr>
-        <p:style>
-          <a:lnRef idx="1">
-            <a:schemeClr val="accent1"/>
-          </a:lnRef>
-          <a:fillRef idx="3">
-            <a:schemeClr val="accent1"/>
-          </a:fillRef>
-          <a:effectRef idx="2">
-            <a:schemeClr val="accent1"/>
-          </a:effectRef>
-          <a:fontRef idx="minor">
-            <a:schemeClr val="lt1"/>
-          </a:fontRef>
-        </p:style>
-        <p:txBody>
-          <a:bodyPr rtlCol="0" anchor="ctr"/>
-          <a:lstStyle/>
-          <a:p>
-            <a:pPr algn="ctr"/>
-          </a:p>
-        </p:txBody>
-      </p:sp>
-      <p:sp>
-        <p:nvSpPr>
-          <p:cNvPr id="23" name="TextBox 22"/>
-          <p:cNvSpPr txBox="1"/>
-          <p:nvPr/>
-        </p:nvSpPr>
-        <p:spPr>
-          <a:xfrm>
-            <a:off x="4914900" y="2240279"/>
-            <a:ext cx="3552444" cy="2473451"/>
-          </a:xfrm>
-          <a:prstGeom prst="rect">
-            <a:avLst/>
-          </a:prstGeom>
-          <a:noFill/>
-        </p:spPr>
-        <p:txBody>
-          <a:bodyPr wrap="square" anchor="t" lIns="54864" rIns="54864" tIns="54864" bIns="54864">
-            <a:spAutoFit/>
-          </a:bodyPr>
-          <a:lstStyle/>
-          <a:p>
-            <a:pPr>
-              <a:spcAft>
-                <a:spcPts val="0"/>
-              </a:spcAft>
-            </a:pPr>
-            <a:r>
-              <a:rPr sz="1000">
-                <a:solidFill>
-                  <a:srgbClr val="0F172A"/>
-                </a:solidFill>
-                <a:ea typeface="Consolas"/>
-                <a:cs typeface="Consolas"/>
-                <a:latin typeface="Consolas"/>
-              </a:rPr>
-              <a:t>Scenario: Landing Page</a:t>
-            </a:r>
-          </a:p>
-          <a:p>
-            <a:pPr>
-              <a:spcAft>
-                <a:spcPts val="0"/>
-              </a:spcAft>
-            </a:pPr>
-            <a:r>
-              <a:rPr sz="1000">
-                <a:solidFill>
-                  <a:srgbClr val="0F172A"/>
-                </a:solidFill>
-                <a:ea typeface="Consolas"/>
-                <a:cs typeface="Consolas"/>
-                <a:latin typeface="Consolas"/>
-              </a:rPr>
-              <a:t>Form → Email + CRM Sheets</a:t>
-            </a:r>
-          </a:p>
-          <a:p>
-            <a:pPr>
-              <a:spcAft>
-                <a:spcPts val="0"/>
-              </a:spcAft>
-            </a:pPr>
-            <a:r>
-              <a:rPr sz="1000">
-                <a:solidFill>
-                  <a:srgbClr val="0F172A"/>
-                </a:solidFill>
-                <a:ea typeface="Consolas"/>
-                <a:cs typeface="Consolas"/>
-                <a:latin typeface="Consolas"/>
-              </a:rPr>
-              <a:t>1. TRIGGER: Webhook (POST</a:t>
-            </a:r>
-          </a:p>
-          <a:p>
-            <a:pPr>
-              <a:spcAft>
-                <a:spcPts val="0"/>
-              </a:spcAft>
-            </a:pPr>
-            <a:r>
-              <a:rPr sz="1000">
-                <a:solidFill>
-                  <a:srgbClr val="0F172A"/>
-                </a:solidFill>
-                <a:ea typeface="Consolas"/>
-                <a:cs typeface="Consolas"/>
-                <a:latin typeface="Consolas"/>
-              </a:rPr>
-              <a:t>request)</a:t>
-            </a:r>
-          </a:p>
-          <a:p>
-            <a:pPr>
-              <a:spcAft>
-                <a:spcPts val="0"/>
-              </a:spcAft>
-            </a:pPr>
-            <a:r>
-              <a:rPr sz="1000">
-                <a:solidFill>
-                  <a:srgbClr val="0F172A"/>
-                </a:solidFill>
-                <a:ea typeface="Consolas"/>
-                <a:cs typeface="Consolas"/>
-                <a:latin typeface="Consolas"/>
-              </a:rPr>
-              <a:t>URL: [Lovable-იდან</a:t>
-            </a:r>
-          </a:p>
-          <a:p>
-            <a:pPr>
-              <a:spcAft>
-                <a:spcPts val="0"/>
-              </a:spcAft>
-            </a:pPr>
-            <a:r>
-              <a:rPr sz="1000">
-                <a:solidFill>
-                  <a:srgbClr val="0F172A"/>
-                </a:solidFill>
-                <a:ea typeface="Consolas"/>
-                <a:cs typeface="Consolas"/>
-                <a:latin typeface="Consolas"/>
-              </a:rPr>
-              <a:t>მიღებული Webhook URL]</a:t>
-            </a:r>
-          </a:p>
-          <a:p>
-            <a:pPr>
-              <a:spcAft>
-                <a:spcPts val="0"/>
-              </a:spcAft>
-            </a:pPr>
-            <a:r>
-              <a:rPr sz="1000">
-                <a:solidFill>
-                  <a:srgbClr val="0F172A"/>
-                </a:solidFill>
-                <a:ea typeface="Consolas"/>
-                <a:cs typeface="Consolas"/>
-                <a:latin typeface="Consolas"/>
-              </a:rPr>
-              <a:t>2. MODULE 1: Send Email</a:t>
-            </a:r>
-          </a:p>
-          <a:p>
-            <a:pPr>
-              <a:spcAft>
-                <a:spcPts val="0"/>
-              </a:spcAft>
-            </a:pPr>
-            <a:r>
-              <a:rPr sz="1000">
-                <a:solidFill>
-                  <a:srgbClr val="0F172A"/>
-                </a:solidFill>
-                <a:ea typeface="Consolas"/>
-                <a:cs typeface="Consolas"/>
-                <a:latin typeface="Consolas"/>
-              </a:rPr>
-              <a:t>via Gmail</a:t>
-            </a:r>
-          </a:p>
-          <a:p>
-            <a:pPr>
-              <a:spcAft>
-                <a:spcPts val="0"/>
-              </a:spcAft>
-            </a:pPr>
-            <a:r>
-              <a:rPr sz="1000">
-                <a:solidFill>
-                  <a:srgbClr val="0F172A"/>
-                </a:solidFill>
-                <a:ea typeface="Consolas"/>
-                <a:cs typeface="Consolas"/>
-                <a:latin typeface="Consolas"/>
-              </a:rPr>
-              <a:t>To: {{trigger.email}}</a:t>
-            </a:r>
-          </a:p>
-          <a:p>
-            <a:pPr>
-              <a:spcAft>
-                <a:spcPts val="0"/>
-              </a:spcAft>
-            </a:pPr>
-            <a:r>
-              <a:rPr sz="1000">
-                <a:solidFill>
-                  <a:srgbClr val="0F172A"/>
-                </a:solidFill>
-                <a:ea typeface="Consolas"/>
-                <a:cs typeface="Consolas"/>
-                <a:latin typeface="Consolas"/>
-              </a:rPr>
-              <a:t>Subject: "გმადლობთ</a:t>
-            </a:r>
-          </a:p>
-          <a:p>
-            <a:pPr>
-              <a:spcAft>
-                <a:spcPts val="0"/>
-              </a:spcAft>
-            </a:pPr>
-            <a:r>
-              <a:rPr sz="1000">
-                <a:solidFill>
-                  <a:srgbClr val="0F172A"/>
-                </a:solidFill>
-                <a:ea typeface="Consolas"/>
-                <a:cs typeface="Consolas"/>
-                <a:latin typeface="Consolas"/>
-              </a:rPr>
-              <a:t>რეგისტრაციისთვის!"</a:t>
-            </a:r>
-          </a:p>
-          <a:p>
-            <a:pPr>
-              <a:spcAft>
-                <a:spcPts val="0"/>
-              </a:spcAft>
-            </a:pPr>
-            <a:r>
-              <a:rPr sz="1000">
-                <a:solidFill>
-                  <a:srgbClr val="0F172A"/>
-                </a:solidFill>
-                <a:ea typeface="Consolas"/>
-                <a:cs typeface="Consolas"/>
-                <a:latin typeface="Consolas"/>
-              </a:rPr>
-              <a:t>Body: "ჩვენი გუნდი მალე</a:t>
-            </a:r>
-          </a:p>
-          <a:p>
-            <a:pPr>
-              <a:spcAft>
-                <a:spcPts val="0"/>
-              </a:spcAft>
-            </a:pPr>
-            <a:r>
-              <a:rPr sz="1000">
-                <a:solidFill>
-                  <a:srgbClr val="0F172A"/>
-                </a:solidFill>
-                <a:ea typeface="Consolas"/>
-                <a:cs typeface="Consolas"/>
-                <a:latin typeface="Consolas"/>
-              </a:rPr>
-              <a:t>დაგიკავშირდებათ."</a:t>
-            </a:r>
-          </a:p>
-          <a:p>
-            <a:pPr>
-              <a:spcAft>
-                <a:spcPts val="0"/>
-              </a:spcAft>
-            </a:pPr>
-            <a:r>
-              <a:rPr sz="1000">
-                <a:solidFill>
-                  <a:srgbClr val="0F172A"/>
-                </a:solidFill>
-                <a:ea typeface="Consolas"/>
-                <a:cs typeface="Consolas"/>
-                <a:latin typeface="Consolas"/>
-              </a:rPr>
-              <a:t>3. MODULE 2: Add Row to</a:t>
-            </a:r>
-          </a:p>
-          <a:p>
-            <a:pPr>
-              <a:spcAft>
-                <a:spcPts val="0"/>
-              </a:spcAft>
-            </a:pPr>
-            <a:r>
-              <a:rPr sz="1000">
-                <a:solidFill>
-                  <a:srgbClr val="0F172A"/>
-                </a:solidFill>
-                <a:ea typeface="Consolas"/>
-                <a:cs typeface="Consolas"/>
-                <a:latin typeface="Consolas"/>
-              </a:rPr>
-              <a:t>Google Sheets (leads</a:t>
-            </a:r>
-          </a:p>
-          <a:p>
-            <a:pPr>
-              <a:spcAft>
-                <a:spcPts val="0"/>
-              </a:spcAft>
-            </a:pPr>
-            <a:r>
-              <a:rPr sz="1000">
-                <a:solidFill>
-                  <a:srgbClr val="0F172A"/>
-                </a:solidFill>
-                <a:ea typeface="Consolas"/>
-                <a:cs typeface="Consolas"/>
-                <a:latin typeface="Consolas"/>
-              </a:rPr>
-              <a:t>ცხრილში)</a:t>
-            </a:r>
-          </a:p>
-          <a:p>
-            <a:pPr>
-              <a:spcAft>
-                <a:spcPts val="0"/>
-              </a:spcAft>
-            </a:pPr>
-            <a:r>
-              <a:rPr sz="1000">
-                <a:solidFill>
-                  <a:srgbClr val="0F172A"/>
-                </a:solidFill>
-                <a:ea typeface="Consolas"/>
-                <a:cs typeface="Consolas"/>
-                <a:latin typeface="Consolas"/>
-              </a:rPr>
-              <a:t>Columns: Email, Name, Date</a:t>
-            </a:r>
-          </a:p>
-          <a:p>
-            <a:pPr>
-              <a:spcAft>
-                <a:spcPts val="0"/>
-              </a:spcAft>
-            </a:pPr>
-            <a:r>
-              <a:rPr sz="1000">
-                <a:solidFill>
-                  <a:srgbClr val="0F172A"/>
-                </a:solidFill>
-                <a:ea typeface="Consolas"/>
-                <a:cs typeface="Consolas"/>
-                <a:latin typeface="Consolas"/>
-              </a:rPr>
-              <a:t>4. FILTER: Email is not</a:t>
-            </a:r>
-          </a:p>
-          <a:p>
-            <a:pPr>
-              <a:spcAft>
-                <a:spcPts val="0"/>
-              </a:spcAft>
-            </a:pPr>
-            <a:r>
-              <a:rPr sz="1000">
-                <a:solidFill>
-                  <a:srgbClr val="0F172A"/>
-                </a:solidFill>
-                <a:ea typeface="Consolas"/>
-                <a:cs typeface="Consolas"/>
-                <a:latin typeface="Consolas"/>
-              </a:rPr>
-              <a:t>empty (ცარიელი მეილები</a:t>
-            </a:r>
-          </a:p>
-          <a:p>
-            <a:pPr>
-              <a:spcAft>
-                <a:spcPts val="0"/>
-              </a:spcAft>
-            </a:pPr>
-            <a:r>
-              <a:rPr sz="1000">
-                <a:solidFill>
-                  <a:srgbClr val="0F172A"/>
-                </a:solidFill>
-                <a:ea typeface="Consolas"/>
-                <a:cs typeface="Consolas"/>
-                <a:latin typeface="Consolas"/>
-              </a:rPr>
-              <a:t>იფილტრება)</a:t>
-            </a:r>
-          </a:p>
-        </p:txBody>
-      </p:sp>
-      <p:sp>
-        <p:nvSpPr>
-          <p:cNvPr id="24" name="Rectangle 23"/>
-          <p:cNvSpPr/>
-          <p:nvPr/>
-        </p:nvSpPr>
-        <p:spPr>
-          <a:xfrm>
-            <a:off x="457200" y="4850892"/>
-            <a:ext cx="8229600" cy="13716"/>
-          </a:xfrm>
-          <a:prstGeom prst="rect">
-            <a:avLst/>
-          </a:prstGeom>
-          <a:solidFill>
-            <a:srgbClr val="E2E8F0"/>
-          </a:solidFill>
-          <a:ln>
-            <a:noFill/>
-          </a:ln>
-          <a:effectLst/>
-        </p:spPr>
-        <p:style>
-          <a:lnRef idx="1">
-            <a:schemeClr val="accent1"/>
-          </a:lnRef>
-          <a:fillRef idx="3">
-            <a:schemeClr val="accent1"/>
-          </a:fillRef>
-          <a:effectRef idx="2">
-            <a:schemeClr val="accent1"/>
-          </a:effectRef>
-          <a:fontRef idx="minor">
-            <a:schemeClr val="lt1"/>
-          </a:fontRef>
-        </p:style>
-        <p:txBody>
-          <a:bodyPr rtlCol="0" anchor="ctr"/>
-          <a:lstStyle/>
-          <a:p>
-            <a:pPr algn="ctr"/>
-          </a:p>
-        </p:txBody>
-      </p:sp>
-      <p:sp>
-        <p:nvSpPr>
-          <p:cNvPr id="25" name="TextBox 24"/>
+          <p:cNvPr id="18" name="TextBox 17"/>
           <p:cNvSpPr txBox="1"/>
           <p:nvPr/>
         </p:nvSpPr>
@@ -33218,7 +32773,7 @@
                 <a:cs typeface="Sylfaen"/>
                 <a:latin typeface="Sylfaen"/>
               </a:rPr>
-              <a:t>CRM Scenario: Appending Lead Row in Sheets</a:t>
+              <a:t>🛠️ პრაქტიკული დავალება #4: Automation Workflow Make.com-ში (30 წუთი)</a:t>
             </a:r>
           </a:p>
         </p:txBody>
@@ -33319,7 +32874,7 @@
                 <a:cs typeface="Sylfaen"/>
                 <a:latin typeface="Sylfaen"/>
               </a:rPr>
-              <a:t>38 / 49</a:t>
+              <a:t>38 / 50</a:t>
             </a:r>
           </a:p>
         </p:txBody>
@@ -33360,7 +32915,7 @@
                 <a:cs typeface="Sylfaen"/>
                 <a:latin typeface="Sylfaen"/>
               </a:rPr>
-              <a:t>მონაცემთა ბაზიდან Leads-ის გადატანა Google Sheets CRM-ში:</a:t>
+              <a:t>ააწყვეთ ავტომატიზაციის სქემა Make.com-ზე:</a:t>
             </a:r>
           </a:p>
         </p:txBody>
@@ -33374,7 +32929,7 @@
         <p:spPr>
           <a:xfrm>
             <a:off x="457200" y="1737360"/>
-            <a:ext cx="54864" cy="2313432"/>
+            <a:ext cx="54864" cy="3113532"/>
           </a:xfrm>
           <a:prstGeom prst="rect">
             <a:avLst/>
@@ -33418,7 +32973,7 @@
         <p:spPr>
           <a:xfrm>
             <a:off x="512064" y="1737360"/>
-            <a:ext cx="8174736" cy="2313432"/>
+            <a:ext cx="3991356" cy="3113532"/>
           </a:xfrm>
           <a:prstGeom prst="roundRect">
             <a:avLst>
@@ -33426,9 +32981,344 @@
             </a:avLst>
           </a:prstGeom>
           <a:solidFill>
-            <a:srgbClr val="EEF2FF"/>
+            <a:srgbClr val="F8FAFC"/>
+          </a:solidFill>
+          <a:ln w="6350">
+            <a:solidFill>
+              <a:srgbClr val="E2E8F0"/>
+            </a:solidFill>
+          </a:ln>
+          <a:effectLst/>
+        </p:spPr>
+        <p:style>
+          <a:lnRef idx="1">
+            <a:schemeClr val="accent1"/>
+          </a:lnRef>
+          <a:fillRef idx="3">
+            <a:schemeClr val="accent1"/>
+          </a:fillRef>
+          <a:effectRef idx="2">
+            <a:schemeClr val="accent1"/>
+          </a:effectRef>
+          <a:fontRef idx="minor">
+            <a:schemeClr val="lt1"/>
+          </a:fontRef>
+        </p:style>
+        <p:txBody>
+          <a:bodyPr rtlCol="0" anchor="ctr"/>
+          <a:lstStyle/>
+          <a:p>
+            <a:pPr algn="ctr"/>
+          </a:p>
+        </p:txBody>
+      </p:sp>
+      <p:sp>
+        <p:nvSpPr>
+          <p:cNvPr id="11" name="TextBox 10"/>
+          <p:cNvSpPr txBox="1"/>
+          <p:nvPr/>
+        </p:nvSpPr>
+        <p:spPr>
+          <a:xfrm>
+            <a:off x="621792" y="1810512"/>
+            <a:ext cx="3771900" cy="320040"/>
+          </a:xfrm>
+          <a:prstGeom prst="rect">
+            <a:avLst/>
+          </a:prstGeom>
+          <a:noFill/>
+        </p:spPr>
+        <p:txBody>
+          <a:bodyPr wrap="square" anchor="t" lIns="54864" rIns="54864" tIns="54864" bIns="54864">
+            <a:spAutoFit/>
+          </a:bodyPr>
+          <a:lstStyle/>
+          <a:p>
+            <a:pPr>
+              <a:spcAft>
+                <a:spcPts val="400"/>
+              </a:spcAft>
+            </a:pPr>
+            <a:r>
+              <a:rPr sz="1400" b="1" i="0">
+                <a:solidFill>
+                  <a:srgbClr val="0F172A"/>
+                </a:solidFill>
+                <a:ea typeface="Sylfaen"/>
+                <a:cs typeface="Sylfaen"/>
+                <a:latin typeface="Sylfaen"/>
+              </a:rPr>
+              <a:t>📋 ინსტრუქცია:</a:t>
+            </a:r>
+          </a:p>
+        </p:txBody>
+      </p:sp>
+      <p:sp>
+        <p:nvSpPr>
+          <p:cNvPr id="12" name="TextBox 11"/>
+          <p:cNvSpPr txBox="1"/>
+          <p:nvPr/>
+        </p:nvSpPr>
+        <p:spPr>
+          <a:xfrm>
+            <a:off x="621792" y="2203704"/>
+            <a:ext cx="3771900" cy="2267712"/>
+          </a:xfrm>
+          <a:prstGeom prst="rect">
+            <a:avLst/>
+          </a:prstGeom>
+          <a:noFill/>
+        </p:spPr>
+        <p:txBody>
+          <a:bodyPr wrap="square" anchor="t" lIns="54864" rIns="54864" tIns="54864" bIns="54864">
+            <a:spAutoFit/>
+          </a:bodyPr>
+          <a:lstStyle/>
+          <a:p>
+            <a:pPr algn="l">
+              <a:spcAft>
+                <a:spcPts val="300"/>
+              </a:spcAft>
+            </a:pPr>
+            <a:r>
+              <a:rPr sz="1300" b="1">
+                <a:solidFill>
+                  <a:srgbClr val="3730A3"/>
+                </a:solidFill>
+                <a:ea typeface="Sylfaen"/>
+                <a:cs typeface="Sylfaen"/>
+                <a:latin typeface="Sylfaen"/>
+              </a:rPr>
+              <a:t>▸  </a:t>
+            </a:r>
+            <a:r>
+              <a:rPr sz="1300">
+                <a:solidFill>
+                  <a:srgbClr val="0F172A"/>
+                </a:solidFill>
+                <a:ea typeface="Sylfaen"/>
+                <a:cs typeface="Sylfaen"/>
+                <a:latin typeface="Sylfaen"/>
+              </a:rPr>
+              <a:t>შექმენით ანგარიში Make.com -ზე და დაიწყეთ Scenario;</a:t>
+            </a:r>
+          </a:p>
+          <a:p>
+            <a:pPr algn="l">
+              <a:spcAft>
+                <a:spcPts val="300"/>
+              </a:spcAft>
+            </a:pPr>
+            <a:r>
+              <a:rPr sz="1300" b="1">
+                <a:solidFill>
+                  <a:srgbClr val="3730A3"/>
+                </a:solidFill>
+                <a:ea typeface="Sylfaen"/>
+                <a:cs typeface="Sylfaen"/>
+                <a:latin typeface="Sylfaen"/>
+              </a:rPr>
+              <a:t>▸  </a:t>
+            </a:r>
+            <a:r>
+              <a:rPr sz="1300">
+                <a:solidFill>
+                  <a:srgbClr val="0F172A"/>
+                </a:solidFill>
+                <a:ea typeface="Sylfaen"/>
+                <a:cs typeface="Sylfaen"/>
+                <a:latin typeface="Sylfaen"/>
+              </a:rPr>
+              <a:t>დაამატეთ Webhook trigger და დაუკავშირეთ თქვენს Landing Page-ს;</a:t>
+            </a:r>
+          </a:p>
+          <a:p>
+            <a:pPr algn="l">
+              <a:spcAft>
+                <a:spcPts val="300"/>
+              </a:spcAft>
+            </a:pPr>
+            <a:r>
+              <a:rPr sz="1300" b="1">
+                <a:solidFill>
+                  <a:srgbClr val="3730A3"/>
+                </a:solidFill>
+                <a:ea typeface="Sylfaen"/>
+                <a:cs typeface="Sylfaen"/>
+                <a:latin typeface="Sylfaen"/>
+              </a:rPr>
+              <a:t>▸  </a:t>
+            </a:r>
+            <a:r>
+              <a:rPr sz="1300">
+                <a:solidFill>
+                  <a:srgbClr val="0F172A"/>
+                </a:solidFill>
+                <a:ea typeface="Sylfaen"/>
+                <a:cs typeface="Sylfaen"/>
+                <a:latin typeface="Sylfaen"/>
+              </a:rPr>
+              <a:t>დაამატეთ Gmail/SMTP და Google Sheets მოდულები და გააკეთეთ mapping.</a:t>
+            </a:r>
+          </a:p>
+        </p:txBody>
+      </p:sp>
+      <p:sp>
+        <p:nvSpPr>
+          <p:cNvPr id="13" name="Rectangle 12"/>
+          <p:cNvSpPr/>
+          <p:nvPr/>
+        </p:nvSpPr>
+        <p:spPr>
+          <a:xfrm>
+            <a:off x="621792" y="4544568"/>
+            <a:ext cx="54864" cy="233171"/>
+          </a:xfrm>
+          <a:prstGeom prst="rect">
+            <a:avLst/>
+          </a:prstGeom>
+          <a:solidFill>
+            <a:srgbClr val="3730A3"/>
+          </a:solidFill>
+          <a:ln>
+            <a:noFill/>
+          </a:ln>
+          <a:effectLst/>
+        </p:spPr>
+        <p:style>
+          <a:lnRef idx="1">
+            <a:schemeClr val="accent1"/>
+          </a:lnRef>
+          <a:fillRef idx="3">
+            <a:schemeClr val="accent1"/>
+          </a:fillRef>
+          <a:effectRef idx="2">
+            <a:schemeClr val="accent1"/>
+          </a:effectRef>
+          <a:fontRef idx="minor">
+            <a:schemeClr val="lt1"/>
+          </a:fontRef>
+        </p:style>
+        <p:txBody>
+          <a:bodyPr rtlCol="0" anchor="ctr"/>
+          <a:lstStyle/>
+          <a:p>
+            <a:pPr algn="ctr"/>
+          </a:p>
+        </p:txBody>
+      </p:sp>
+      <p:sp>
+        <p:nvSpPr>
+          <p:cNvPr id="14" name="Rounded Rectangle 13"/>
+          <p:cNvSpPr/>
+          <p:nvPr/>
+        </p:nvSpPr>
+        <p:spPr>
+          <a:xfrm>
+            <a:off x="676656" y="4544568"/>
+            <a:ext cx="3717036" cy="233171"/>
+          </a:xfrm>
+          <a:prstGeom prst="roundRect">
+            <a:avLst>
+              <a:gd name="adj" fmla="val 4000"/>
+            </a:avLst>
+          </a:prstGeom>
+          <a:solidFill>
+            <a:srgbClr val="F8FAFC"/>
           </a:solidFill>
           <a:ln w="9525">
+            <a:solidFill>
+              <a:srgbClr val="E2E8F0"/>
+            </a:solidFill>
+          </a:ln>
+          <a:effectLst/>
+        </p:spPr>
+        <p:style>
+          <a:lnRef idx="1">
+            <a:schemeClr val="accent1"/>
+          </a:lnRef>
+          <a:fillRef idx="3">
+            <a:schemeClr val="accent1"/>
+          </a:fillRef>
+          <a:effectRef idx="2">
+            <a:schemeClr val="accent1"/>
+          </a:effectRef>
+          <a:fontRef idx="minor">
+            <a:schemeClr val="lt1"/>
+          </a:fontRef>
+        </p:style>
+        <p:txBody>
+          <a:bodyPr rtlCol="0" anchor="ctr"/>
+          <a:lstStyle/>
+          <a:p>
+            <a:pPr algn="ctr"/>
+          </a:p>
+        </p:txBody>
+      </p:sp>
+      <p:sp>
+        <p:nvSpPr>
+          <p:cNvPr id="15" name="Rectangle 14"/>
+          <p:cNvSpPr/>
+          <p:nvPr/>
+        </p:nvSpPr>
+        <p:spPr>
+          <a:xfrm>
+            <a:off x="4640580" y="1737360"/>
+            <a:ext cx="54864" cy="3113532"/>
+          </a:xfrm>
+          <a:prstGeom prst="rect">
+            <a:avLst/>
+          </a:prstGeom>
+          <a:solidFill>
+            <a:srgbClr val="3730A3"/>
+          </a:solidFill>
+          <a:ln>
+            <a:noFill/>
+          </a:ln>
+          <a:effectLst/>
+        </p:spPr>
+        <p:style>
+          <a:lnRef idx="1">
+            <a:schemeClr val="accent1"/>
+          </a:lnRef>
+          <a:fillRef idx="3">
+            <a:schemeClr val="accent1"/>
+          </a:fillRef>
+          <a:effectRef idx="2">
+            <a:schemeClr val="accent1"/>
+          </a:effectRef>
+          <a:fontRef idx="minor">
+            <a:schemeClr val="lt1"/>
+          </a:fontRef>
+        </p:style>
+        <p:txBody>
+          <a:bodyPr rtlCol="0" anchor="ctr"/>
+          <a:lstStyle/>
+          <a:p>
+            <a:pPr algn="ctr"/>
+          </a:p>
+        </p:txBody>
+      </p:sp>
+      <p:sp>
+        <p:nvSpPr>
+          <p:cNvPr id="16" name="Rounded Rectangle 15"/>
+          <p:cNvSpPr/>
+          <p:nvPr/>
+        </p:nvSpPr>
+        <p:spPr>
+          <a:xfrm>
+            <a:off x="4695444" y="1737360"/>
+            <a:ext cx="3991356" cy="3113532"/>
+          </a:xfrm>
+          <a:prstGeom prst="roundRect">
+            <a:avLst>
+              <a:gd name="adj" fmla="val 4000"/>
+            </a:avLst>
+          </a:prstGeom>
+          <a:solidFill>
+            <a:srgbClr val="F8FAFC"/>
+          </a:solidFill>
+          <a:ln w="6350">
             <a:solidFill>
               <a:srgbClr val="3730A3"/>
             </a:solidFill>
@@ -33459,14 +33349,152 @@
       </p:sp>
       <p:sp>
         <p:nvSpPr>
-          <p:cNvPr id="11" name="TextBox 10"/>
+          <p:cNvPr id="17" name="Rectangle 16"/>
+          <p:cNvSpPr/>
+          <p:nvPr/>
+        </p:nvSpPr>
+        <p:spPr>
+          <a:xfrm>
+            <a:off x="4805172" y="1810512"/>
+            <a:ext cx="54864" cy="292608"/>
+          </a:xfrm>
+          <a:prstGeom prst="rect">
+            <a:avLst/>
+          </a:prstGeom>
+          <a:solidFill>
+            <a:srgbClr val="3730A3"/>
+          </a:solidFill>
+          <a:ln>
+            <a:noFill/>
+          </a:ln>
+          <a:effectLst/>
+        </p:spPr>
+        <p:style>
+          <a:lnRef idx="1">
+            <a:schemeClr val="accent1"/>
+          </a:lnRef>
+          <a:fillRef idx="3">
+            <a:schemeClr val="accent1"/>
+          </a:fillRef>
+          <a:effectRef idx="2">
+            <a:schemeClr val="accent1"/>
+          </a:effectRef>
+          <a:fontRef idx="minor">
+            <a:schemeClr val="lt1"/>
+          </a:fontRef>
+        </p:style>
+        <p:txBody>
+          <a:bodyPr rtlCol="0" anchor="ctr"/>
+          <a:lstStyle/>
+          <a:p>
+            <a:pPr algn="ctr"/>
+          </a:p>
+        </p:txBody>
+      </p:sp>
+      <p:sp>
+        <p:nvSpPr>
+          <p:cNvPr id="18" name="Rounded Rectangle 17"/>
+          <p:cNvSpPr/>
+          <p:nvPr/>
+        </p:nvSpPr>
+        <p:spPr>
+          <a:xfrm>
+            <a:off x="4860036" y="1810512"/>
+            <a:ext cx="3717036" cy="292608"/>
+          </a:xfrm>
+          <a:prstGeom prst="roundRect">
+            <a:avLst>
+              <a:gd name="adj" fmla="val 4000"/>
+            </a:avLst>
+          </a:prstGeom>
+          <a:solidFill>
+            <a:srgbClr val="F8FAFC"/>
+          </a:solidFill>
+          <a:ln w="9525">
+            <a:solidFill>
+              <a:srgbClr val="E2E8F0"/>
+            </a:solidFill>
+          </a:ln>
+          <a:effectLst/>
+        </p:spPr>
+        <p:style>
+          <a:lnRef idx="1">
+            <a:schemeClr val="accent1"/>
+          </a:lnRef>
+          <a:fillRef idx="3">
+            <a:schemeClr val="accent1"/>
+          </a:fillRef>
+          <a:effectRef idx="2">
+            <a:schemeClr val="accent1"/>
+          </a:effectRef>
+          <a:fontRef idx="minor">
+            <a:schemeClr val="lt1"/>
+          </a:fontRef>
+        </p:style>
+        <p:txBody>
+          <a:bodyPr rtlCol="0" anchor="ctr"/>
+          <a:lstStyle/>
+          <a:p>
+            <a:pPr algn="ctr"/>
+          </a:p>
+        </p:txBody>
+      </p:sp>
+      <p:sp>
+        <p:nvSpPr>
+          <p:cNvPr id="19" name="Rectangle 18"/>
+          <p:cNvSpPr/>
+          <p:nvPr/>
+        </p:nvSpPr>
+        <p:spPr>
+          <a:xfrm>
+            <a:off x="4914900" y="1865376"/>
+            <a:ext cx="3552444" cy="201168"/>
+          </a:xfrm>
+          <a:prstGeom prst="rect">
+            <a:avLst/>
+          </a:prstGeom>
+          <a:solidFill>
+            <a:srgbClr val="FFFFFF"/>
+          </a:solidFill>
+          <a:ln w="6350">
+            <a:solidFill>
+              <a:srgbClr val="E2E8F0"/>
+            </a:solidFill>
+          </a:ln>
+          <a:effectLst/>
+        </p:spPr>
+        <p:style>
+          <a:lnRef idx="1">
+            <a:schemeClr val="accent1"/>
+          </a:lnRef>
+          <a:fillRef idx="3">
+            <a:schemeClr val="accent1"/>
+          </a:fillRef>
+          <a:effectRef idx="2">
+            <a:schemeClr val="accent1"/>
+          </a:effectRef>
+          <a:fontRef idx="minor">
+            <a:schemeClr val="lt1"/>
+          </a:fontRef>
+        </p:style>
+        <p:txBody>
+          <a:bodyPr rtlCol="0" anchor="ctr"/>
+          <a:lstStyle/>
+          <a:p>
+            <a:pPr algn="ctr"/>
+          </a:p>
+        </p:txBody>
+      </p:sp>
+      <p:sp>
+        <p:nvSpPr>
+          <p:cNvPr id="20" name="TextBox 19"/>
           <p:cNvSpPr txBox="1"/>
           <p:nvPr/>
         </p:nvSpPr>
         <p:spPr>
           <a:xfrm>
-            <a:off x="621792" y="1810512"/>
-            <a:ext cx="7955279" cy="320040"/>
+            <a:off x="4969764" y="1892807"/>
+            <a:ext cx="3442716" cy="146304"/>
           </a:xfrm>
           <a:prstGeom prst="rect">
             <a:avLst/>
@@ -33481,33 +33509,145 @@
           <a:p>
             <a:pPr>
               <a:spcAft>
-                <a:spcPts val="400"/>
-              </a:spcAft>
-            </a:pPr>
-            <a:r>
-              <a:rPr sz="1400" b="1" i="0">
+                <a:spcPts val="0"/>
+              </a:spcAft>
+            </a:pPr>
+            <a:r>
+              <a:rPr sz="800">
                 <a:solidFill>
                   <a:srgbClr val="0F172A"/>
                 </a:solidFill>
-                <a:ea typeface="Sylfaen"/>
-                <a:cs typeface="Sylfaen"/>
-                <a:latin typeface="Sylfaen"/>
-              </a:rPr>
-              <a:t>Google Sheets მოდულის კონფიგურაცია:</a:t>
-            </a:r>
-          </a:p>
-        </p:txBody>
-      </p:sp>
-      <p:sp>
-        <p:nvSpPr>
-          <p:cNvPr id="12" name="TextBox 11"/>
+                <a:ea typeface="Consolas"/>
+                <a:cs typeface="Consolas"/>
+                <a:latin typeface="Consolas"/>
+              </a:rPr>
+              <a:t>Make.com სცენარის</a:t>
+            </a:r>
+          </a:p>
+          <a:p>
+            <a:pPr>
+              <a:spcAft>
+                <a:spcPts val="0"/>
+              </a:spcAft>
+            </a:pPr>
+            <a:r>
+              <a:rPr sz="800">
+                <a:solidFill>
+                  <a:srgbClr val="0F172A"/>
+                </a:solidFill>
+                <a:ea typeface="Consolas"/>
+                <a:cs typeface="Consolas"/>
+                <a:latin typeface="Consolas"/>
+              </a:rPr>
+              <a:t>კონფიგურაცია:</a:t>
+            </a:r>
+          </a:p>
+        </p:txBody>
+      </p:sp>
+      <p:sp>
+        <p:nvSpPr>
+          <p:cNvPr id="21" name="Rounded Rectangle 20"/>
+          <p:cNvSpPr/>
+          <p:nvPr/>
+        </p:nvSpPr>
+        <p:spPr>
+          <a:xfrm>
+            <a:off x="4805172" y="2176272"/>
+            <a:ext cx="3771900" cy="2601468"/>
+          </a:xfrm>
+          <a:prstGeom prst="roundRect">
+            <a:avLst>
+              <a:gd name="adj" fmla="val 4000"/>
+            </a:avLst>
+          </a:prstGeom>
+          <a:solidFill>
+            <a:srgbClr val="F8FAFC"/>
+          </a:solidFill>
+          <a:ln w="9525">
+            <a:solidFill>
+              <a:srgbClr val="E2E8F0"/>
+            </a:solidFill>
+          </a:ln>
+          <a:effectLst/>
+        </p:spPr>
+        <p:style>
+          <a:lnRef idx="1">
+            <a:schemeClr val="accent1"/>
+          </a:lnRef>
+          <a:fillRef idx="3">
+            <a:schemeClr val="accent1"/>
+          </a:fillRef>
+          <a:effectRef idx="2">
+            <a:schemeClr val="accent1"/>
+          </a:effectRef>
+          <a:fontRef idx="minor">
+            <a:schemeClr val="lt1"/>
+          </a:fontRef>
+        </p:style>
+        <p:txBody>
+          <a:bodyPr rtlCol="0" anchor="ctr"/>
+          <a:lstStyle/>
+          <a:p>
+            <a:pPr algn="ctr"/>
+          </a:p>
+        </p:txBody>
+      </p:sp>
+      <p:sp>
+        <p:nvSpPr>
+          <p:cNvPr id="22" name="Rectangle 21"/>
+          <p:cNvSpPr/>
+          <p:nvPr/>
+        </p:nvSpPr>
+        <p:spPr>
+          <a:xfrm>
+            <a:off x="4860036" y="2221991"/>
+            <a:ext cx="3662172" cy="2510027"/>
+          </a:xfrm>
+          <a:prstGeom prst="rect">
+            <a:avLst/>
+          </a:prstGeom>
+          <a:solidFill>
+            <a:srgbClr val="FFFFFF"/>
+          </a:solidFill>
+          <a:ln w="6350">
+            <a:solidFill>
+              <a:srgbClr val="E2E8F0"/>
+            </a:solidFill>
+          </a:ln>
+          <a:effectLst/>
+        </p:spPr>
+        <p:style>
+          <a:lnRef idx="1">
+            <a:schemeClr val="accent1"/>
+          </a:lnRef>
+          <a:fillRef idx="3">
+            <a:schemeClr val="accent1"/>
+          </a:fillRef>
+          <a:effectRef idx="2">
+            <a:schemeClr val="accent1"/>
+          </a:effectRef>
+          <a:fontRef idx="minor">
+            <a:schemeClr val="lt1"/>
+          </a:fontRef>
+        </p:style>
+        <p:txBody>
+          <a:bodyPr rtlCol="0" anchor="ctr"/>
+          <a:lstStyle/>
+          <a:p>
+            <a:pPr algn="ctr"/>
+          </a:p>
+        </p:txBody>
+      </p:sp>
+      <p:sp>
+        <p:nvSpPr>
+          <p:cNvPr id="23" name="TextBox 22"/>
           <p:cNvSpPr txBox="1"/>
           <p:nvPr/>
         </p:nvSpPr>
         <p:spPr>
           <a:xfrm>
-            <a:off x="621792" y="2203704"/>
-            <a:ext cx="7955279" cy="1719072"/>
+            <a:off x="4914900" y="2240279"/>
+            <a:ext cx="3552444" cy="2473451"/>
           </a:xfrm>
           <a:prstGeom prst="rect">
             <a:avLst/>
@@ -33520,97 +33660,370 @@
           </a:bodyPr>
           <a:lstStyle/>
           <a:p>
-            <a:pPr algn="l">
-              <a:spcAft>
-                <a:spcPts val="300"/>
-              </a:spcAft>
-            </a:pPr>
-            <a:r>
-              <a:rPr sz="1300" b="1">
-                <a:solidFill>
-                  <a:srgbClr val="3730A3"/>
-                </a:solidFill>
-                <a:ea typeface="Sylfaen"/>
-                <a:cs typeface="Sylfaen"/>
-                <a:latin typeface="Sylfaen"/>
-              </a:rPr>
-              <a:t>▸  </a:t>
-            </a:r>
-            <a:r>
-              <a:rPr sz="1300">
+            <a:pPr>
+              <a:spcAft>
+                <a:spcPts val="0"/>
+              </a:spcAft>
+            </a:pPr>
+            <a:r>
+              <a:rPr sz="1000">
                 <a:solidFill>
                   <a:srgbClr val="0F172A"/>
                 </a:solidFill>
-                <a:ea typeface="Sylfaen"/>
-                <a:cs typeface="Sylfaen"/>
-                <a:latin typeface="Sylfaen"/>
-              </a:rPr>
-              <a:t>დააკავშირეთ თქვენი Google Drive ანგარიში Make-თან;</a:t>
-            </a:r>
-          </a:p>
-          <a:p>
-            <a:pPr algn="l">
-              <a:spcAft>
-                <a:spcPts val="300"/>
-              </a:spcAft>
-            </a:pPr>
-            <a:r>
-              <a:rPr sz="1300" b="1">
-                <a:solidFill>
-                  <a:srgbClr val="3730A3"/>
-                </a:solidFill>
-                <a:ea typeface="Sylfaen"/>
-                <a:cs typeface="Sylfaen"/>
-                <a:latin typeface="Sylfaen"/>
-              </a:rPr>
-              <a:t>▸  </a:t>
-            </a:r>
-            <a:r>
-              <a:rPr sz="1300">
+                <a:ea typeface="Consolas"/>
+                <a:cs typeface="Consolas"/>
+                <a:latin typeface="Consolas"/>
+              </a:rPr>
+              <a:t>Scenario: Landing Page</a:t>
+            </a:r>
+          </a:p>
+          <a:p>
+            <a:pPr>
+              <a:spcAft>
+                <a:spcPts val="0"/>
+              </a:spcAft>
+            </a:pPr>
+            <a:r>
+              <a:rPr sz="1000">
                 <a:solidFill>
                   <a:srgbClr val="0F172A"/>
                 </a:solidFill>
-                <a:ea typeface="Sylfaen"/>
-                <a:cs typeface="Sylfaen"/>
-                <a:latin typeface="Sylfaen"/>
-              </a:rPr>
-              <a:t>აირჩიეთ ფაილი „Leads CRM“;</a:t>
-            </a:r>
-          </a:p>
-          <a:p>
-            <a:pPr algn="l">
-              <a:spcAft>
-                <a:spcPts val="300"/>
-              </a:spcAft>
-            </a:pPr>
-            <a:r>
-              <a:rPr sz="1300" b="1">
-                <a:solidFill>
-                  <a:srgbClr val="3730A3"/>
-                </a:solidFill>
-                <a:ea typeface="Sylfaen"/>
-                <a:cs typeface="Sylfaen"/>
-                <a:latin typeface="Sylfaen"/>
-              </a:rPr>
-              <a:t>▸  </a:t>
-            </a:r>
-            <a:r>
-              <a:rPr sz="1300">
+                <a:ea typeface="Consolas"/>
+                <a:cs typeface="Consolas"/>
+                <a:latin typeface="Consolas"/>
+              </a:rPr>
+              <a:t>Form → Email + CRM Sheets</a:t>
+            </a:r>
+          </a:p>
+          <a:p>
+            <a:pPr>
+              <a:spcAft>
+                <a:spcPts val="0"/>
+              </a:spcAft>
+            </a:pPr>
+            <a:r>
+              <a:rPr sz="1000">
                 <a:solidFill>
                   <a:srgbClr val="0F172A"/>
                 </a:solidFill>
-                <a:ea typeface="Sylfaen"/>
-                <a:cs typeface="Sylfaen"/>
-                <a:latin typeface="Sylfaen"/>
-              </a:rPr>
-              <a:t>სვეტებში (A, B, C) მიაბით Webhook-იდან მიღებული ცვლადები: A = Name , B = Email , C = Created_at .</a:t>
-            </a:r>
-          </a:p>
-        </p:txBody>
-      </p:sp>
-      <p:sp>
-        <p:nvSpPr>
-          <p:cNvPr id="13" name="Rectangle 12"/>
+                <a:ea typeface="Consolas"/>
+                <a:cs typeface="Consolas"/>
+                <a:latin typeface="Consolas"/>
+              </a:rPr>
+              <a:t>1. TRIGGER: Webhook (POST</a:t>
+            </a:r>
+          </a:p>
+          <a:p>
+            <a:pPr>
+              <a:spcAft>
+                <a:spcPts val="0"/>
+              </a:spcAft>
+            </a:pPr>
+            <a:r>
+              <a:rPr sz="1000">
+                <a:solidFill>
+                  <a:srgbClr val="0F172A"/>
+                </a:solidFill>
+                <a:ea typeface="Consolas"/>
+                <a:cs typeface="Consolas"/>
+                <a:latin typeface="Consolas"/>
+              </a:rPr>
+              <a:t>request)</a:t>
+            </a:r>
+          </a:p>
+          <a:p>
+            <a:pPr>
+              <a:spcAft>
+                <a:spcPts val="0"/>
+              </a:spcAft>
+            </a:pPr>
+            <a:r>
+              <a:rPr sz="1000">
+                <a:solidFill>
+                  <a:srgbClr val="0F172A"/>
+                </a:solidFill>
+                <a:ea typeface="Consolas"/>
+                <a:cs typeface="Consolas"/>
+                <a:latin typeface="Consolas"/>
+              </a:rPr>
+              <a:t>URL: [Lovable-იდან</a:t>
+            </a:r>
+          </a:p>
+          <a:p>
+            <a:pPr>
+              <a:spcAft>
+                <a:spcPts val="0"/>
+              </a:spcAft>
+            </a:pPr>
+            <a:r>
+              <a:rPr sz="1000">
+                <a:solidFill>
+                  <a:srgbClr val="0F172A"/>
+                </a:solidFill>
+                <a:ea typeface="Consolas"/>
+                <a:cs typeface="Consolas"/>
+                <a:latin typeface="Consolas"/>
+              </a:rPr>
+              <a:t>მიღებული Webhook URL]</a:t>
+            </a:r>
+          </a:p>
+          <a:p>
+            <a:pPr>
+              <a:spcAft>
+                <a:spcPts val="0"/>
+              </a:spcAft>
+            </a:pPr>
+            <a:r>
+              <a:rPr sz="1000">
+                <a:solidFill>
+                  <a:srgbClr val="0F172A"/>
+                </a:solidFill>
+                <a:ea typeface="Consolas"/>
+                <a:cs typeface="Consolas"/>
+                <a:latin typeface="Consolas"/>
+              </a:rPr>
+              <a:t>2. MODULE 1: Send Email</a:t>
+            </a:r>
+          </a:p>
+          <a:p>
+            <a:pPr>
+              <a:spcAft>
+                <a:spcPts val="0"/>
+              </a:spcAft>
+            </a:pPr>
+            <a:r>
+              <a:rPr sz="1000">
+                <a:solidFill>
+                  <a:srgbClr val="0F172A"/>
+                </a:solidFill>
+                <a:ea typeface="Consolas"/>
+                <a:cs typeface="Consolas"/>
+                <a:latin typeface="Consolas"/>
+              </a:rPr>
+              <a:t>via Gmail</a:t>
+            </a:r>
+          </a:p>
+          <a:p>
+            <a:pPr>
+              <a:spcAft>
+                <a:spcPts val="0"/>
+              </a:spcAft>
+            </a:pPr>
+            <a:r>
+              <a:rPr sz="1000">
+                <a:solidFill>
+                  <a:srgbClr val="0F172A"/>
+                </a:solidFill>
+                <a:ea typeface="Consolas"/>
+                <a:cs typeface="Consolas"/>
+                <a:latin typeface="Consolas"/>
+              </a:rPr>
+              <a:t>To: {{trigger.email}}</a:t>
+            </a:r>
+          </a:p>
+          <a:p>
+            <a:pPr>
+              <a:spcAft>
+                <a:spcPts val="0"/>
+              </a:spcAft>
+            </a:pPr>
+            <a:r>
+              <a:rPr sz="1000">
+                <a:solidFill>
+                  <a:srgbClr val="0F172A"/>
+                </a:solidFill>
+                <a:ea typeface="Consolas"/>
+                <a:cs typeface="Consolas"/>
+                <a:latin typeface="Consolas"/>
+              </a:rPr>
+              <a:t>Subject: "გმადლობთ</a:t>
+            </a:r>
+          </a:p>
+          <a:p>
+            <a:pPr>
+              <a:spcAft>
+                <a:spcPts val="0"/>
+              </a:spcAft>
+            </a:pPr>
+            <a:r>
+              <a:rPr sz="1000">
+                <a:solidFill>
+                  <a:srgbClr val="0F172A"/>
+                </a:solidFill>
+                <a:ea typeface="Consolas"/>
+                <a:cs typeface="Consolas"/>
+                <a:latin typeface="Consolas"/>
+              </a:rPr>
+              <a:t>რეგისტრაციისთვის!"</a:t>
+            </a:r>
+          </a:p>
+          <a:p>
+            <a:pPr>
+              <a:spcAft>
+                <a:spcPts val="0"/>
+              </a:spcAft>
+            </a:pPr>
+            <a:r>
+              <a:rPr sz="1000">
+                <a:solidFill>
+                  <a:srgbClr val="0F172A"/>
+                </a:solidFill>
+                <a:ea typeface="Consolas"/>
+                <a:cs typeface="Consolas"/>
+                <a:latin typeface="Consolas"/>
+              </a:rPr>
+              <a:t>Body: "ჩვენი გუნდი მალე</a:t>
+            </a:r>
+          </a:p>
+          <a:p>
+            <a:pPr>
+              <a:spcAft>
+                <a:spcPts val="0"/>
+              </a:spcAft>
+            </a:pPr>
+            <a:r>
+              <a:rPr sz="1000">
+                <a:solidFill>
+                  <a:srgbClr val="0F172A"/>
+                </a:solidFill>
+                <a:ea typeface="Consolas"/>
+                <a:cs typeface="Consolas"/>
+                <a:latin typeface="Consolas"/>
+              </a:rPr>
+              <a:t>დაგიკავშირდებათ."</a:t>
+            </a:r>
+          </a:p>
+          <a:p>
+            <a:pPr>
+              <a:spcAft>
+                <a:spcPts val="0"/>
+              </a:spcAft>
+            </a:pPr>
+            <a:r>
+              <a:rPr sz="1000">
+                <a:solidFill>
+                  <a:srgbClr val="0F172A"/>
+                </a:solidFill>
+                <a:ea typeface="Consolas"/>
+                <a:cs typeface="Consolas"/>
+                <a:latin typeface="Consolas"/>
+              </a:rPr>
+              <a:t>3. MODULE 2: Add Row to</a:t>
+            </a:r>
+          </a:p>
+          <a:p>
+            <a:pPr>
+              <a:spcAft>
+                <a:spcPts val="0"/>
+              </a:spcAft>
+            </a:pPr>
+            <a:r>
+              <a:rPr sz="1000">
+                <a:solidFill>
+                  <a:srgbClr val="0F172A"/>
+                </a:solidFill>
+                <a:ea typeface="Consolas"/>
+                <a:cs typeface="Consolas"/>
+                <a:latin typeface="Consolas"/>
+              </a:rPr>
+              <a:t>Google Sheets (leads</a:t>
+            </a:r>
+          </a:p>
+          <a:p>
+            <a:pPr>
+              <a:spcAft>
+                <a:spcPts val="0"/>
+              </a:spcAft>
+            </a:pPr>
+            <a:r>
+              <a:rPr sz="1000">
+                <a:solidFill>
+                  <a:srgbClr val="0F172A"/>
+                </a:solidFill>
+                <a:ea typeface="Consolas"/>
+                <a:cs typeface="Consolas"/>
+                <a:latin typeface="Consolas"/>
+              </a:rPr>
+              <a:t>ცხრილში)</a:t>
+            </a:r>
+          </a:p>
+          <a:p>
+            <a:pPr>
+              <a:spcAft>
+                <a:spcPts val="0"/>
+              </a:spcAft>
+            </a:pPr>
+            <a:r>
+              <a:rPr sz="1000">
+                <a:solidFill>
+                  <a:srgbClr val="0F172A"/>
+                </a:solidFill>
+                <a:ea typeface="Consolas"/>
+                <a:cs typeface="Consolas"/>
+                <a:latin typeface="Consolas"/>
+              </a:rPr>
+              <a:t>Columns: Email, Name, Date</a:t>
+            </a:r>
+          </a:p>
+          <a:p>
+            <a:pPr>
+              <a:spcAft>
+                <a:spcPts val="0"/>
+              </a:spcAft>
+            </a:pPr>
+            <a:r>
+              <a:rPr sz="1000">
+                <a:solidFill>
+                  <a:srgbClr val="0F172A"/>
+                </a:solidFill>
+                <a:ea typeface="Consolas"/>
+                <a:cs typeface="Consolas"/>
+                <a:latin typeface="Consolas"/>
+              </a:rPr>
+              <a:t>4. FILTER: Email is not</a:t>
+            </a:r>
+          </a:p>
+          <a:p>
+            <a:pPr>
+              <a:spcAft>
+                <a:spcPts val="0"/>
+              </a:spcAft>
+            </a:pPr>
+            <a:r>
+              <a:rPr sz="1000">
+                <a:solidFill>
+                  <a:srgbClr val="0F172A"/>
+                </a:solidFill>
+                <a:ea typeface="Consolas"/>
+                <a:cs typeface="Consolas"/>
+                <a:latin typeface="Consolas"/>
+              </a:rPr>
+              <a:t>empty (ცარიელი მეილები</a:t>
+            </a:r>
+          </a:p>
+          <a:p>
+            <a:pPr>
+              <a:spcAft>
+                <a:spcPts val="0"/>
+              </a:spcAft>
+            </a:pPr>
+            <a:r>
+              <a:rPr sz="1000">
+                <a:solidFill>
+                  <a:srgbClr val="0F172A"/>
+                </a:solidFill>
+                <a:ea typeface="Consolas"/>
+                <a:cs typeface="Consolas"/>
+                <a:latin typeface="Consolas"/>
+              </a:rPr>
+              <a:t>იფილტრება)</a:t>
+            </a:r>
+          </a:p>
+        </p:txBody>
+      </p:sp>
+      <p:sp>
+        <p:nvSpPr>
+          <p:cNvPr id="24" name="Rectangle 23"/>
           <p:cNvSpPr/>
           <p:nvPr/>
         </p:nvSpPr>
@@ -33654,7 +34067,7 @@
       </p:sp>
       <p:sp>
         <p:nvSpPr>
-          <p:cNvPr id="14" name="TextBox 13"/>
+          <p:cNvPr id="25" name="TextBox 24"/>
           <p:cNvSpPr txBox="1"/>
           <p:nvPr/>
         </p:nvSpPr>
@@ -33874,7 +34287,7 @@
                 <a:cs typeface="Sylfaen"/>
                 <a:latin typeface="Sylfaen"/>
               </a:rPr>
-              <a:t>CRM Scenario: Gmail SMTP Connection</a:t>
+              <a:t>CRM Scenario: Appending Lead Row in Sheets</a:t>
             </a:r>
           </a:p>
         </p:txBody>
@@ -33975,7 +34388,7 @@
                 <a:cs typeface="Sylfaen"/>
                 <a:latin typeface="Sylfaen"/>
               </a:rPr>
-              <a:t>39 / 49</a:t>
+              <a:t>39 / 50</a:t>
             </a:r>
           </a:p>
         </p:txBody>
@@ -34016,7 +34429,7 @@
                 <a:cs typeface="Sylfaen"/>
                 <a:latin typeface="Sylfaen"/>
               </a:rPr>
-              <a:t>ავტომატური იმეილის გაგზავნა დარეგისტრირებულ მომხმარებელთან:</a:t>
+              <a:t>მონაცემთა ბაზიდან Leads-ის გადატანა Google Sheets CRM-ში:</a:t>
             </a:r>
           </a:p>
         </p:txBody>
@@ -34030,7 +34443,7 @@
         <p:spPr>
           <a:xfrm>
             <a:off x="457200" y="1737360"/>
-            <a:ext cx="54864" cy="3113532"/>
+            <a:ext cx="54864" cy="2313432"/>
           </a:xfrm>
           <a:prstGeom prst="rect">
             <a:avLst/>
@@ -34074,7 +34487,7 @@
         <p:spPr>
           <a:xfrm>
             <a:off x="512064" y="1737360"/>
-            <a:ext cx="3991356" cy="3113532"/>
+            <a:ext cx="8174736" cy="2313432"/>
           </a:xfrm>
           <a:prstGeom prst="roundRect">
             <a:avLst>
@@ -34082,11 +34495,11 @@
             </a:avLst>
           </a:prstGeom>
           <a:solidFill>
-            <a:srgbClr val="F8FAFC"/>
-          </a:solidFill>
-          <a:ln w="6350">
+            <a:srgbClr val="EEF2FF"/>
+          </a:solidFill>
+          <a:ln w="9525">
             <a:solidFill>
-              <a:srgbClr val="E2E8F0"/>
+              <a:srgbClr val="3730A3"/>
             </a:solidFill>
           </a:ln>
           <a:effectLst/>
@@ -34122,7 +34535,7 @@
         <p:spPr>
           <a:xfrm>
             <a:off x="621792" y="1810512"/>
-            <a:ext cx="3771900" cy="320040"/>
+            <a:ext cx="7955279" cy="320040"/>
           </a:xfrm>
           <a:prstGeom prst="rect">
             <a:avLst/>
@@ -34149,7 +34562,7 @@
                 <a:cs typeface="Sylfaen"/>
                 <a:latin typeface="Sylfaen"/>
               </a:rPr>
-              <a:t>Gmail მოდულის პარამეტრები:</a:t>
+              <a:t>Google Sheets მოდულის კონფიგურაცია:</a:t>
             </a:r>
           </a:p>
         </p:txBody>
@@ -34163,7 +34576,7 @@
         <p:spPr>
           <a:xfrm>
             <a:off x="621792" y="2203704"/>
-            <a:ext cx="3771900" cy="2267712"/>
+            <a:ext cx="7955279" cy="1719072"/>
           </a:xfrm>
           <a:prstGeom prst="rect">
             <a:avLst/>
@@ -34201,7 +34614,7 @@
                 <a:cs typeface="Sylfaen"/>
                 <a:latin typeface="Sylfaen"/>
               </a:rPr>
-              <a:t>To: Webhook-იდან მიღებული Email ცვლადი;</a:t>
+              <a:t>დააკავშირეთ თქვენი Google Drive ანგარიში Make-თან;</a:t>
             </a:r>
           </a:p>
           <a:p>
@@ -34230,7 +34643,7 @@
                 <a:cs typeface="Sylfaen"/>
                 <a:latin typeface="Sylfaen"/>
               </a:rPr>
-              <a:t>Subject: „გმადლობთ რეგისტრაციისთვის [სტარტაპის სახელი]-ზე!“;</a:t>
+              <a:t>აირჩიეთ ფაილი „Leads CRM“;</a:t>
             </a:r>
           </a:p>
           <a:p>
@@ -34259,7 +34672,7 @@
                 <a:cs typeface="Sylfaen"/>
                 <a:latin typeface="Sylfaen"/>
               </a:rPr>
-              <a:t>Body: პერსონალიზებული ტექსტი, სადაც გამოიყენებთ Name ცვლადს.</a:t>
+              <a:t>სვეტებში (A, B, C) მიაბით Webhook-იდან მიღებული ცვლადები: A = Name , B = Email , C = Created_at .</a:t>
             </a:r>
           </a:p>
         </p:txBody>
@@ -34272,14 +34685,14 @@
         </p:nvSpPr>
         <p:spPr>
           <a:xfrm>
-            <a:off x="4640580" y="1737360"/>
-            <a:ext cx="54864" cy="3113532"/>
-          </a:xfrm>
-          <a:prstGeom prst="rect">
-            <a:avLst/>
-          </a:prstGeom>
-          <a:solidFill>
-            <a:srgbClr val="3730A3"/>
+            <a:off x="457200" y="4850892"/>
+            <a:ext cx="8229600" cy="13716"/>
+          </a:xfrm>
+          <a:prstGeom prst="rect">
+            <a:avLst/>
+          </a:prstGeom>
+          <a:solidFill>
+            <a:srgbClr val="E2E8F0"/>
           </a:solidFill>
           <a:ln>
             <a:noFill/>
@@ -34310,181 +34723,7 @@
       </p:sp>
       <p:sp>
         <p:nvSpPr>
-          <p:cNvPr id="14" name="Rounded Rectangle 13"/>
-          <p:cNvSpPr/>
-          <p:nvPr/>
-        </p:nvSpPr>
-        <p:spPr>
-          <a:xfrm>
-            <a:off x="4695444" y="1737360"/>
-            <a:ext cx="3991356" cy="3113532"/>
-          </a:xfrm>
-          <a:prstGeom prst="roundRect">
-            <a:avLst>
-              <a:gd name="adj" fmla="val 4000"/>
-            </a:avLst>
-          </a:prstGeom>
-          <a:solidFill>
-            <a:srgbClr val="EEF2FF"/>
-          </a:solidFill>
-          <a:ln w="6350">
-            <a:solidFill>
-              <a:srgbClr val="3730A3"/>
-            </a:solidFill>
-          </a:ln>
-          <a:effectLst/>
-        </p:spPr>
-        <p:style>
-          <a:lnRef idx="1">
-            <a:schemeClr val="accent1"/>
-          </a:lnRef>
-          <a:fillRef idx="3">
-            <a:schemeClr val="accent1"/>
-          </a:fillRef>
-          <a:effectRef idx="2">
-            <a:schemeClr val="accent1"/>
-          </a:effectRef>
-          <a:fontRef idx="minor">
-            <a:schemeClr val="lt1"/>
-          </a:fontRef>
-        </p:style>
-        <p:txBody>
-          <a:bodyPr rtlCol="0" anchor="ctr"/>
-          <a:lstStyle/>
-          <a:p>
-            <a:pPr algn="ctr"/>
-          </a:p>
-        </p:txBody>
-      </p:sp>
-      <p:sp>
-        <p:nvSpPr>
-          <p:cNvPr id="15" name="TextBox 14"/>
-          <p:cNvSpPr txBox="1"/>
-          <p:nvPr/>
-        </p:nvSpPr>
-        <p:spPr>
-          <a:xfrm>
-            <a:off x="4805172" y="1810512"/>
-            <a:ext cx="3771900" cy="320040"/>
-          </a:xfrm>
-          <a:prstGeom prst="rect">
-            <a:avLst/>
-          </a:prstGeom>
-          <a:noFill/>
-        </p:spPr>
-        <p:txBody>
-          <a:bodyPr wrap="square" anchor="t" lIns="54864" rIns="54864" tIns="54864" bIns="54864">
-            <a:spAutoFit/>
-          </a:bodyPr>
-          <a:lstStyle/>
-          <a:p>
-            <a:pPr>
-              <a:spcAft>
-                <a:spcPts val="400"/>
-              </a:spcAft>
-            </a:pPr>
-            <a:r>
-              <a:rPr sz="1400" b="1" i="0">
-                <a:solidFill>
-                  <a:srgbClr val="0F172A"/>
-                </a:solidFill>
-                <a:ea typeface="Sylfaen"/>
-                <a:cs typeface="Sylfaen"/>
-                <a:latin typeface="Sylfaen"/>
-              </a:rPr>
-              <a:t>🔒 SMTP უსაფრთხოება:</a:t>
-            </a:r>
-          </a:p>
-        </p:txBody>
-      </p:sp>
-      <p:sp>
-        <p:nvSpPr>
-          <p:cNvPr id="16" name="TextBox 15"/>
-          <p:cNvSpPr txBox="1"/>
-          <p:nvPr/>
-        </p:nvSpPr>
-        <p:spPr>
-          <a:xfrm>
-            <a:off x="4805172" y="2203704"/>
-            <a:ext cx="3771900" cy="713232"/>
-          </a:xfrm>
-          <a:prstGeom prst="rect">
-            <a:avLst/>
-          </a:prstGeom>
-          <a:noFill/>
-        </p:spPr>
-        <p:txBody>
-          <a:bodyPr wrap="square" anchor="t" lIns="54864" rIns="54864" tIns="54864" bIns="54864">
-            <a:spAutoFit/>
-          </a:bodyPr>
-          <a:lstStyle/>
-          <a:p>
-            <a:pPr>
-              <a:spcAft>
-                <a:spcPts val="400"/>
-              </a:spcAft>
-            </a:pPr>
-            <a:r>
-              <a:rPr sz="1300" b="0" i="0">
-                <a:solidFill>
-                  <a:srgbClr val="0F172A"/>
-                </a:solidFill>
-                <a:ea typeface="Sylfaen"/>
-                <a:cs typeface="Sylfaen"/>
-                <a:latin typeface="Sylfaen"/>
-              </a:rPr>
-              <a:t>Gmail-თან დასაკავშირებლად დაგჭირდებათ Google-ის უსაფრთხოების მენიუდან "App Password"-ის გენერირება.</a:t>
-            </a:r>
-          </a:p>
-        </p:txBody>
-      </p:sp>
-      <p:sp>
-        <p:nvSpPr>
-          <p:cNvPr id="17" name="Rectangle 16"/>
-          <p:cNvSpPr/>
-          <p:nvPr/>
-        </p:nvSpPr>
-        <p:spPr>
-          <a:xfrm>
-            <a:off x="457200" y="4850892"/>
-            <a:ext cx="8229600" cy="13716"/>
-          </a:xfrm>
-          <a:prstGeom prst="rect">
-            <a:avLst/>
-          </a:prstGeom>
-          <a:solidFill>
-            <a:srgbClr val="E2E8F0"/>
-          </a:solidFill>
-          <a:ln>
-            <a:noFill/>
-          </a:ln>
-          <a:effectLst/>
-        </p:spPr>
-        <p:style>
-          <a:lnRef idx="1">
-            <a:schemeClr val="accent1"/>
-          </a:lnRef>
-          <a:fillRef idx="3">
-            <a:schemeClr val="accent1"/>
-          </a:fillRef>
-          <a:effectRef idx="2">
-            <a:schemeClr val="accent1"/>
-          </a:effectRef>
-          <a:fontRef idx="minor">
-            <a:schemeClr val="lt1"/>
-          </a:fontRef>
-        </p:style>
-        <p:txBody>
-          <a:bodyPr rtlCol="0" anchor="ctr"/>
-          <a:lstStyle/>
-          <a:p>
-            <a:pPr algn="ctr"/>
-          </a:p>
-        </p:txBody>
-      </p:sp>
-      <p:sp>
-        <p:nvSpPr>
-          <p:cNvPr id="18" name="TextBox 17"/>
+          <p:cNvPr id="14" name="TextBox 13"/>
           <p:cNvSpPr txBox="1"/>
           <p:nvPr/>
         </p:nvSpPr>
@@ -34805,7 +35044,7 @@
                 <a:cs typeface="Sylfaen"/>
                 <a:latin typeface="Sylfaen"/>
               </a:rPr>
-              <a:t>4 / 49</a:t>
+              <a:t>4 / 50</a:t>
             </a:r>
           </a:p>
         </p:txBody>
@@ -35885,7 +36124,7 @@
                 <a:cs typeface="Sylfaen"/>
                 <a:latin typeface="Sylfaen"/>
               </a:rPr>
-              <a:t>Make.com: შეცდომების მართვა და Edge Cases</a:t>
+              <a:t>CRM Scenario: Gmail SMTP Connection</a:t>
             </a:r>
           </a:p>
         </p:txBody>
@@ -35986,7 +36225,7 @@
                 <a:cs typeface="Sylfaen"/>
                 <a:latin typeface="Sylfaen"/>
               </a:rPr>
-              <a:t>40 / 49</a:t>
+              <a:t>40 / 50</a:t>
             </a:r>
           </a:p>
         </p:txBody>
@@ -36000,7 +36239,7 @@
         <p:spPr>
           <a:xfrm>
             <a:off x="457200" y="1188720"/>
-            <a:ext cx="8229600" cy="713232"/>
+            <a:ext cx="8229600" cy="475488"/>
           </a:xfrm>
           <a:prstGeom prst="rect">
             <a:avLst/>
@@ -36027,7 +36266,7 @@
                 <a:cs typeface="Sylfaen"/>
                 <a:latin typeface="Sylfaen"/>
               </a:rPr>
-              <a:t>როგორ უზრუნველვყოთ ჩვენი ავტომატიზაციების სტაბილური მუშაობა შეცდომების შემთხვევაში?</a:t>
+              <a:t>ავტომატური იმეილის გაგზავნა დარეგისტრირებულ მომხმარებელთან:</a:t>
             </a:r>
           </a:p>
         </p:txBody>
@@ -36040,14 +36279,14 @@
         </p:nvSpPr>
         <p:spPr>
           <a:xfrm>
-            <a:off x="457200" y="1975104"/>
-            <a:ext cx="54864" cy="2875788"/>
-          </a:xfrm>
-          <a:prstGeom prst="rect">
-            <a:avLst/>
-          </a:prstGeom>
-          <a:solidFill>
-            <a:srgbClr val="4F46E5"/>
+            <a:off x="457200" y="1737360"/>
+            <a:ext cx="54864" cy="3113532"/>
+          </a:xfrm>
+          <a:prstGeom prst="rect">
+            <a:avLst/>
+          </a:prstGeom>
+          <a:solidFill>
+            <a:srgbClr val="3730A3"/>
           </a:solidFill>
           <a:ln>
             <a:noFill/>
@@ -36084,8 +36323,8 @@
         </p:nvSpPr>
         <p:spPr>
           <a:xfrm>
-            <a:off x="512064" y="1975104"/>
-            <a:ext cx="3991356" cy="2875788"/>
+            <a:off x="512064" y="1737360"/>
+            <a:ext cx="3991356" cy="3113532"/>
           </a:xfrm>
           <a:prstGeom prst="roundRect">
             <a:avLst>
@@ -36093,11 +36332,11 @@
             </a:avLst>
           </a:prstGeom>
           <a:solidFill>
-            <a:srgbClr val="FFF7ED"/>
+            <a:srgbClr val="F8FAFC"/>
           </a:solidFill>
           <a:ln w="6350">
             <a:solidFill>
-              <a:srgbClr val="4F46E5"/>
+              <a:srgbClr val="E2E8F0"/>
             </a:solidFill>
           </a:ln>
           <a:effectLst/>
@@ -36132,7 +36371,7 @@
         </p:nvSpPr>
         <p:spPr>
           <a:xfrm>
-            <a:off x="621792" y="2048256"/>
+            <a:off x="621792" y="1810512"/>
             <a:ext cx="3771900" cy="320040"/>
           </a:xfrm>
           <a:prstGeom prst="rect">
@@ -36160,7 +36399,7 @@
                 <a:cs typeface="Sylfaen"/>
                 <a:latin typeface="Sylfaen"/>
               </a:rPr>
-              <a:t>⚠️ პოტენციური შეცდომები:</a:t>
+              <a:t>Gmail მოდულის პარამეტრები:</a:t>
             </a:r>
           </a:p>
         </p:txBody>
@@ -36173,8 +36412,8 @@
         </p:nvSpPr>
         <p:spPr>
           <a:xfrm>
-            <a:off x="621792" y="2441448"/>
-            <a:ext cx="3771900" cy="1719072"/>
+            <a:off x="621792" y="2203704"/>
+            <a:ext cx="3771900" cy="2267712"/>
           </a:xfrm>
           <a:prstGeom prst="rect">
             <a:avLst/>
@@ -36212,7 +36451,7 @@
                 <a:cs typeface="Sylfaen"/>
                 <a:latin typeface="Sylfaen"/>
               </a:rPr>
-              <a:t>მომხმარებელმა ფორმაში არ შეიყვანა სახელი (ცარიელი ველი);</a:t>
+              <a:t>To: Webhook-იდან მიღებული Email ცვლადი;</a:t>
             </a:r>
           </a:p>
           <a:p>
@@ -36241,7 +36480,7 @@
                 <a:cs typeface="Sylfaen"/>
                 <a:latin typeface="Sylfaen"/>
               </a:rPr>
-              <a:t>ელფოსტის ფორმატი არასწორია;</a:t>
+              <a:t>Subject: „გმადლობთ რეგისტრაციისთვის [სტარტაპის სახელი]-ზე!“;</a:t>
             </a:r>
           </a:p>
           <a:p>
@@ -36270,7 +36509,7 @@
                 <a:cs typeface="Sylfaen"/>
                 <a:latin typeface="Sylfaen"/>
               </a:rPr>
-              <a:t>სერვერი დროებით გაითიშა.</a:t>
+              <a:t>Body: პერსონალიზებული ტექსტი, სადაც გამოიყენებთ Name ცვლადს.</a:t>
             </a:r>
           </a:p>
         </p:txBody>
@@ -36283,8 +36522,8 @@
         </p:nvSpPr>
         <p:spPr>
           <a:xfrm>
-            <a:off x="4640580" y="1975104"/>
-            <a:ext cx="54864" cy="2875788"/>
+            <a:off x="4640580" y="1737360"/>
+            <a:ext cx="54864" cy="3113532"/>
           </a:xfrm>
           <a:prstGeom prst="rect">
             <a:avLst/>
@@ -36327,8 +36566,8 @@
         </p:nvSpPr>
         <p:spPr>
           <a:xfrm>
-            <a:off x="4695444" y="1975104"/>
-            <a:ext cx="3991356" cy="2875788"/>
+            <a:off x="4695444" y="1737360"/>
+            <a:ext cx="3991356" cy="3113532"/>
           </a:xfrm>
           <a:prstGeom prst="roundRect">
             <a:avLst>
@@ -36336,11 +36575,11 @@
             </a:avLst>
           </a:prstGeom>
           <a:solidFill>
-            <a:srgbClr val="F8FAFC"/>
+            <a:srgbClr val="EEF2FF"/>
           </a:solidFill>
           <a:ln w="6350">
             <a:solidFill>
-              <a:srgbClr val="E2E8F0"/>
+              <a:srgbClr val="3730A3"/>
             </a:solidFill>
           </a:ln>
           <a:effectLst/>
@@ -36375,7 +36614,7 @@
         </p:nvSpPr>
         <p:spPr>
           <a:xfrm>
-            <a:off x="4805172" y="2048256"/>
+            <a:off x="4805172" y="1810512"/>
             <a:ext cx="3771900" cy="320040"/>
           </a:xfrm>
           <a:prstGeom prst="rect">
@@ -36403,7 +36642,7 @@
                 <a:cs typeface="Sylfaen"/>
                 <a:latin typeface="Sylfaen"/>
               </a:rPr>
-              <a:t>⚙️ გადაჭრის გზები:</a:t>
+              <a:t>🔒 SMTP უსაფრთხოება:</a:t>
             </a:r>
           </a:p>
         </p:txBody>
@@ -36416,8 +36655,8 @@
         </p:nvSpPr>
         <p:spPr>
           <a:xfrm>
-            <a:off x="4805172" y="2441448"/>
-            <a:ext cx="3771900" cy="2121408"/>
+            <a:off x="4805172" y="2203704"/>
+            <a:ext cx="3771900" cy="713232"/>
           </a:xfrm>
           <a:prstGeom prst="rect">
             <a:avLst/>
@@ -36430,24 +36669,13 @@
           </a:bodyPr>
           <a:lstStyle/>
           <a:p>
-            <a:pPr algn="l">
-              <a:spcAft>
-                <a:spcPts val="300"/>
-              </a:spcAft>
-            </a:pPr>
-            <a:r>
-              <a:rPr sz="1300" b="1">
-                <a:solidFill>
-                  <a:srgbClr val="3730A3"/>
-                </a:solidFill>
-                <a:ea typeface="Sylfaen"/>
-                <a:cs typeface="Sylfaen"/>
-                <a:latin typeface="Sylfaen"/>
-              </a:rPr>
-              <a:t>▸  </a:t>
-            </a:r>
-            <a:r>
-              <a:rPr sz="1300">
+            <a:pPr>
+              <a:spcAft>
+                <a:spcPts val="400"/>
+              </a:spcAft>
+            </a:pPr>
+            <a:r>
+              <a:rPr sz="1300" b="0" i="0">
                 <a:solidFill>
                   <a:srgbClr val="0F172A"/>
                 </a:solidFill>
@@ -36455,36 +36683,7 @@
                 <a:cs typeface="Sylfaen"/>
                 <a:latin typeface="Sylfaen"/>
               </a:rPr>
-              <a:t>Validation Rules: საიტის ფორმაში ელფოსტის ველის სავალდებულოობა (Required field);</a:t>
-            </a:r>
-          </a:p>
-          <a:p>
-            <a:pPr algn="l">
-              <a:spcAft>
-                <a:spcPts val="300"/>
-              </a:spcAft>
-            </a:pPr>
-            <a:r>
-              <a:rPr sz="1300" b="1">
-                <a:solidFill>
-                  <a:srgbClr val="3730A3"/>
-                </a:solidFill>
-                <a:ea typeface="Sylfaen"/>
-                <a:cs typeface="Sylfaen"/>
-                <a:latin typeface="Sylfaen"/>
-              </a:rPr>
-              <a:t>▸  </a:t>
-            </a:r>
-            <a:r>
-              <a:rPr sz="1300">
-                <a:solidFill>
-                  <a:srgbClr val="0F172A"/>
-                </a:solidFill>
-                <a:ea typeface="Sylfaen"/>
-                <a:cs typeface="Sylfaen"/>
-                <a:latin typeface="Sylfaen"/>
-              </a:rPr>
-              <a:t>Error Handling Modules: Make.com-ში შეცდომის მართვის ბლოკების (Ignore, Resume, Break) გამოყენება.</a:t>
+              <a:t>Gmail-თან დასაკავშირებლად დაგჭირდებათ Google-ის უსაფრთხოების მენიუდან "App Password"-ის გენერირება.</a:t>
             </a:r>
           </a:p>
         </p:txBody>
@@ -36755,7 +36954,7 @@
                 <a:cs typeface="Sylfaen"/>
                 <a:latin typeface="Sylfaen"/>
               </a:rPr>
-              <a:t>Demo Day Pitch: First 2 Minutes</a:t>
+              <a:t>Make.com: შეცდომების მართვა და Edge Cases</a:t>
             </a:r>
           </a:p>
         </p:txBody>
@@ -36856,7 +37055,7 @@
                 <a:cs typeface="Sylfaen"/>
                 <a:latin typeface="Sylfaen"/>
               </a:rPr>
-              <a:t>41 / 49</a:t>
+              <a:t>41 / 50</a:t>
             </a:r>
           </a:p>
         </p:txBody>
@@ -36870,7 +37069,7 @@
         <p:spPr>
           <a:xfrm>
             <a:off x="457200" y="1188720"/>
-            <a:ext cx="8229600" cy="475488"/>
+            <a:ext cx="8229600" cy="713232"/>
           </a:xfrm>
           <a:prstGeom prst="rect">
             <a:avLst/>
@@ -36897,7 +37096,7 @@
                 <a:cs typeface="Sylfaen"/>
                 <a:latin typeface="Sylfaen"/>
               </a:rPr>
-              <a:t>პრეზენტაციის დასაწყისი — ჟიურის ყურადღების მიპყრობა:</a:t>
+              <a:t>როგორ უზრუნველვყოთ ჩვენი ავტომატიზაციების სტაბილური მუშაობა შეცდომების შემთხვევაში?</a:t>
             </a:r>
           </a:p>
         </p:txBody>
@@ -36910,8 +37109,8 @@
         </p:nvSpPr>
         <p:spPr>
           <a:xfrm>
-            <a:off x="457200" y="1737360"/>
-            <a:ext cx="54864" cy="1581912"/>
+            <a:off x="457200" y="1975104"/>
+            <a:ext cx="54864" cy="2875788"/>
           </a:xfrm>
           <a:prstGeom prst="rect">
             <a:avLst/>
@@ -36954,8 +37153,8 @@
         </p:nvSpPr>
         <p:spPr>
           <a:xfrm>
-            <a:off x="512064" y="1737360"/>
-            <a:ext cx="3991356" cy="1581912"/>
+            <a:off x="512064" y="1975104"/>
+            <a:ext cx="3991356" cy="2875788"/>
           </a:xfrm>
           <a:prstGeom prst="roundRect">
             <a:avLst>
@@ -37002,7 +37201,7 @@
         </p:nvSpPr>
         <p:spPr>
           <a:xfrm>
-            <a:off x="621792" y="1810512"/>
+            <a:off x="621792" y="2048256"/>
             <a:ext cx="3771900" cy="320040"/>
           </a:xfrm>
           <a:prstGeom prst="rect">
@@ -37030,7 +37229,7 @@
                 <a:cs typeface="Sylfaen"/>
                 <a:latin typeface="Sylfaen"/>
               </a:rPr>
-              <a:t>0:00 - 1:00 (პრობლემა):</a:t>
+              <a:t>⚠️ პოტენციური შეცდომები:</a:t>
             </a:r>
           </a:p>
         </p:txBody>
@@ -37043,8 +37242,8 @@
         </p:nvSpPr>
         <p:spPr>
           <a:xfrm>
-            <a:off x="621792" y="2203704"/>
-            <a:ext cx="3771900" cy="713232"/>
+            <a:off x="621792" y="2441448"/>
+            <a:ext cx="3771900" cy="1719072"/>
           </a:xfrm>
           <a:prstGeom prst="rect">
             <a:avLst/>
@@ -37057,13 +37256,24 @@
           </a:bodyPr>
           <a:lstStyle/>
           <a:p>
-            <a:pPr>
-              <a:spcAft>
-                <a:spcPts val="400"/>
-              </a:spcAft>
-            </a:pPr>
-            <a:r>
-              <a:rPr sz="1300" b="0" i="0">
+            <a:pPr algn="l">
+              <a:spcAft>
+                <a:spcPts val="300"/>
+              </a:spcAft>
+            </a:pPr>
+            <a:r>
+              <a:rPr sz="1300" b="1">
+                <a:solidFill>
+                  <a:srgbClr val="3730A3"/>
+                </a:solidFill>
+                <a:ea typeface="Sylfaen"/>
+                <a:cs typeface="Sylfaen"/>
+                <a:latin typeface="Sylfaen"/>
+              </a:rPr>
+              <a:t>▸  </a:t>
+            </a:r>
+            <a:r>
+              <a:rPr sz="1300">
                 <a:solidFill>
                   <a:srgbClr val="0F172A"/>
                 </a:solidFill>
@@ -37071,7 +37281,65 @@
                 <a:cs typeface="Sylfaen"/>
                 <a:latin typeface="Sylfaen"/>
               </a:rPr>
-              <a:t>დაიწყეთ რეალური ისტორიით ან შოკისმომგვრელი სტატისტიკით. აჩვენეთ, რომ პრობლემა მტკივნეულია და ბაზარი დიდია.</a:t>
+              <a:t>მომხმარებელმა ფორმაში არ შეიყვანა სახელი (ცარიელი ველი);</a:t>
+            </a:r>
+          </a:p>
+          <a:p>
+            <a:pPr algn="l">
+              <a:spcAft>
+                <a:spcPts val="300"/>
+              </a:spcAft>
+            </a:pPr>
+            <a:r>
+              <a:rPr sz="1300" b="1">
+                <a:solidFill>
+                  <a:srgbClr val="3730A3"/>
+                </a:solidFill>
+                <a:ea typeface="Sylfaen"/>
+                <a:cs typeface="Sylfaen"/>
+                <a:latin typeface="Sylfaen"/>
+              </a:rPr>
+              <a:t>▸  </a:t>
+            </a:r>
+            <a:r>
+              <a:rPr sz="1300">
+                <a:solidFill>
+                  <a:srgbClr val="0F172A"/>
+                </a:solidFill>
+                <a:ea typeface="Sylfaen"/>
+                <a:cs typeface="Sylfaen"/>
+                <a:latin typeface="Sylfaen"/>
+              </a:rPr>
+              <a:t>ელფოსტის ფორმატი არასწორია;</a:t>
+            </a:r>
+          </a:p>
+          <a:p>
+            <a:pPr algn="l">
+              <a:spcAft>
+                <a:spcPts val="300"/>
+              </a:spcAft>
+            </a:pPr>
+            <a:r>
+              <a:rPr sz="1300" b="1">
+                <a:solidFill>
+                  <a:srgbClr val="3730A3"/>
+                </a:solidFill>
+                <a:ea typeface="Sylfaen"/>
+                <a:cs typeface="Sylfaen"/>
+                <a:latin typeface="Sylfaen"/>
+              </a:rPr>
+              <a:t>▸  </a:t>
+            </a:r>
+            <a:r>
+              <a:rPr sz="1300">
+                <a:solidFill>
+                  <a:srgbClr val="0F172A"/>
+                </a:solidFill>
+                <a:ea typeface="Sylfaen"/>
+                <a:cs typeface="Sylfaen"/>
+                <a:latin typeface="Sylfaen"/>
+              </a:rPr>
+              <a:t>სერვერი დროებით გაითიშა.</a:t>
             </a:r>
           </a:p>
         </p:txBody>
@@ -37084,8 +37352,8 @@
         </p:nvSpPr>
         <p:spPr>
           <a:xfrm>
-            <a:off x="4640580" y="1737360"/>
-            <a:ext cx="54864" cy="1581912"/>
+            <a:off x="4640580" y="1975104"/>
+            <a:ext cx="54864" cy="2875788"/>
           </a:xfrm>
           <a:prstGeom prst="rect">
             <a:avLst/>
@@ -37128,8 +37396,8 @@
         </p:nvSpPr>
         <p:spPr>
           <a:xfrm>
-            <a:off x="4695444" y="1737360"/>
-            <a:ext cx="3991356" cy="1581912"/>
+            <a:off x="4695444" y="1975104"/>
+            <a:ext cx="3991356" cy="2875788"/>
           </a:xfrm>
           <a:prstGeom prst="roundRect">
             <a:avLst>
@@ -37176,7 +37444,7 @@
         </p:nvSpPr>
         <p:spPr>
           <a:xfrm>
-            <a:off x="4805172" y="1810512"/>
+            <a:off x="4805172" y="2048256"/>
             <a:ext cx="3771900" cy="320040"/>
           </a:xfrm>
           <a:prstGeom prst="rect">
@@ -37204,7 +37472,7 @@
                 <a:cs typeface="Sylfaen"/>
                 <a:latin typeface="Sylfaen"/>
               </a:rPr>
-              <a:t>1:00 - 2:00 (გადაწყვეტა/MVP):</a:t>
+              <a:t>⚙️ გადაჭრის გზები:</a:t>
             </a:r>
           </a:p>
         </p:txBody>
@@ -37217,8 +37485,8 @@
         </p:nvSpPr>
         <p:spPr>
           <a:xfrm>
-            <a:off x="4805172" y="2203704"/>
-            <a:ext cx="3771900" cy="713232"/>
+            <a:off x="4805172" y="2441448"/>
+            <a:ext cx="3771900" cy="2121408"/>
           </a:xfrm>
           <a:prstGeom prst="rect">
             <a:avLst/>
@@ -37231,13 +37499,24 @@
           </a:bodyPr>
           <a:lstStyle/>
           <a:p>
-            <a:pPr>
-              <a:spcAft>
-                <a:spcPts val="400"/>
-              </a:spcAft>
-            </a:pPr>
-            <a:r>
-              <a:rPr sz="1300" b="0" i="0">
+            <a:pPr algn="l">
+              <a:spcAft>
+                <a:spcPts val="300"/>
+              </a:spcAft>
+            </a:pPr>
+            <a:r>
+              <a:rPr sz="1300" b="1">
+                <a:solidFill>
+                  <a:srgbClr val="3730A3"/>
+                </a:solidFill>
+                <a:ea typeface="Sylfaen"/>
+                <a:cs typeface="Sylfaen"/>
+                <a:latin typeface="Sylfaen"/>
+              </a:rPr>
+              <a:t>▸  </a:t>
+            </a:r>
+            <a:r>
+              <a:rPr sz="1300">
                 <a:solidFill>
                   <a:srgbClr val="0F172A"/>
                 </a:solidFill>
@@ -37245,7 +37524,36 @@
                 <a:cs typeface="Sylfaen"/>
                 <a:latin typeface="Sylfaen"/>
               </a:rPr>
-              <a:t>აჩვენეთ მუშა საიტი. არ აჩვენოთ სქრინშოთები - აჩვენეთ რეალური Lovable URL და მომხმარებლის რეგისტრაციის პროცესი.</a:t>
+              <a:t>Validation Rules: საიტის ფორმაში ელფოსტის ველის სავალდებულოობა (Required field);</a:t>
+            </a:r>
+          </a:p>
+          <a:p>
+            <a:pPr algn="l">
+              <a:spcAft>
+                <a:spcPts val="300"/>
+              </a:spcAft>
+            </a:pPr>
+            <a:r>
+              <a:rPr sz="1300" b="1">
+                <a:solidFill>
+                  <a:srgbClr val="3730A3"/>
+                </a:solidFill>
+                <a:ea typeface="Sylfaen"/>
+                <a:cs typeface="Sylfaen"/>
+                <a:latin typeface="Sylfaen"/>
+              </a:rPr>
+              <a:t>▸  </a:t>
+            </a:r>
+            <a:r>
+              <a:rPr sz="1300">
+                <a:solidFill>
+                  <a:srgbClr val="0F172A"/>
+                </a:solidFill>
+                <a:ea typeface="Sylfaen"/>
+                <a:cs typeface="Sylfaen"/>
+                <a:latin typeface="Sylfaen"/>
+              </a:rPr>
+              <a:t>Error Handling Modules: Make.com-ში შეცდომის მართვის ბლოკების (Ignore, Resume, Break) გამოყენება.</a:t>
             </a:r>
           </a:p>
         </p:txBody>
@@ -37516,7 +37824,7 @@
                 <a:cs typeface="Sylfaen"/>
                 <a:latin typeface="Sylfaen"/>
               </a:rPr>
-              <a:t>Demo Day Pitch: Last 3 Minutes</a:t>
+              <a:t>Demo Day Pitch: First 2 Minutes</a:t>
             </a:r>
           </a:p>
         </p:txBody>
@@ -37617,7 +37925,7 @@
                 <a:cs typeface="Sylfaen"/>
                 <a:latin typeface="Sylfaen"/>
               </a:rPr>
-              <a:t>42 / 49</a:t>
+              <a:t>42 / 50</a:t>
             </a:r>
           </a:p>
         </p:txBody>
@@ -37658,7 +37966,7 @@
                 <a:cs typeface="Sylfaen"/>
                 <a:latin typeface="Sylfaen"/>
               </a:rPr>
-              <a:t>პრეზენტაციის დასასრული — ბიზნეს მოდელი და Ask:</a:t>
+              <a:t>პრეზენტაციის დასაწყისი — ჟიურის ყურადღების მიპყრობა:</a:t>
             </a:r>
           </a:p>
         </p:txBody>
@@ -37672,13 +37980,13 @@
         <p:spPr>
           <a:xfrm>
             <a:off x="457200" y="1737360"/>
-            <a:ext cx="45720" cy="1325879"/>
-          </a:xfrm>
-          <a:prstGeom prst="rect">
-            <a:avLst/>
-          </a:prstGeom>
-          <a:solidFill>
-            <a:srgbClr val="3730A3"/>
+            <a:ext cx="54864" cy="1581912"/>
+          </a:xfrm>
+          <a:prstGeom prst="rect">
+            <a:avLst/>
+          </a:prstGeom>
+          <a:solidFill>
+            <a:srgbClr val="4F46E5"/>
           </a:solidFill>
           <a:ln>
             <a:noFill/>
@@ -37715,8 +38023,8 @@
         </p:nvSpPr>
         <p:spPr>
           <a:xfrm>
-            <a:off x="502920" y="1737360"/>
-            <a:ext cx="4000500" cy="1325879"/>
+            <a:off x="512064" y="1737360"/>
+            <a:ext cx="3991356" cy="1581912"/>
           </a:xfrm>
           <a:prstGeom prst="roundRect">
             <a:avLst>
@@ -37724,6 +38032,180 @@
             </a:avLst>
           </a:prstGeom>
           <a:solidFill>
+            <a:srgbClr val="FFF7ED"/>
+          </a:solidFill>
+          <a:ln w="6350">
+            <a:solidFill>
+              <a:srgbClr val="4F46E5"/>
+            </a:solidFill>
+          </a:ln>
+          <a:effectLst/>
+        </p:spPr>
+        <p:style>
+          <a:lnRef idx="1">
+            <a:schemeClr val="accent1"/>
+          </a:lnRef>
+          <a:fillRef idx="3">
+            <a:schemeClr val="accent1"/>
+          </a:fillRef>
+          <a:effectRef idx="2">
+            <a:schemeClr val="accent1"/>
+          </a:effectRef>
+          <a:fontRef idx="minor">
+            <a:schemeClr val="lt1"/>
+          </a:fontRef>
+        </p:style>
+        <p:txBody>
+          <a:bodyPr rtlCol="0" anchor="ctr"/>
+          <a:lstStyle/>
+          <a:p>
+            <a:pPr algn="ctr"/>
+          </a:p>
+        </p:txBody>
+      </p:sp>
+      <p:sp>
+        <p:nvSpPr>
+          <p:cNvPr id="11" name="TextBox 10"/>
+          <p:cNvSpPr txBox="1"/>
+          <p:nvPr/>
+        </p:nvSpPr>
+        <p:spPr>
+          <a:xfrm>
+            <a:off x="621792" y="1810512"/>
+            <a:ext cx="3771900" cy="320040"/>
+          </a:xfrm>
+          <a:prstGeom prst="rect">
+            <a:avLst/>
+          </a:prstGeom>
+          <a:noFill/>
+        </p:spPr>
+        <p:txBody>
+          <a:bodyPr wrap="square" anchor="t" lIns="54864" rIns="54864" tIns="54864" bIns="54864">
+            <a:spAutoFit/>
+          </a:bodyPr>
+          <a:lstStyle/>
+          <a:p>
+            <a:pPr>
+              <a:spcAft>
+                <a:spcPts val="400"/>
+              </a:spcAft>
+            </a:pPr>
+            <a:r>
+              <a:rPr sz="1400" b="1" i="0">
+                <a:solidFill>
+                  <a:srgbClr val="0F172A"/>
+                </a:solidFill>
+                <a:ea typeface="Sylfaen"/>
+                <a:cs typeface="Sylfaen"/>
+                <a:latin typeface="Sylfaen"/>
+              </a:rPr>
+              <a:t>0:00 - 1:00 (პრობლემა):</a:t>
+            </a:r>
+          </a:p>
+        </p:txBody>
+      </p:sp>
+      <p:sp>
+        <p:nvSpPr>
+          <p:cNvPr id="12" name="TextBox 11"/>
+          <p:cNvSpPr txBox="1"/>
+          <p:nvPr/>
+        </p:nvSpPr>
+        <p:spPr>
+          <a:xfrm>
+            <a:off x="621792" y="2203704"/>
+            <a:ext cx="3771900" cy="713232"/>
+          </a:xfrm>
+          <a:prstGeom prst="rect">
+            <a:avLst/>
+          </a:prstGeom>
+          <a:noFill/>
+        </p:spPr>
+        <p:txBody>
+          <a:bodyPr wrap="square" anchor="t" lIns="54864" rIns="54864" tIns="54864" bIns="54864">
+            <a:spAutoFit/>
+          </a:bodyPr>
+          <a:lstStyle/>
+          <a:p>
+            <a:pPr>
+              <a:spcAft>
+                <a:spcPts val="400"/>
+              </a:spcAft>
+            </a:pPr>
+            <a:r>
+              <a:rPr sz="1300" b="0" i="0">
+                <a:solidFill>
+                  <a:srgbClr val="0F172A"/>
+                </a:solidFill>
+                <a:ea typeface="Sylfaen"/>
+                <a:cs typeface="Sylfaen"/>
+                <a:latin typeface="Sylfaen"/>
+              </a:rPr>
+              <a:t>დაიწყეთ რეალური ისტორიით ან შოკისმომგვრელი სტატისტიკით. აჩვენეთ, რომ პრობლემა მტკივნეულია და ბაზარი დიდია.</a:t>
+            </a:r>
+          </a:p>
+        </p:txBody>
+      </p:sp>
+      <p:sp>
+        <p:nvSpPr>
+          <p:cNvPr id="13" name="Rectangle 12"/>
+          <p:cNvSpPr/>
+          <p:nvPr/>
+        </p:nvSpPr>
+        <p:spPr>
+          <a:xfrm>
+            <a:off x="4640580" y="1737360"/>
+            <a:ext cx="54864" cy="1581912"/>
+          </a:xfrm>
+          <a:prstGeom prst="rect">
+            <a:avLst/>
+          </a:prstGeom>
+          <a:solidFill>
+            <a:srgbClr val="3730A3"/>
+          </a:solidFill>
+          <a:ln>
+            <a:noFill/>
+          </a:ln>
+          <a:effectLst/>
+        </p:spPr>
+        <p:style>
+          <a:lnRef idx="1">
+            <a:schemeClr val="accent1"/>
+          </a:lnRef>
+          <a:fillRef idx="3">
+            <a:schemeClr val="accent1"/>
+          </a:fillRef>
+          <a:effectRef idx="2">
+            <a:schemeClr val="accent1"/>
+          </a:effectRef>
+          <a:fontRef idx="minor">
+            <a:schemeClr val="lt1"/>
+          </a:fontRef>
+        </p:style>
+        <p:txBody>
+          <a:bodyPr rtlCol="0" anchor="ctr"/>
+          <a:lstStyle/>
+          <a:p>
+            <a:pPr algn="ctr"/>
+          </a:p>
+        </p:txBody>
+      </p:sp>
+      <p:sp>
+        <p:nvSpPr>
+          <p:cNvPr id="14" name="Rounded Rectangle 13"/>
+          <p:cNvSpPr/>
+          <p:nvPr/>
+        </p:nvSpPr>
+        <p:spPr>
+          <a:xfrm>
+            <a:off x="4695444" y="1737360"/>
+            <a:ext cx="3991356" cy="1581912"/>
+          </a:xfrm>
+          <a:prstGeom prst="roundRect">
+            <a:avLst>
+              <a:gd name="adj" fmla="val 4000"/>
+            </a:avLst>
+          </a:prstGeom>
+          <a:solidFill>
             <a:srgbClr val="F8FAFC"/>
           </a:solidFill>
           <a:ln w="6350">
@@ -37757,14 +38239,14 @@
       </p:sp>
       <p:sp>
         <p:nvSpPr>
-          <p:cNvPr id="11" name="TextBox 10"/>
+          <p:cNvPr id="15" name="TextBox 14"/>
           <p:cNvSpPr txBox="1"/>
           <p:nvPr/>
         </p:nvSpPr>
         <p:spPr>
           <a:xfrm>
-            <a:off x="585216" y="1792224"/>
-            <a:ext cx="3845052" cy="320040"/>
+            <a:off x="4805172" y="1810512"/>
+            <a:ext cx="3771900" cy="320040"/>
           </a:xfrm>
           <a:prstGeom prst="rect">
             <a:avLst/>
@@ -37791,21 +38273,21 @@
                 <a:cs typeface="Sylfaen"/>
                 <a:latin typeface="Sylfaen"/>
               </a:rPr>
-              <a:t>2:00 - 3:00 (ბიზნეს მოდელი):</a:t>
-            </a:r>
-          </a:p>
-        </p:txBody>
-      </p:sp>
-      <p:sp>
-        <p:nvSpPr>
-          <p:cNvPr id="12" name="TextBox 11"/>
+              <a:t>1:00 - 2:00 (გადაწყვეტა/MVP):</a:t>
+            </a:r>
+          </a:p>
+        </p:txBody>
+      </p:sp>
+      <p:sp>
+        <p:nvSpPr>
+          <p:cNvPr id="16" name="TextBox 15"/>
           <p:cNvSpPr txBox="1"/>
           <p:nvPr/>
         </p:nvSpPr>
         <p:spPr>
           <a:xfrm>
-            <a:off x="585216" y="2185416"/>
-            <a:ext cx="3845052" cy="475488"/>
+            <a:off x="4805172" y="2203704"/>
+            <a:ext cx="3771900" cy="713232"/>
           </a:xfrm>
           <a:prstGeom prst="rect">
             <a:avLst/>
@@ -37832,27 +38314,27 @@
                 <a:cs typeface="Sylfaen"/>
                 <a:latin typeface="Sylfaen"/>
               </a:rPr>
-              <a:t>როგორ გამოიმუშავებთ ფულს? აჩვენეთ 3-საფეხურიანი Pricing.</a:t>
-            </a:r>
-          </a:p>
-        </p:txBody>
-      </p:sp>
-      <p:sp>
-        <p:nvSpPr>
-          <p:cNvPr id="13" name="Rectangle 12"/>
-          <p:cNvSpPr/>
-          <p:nvPr/>
-        </p:nvSpPr>
-        <p:spPr>
-          <a:xfrm>
-            <a:off x="4640580" y="1737360"/>
-            <a:ext cx="45720" cy="1325879"/>
-          </a:xfrm>
-          <a:prstGeom prst="rect">
-            <a:avLst/>
-          </a:prstGeom>
-          <a:solidFill>
-            <a:srgbClr val="3730A3"/>
+              <a:t>აჩვენეთ მუშა საიტი. არ აჩვენოთ სქრინშოთები - აჩვენეთ რეალური Lovable URL და მომხმარებლის რეგისტრაციის პროცესი.</a:t>
+            </a:r>
+          </a:p>
+        </p:txBody>
+      </p:sp>
+      <p:sp>
+        <p:nvSpPr>
+          <p:cNvPr id="17" name="Rectangle 16"/>
+          <p:cNvSpPr/>
+          <p:nvPr/>
+        </p:nvSpPr>
+        <p:spPr>
+          <a:xfrm>
+            <a:off x="457200" y="4850892"/>
+            <a:ext cx="8229600" cy="13716"/>
+          </a:xfrm>
+          <a:prstGeom prst="rect">
+            <a:avLst/>
+          </a:prstGeom>
+          <a:solidFill>
+            <a:srgbClr val="E2E8F0"/>
           </a:solidFill>
           <a:ln>
             <a:noFill/>
@@ -37883,355 +38365,7 @@
       </p:sp>
       <p:sp>
         <p:nvSpPr>
-          <p:cNvPr id="14" name="Rounded Rectangle 13"/>
-          <p:cNvSpPr/>
-          <p:nvPr/>
-        </p:nvSpPr>
-        <p:spPr>
-          <a:xfrm>
-            <a:off x="4686300" y="1737360"/>
-            <a:ext cx="4000500" cy="1325879"/>
-          </a:xfrm>
-          <a:prstGeom prst="roundRect">
-            <a:avLst>
-              <a:gd name="adj" fmla="val 4000"/>
-            </a:avLst>
-          </a:prstGeom>
-          <a:solidFill>
-            <a:srgbClr val="F8FAFC"/>
-          </a:solidFill>
-          <a:ln w="6350">
-            <a:solidFill>
-              <a:srgbClr val="E2E8F0"/>
-            </a:solidFill>
-          </a:ln>
-          <a:effectLst/>
-        </p:spPr>
-        <p:style>
-          <a:lnRef idx="1">
-            <a:schemeClr val="accent1"/>
-          </a:lnRef>
-          <a:fillRef idx="3">
-            <a:schemeClr val="accent1"/>
-          </a:fillRef>
-          <a:effectRef idx="2">
-            <a:schemeClr val="accent1"/>
-          </a:effectRef>
-          <a:fontRef idx="minor">
-            <a:schemeClr val="lt1"/>
-          </a:fontRef>
-        </p:style>
-        <p:txBody>
-          <a:bodyPr rtlCol="0" anchor="ctr"/>
-          <a:lstStyle/>
-          <a:p>
-            <a:pPr algn="ctr"/>
-          </a:p>
-        </p:txBody>
-      </p:sp>
-      <p:sp>
-        <p:nvSpPr>
-          <p:cNvPr id="15" name="TextBox 14"/>
-          <p:cNvSpPr txBox="1"/>
-          <p:nvPr/>
-        </p:nvSpPr>
-        <p:spPr>
-          <a:xfrm>
-            <a:off x="4768596" y="1792224"/>
-            <a:ext cx="3845052" cy="320040"/>
-          </a:xfrm>
-          <a:prstGeom prst="rect">
-            <a:avLst/>
-          </a:prstGeom>
-          <a:noFill/>
-        </p:spPr>
-        <p:txBody>
-          <a:bodyPr wrap="square" anchor="t" lIns="54864" rIns="54864" tIns="54864" bIns="54864">
-            <a:spAutoFit/>
-          </a:bodyPr>
-          <a:lstStyle/>
-          <a:p>
-            <a:pPr>
-              <a:spcAft>
-                <a:spcPts val="400"/>
-              </a:spcAft>
-            </a:pPr>
-            <a:r>
-              <a:rPr sz="1400" b="1" i="0">
-                <a:solidFill>
-                  <a:srgbClr val="0F172A"/>
-                </a:solidFill>
-                <a:ea typeface="Sylfaen"/>
-                <a:cs typeface="Sylfaen"/>
-                <a:latin typeface="Sylfaen"/>
-              </a:rPr>
-              <a:t>3:00 - 4:00 (კონკურენცია &amp; Traction):</a:t>
-            </a:r>
-          </a:p>
-        </p:txBody>
-      </p:sp>
-      <p:sp>
-        <p:nvSpPr>
-          <p:cNvPr id="16" name="TextBox 15"/>
-          <p:cNvSpPr txBox="1"/>
-          <p:nvPr/>
-        </p:nvSpPr>
-        <p:spPr>
-          <a:xfrm>
-            <a:off x="4768596" y="2185416"/>
-            <a:ext cx="3845052" cy="713232"/>
-          </a:xfrm>
-          <a:prstGeom prst="rect">
-            <a:avLst/>
-          </a:prstGeom>
-          <a:noFill/>
-        </p:spPr>
-        <p:txBody>
-          <a:bodyPr wrap="square" anchor="t" lIns="54864" rIns="54864" tIns="54864" bIns="54864">
-            <a:spAutoFit/>
-          </a:bodyPr>
-          <a:lstStyle/>
-          <a:p>
-            <a:pPr>
-              <a:spcAft>
-                <a:spcPts val="400"/>
-              </a:spcAft>
-            </a:pPr>
-            <a:r>
-              <a:rPr sz="1300" b="0" i="0">
-                <a:solidFill>
-                  <a:srgbClr val="0F172A"/>
-                </a:solidFill>
-                <a:ea typeface="Sylfaen"/>
-                <a:cs typeface="Sylfaen"/>
-                <a:latin typeface="Sylfaen"/>
-              </a:rPr>
-              <a:t>აჩვენეთ, რით ხართ უკეთესი Perplexity Matrix-ის მიხედვით. აჩვენეთ პირველი ლიდები Google Sheets-დან.</a:t>
-            </a:r>
-          </a:p>
-        </p:txBody>
-      </p:sp>
-      <p:sp>
-        <p:nvSpPr>
-          <p:cNvPr id="17" name="Rectangle 16"/>
-          <p:cNvSpPr/>
-          <p:nvPr/>
-        </p:nvSpPr>
-        <p:spPr>
-          <a:xfrm>
-            <a:off x="457200" y="3200399"/>
-            <a:ext cx="45720" cy="1325879"/>
-          </a:xfrm>
-          <a:prstGeom prst="rect">
-            <a:avLst/>
-          </a:prstGeom>
-          <a:solidFill>
-            <a:srgbClr val="3730A3"/>
-          </a:solidFill>
-          <a:ln>
-            <a:noFill/>
-          </a:ln>
-          <a:effectLst/>
-        </p:spPr>
-        <p:style>
-          <a:lnRef idx="1">
-            <a:schemeClr val="accent1"/>
-          </a:lnRef>
-          <a:fillRef idx="3">
-            <a:schemeClr val="accent1"/>
-          </a:fillRef>
-          <a:effectRef idx="2">
-            <a:schemeClr val="accent1"/>
-          </a:effectRef>
-          <a:fontRef idx="minor">
-            <a:schemeClr val="lt1"/>
-          </a:fontRef>
-        </p:style>
-        <p:txBody>
-          <a:bodyPr rtlCol="0" anchor="ctr"/>
-          <a:lstStyle/>
-          <a:p>
-            <a:pPr algn="ctr"/>
-          </a:p>
-        </p:txBody>
-      </p:sp>
-      <p:sp>
-        <p:nvSpPr>
-          <p:cNvPr id="18" name="Rounded Rectangle 17"/>
-          <p:cNvSpPr/>
-          <p:nvPr/>
-        </p:nvSpPr>
-        <p:spPr>
-          <a:xfrm>
-            <a:off x="502920" y="3200399"/>
-            <a:ext cx="4000500" cy="1325879"/>
-          </a:xfrm>
-          <a:prstGeom prst="roundRect">
-            <a:avLst>
-              <a:gd name="adj" fmla="val 4000"/>
-            </a:avLst>
-          </a:prstGeom>
-          <a:solidFill>
-            <a:srgbClr val="F8FAFC"/>
-          </a:solidFill>
-          <a:ln w="6350">
-            <a:solidFill>
-              <a:srgbClr val="E2E8F0"/>
-            </a:solidFill>
-          </a:ln>
-          <a:effectLst/>
-        </p:spPr>
-        <p:style>
-          <a:lnRef idx="1">
-            <a:schemeClr val="accent1"/>
-          </a:lnRef>
-          <a:fillRef idx="3">
-            <a:schemeClr val="accent1"/>
-          </a:fillRef>
-          <a:effectRef idx="2">
-            <a:schemeClr val="accent1"/>
-          </a:effectRef>
-          <a:fontRef idx="minor">
-            <a:schemeClr val="lt1"/>
-          </a:fontRef>
-        </p:style>
-        <p:txBody>
-          <a:bodyPr rtlCol="0" anchor="ctr"/>
-          <a:lstStyle/>
-          <a:p>
-            <a:pPr algn="ctr"/>
-          </a:p>
-        </p:txBody>
-      </p:sp>
-      <p:sp>
-        <p:nvSpPr>
-          <p:cNvPr id="19" name="TextBox 18"/>
-          <p:cNvSpPr txBox="1"/>
-          <p:nvPr/>
-        </p:nvSpPr>
-        <p:spPr>
-          <a:xfrm>
-            <a:off x="585216" y="3255263"/>
-            <a:ext cx="3845052" cy="320040"/>
-          </a:xfrm>
-          <a:prstGeom prst="rect">
-            <a:avLst/>
-          </a:prstGeom>
-          <a:noFill/>
-        </p:spPr>
-        <p:txBody>
-          <a:bodyPr wrap="square" anchor="t" lIns="54864" rIns="54864" tIns="54864" bIns="54864">
-            <a:spAutoFit/>
-          </a:bodyPr>
-          <a:lstStyle/>
-          <a:p>
-            <a:pPr>
-              <a:spcAft>
-                <a:spcPts val="400"/>
-              </a:spcAft>
-            </a:pPr>
-            <a:r>
-              <a:rPr sz="1400" b="1" i="0">
-                <a:solidFill>
-                  <a:srgbClr val="0F172A"/>
-                </a:solidFill>
-                <a:ea typeface="Sylfaen"/>
-                <a:cs typeface="Sylfaen"/>
-                <a:latin typeface="Sylfaen"/>
-              </a:rPr>
-              <a:t>4:00 - 5:00 (გუნდი &amp; Ask):</a:t>
-            </a:r>
-          </a:p>
-        </p:txBody>
-      </p:sp>
-      <p:sp>
-        <p:nvSpPr>
-          <p:cNvPr id="20" name="TextBox 19"/>
-          <p:cNvSpPr txBox="1"/>
-          <p:nvPr/>
-        </p:nvSpPr>
-        <p:spPr>
-          <a:xfrm>
-            <a:off x="585216" y="3648456"/>
-            <a:ext cx="3845052" cy="475488"/>
-          </a:xfrm>
-          <a:prstGeom prst="rect">
-            <a:avLst/>
-          </a:prstGeom>
-          <a:noFill/>
-        </p:spPr>
-        <p:txBody>
-          <a:bodyPr wrap="square" anchor="t" lIns="54864" rIns="54864" tIns="54864" bIns="54864">
-            <a:spAutoFit/>
-          </a:bodyPr>
-          <a:lstStyle/>
-          <a:p>
-            <a:pPr>
-              <a:spcAft>
-                <a:spcPts val="400"/>
-              </a:spcAft>
-            </a:pPr>
-            <a:r>
-              <a:rPr sz="1300" b="0" i="0">
-                <a:solidFill>
-                  <a:srgbClr val="0F172A"/>
-                </a:solidFill>
-                <a:ea typeface="Sylfaen"/>
-                <a:cs typeface="Sylfaen"/>
-                <a:latin typeface="Sylfaen"/>
-              </a:rPr>
-              <a:t>რატომ ხართ თქვენ საუკეთესო გუნდი და რისთვის გჭირდებათ 25,000-ლარიანი გრანტი.</a:t>
-            </a:r>
-          </a:p>
-        </p:txBody>
-      </p:sp>
-      <p:sp>
-        <p:nvSpPr>
-          <p:cNvPr id="21" name="Rectangle 20"/>
-          <p:cNvSpPr/>
-          <p:nvPr/>
-        </p:nvSpPr>
-        <p:spPr>
-          <a:xfrm>
-            <a:off x="457200" y="4850892"/>
-            <a:ext cx="8229600" cy="13716"/>
-          </a:xfrm>
-          <a:prstGeom prst="rect">
-            <a:avLst/>
-          </a:prstGeom>
-          <a:solidFill>
-            <a:srgbClr val="E2E8F0"/>
-          </a:solidFill>
-          <a:ln>
-            <a:noFill/>
-          </a:ln>
-          <a:effectLst/>
-        </p:spPr>
-        <p:style>
-          <a:lnRef idx="1">
-            <a:schemeClr val="accent1"/>
-          </a:lnRef>
-          <a:fillRef idx="3">
-            <a:schemeClr val="accent1"/>
-          </a:fillRef>
-          <a:effectRef idx="2">
-            <a:schemeClr val="accent1"/>
-          </a:effectRef>
-          <a:fontRef idx="minor">
-            <a:schemeClr val="lt1"/>
-          </a:fontRef>
-        </p:style>
-        <p:txBody>
-          <a:bodyPr rtlCol="0" anchor="ctr"/>
-          <a:lstStyle/>
-          <a:p>
-            <a:pPr algn="ctr"/>
-          </a:p>
-        </p:txBody>
-      </p:sp>
-      <p:sp>
-        <p:nvSpPr>
-          <p:cNvPr id="22" name="TextBox 21"/>
+          <p:cNvPr id="18" name="TextBox 17"/>
           <p:cNvSpPr txBox="1"/>
           <p:nvPr/>
         </p:nvSpPr>
@@ -38451,7 +38585,7 @@
                 <a:cs typeface="Sylfaen"/>
                 <a:latin typeface="Sylfaen"/>
               </a:rPr>
-              <a:t>VC Mock Grill: Financial Q&amp;A (CAC:LTV)</a:t>
+              <a:t>Demo Day Pitch: Last 3 Minutes</a:t>
             </a:r>
           </a:p>
         </p:txBody>
@@ -38552,7 +38686,7 @@
                 <a:cs typeface="Sylfaen"/>
                 <a:latin typeface="Sylfaen"/>
               </a:rPr>
-              <a:t>43 / 49</a:t>
+              <a:t>43 / 50</a:t>
             </a:r>
           </a:p>
         </p:txBody>
@@ -38593,7 +38727,7 @@
                 <a:cs typeface="Sylfaen"/>
                 <a:latin typeface="Sylfaen"/>
               </a:rPr>
-              <a:t>ჟიურის ფინანსური კითხვები და სწორი პასუხები:</a:t>
+              <a:t>პრეზენტაციის დასასრული — ბიზნეს მოდელი და Ask:</a:t>
             </a:r>
           </a:p>
         </p:txBody>
@@ -38607,13 +38741,13 @@
         <p:spPr>
           <a:xfrm>
             <a:off x="457200" y="1737360"/>
-            <a:ext cx="54864" cy="1819656"/>
-          </a:xfrm>
-          <a:prstGeom prst="rect">
-            <a:avLst/>
-          </a:prstGeom>
-          <a:solidFill>
-            <a:srgbClr val="4F46E5"/>
+            <a:ext cx="45720" cy="1325879"/>
+          </a:xfrm>
+          <a:prstGeom prst="rect">
+            <a:avLst/>
+          </a:prstGeom>
+          <a:solidFill>
+            <a:srgbClr val="3730A3"/>
           </a:solidFill>
           <a:ln>
             <a:noFill/>
@@ -38650,8 +38784,8 @@
         </p:nvSpPr>
         <p:spPr>
           <a:xfrm>
-            <a:off x="512064" y="1737360"/>
-            <a:ext cx="3991356" cy="1819656"/>
+            <a:off x="502920" y="1737360"/>
+            <a:ext cx="4000500" cy="1325879"/>
           </a:xfrm>
           <a:prstGeom prst="roundRect">
             <a:avLst>
@@ -38659,11 +38793,11 @@
             </a:avLst>
           </a:prstGeom>
           <a:solidFill>
-            <a:srgbClr val="FFF7ED"/>
+            <a:srgbClr val="F8FAFC"/>
           </a:solidFill>
           <a:ln w="6350">
             <a:solidFill>
-              <a:srgbClr val="4F46E5"/>
+              <a:srgbClr val="E2E8F0"/>
             </a:solidFill>
           </a:ln>
           <a:effectLst/>
@@ -38698,8 +38832,8 @@
         </p:nvSpPr>
         <p:spPr>
           <a:xfrm>
-            <a:off x="621792" y="1810512"/>
-            <a:ext cx="3771900" cy="320040"/>
+            <a:off x="585216" y="1792224"/>
+            <a:ext cx="3845052" cy="320040"/>
           </a:xfrm>
           <a:prstGeom prst="rect">
             <a:avLst/>
@@ -38726,7 +38860,7 @@
                 <a:cs typeface="Sylfaen"/>
                 <a:latin typeface="Sylfaen"/>
               </a:rPr>
-              <a:t>❓ კითხვა: „როგორ აპირებთ მომხმარებლის მოზიდვას და რა იქნება თქვენი CAC?“</a:t>
+              <a:t>2:00 - 3:00 (ბიზნეს მოდელი):</a:t>
             </a:r>
           </a:p>
         </p:txBody>
@@ -38739,8 +38873,8 @@
         </p:nvSpPr>
         <p:spPr>
           <a:xfrm>
-            <a:off x="621792" y="2203704"/>
-            <a:ext cx="3771900" cy="713232"/>
+            <a:off x="585216" y="2185416"/>
+            <a:ext cx="3845052" cy="475488"/>
           </a:xfrm>
           <a:prstGeom prst="rect">
             <a:avLst/>
@@ -38767,7 +38901,7 @@
                 <a:cs typeface="Sylfaen"/>
                 <a:latin typeface="Sylfaen"/>
               </a:rPr>
-              <a:t>არასწორი პასუხი: „ჩვენ მარკეტინგზე ფულს არ დავხარჯავთ, მომხმარებლები თავად მოვლენ.“</a:t>
+              <a:t>როგორ გამოიმუშავებთ ფულს? აჩვენეთ 3-საფეხურიანი Pricing.</a:t>
             </a:r>
           </a:p>
         </p:txBody>
@@ -38781,7 +38915,7 @@
         <p:spPr>
           <a:xfrm>
             <a:off x="4640580" y="1737360"/>
-            <a:ext cx="54864" cy="1819656"/>
+            <a:ext cx="45720" cy="1325879"/>
           </a:xfrm>
           <a:prstGeom prst="rect">
             <a:avLst/>
@@ -38824,8 +38958,8 @@
         </p:nvSpPr>
         <p:spPr>
           <a:xfrm>
-            <a:off x="4695444" y="1737360"/>
-            <a:ext cx="3991356" cy="1819656"/>
+            <a:off x="4686300" y="1737360"/>
+            <a:ext cx="4000500" cy="1325879"/>
           </a:xfrm>
           <a:prstGeom prst="roundRect">
             <a:avLst>
@@ -38872,8 +39006,8 @@
         </p:nvSpPr>
         <p:spPr>
           <a:xfrm>
-            <a:off x="4805172" y="1810512"/>
-            <a:ext cx="3771900" cy="320040"/>
+            <a:off x="4768596" y="1792224"/>
+            <a:ext cx="3845052" cy="320040"/>
           </a:xfrm>
           <a:prstGeom prst="rect">
             <a:avLst/>
@@ -38900,7 +39034,7 @@
                 <a:cs typeface="Sylfaen"/>
                 <a:latin typeface="Sylfaen"/>
               </a:rPr>
-              <a:t>🟢 სწორი პასუხი (CAC:LTV):</a:t>
+              <a:t>3:00 - 4:00 (კონკურენცია &amp; Traction):</a:t>
             </a:r>
           </a:p>
         </p:txBody>
@@ -38913,8 +39047,8 @@
         </p:nvSpPr>
         <p:spPr>
           <a:xfrm>
-            <a:off x="4805172" y="2203704"/>
-            <a:ext cx="3771900" cy="950976"/>
+            <a:off x="4768596" y="2185416"/>
+            <a:ext cx="3845052" cy="713232"/>
           </a:xfrm>
           <a:prstGeom prst="rect">
             <a:avLst/>
@@ -38941,7 +39075,7 @@
                 <a:cs typeface="Sylfaen"/>
                 <a:latin typeface="Sylfaen"/>
               </a:rPr>
-              <a:t>„ჩვენი საწყისი CAC იქნება $5 Facebook Ads-ით, მომხმარებლის LTV კი - $30 (საშუალოდ 6 თვიანი ხელმოწერა $5-ად). ჩვენი LTV:CAC პროპორცია იქნება 6:1, რაც ბიზნესს მომგებიანს ხდის.“</a:t>
+              <a:t>აჩვენეთ, რით ხართ უკეთესი Perplexity Matrix-ის მიხედვით. აჩვენეთ პირველი ლიდები Google Sheets-დან.</a:t>
             </a:r>
           </a:p>
         </p:txBody>
@@ -38949,6 +39083,180 @@
       <p:sp>
         <p:nvSpPr>
           <p:cNvPr id="17" name="Rectangle 16"/>
+          <p:cNvSpPr/>
+          <p:nvPr/>
+        </p:nvSpPr>
+        <p:spPr>
+          <a:xfrm>
+            <a:off x="457200" y="3200399"/>
+            <a:ext cx="45720" cy="1325879"/>
+          </a:xfrm>
+          <a:prstGeom prst="rect">
+            <a:avLst/>
+          </a:prstGeom>
+          <a:solidFill>
+            <a:srgbClr val="3730A3"/>
+          </a:solidFill>
+          <a:ln>
+            <a:noFill/>
+          </a:ln>
+          <a:effectLst/>
+        </p:spPr>
+        <p:style>
+          <a:lnRef idx="1">
+            <a:schemeClr val="accent1"/>
+          </a:lnRef>
+          <a:fillRef idx="3">
+            <a:schemeClr val="accent1"/>
+          </a:fillRef>
+          <a:effectRef idx="2">
+            <a:schemeClr val="accent1"/>
+          </a:effectRef>
+          <a:fontRef idx="minor">
+            <a:schemeClr val="lt1"/>
+          </a:fontRef>
+        </p:style>
+        <p:txBody>
+          <a:bodyPr rtlCol="0" anchor="ctr"/>
+          <a:lstStyle/>
+          <a:p>
+            <a:pPr algn="ctr"/>
+          </a:p>
+        </p:txBody>
+      </p:sp>
+      <p:sp>
+        <p:nvSpPr>
+          <p:cNvPr id="18" name="Rounded Rectangle 17"/>
+          <p:cNvSpPr/>
+          <p:nvPr/>
+        </p:nvSpPr>
+        <p:spPr>
+          <a:xfrm>
+            <a:off x="502920" y="3200399"/>
+            <a:ext cx="4000500" cy="1325879"/>
+          </a:xfrm>
+          <a:prstGeom prst="roundRect">
+            <a:avLst>
+              <a:gd name="adj" fmla="val 4000"/>
+            </a:avLst>
+          </a:prstGeom>
+          <a:solidFill>
+            <a:srgbClr val="F8FAFC"/>
+          </a:solidFill>
+          <a:ln w="6350">
+            <a:solidFill>
+              <a:srgbClr val="E2E8F0"/>
+            </a:solidFill>
+          </a:ln>
+          <a:effectLst/>
+        </p:spPr>
+        <p:style>
+          <a:lnRef idx="1">
+            <a:schemeClr val="accent1"/>
+          </a:lnRef>
+          <a:fillRef idx="3">
+            <a:schemeClr val="accent1"/>
+          </a:fillRef>
+          <a:effectRef idx="2">
+            <a:schemeClr val="accent1"/>
+          </a:effectRef>
+          <a:fontRef idx="minor">
+            <a:schemeClr val="lt1"/>
+          </a:fontRef>
+        </p:style>
+        <p:txBody>
+          <a:bodyPr rtlCol="0" anchor="ctr"/>
+          <a:lstStyle/>
+          <a:p>
+            <a:pPr algn="ctr"/>
+          </a:p>
+        </p:txBody>
+      </p:sp>
+      <p:sp>
+        <p:nvSpPr>
+          <p:cNvPr id="19" name="TextBox 18"/>
+          <p:cNvSpPr txBox="1"/>
+          <p:nvPr/>
+        </p:nvSpPr>
+        <p:spPr>
+          <a:xfrm>
+            <a:off x="585216" y="3255263"/>
+            <a:ext cx="3845052" cy="320040"/>
+          </a:xfrm>
+          <a:prstGeom prst="rect">
+            <a:avLst/>
+          </a:prstGeom>
+          <a:noFill/>
+        </p:spPr>
+        <p:txBody>
+          <a:bodyPr wrap="square" anchor="t" lIns="54864" rIns="54864" tIns="54864" bIns="54864">
+            <a:spAutoFit/>
+          </a:bodyPr>
+          <a:lstStyle/>
+          <a:p>
+            <a:pPr>
+              <a:spcAft>
+                <a:spcPts val="400"/>
+              </a:spcAft>
+            </a:pPr>
+            <a:r>
+              <a:rPr sz="1400" b="1" i="0">
+                <a:solidFill>
+                  <a:srgbClr val="0F172A"/>
+                </a:solidFill>
+                <a:ea typeface="Sylfaen"/>
+                <a:cs typeface="Sylfaen"/>
+                <a:latin typeface="Sylfaen"/>
+              </a:rPr>
+              <a:t>4:00 - 5:00 (გუნდი &amp; Ask):</a:t>
+            </a:r>
+          </a:p>
+        </p:txBody>
+      </p:sp>
+      <p:sp>
+        <p:nvSpPr>
+          <p:cNvPr id="20" name="TextBox 19"/>
+          <p:cNvSpPr txBox="1"/>
+          <p:nvPr/>
+        </p:nvSpPr>
+        <p:spPr>
+          <a:xfrm>
+            <a:off x="585216" y="3648456"/>
+            <a:ext cx="3845052" cy="475488"/>
+          </a:xfrm>
+          <a:prstGeom prst="rect">
+            <a:avLst/>
+          </a:prstGeom>
+          <a:noFill/>
+        </p:spPr>
+        <p:txBody>
+          <a:bodyPr wrap="square" anchor="t" lIns="54864" rIns="54864" tIns="54864" bIns="54864">
+            <a:spAutoFit/>
+          </a:bodyPr>
+          <a:lstStyle/>
+          <a:p>
+            <a:pPr>
+              <a:spcAft>
+                <a:spcPts val="400"/>
+              </a:spcAft>
+            </a:pPr>
+            <a:r>
+              <a:rPr sz="1300" b="0" i="0">
+                <a:solidFill>
+                  <a:srgbClr val="0F172A"/>
+                </a:solidFill>
+                <a:ea typeface="Sylfaen"/>
+                <a:cs typeface="Sylfaen"/>
+                <a:latin typeface="Sylfaen"/>
+              </a:rPr>
+              <a:t>რატომ ხართ თქვენ საუკეთესო გუნდი და რისთვის გჭირდებათ 25,000-ლარიანი გრანტი.</a:t>
+            </a:r>
+          </a:p>
+        </p:txBody>
+      </p:sp>
+      <p:sp>
+        <p:nvSpPr>
+          <p:cNvPr id="21" name="Rectangle 20"/>
           <p:cNvSpPr/>
           <p:nvPr/>
         </p:nvSpPr>
@@ -38992,7 +39300,7 @@
       </p:sp>
       <p:sp>
         <p:nvSpPr>
-          <p:cNvPr id="18" name="TextBox 17"/>
+          <p:cNvPr id="22" name="TextBox 21"/>
           <p:cNvSpPr txBox="1"/>
           <p:nvPr/>
         </p:nvSpPr>
@@ -39212,7 +39520,7 @@
                 <a:cs typeface="Sylfaen"/>
                 <a:latin typeface="Sylfaen"/>
               </a:rPr>
-              <a:t>No-Code ლიმიტები და დეველოპერის აყვანის დრო</a:t>
+              <a:t>VC Mock Grill: Financial Q&amp;A (CAC:LTV)</a:t>
             </a:r>
           </a:p>
         </p:txBody>
@@ -39313,7 +39621,7 @@
                 <a:cs typeface="Sylfaen"/>
                 <a:latin typeface="Sylfaen"/>
               </a:rPr>
-              <a:t>44 / 49</a:t>
+              <a:t>44 / 50</a:t>
             </a:r>
           </a:p>
         </p:txBody>
@@ -39327,7 +39635,7 @@
         <p:spPr>
           <a:xfrm>
             <a:off x="457200" y="1188720"/>
-            <a:ext cx="8229600" cy="713232"/>
+            <a:ext cx="8229600" cy="475488"/>
           </a:xfrm>
           <a:prstGeom prst="rect">
             <a:avLst/>
@@ -39354,7 +39662,7 @@
                 <a:cs typeface="Sylfaen"/>
                 <a:latin typeface="Sylfaen"/>
               </a:rPr>
-              <a:t>როგორია No-Code პლატფორმების შეზღუდვები და როდის უნდა გადავიდეთ ტრადიციულ დეველოპმენტზე?</a:t>
+              <a:t>ჟიურის ფინანსური კითხვები და სწორი პასუხები:</a:t>
             </a:r>
           </a:p>
         </p:txBody>
@@ -39367,8 +39675,8 @@
         </p:nvSpPr>
         <p:spPr>
           <a:xfrm>
-            <a:off x="457200" y="1975104"/>
-            <a:ext cx="54864" cy="2875788"/>
+            <a:off x="457200" y="1737360"/>
+            <a:ext cx="54864" cy="1819656"/>
           </a:xfrm>
           <a:prstGeom prst="rect">
             <a:avLst/>
@@ -39411,8 +39719,8 @@
         </p:nvSpPr>
         <p:spPr>
           <a:xfrm>
-            <a:off x="512064" y="1975104"/>
-            <a:ext cx="3991356" cy="2875788"/>
+            <a:off x="512064" y="1737360"/>
+            <a:ext cx="3991356" cy="1819656"/>
           </a:xfrm>
           <a:prstGeom prst="roundRect">
             <a:avLst>
@@ -39459,7 +39767,7 @@
         </p:nvSpPr>
         <p:spPr>
           <a:xfrm>
-            <a:off x="621792" y="2048256"/>
+            <a:off x="621792" y="1810512"/>
             <a:ext cx="3771900" cy="320040"/>
           </a:xfrm>
           <a:prstGeom prst="rect">
@@ -39487,7 +39795,7 @@
                 <a:cs typeface="Sylfaen"/>
                 <a:latin typeface="Sylfaen"/>
               </a:rPr>
-              <a:t>⚠️ No-Code პლატფორმების ლიმიტები:</a:t>
+              <a:t>❓ კითხვა: „როგორ აპირებთ მომხმარებლის მოზიდვას და რა იქნება თქვენი CAC?“</a:t>
             </a:r>
           </a:p>
         </p:txBody>
@@ -39500,8 +39808,8 @@
         </p:nvSpPr>
         <p:spPr>
           <a:xfrm>
-            <a:off x="621792" y="2441448"/>
-            <a:ext cx="3771900" cy="2336291"/>
+            <a:off x="621792" y="2203704"/>
+            <a:ext cx="3771900" cy="713232"/>
           </a:xfrm>
           <a:prstGeom prst="rect">
             <a:avLst/>
@@ -39514,24 +39822,13 @@
           </a:bodyPr>
           <a:lstStyle/>
           <a:p>
-            <a:pPr algn="l">
-              <a:spcAft>
-                <a:spcPts val="300"/>
-              </a:spcAft>
-            </a:pPr>
-            <a:r>
-              <a:rPr sz="1300" b="1">
-                <a:solidFill>
-                  <a:srgbClr val="3730A3"/>
-                </a:solidFill>
-                <a:ea typeface="Sylfaen"/>
-                <a:cs typeface="Sylfaen"/>
-                <a:latin typeface="Sylfaen"/>
-              </a:rPr>
-              <a:t>▸  </a:t>
-            </a:r>
-            <a:r>
-              <a:rPr sz="1300">
+            <a:pPr>
+              <a:spcAft>
+                <a:spcPts val="400"/>
+              </a:spcAft>
+            </a:pPr>
+            <a:r>
+              <a:rPr sz="1300" b="0" i="0">
                 <a:solidFill>
                   <a:srgbClr val="0F172A"/>
                 </a:solidFill>
@@ -39539,65 +39836,7 @@
                 <a:cs typeface="Sylfaen"/>
                 <a:latin typeface="Sylfaen"/>
               </a:rPr>
-              <a:t>რთული ლოგიკა: მრავალდონიანი ფინანსური ტრანზაქციები ან მორგებული დაშიფვრა;</a:t>
-            </a:r>
-          </a:p>
-          <a:p>
-            <a:pPr algn="l">
-              <a:spcAft>
-                <a:spcPts val="300"/>
-              </a:spcAft>
-            </a:pPr>
-            <a:r>
-              <a:rPr sz="1300" b="1">
-                <a:solidFill>
-                  <a:srgbClr val="3730A3"/>
-                </a:solidFill>
-                <a:ea typeface="Sylfaen"/>
-                <a:cs typeface="Sylfaen"/>
-                <a:latin typeface="Sylfaen"/>
-              </a:rPr>
-              <a:t>▸  </a:t>
-            </a:r>
-            <a:r>
-              <a:rPr sz="1300">
-                <a:solidFill>
-                  <a:srgbClr val="0F172A"/>
-                </a:solidFill>
-                <a:ea typeface="Sylfaen"/>
-                <a:cs typeface="Sylfaen"/>
-                <a:latin typeface="Sylfaen"/>
-              </a:rPr>
-              <a:t>მძიმე AI/ML მოდელები: ვიდეო/აუდიო დამუშავება რეალურ დროში;</a:t>
-            </a:r>
-          </a:p>
-          <a:p>
-            <a:pPr algn="l">
-              <a:spcAft>
-                <a:spcPts val="300"/>
-              </a:spcAft>
-            </a:pPr>
-            <a:r>
-              <a:rPr sz="1300" b="1">
-                <a:solidFill>
-                  <a:srgbClr val="3730A3"/>
-                </a:solidFill>
-                <a:ea typeface="Sylfaen"/>
-                <a:cs typeface="Sylfaen"/>
-                <a:latin typeface="Sylfaen"/>
-              </a:rPr>
-              <a:t>▸  </a:t>
-            </a:r>
-            <a:r>
-              <a:rPr sz="1300">
-                <a:solidFill>
-                  <a:srgbClr val="0F172A"/>
-                </a:solidFill>
-                <a:ea typeface="Sylfaen"/>
-                <a:cs typeface="Sylfaen"/>
-                <a:latin typeface="Sylfaen"/>
-              </a:rPr>
-              <a:t>საკუთარი მობილური აპლიკაციები: App Store / Google Play-ზე მორგებული Native ფუნქციები (Bluetooth, NFC).</a:t>
+              <a:t>არასწორი პასუხი: „ჩვენ მარკეტინგზე ფულს არ დავხარჯავთ, მომხმარებლები თავად მოვლენ.“</a:t>
             </a:r>
           </a:p>
         </p:txBody>
@@ -39610,8 +39849,8 @@
         </p:nvSpPr>
         <p:spPr>
           <a:xfrm>
-            <a:off x="4640580" y="1975104"/>
-            <a:ext cx="54864" cy="2875788"/>
+            <a:off x="4640580" y="1737360"/>
+            <a:ext cx="54864" cy="1819656"/>
           </a:xfrm>
           <a:prstGeom prst="rect">
             <a:avLst/>
@@ -39654,8 +39893,8 @@
         </p:nvSpPr>
         <p:spPr>
           <a:xfrm>
-            <a:off x="4695444" y="1975104"/>
-            <a:ext cx="3991356" cy="2875788"/>
+            <a:off x="4695444" y="1737360"/>
+            <a:ext cx="3991356" cy="1819656"/>
           </a:xfrm>
           <a:prstGeom prst="roundRect">
             <a:avLst>
@@ -39702,7 +39941,7 @@
         </p:nvSpPr>
         <p:spPr>
           <a:xfrm>
-            <a:off x="4805172" y="2048256"/>
+            <a:off x="4805172" y="1810512"/>
             <a:ext cx="3771900" cy="320040"/>
           </a:xfrm>
           <a:prstGeom prst="rect">
@@ -39730,7 +39969,7 @@
                 <a:cs typeface="Sylfaen"/>
                 <a:latin typeface="Sylfaen"/>
               </a:rPr>
-              <a:t>🚀 როდის ავიყვანოთ დეველოპერი?</a:t>
+              <a:t>🟢 სწორი პასუხი (CAC:LTV):</a:t>
             </a:r>
           </a:p>
         </p:txBody>
@@ -39743,8 +39982,8 @@
         </p:nvSpPr>
         <p:spPr>
           <a:xfrm>
-            <a:off x="4805172" y="2441448"/>
-            <a:ext cx="3771900" cy="2336291"/>
+            <a:off x="4805172" y="2203704"/>
+            <a:ext cx="3771900" cy="950976"/>
           </a:xfrm>
           <a:prstGeom prst="rect">
             <a:avLst/>
@@ -39757,24 +39996,13 @@
           </a:bodyPr>
           <a:lstStyle/>
           <a:p>
-            <a:pPr algn="l">
-              <a:spcAft>
-                <a:spcPts val="300"/>
-              </a:spcAft>
-            </a:pPr>
-            <a:r>
-              <a:rPr sz="1300" b="1">
-                <a:solidFill>
-                  <a:srgbClr val="3730A3"/>
-                </a:solidFill>
-                <a:ea typeface="Sylfaen"/>
-                <a:cs typeface="Sylfaen"/>
-                <a:latin typeface="Sylfaen"/>
-              </a:rPr>
-              <a:t>▸  </a:t>
-            </a:r>
-            <a:r>
-              <a:rPr sz="1300">
+            <a:pPr>
+              <a:spcAft>
+                <a:spcPts val="400"/>
+              </a:spcAft>
+            </a:pPr>
+            <a:r>
+              <a:rPr sz="1300" b="0" i="0">
                 <a:solidFill>
                   <a:srgbClr val="0F172A"/>
                 </a:solidFill>
@@ -39782,65 +40010,7 @@
                 <a:cs typeface="Sylfaen"/>
                 <a:latin typeface="Sylfaen"/>
               </a:rPr>
-              <a:t>როდესაც MVP-მ მიაღწია Product-Market Fit-ს და გყავთ პირველი ასობით აქტიური მომხმარებელი;</a:t>
-            </a:r>
-          </a:p>
-          <a:p>
-            <a:pPr algn="l">
-              <a:spcAft>
-                <a:spcPts val="300"/>
-              </a:spcAft>
-            </a:pPr>
-            <a:r>
-              <a:rPr sz="1300" b="1">
-                <a:solidFill>
-                  <a:srgbClr val="3730A3"/>
-                </a:solidFill>
-                <a:ea typeface="Sylfaen"/>
-                <a:cs typeface="Sylfaen"/>
-                <a:latin typeface="Sylfaen"/>
-              </a:rPr>
-              <a:t>▸  </a:t>
-            </a:r>
-            <a:r>
-              <a:rPr sz="1300">
-                <a:solidFill>
-                  <a:srgbClr val="0F172A"/>
-                </a:solidFill>
-                <a:ea typeface="Sylfaen"/>
-                <a:cs typeface="Sylfaen"/>
-                <a:latin typeface="Sylfaen"/>
-              </a:rPr>
-              <a:t>როდესაც გჭირდებათ უნიკალური უსაფრთხოების/ლოკალიზაციის პარამეტრები;</a:t>
-            </a:r>
-          </a:p>
-          <a:p>
-            <a:pPr algn="l">
-              <a:spcAft>
-                <a:spcPts val="300"/>
-              </a:spcAft>
-            </a:pPr>
-            <a:r>
-              <a:rPr sz="1300" b="1">
-                <a:solidFill>
-                  <a:srgbClr val="3730A3"/>
-                </a:solidFill>
-                <a:ea typeface="Sylfaen"/>
-                <a:cs typeface="Sylfaen"/>
-                <a:latin typeface="Sylfaen"/>
-              </a:rPr>
-              <a:t>▸  </a:t>
-            </a:r>
-            <a:r>
-              <a:rPr sz="1300">
-                <a:solidFill>
-                  <a:srgbClr val="0F172A"/>
-                </a:solidFill>
-                <a:ea typeface="Sylfaen"/>
-                <a:cs typeface="Sylfaen"/>
-                <a:latin typeface="Sylfaen"/>
-              </a:rPr>
-              <a:t>როდესაც მიიღეთ GITA გრანტი და გაქვთ ბიუჯეტი პროფესიონალური გუნდის დასაქირავებლად (Handover to React Devs GitHub-ით).</a:t>
+              <a:t>„ჩვენი საწყისი CAC იქნება $5 Facebook Ads-ით, მომხმარებლის LTV კი - $30 (საშუალოდ 6 თვიანი ხელმოწერა $5-ად). ჩვენი LTV:CAC პროპორცია იქნება 6:1, რაც ბიზნესს მომგებიანს ხდის.“</a:t>
             </a:r>
           </a:p>
         </p:txBody>
@@ -40111,7 +40281,7 @@
                 <a:cs typeface="Sylfaen"/>
                 <a:latin typeface="Sylfaen"/>
               </a:rPr>
-              <a:t>VC Mock Grill: Competitors Q&amp;A (Unfair Advantage)</a:t>
+              <a:t>No-Code ლიმიტები და დეველოპერის აყვანის დრო</a:t>
             </a:r>
           </a:p>
         </p:txBody>
@@ -40212,7 +40382,7 @@
                 <a:cs typeface="Sylfaen"/>
                 <a:latin typeface="Sylfaen"/>
               </a:rPr>
-              <a:t>45 / 49</a:t>
+              <a:t>45 / 50</a:t>
             </a:r>
           </a:p>
         </p:txBody>
@@ -40226,7 +40396,7 @@
         <p:spPr>
           <a:xfrm>
             <a:off x="457200" y="1188720"/>
-            <a:ext cx="8229600" cy="475488"/>
+            <a:ext cx="8229600" cy="713232"/>
           </a:xfrm>
           <a:prstGeom prst="rect">
             <a:avLst/>
@@ -40253,7 +40423,7 @@
                 <a:cs typeface="Sylfaen"/>
                 <a:latin typeface="Sylfaen"/>
               </a:rPr>
-              <a:t>კონკურენციის საკითხები და გრანტის მიზნობრიობა:</a:t>
+              <a:t>როგორია No-Code პლატფორმების შეზღუდვები და როდის უნდა გადავიდეთ ტრადიციულ დეველოპმენტზე?</a:t>
             </a:r>
           </a:p>
         </p:txBody>
@@ -40266,8 +40436,8 @@
         </p:nvSpPr>
         <p:spPr>
           <a:xfrm>
-            <a:off x="457200" y="1737360"/>
-            <a:ext cx="54864" cy="1819656"/>
+            <a:off x="457200" y="1975104"/>
+            <a:ext cx="54864" cy="2875788"/>
           </a:xfrm>
           <a:prstGeom prst="rect">
             <a:avLst/>
@@ -40310,8 +40480,8 @@
         </p:nvSpPr>
         <p:spPr>
           <a:xfrm>
-            <a:off x="512064" y="1737360"/>
-            <a:ext cx="3991356" cy="1819656"/>
+            <a:off x="512064" y="1975104"/>
+            <a:ext cx="3991356" cy="2875788"/>
           </a:xfrm>
           <a:prstGeom prst="roundRect">
             <a:avLst>
@@ -40358,7 +40528,7 @@
         </p:nvSpPr>
         <p:spPr>
           <a:xfrm>
-            <a:off x="621792" y="1810512"/>
+            <a:off x="621792" y="2048256"/>
             <a:ext cx="3771900" cy="320040"/>
           </a:xfrm>
           <a:prstGeom prst="rect">
@@ -40386,7 +40556,7 @@
                 <a:cs typeface="Sylfaen"/>
                 <a:latin typeface="Sylfaen"/>
               </a:rPr>
-              <a:t>❓ კითხვა: „რა არის თქვენი კონკურენტული უპირატესობა და რაში დახარჯავთ გრანტს?“</a:t>
+              <a:t>⚠️ No-Code პლატფორმების ლიმიტები:</a:t>
             </a:r>
           </a:p>
         </p:txBody>
@@ -40399,8 +40569,8 @@
         </p:nvSpPr>
         <p:spPr>
           <a:xfrm>
-            <a:off x="621792" y="2203704"/>
-            <a:ext cx="3771900" cy="713232"/>
+            <a:off x="621792" y="2441448"/>
+            <a:ext cx="3771900" cy="2336291"/>
           </a:xfrm>
           <a:prstGeom prst="rect">
             <a:avLst/>
@@ -40413,13 +40583,24 @@
           </a:bodyPr>
           <a:lstStyle/>
           <a:p>
-            <a:pPr>
-              <a:spcAft>
-                <a:spcPts val="400"/>
-              </a:spcAft>
-            </a:pPr>
-            <a:r>
-              <a:rPr sz="1300" b="0" i="0">
+            <a:pPr algn="l">
+              <a:spcAft>
+                <a:spcPts val="300"/>
+              </a:spcAft>
+            </a:pPr>
+            <a:r>
+              <a:rPr sz="1300" b="1">
+                <a:solidFill>
+                  <a:srgbClr val="3730A3"/>
+                </a:solidFill>
+                <a:ea typeface="Sylfaen"/>
+                <a:cs typeface="Sylfaen"/>
+                <a:latin typeface="Sylfaen"/>
+              </a:rPr>
+              <a:t>▸  </a:t>
+            </a:r>
+            <a:r>
+              <a:rPr sz="1300">
                 <a:solidFill>
                   <a:srgbClr val="0F172A"/>
                 </a:solidFill>
@@ -40427,7 +40608,65 @@
                 <a:cs typeface="Sylfaen"/>
                 <a:latin typeface="Sylfaen"/>
               </a:rPr>
-              <a:t>არასწორი პასუხი: „გრანტით გადავუხდით ხელფასს დეველოპერებს, რომ საიტი დაგვიწერონ.“</a:t>
+              <a:t>რთული ლოგიკა: მრავალდონიანი ფინანსური ტრანზაქციები ან მორგებული დაშიფვრა;</a:t>
+            </a:r>
+          </a:p>
+          <a:p>
+            <a:pPr algn="l">
+              <a:spcAft>
+                <a:spcPts val="300"/>
+              </a:spcAft>
+            </a:pPr>
+            <a:r>
+              <a:rPr sz="1300" b="1">
+                <a:solidFill>
+                  <a:srgbClr val="3730A3"/>
+                </a:solidFill>
+                <a:ea typeface="Sylfaen"/>
+                <a:cs typeface="Sylfaen"/>
+                <a:latin typeface="Sylfaen"/>
+              </a:rPr>
+              <a:t>▸  </a:t>
+            </a:r>
+            <a:r>
+              <a:rPr sz="1300">
+                <a:solidFill>
+                  <a:srgbClr val="0F172A"/>
+                </a:solidFill>
+                <a:ea typeface="Sylfaen"/>
+                <a:cs typeface="Sylfaen"/>
+                <a:latin typeface="Sylfaen"/>
+              </a:rPr>
+              <a:t>მძიმე AI/ML მოდელები: ვიდეო/აუდიო დამუშავება რეალურ დროში;</a:t>
+            </a:r>
+          </a:p>
+          <a:p>
+            <a:pPr algn="l">
+              <a:spcAft>
+                <a:spcPts val="300"/>
+              </a:spcAft>
+            </a:pPr>
+            <a:r>
+              <a:rPr sz="1300" b="1">
+                <a:solidFill>
+                  <a:srgbClr val="3730A3"/>
+                </a:solidFill>
+                <a:ea typeface="Sylfaen"/>
+                <a:cs typeface="Sylfaen"/>
+                <a:latin typeface="Sylfaen"/>
+              </a:rPr>
+              <a:t>▸  </a:t>
+            </a:r>
+            <a:r>
+              <a:rPr sz="1300">
+                <a:solidFill>
+                  <a:srgbClr val="0F172A"/>
+                </a:solidFill>
+                <a:ea typeface="Sylfaen"/>
+                <a:cs typeface="Sylfaen"/>
+                <a:latin typeface="Sylfaen"/>
+              </a:rPr>
+              <a:t>საკუთარი მობილური აპლიკაციები: App Store / Google Play-ზე მორგებული Native ფუნქციები (Bluetooth, NFC).</a:t>
             </a:r>
           </a:p>
         </p:txBody>
@@ -40440,8 +40679,8 @@
         </p:nvSpPr>
         <p:spPr>
           <a:xfrm>
-            <a:off x="4640580" y="1737360"/>
-            <a:ext cx="54864" cy="1819656"/>
+            <a:off x="4640580" y="1975104"/>
+            <a:ext cx="54864" cy="2875788"/>
           </a:xfrm>
           <a:prstGeom prst="rect">
             <a:avLst/>
@@ -40484,8 +40723,8 @@
         </p:nvSpPr>
         <p:spPr>
           <a:xfrm>
-            <a:off x="4695444" y="1737360"/>
-            <a:ext cx="3991356" cy="1819656"/>
+            <a:off x="4695444" y="1975104"/>
+            <a:ext cx="3991356" cy="2875788"/>
           </a:xfrm>
           <a:prstGeom prst="roundRect">
             <a:avLst>
@@ -40532,7 +40771,7 @@
         </p:nvSpPr>
         <p:spPr>
           <a:xfrm>
-            <a:off x="4805172" y="1810512"/>
+            <a:off x="4805172" y="2048256"/>
             <a:ext cx="3771900" cy="320040"/>
           </a:xfrm>
           <a:prstGeom prst="rect">
@@ -40560,7 +40799,7 @@
                 <a:cs typeface="Sylfaen"/>
                 <a:latin typeface="Sylfaen"/>
               </a:rPr>
-              <a:t>🟢 სწორი პასუხი:</a:t>
+              <a:t>🚀 როდის ავიყვანოთ დეველოპერი?</a:t>
             </a:r>
           </a:p>
         </p:txBody>
@@ -40573,8 +40812,8 @@
         </p:nvSpPr>
         <p:spPr>
           <a:xfrm>
-            <a:off x="4805172" y="2203704"/>
-            <a:ext cx="3771900" cy="950976"/>
+            <a:off x="4805172" y="2441448"/>
+            <a:ext cx="3771900" cy="2336291"/>
           </a:xfrm>
           <a:prstGeom prst="rect">
             <a:avLst/>
@@ -40587,13 +40826,24 @@
           </a:bodyPr>
           <a:lstStyle/>
           <a:p>
-            <a:pPr>
-              <a:spcAft>
-                <a:spcPts val="400"/>
-              </a:spcAft>
-            </a:pPr>
-            <a:r>
-              <a:rPr sz="1300" b="0" i="0">
+            <a:pPr algn="l">
+              <a:spcAft>
+                <a:spcPts val="300"/>
+              </a:spcAft>
+            </a:pPr>
+            <a:r>
+              <a:rPr sz="1300" b="1">
+                <a:solidFill>
+                  <a:srgbClr val="3730A3"/>
+                </a:solidFill>
+                <a:ea typeface="Sylfaen"/>
+                <a:cs typeface="Sylfaen"/>
+                <a:latin typeface="Sylfaen"/>
+              </a:rPr>
+              <a:t>▸  </a:t>
+            </a:r>
+            <a:r>
+              <a:rPr sz="1300">
                 <a:solidFill>
                   <a:srgbClr val="0F172A"/>
                 </a:solidFill>
@@ -40601,7 +40851,65 @@
                 <a:cs typeface="Sylfaen"/>
                 <a:latin typeface="Sylfaen"/>
               </a:rPr>
-              <a:t>„ჩვენ უკვე გვაქვს მუშა MVP და პირველი 20 დარეგისტრირებული მომხმარებელი. გრანტის 80%-ს დავხარჯავთ მარკეტინგსა და მომხმარებლის მოზიდვაზე, ხოლო 20%-ს - API სერვერების ლიცენზიებზე.“</a:t>
+              <a:t>როდესაც MVP-მ მიაღწია Product-Market Fit-ს და გყავთ პირველი ასობით აქტიური მომხმარებელი;</a:t>
+            </a:r>
+          </a:p>
+          <a:p>
+            <a:pPr algn="l">
+              <a:spcAft>
+                <a:spcPts val="300"/>
+              </a:spcAft>
+            </a:pPr>
+            <a:r>
+              <a:rPr sz="1300" b="1">
+                <a:solidFill>
+                  <a:srgbClr val="3730A3"/>
+                </a:solidFill>
+                <a:ea typeface="Sylfaen"/>
+                <a:cs typeface="Sylfaen"/>
+                <a:latin typeface="Sylfaen"/>
+              </a:rPr>
+              <a:t>▸  </a:t>
+            </a:r>
+            <a:r>
+              <a:rPr sz="1300">
+                <a:solidFill>
+                  <a:srgbClr val="0F172A"/>
+                </a:solidFill>
+                <a:ea typeface="Sylfaen"/>
+                <a:cs typeface="Sylfaen"/>
+                <a:latin typeface="Sylfaen"/>
+              </a:rPr>
+              <a:t>როდესაც გჭირდებათ უნიკალური უსაფრთხოების/ლოკალიზაციის პარამეტრები;</a:t>
+            </a:r>
+          </a:p>
+          <a:p>
+            <a:pPr algn="l">
+              <a:spcAft>
+                <a:spcPts val="300"/>
+              </a:spcAft>
+            </a:pPr>
+            <a:r>
+              <a:rPr sz="1300" b="1">
+                <a:solidFill>
+                  <a:srgbClr val="3730A3"/>
+                </a:solidFill>
+                <a:ea typeface="Sylfaen"/>
+                <a:cs typeface="Sylfaen"/>
+                <a:latin typeface="Sylfaen"/>
+              </a:rPr>
+              <a:t>▸  </a:t>
+            </a:r>
+            <a:r>
+              <a:rPr sz="1300">
+                <a:solidFill>
+                  <a:srgbClr val="0F172A"/>
+                </a:solidFill>
+                <a:ea typeface="Sylfaen"/>
+                <a:cs typeface="Sylfaen"/>
+                <a:latin typeface="Sylfaen"/>
+              </a:rPr>
+              <a:t>როდესაც მიიღეთ GITA გრანტი და გაქვთ ბიუჯეტი პროფესიონალური გუნდის დასაქირავებლად (Handover to React Devs GitHub-ით).</a:t>
             </a:r>
           </a:p>
         </p:txBody>
@@ -40872,7 +41180,7 @@
                 <a:cs typeface="Sylfaen"/>
                 <a:latin typeface="Sylfaen"/>
               </a:rPr>
-              <a:t>ფინანსური მოდელირება: P&amp;L და CAC:LTV მატრიცა</a:t>
+              <a:t>VC Mock Grill: Competitors Q&amp;A (Unfair Advantage)</a:t>
             </a:r>
           </a:p>
         </p:txBody>
@@ -40973,7 +41281,7 @@
                 <a:cs typeface="Sylfaen"/>
                 <a:latin typeface="Sylfaen"/>
               </a:rPr>
-              <a:t>46 / 49</a:t>
+              <a:t>46 / 50</a:t>
             </a:r>
           </a:p>
         </p:txBody>
@@ -41014,7 +41322,7 @@
                 <a:cs typeface="Sylfaen"/>
                 <a:latin typeface="Sylfaen"/>
               </a:rPr>
-              <a:t>როგორ დავასაბუთოთ Pitch Deck-ის ფინანსური სლაიდი (Slide 8) ციფრებით?</a:t>
+              <a:t>კონკურენციის საკითხები და გრანტის მიზნობრიობა:</a:t>
             </a:r>
           </a:p>
         </p:txBody>
@@ -41028,13 +41336,13 @@
         <p:spPr>
           <a:xfrm>
             <a:off x="457200" y="1737360"/>
-            <a:ext cx="45720" cy="1444751"/>
-          </a:xfrm>
-          <a:prstGeom prst="rect">
-            <a:avLst/>
-          </a:prstGeom>
-          <a:solidFill>
-            <a:srgbClr val="3730A3"/>
+            <a:ext cx="54864" cy="1819656"/>
+          </a:xfrm>
+          <a:prstGeom prst="rect">
+            <a:avLst/>
+          </a:prstGeom>
+          <a:solidFill>
+            <a:srgbClr val="4F46E5"/>
           </a:solidFill>
           <a:ln>
             <a:noFill/>
@@ -41071,8 +41379,8 @@
         </p:nvSpPr>
         <p:spPr>
           <a:xfrm>
-            <a:off x="502920" y="1737360"/>
-            <a:ext cx="4000500" cy="1444751"/>
+            <a:off x="512064" y="1737360"/>
+            <a:ext cx="3991356" cy="1819656"/>
           </a:xfrm>
           <a:prstGeom prst="roundRect">
             <a:avLst>
@@ -41080,6 +41388,180 @@
             </a:avLst>
           </a:prstGeom>
           <a:solidFill>
+            <a:srgbClr val="FFF7ED"/>
+          </a:solidFill>
+          <a:ln w="6350">
+            <a:solidFill>
+              <a:srgbClr val="4F46E5"/>
+            </a:solidFill>
+          </a:ln>
+          <a:effectLst/>
+        </p:spPr>
+        <p:style>
+          <a:lnRef idx="1">
+            <a:schemeClr val="accent1"/>
+          </a:lnRef>
+          <a:fillRef idx="3">
+            <a:schemeClr val="accent1"/>
+          </a:fillRef>
+          <a:effectRef idx="2">
+            <a:schemeClr val="accent1"/>
+          </a:effectRef>
+          <a:fontRef idx="minor">
+            <a:schemeClr val="lt1"/>
+          </a:fontRef>
+        </p:style>
+        <p:txBody>
+          <a:bodyPr rtlCol="0" anchor="ctr"/>
+          <a:lstStyle/>
+          <a:p>
+            <a:pPr algn="ctr"/>
+          </a:p>
+        </p:txBody>
+      </p:sp>
+      <p:sp>
+        <p:nvSpPr>
+          <p:cNvPr id="11" name="TextBox 10"/>
+          <p:cNvSpPr txBox="1"/>
+          <p:nvPr/>
+        </p:nvSpPr>
+        <p:spPr>
+          <a:xfrm>
+            <a:off x="621792" y="1810512"/>
+            <a:ext cx="3771900" cy="320040"/>
+          </a:xfrm>
+          <a:prstGeom prst="rect">
+            <a:avLst/>
+          </a:prstGeom>
+          <a:noFill/>
+        </p:spPr>
+        <p:txBody>
+          <a:bodyPr wrap="square" anchor="t" lIns="54864" rIns="54864" tIns="54864" bIns="54864">
+            <a:spAutoFit/>
+          </a:bodyPr>
+          <a:lstStyle/>
+          <a:p>
+            <a:pPr>
+              <a:spcAft>
+                <a:spcPts val="400"/>
+              </a:spcAft>
+            </a:pPr>
+            <a:r>
+              <a:rPr sz="1400" b="1" i="0">
+                <a:solidFill>
+                  <a:srgbClr val="0F172A"/>
+                </a:solidFill>
+                <a:ea typeface="Sylfaen"/>
+                <a:cs typeface="Sylfaen"/>
+                <a:latin typeface="Sylfaen"/>
+              </a:rPr>
+              <a:t>❓ კითხვა: „რა არის თქვენი კონკურენტული უპირატესობა და რაში დახარჯავთ გრანტს?“</a:t>
+            </a:r>
+          </a:p>
+        </p:txBody>
+      </p:sp>
+      <p:sp>
+        <p:nvSpPr>
+          <p:cNvPr id="12" name="TextBox 11"/>
+          <p:cNvSpPr txBox="1"/>
+          <p:nvPr/>
+        </p:nvSpPr>
+        <p:spPr>
+          <a:xfrm>
+            <a:off x="621792" y="2203704"/>
+            <a:ext cx="3771900" cy="713232"/>
+          </a:xfrm>
+          <a:prstGeom prst="rect">
+            <a:avLst/>
+          </a:prstGeom>
+          <a:noFill/>
+        </p:spPr>
+        <p:txBody>
+          <a:bodyPr wrap="square" anchor="t" lIns="54864" rIns="54864" tIns="54864" bIns="54864">
+            <a:spAutoFit/>
+          </a:bodyPr>
+          <a:lstStyle/>
+          <a:p>
+            <a:pPr>
+              <a:spcAft>
+                <a:spcPts val="400"/>
+              </a:spcAft>
+            </a:pPr>
+            <a:r>
+              <a:rPr sz="1300" b="0" i="0">
+                <a:solidFill>
+                  <a:srgbClr val="0F172A"/>
+                </a:solidFill>
+                <a:ea typeface="Sylfaen"/>
+                <a:cs typeface="Sylfaen"/>
+                <a:latin typeface="Sylfaen"/>
+              </a:rPr>
+              <a:t>არასწორი პასუხი: „გრანტით გადავუხდით ხელფასს დეველოპერებს, რომ საიტი დაგვიწერონ.“</a:t>
+            </a:r>
+          </a:p>
+        </p:txBody>
+      </p:sp>
+      <p:sp>
+        <p:nvSpPr>
+          <p:cNvPr id="13" name="Rectangle 12"/>
+          <p:cNvSpPr/>
+          <p:nvPr/>
+        </p:nvSpPr>
+        <p:spPr>
+          <a:xfrm>
+            <a:off x="4640580" y="1737360"/>
+            <a:ext cx="54864" cy="1819656"/>
+          </a:xfrm>
+          <a:prstGeom prst="rect">
+            <a:avLst/>
+          </a:prstGeom>
+          <a:solidFill>
+            <a:srgbClr val="3730A3"/>
+          </a:solidFill>
+          <a:ln>
+            <a:noFill/>
+          </a:ln>
+          <a:effectLst/>
+        </p:spPr>
+        <p:style>
+          <a:lnRef idx="1">
+            <a:schemeClr val="accent1"/>
+          </a:lnRef>
+          <a:fillRef idx="3">
+            <a:schemeClr val="accent1"/>
+          </a:fillRef>
+          <a:effectRef idx="2">
+            <a:schemeClr val="accent1"/>
+          </a:effectRef>
+          <a:fontRef idx="minor">
+            <a:schemeClr val="lt1"/>
+          </a:fontRef>
+        </p:style>
+        <p:txBody>
+          <a:bodyPr rtlCol="0" anchor="ctr"/>
+          <a:lstStyle/>
+          <a:p>
+            <a:pPr algn="ctr"/>
+          </a:p>
+        </p:txBody>
+      </p:sp>
+      <p:sp>
+        <p:nvSpPr>
+          <p:cNvPr id="14" name="Rounded Rectangle 13"/>
+          <p:cNvSpPr/>
+          <p:nvPr/>
+        </p:nvSpPr>
+        <p:spPr>
+          <a:xfrm>
+            <a:off x="4695444" y="1737360"/>
+            <a:ext cx="3991356" cy="1819656"/>
+          </a:xfrm>
+          <a:prstGeom prst="roundRect">
+            <a:avLst>
+              <a:gd name="adj" fmla="val 4000"/>
+            </a:avLst>
+          </a:prstGeom>
+          <a:solidFill>
             <a:srgbClr val="F8FAFC"/>
           </a:solidFill>
           <a:ln w="6350">
@@ -41113,14 +41595,14 @@
       </p:sp>
       <p:sp>
         <p:nvSpPr>
-          <p:cNvPr id="11" name="TextBox 10"/>
+          <p:cNvPr id="15" name="TextBox 14"/>
           <p:cNvSpPr txBox="1"/>
           <p:nvPr/>
         </p:nvSpPr>
         <p:spPr>
           <a:xfrm>
-            <a:off x="585216" y="1792224"/>
-            <a:ext cx="3845052" cy="320040"/>
+            <a:off x="4805172" y="1810512"/>
+            <a:ext cx="3771900" cy="320040"/>
           </a:xfrm>
           <a:prstGeom prst="rect">
             <a:avLst/>
@@ -41147,21 +41629,21 @@
                 <a:cs typeface="Sylfaen"/>
                 <a:latin typeface="Sylfaen"/>
               </a:rPr>
-              <a:t>📈 P&amp;L (მოგება-ზარალი)</a:t>
-            </a:r>
-          </a:p>
-        </p:txBody>
-      </p:sp>
-      <p:sp>
-        <p:nvSpPr>
-          <p:cNvPr id="12" name="TextBox 11"/>
+              <a:t>🟢 სწორი პასუხი:</a:t>
+            </a:r>
+          </a:p>
+        </p:txBody>
+      </p:sp>
+      <p:sp>
+        <p:nvSpPr>
+          <p:cNvPr id="16" name="TextBox 15"/>
           <p:cNvSpPr txBox="1"/>
           <p:nvPr/>
         </p:nvSpPr>
         <p:spPr>
           <a:xfrm>
-            <a:off x="585216" y="2185416"/>
-            <a:ext cx="3845052" cy="713232"/>
+            <a:off x="4805172" y="2203704"/>
+            <a:ext cx="3771900" cy="950976"/>
           </a:xfrm>
           <a:prstGeom prst="rect">
             <a:avLst/>
@@ -41188,27 +41670,27 @@
                 <a:cs typeface="Sylfaen"/>
                 <a:latin typeface="Sylfaen"/>
               </a:rPr>
-              <a:t>პროგნოზი 3 წელზე: შემოსავლები, საოპერაციო ხარჯები (OPEX), სერვერები, მარკეტინგი და წმინდა მოგება.</a:t>
-            </a:r>
-          </a:p>
-        </p:txBody>
-      </p:sp>
-      <p:sp>
-        <p:nvSpPr>
-          <p:cNvPr id="13" name="Rectangle 12"/>
-          <p:cNvSpPr/>
-          <p:nvPr/>
-        </p:nvSpPr>
-        <p:spPr>
-          <a:xfrm>
-            <a:off x="4640580" y="1737360"/>
-            <a:ext cx="45720" cy="1444751"/>
-          </a:xfrm>
-          <a:prstGeom prst="rect">
-            <a:avLst/>
-          </a:prstGeom>
-          <a:solidFill>
-            <a:srgbClr val="3730A3"/>
+              <a:t>„ჩვენ უკვე გვაქვს მუშა MVP და პირველი 20 დარეგისტრირებული მომხმარებელი. გრანტის 80%-ს დავხარჯავთ მარკეტინგსა და მომხმარებლის მოზიდვაზე, ხოლო 20%-ს - API სერვერების ლიცენზიებზე.“</a:t>
+            </a:r>
+          </a:p>
+        </p:txBody>
+      </p:sp>
+      <p:sp>
+        <p:nvSpPr>
+          <p:cNvPr id="17" name="Rectangle 16"/>
+          <p:cNvSpPr/>
+          <p:nvPr/>
+        </p:nvSpPr>
+        <p:spPr>
+          <a:xfrm>
+            <a:off x="457200" y="4850892"/>
+            <a:ext cx="8229600" cy="13716"/>
+          </a:xfrm>
+          <a:prstGeom prst="rect">
+            <a:avLst/>
+          </a:prstGeom>
+          <a:solidFill>
+            <a:srgbClr val="E2E8F0"/>
           </a:solidFill>
           <a:ln>
             <a:noFill/>
@@ -41239,355 +41721,7 @@
       </p:sp>
       <p:sp>
         <p:nvSpPr>
-          <p:cNvPr id="14" name="Rounded Rectangle 13"/>
-          <p:cNvSpPr/>
-          <p:nvPr/>
-        </p:nvSpPr>
-        <p:spPr>
-          <a:xfrm>
-            <a:off x="4686300" y="1737360"/>
-            <a:ext cx="4000500" cy="1444751"/>
-          </a:xfrm>
-          <a:prstGeom prst="roundRect">
-            <a:avLst>
-              <a:gd name="adj" fmla="val 4000"/>
-            </a:avLst>
-          </a:prstGeom>
-          <a:solidFill>
-            <a:srgbClr val="F8FAFC"/>
-          </a:solidFill>
-          <a:ln w="6350">
-            <a:solidFill>
-              <a:srgbClr val="E2E8F0"/>
-            </a:solidFill>
-          </a:ln>
-          <a:effectLst/>
-        </p:spPr>
-        <p:style>
-          <a:lnRef idx="1">
-            <a:schemeClr val="accent1"/>
-          </a:lnRef>
-          <a:fillRef idx="3">
-            <a:schemeClr val="accent1"/>
-          </a:fillRef>
-          <a:effectRef idx="2">
-            <a:schemeClr val="accent1"/>
-          </a:effectRef>
-          <a:fontRef idx="minor">
-            <a:schemeClr val="lt1"/>
-          </a:fontRef>
-        </p:style>
-        <p:txBody>
-          <a:bodyPr rtlCol="0" anchor="ctr"/>
-          <a:lstStyle/>
-          <a:p>
-            <a:pPr algn="ctr"/>
-          </a:p>
-        </p:txBody>
-      </p:sp>
-      <p:sp>
-        <p:nvSpPr>
-          <p:cNvPr id="15" name="TextBox 14"/>
-          <p:cNvSpPr txBox="1"/>
-          <p:nvPr/>
-        </p:nvSpPr>
-        <p:spPr>
-          <a:xfrm>
-            <a:off x="4768596" y="1792224"/>
-            <a:ext cx="3845052" cy="320040"/>
-          </a:xfrm>
-          <a:prstGeom prst="rect">
-            <a:avLst/>
-          </a:prstGeom>
-          <a:noFill/>
-        </p:spPr>
-        <p:txBody>
-          <a:bodyPr wrap="square" anchor="t" lIns="54864" rIns="54864" tIns="54864" bIns="54864">
-            <a:spAutoFit/>
-          </a:bodyPr>
-          <a:lstStyle/>
-          <a:p>
-            <a:pPr>
-              <a:spcAft>
-                <a:spcPts val="400"/>
-              </a:spcAft>
-            </a:pPr>
-            <a:r>
-              <a:rPr sz="1400" b="1" i="0">
-                <a:solidFill>
-                  <a:srgbClr val="0F172A"/>
-                </a:solidFill>
-                <a:ea typeface="Sylfaen"/>
-                <a:cs typeface="Sylfaen"/>
-                <a:latin typeface="Sylfaen"/>
-              </a:rPr>
-              <a:t>💰 CAC (მოზიდვის ხარჯი)</a:t>
-            </a:r>
-          </a:p>
-        </p:txBody>
-      </p:sp>
-      <p:sp>
-        <p:nvSpPr>
-          <p:cNvPr id="16" name="TextBox 15"/>
-          <p:cNvSpPr txBox="1"/>
-          <p:nvPr/>
-        </p:nvSpPr>
-        <p:spPr>
-          <a:xfrm>
-            <a:off x="4768596" y="2185416"/>
-            <a:ext cx="3845052" cy="475488"/>
-          </a:xfrm>
-          <a:prstGeom prst="rect">
-            <a:avLst/>
-          </a:prstGeom>
-          <a:noFill/>
-        </p:spPr>
-        <p:txBody>
-          <a:bodyPr wrap="square" anchor="t" lIns="54864" rIns="54864" tIns="54864" bIns="54864">
-            <a:spAutoFit/>
-          </a:bodyPr>
-          <a:lstStyle/>
-          <a:p>
-            <a:pPr>
-              <a:spcAft>
-                <a:spcPts val="400"/>
-              </a:spcAft>
-            </a:pPr>
-            <a:r>
-              <a:rPr sz="1300" b="0" i="0">
-                <a:solidFill>
-                  <a:srgbClr val="0F172A"/>
-                </a:solidFill>
-                <a:ea typeface="Sylfaen"/>
-                <a:cs typeface="Sylfaen"/>
-                <a:latin typeface="Sylfaen"/>
-              </a:rPr>
-              <a:t>რამდენი ლარი იხარჯება 1 ახალი კლიენტის მოსაზიდად (მაგ. რეკლამა, გაყიდვები).</a:t>
-            </a:r>
-          </a:p>
-        </p:txBody>
-      </p:sp>
-      <p:sp>
-        <p:nvSpPr>
-          <p:cNvPr id="17" name="Rectangle 16"/>
-          <p:cNvSpPr/>
-          <p:nvPr/>
-        </p:nvSpPr>
-        <p:spPr>
-          <a:xfrm>
-            <a:off x="457200" y="3319272"/>
-            <a:ext cx="45720" cy="1444751"/>
-          </a:xfrm>
-          <a:prstGeom prst="rect">
-            <a:avLst/>
-          </a:prstGeom>
-          <a:solidFill>
-            <a:srgbClr val="3730A3"/>
-          </a:solidFill>
-          <a:ln>
-            <a:noFill/>
-          </a:ln>
-          <a:effectLst/>
-        </p:spPr>
-        <p:style>
-          <a:lnRef idx="1">
-            <a:schemeClr val="accent1"/>
-          </a:lnRef>
-          <a:fillRef idx="3">
-            <a:schemeClr val="accent1"/>
-          </a:fillRef>
-          <a:effectRef idx="2">
-            <a:schemeClr val="accent1"/>
-          </a:effectRef>
-          <a:fontRef idx="minor">
-            <a:schemeClr val="lt1"/>
-          </a:fontRef>
-        </p:style>
-        <p:txBody>
-          <a:bodyPr rtlCol="0" anchor="ctr"/>
-          <a:lstStyle/>
-          <a:p>
-            <a:pPr algn="ctr"/>
-          </a:p>
-        </p:txBody>
-      </p:sp>
-      <p:sp>
-        <p:nvSpPr>
-          <p:cNvPr id="18" name="Rounded Rectangle 17"/>
-          <p:cNvSpPr/>
-          <p:nvPr/>
-        </p:nvSpPr>
-        <p:spPr>
-          <a:xfrm>
-            <a:off x="502920" y="3319272"/>
-            <a:ext cx="4000500" cy="1444751"/>
-          </a:xfrm>
-          <a:prstGeom prst="roundRect">
-            <a:avLst>
-              <a:gd name="adj" fmla="val 4000"/>
-            </a:avLst>
-          </a:prstGeom>
-          <a:solidFill>
-            <a:srgbClr val="F8FAFC"/>
-          </a:solidFill>
-          <a:ln w="6350">
-            <a:solidFill>
-              <a:srgbClr val="E2E8F0"/>
-            </a:solidFill>
-          </a:ln>
-          <a:effectLst/>
-        </p:spPr>
-        <p:style>
-          <a:lnRef idx="1">
-            <a:schemeClr val="accent1"/>
-          </a:lnRef>
-          <a:fillRef idx="3">
-            <a:schemeClr val="accent1"/>
-          </a:fillRef>
-          <a:effectRef idx="2">
-            <a:schemeClr val="accent1"/>
-          </a:effectRef>
-          <a:fontRef idx="minor">
-            <a:schemeClr val="lt1"/>
-          </a:fontRef>
-        </p:style>
-        <p:txBody>
-          <a:bodyPr rtlCol="0" anchor="ctr"/>
-          <a:lstStyle/>
-          <a:p>
-            <a:pPr algn="ctr"/>
-          </a:p>
-        </p:txBody>
-      </p:sp>
-      <p:sp>
-        <p:nvSpPr>
-          <p:cNvPr id="19" name="TextBox 18"/>
-          <p:cNvSpPr txBox="1"/>
-          <p:nvPr/>
-        </p:nvSpPr>
-        <p:spPr>
-          <a:xfrm>
-            <a:off x="585216" y="3374136"/>
-            <a:ext cx="3845052" cy="320040"/>
-          </a:xfrm>
-          <a:prstGeom prst="rect">
-            <a:avLst/>
-          </a:prstGeom>
-          <a:noFill/>
-        </p:spPr>
-        <p:txBody>
-          <a:bodyPr wrap="square" anchor="t" lIns="54864" rIns="54864" tIns="54864" bIns="54864">
-            <a:spAutoFit/>
-          </a:bodyPr>
-          <a:lstStyle/>
-          <a:p>
-            <a:pPr>
-              <a:spcAft>
-                <a:spcPts val="400"/>
-              </a:spcAft>
-            </a:pPr>
-            <a:r>
-              <a:rPr sz="1400" b="1" i="0">
-                <a:solidFill>
-                  <a:srgbClr val="0F172A"/>
-                </a:solidFill>
-                <a:ea typeface="Sylfaen"/>
-                <a:cs typeface="Sylfaen"/>
-                <a:latin typeface="Sylfaen"/>
-              </a:rPr>
-              <a:t>💎 LTV (მომხმარებლის ღირებულება)</a:t>
-            </a:r>
-          </a:p>
-        </p:txBody>
-      </p:sp>
-      <p:sp>
-        <p:nvSpPr>
-          <p:cNvPr id="20" name="TextBox 19"/>
-          <p:cNvSpPr txBox="1"/>
-          <p:nvPr/>
-        </p:nvSpPr>
-        <p:spPr>
-          <a:xfrm>
-            <a:off x="585216" y="3767328"/>
-            <a:ext cx="3845052" cy="713232"/>
-          </a:xfrm>
-          <a:prstGeom prst="rect">
-            <a:avLst/>
-          </a:prstGeom>
-          <a:noFill/>
-        </p:spPr>
-        <p:txBody>
-          <a:bodyPr wrap="square" anchor="t" lIns="54864" rIns="54864" tIns="54864" bIns="54864">
-            <a:spAutoFit/>
-          </a:bodyPr>
-          <a:lstStyle/>
-          <a:p>
-            <a:pPr>
-              <a:spcAft>
-                <a:spcPts val="400"/>
-              </a:spcAft>
-            </a:pPr>
-            <a:r>
-              <a:rPr sz="1300" b="0" i="0">
-                <a:solidFill>
-                  <a:srgbClr val="0F172A"/>
-                </a:solidFill>
-                <a:ea typeface="Sylfaen"/>
-                <a:cs typeface="Sylfaen"/>
-                <a:latin typeface="Sylfaen"/>
-              </a:rPr>
-              <a:t>რა ჯამურ შემოსავალს მოიტანს მომხმარებელი ბრენდთან ურთიერთობისას (ხელმოწერის საშუალო დრო × თვიური საფასური).</a:t>
-            </a:r>
-          </a:p>
-        </p:txBody>
-      </p:sp>
-      <p:sp>
-        <p:nvSpPr>
-          <p:cNvPr id="21" name="Rectangle 20"/>
-          <p:cNvSpPr/>
-          <p:nvPr/>
-        </p:nvSpPr>
-        <p:spPr>
-          <a:xfrm>
-            <a:off x="457200" y="4850892"/>
-            <a:ext cx="8229600" cy="13716"/>
-          </a:xfrm>
-          <a:prstGeom prst="rect">
-            <a:avLst/>
-          </a:prstGeom>
-          <a:solidFill>
-            <a:srgbClr val="E2E8F0"/>
-          </a:solidFill>
-          <a:ln>
-            <a:noFill/>
-          </a:ln>
-          <a:effectLst/>
-        </p:spPr>
-        <p:style>
-          <a:lnRef idx="1">
-            <a:schemeClr val="accent1"/>
-          </a:lnRef>
-          <a:fillRef idx="3">
-            <a:schemeClr val="accent1"/>
-          </a:fillRef>
-          <a:effectRef idx="2">
-            <a:schemeClr val="accent1"/>
-          </a:effectRef>
-          <a:fontRef idx="minor">
-            <a:schemeClr val="lt1"/>
-          </a:fontRef>
-        </p:style>
-        <p:txBody>
-          <a:bodyPr rtlCol="0" anchor="ctr"/>
-          <a:lstStyle/>
-          <a:p>
-            <a:pPr algn="ctr"/>
-          </a:p>
-        </p:txBody>
-      </p:sp>
-      <p:sp>
-        <p:nvSpPr>
-          <p:cNvPr id="22" name="TextBox 21"/>
+          <p:cNvPr id="18" name="TextBox 17"/>
           <p:cNvSpPr txBox="1"/>
           <p:nvPr/>
         </p:nvSpPr>
@@ -41807,7 +41941,7 @@
                 <a:cs typeface="Sylfaen"/>
                 <a:latin typeface="Sylfaen"/>
               </a:rPr>
-              <a:t>GITA ჟიურისთან Q&amp;A სესიის ტაქტიკა</a:t>
+              <a:t>ფინანსური მოდელირება: P&amp;L და CAC:LTV მატრიცა</a:t>
             </a:r>
           </a:p>
         </p:txBody>
@@ -41908,7 +42042,7 @@
                 <a:cs typeface="Sylfaen"/>
                 <a:latin typeface="Sylfaen"/>
               </a:rPr>
-              <a:t>47 / 49</a:t>
+              <a:t>47 / 50</a:t>
             </a:r>
           </a:p>
         </p:txBody>
@@ -41949,7 +42083,7 @@
                 <a:cs typeface="Sylfaen"/>
                 <a:latin typeface="Sylfaen"/>
               </a:rPr>
-              <a:t>როგორ ვუპასუხოთ ჟიურის რთულ კითხვებს 5-წუთიანი პრეზენტაციის შემდეგ?</a:t>
+              <a:t>როგორ დავასაბუთოთ Pitch Deck-ის ფინანსური სლაიდი (Slide 8) ციფრებით?</a:t>
             </a:r>
           </a:p>
         </p:txBody>
@@ -41963,13 +42097,13 @@
         <p:spPr>
           <a:xfrm>
             <a:off x="457200" y="1737360"/>
-            <a:ext cx="54864" cy="3113532"/>
-          </a:xfrm>
-          <a:prstGeom prst="rect">
-            <a:avLst/>
-          </a:prstGeom>
-          <a:solidFill>
-            <a:srgbClr val="4F46E5"/>
+            <a:ext cx="45720" cy="1444751"/>
+          </a:xfrm>
+          <a:prstGeom prst="rect">
+            <a:avLst/>
+          </a:prstGeom>
+          <a:solidFill>
+            <a:srgbClr val="3730A3"/>
           </a:solidFill>
           <a:ln>
             <a:noFill/>
@@ -42006,8 +42140,8 @@
         </p:nvSpPr>
         <p:spPr>
           <a:xfrm>
-            <a:off x="512064" y="1737360"/>
-            <a:ext cx="3991356" cy="3113532"/>
+            <a:off x="502920" y="1737360"/>
+            <a:ext cx="4000500" cy="1444751"/>
           </a:xfrm>
           <a:prstGeom prst="roundRect">
             <a:avLst>
@@ -42015,11 +42149,11 @@
             </a:avLst>
           </a:prstGeom>
           <a:solidFill>
-            <a:srgbClr val="FFF7ED"/>
+            <a:srgbClr val="F8FAFC"/>
           </a:solidFill>
           <a:ln w="6350">
             <a:solidFill>
-              <a:srgbClr val="4F46E5"/>
+              <a:srgbClr val="E2E8F0"/>
             </a:solidFill>
           </a:ln>
           <a:effectLst/>
@@ -42054,8 +42188,8 @@
         </p:nvSpPr>
         <p:spPr>
           <a:xfrm>
-            <a:off x="621792" y="1810512"/>
-            <a:ext cx="3771900" cy="320040"/>
+            <a:off x="585216" y="1792224"/>
+            <a:ext cx="3845052" cy="320040"/>
           </a:xfrm>
           <a:prstGeom prst="rect">
             <a:avLst/>
@@ -42082,7 +42216,7 @@
                 <a:cs typeface="Sylfaen"/>
                 <a:latin typeface="Sylfaen"/>
               </a:rPr>
-              <a:t>⚠️ 3 ძირითადი წესი:</a:t>
+              <a:t>📈 P&amp;L (მოგება-ზარალი)</a:t>
             </a:r>
           </a:p>
         </p:txBody>
@@ -42095,8 +42229,8 @@
         </p:nvSpPr>
         <p:spPr>
           <a:xfrm>
-            <a:off x="621792" y="2203704"/>
-            <a:ext cx="3771900" cy="2542032"/>
+            <a:off x="585216" y="2185416"/>
+            <a:ext cx="3845052" cy="713232"/>
           </a:xfrm>
           <a:prstGeom prst="rect">
             <a:avLst/>
@@ -42109,24 +42243,13 @@
           </a:bodyPr>
           <a:lstStyle/>
           <a:p>
-            <a:pPr algn="l">
-              <a:spcAft>
-                <a:spcPts val="300"/>
-              </a:spcAft>
-            </a:pPr>
-            <a:r>
-              <a:rPr sz="1300" b="1">
-                <a:solidFill>
-                  <a:srgbClr val="3730A3"/>
-                </a:solidFill>
-                <a:ea typeface="Sylfaen"/>
-                <a:cs typeface="Sylfaen"/>
-                <a:latin typeface="Sylfaen"/>
-              </a:rPr>
-              <a:t>▸  </a:t>
-            </a:r>
-            <a:r>
-              <a:rPr sz="1300">
+            <a:pPr>
+              <a:spcAft>
+                <a:spcPts val="400"/>
+              </a:spcAft>
+            </a:pPr>
+            <a:r>
+              <a:rPr sz="1300" b="0" i="0">
                 <a:solidFill>
                   <a:srgbClr val="0F172A"/>
                 </a:solidFill>
@@ -42134,65 +42257,7 @@
                 <a:cs typeface="Sylfaen"/>
                 <a:latin typeface="Sylfaen"/>
               </a:rPr>
-              <a:t>იყავით კონკრეტული: უპასუხეთ პირდაპირ ციფრებით, მოერიდეთ ზოგად ფილოსოფიას;</a:t>
-            </a:r>
-          </a:p>
-          <a:p>
-            <a:pPr algn="l">
-              <a:spcAft>
-                <a:spcPts val="300"/>
-              </a:spcAft>
-            </a:pPr>
-            <a:r>
-              <a:rPr sz="1300" b="1">
-                <a:solidFill>
-                  <a:srgbClr val="3730A3"/>
-                </a:solidFill>
-                <a:ea typeface="Sylfaen"/>
-                <a:cs typeface="Sylfaen"/>
-                <a:latin typeface="Sylfaen"/>
-              </a:rPr>
-              <a:t>▸  </a:t>
-            </a:r>
-            <a:r>
-              <a:rPr sz="1300">
-                <a:solidFill>
-                  <a:srgbClr val="0F172A"/>
-                </a:solidFill>
-                <a:ea typeface="Sylfaen"/>
-                <a:cs typeface="Sylfaen"/>
-                <a:latin typeface="Sylfaen"/>
-              </a:rPr>
-              <a:t>არ იკამათოთ: მიიღეთ ჟიურის შენიშვნა, როგორც კონსტრუქციული რჩევა;</a:t>
-            </a:r>
-          </a:p>
-          <a:p>
-            <a:pPr algn="l">
-              <a:spcAft>
-                <a:spcPts val="300"/>
-              </a:spcAft>
-            </a:pPr>
-            <a:r>
-              <a:rPr sz="1300" b="1">
-                <a:solidFill>
-                  <a:srgbClr val="3730A3"/>
-                </a:solidFill>
-                <a:ea typeface="Sylfaen"/>
-                <a:cs typeface="Sylfaen"/>
-                <a:latin typeface="Sylfaen"/>
-              </a:rPr>
-              <a:t>▸  </a:t>
-            </a:r>
-            <a:r>
-              <a:rPr sz="1300">
-                <a:solidFill>
-                  <a:srgbClr val="0F172A"/>
-                </a:solidFill>
-                <a:ea typeface="Sylfaen"/>
-                <a:cs typeface="Sylfaen"/>
-                <a:latin typeface="Sylfaen"/>
-              </a:rPr>
-              <a:t>აღიარეთ თუ არ იცით: „ამ ეტაპზე ზუსტი პასუხი არ გვაქვს, მაგრამ შევამოწმებთ ექსპერიმენტით.“</a:t>
+              <a:t>პროგნოზი 3 წელზე: შემოსავლები, საოპერაციო ხარჯები (OPEX), სერვერები, მარკეტინგი და წმინდა მოგება.</a:t>
             </a:r>
           </a:p>
         </p:txBody>
@@ -42206,7 +42271,7 @@
         <p:spPr>
           <a:xfrm>
             <a:off x="4640580" y="1737360"/>
-            <a:ext cx="54864" cy="3113532"/>
+            <a:ext cx="45720" cy="1444751"/>
           </a:xfrm>
           <a:prstGeom prst="rect">
             <a:avLst/>
@@ -42249,8 +42314,8 @@
         </p:nvSpPr>
         <p:spPr>
           <a:xfrm>
-            <a:off x="4695444" y="1737360"/>
-            <a:ext cx="3991356" cy="3113532"/>
+            <a:off x="4686300" y="1737360"/>
+            <a:ext cx="4000500" cy="1444751"/>
           </a:xfrm>
           <a:prstGeom prst="roundRect">
             <a:avLst>
@@ -42297,8 +42362,8 @@
         </p:nvSpPr>
         <p:spPr>
           <a:xfrm>
-            <a:off x="4805172" y="1810512"/>
-            <a:ext cx="3771900" cy="320040"/>
+            <a:off x="4768596" y="1792224"/>
+            <a:ext cx="3845052" cy="320040"/>
           </a:xfrm>
           <a:prstGeom prst="rect">
             <a:avLst/>
@@ -42325,7 +42390,7 @@
                 <a:cs typeface="Sylfaen"/>
                 <a:latin typeface="Sylfaen"/>
               </a:rPr>
-              <a:t>კითხვების ტიპები:</a:t>
+              <a:t>💰 CAC (მოზიდვის ხარჯი)</a:t>
             </a:r>
           </a:p>
         </p:txBody>
@@ -42338,8 +42403,8 @@
         </p:nvSpPr>
         <p:spPr>
           <a:xfrm>
-            <a:off x="4805172" y="2203704"/>
-            <a:ext cx="3771900" cy="2267712"/>
+            <a:off x="4768596" y="2185416"/>
+            <a:ext cx="3845052" cy="475488"/>
           </a:xfrm>
           <a:prstGeom prst="rect">
             <a:avLst/>
@@ -42352,24 +42417,13 @@
           </a:bodyPr>
           <a:lstStyle/>
           <a:p>
-            <a:pPr algn="l">
-              <a:spcAft>
-                <a:spcPts val="300"/>
-              </a:spcAft>
-            </a:pPr>
-            <a:r>
-              <a:rPr sz="1300" b="1">
-                <a:solidFill>
-                  <a:srgbClr val="3730A3"/>
-                </a:solidFill>
-                <a:ea typeface="Sylfaen"/>
-                <a:cs typeface="Sylfaen"/>
-                <a:latin typeface="Sylfaen"/>
-              </a:rPr>
-              <a:t>▸  </a:t>
-            </a:r>
-            <a:r>
-              <a:rPr sz="1300">
+            <a:pPr>
+              <a:spcAft>
+                <a:spcPts val="400"/>
+              </a:spcAft>
+            </a:pPr>
+            <a:r>
+              <a:rPr sz="1300" b="0" i="0">
                 <a:solidFill>
                   <a:srgbClr val="0F172A"/>
                 </a:solidFill>
@@ -42377,28 +42431,132 @@
                 <a:cs typeface="Sylfaen"/>
                 <a:latin typeface="Sylfaen"/>
               </a:rPr>
-              <a:t>„რით განსხვავდებით კონკურენტებისგან?“ (აჩვენეთ Feature Matrix);</a:t>
-            </a:r>
-          </a:p>
-          <a:p>
-            <a:pPr algn="l">
-              <a:spcAft>
-                <a:spcPts val="300"/>
-              </a:spcAft>
-            </a:pPr>
-            <a:r>
-              <a:rPr sz="1300" b="1">
-                <a:solidFill>
-                  <a:srgbClr val="3730A3"/>
-                </a:solidFill>
-                <a:ea typeface="Sylfaen"/>
-                <a:cs typeface="Sylfaen"/>
-                <a:latin typeface="Sylfaen"/>
-              </a:rPr>
-              <a:t>▸  </a:t>
-            </a:r>
-            <a:r>
-              <a:rPr sz="1300">
+              <a:t>რამდენი ლარი იხარჯება 1 ახალი კლიენტის მოსაზიდად (მაგ. რეკლამა, გაყიდვები).</a:t>
+            </a:r>
+          </a:p>
+        </p:txBody>
+      </p:sp>
+      <p:sp>
+        <p:nvSpPr>
+          <p:cNvPr id="17" name="Rectangle 16"/>
+          <p:cNvSpPr/>
+          <p:nvPr/>
+        </p:nvSpPr>
+        <p:spPr>
+          <a:xfrm>
+            <a:off x="457200" y="3319272"/>
+            <a:ext cx="45720" cy="1444751"/>
+          </a:xfrm>
+          <a:prstGeom prst="rect">
+            <a:avLst/>
+          </a:prstGeom>
+          <a:solidFill>
+            <a:srgbClr val="3730A3"/>
+          </a:solidFill>
+          <a:ln>
+            <a:noFill/>
+          </a:ln>
+          <a:effectLst/>
+        </p:spPr>
+        <p:style>
+          <a:lnRef idx="1">
+            <a:schemeClr val="accent1"/>
+          </a:lnRef>
+          <a:fillRef idx="3">
+            <a:schemeClr val="accent1"/>
+          </a:fillRef>
+          <a:effectRef idx="2">
+            <a:schemeClr val="accent1"/>
+          </a:effectRef>
+          <a:fontRef idx="minor">
+            <a:schemeClr val="lt1"/>
+          </a:fontRef>
+        </p:style>
+        <p:txBody>
+          <a:bodyPr rtlCol="0" anchor="ctr"/>
+          <a:lstStyle/>
+          <a:p>
+            <a:pPr algn="ctr"/>
+          </a:p>
+        </p:txBody>
+      </p:sp>
+      <p:sp>
+        <p:nvSpPr>
+          <p:cNvPr id="18" name="Rounded Rectangle 17"/>
+          <p:cNvSpPr/>
+          <p:nvPr/>
+        </p:nvSpPr>
+        <p:spPr>
+          <a:xfrm>
+            <a:off x="502920" y="3319272"/>
+            <a:ext cx="4000500" cy="1444751"/>
+          </a:xfrm>
+          <a:prstGeom prst="roundRect">
+            <a:avLst>
+              <a:gd name="adj" fmla="val 4000"/>
+            </a:avLst>
+          </a:prstGeom>
+          <a:solidFill>
+            <a:srgbClr val="F8FAFC"/>
+          </a:solidFill>
+          <a:ln w="6350">
+            <a:solidFill>
+              <a:srgbClr val="E2E8F0"/>
+            </a:solidFill>
+          </a:ln>
+          <a:effectLst/>
+        </p:spPr>
+        <p:style>
+          <a:lnRef idx="1">
+            <a:schemeClr val="accent1"/>
+          </a:lnRef>
+          <a:fillRef idx="3">
+            <a:schemeClr val="accent1"/>
+          </a:fillRef>
+          <a:effectRef idx="2">
+            <a:schemeClr val="accent1"/>
+          </a:effectRef>
+          <a:fontRef idx="minor">
+            <a:schemeClr val="lt1"/>
+          </a:fontRef>
+        </p:style>
+        <p:txBody>
+          <a:bodyPr rtlCol="0" anchor="ctr"/>
+          <a:lstStyle/>
+          <a:p>
+            <a:pPr algn="ctr"/>
+          </a:p>
+        </p:txBody>
+      </p:sp>
+      <p:sp>
+        <p:nvSpPr>
+          <p:cNvPr id="19" name="TextBox 18"/>
+          <p:cNvSpPr txBox="1"/>
+          <p:nvPr/>
+        </p:nvSpPr>
+        <p:spPr>
+          <a:xfrm>
+            <a:off x="585216" y="3374136"/>
+            <a:ext cx="3845052" cy="320040"/>
+          </a:xfrm>
+          <a:prstGeom prst="rect">
+            <a:avLst/>
+          </a:prstGeom>
+          <a:noFill/>
+        </p:spPr>
+        <p:txBody>
+          <a:bodyPr wrap="square" anchor="t" lIns="54864" rIns="54864" tIns="54864" bIns="54864">
+            <a:spAutoFit/>
+          </a:bodyPr>
+          <a:lstStyle/>
+          <a:p>
+            <a:pPr>
+              <a:spcAft>
+                <a:spcPts val="400"/>
+              </a:spcAft>
+            </a:pPr>
+            <a:r>
+              <a:rPr sz="1400" b="1" i="0">
                 <a:solidFill>
                   <a:srgbClr val="0F172A"/>
                 </a:solidFill>
@@ -42406,28 +42564,40 @@
                 <a:cs typeface="Sylfaen"/>
                 <a:latin typeface="Sylfaen"/>
               </a:rPr>
-              <a:t>„რაში დახარჯავთ 25,000 ლარს?“ (აჩვენეთ გაწერილი ხარჯები);</a:t>
-            </a:r>
-          </a:p>
-          <a:p>
-            <a:pPr algn="l">
-              <a:spcAft>
-                <a:spcPts val="300"/>
-              </a:spcAft>
-            </a:pPr>
-            <a:r>
-              <a:rPr sz="1300" b="1">
-                <a:solidFill>
-                  <a:srgbClr val="3730A3"/>
-                </a:solidFill>
-                <a:ea typeface="Sylfaen"/>
-                <a:cs typeface="Sylfaen"/>
-                <a:latin typeface="Sylfaen"/>
-              </a:rPr>
-              <a:t>▸  </a:t>
-            </a:r>
-            <a:r>
-              <a:rPr sz="1300">
+              <a:t>💎 LTV (მომხმარებლის ღირებულება)</a:t>
+            </a:r>
+          </a:p>
+        </p:txBody>
+      </p:sp>
+      <p:sp>
+        <p:nvSpPr>
+          <p:cNvPr id="20" name="TextBox 19"/>
+          <p:cNvSpPr txBox="1"/>
+          <p:nvPr/>
+        </p:nvSpPr>
+        <p:spPr>
+          <a:xfrm>
+            <a:off x="585216" y="3767328"/>
+            <a:ext cx="3845052" cy="713232"/>
+          </a:xfrm>
+          <a:prstGeom prst="rect">
+            <a:avLst/>
+          </a:prstGeom>
+          <a:noFill/>
+        </p:spPr>
+        <p:txBody>
+          <a:bodyPr wrap="square" anchor="t" lIns="54864" rIns="54864" tIns="54864" bIns="54864">
+            <a:spAutoFit/>
+          </a:bodyPr>
+          <a:lstStyle/>
+          <a:p>
+            <a:pPr>
+              <a:spcAft>
+                <a:spcPts val="400"/>
+              </a:spcAft>
+            </a:pPr>
+            <a:r>
+              <a:rPr sz="1300" b="0" i="0">
                 <a:solidFill>
                   <a:srgbClr val="0F172A"/>
                 </a:solidFill>
@@ -42435,14 +42605,14 @@
                 <a:cs typeface="Sylfaen"/>
                 <a:latin typeface="Sylfaen"/>
               </a:rPr>
-              <a:t>„როგორ მოიზიდავთ მომხმარებლებს?“ (აჩვენეთ Channels &amp; CAC).</a:t>
-            </a:r>
-          </a:p>
-        </p:txBody>
-      </p:sp>
-      <p:sp>
-        <p:nvSpPr>
-          <p:cNvPr id="17" name="Rectangle 16"/>
+              <a:t>რა ჯამურ შემოსავალს მოიტანს მომხმარებელი ბრენდთან ურთიერთობისას (ხელმოწერის საშუალო დრო × თვიური საფასური).</a:t>
+            </a:r>
+          </a:p>
+        </p:txBody>
+      </p:sp>
+      <p:sp>
+        <p:nvSpPr>
+          <p:cNvPr id="21" name="Rectangle 20"/>
           <p:cNvSpPr/>
           <p:nvPr/>
         </p:nvSpPr>
@@ -42486,7 +42656,7 @@
       </p:sp>
       <p:sp>
         <p:nvSpPr>
-          <p:cNvPr id="18" name="TextBox 17"/>
+          <p:cNvPr id="22" name="TextBox 21"/>
           <p:cNvSpPr txBox="1"/>
           <p:nvPr/>
         </p:nvSpPr>
@@ -42706,7 +42876,7 @@
                 <a:cs typeface="Sylfaen"/>
                 <a:latin typeface="Sylfaen"/>
               </a:rPr>
-              <a:t>Homework Part B &amp; Launch Sprint</a:t>
+              <a:t>GITA ჟიურისთან Q&amp;A სესიის ტაქტიკა</a:t>
             </a:r>
           </a:p>
         </p:txBody>
@@ -42807,7 +42977,7 @@
                 <a:cs typeface="Sylfaen"/>
                 <a:latin typeface="Sylfaen"/>
               </a:rPr>
-              <a:t>48 / 49</a:t>
+              <a:t>48 / 50</a:t>
             </a:r>
           </a:p>
         </p:txBody>
@@ -42848,7 +43018,7 @@
                 <a:cs typeface="Sylfaen"/>
                 <a:latin typeface="Sylfaen"/>
               </a:rPr>
-              <a:t>დავალება Demo Day-სთვის (1 კვირიანი Sprint):</a:t>
+              <a:t>როგორ ვუპასუხოთ ჟიურის რთულ კითხვებს 5-წუთიანი პრეზენტაციის შემდეგ?</a:t>
             </a:r>
           </a:p>
         </p:txBody>
@@ -42862,13 +43032,13 @@
         <p:spPr>
           <a:xfrm>
             <a:off x="457200" y="1737360"/>
-            <a:ext cx="54864" cy="2459736"/>
-          </a:xfrm>
-          <a:prstGeom prst="rect">
-            <a:avLst/>
-          </a:prstGeom>
-          <a:solidFill>
-            <a:srgbClr val="3730A3"/>
+            <a:ext cx="54864" cy="3113532"/>
+          </a:xfrm>
+          <a:prstGeom prst="rect">
+            <a:avLst/>
+          </a:prstGeom>
+          <a:solidFill>
+            <a:srgbClr val="4F46E5"/>
           </a:solidFill>
           <a:ln>
             <a:noFill/>
@@ -42906,7 +43076,7 @@
         <p:spPr>
           <a:xfrm>
             <a:off x="512064" y="1737360"/>
-            <a:ext cx="8174736" cy="2459736"/>
+            <a:ext cx="3991356" cy="3113532"/>
           </a:xfrm>
           <a:prstGeom prst="roundRect">
             <a:avLst>
@@ -42914,9 +43084,252 @@
             </a:avLst>
           </a:prstGeom>
           <a:solidFill>
+            <a:srgbClr val="FFF7ED"/>
+          </a:solidFill>
+          <a:ln w="6350">
+            <a:solidFill>
+              <a:srgbClr val="4F46E5"/>
+            </a:solidFill>
+          </a:ln>
+          <a:effectLst/>
+        </p:spPr>
+        <p:style>
+          <a:lnRef idx="1">
+            <a:schemeClr val="accent1"/>
+          </a:lnRef>
+          <a:fillRef idx="3">
+            <a:schemeClr val="accent1"/>
+          </a:fillRef>
+          <a:effectRef idx="2">
+            <a:schemeClr val="accent1"/>
+          </a:effectRef>
+          <a:fontRef idx="minor">
+            <a:schemeClr val="lt1"/>
+          </a:fontRef>
+        </p:style>
+        <p:txBody>
+          <a:bodyPr rtlCol="0" anchor="ctr"/>
+          <a:lstStyle/>
+          <a:p>
+            <a:pPr algn="ctr"/>
+          </a:p>
+        </p:txBody>
+      </p:sp>
+      <p:sp>
+        <p:nvSpPr>
+          <p:cNvPr id="11" name="TextBox 10"/>
+          <p:cNvSpPr txBox="1"/>
+          <p:nvPr/>
+        </p:nvSpPr>
+        <p:spPr>
+          <a:xfrm>
+            <a:off x="621792" y="1810512"/>
+            <a:ext cx="3771900" cy="320040"/>
+          </a:xfrm>
+          <a:prstGeom prst="rect">
+            <a:avLst/>
+          </a:prstGeom>
+          <a:noFill/>
+        </p:spPr>
+        <p:txBody>
+          <a:bodyPr wrap="square" anchor="t" lIns="54864" rIns="54864" tIns="54864" bIns="54864">
+            <a:spAutoFit/>
+          </a:bodyPr>
+          <a:lstStyle/>
+          <a:p>
+            <a:pPr>
+              <a:spcAft>
+                <a:spcPts val="400"/>
+              </a:spcAft>
+            </a:pPr>
+            <a:r>
+              <a:rPr sz="1400" b="1" i="0">
+                <a:solidFill>
+                  <a:srgbClr val="0F172A"/>
+                </a:solidFill>
+                <a:ea typeface="Sylfaen"/>
+                <a:cs typeface="Sylfaen"/>
+                <a:latin typeface="Sylfaen"/>
+              </a:rPr>
+              <a:t>⚠️ 3 ძირითადი წესი:</a:t>
+            </a:r>
+          </a:p>
+        </p:txBody>
+      </p:sp>
+      <p:sp>
+        <p:nvSpPr>
+          <p:cNvPr id="12" name="TextBox 11"/>
+          <p:cNvSpPr txBox="1"/>
+          <p:nvPr/>
+        </p:nvSpPr>
+        <p:spPr>
+          <a:xfrm>
+            <a:off x="621792" y="2203704"/>
+            <a:ext cx="3771900" cy="2542032"/>
+          </a:xfrm>
+          <a:prstGeom prst="rect">
+            <a:avLst/>
+          </a:prstGeom>
+          <a:noFill/>
+        </p:spPr>
+        <p:txBody>
+          <a:bodyPr wrap="square" anchor="t" lIns="54864" rIns="54864" tIns="54864" bIns="54864">
+            <a:spAutoFit/>
+          </a:bodyPr>
+          <a:lstStyle/>
+          <a:p>
+            <a:pPr algn="l">
+              <a:spcAft>
+                <a:spcPts val="300"/>
+              </a:spcAft>
+            </a:pPr>
+            <a:r>
+              <a:rPr sz="1300" b="1">
+                <a:solidFill>
+                  <a:srgbClr val="3730A3"/>
+                </a:solidFill>
+                <a:ea typeface="Sylfaen"/>
+                <a:cs typeface="Sylfaen"/>
+                <a:latin typeface="Sylfaen"/>
+              </a:rPr>
+              <a:t>▸  </a:t>
+            </a:r>
+            <a:r>
+              <a:rPr sz="1300">
+                <a:solidFill>
+                  <a:srgbClr val="0F172A"/>
+                </a:solidFill>
+                <a:ea typeface="Sylfaen"/>
+                <a:cs typeface="Sylfaen"/>
+                <a:latin typeface="Sylfaen"/>
+              </a:rPr>
+              <a:t>იყავით კონკრეტული: უპასუხეთ პირდაპირ ციფრებით, მოერიდეთ ზოგად ფილოსოფიას;</a:t>
+            </a:r>
+          </a:p>
+          <a:p>
+            <a:pPr algn="l">
+              <a:spcAft>
+                <a:spcPts val="300"/>
+              </a:spcAft>
+            </a:pPr>
+            <a:r>
+              <a:rPr sz="1300" b="1">
+                <a:solidFill>
+                  <a:srgbClr val="3730A3"/>
+                </a:solidFill>
+                <a:ea typeface="Sylfaen"/>
+                <a:cs typeface="Sylfaen"/>
+                <a:latin typeface="Sylfaen"/>
+              </a:rPr>
+              <a:t>▸  </a:t>
+            </a:r>
+            <a:r>
+              <a:rPr sz="1300">
+                <a:solidFill>
+                  <a:srgbClr val="0F172A"/>
+                </a:solidFill>
+                <a:ea typeface="Sylfaen"/>
+                <a:cs typeface="Sylfaen"/>
+                <a:latin typeface="Sylfaen"/>
+              </a:rPr>
+              <a:t>არ იკამათოთ: მიიღეთ ჟიურის შენიშვნა, როგორც კონსტრუქციული რჩევა;</a:t>
+            </a:r>
+          </a:p>
+          <a:p>
+            <a:pPr algn="l">
+              <a:spcAft>
+                <a:spcPts val="300"/>
+              </a:spcAft>
+            </a:pPr>
+            <a:r>
+              <a:rPr sz="1300" b="1">
+                <a:solidFill>
+                  <a:srgbClr val="3730A3"/>
+                </a:solidFill>
+                <a:ea typeface="Sylfaen"/>
+                <a:cs typeface="Sylfaen"/>
+                <a:latin typeface="Sylfaen"/>
+              </a:rPr>
+              <a:t>▸  </a:t>
+            </a:r>
+            <a:r>
+              <a:rPr sz="1300">
+                <a:solidFill>
+                  <a:srgbClr val="0F172A"/>
+                </a:solidFill>
+                <a:ea typeface="Sylfaen"/>
+                <a:cs typeface="Sylfaen"/>
+                <a:latin typeface="Sylfaen"/>
+              </a:rPr>
+              <a:t>აღიარეთ თუ არ იცით: „ამ ეტაპზე ზუსტი პასუხი არ გვაქვს, მაგრამ შევამოწმებთ ექსპერიმენტით.“</a:t>
+            </a:r>
+          </a:p>
+        </p:txBody>
+      </p:sp>
+      <p:sp>
+        <p:nvSpPr>
+          <p:cNvPr id="13" name="Rectangle 12"/>
+          <p:cNvSpPr/>
+          <p:nvPr/>
+        </p:nvSpPr>
+        <p:spPr>
+          <a:xfrm>
+            <a:off x="4640580" y="1737360"/>
+            <a:ext cx="54864" cy="3113532"/>
+          </a:xfrm>
+          <a:prstGeom prst="rect">
+            <a:avLst/>
+          </a:prstGeom>
+          <a:solidFill>
+            <a:srgbClr val="3730A3"/>
+          </a:solidFill>
+          <a:ln>
+            <a:noFill/>
+          </a:ln>
+          <a:effectLst/>
+        </p:spPr>
+        <p:style>
+          <a:lnRef idx="1">
+            <a:schemeClr val="accent1"/>
+          </a:lnRef>
+          <a:fillRef idx="3">
+            <a:schemeClr val="accent1"/>
+          </a:fillRef>
+          <a:effectRef idx="2">
+            <a:schemeClr val="accent1"/>
+          </a:effectRef>
+          <a:fontRef idx="minor">
+            <a:schemeClr val="lt1"/>
+          </a:fontRef>
+        </p:style>
+        <p:txBody>
+          <a:bodyPr rtlCol="0" anchor="ctr"/>
+          <a:lstStyle/>
+          <a:p>
+            <a:pPr algn="ctr"/>
+          </a:p>
+        </p:txBody>
+      </p:sp>
+      <p:sp>
+        <p:nvSpPr>
+          <p:cNvPr id="14" name="Rounded Rectangle 13"/>
+          <p:cNvSpPr/>
+          <p:nvPr/>
+        </p:nvSpPr>
+        <p:spPr>
+          <a:xfrm>
+            <a:off x="4695444" y="1737360"/>
+            <a:ext cx="3991356" cy="3113532"/>
+          </a:xfrm>
+          <a:prstGeom prst="roundRect">
+            <a:avLst>
+              <a:gd name="adj" fmla="val 4000"/>
+            </a:avLst>
+          </a:prstGeom>
+          <a:solidFill>
             <a:srgbClr val="F8FAFC"/>
           </a:solidFill>
-          <a:ln w="9525">
+          <a:ln w="6350">
             <a:solidFill>
               <a:srgbClr val="E2E8F0"/>
             </a:solidFill>
@@ -42947,14 +43360,14 @@
       </p:sp>
       <p:sp>
         <p:nvSpPr>
-          <p:cNvPr id="11" name="TextBox 10"/>
+          <p:cNvPr id="15" name="TextBox 14"/>
           <p:cNvSpPr txBox="1"/>
           <p:nvPr/>
         </p:nvSpPr>
         <p:spPr>
           <a:xfrm>
-            <a:off x="621792" y="1810512"/>
-            <a:ext cx="7955279" cy="320040"/>
+            <a:off x="4805172" y="1810512"/>
+            <a:ext cx="3771900" cy="320040"/>
           </a:xfrm>
           <a:prstGeom prst="rect">
             <a:avLst/>
@@ -42981,21 +43394,21 @@
                 <a:cs typeface="Sylfaen"/>
                 <a:latin typeface="Sylfaen"/>
               </a:rPr>
-              <a:t>📋 Launch Checklist:</a:t>
-            </a:r>
-          </a:p>
-        </p:txBody>
-      </p:sp>
-      <p:sp>
-        <p:nvSpPr>
-          <p:cNvPr id="12" name="TextBox 11"/>
+              <a:t>კითხვების ტიპები:</a:t>
+            </a:r>
+          </a:p>
+        </p:txBody>
+      </p:sp>
+      <p:sp>
+        <p:nvSpPr>
+          <p:cNvPr id="16" name="TextBox 15"/>
           <p:cNvSpPr txBox="1"/>
           <p:nvPr/>
         </p:nvSpPr>
         <p:spPr>
           <a:xfrm>
-            <a:off x="621792" y="2203704"/>
-            <a:ext cx="7955279" cy="1865376"/>
+            <a:off x="4805172" y="2203704"/>
+            <a:ext cx="3771900" cy="2267712"/>
           </a:xfrm>
           <a:prstGeom prst="rect">
             <a:avLst/>
@@ -43033,7 +43446,7 @@
                 <a:cs typeface="Sylfaen"/>
                 <a:latin typeface="Sylfaen"/>
               </a:rPr>
-              <a:t>[ ] Lovable საიტი გაშვებულია საკუთარ დომენზე;</a:t>
+              <a:t>„რით განსხვავდებით კონკურენტებისგან?“ (აჩვენეთ Feature Matrix);</a:t>
             </a:r>
           </a:p>
           <a:p>
@@ -43062,7 +43475,7 @@
                 <a:cs typeface="Sylfaen"/>
                 <a:latin typeface="Sylfaen"/>
               </a:rPr>
-              <a:t>[ ] Make.com სცენარი აქტიურია;</a:t>
+              <a:t>„რაში დახარჯავთ 25,000 ლარს?“ (აჩვენეთ გაწერილი ხარჯები);</a:t>
             </a:r>
           </a:p>
           <a:p>
@@ -43091,43 +43504,14 @@
                 <a:cs typeface="Sylfaen"/>
                 <a:latin typeface="Sylfaen"/>
               </a:rPr>
-              <a:t>[ ] მოზიდულია მინიმუმ 15 რეალური Leads/Email Google Sheets-ში;</a:t>
-            </a:r>
-          </a:p>
-          <a:p>
-            <a:pPr algn="l">
-              <a:spcAft>
-                <a:spcPts val="300"/>
-              </a:spcAft>
-            </a:pPr>
-            <a:r>
-              <a:rPr sz="1300" b="1">
-                <a:solidFill>
-                  <a:srgbClr val="3730A3"/>
-                </a:solidFill>
-                <a:ea typeface="Sylfaen"/>
-                <a:cs typeface="Sylfaen"/>
-                <a:latin typeface="Sylfaen"/>
-              </a:rPr>
-              <a:t>▸  </a:t>
-            </a:r>
-            <a:r>
-              <a:rPr sz="1300">
-                <a:solidFill>
-                  <a:srgbClr val="0F172A"/>
-                </a:solidFill>
-                <a:ea typeface="Sylfaen"/>
-                <a:cs typeface="Sylfaen"/>
-                <a:latin typeface="Sylfaen"/>
-              </a:rPr>
-              <a:t>[ ] პრეზენტაცია (Gamma Pitch Deck) დასრულებულია.</a:t>
-            </a:r>
-          </a:p>
-        </p:txBody>
-      </p:sp>
-      <p:sp>
-        <p:nvSpPr>
-          <p:cNvPr id="13" name="Rectangle 12"/>
+              <a:t>„როგორ მოიზიდავთ მომხმარებლებს?“ (აჩვენეთ Channels &amp; CAC).</a:t>
+            </a:r>
+          </a:p>
+        </p:txBody>
+      </p:sp>
+      <p:sp>
+        <p:nvSpPr>
+          <p:cNvPr id="17" name="Rectangle 16"/>
           <p:cNvSpPr/>
           <p:nvPr/>
         </p:nvSpPr>
@@ -43171,7 +43555,7 @@
       </p:sp>
       <p:sp>
         <p:nvSpPr>
-          <p:cNvPr id="14" name="TextBox 13"/>
+          <p:cNvPr id="18" name="TextBox 17"/>
           <p:cNvSpPr txBox="1"/>
           <p:nvPr/>
         </p:nvSpPr>
@@ -43391,7 +43775,7 @@
                 <a:cs typeface="Sylfaen"/>
                 <a:latin typeface="Sylfaen"/>
               </a:rPr>
-              <a:t>Course Wrap-up &amp; Certification</a:t>
+              <a:t>Homework Part B &amp; Launch Sprint</a:t>
             </a:r>
           </a:p>
         </p:txBody>
@@ -43492,7 +43876,7 @@
                 <a:cs typeface="Sylfaen"/>
                 <a:latin typeface="Sylfaen"/>
               </a:rPr>
-              <a:t>49 / 49</a:t>
+              <a:t>49 / 50</a:t>
             </a:r>
           </a:p>
         </p:txBody>
@@ -43506,7 +43890,7 @@
         <p:spPr>
           <a:xfrm>
             <a:off x="457200" y="1188720"/>
-            <a:ext cx="8229600" cy="713232"/>
+            <a:ext cx="8229600" cy="475488"/>
           </a:xfrm>
           <a:prstGeom prst="rect">
             <a:avLst/>
@@ -43533,7 +43917,7 @@
                 <a:cs typeface="Sylfaen"/>
                 <a:latin typeface="Sylfaen"/>
               </a:rPr>
-              <a:t>თქვენ წარმატებით დაასრულეთ 10-საათიანი პრაქტიკული კურსი „AI ინსტრუმენტები სტარტაპერებისთვის“!</a:t>
+              <a:t>დავალება Demo Day-სთვის (1 კვირიანი Sprint):</a:t>
             </a:r>
           </a:p>
         </p:txBody>
@@ -43546,8 +43930,8 @@
         </p:nvSpPr>
         <p:spPr>
           <a:xfrm>
-            <a:off x="457200" y="1975104"/>
-            <a:ext cx="54864" cy="1307592"/>
+            <a:off x="457200" y="1737360"/>
+            <a:ext cx="54864" cy="2459736"/>
           </a:xfrm>
           <a:prstGeom prst="rect">
             <a:avLst/>
@@ -43590,8 +43974,8 @@
         </p:nvSpPr>
         <p:spPr>
           <a:xfrm>
-            <a:off x="512064" y="1975104"/>
-            <a:ext cx="8174736" cy="1307592"/>
+            <a:off x="512064" y="1737360"/>
+            <a:ext cx="8174736" cy="2459736"/>
           </a:xfrm>
           <a:prstGeom prst="roundRect">
             <a:avLst>
@@ -43638,7 +44022,7 @@
         </p:nvSpPr>
         <p:spPr>
           <a:xfrm>
-            <a:off x="621792" y="2048256"/>
+            <a:off x="621792" y="1810512"/>
             <a:ext cx="7955279" cy="320040"/>
           </a:xfrm>
           <a:prstGeom prst="rect">
@@ -43666,7 +44050,7 @@
                 <a:cs typeface="Sylfaen"/>
                 <a:latin typeface="Sylfaen"/>
               </a:rPr>
-              <a:t>🚀 რა არის შემდეგი ნაბიჯი?</a:t>
+              <a:t>📋 Launch Checklist:</a:t>
             </a:r>
           </a:p>
         </p:txBody>
@@ -43679,8 +44063,8 @@
         </p:nvSpPr>
         <p:spPr>
           <a:xfrm>
-            <a:off x="621792" y="2441448"/>
-            <a:ext cx="7955279" cy="713232"/>
+            <a:off x="621792" y="2203704"/>
+            <a:ext cx="7955279" cy="1865376"/>
           </a:xfrm>
           <a:prstGeom prst="rect">
             <a:avLst/>
@@ -43693,13 +44077,24 @@
           </a:bodyPr>
           <a:lstStyle/>
           <a:p>
-            <a:pPr>
-              <a:spcAft>
-                <a:spcPts val="400"/>
-              </a:spcAft>
-            </a:pPr>
-            <a:r>
-              <a:rPr sz="1300" b="0" i="0">
+            <a:pPr algn="l">
+              <a:spcAft>
+                <a:spcPts val="300"/>
+              </a:spcAft>
+            </a:pPr>
+            <a:r>
+              <a:rPr sz="1300" b="1">
+                <a:solidFill>
+                  <a:srgbClr val="3730A3"/>
+                </a:solidFill>
+                <a:ea typeface="Sylfaen"/>
+                <a:cs typeface="Sylfaen"/>
+                <a:latin typeface="Sylfaen"/>
+              </a:rPr>
+              <a:t>▸  </a:t>
+            </a:r>
+            <a:r>
+              <a:rPr sz="1300">
                 <a:solidFill>
                   <a:srgbClr val="0F172A"/>
                 </a:solidFill>
@@ -43707,7 +44102,94 @@
                 <a:cs typeface="Sylfaen"/>
                 <a:latin typeface="Sylfaen"/>
               </a:rPr>
-              <a:t>გამოიყენეთ მიღებული ცოდნა, აწყობილი MVP და ავტომატიზაციები GITA-ს 25,000 ლარიანი გრანტის მოსაპოვებლად. წარმატებები Demo Day-ზე!</a:t>
+              <a:t>[ ] Lovable საიტი გაშვებულია საკუთარ დომენზე;</a:t>
+            </a:r>
+          </a:p>
+          <a:p>
+            <a:pPr algn="l">
+              <a:spcAft>
+                <a:spcPts val="300"/>
+              </a:spcAft>
+            </a:pPr>
+            <a:r>
+              <a:rPr sz="1300" b="1">
+                <a:solidFill>
+                  <a:srgbClr val="3730A3"/>
+                </a:solidFill>
+                <a:ea typeface="Sylfaen"/>
+                <a:cs typeface="Sylfaen"/>
+                <a:latin typeface="Sylfaen"/>
+              </a:rPr>
+              <a:t>▸  </a:t>
+            </a:r>
+            <a:r>
+              <a:rPr sz="1300">
+                <a:solidFill>
+                  <a:srgbClr val="0F172A"/>
+                </a:solidFill>
+                <a:ea typeface="Sylfaen"/>
+                <a:cs typeface="Sylfaen"/>
+                <a:latin typeface="Sylfaen"/>
+              </a:rPr>
+              <a:t>[ ] Make.com სცენარი აქტიურია;</a:t>
+            </a:r>
+          </a:p>
+          <a:p>
+            <a:pPr algn="l">
+              <a:spcAft>
+                <a:spcPts val="300"/>
+              </a:spcAft>
+            </a:pPr>
+            <a:r>
+              <a:rPr sz="1300" b="1">
+                <a:solidFill>
+                  <a:srgbClr val="3730A3"/>
+                </a:solidFill>
+                <a:ea typeface="Sylfaen"/>
+                <a:cs typeface="Sylfaen"/>
+                <a:latin typeface="Sylfaen"/>
+              </a:rPr>
+              <a:t>▸  </a:t>
+            </a:r>
+            <a:r>
+              <a:rPr sz="1300">
+                <a:solidFill>
+                  <a:srgbClr val="0F172A"/>
+                </a:solidFill>
+                <a:ea typeface="Sylfaen"/>
+                <a:cs typeface="Sylfaen"/>
+                <a:latin typeface="Sylfaen"/>
+              </a:rPr>
+              <a:t>[ ] მოზიდულია მინიმუმ 15 რეალური Leads/Email Google Sheets-ში;</a:t>
+            </a:r>
+          </a:p>
+          <a:p>
+            <a:pPr algn="l">
+              <a:spcAft>
+                <a:spcPts val="300"/>
+              </a:spcAft>
+            </a:pPr>
+            <a:r>
+              <a:rPr sz="1300" b="1">
+                <a:solidFill>
+                  <a:srgbClr val="3730A3"/>
+                </a:solidFill>
+                <a:ea typeface="Sylfaen"/>
+                <a:cs typeface="Sylfaen"/>
+                <a:latin typeface="Sylfaen"/>
+              </a:rPr>
+              <a:t>▸  </a:t>
+            </a:r>
+            <a:r>
+              <a:rPr sz="1300">
+                <a:solidFill>
+                  <a:srgbClr val="0F172A"/>
+                </a:solidFill>
+                <a:ea typeface="Sylfaen"/>
+                <a:cs typeface="Sylfaen"/>
+                <a:latin typeface="Sylfaen"/>
+              </a:rPr>
+              <a:t>[ ] პრეზენტაცია (Gamma Pitch Deck) დასრულებულია.</a:t>
             </a:r>
           </a:p>
         </p:txBody>
@@ -44079,7 +44561,7 @@
                 <a:cs typeface="Sylfaen"/>
                 <a:latin typeface="Sylfaen"/>
               </a:rPr>
-              <a:t>5 / 49</a:t>
+              <a:t>5 / 50</a:t>
             </a:r>
           </a:p>
         </p:txBody>
@@ -44911,6 +45393,593 @@
       <p:sp>
         <p:nvSpPr>
           <p:cNvPr id="23" name="TextBox 22"/>
+          <p:cNvSpPr txBox="1"/>
+          <p:nvPr/>
+        </p:nvSpPr>
+        <p:spPr>
+          <a:xfrm>
+            <a:off x="457200" y="4887468"/>
+            <a:ext cx="8229600" cy="201168"/>
+          </a:xfrm>
+          <a:prstGeom prst="rect">
+            <a:avLst/>
+          </a:prstGeom>
+          <a:noFill/>
+        </p:spPr>
+        <p:txBody>
+          <a:bodyPr wrap="square" anchor="ctr" lIns="54864" rIns="54864" tIns="54864" bIns="54864">
+            <a:spAutoFit/>
+          </a:bodyPr>
+          <a:lstStyle/>
+          <a:p>
+            <a:pPr>
+              <a:spcAft>
+                <a:spcPts val="400"/>
+              </a:spcAft>
+            </a:pPr>
+            <a:r>
+              <a:rPr sz="800" b="0" i="0">
+                <a:solidFill>
+                  <a:srgbClr val="94A3B8"/>
+                </a:solidFill>
+                <a:ea typeface="Sylfaen"/>
+                <a:cs typeface="Sylfaen"/>
+                <a:latin typeface="Sylfaen"/>
+              </a:rPr>
+              <a:t>GITA Pre-Acceleration 2026 · AI for Startups</a:t>
+            </a:r>
+          </a:p>
+        </p:txBody>
+      </p:sp>
+    </p:spTree>
+  </p:cSld>
+  <p:clrMapOvr>
+    <a:masterClrMapping/>
+  </p:clrMapOvr>
+</p:sld>
+</file>
+
+<file path=ppt/slides/slide50.xml><?xml version="1.0" encoding="utf-8"?>
+<p:sld xmlns:a="http://schemas.openxmlformats.org/drawingml/2006/main" xmlns:p="http://schemas.openxmlformats.org/presentationml/2006/main" xmlns:r="http://schemas.openxmlformats.org/officeDocument/2006/relationships">
+  <p:cSld>
+    <p:spTree>
+      <p:nvGrpSpPr>
+        <p:cNvPr id="1" name=""/>
+        <p:cNvGrpSpPr/>
+        <p:nvPr/>
+      </p:nvGrpSpPr>
+      <p:grpSpPr/>
+      <p:sp>
+        <p:nvSpPr>
+          <p:cNvPr id="2" name="Rectangle 1"/>
+          <p:cNvSpPr/>
+          <p:nvPr/>
+        </p:nvSpPr>
+        <p:spPr>
+          <a:xfrm>
+            <a:off x="0" y="0"/>
+            <a:ext cx="9144000" cy="5143500"/>
+          </a:xfrm>
+          <a:prstGeom prst="rect">
+            <a:avLst/>
+          </a:prstGeom>
+          <a:solidFill>
+            <a:srgbClr val="FFFFFF"/>
+          </a:solidFill>
+          <a:ln>
+            <a:noFill/>
+          </a:ln>
+          <a:effectLst/>
+        </p:spPr>
+        <p:style>
+          <a:lnRef idx="1">
+            <a:schemeClr val="accent1"/>
+          </a:lnRef>
+          <a:fillRef idx="3">
+            <a:schemeClr val="accent1"/>
+          </a:fillRef>
+          <a:effectRef idx="2">
+            <a:schemeClr val="accent1"/>
+          </a:effectRef>
+          <a:fontRef idx="minor">
+            <a:schemeClr val="lt1"/>
+          </a:fontRef>
+        </p:style>
+        <p:txBody>
+          <a:bodyPr rtlCol="0" anchor="ctr"/>
+          <a:lstStyle/>
+          <a:p>
+            <a:pPr algn="ctr"/>
+          </a:p>
+        </p:txBody>
+      </p:sp>
+      <p:sp>
+        <p:nvSpPr>
+          <p:cNvPr id="3" name="Rectangle 2"/>
+          <p:cNvSpPr/>
+          <p:nvPr/>
+        </p:nvSpPr>
+        <p:spPr>
+          <a:xfrm>
+            <a:off x="0" y="0"/>
+            <a:ext cx="109728" cy="5143500"/>
+          </a:xfrm>
+          <a:prstGeom prst="rect">
+            <a:avLst/>
+          </a:prstGeom>
+          <a:solidFill>
+            <a:srgbClr val="4F46E5"/>
+          </a:solidFill>
+          <a:ln>
+            <a:noFill/>
+          </a:ln>
+          <a:effectLst/>
+        </p:spPr>
+        <p:style>
+          <a:lnRef idx="1">
+            <a:schemeClr val="accent1"/>
+          </a:lnRef>
+          <a:fillRef idx="3">
+            <a:schemeClr val="accent1"/>
+          </a:fillRef>
+          <a:effectRef idx="2">
+            <a:schemeClr val="accent1"/>
+          </a:effectRef>
+          <a:fontRef idx="minor">
+            <a:schemeClr val="lt1"/>
+          </a:fontRef>
+        </p:style>
+        <p:txBody>
+          <a:bodyPr rtlCol="0" anchor="ctr"/>
+          <a:lstStyle/>
+          <a:p>
+            <a:pPr algn="ctr"/>
+          </a:p>
+        </p:txBody>
+      </p:sp>
+      <p:sp>
+        <p:nvSpPr>
+          <p:cNvPr id="4" name="Rectangle 3"/>
+          <p:cNvSpPr/>
+          <p:nvPr/>
+        </p:nvSpPr>
+        <p:spPr>
+          <a:xfrm>
+            <a:off x="0" y="0"/>
+            <a:ext cx="9144000" cy="109728"/>
+          </a:xfrm>
+          <a:prstGeom prst="rect">
+            <a:avLst/>
+          </a:prstGeom>
+          <a:solidFill>
+            <a:srgbClr val="4F46E5"/>
+          </a:solidFill>
+          <a:ln>
+            <a:noFill/>
+          </a:ln>
+          <a:effectLst/>
+        </p:spPr>
+        <p:style>
+          <a:lnRef idx="1">
+            <a:schemeClr val="accent1"/>
+          </a:lnRef>
+          <a:fillRef idx="3">
+            <a:schemeClr val="accent1"/>
+          </a:fillRef>
+          <a:effectRef idx="2">
+            <a:schemeClr val="accent1"/>
+          </a:effectRef>
+          <a:fontRef idx="minor">
+            <a:schemeClr val="lt1"/>
+          </a:fontRef>
+        </p:style>
+        <p:txBody>
+          <a:bodyPr rtlCol="0" anchor="ctr"/>
+          <a:lstStyle/>
+          <a:p>
+            <a:pPr algn="ctr"/>
+          </a:p>
+        </p:txBody>
+      </p:sp>
+      <p:sp>
+        <p:nvSpPr>
+          <p:cNvPr id="5" name="TextBox 4"/>
+          <p:cNvSpPr txBox="1"/>
+          <p:nvPr/>
+        </p:nvSpPr>
+        <p:spPr>
+          <a:xfrm>
+            <a:off x="457200" y="256032"/>
+            <a:ext cx="7772400" cy="777240"/>
+          </a:xfrm>
+          <a:prstGeom prst="rect">
+            <a:avLst/>
+          </a:prstGeom>
+          <a:noFill/>
+        </p:spPr>
+        <p:txBody>
+          <a:bodyPr wrap="square" anchor="t" lIns="54864" rIns="54864" tIns="54864" bIns="54864">
+            <a:spAutoFit/>
+          </a:bodyPr>
+          <a:lstStyle/>
+          <a:p>
+            <a:r>
+              <a:rPr sz="2600" b="1">
+                <a:solidFill>
+                  <a:srgbClr val="3730A3"/>
+                </a:solidFill>
+                <a:ea typeface="Sylfaen"/>
+                <a:cs typeface="Sylfaen"/>
+                <a:latin typeface="Sylfaen"/>
+              </a:rPr>
+              <a:t>Course Wrap-up &amp; Certification</a:t>
+            </a:r>
+          </a:p>
+        </p:txBody>
+      </p:sp>
+      <p:sp>
+        <p:nvSpPr>
+          <p:cNvPr id="6" name="Rectangle 5"/>
+          <p:cNvSpPr/>
+          <p:nvPr/>
+        </p:nvSpPr>
+        <p:spPr>
+          <a:xfrm>
+            <a:off x="457200" y="1051560"/>
+            <a:ext cx="8229600" cy="22860"/>
+          </a:xfrm>
+          <a:prstGeom prst="rect">
+            <a:avLst/>
+          </a:prstGeom>
+          <a:solidFill>
+            <a:srgbClr val="E2E8F0"/>
+          </a:solidFill>
+          <a:ln>
+            <a:noFill/>
+          </a:ln>
+          <a:effectLst/>
+        </p:spPr>
+        <p:style>
+          <a:lnRef idx="1">
+            <a:schemeClr val="accent1"/>
+          </a:lnRef>
+          <a:fillRef idx="3">
+            <a:schemeClr val="accent1"/>
+          </a:fillRef>
+          <a:effectRef idx="2">
+            <a:schemeClr val="accent1"/>
+          </a:effectRef>
+          <a:fontRef idx="minor">
+            <a:schemeClr val="lt1"/>
+          </a:fontRef>
+        </p:style>
+        <p:txBody>
+          <a:bodyPr rtlCol="0" anchor="ctr"/>
+          <a:lstStyle/>
+          <a:p>
+            <a:pPr algn="ctr"/>
+          </a:p>
+        </p:txBody>
+      </p:sp>
+      <p:sp>
+        <p:nvSpPr>
+          <p:cNvPr id="7" name="Rounded Rectangle 6"/>
+          <p:cNvSpPr/>
+          <p:nvPr/>
+        </p:nvSpPr>
+        <p:spPr>
+          <a:xfrm>
+            <a:off x="8138160" y="201168"/>
+            <a:ext cx="777240" cy="320040"/>
+          </a:xfrm>
+          <a:prstGeom prst="roundRect">
+            <a:avLst>
+              <a:gd name="adj" fmla="val 50000"/>
+            </a:avLst>
+          </a:prstGeom>
+          <a:solidFill>
+            <a:srgbClr val="4F46E5"/>
+          </a:solidFill>
+          <a:ln>
+            <a:noFill/>
+          </a:ln>
+          <a:effectLst/>
+        </p:spPr>
+        <p:style>
+          <a:lnRef idx="1">
+            <a:schemeClr val="accent1"/>
+          </a:lnRef>
+          <a:fillRef idx="3">
+            <a:schemeClr val="accent1"/>
+          </a:fillRef>
+          <a:effectRef idx="2">
+            <a:schemeClr val="accent1"/>
+          </a:effectRef>
+          <a:fontRef idx="minor">
+            <a:schemeClr val="lt1"/>
+          </a:fontRef>
+        </p:style>
+        <p:txBody>
+          <a:bodyPr rtlCol="0" anchor="ctr" lIns="36576" rIns="36576" tIns="18288" bIns="18288"/>
+          <a:lstStyle/>
+          <a:p>
+            <a:pPr algn="ctr"/>
+            <a:r>
+              <a:rPr sz="1000" b="1">
+                <a:solidFill>
+                  <a:srgbClr val="FFFFFF"/>
+                </a:solidFill>
+                <a:ea typeface="Sylfaen"/>
+                <a:cs typeface="Sylfaen"/>
+                <a:latin typeface="Sylfaen"/>
+              </a:rPr>
+              <a:t>50 / 50</a:t>
+            </a:r>
+          </a:p>
+        </p:txBody>
+      </p:sp>
+      <p:sp>
+        <p:nvSpPr>
+          <p:cNvPr id="8" name="TextBox 7"/>
+          <p:cNvSpPr txBox="1"/>
+          <p:nvPr/>
+        </p:nvSpPr>
+        <p:spPr>
+          <a:xfrm>
+            <a:off x="457200" y="1188720"/>
+            <a:ext cx="8229600" cy="713232"/>
+          </a:xfrm>
+          <a:prstGeom prst="rect">
+            <a:avLst/>
+          </a:prstGeom>
+          <a:noFill/>
+        </p:spPr>
+        <p:txBody>
+          <a:bodyPr wrap="square" anchor="t" lIns="54864" rIns="54864" tIns="54864" bIns="54864">
+            <a:spAutoFit/>
+          </a:bodyPr>
+          <a:lstStyle/>
+          <a:p>
+            <a:pPr>
+              <a:spcAft>
+                <a:spcPts val="400"/>
+              </a:spcAft>
+            </a:pPr>
+            <a:r>
+              <a:rPr sz="1300" b="0" i="0">
+                <a:solidFill>
+                  <a:srgbClr val="0F172A"/>
+                </a:solidFill>
+                <a:ea typeface="Sylfaen"/>
+                <a:cs typeface="Sylfaen"/>
+                <a:latin typeface="Sylfaen"/>
+              </a:rPr>
+              <a:t>თქვენ წარმატებით დაასრულეთ 10-საათიანი პრაქტიკული კურსი „AI ინსტრუმენტები სტარტაპერებისთვის“!</a:t>
+            </a:r>
+          </a:p>
+        </p:txBody>
+      </p:sp>
+      <p:sp>
+        <p:nvSpPr>
+          <p:cNvPr id="9" name="Rectangle 8"/>
+          <p:cNvSpPr/>
+          <p:nvPr/>
+        </p:nvSpPr>
+        <p:spPr>
+          <a:xfrm>
+            <a:off x="457200" y="1975104"/>
+            <a:ext cx="54864" cy="1307592"/>
+          </a:xfrm>
+          <a:prstGeom prst="rect">
+            <a:avLst/>
+          </a:prstGeom>
+          <a:solidFill>
+            <a:srgbClr val="3730A3"/>
+          </a:solidFill>
+          <a:ln>
+            <a:noFill/>
+          </a:ln>
+          <a:effectLst/>
+        </p:spPr>
+        <p:style>
+          <a:lnRef idx="1">
+            <a:schemeClr val="accent1"/>
+          </a:lnRef>
+          <a:fillRef idx="3">
+            <a:schemeClr val="accent1"/>
+          </a:fillRef>
+          <a:effectRef idx="2">
+            <a:schemeClr val="accent1"/>
+          </a:effectRef>
+          <a:fontRef idx="minor">
+            <a:schemeClr val="lt1"/>
+          </a:fontRef>
+        </p:style>
+        <p:txBody>
+          <a:bodyPr rtlCol="0" anchor="ctr"/>
+          <a:lstStyle/>
+          <a:p>
+            <a:pPr algn="ctr"/>
+          </a:p>
+        </p:txBody>
+      </p:sp>
+      <p:sp>
+        <p:nvSpPr>
+          <p:cNvPr id="10" name="Rounded Rectangle 9"/>
+          <p:cNvSpPr/>
+          <p:nvPr/>
+        </p:nvSpPr>
+        <p:spPr>
+          <a:xfrm>
+            <a:off x="512064" y="1975104"/>
+            <a:ext cx="8174736" cy="1307592"/>
+          </a:xfrm>
+          <a:prstGeom prst="roundRect">
+            <a:avLst>
+              <a:gd name="adj" fmla="val 4000"/>
+            </a:avLst>
+          </a:prstGeom>
+          <a:solidFill>
+            <a:srgbClr val="F8FAFC"/>
+          </a:solidFill>
+          <a:ln w="9525">
+            <a:solidFill>
+              <a:srgbClr val="E2E8F0"/>
+            </a:solidFill>
+          </a:ln>
+          <a:effectLst/>
+        </p:spPr>
+        <p:style>
+          <a:lnRef idx="1">
+            <a:schemeClr val="accent1"/>
+          </a:lnRef>
+          <a:fillRef idx="3">
+            <a:schemeClr val="accent1"/>
+          </a:fillRef>
+          <a:effectRef idx="2">
+            <a:schemeClr val="accent1"/>
+          </a:effectRef>
+          <a:fontRef idx="minor">
+            <a:schemeClr val="lt1"/>
+          </a:fontRef>
+        </p:style>
+        <p:txBody>
+          <a:bodyPr rtlCol="0" anchor="ctr"/>
+          <a:lstStyle/>
+          <a:p>
+            <a:pPr algn="ctr"/>
+          </a:p>
+        </p:txBody>
+      </p:sp>
+      <p:sp>
+        <p:nvSpPr>
+          <p:cNvPr id="11" name="TextBox 10"/>
+          <p:cNvSpPr txBox="1"/>
+          <p:nvPr/>
+        </p:nvSpPr>
+        <p:spPr>
+          <a:xfrm>
+            <a:off x="621792" y="2048256"/>
+            <a:ext cx="7955279" cy="320040"/>
+          </a:xfrm>
+          <a:prstGeom prst="rect">
+            <a:avLst/>
+          </a:prstGeom>
+          <a:noFill/>
+        </p:spPr>
+        <p:txBody>
+          <a:bodyPr wrap="square" anchor="t" lIns="54864" rIns="54864" tIns="54864" bIns="54864">
+            <a:spAutoFit/>
+          </a:bodyPr>
+          <a:lstStyle/>
+          <a:p>
+            <a:pPr>
+              <a:spcAft>
+                <a:spcPts val="400"/>
+              </a:spcAft>
+            </a:pPr>
+            <a:r>
+              <a:rPr sz="1400" b="1" i="0">
+                <a:solidFill>
+                  <a:srgbClr val="0F172A"/>
+                </a:solidFill>
+                <a:ea typeface="Sylfaen"/>
+                <a:cs typeface="Sylfaen"/>
+                <a:latin typeface="Sylfaen"/>
+              </a:rPr>
+              <a:t>🚀 რა არის შემდეგი ნაბიჯი?</a:t>
+            </a:r>
+          </a:p>
+        </p:txBody>
+      </p:sp>
+      <p:sp>
+        <p:nvSpPr>
+          <p:cNvPr id="12" name="TextBox 11"/>
+          <p:cNvSpPr txBox="1"/>
+          <p:nvPr/>
+        </p:nvSpPr>
+        <p:spPr>
+          <a:xfrm>
+            <a:off x="621792" y="2441448"/>
+            <a:ext cx="7955279" cy="713232"/>
+          </a:xfrm>
+          <a:prstGeom prst="rect">
+            <a:avLst/>
+          </a:prstGeom>
+          <a:noFill/>
+        </p:spPr>
+        <p:txBody>
+          <a:bodyPr wrap="square" anchor="t" lIns="54864" rIns="54864" tIns="54864" bIns="54864">
+            <a:spAutoFit/>
+          </a:bodyPr>
+          <a:lstStyle/>
+          <a:p>
+            <a:pPr>
+              <a:spcAft>
+                <a:spcPts val="400"/>
+              </a:spcAft>
+            </a:pPr>
+            <a:r>
+              <a:rPr sz="1300" b="0" i="0">
+                <a:solidFill>
+                  <a:srgbClr val="0F172A"/>
+                </a:solidFill>
+                <a:ea typeface="Sylfaen"/>
+                <a:cs typeface="Sylfaen"/>
+                <a:latin typeface="Sylfaen"/>
+              </a:rPr>
+              <a:t>გამოიყენეთ მიღებული ცოდნა, აწყობილი MVP და ავტომატიზაციები GITA-ს 25,000 ლარიანი გრანტის მოსაპოვებლად. წარმატებები Demo Day-ზე!</a:t>
+            </a:r>
+          </a:p>
+        </p:txBody>
+      </p:sp>
+      <p:sp>
+        <p:nvSpPr>
+          <p:cNvPr id="13" name="Rectangle 12"/>
+          <p:cNvSpPr/>
+          <p:nvPr/>
+        </p:nvSpPr>
+        <p:spPr>
+          <a:xfrm>
+            <a:off x="457200" y="4850892"/>
+            <a:ext cx="8229600" cy="13716"/>
+          </a:xfrm>
+          <a:prstGeom prst="rect">
+            <a:avLst/>
+          </a:prstGeom>
+          <a:solidFill>
+            <a:srgbClr val="E2E8F0"/>
+          </a:solidFill>
+          <a:ln>
+            <a:noFill/>
+          </a:ln>
+          <a:effectLst/>
+        </p:spPr>
+        <p:style>
+          <a:lnRef idx="1">
+            <a:schemeClr val="accent1"/>
+          </a:lnRef>
+          <a:fillRef idx="3">
+            <a:schemeClr val="accent1"/>
+          </a:fillRef>
+          <a:effectRef idx="2">
+            <a:schemeClr val="accent1"/>
+          </a:effectRef>
+          <a:fontRef idx="minor">
+            <a:schemeClr val="lt1"/>
+          </a:fontRef>
+        </p:style>
+        <p:txBody>
+          <a:bodyPr rtlCol="0" anchor="ctr"/>
+          <a:lstStyle/>
+          <a:p>
+            <a:pPr algn="ctr"/>
+          </a:p>
+        </p:txBody>
+      </p:sp>
+      <p:sp>
+        <p:nvSpPr>
+          <p:cNvPr id="14" name="TextBox 13"/>
           <p:cNvSpPr txBox="1"/>
           <p:nvPr/>
         </p:nvSpPr>
@@ -45231,7 +46300,7 @@
                 <a:cs typeface="Sylfaen"/>
                 <a:latin typeface="Sylfaen"/>
               </a:rPr>
-              <a:t>6 / 49</a:t>
+              <a:t>6 / 50</a:t>
             </a:r>
           </a:p>
         </p:txBody>
@@ -46635,7 +47704,7 @@
                 <a:cs typeface="Sylfaen"/>
                 <a:latin typeface="Sylfaen"/>
               </a:rPr>
-              <a:t>7 / 49</a:t>
+              <a:t>7 / 50</a:t>
             </a:r>
           </a:p>
         </p:txBody>
@@ -47565,7 +48634,7 @@
                 <a:cs typeface="Sylfaen"/>
                 <a:latin typeface="Sylfaen"/>
               </a:rPr>
-              <a:t>8 / 49</a:t>
+              <a:t>8 / 50</a:t>
             </a:r>
           </a:p>
         </p:txBody>
@@ -48674,7 +49743,7 @@
                 <a:cs typeface="Sylfaen"/>
                 <a:latin typeface="Sylfaen"/>
               </a:rPr>
-              <a:t>9 / 49</a:t>
+              <a:t>9 / 50</a:t>
             </a:r>
           </a:p>
         </p:txBody>

--- a/GITA/Pre-Acceleration/2026-5h-AI-for-Startups/day2-slides.pptx
+++ b/GITA/Pre-Acceleration/2026-5h-AI-for-Startups/day2-slides.pptx
@@ -32526,7 +32526,7 @@
                 <a:cs typeface="Sylfaen"/>
                 <a:latin typeface="Sylfaen"/>
               </a:rPr>
-              <a:t>Make.com ძირითადი ელემენტები:</a:t>
+              <a:t>📋 ვის რაში გამოგადგებათ (გუნდური ქეისები):</a:t>
             </a:r>
           </a:p>
         </p:txBody>
@@ -32540,7 +32540,7 @@
         <p:spPr>
           <a:xfrm>
             <a:off x="621792" y="2203704"/>
-            <a:ext cx="3771900" cy="2267712"/>
+            <a:ext cx="3771900" cy="2574035"/>
           </a:xfrm>
           <a:prstGeom prst="rect">
             <a:avLst/>
@@ -32578,7 +32578,7 @@
                 <a:cs typeface="Sylfaen"/>
                 <a:latin typeface="Sylfaen"/>
               </a:rPr>
-              <a:t>Scenarios: სრული ავტომატიზაციის სქემები;</a:t>
+              <a:t>🏥 Health &amp; Med (Team 1, 2): შეკვეთების &amp; ჯავშნების ავტომატური SMS/Email შეტყობინებები კლიენტებთან და ექიმებთან.</a:t>
             </a:r>
           </a:p>
           <a:p>
@@ -32607,7 +32607,7 @@
                 <a:cs typeface="Sylfaen"/>
                 <a:latin typeface="Sylfaen"/>
               </a:rPr>
-              <a:t>Modules: აპლიკაციების ბლოკები (მაგ. Gmail, Google Sheets);</a:t>
+              <a:t>🛡️ Travel &amp; Samachablo (Team 9, 10): მომხმარებლისგან მიღებული პანიკის/საფრთხის სიგნალების მყისიერი გაგზავნა Telegram Bot-ში ან Slack-ში.</a:t>
             </a:r>
           </a:p>
           <a:p>
@@ -32636,7 +32636,65 @@
                 <a:cs typeface="Sylfaen"/>
                 <a:latin typeface="Sylfaen"/>
               </a:rPr>
-              <a:t>Filters: პირობები მონაცემთა გასაფილტრად.</a:t>
+              <a:t>⚖️ Legal &amp; Compliance (Team 4, 5): გენერირებული PDF დოკუმენტების ავტომატური ატვირთვა Google Drive-ში და კლიენტთან გაგზავნა.</a:t>
+            </a:r>
+          </a:p>
+          <a:p>
+            <a:pPr algn="l">
+              <a:spcAft>
+                <a:spcPts val="300"/>
+              </a:spcAft>
+            </a:pPr>
+            <a:r>
+              <a:rPr sz="1300" b="1">
+                <a:solidFill>
+                  <a:srgbClr val="3730A3"/>
+                </a:solidFill>
+                <a:ea typeface="Sylfaen"/>
+                <a:cs typeface="Sylfaen"/>
+                <a:latin typeface="Sylfaen"/>
+              </a:rPr>
+              <a:t>▸  </a:t>
+            </a:r>
+            <a:r>
+              <a:rPr sz="1300">
+                <a:solidFill>
+                  <a:srgbClr val="0F172A"/>
+                </a:solidFill>
+                <a:ea typeface="Sylfaen"/>
+                <a:cs typeface="Sylfaen"/>
+                <a:latin typeface="Sylfaen"/>
+              </a:rPr>
+              <a:t>🎒 EdTech (Team 6, 8): Early Adopters-ის ბაზის შევსება Sheets CRM-ში და Welcome-Email-ის გაგზავნა სასწავლო გზამკვლევით.</a:t>
+            </a:r>
+          </a:p>
+          <a:p>
+            <a:pPr algn="l">
+              <a:spcAft>
+                <a:spcPts val="300"/>
+              </a:spcAft>
+            </a:pPr>
+            <a:r>
+              <a:rPr sz="1300" b="1">
+                <a:solidFill>
+                  <a:srgbClr val="3730A3"/>
+                </a:solidFill>
+                <a:ea typeface="Sylfaen"/>
+                <a:cs typeface="Sylfaen"/>
+                <a:latin typeface="Sylfaen"/>
+              </a:rPr>
+              <a:t>▸  </a:t>
+            </a:r>
+            <a:r>
+              <a:rPr sz="1300">
+                <a:solidFill>
+                  <a:srgbClr val="0F172A"/>
+                </a:solidFill>
+                <a:ea typeface="Sylfaen"/>
+                <a:cs typeface="Sylfaen"/>
+                <a:latin typeface="Sylfaen"/>
+              </a:rPr>
+              <a:t>📝 Productivity (Team 7): Smart Diary-ის დავალებების სინქრონიზაცია Google Calendar-სა და Notion-თან.</a:t>
             </a:r>
           </a:p>
         </p:txBody>
@@ -32769,7 +32827,7 @@
                 <a:cs typeface="Sylfaen"/>
                 <a:latin typeface="Sylfaen"/>
               </a:rPr>
-              <a:t>🚀 რატომ Make?</a:t>
+              <a:t>🚀 Make.com-ის უპირატესობა:</a:t>
             </a:r>
           </a:p>
         </p:txBody>
@@ -32810,14 +32868,96 @@
                 <a:cs typeface="Sylfaen"/>
                 <a:latin typeface="Sylfaen"/>
               </a:rPr>
-              <a:t>იგი არის ვიზუალური, მარტივი გამოსაყენებელი და უფასო ვერსიაში გაძლევთ 1000 ოპერაციას თვეში.</a:t>
-            </a:r>
-          </a:p>
-        </p:txBody>
-      </p:sp>
-      <p:sp>
-        <p:nvSpPr>
-          <p:cNvPr id="17" name="Rectangle 16"/>
+              <a:t>ის არის No-Code "ძრავი", რომელიც თქვენს Lovable საიტს აკავშირებს ნებისმიერ გარე სერვისთან (Email, CRM, Sheets, Telegram, Slack) 100% უფასოდ და მარტივად.</a:t>
+            </a:r>
+          </a:p>
+        </p:txBody>
+      </p:sp>
+      <p:sp>
+        <p:nvSpPr>
+          <p:cNvPr id="17" name="TextBox 16"/>
+          <p:cNvSpPr txBox="1"/>
+          <p:nvPr/>
+        </p:nvSpPr>
+        <p:spPr>
+          <a:xfrm>
+            <a:off x="4805172" y="2990088"/>
+            <a:ext cx="3771900" cy="320040"/>
+          </a:xfrm>
+          <a:prstGeom prst="rect">
+            <a:avLst/>
+          </a:prstGeom>
+          <a:noFill/>
+        </p:spPr>
+        <p:txBody>
+          <a:bodyPr wrap="square" anchor="t" lIns="54864" rIns="54864" tIns="54864" bIns="54864">
+            <a:spAutoFit/>
+          </a:bodyPr>
+          <a:lstStyle/>
+          <a:p>
+            <a:pPr>
+              <a:spcAft>
+                <a:spcPts val="400"/>
+              </a:spcAft>
+            </a:pPr>
+            <a:r>
+              <a:rPr sz="1400" b="1" i="0">
+                <a:solidFill>
+                  <a:srgbClr val="0F172A"/>
+                </a:solidFill>
+                <a:ea typeface="Sylfaen"/>
+                <a:cs typeface="Sylfaen"/>
+                <a:latin typeface="Sylfaen"/>
+              </a:rPr>
+              <a:t>📦 ძირითადი ცნებები:</a:t>
+            </a:r>
+          </a:p>
+        </p:txBody>
+      </p:sp>
+      <p:sp>
+        <p:nvSpPr>
+          <p:cNvPr id="18" name="TextBox 17"/>
+          <p:cNvSpPr txBox="1"/>
+          <p:nvPr/>
+        </p:nvSpPr>
+        <p:spPr>
+          <a:xfrm>
+            <a:off x="4805172" y="3383280"/>
+            <a:ext cx="3771900" cy="713232"/>
+          </a:xfrm>
+          <a:prstGeom prst="rect">
+            <a:avLst/>
+          </a:prstGeom>
+          <a:noFill/>
+        </p:spPr>
+        <p:txBody>
+          <a:bodyPr wrap="square" anchor="t" lIns="54864" rIns="54864" tIns="54864" bIns="54864">
+            <a:spAutoFit/>
+          </a:bodyPr>
+          <a:lstStyle/>
+          <a:p>
+            <a:pPr>
+              <a:spcAft>
+                <a:spcPts val="400"/>
+              </a:spcAft>
+            </a:pPr>
+            <a:r>
+              <a:rPr sz="1300" b="0" i="0">
+                <a:solidFill>
+                  <a:srgbClr val="0F172A"/>
+                </a:solidFill>
+                <a:ea typeface="Sylfaen"/>
+                <a:cs typeface="Sylfaen"/>
+                <a:latin typeface="Sylfaen"/>
+              </a:rPr>
+              <a:t>Scenario: ავტომატიზაციის სქემა · Module: აპლიკაციის ბლოკი (მაგ: Gmail) · Webhook: მყისიერი რეაგირების ტრიგერი.</a:t>
+            </a:r>
+          </a:p>
+        </p:txBody>
+      </p:sp>
+      <p:sp>
+        <p:nvSpPr>
+          <p:cNvPr id="19" name="Rectangle 18"/>
           <p:cNvSpPr/>
           <p:nvPr/>
         </p:nvSpPr>
@@ -32861,7 +33001,7 @@
       </p:sp>
       <p:sp>
         <p:nvSpPr>
-          <p:cNvPr id="18" name="TextBox 17"/>
+          <p:cNvPr id="20" name="TextBox 19"/>
           <p:cNvSpPr txBox="1"/>
           <p:nvPr/>
         </p:nvSpPr>

--- a/GITA/Pre-Acceleration/2026-5h-AI-for-Startups/day2-slides.pptx
+++ b/GITA/Pre-Acceleration/2026-5h-AI-for-Startups/day2-slides.pptx
@@ -25758,7 +25758,7 @@
                 <a:cs typeface="Sylfaen"/>
                 <a:latin typeface="Sylfaen"/>
               </a:rPr>
-              <a:t>გამოიყენეთ მათი სიტყვები სადესანტო გვერდის სათაურებში.</a:t>
+              <a:t>გამოიყენეთ მათი სიტყვები Landing Page-ის სათაურებში.</a:t>
             </a:r>
           </a:p>
           <a:p>
@@ -35638,7 +35638,7 @@
                 <a:cs typeface="Sylfaen"/>
                 <a:latin typeface="Sylfaen"/>
               </a:rPr>
-              <a:t>სადესანტო გვერდის (Landing Page) ტექსტების სტრუქტურა AIDA-ს მიხედვით:</a:t>
+              <a:t>Landing Page-ის ტექსტების სტრუქტურა AIDA-ს მიხედვით:</a:t>
             </a:r>
           </a:p>
         </p:txBody>
